--- a/Health_First_Week6_Pitch.pptx
+++ b/Health_First_Week6_Pitch.pptx
@@ -14,6 +14,7 @@
     <p:sldId id="262" r:id="rId14"/>
     <p:sldId id="263" r:id="rId15"/>
     <p:sldId id="264" r:id="rId16"/>
+    <p:sldId id="265" r:id="rId17"/>
   </p:sldIdLst>
   <p:sldSz cx="12191695" cy="6858000" type="screen4x3"/>
   <p:notesSz cx="6858000" cy="9144000"/>
@@ -510,7 +511,77 @@
           <a:lstStyle/>
           <a:p>
             <a:r>
-              <a:t>Hook: Kids skip daily health habits because nothing holds them accountable. And it's not just a kid problem.</a:t>
+              <a:t>Open with energy. This is not another parental-control app - it's a reward system.</a:t>
+            </a:r>
+          </a:p>
+        </p:txBody>
+      </p:sp>
+      <p:sp>
+        <p:nvSpPr>
+          <p:cNvPr id="4" name="Slide Number Placeholder 3"/>
+          <p:cNvSpPr>
+            <a:spLocks noGrp="1"/>
+          </p:cNvSpPr>
+          <p:nvPr>
+            <p:ph type="sldNum" idx="5" sz="quarter"/>
+          </p:nvPr>
+        </p:nvSpPr>
+        <p:spPr/>
+      </p:sp>
+    </p:spTree>
+  </p:cSld>
+  <p:clrMapOvr>
+    <a:masterClrMapping/>
+  </p:clrMapOvr>
+</p:notes>
+</file>
+
+<file path=ppt/notesSlides/notesSlide10.xml><?xml version="1.0" encoding="utf-8"?>
+<p:notes xmlns:a="http://schemas.openxmlformats.org/drawingml/2006/main" xmlns:p="http://schemas.openxmlformats.org/presentationml/2006/main" xmlns:r="http://schemas.openxmlformats.org/officeDocument/2006/relationships">
+  <p:cSld>
+    <p:spTree>
+      <p:nvGrpSpPr>
+        <p:cNvPr id="1" name=""/>
+        <p:cNvGrpSpPr/>
+        <p:nvPr/>
+      </p:nvGrpSpPr>
+      <p:grpSpPr>
+        <a:xfrm>
+          <a:off x="0" y="0"/>
+          <a:ext cx="0" cy="0"/>
+          <a:chOff x="0" y="0"/>
+          <a:chExt cx="0" cy="0"/>
+        </a:xfrm>
+      </p:grpSpPr>
+      <p:sp>
+        <p:nvSpPr>
+          <p:cNvPr id="2" name="Slide Image Placeholder 1"/>
+          <p:cNvSpPr>
+            <a:spLocks noGrp="1"/>
+          </p:cNvSpPr>
+          <p:nvPr>
+            <p:ph type="sldImg" idx="2"/>
+          </p:nvPr>
+        </p:nvSpPr>
+        <p:spPr/>
+      </p:sp>
+      <p:sp>
+        <p:nvSpPr>
+          <p:cNvPr id="3" name="Notes Placeholder 2"/>
+          <p:cNvSpPr>
+            <a:spLocks noGrp="1"/>
+          </p:cNvSpPr>
+          <p:nvPr>
+            <p:ph type="body" idx="3" sz="quarter"/>
+          </p:nvPr>
+        </p:nvSpPr>
+        <p:spPr/>
+        <p:txBody>
+          <a:bodyPr/>
+          <a:lstStyle/>
+          <a:p>
+            <a:r>
+              <a:t>End on this line, then stop talking. Let the tagline be the last thing they hear.</a:t>
             </a:r>
           </a:p>
         </p:txBody>
@@ -580,7 +651,7 @@
           <a:lstStyle/>
           <a:p>
             <a:r>
-              <a:t>The problem generalizes beyond kids - this is the finding that shaped the whole reward design in Week 5.</a:t>
+              <a:t>This is the hook. Deliver the quote slowly - it's the line that justifies everything that follows.</a:t>
             </a:r>
           </a:p>
         </p:txBody>
@@ -650,7 +721,7 @@
           <a:lstStyle/>
           <a:p>
             <a:r>
-              <a:t>Walk through the flow left to right. Mention the sleep timing fix as a specific bug we caught and fixed.</a:t>
+              <a:t>This slide is the differentiator judges will remember. Restrict vs Reward.</a:t>
             </a:r>
           </a:p>
         </p:txBody>
@@ -720,7 +791,7 @@
           <a:lstStyle/>
           <a:p>
             <a:r>
-              <a:t>This is the direct Week 5 response to the Week 4 finding - encouraging, not punitive.</a:t>
+              <a:t>Walk the flow left to right, then flag the sleep-timing fix as proof of real engineering rigor.</a:t>
             </a:r>
           </a:p>
         </p:txBody>
@@ -790,7 +861,7 @@
           <a:lstStyle/>
           <a:p>
             <a:r>
-              <a:t>Emphasize the emergency unlock never falsifies progress - it's an honest override, not a cheat.</a:t>
+              <a:t>Say this slide out loud, then switch to the live screen recording / browser demo immediately after.</a:t>
             </a:r>
           </a:p>
         </p:txBody>
@@ -860,7 +931,7 @@
           <a:lstStyle/>
           <a:p>
             <a:r>
-              <a:t>Keep this slide brief in the pitch - judges care more about the product than the stack.</a:t>
+              <a:t>Emphasize this is two products in one - a game for the kid, a dashboard for the parent.</a:t>
             </a:r>
           </a:p>
         </p:txBody>
@@ -930,7 +1001,7 @@
           <a:lstStyle/>
           <a:p>
             <a:r>
-              <a:t>This slide is the throughline of the whole pitch: real feedback led directly to a real design change.</a:t>
+              <a:t>This is the slide that answers 'so what' for judges - why this matters beyond one demo family.</a:t>
             </a:r>
           </a:p>
         </p:txBody>
@@ -1000,7 +1071,7 @@
           <a:lstStyle/>
           <a:p>
             <a:r>
-              <a:t>Read these out loud slowly if this is on screen during the recorded pitch.</a:t>
+              <a:t>Shows judges this was iterated with discipline, not just built once and left alone.</a:t>
             </a:r>
           </a:p>
         </p:txBody>
@@ -1070,7 +1141,7 @@
           <a:lstStyle/>
           <a:p>
             <a:r>
-              <a:t>Close on the tagline - it's the one line judges should remember.</a:t>
+              <a:t>Read these out loud slowly if this is on screen during the recorded pitch.</a:t>
             </a:r>
           </a:p>
         </p:txBody>
@@ -4144,7 +4215,7 @@
         </p:nvSpPr>
         <p:spPr>
           <a:xfrm>
-            <a:off x="914400" y="2331720"/>
+            <a:off x="914400" y="2148840"/>
             <a:ext cx="10332720" cy="1188720"/>
           </a:xfrm>
           <a:prstGeom prst="rect">
@@ -4183,8 +4254,8 @@
         </p:nvSpPr>
         <p:spPr>
           <a:xfrm>
-            <a:off x="914400" y="3429000"/>
-            <a:ext cx="9601200" cy="640080"/>
+            <a:off x="914400" y="3246120"/>
+            <a:ext cx="9875520" cy="822960"/>
           </a:xfrm>
           <a:prstGeom prst="rect">
             <a:avLst/>
@@ -4203,13 +4274,13 @@
               </a:lnSpc>
             </a:pPr>
             <a:r>
-              <a:rPr sz="2000" b="0" i="1">
+              <a:rPr sz="1900" b="0" i="1">
                 <a:solidFill>
                   <a:srgbClr val="DCE8D9"/>
                 </a:solidFill>
                 <a:latin typeface="Calibri"/>
               </a:rPr>
-              <a:t>Turning daily health habits into the price of screen time.</a:t>
+              <a:t>The first screen-time app that rewards health — instead of just restricting screens.</a:t>
             </a:r>
           </a:p>
         </p:txBody>
@@ -4222,8 +4293,8 @@
         </p:nvSpPr>
         <p:spPr>
           <a:xfrm>
-            <a:off x="914400" y="4297680"/>
-            <a:ext cx="3840480" cy="384048"/>
+            <a:off x="914400" y="4343400"/>
+            <a:ext cx="4023360" cy="384048"/>
           </a:xfrm>
           <a:prstGeom prst="roundRect">
             <a:avLst>
@@ -4264,7 +4335,475 @@
                 </a:solidFill>
                 <a:latin typeface="Calibri"/>
               </a:rPr>
-              <a:t>QUTUHAL INNOVATEX 2.0  ·  WEEK 6 PITCH</a:t>
+              <a:t>QUTUHAL INNOVATEX 2.0  ·  FINAL PITCH</a:t>
+            </a:r>
+          </a:p>
+        </p:txBody>
+      </p:sp>
+    </p:spTree>
+  </p:cSld>
+  <p:clrMapOvr>
+    <a:masterClrMapping/>
+  </p:clrMapOvr>
+</p:sld>
+</file>
+
+<file path=ppt/slides/slide10.xml><?xml version="1.0" encoding="utf-8"?>
+<p:sld xmlns:a="http://schemas.openxmlformats.org/drawingml/2006/main" xmlns:p="http://schemas.openxmlformats.org/presentationml/2006/main" xmlns:r="http://schemas.openxmlformats.org/officeDocument/2006/relationships">
+  <p:cSld>
+    <p:bg>
+      <p:bgPr>
+        <a:solidFill>
+          <a:srgbClr val="1F3D2B"/>
+        </a:solidFill>
+        <a:effectLst/>
+      </p:bgPr>
+    </p:bg>
+    <p:spTree>
+      <p:nvGrpSpPr>
+        <p:cNvPr id="1" name=""/>
+        <p:cNvGrpSpPr/>
+        <p:nvPr/>
+      </p:nvGrpSpPr>
+      <p:grpSpPr/>
+      <p:sp>
+        <p:nvSpPr>
+          <p:cNvPr id="2" name="TextBox 1"/>
+          <p:cNvSpPr txBox="1"/>
+          <p:nvPr/>
+        </p:nvSpPr>
+        <p:spPr>
+          <a:xfrm>
+            <a:off x="822960" y="640080"/>
+            <a:ext cx="9601200" cy="822960"/>
+          </a:xfrm>
+          <a:prstGeom prst="rect">
+            <a:avLst/>
+          </a:prstGeom>
+          <a:noFill/>
+        </p:spPr>
+        <p:txBody>
+          <a:bodyPr wrap="square" anchor="t" lIns="0" rIns="0" tIns="0" bIns="0">
+            <a:spAutoFit/>
+          </a:bodyPr>
+          <a:lstStyle/>
+          <a:p>
+            <a:pPr algn="l">
+              <a:lnSpc>
+                <a:spcPct val="115000"/>
+              </a:lnSpc>
+            </a:pPr>
+            <a:r>
+              <a:rPr sz="3600" b="1" i="0">
+                <a:solidFill>
+                  <a:srgbClr val="FFFFFF"/>
+                </a:solidFill>
+                <a:latin typeface="Cambria"/>
+              </a:rPr>
+              <a:t>Why Health First Wins</a:t>
+            </a:r>
+          </a:p>
+        </p:txBody>
+      </p:sp>
+      <p:sp>
+        <p:nvSpPr>
+          <p:cNvPr id="3" name="Oval 2"/>
+          <p:cNvSpPr/>
+          <p:nvPr/>
+        </p:nvSpPr>
+        <p:spPr>
+          <a:xfrm>
+            <a:off x="1097280" y="1828800"/>
+            <a:ext cx="640080" cy="640080"/>
+          </a:xfrm>
+          <a:prstGeom prst="ellipse">
+            <a:avLst/>
+          </a:prstGeom>
+          <a:solidFill>
+            <a:srgbClr val="3E7A5C"/>
+          </a:solidFill>
+          <a:ln>
+            <a:noFill/>
+          </a:ln>
+          <a:effectLst/>
+        </p:spPr>
+        <p:style>
+          <a:lnRef idx="1">
+            <a:schemeClr val="accent1"/>
+          </a:lnRef>
+          <a:fillRef idx="3">
+            <a:schemeClr val="accent1"/>
+          </a:fillRef>
+          <a:effectRef idx="2">
+            <a:schemeClr val="accent1"/>
+          </a:effectRef>
+          <a:fontRef idx="minor">
+            <a:schemeClr val="lt1"/>
+          </a:fontRef>
+        </p:style>
+        <p:txBody>
+          <a:bodyPr rtlCol="0" anchor="ctr" lIns="0" rIns="0" tIns="0" bIns="0" wrap="none"/>
+          <a:lstStyle/>
+          <a:p>
+            <a:pPr algn="ctr"/>
+            <a:r>
+              <a:rPr sz="1900">
+                <a:solidFill>
+                  <a:srgbClr val="FFFFFF"/>
+                </a:solidFill>
+              </a:rPr>
+              <a:t>✓</a:t>
+            </a:r>
+          </a:p>
+        </p:txBody>
+      </p:sp>
+      <p:sp>
+        <p:nvSpPr>
+          <p:cNvPr id="4" name="TextBox 3"/>
+          <p:cNvSpPr txBox="1"/>
+          <p:nvPr/>
+        </p:nvSpPr>
+        <p:spPr>
+          <a:xfrm>
+            <a:off x="2103120" y="1828800"/>
+            <a:ext cx="8961120" cy="640080"/>
+          </a:xfrm>
+          <a:prstGeom prst="rect">
+            <a:avLst/>
+          </a:prstGeom>
+          <a:noFill/>
+        </p:spPr>
+        <p:txBody>
+          <a:bodyPr wrap="square" anchor="ctr" lIns="0" rIns="0" tIns="0" bIns="0">
+            <a:spAutoFit/>
+          </a:bodyPr>
+          <a:lstStyle/>
+          <a:p>
+            <a:pPr algn="l">
+              <a:lnSpc>
+                <a:spcPct val="115000"/>
+              </a:lnSpc>
+            </a:pPr>
+            <a:r>
+              <a:rPr sz="1700" b="0" i="0">
+                <a:solidFill>
+                  <a:srgbClr val="FFFFFF"/>
+                </a:solidFill>
+                <a:latin typeface="Calibri"/>
+              </a:rPr>
+              <a:t>A real problem, validated with real people — not assumed.</a:t>
+            </a:r>
+          </a:p>
+        </p:txBody>
+      </p:sp>
+      <p:sp>
+        <p:nvSpPr>
+          <p:cNvPr id="5" name="Oval 4"/>
+          <p:cNvSpPr/>
+          <p:nvPr/>
+        </p:nvSpPr>
+        <p:spPr>
+          <a:xfrm>
+            <a:off x="1097280" y="2743200"/>
+            <a:ext cx="640080" cy="640080"/>
+          </a:xfrm>
+          <a:prstGeom prst="ellipse">
+            <a:avLst/>
+          </a:prstGeom>
+          <a:solidFill>
+            <a:srgbClr val="3E7A5C"/>
+          </a:solidFill>
+          <a:ln>
+            <a:noFill/>
+          </a:ln>
+          <a:effectLst/>
+        </p:spPr>
+        <p:style>
+          <a:lnRef idx="1">
+            <a:schemeClr val="accent1"/>
+          </a:lnRef>
+          <a:fillRef idx="3">
+            <a:schemeClr val="accent1"/>
+          </a:fillRef>
+          <a:effectRef idx="2">
+            <a:schemeClr val="accent1"/>
+          </a:effectRef>
+          <a:fontRef idx="minor">
+            <a:schemeClr val="lt1"/>
+          </a:fontRef>
+        </p:style>
+        <p:txBody>
+          <a:bodyPr rtlCol="0" anchor="ctr" lIns="0" rIns="0" tIns="0" bIns="0" wrap="none"/>
+          <a:lstStyle/>
+          <a:p>
+            <a:pPr algn="ctr"/>
+            <a:r>
+              <a:rPr sz="1900">
+                <a:solidFill>
+                  <a:srgbClr val="FFFFFF"/>
+                </a:solidFill>
+              </a:rPr>
+              <a:t>✓</a:t>
+            </a:r>
+          </a:p>
+        </p:txBody>
+      </p:sp>
+      <p:sp>
+        <p:nvSpPr>
+          <p:cNvPr id="6" name="TextBox 5"/>
+          <p:cNvSpPr txBox="1"/>
+          <p:nvPr/>
+        </p:nvSpPr>
+        <p:spPr>
+          <a:xfrm>
+            <a:off x="2103120" y="2743200"/>
+            <a:ext cx="8961120" cy="640080"/>
+          </a:xfrm>
+          <a:prstGeom prst="rect">
+            <a:avLst/>
+          </a:prstGeom>
+          <a:noFill/>
+        </p:spPr>
+        <p:txBody>
+          <a:bodyPr wrap="square" anchor="ctr" lIns="0" rIns="0" tIns="0" bIns="0">
+            <a:spAutoFit/>
+          </a:bodyPr>
+          <a:lstStyle/>
+          <a:p>
+            <a:pPr algn="l">
+              <a:lnSpc>
+                <a:spcPct val="115000"/>
+              </a:lnSpc>
+            </a:pPr>
+            <a:r>
+              <a:rPr sz="1700" b="0" i="0">
+                <a:solidFill>
+                  <a:srgbClr val="FFFFFF"/>
+                </a:solidFill>
+                <a:latin typeface="Calibri"/>
+              </a:rPr>
+              <a:t>A real working product — every claim on this deck is a live, clickable feature.</a:t>
+            </a:r>
+          </a:p>
+        </p:txBody>
+      </p:sp>
+      <p:sp>
+        <p:nvSpPr>
+          <p:cNvPr id="7" name="Oval 6"/>
+          <p:cNvSpPr/>
+          <p:nvPr/>
+        </p:nvSpPr>
+        <p:spPr>
+          <a:xfrm>
+            <a:off x="1097280" y="3657599"/>
+            <a:ext cx="640080" cy="640080"/>
+          </a:xfrm>
+          <a:prstGeom prst="ellipse">
+            <a:avLst/>
+          </a:prstGeom>
+          <a:solidFill>
+            <a:srgbClr val="3E7A5C"/>
+          </a:solidFill>
+          <a:ln>
+            <a:noFill/>
+          </a:ln>
+          <a:effectLst/>
+        </p:spPr>
+        <p:style>
+          <a:lnRef idx="1">
+            <a:schemeClr val="accent1"/>
+          </a:lnRef>
+          <a:fillRef idx="3">
+            <a:schemeClr val="accent1"/>
+          </a:fillRef>
+          <a:effectRef idx="2">
+            <a:schemeClr val="accent1"/>
+          </a:effectRef>
+          <a:fontRef idx="minor">
+            <a:schemeClr val="lt1"/>
+          </a:fontRef>
+        </p:style>
+        <p:txBody>
+          <a:bodyPr rtlCol="0" anchor="ctr" lIns="0" rIns="0" tIns="0" bIns="0" wrap="none"/>
+          <a:lstStyle/>
+          <a:p>
+            <a:pPr algn="ctr"/>
+            <a:r>
+              <a:rPr sz="1900">
+                <a:solidFill>
+                  <a:srgbClr val="FFFFFF"/>
+                </a:solidFill>
+              </a:rPr>
+              <a:t>✓</a:t>
+            </a:r>
+          </a:p>
+        </p:txBody>
+      </p:sp>
+      <p:sp>
+        <p:nvSpPr>
+          <p:cNvPr id="8" name="TextBox 7"/>
+          <p:cNvSpPr txBox="1"/>
+          <p:nvPr/>
+        </p:nvSpPr>
+        <p:spPr>
+          <a:xfrm>
+            <a:off x="2103120" y="3657600"/>
+            <a:ext cx="8961120" cy="640080"/>
+          </a:xfrm>
+          <a:prstGeom prst="rect">
+            <a:avLst/>
+          </a:prstGeom>
+          <a:noFill/>
+        </p:spPr>
+        <p:txBody>
+          <a:bodyPr wrap="square" anchor="ctr" lIns="0" rIns="0" tIns="0" bIns="0">
+            <a:spAutoFit/>
+          </a:bodyPr>
+          <a:lstStyle/>
+          <a:p>
+            <a:pPr algn="l">
+              <a:lnSpc>
+                <a:spcPct val="115000"/>
+              </a:lnSpc>
+            </a:pPr>
+            <a:r>
+              <a:rPr sz="1700" b="0" i="0">
+                <a:solidFill>
+                  <a:srgbClr val="FFFFFF"/>
+                </a:solidFill>
+                <a:latin typeface="Calibri"/>
+              </a:rPr>
+              <a:t>A genuinely different model — reward, not restrict.</a:t>
+            </a:r>
+          </a:p>
+        </p:txBody>
+      </p:sp>
+      <p:sp>
+        <p:nvSpPr>
+          <p:cNvPr id="9" name="Oval 8"/>
+          <p:cNvSpPr/>
+          <p:nvPr/>
+        </p:nvSpPr>
+        <p:spPr>
+          <a:xfrm>
+            <a:off x="1097280" y="4572000"/>
+            <a:ext cx="640080" cy="640080"/>
+          </a:xfrm>
+          <a:prstGeom prst="ellipse">
+            <a:avLst/>
+          </a:prstGeom>
+          <a:solidFill>
+            <a:srgbClr val="3E7A5C"/>
+          </a:solidFill>
+          <a:ln>
+            <a:noFill/>
+          </a:ln>
+          <a:effectLst/>
+        </p:spPr>
+        <p:style>
+          <a:lnRef idx="1">
+            <a:schemeClr val="accent1"/>
+          </a:lnRef>
+          <a:fillRef idx="3">
+            <a:schemeClr val="accent1"/>
+          </a:fillRef>
+          <a:effectRef idx="2">
+            <a:schemeClr val="accent1"/>
+          </a:effectRef>
+          <a:fontRef idx="minor">
+            <a:schemeClr val="lt1"/>
+          </a:fontRef>
+        </p:style>
+        <p:txBody>
+          <a:bodyPr rtlCol="0" anchor="ctr" lIns="0" rIns="0" tIns="0" bIns="0" wrap="none"/>
+          <a:lstStyle/>
+          <a:p>
+            <a:pPr algn="ctr"/>
+            <a:r>
+              <a:rPr sz="1900">
+                <a:solidFill>
+                  <a:srgbClr val="FFFFFF"/>
+                </a:solidFill>
+              </a:rPr>
+              <a:t>✓</a:t>
+            </a:r>
+          </a:p>
+        </p:txBody>
+      </p:sp>
+      <p:sp>
+        <p:nvSpPr>
+          <p:cNvPr id="10" name="TextBox 9"/>
+          <p:cNvSpPr txBox="1"/>
+          <p:nvPr/>
+        </p:nvSpPr>
+        <p:spPr>
+          <a:xfrm>
+            <a:off x="2103120" y="4572000"/>
+            <a:ext cx="8961120" cy="640080"/>
+          </a:xfrm>
+          <a:prstGeom prst="rect">
+            <a:avLst/>
+          </a:prstGeom>
+          <a:noFill/>
+        </p:spPr>
+        <p:txBody>
+          <a:bodyPr wrap="square" anchor="ctr" lIns="0" rIns="0" tIns="0" bIns="0">
+            <a:spAutoFit/>
+          </a:bodyPr>
+          <a:lstStyle/>
+          <a:p>
+            <a:pPr algn="l">
+              <a:lnSpc>
+                <a:spcPct val="115000"/>
+              </a:lnSpc>
+            </a:pPr>
+            <a:r>
+              <a:rPr sz="1700" b="0" i="0">
+                <a:solidFill>
+                  <a:srgbClr val="FFFFFF"/>
+                </a:solidFill>
+                <a:latin typeface="Calibri"/>
+              </a:rPr>
+              <a:t>Built to scale beyond one house — any habit, any family, any culture.</a:t>
+            </a:r>
+          </a:p>
+        </p:txBody>
+      </p:sp>
+      <p:sp>
+        <p:nvSpPr>
+          <p:cNvPr id="11" name="TextBox 10"/>
+          <p:cNvSpPr txBox="1"/>
+          <p:nvPr/>
+        </p:nvSpPr>
+        <p:spPr>
+          <a:xfrm>
+            <a:off x="822960" y="5760720"/>
+            <a:ext cx="9601200" cy="640080"/>
+          </a:xfrm>
+          <a:prstGeom prst="rect">
+            <a:avLst/>
+          </a:prstGeom>
+          <a:noFill/>
+        </p:spPr>
+        <p:txBody>
+          <a:bodyPr wrap="square" anchor="t" lIns="0" rIns="0" tIns="0" bIns="0">
+            <a:spAutoFit/>
+          </a:bodyPr>
+          <a:lstStyle/>
+          <a:p>
+            <a:pPr algn="l">
+              <a:lnSpc>
+                <a:spcPct val="115000"/>
+              </a:lnSpc>
+            </a:pPr>
+            <a:r>
+              <a:rPr sz="1500" b="0" i="1">
+                <a:solidFill>
+                  <a:srgbClr val="DCE8D9"/>
+                </a:solidFill>
+                <a:latin typeface="Calibri"/>
+              </a:rPr>
+              <a:t>Health First — making healthy habits the actual price of screen time.</a:t>
             </a:r>
           </a:p>
         </p:txBody>
@@ -4303,8 +4842,8 @@
         </p:nvSpPr>
         <p:spPr>
           <a:xfrm>
-            <a:off x="822960" y="548640"/>
-            <a:ext cx="5486400" cy="548640"/>
+            <a:off x="822960" y="502920"/>
+            <a:ext cx="10332720" cy="914400"/>
           </a:xfrm>
           <a:prstGeom prst="rect">
             <a:avLst/>
@@ -4323,27 +4862,112 @@
               </a:lnSpc>
             </a:pPr>
             <a:r>
-              <a:rPr sz="3000" b="1" i="0">
+              <a:rPr sz="3400" b="1" i="0">
                 <a:solidFill>
                   <a:srgbClr val="1F2D22"/>
                 </a:solidFill>
                 <a:latin typeface="Cambria"/>
               </a:rPr>
-              <a:t>The Problem</a:t>
-            </a:r>
-          </a:p>
-        </p:txBody>
-      </p:sp>
-      <p:sp>
-        <p:nvSpPr>
-          <p:cNvPr id="3" name="TextBox 2"/>
+              <a:t>It's Not Just a Kid Problem.</a:t>
+            </a:r>
+          </a:p>
+        </p:txBody>
+      </p:sp>
+      <p:sp>
+        <p:nvSpPr>
+          <p:cNvPr id="3" name="Rounded Rectangle 2"/>
+          <p:cNvSpPr/>
+          <p:nvPr/>
+        </p:nvSpPr>
+        <p:spPr>
+          <a:xfrm>
+            <a:off x="822960" y="1691640"/>
+            <a:ext cx="5029200" cy="3931920"/>
+          </a:xfrm>
+          <a:prstGeom prst="roundRect">
+            <a:avLst>
+              <a:gd name="adj" fmla="val 10000"/>
+            </a:avLst>
+          </a:prstGeom>
+          <a:solidFill>
+            <a:srgbClr val="ECECEA"/>
+          </a:solidFill>
+          <a:ln>
+            <a:noFill/>
+          </a:ln>
+          <a:effectLst/>
+        </p:spPr>
+        <p:style>
+          <a:lnRef idx="1">
+            <a:schemeClr val="accent1"/>
+          </a:lnRef>
+          <a:fillRef idx="3">
+            <a:schemeClr val="accent1"/>
+          </a:fillRef>
+          <a:effectRef idx="2">
+            <a:schemeClr val="accent1"/>
+          </a:effectRef>
+          <a:fontRef idx="minor">
+            <a:schemeClr val="lt1"/>
+          </a:fontRef>
+        </p:style>
+        <p:txBody>
+          <a:bodyPr rtlCol="0" anchor="ctr"/>
+          <a:lstStyle/>
+          <a:p>
+            <a:pPr algn="ctr"/>
+          </a:p>
+        </p:txBody>
+      </p:sp>
+      <p:sp>
+        <p:nvSpPr>
+          <p:cNvPr id="4" name="TextBox 3"/>
           <p:cNvSpPr txBox="1"/>
           <p:nvPr/>
         </p:nvSpPr>
         <p:spPr>
           <a:xfrm>
-            <a:off x="822960" y="1234440"/>
-            <a:ext cx="5120640" cy="3291840"/>
+            <a:off x="1188720" y="1965960"/>
+            <a:ext cx="4297680" cy="457200"/>
+          </a:xfrm>
+          <a:prstGeom prst="rect">
+            <a:avLst/>
+          </a:prstGeom>
+          <a:noFill/>
+        </p:spPr>
+        <p:txBody>
+          <a:bodyPr wrap="square" anchor="t" lIns="0" rIns="0" tIns="0" bIns="0">
+            <a:spAutoFit/>
+          </a:bodyPr>
+          <a:lstStyle/>
+          <a:p>
+            <a:pPr algn="l">
+              <a:lnSpc>
+                <a:spcPct val="115000"/>
+              </a:lnSpc>
+            </a:pPr>
+            <a:r>
+              <a:rPr sz="1200" b="1" i="0">
+                <a:solidFill>
+                  <a:srgbClr val="8A8F8B"/>
+                </a:solidFill>
+                <a:latin typeface="Calibri"/>
+              </a:rPr>
+              <a:t>THE ASSUMPTION</a:t>
+            </a:r>
+          </a:p>
+        </p:txBody>
+      </p:sp>
+      <p:sp>
+        <p:nvSpPr>
+          <p:cNvPr id="5" name="TextBox 4"/>
+          <p:cNvSpPr txBox="1"/>
+          <p:nvPr/>
+        </p:nvSpPr>
+        <p:spPr>
+          <a:xfrm>
+            <a:off x="1188720" y="2423160"/>
+            <a:ext cx="4297680" cy="1188720"/>
           </a:xfrm>
           <a:prstGeom prst="rect">
             <a:avLst/>
@@ -4362,15 +4986,77 @@
               </a:lnSpc>
             </a:pPr>
             <a:r>
-              <a:rPr sz="1600" b="0" i="0">
+              <a:rPr sz="1500" b="0" i="0">
                 <a:solidFill>
                   <a:srgbClr val="5B6A5F"/>
                 </a:solidFill>
                 <a:latin typeface="Calibri"/>
               </a:rPr>
-              <a:t>Kids skip daily health habits — drinking water, exercising, sleeping on time, eating fruit — because they get distracted by games and apps, and no one checks whether the goal was really done.</a:t>
-            </a:r>
-          </a:p>
+              <a:t>Kids skip water, movement, sleep, and fruit because they're distracted by screens and no one checks.</a:t>
+            </a:r>
+          </a:p>
+        </p:txBody>
+      </p:sp>
+      <p:sp>
+        <p:nvSpPr>
+          <p:cNvPr id="6" name="TextBox 5"/>
+          <p:cNvSpPr txBox="1"/>
+          <p:nvPr/>
+        </p:nvSpPr>
+        <p:spPr>
+          <a:xfrm>
+            <a:off x="1188720" y="3749039"/>
+            <a:ext cx="4297680" cy="457200"/>
+          </a:xfrm>
+          <a:prstGeom prst="rect">
+            <a:avLst/>
+          </a:prstGeom>
+          <a:noFill/>
+        </p:spPr>
+        <p:txBody>
+          <a:bodyPr wrap="square" anchor="t" lIns="0" rIns="0" tIns="0" bIns="0">
+            <a:spAutoFit/>
+          </a:bodyPr>
+          <a:lstStyle/>
+          <a:p>
+            <a:pPr algn="l">
+              <a:lnSpc>
+                <a:spcPct val="115000"/>
+              </a:lnSpc>
+            </a:pPr>
+            <a:r>
+              <a:rPr sz="1200" b="1" i="0">
+                <a:solidFill>
+                  <a:srgbClr val="8A8F8B"/>
+                </a:solidFill>
+                <a:latin typeface="Calibri"/>
+              </a:rPr>
+              <a:t>SO WE TESTED IT</a:t>
+            </a:r>
+          </a:p>
+        </p:txBody>
+      </p:sp>
+      <p:sp>
+        <p:nvSpPr>
+          <p:cNvPr id="7" name="TextBox 6"/>
+          <p:cNvSpPr txBox="1"/>
+          <p:nvPr/>
+        </p:nvSpPr>
+        <p:spPr>
+          <a:xfrm>
+            <a:off x="1188720" y="4206240"/>
+            <a:ext cx="4297680" cy="1188720"/>
+          </a:xfrm>
+          <a:prstGeom prst="rect">
+            <a:avLst/>
+          </a:prstGeom>
+          <a:noFill/>
+        </p:spPr>
+        <p:txBody>
+          <a:bodyPr wrap="square" anchor="t" lIns="0" rIns="0" tIns="0" bIns="0">
+            <a:spAutoFit/>
+          </a:bodyPr>
+          <a:lstStyle/>
           <a:p>
             <a:pPr algn="l">
               <a:lnSpc>
@@ -4378,51 +5064,35 @@
               </a:lnSpc>
             </a:pPr>
             <a:r>
-              <a:rPr sz="1600" b="0" i="0">
+              <a:rPr sz="1500" b="0" i="0">
                 <a:solidFill>
                   <a:srgbClr val="5B6A5F"/>
                 </a:solidFill>
                 <a:latin typeface="Calibri"/>
               </a:rPr>
-              <a:t/>
-            </a:r>
-          </a:p>
-          <a:p>
-            <a:pPr algn="l">
-              <a:lnSpc>
-                <a:spcPct val="130000"/>
-              </a:lnSpc>
-            </a:pPr>
-            <a:r>
-              <a:rPr sz="1600" b="0" i="0">
-                <a:solidFill>
-                  <a:srgbClr val="5B6A5F"/>
-                </a:solidFill>
-                <a:latin typeface="Calibri"/>
-              </a:rPr>
-              <a:t>Skipped repeatedly through childhood, these small habits shape lifelong self-care.</a:t>
-            </a:r>
-          </a:p>
-        </p:txBody>
-      </p:sp>
-      <p:sp>
-        <p:nvSpPr>
-          <p:cNvPr id="4" name="Rounded Rectangle 3"/>
+              <a:t>We asked our own family the same question adults never get asked.</a:t>
+            </a:r>
+          </a:p>
+        </p:txBody>
+      </p:sp>
+      <p:sp>
+        <p:nvSpPr>
+          <p:cNvPr id="8" name="Rounded Rectangle 7"/>
           <p:cNvSpPr/>
           <p:nvPr/>
         </p:nvSpPr>
         <p:spPr>
           <a:xfrm>
-            <a:off x="6400800" y="1234440"/>
-            <a:ext cx="4937760" cy="3383280"/>
+            <a:off x="6126480" y="1691640"/>
+            <a:ext cx="5257800" cy="3931920"/>
           </a:xfrm>
           <a:prstGeom prst="roundRect">
             <a:avLst>
-              <a:gd name="adj" fmla="val 12000"/>
+              <a:gd name="adj" fmla="val 10000"/>
             </a:avLst>
           </a:prstGeom>
           <a:solidFill>
-            <a:srgbClr val="DCE8D9"/>
+            <a:srgbClr val="DD6B42"/>
           </a:solidFill>
           <a:ln>
             <a:noFill/>
@@ -4453,14 +5123,14 @@
       </p:sp>
       <p:sp>
         <p:nvSpPr>
-          <p:cNvPr id="5" name="TextBox 4"/>
+          <p:cNvPr id="9" name="TextBox 8"/>
           <p:cNvSpPr txBox="1"/>
           <p:nvPr/>
         </p:nvSpPr>
         <p:spPr>
           <a:xfrm>
-            <a:off x="6766560" y="1508760"/>
-            <a:ext cx="4206240" cy="457200"/>
+            <a:off x="6492240" y="2011680"/>
+            <a:ext cx="4572000" cy="457200"/>
           </a:xfrm>
           <a:prstGeom prst="rect">
             <a:avLst/>
@@ -4481,25 +5151,25 @@
             <a:r>
               <a:rPr sz="1200" b="1" i="0">
                 <a:solidFill>
-                  <a:srgbClr val="3E7A5C"/>
+                  <a:srgbClr val="F7E1D5"/>
                 </a:solidFill>
                 <a:latin typeface="Calibri"/>
               </a:rPr>
-              <a:t>WEEK 4 FINDING</a:t>
-            </a:r>
-          </a:p>
-        </p:txBody>
-      </p:sp>
-      <p:sp>
-        <p:nvSpPr>
-          <p:cNvPr id="6" name="TextBox 5"/>
+              <a:t>THE FINDING</a:t>
+            </a:r>
+          </a:p>
+        </p:txBody>
+      </p:sp>
+      <p:sp>
+        <p:nvSpPr>
+          <p:cNvPr id="10" name="TextBox 9"/>
           <p:cNvSpPr txBox="1"/>
           <p:nvPr/>
         </p:nvSpPr>
         <p:spPr>
           <a:xfrm>
-            <a:off x="6766560" y="1965960"/>
-            <a:ext cx="4206240" cy="1828800"/>
+            <a:off x="6492240" y="2514600"/>
+            <a:ext cx="4526280" cy="2011680"/>
           </a:xfrm>
           <a:prstGeom prst="rect">
             <a:avLst/>
@@ -4514,31 +5184,31 @@
           <a:p>
             <a:pPr algn="l">
               <a:lnSpc>
-                <a:spcPct val="130000"/>
+                <a:spcPct val="120000"/>
               </a:lnSpc>
             </a:pPr>
             <a:r>
-              <a:rPr sz="1700" b="0" i="1">
-                <a:solidFill>
-                  <a:srgbClr val="2C5A44"/>
+              <a:rPr sz="2600" b="1" i="0">
+                <a:solidFill>
+                  <a:srgbClr val="FFFFFF"/>
                 </a:solidFill>
                 <a:latin typeface="Cambria"/>
               </a:rPr>
-              <a:t>“Asked family members whether they also forget daily health goals — they confirmed it happens to them too.”</a:t>
-            </a:r>
-          </a:p>
-        </p:txBody>
-      </p:sp>
-      <p:sp>
-        <p:nvSpPr>
-          <p:cNvPr id="7" name="TextBox 6"/>
+              <a:t>“They confirmed it happens to them too.”</a:t>
+            </a:r>
+          </a:p>
+        </p:txBody>
+      </p:sp>
+      <p:sp>
+        <p:nvSpPr>
+          <p:cNvPr id="11" name="TextBox 10"/>
           <p:cNvSpPr txBox="1"/>
           <p:nvPr/>
         </p:nvSpPr>
         <p:spPr>
           <a:xfrm>
-            <a:off x="6766560" y="3794760"/>
-            <a:ext cx="4206240" cy="731520"/>
+            <a:off x="6492240" y="4434840"/>
+            <a:ext cx="4526280" cy="1005840"/>
           </a:xfrm>
           <a:prstGeom prst="rect">
             <a:avLst/>
@@ -4553,17 +5223,17 @@
           <a:p>
             <a:pPr algn="l">
               <a:lnSpc>
-                <a:spcPct val="115000"/>
+                <a:spcPct val="125000"/>
               </a:lnSpc>
             </a:pPr>
             <a:r>
-              <a:rPr sz="1300" b="1" i="0">
-                <a:solidFill>
-                  <a:srgbClr val="3E7A5C"/>
+              <a:rPr sz="1400" b="0" i="1">
+                <a:solidFill>
+                  <a:srgbClr val="F7E1D5"/>
                 </a:solidFill>
                 <a:latin typeface="Calibri"/>
               </a:rPr>
-              <a:t>This isn't a kid problem — it's a habit-formation problem across ages.</a:t>
+              <a:t>This isn't a discipline problem in one house. It's a habit-formation problem in every house.</a:t>
             </a:r>
           </a:p>
         </p:txBody>
@@ -4602,8 +5272,8 @@
         </p:nvSpPr>
         <p:spPr>
           <a:xfrm>
-            <a:off x="822960" y="548640"/>
-            <a:ext cx="7315200" cy="548640"/>
+            <a:off x="822960" y="502920"/>
+            <a:ext cx="10332720" cy="731520"/>
           </a:xfrm>
           <a:prstGeom prst="rect">
             <a:avLst/>
@@ -4628,7 +5298,7 @@
                 </a:solidFill>
                 <a:latin typeface="Cambria"/>
               </a:rPr>
-              <a:t>The Solution</a:t>
+              <a:t>Why Screen-Time Apps Don't Work</a:t>
             </a:r>
           </a:p>
         </p:txBody>
@@ -4661,33 +5331,35 @@
               </a:lnSpc>
             </a:pPr>
             <a:r>
-              <a:rPr sz="1600" b="0" i="0">
+              <a:rPr sz="1500" b="0" i="0">
                 <a:solidFill>
                   <a:srgbClr val="5B6A5F"/>
                 </a:solidFill>
                 <a:latin typeface="Calibri"/>
               </a:rPr>
-              <a:t>A daily checklist of health goals — proven honestly — banks screen-time minutes.</a:t>
-            </a:r>
-          </a:p>
-        </p:txBody>
-      </p:sp>
-      <p:sp>
-        <p:nvSpPr>
-          <p:cNvPr id="4" name="Oval 3"/>
+              <a:t>They all take the same approach. We took the opposite one.</a:t>
+            </a:r>
+          </a:p>
+        </p:txBody>
+      </p:sp>
+      <p:sp>
+        <p:nvSpPr>
+          <p:cNvPr id="4" name="Rounded Rectangle 3"/>
           <p:cNvSpPr/>
           <p:nvPr/>
         </p:nvSpPr>
         <p:spPr>
           <a:xfrm>
-            <a:off x="1234440" y="2057400"/>
-            <a:ext cx="1188720" cy="1188720"/>
-          </a:xfrm>
-          <a:prstGeom prst="ellipse">
-            <a:avLst/>
+            <a:off x="822960" y="1920240"/>
+            <a:ext cx="5029200" cy="4114800"/>
+          </a:xfrm>
+          <a:prstGeom prst="roundRect">
+            <a:avLst>
+              <a:gd name="adj" fmla="val 10000"/>
+            </a:avLst>
           </a:prstGeom>
           <a:solidFill>
-            <a:srgbClr val="DCE8D9"/>
+            <a:srgbClr val="ECECEA"/>
           </a:solidFill>
           <a:ln>
             <a:noFill/>
@@ -4709,18 +5381,10 @@
           </a:fontRef>
         </p:style>
         <p:txBody>
-          <a:bodyPr rtlCol="0" anchor="ctr" lIns="0" rIns="0" tIns="0" bIns="0" wrap="none"/>
+          <a:bodyPr rtlCol="0" anchor="ctr"/>
           <a:lstStyle/>
           <a:p>
             <a:pPr algn="ctr"/>
-            <a:r>
-              <a:rPr sz="3600">
-                <a:solidFill>
-                  <a:srgbClr val="3E7A5C"/>
-                </a:solidFill>
-              </a:rPr>
-              <a:t>💧</a:t>
-            </a:r>
           </a:p>
         </p:txBody>
       </p:sp>
@@ -4732,8 +5396,8 @@
         </p:nvSpPr>
         <p:spPr>
           <a:xfrm>
-            <a:off x="1005840" y="3337560"/>
-            <a:ext cx="1645920" cy="411480"/>
+            <a:off x="1097280" y="2148840"/>
+            <a:ext cx="4480560" cy="457200"/>
           </a:xfrm>
           <a:prstGeom prst="rect">
             <a:avLst/>
@@ -4746,39 +5410,184 @@
           </a:bodyPr>
           <a:lstStyle/>
           <a:p>
-            <a:pPr algn="ctr">
+            <a:pPr algn="l">
               <a:lnSpc>
                 <a:spcPct val="115000"/>
               </a:lnSpc>
             </a:pPr>
             <a:r>
-              <a:rPr sz="1500" b="1" i="0">
-                <a:solidFill>
-                  <a:srgbClr val="1F2D22"/>
+              <a:rPr sz="1300" b="1" i="0">
+                <a:solidFill>
+                  <a:srgbClr val="8A8F8B"/>
                 </a:solidFill>
                 <a:latin typeface="Calibri"/>
               </a:rPr>
-              <a:t>Water</a:t>
-            </a:r>
-          </a:p>
-        </p:txBody>
-      </p:sp>
-      <p:sp>
-        <p:nvSpPr>
-          <p:cNvPr id="6" name="Oval 5"/>
+              <a:t>TYPICAL APPS</a:t>
+            </a:r>
+          </a:p>
+        </p:txBody>
+      </p:sp>
+      <p:sp>
+        <p:nvSpPr>
+          <p:cNvPr id="6" name="TextBox 5"/>
+          <p:cNvSpPr txBox="1"/>
+          <p:nvPr/>
+        </p:nvSpPr>
+        <p:spPr>
+          <a:xfrm>
+            <a:off x="1097280" y="2651760"/>
+            <a:ext cx="4480560" cy="3200400"/>
+          </a:xfrm>
+          <a:prstGeom prst="rect">
+            <a:avLst/>
+          </a:prstGeom>
+          <a:noFill/>
+        </p:spPr>
+        <p:txBody>
+          <a:bodyPr wrap="square" lIns="0" rIns="0" tIns="0" bIns="0">
+            <a:spAutoFit/>
+          </a:bodyPr>
+          <a:lstStyle/>
+          <a:p>
+            <a:pPr indent="-201168" marL="201168">
+              <a:lnSpc>
+                <a:spcPct val="115000"/>
+              </a:lnSpc>
+              <a:spcAft>
+                <a:spcPts val="1000"/>
+              </a:spcAft>
+              <a:buClr>
+                <a:srgbClr val="8A8F8B"/>
+              </a:buClr>
+              <a:buFont typeface="Arial"/>
+              <a:buChar char="✗"/>
+            </a:pPr>
+            <a:r>
+              <a:rPr sz="1450">
+                <a:solidFill>
+                  <a:srgbClr val="5B6A5F"/>
+                </a:solidFill>
+                <a:latin typeface="Calibri"/>
+              </a:rPr>
+              <a:t>Restrict access with a hard timer</a:t>
+            </a:r>
+          </a:p>
+          <a:p>
+            <a:pPr indent="-201168" marL="201168">
+              <a:lnSpc>
+                <a:spcPct val="115000"/>
+              </a:lnSpc>
+              <a:spcAft>
+                <a:spcPts val="1000"/>
+              </a:spcAft>
+              <a:buClr>
+                <a:srgbClr val="8A8F8B"/>
+              </a:buClr>
+              <a:buFont typeface="Arial"/>
+              <a:buChar char="✗"/>
+            </a:pPr>
+            <a:r>
+              <a:rPr sz="1450">
+                <a:solidFill>
+                  <a:srgbClr val="5B6A5F"/>
+                </a:solidFill>
+                <a:latin typeface="Calibri"/>
+              </a:rPr>
+              <a:t>Kid feels punished, not motivated</a:t>
+            </a:r>
+          </a:p>
+          <a:p>
+            <a:pPr indent="-201168" marL="201168">
+              <a:lnSpc>
+                <a:spcPct val="115000"/>
+              </a:lnSpc>
+              <a:spcAft>
+                <a:spcPts val="1000"/>
+              </a:spcAft>
+              <a:buClr>
+                <a:srgbClr val="8A8F8B"/>
+              </a:buClr>
+              <a:buFont typeface="Arial"/>
+              <a:buChar char="✗"/>
+            </a:pPr>
+            <a:r>
+              <a:rPr sz="1450">
+                <a:solidFill>
+                  <a:srgbClr val="5B6A5F"/>
+                </a:solidFill>
+                <a:latin typeface="Calibri"/>
+              </a:rPr>
+              <a:t>Parent becomes the enforcer</a:t>
+            </a:r>
+          </a:p>
+          <a:p>
+            <a:pPr indent="-201168" marL="201168">
+              <a:lnSpc>
+                <a:spcPct val="115000"/>
+              </a:lnSpc>
+              <a:spcAft>
+                <a:spcPts val="1000"/>
+              </a:spcAft>
+              <a:buClr>
+                <a:srgbClr val="8A8F8B"/>
+              </a:buClr>
+              <a:buFont typeface="Arial"/>
+              <a:buChar char="✗"/>
+            </a:pPr>
+            <a:r>
+              <a:rPr sz="1450">
+                <a:solidFill>
+                  <a:srgbClr val="5B6A5F"/>
+                </a:solidFill>
+                <a:latin typeface="Calibri"/>
+              </a:rPr>
+              <a:t>One fixed rule for every family</a:t>
+            </a:r>
+          </a:p>
+          <a:p>
+            <a:pPr indent="-201168" marL="201168">
+              <a:lnSpc>
+                <a:spcPct val="115000"/>
+              </a:lnSpc>
+              <a:spcAft>
+                <a:spcPts val="1000"/>
+              </a:spcAft>
+              <a:buClr>
+                <a:srgbClr val="8A8F8B"/>
+              </a:buClr>
+              <a:buFont typeface="Arial"/>
+              <a:buChar char="✗"/>
+            </a:pPr>
+            <a:r>
+              <a:rPr sz="1450">
+                <a:solidFill>
+                  <a:srgbClr val="5B6A5F"/>
+                </a:solidFill>
+                <a:latin typeface="Calibri"/>
+              </a:rPr>
+              <a:t>Screen time becomes a daily fight</a:t>
+            </a:r>
+          </a:p>
+        </p:txBody>
+      </p:sp>
+      <p:sp>
+        <p:nvSpPr>
+          <p:cNvPr id="7" name="Rounded Rectangle 6"/>
           <p:cNvSpPr/>
           <p:nvPr/>
         </p:nvSpPr>
         <p:spPr>
           <a:xfrm>
-            <a:off x="3566160" y="2057400"/>
-            <a:ext cx="1188720" cy="1188720"/>
-          </a:xfrm>
-          <a:prstGeom prst="ellipse">
-            <a:avLst/>
+            <a:off x="6309360" y="1920240"/>
+            <a:ext cx="5074920" cy="4114800"/>
+          </a:xfrm>
+          <a:prstGeom prst="roundRect">
+            <a:avLst>
+              <a:gd name="adj" fmla="val 10000"/>
+            </a:avLst>
           </a:prstGeom>
           <a:solidFill>
-            <a:srgbClr val="F7E1D5"/>
+            <a:srgbClr val="3E7A5C"/>
           </a:solidFill>
           <a:ln>
             <a:noFill/>
@@ -4800,709 +5609,23 @@
           </a:fontRef>
         </p:style>
         <p:txBody>
-          <a:bodyPr rtlCol="0" anchor="ctr" lIns="0" rIns="0" tIns="0" bIns="0" wrap="none"/>
+          <a:bodyPr rtlCol="0" anchor="ctr"/>
           <a:lstStyle/>
           <a:p>
             <a:pPr algn="ctr"/>
-            <a:r>
-              <a:rPr sz="3600">
-                <a:solidFill>
-                  <a:srgbClr val="DD6B42"/>
-                </a:solidFill>
-              </a:rPr>
-              <a:t>🏃</a:t>
-            </a:r>
-          </a:p>
-        </p:txBody>
-      </p:sp>
-      <p:sp>
-        <p:nvSpPr>
-          <p:cNvPr id="7" name="TextBox 6"/>
+          </a:p>
+        </p:txBody>
+      </p:sp>
+      <p:sp>
+        <p:nvSpPr>
+          <p:cNvPr id="8" name="TextBox 7"/>
           <p:cNvSpPr txBox="1"/>
           <p:nvPr/>
         </p:nvSpPr>
         <p:spPr>
           <a:xfrm>
-            <a:off x="3337560" y="3337560"/>
-            <a:ext cx="1645920" cy="411480"/>
-          </a:xfrm>
-          <a:prstGeom prst="rect">
-            <a:avLst/>
-          </a:prstGeom>
-          <a:noFill/>
-        </p:spPr>
-        <p:txBody>
-          <a:bodyPr wrap="square" anchor="t" lIns="0" rIns="0" tIns="0" bIns="0">
-            <a:spAutoFit/>
-          </a:bodyPr>
-          <a:lstStyle/>
-          <a:p>
-            <a:pPr algn="ctr">
-              <a:lnSpc>
-                <a:spcPct val="115000"/>
-              </a:lnSpc>
-            </a:pPr>
-            <a:r>
-              <a:rPr sz="1500" b="1" i="0">
-                <a:solidFill>
-                  <a:srgbClr val="1F2D22"/>
-                </a:solidFill>
-                <a:latin typeface="Calibri"/>
-              </a:rPr>
-              <a:t>Move</a:t>
-            </a:r>
-          </a:p>
-        </p:txBody>
-      </p:sp>
-      <p:sp>
-        <p:nvSpPr>
-          <p:cNvPr id="8" name="Oval 7"/>
-          <p:cNvSpPr/>
-          <p:nvPr/>
-        </p:nvSpPr>
-        <p:spPr>
-          <a:xfrm>
-            <a:off x="5897879" y="2057400"/>
-            <a:ext cx="1188720" cy="1188720"/>
-          </a:xfrm>
-          <a:prstGeom prst="ellipse">
-            <a:avLst/>
-          </a:prstGeom>
-          <a:solidFill>
-            <a:srgbClr val="E2E2F5"/>
-          </a:solidFill>
-          <a:ln>
-            <a:noFill/>
-          </a:ln>
-          <a:effectLst/>
-        </p:spPr>
-        <p:style>
-          <a:lnRef idx="1">
-            <a:schemeClr val="accent1"/>
-          </a:lnRef>
-          <a:fillRef idx="3">
-            <a:schemeClr val="accent1"/>
-          </a:fillRef>
-          <a:effectRef idx="2">
-            <a:schemeClr val="accent1"/>
-          </a:effectRef>
-          <a:fontRef idx="minor">
-            <a:schemeClr val="lt1"/>
-          </a:fontRef>
-        </p:style>
-        <p:txBody>
-          <a:bodyPr rtlCol="0" anchor="ctr" lIns="0" rIns="0" tIns="0" bIns="0" wrap="none"/>
-          <a:lstStyle/>
-          <a:p>
-            <a:pPr algn="ctr"/>
-            <a:r>
-              <a:rPr sz="3600">
-                <a:solidFill>
-                  <a:srgbClr val="6E6FBF"/>
-                </a:solidFill>
-              </a:rPr>
-              <a:t>🌙</a:t>
-            </a:r>
-          </a:p>
-        </p:txBody>
-      </p:sp>
-      <p:sp>
-        <p:nvSpPr>
-          <p:cNvPr id="9" name="TextBox 8"/>
-          <p:cNvSpPr txBox="1"/>
-          <p:nvPr/>
-        </p:nvSpPr>
-        <p:spPr>
-          <a:xfrm>
-            <a:off x="5669279" y="3337560"/>
-            <a:ext cx="1645920" cy="411480"/>
-          </a:xfrm>
-          <a:prstGeom prst="rect">
-            <a:avLst/>
-          </a:prstGeom>
-          <a:noFill/>
-        </p:spPr>
-        <p:txBody>
-          <a:bodyPr wrap="square" anchor="t" lIns="0" rIns="0" tIns="0" bIns="0">
-            <a:spAutoFit/>
-          </a:bodyPr>
-          <a:lstStyle/>
-          <a:p>
-            <a:pPr algn="ctr">
-              <a:lnSpc>
-                <a:spcPct val="115000"/>
-              </a:lnSpc>
-            </a:pPr>
-            <a:r>
-              <a:rPr sz="1500" b="1" i="0">
-                <a:solidFill>
-                  <a:srgbClr val="1F2D22"/>
-                </a:solidFill>
-                <a:latin typeface="Calibri"/>
-              </a:rPr>
-              <a:t>Sleep</a:t>
-            </a:r>
-          </a:p>
-        </p:txBody>
-      </p:sp>
-      <p:sp>
-        <p:nvSpPr>
-          <p:cNvPr id="10" name="Oval 9"/>
-          <p:cNvSpPr/>
-          <p:nvPr/>
-        </p:nvSpPr>
-        <p:spPr>
-          <a:xfrm>
-            <a:off x="8229600" y="2057400"/>
-            <a:ext cx="1188720" cy="1188720"/>
-          </a:xfrm>
-          <a:prstGeom prst="ellipse">
-            <a:avLst/>
-          </a:prstGeom>
-          <a:solidFill>
-            <a:srgbClr val="F7E1D5"/>
-          </a:solidFill>
-          <a:ln>
-            <a:noFill/>
-          </a:ln>
-          <a:effectLst/>
-        </p:spPr>
-        <p:style>
-          <a:lnRef idx="1">
-            <a:schemeClr val="accent1"/>
-          </a:lnRef>
-          <a:fillRef idx="3">
-            <a:schemeClr val="accent1"/>
-          </a:fillRef>
-          <a:effectRef idx="2">
-            <a:schemeClr val="accent1"/>
-          </a:effectRef>
-          <a:fontRef idx="minor">
-            <a:schemeClr val="lt1"/>
-          </a:fontRef>
-        </p:style>
-        <p:txBody>
-          <a:bodyPr rtlCol="0" anchor="ctr" lIns="0" rIns="0" tIns="0" bIns="0" wrap="none"/>
-          <a:lstStyle/>
-          <a:p>
-            <a:pPr algn="ctr"/>
-            <a:r>
-              <a:rPr sz="3600">
-                <a:solidFill>
-                  <a:srgbClr val="DD6B42"/>
-                </a:solidFill>
-              </a:rPr>
-              <a:t>🍎</a:t>
-            </a:r>
-          </a:p>
-        </p:txBody>
-      </p:sp>
-      <p:sp>
-        <p:nvSpPr>
-          <p:cNvPr id="11" name="TextBox 10"/>
-          <p:cNvSpPr txBox="1"/>
-          <p:nvPr/>
-        </p:nvSpPr>
-        <p:spPr>
-          <a:xfrm>
-            <a:off x="8001000" y="3337560"/>
-            <a:ext cx="1645920" cy="411480"/>
-          </a:xfrm>
-          <a:prstGeom prst="rect">
-            <a:avLst/>
-          </a:prstGeom>
-          <a:noFill/>
-        </p:spPr>
-        <p:txBody>
-          <a:bodyPr wrap="square" anchor="t" lIns="0" rIns="0" tIns="0" bIns="0">
-            <a:spAutoFit/>
-          </a:bodyPr>
-          <a:lstStyle/>
-          <a:p>
-            <a:pPr algn="ctr">
-              <a:lnSpc>
-                <a:spcPct val="115000"/>
-              </a:lnSpc>
-            </a:pPr>
-            <a:r>
-              <a:rPr sz="1500" b="1" i="0">
-                <a:solidFill>
-                  <a:srgbClr val="1F2D22"/>
-                </a:solidFill>
-                <a:latin typeface="Calibri"/>
-              </a:rPr>
-              <a:t>Fruit</a:t>
-            </a:r>
-          </a:p>
-        </p:txBody>
-      </p:sp>
-      <p:sp>
-        <p:nvSpPr>
-          <p:cNvPr id="12" name="Rounded Rectangle 11"/>
-          <p:cNvSpPr/>
-          <p:nvPr/>
-        </p:nvSpPr>
-        <p:spPr>
-          <a:xfrm>
-            <a:off x="914400" y="4251960"/>
-            <a:ext cx="1554480" cy="594360"/>
-          </a:xfrm>
-          <a:prstGeom prst="roundRect">
-            <a:avLst>
-              <a:gd name="adj" fmla="val 12000"/>
-            </a:avLst>
-          </a:prstGeom>
-          <a:solidFill>
-            <a:srgbClr val="DCE8D9"/>
-          </a:solidFill>
-          <a:ln>
-            <a:noFill/>
-          </a:ln>
-          <a:effectLst/>
-        </p:spPr>
-        <p:style>
-          <a:lnRef idx="1">
-            <a:schemeClr val="accent1"/>
-          </a:lnRef>
-          <a:fillRef idx="3">
-            <a:schemeClr val="accent1"/>
-          </a:fillRef>
-          <a:effectRef idx="2">
-            <a:schemeClr val="accent1"/>
-          </a:effectRef>
-          <a:fontRef idx="minor">
-            <a:schemeClr val="lt1"/>
-          </a:fontRef>
-        </p:style>
-        <p:txBody>
-          <a:bodyPr rtlCol="0" anchor="ctr"/>
-          <a:lstStyle/>
-          <a:p>
-            <a:pPr algn="ctr"/>
-          </a:p>
-        </p:txBody>
-      </p:sp>
-      <p:sp>
-        <p:nvSpPr>
-          <p:cNvPr id="13" name="TextBox 12"/>
-          <p:cNvSpPr txBox="1"/>
-          <p:nvPr/>
-        </p:nvSpPr>
-        <p:spPr>
-          <a:xfrm>
-            <a:off x="914400" y="4251960"/>
-            <a:ext cx="1554480" cy="594360"/>
-          </a:xfrm>
-          <a:prstGeom prst="rect">
-            <a:avLst/>
-          </a:prstGeom>
-          <a:noFill/>
-        </p:spPr>
-        <p:txBody>
-          <a:bodyPr wrap="square" anchor="ctr" lIns="0" rIns="0" tIns="0" bIns="0">
-            <a:spAutoFit/>
-          </a:bodyPr>
-          <a:lstStyle/>
-          <a:p>
-            <a:pPr algn="ctr">
-              <a:lnSpc>
-                <a:spcPct val="115000"/>
-              </a:lnSpc>
-            </a:pPr>
-            <a:r>
-              <a:rPr sz="1300" b="1" i="0">
-                <a:solidFill>
-                  <a:srgbClr val="2C5A44"/>
-                </a:solidFill>
-                <a:latin typeface="Calibri"/>
-              </a:rPr>
-              <a:t>Checklist</a:t>
-            </a:r>
-          </a:p>
-        </p:txBody>
-      </p:sp>
-      <p:sp>
-        <p:nvSpPr>
-          <p:cNvPr id="14" name="TextBox 13"/>
-          <p:cNvSpPr txBox="1"/>
-          <p:nvPr/>
-        </p:nvSpPr>
-        <p:spPr>
-          <a:xfrm>
-            <a:off x="2468880" y="4343400"/>
-            <a:ext cx="457200" cy="457200"/>
-          </a:xfrm>
-          <a:prstGeom prst="rect">
-            <a:avLst/>
-          </a:prstGeom>
-          <a:noFill/>
-        </p:spPr>
-        <p:txBody>
-          <a:bodyPr wrap="square" anchor="t" lIns="0" rIns="0" tIns="0" bIns="0">
-            <a:spAutoFit/>
-          </a:bodyPr>
-          <a:lstStyle/>
-          <a:p>
-            <a:pPr algn="ctr">
-              <a:lnSpc>
-                <a:spcPct val="115000"/>
-              </a:lnSpc>
-            </a:pPr>
-            <a:r>
-              <a:rPr sz="2000" b="1" i="0">
-                <a:solidFill>
-                  <a:srgbClr val="DD6B42"/>
-                </a:solidFill>
-                <a:latin typeface="Calibri"/>
-              </a:rPr>
-              <a:t>→</a:t>
-            </a:r>
-          </a:p>
-        </p:txBody>
-      </p:sp>
-      <p:sp>
-        <p:nvSpPr>
-          <p:cNvPr id="15" name="Rounded Rectangle 14"/>
-          <p:cNvSpPr/>
-          <p:nvPr/>
-        </p:nvSpPr>
-        <p:spPr>
-          <a:xfrm>
-            <a:off x="2926080" y="4251960"/>
-            <a:ext cx="2286000" cy="594360"/>
-          </a:xfrm>
-          <a:prstGeom prst="roundRect">
-            <a:avLst>
-              <a:gd name="adj" fmla="val 12000"/>
-            </a:avLst>
-          </a:prstGeom>
-          <a:solidFill>
-            <a:srgbClr val="DCE8D9"/>
-          </a:solidFill>
-          <a:ln>
-            <a:noFill/>
-          </a:ln>
-          <a:effectLst/>
-        </p:spPr>
-        <p:style>
-          <a:lnRef idx="1">
-            <a:schemeClr val="accent1"/>
-          </a:lnRef>
-          <a:fillRef idx="3">
-            <a:schemeClr val="accent1"/>
-          </a:fillRef>
-          <a:effectRef idx="2">
-            <a:schemeClr val="accent1"/>
-          </a:effectRef>
-          <a:fontRef idx="minor">
-            <a:schemeClr val="lt1"/>
-          </a:fontRef>
-        </p:style>
-        <p:txBody>
-          <a:bodyPr rtlCol="0" anchor="ctr"/>
-          <a:lstStyle/>
-          <a:p>
-            <a:pPr algn="ctr"/>
-          </a:p>
-        </p:txBody>
-      </p:sp>
-      <p:sp>
-        <p:nvSpPr>
-          <p:cNvPr id="16" name="TextBox 15"/>
-          <p:cNvSpPr txBox="1"/>
-          <p:nvPr/>
-        </p:nvSpPr>
-        <p:spPr>
-          <a:xfrm>
-            <a:off x="2926080" y="4251960"/>
-            <a:ext cx="2286000" cy="594360"/>
-          </a:xfrm>
-          <a:prstGeom prst="rect">
-            <a:avLst/>
-          </a:prstGeom>
-          <a:noFill/>
-        </p:spPr>
-        <p:txBody>
-          <a:bodyPr wrap="square" anchor="ctr" lIns="0" rIns="0" tIns="0" bIns="0">
-            <a:spAutoFit/>
-          </a:bodyPr>
-          <a:lstStyle/>
-          <a:p>
-            <a:pPr algn="ctr">
-              <a:lnSpc>
-                <a:spcPct val="115000"/>
-              </a:lnSpc>
-            </a:pPr>
-            <a:r>
-              <a:rPr sz="1300" b="1" i="0">
-                <a:solidFill>
-                  <a:srgbClr val="2C5A44"/>
-                </a:solidFill>
-                <a:latin typeface="Calibri"/>
-              </a:rPr>
-              <a:t>Photo or PIN Proof</a:t>
-            </a:r>
-          </a:p>
-        </p:txBody>
-      </p:sp>
-      <p:sp>
-        <p:nvSpPr>
-          <p:cNvPr id="17" name="TextBox 16"/>
-          <p:cNvSpPr txBox="1"/>
-          <p:nvPr/>
-        </p:nvSpPr>
-        <p:spPr>
-          <a:xfrm>
-            <a:off x="5212080" y="4343400"/>
-            <a:ext cx="457200" cy="457200"/>
-          </a:xfrm>
-          <a:prstGeom prst="rect">
-            <a:avLst/>
-          </a:prstGeom>
-          <a:noFill/>
-        </p:spPr>
-        <p:txBody>
-          <a:bodyPr wrap="square" anchor="t" lIns="0" rIns="0" tIns="0" bIns="0">
-            <a:spAutoFit/>
-          </a:bodyPr>
-          <a:lstStyle/>
-          <a:p>
-            <a:pPr algn="ctr">
-              <a:lnSpc>
-                <a:spcPct val="115000"/>
-              </a:lnSpc>
-            </a:pPr>
-            <a:r>
-              <a:rPr sz="2000" b="1" i="0">
-                <a:solidFill>
-                  <a:srgbClr val="DD6B42"/>
-                </a:solidFill>
-                <a:latin typeface="Calibri"/>
-              </a:rPr>
-              <a:t>→</a:t>
-            </a:r>
-          </a:p>
-        </p:txBody>
-      </p:sp>
-      <p:sp>
-        <p:nvSpPr>
-          <p:cNvPr id="18" name="Rounded Rectangle 17"/>
-          <p:cNvSpPr/>
-          <p:nvPr/>
-        </p:nvSpPr>
-        <p:spPr>
-          <a:xfrm>
-            <a:off x="5669280" y="4251960"/>
-            <a:ext cx="2103120" cy="594360"/>
-          </a:xfrm>
-          <a:prstGeom prst="roundRect">
-            <a:avLst>
-              <a:gd name="adj" fmla="val 12000"/>
-            </a:avLst>
-          </a:prstGeom>
-          <a:solidFill>
-            <a:srgbClr val="DCE8D9"/>
-          </a:solidFill>
-          <a:ln>
-            <a:noFill/>
-          </a:ln>
-          <a:effectLst/>
-        </p:spPr>
-        <p:style>
-          <a:lnRef idx="1">
-            <a:schemeClr val="accent1"/>
-          </a:lnRef>
-          <a:fillRef idx="3">
-            <a:schemeClr val="accent1"/>
-          </a:fillRef>
-          <a:effectRef idx="2">
-            <a:schemeClr val="accent1"/>
-          </a:effectRef>
-          <a:fontRef idx="minor">
-            <a:schemeClr val="lt1"/>
-          </a:fontRef>
-        </p:style>
-        <p:txBody>
-          <a:bodyPr rtlCol="0" anchor="ctr"/>
-          <a:lstStyle/>
-          <a:p>
-            <a:pPr algn="ctr"/>
-          </a:p>
-        </p:txBody>
-      </p:sp>
-      <p:sp>
-        <p:nvSpPr>
-          <p:cNvPr id="19" name="TextBox 18"/>
-          <p:cNvSpPr txBox="1"/>
-          <p:nvPr/>
-        </p:nvSpPr>
-        <p:spPr>
-          <a:xfrm>
-            <a:off x="5669280" y="4251960"/>
-            <a:ext cx="2103120" cy="594360"/>
-          </a:xfrm>
-          <a:prstGeom prst="rect">
-            <a:avLst/>
-          </a:prstGeom>
-          <a:noFill/>
-        </p:spPr>
-        <p:txBody>
-          <a:bodyPr wrap="square" anchor="ctr" lIns="0" rIns="0" tIns="0" bIns="0">
-            <a:spAutoFit/>
-          </a:bodyPr>
-          <a:lstStyle/>
-          <a:p>
-            <a:pPr algn="ctr">
-              <a:lnSpc>
-                <a:spcPct val="115000"/>
-              </a:lnSpc>
-            </a:pPr>
-            <a:r>
-              <a:rPr sz="1300" b="1" i="0">
-                <a:solidFill>
-                  <a:srgbClr val="2C5A44"/>
-                </a:solidFill>
-                <a:latin typeface="Calibri"/>
-              </a:rPr>
-              <a:t>Minutes Banked</a:t>
-            </a:r>
-          </a:p>
-        </p:txBody>
-      </p:sp>
-      <p:sp>
-        <p:nvSpPr>
-          <p:cNvPr id="20" name="TextBox 19"/>
-          <p:cNvSpPr txBox="1"/>
-          <p:nvPr/>
-        </p:nvSpPr>
-        <p:spPr>
-          <a:xfrm>
-            <a:off x="7772400" y="4343400"/>
-            <a:ext cx="457200" cy="457200"/>
-          </a:xfrm>
-          <a:prstGeom prst="rect">
-            <a:avLst/>
-          </a:prstGeom>
-          <a:noFill/>
-        </p:spPr>
-        <p:txBody>
-          <a:bodyPr wrap="square" anchor="t" lIns="0" rIns="0" tIns="0" bIns="0">
-            <a:spAutoFit/>
-          </a:bodyPr>
-          <a:lstStyle/>
-          <a:p>
-            <a:pPr algn="ctr">
-              <a:lnSpc>
-                <a:spcPct val="115000"/>
-              </a:lnSpc>
-            </a:pPr>
-            <a:r>
-              <a:rPr sz="2000" b="1" i="0">
-                <a:solidFill>
-                  <a:srgbClr val="DD6B42"/>
-                </a:solidFill>
-                <a:latin typeface="Calibri"/>
-              </a:rPr>
-              <a:t>→</a:t>
-            </a:r>
-          </a:p>
-        </p:txBody>
-      </p:sp>
-      <p:sp>
-        <p:nvSpPr>
-          <p:cNvPr id="21" name="Rounded Rectangle 20"/>
-          <p:cNvSpPr/>
-          <p:nvPr/>
-        </p:nvSpPr>
-        <p:spPr>
-          <a:xfrm>
-            <a:off x="8229600" y="4251960"/>
-            <a:ext cx="1554480" cy="594360"/>
-          </a:xfrm>
-          <a:prstGeom prst="roundRect">
-            <a:avLst>
-              <a:gd name="adj" fmla="val 12000"/>
-            </a:avLst>
-          </a:prstGeom>
-          <a:solidFill>
-            <a:srgbClr val="DCE8D9"/>
-          </a:solidFill>
-          <a:ln>
-            <a:noFill/>
-          </a:ln>
-          <a:effectLst/>
-        </p:spPr>
-        <p:style>
-          <a:lnRef idx="1">
-            <a:schemeClr val="accent1"/>
-          </a:lnRef>
-          <a:fillRef idx="3">
-            <a:schemeClr val="accent1"/>
-          </a:fillRef>
-          <a:effectRef idx="2">
-            <a:schemeClr val="accent1"/>
-          </a:effectRef>
-          <a:fontRef idx="minor">
-            <a:schemeClr val="lt1"/>
-          </a:fontRef>
-        </p:style>
-        <p:txBody>
-          <a:bodyPr rtlCol="0" anchor="ctr"/>
-          <a:lstStyle/>
-          <a:p>
-            <a:pPr algn="ctr"/>
-          </a:p>
-        </p:txBody>
-      </p:sp>
-      <p:sp>
-        <p:nvSpPr>
-          <p:cNvPr id="22" name="TextBox 21"/>
-          <p:cNvSpPr txBox="1"/>
-          <p:nvPr/>
-        </p:nvSpPr>
-        <p:spPr>
-          <a:xfrm>
-            <a:off x="8229600" y="4251960"/>
-            <a:ext cx="1554480" cy="594360"/>
-          </a:xfrm>
-          <a:prstGeom prst="rect">
-            <a:avLst/>
-          </a:prstGeom>
-          <a:noFill/>
-        </p:spPr>
-        <p:txBody>
-          <a:bodyPr wrap="square" anchor="ctr" lIns="0" rIns="0" tIns="0" bIns="0">
-            <a:spAutoFit/>
-          </a:bodyPr>
-          <a:lstStyle/>
-          <a:p>
-            <a:pPr algn="ctr">
-              <a:lnSpc>
-                <a:spcPct val="115000"/>
-              </a:lnSpc>
-            </a:pPr>
-            <a:r>
-              <a:rPr sz="1300" b="1" i="0">
-                <a:solidFill>
-                  <a:srgbClr val="2C5A44"/>
-                </a:solidFill>
-                <a:latin typeface="Calibri"/>
-              </a:rPr>
-              <a:t>Unlock</a:t>
-            </a:r>
-          </a:p>
-        </p:txBody>
-      </p:sp>
-      <p:sp>
-        <p:nvSpPr>
-          <p:cNvPr id="23" name="TextBox 22"/>
-          <p:cNvSpPr txBox="1"/>
-          <p:nvPr/>
-        </p:nvSpPr>
-        <p:spPr>
-          <a:xfrm>
-            <a:off x="822960" y="5212080"/>
-            <a:ext cx="10332720" cy="1097280"/>
+            <a:off x="6583680" y="2148840"/>
+            <a:ext cx="4480560" cy="457200"/>
           </a:xfrm>
           <a:prstGeom prst="rect">
             <a:avLst/>
@@ -5521,13 +5644,156 @@
               </a:lnSpc>
             </a:pPr>
             <a:r>
-              <a:rPr sz="1300" b="0" i="1">
-                <a:solidFill>
-                  <a:srgbClr val="5B6A5F"/>
+              <a:rPr sz="1300" b="1" i="0">
+                <a:solidFill>
+                  <a:srgbClr val="DCE8D9"/>
                 </a:solidFill>
                 <a:latin typeface="Calibri"/>
               </a:rPr>
-              <a:t>Sleep is the one exception: it's checked each morning about last night's bedtime, not at night — so the reward window is never gated on something unverifiable until after bedtime.</a:t>
+              <a:t>HEALTH FIRST</a:t>
+            </a:r>
+          </a:p>
+        </p:txBody>
+      </p:sp>
+      <p:sp>
+        <p:nvSpPr>
+          <p:cNvPr id="9" name="TextBox 8"/>
+          <p:cNvSpPr txBox="1"/>
+          <p:nvPr/>
+        </p:nvSpPr>
+        <p:spPr>
+          <a:xfrm>
+            <a:off x="6583680" y="2651760"/>
+            <a:ext cx="4480560" cy="3200400"/>
+          </a:xfrm>
+          <a:prstGeom prst="rect">
+            <a:avLst/>
+          </a:prstGeom>
+          <a:noFill/>
+        </p:spPr>
+        <p:txBody>
+          <a:bodyPr wrap="square" lIns="0" rIns="0" tIns="0" bIns="0">
+            <a:spAutoFit/>
+          </a:bodyPr>
+          <a:lstStyle/>
+          <a:p>
+            <a:pPr indent="-201168" marL="201168">
+              <a:lnSpc>
+                <a:spcPct val="115000"/>
+              </a:lnSpc>
+              <a:spcAft>
+                <a:spcPts val="1000"/>
+              </a:spcAft>
+              <a:buClr>
+                <a:srgbClr val="FFFFFF"/>
+              </a:buClr>
+              <a:buFont typeface="Arial"/>
+              <a:buChar char="✓"/>
+            </a:pPr>
+            <a:r>
+              <a:rPr sz="1450">
+                <a:solidFill>
+                  <a:srgbClr val="FFFFFF"/>
+                </a:solidFill>
+                <a:latin typeface="Calibri"/>
+              </a:rPr>
+              <a:t>Rewards healthy habits with earned time</a:t>
+            </a:r>
+          </a:p>
+          <a:p>
+            <a:pPr indent="-201168" marL="201168">
+              <a:lnSpc>
+                <a:spcPct val="115000"/>
+              </a:lnSpc>
+              <a:spcAft>
+                <a:spcPts val="1000"/>
+              </a:spcAft>
+              <a:buClr>
+                <a:srgbClr val="FFFFFF"/>
+              </a:buClr>
+              <a:buFont typeface="Arial"/>
+              <a:buChar char="✓"/>
+            </a:pPr>
+            <a:r>
+              <a:rPr sz="1450">
+                <a:solidFill>
+                  <a:srgbClr val="FFFFFF"/>
+                </a:solidFill>
+                <a:latin typeface="Calibri"/>
+              </a:rPr>
+              <a:t>Kid feels motivated by immediate credit</a:t>
+            </a:r>
+          </a:p>
+          <a:p>
+            <a:pPr indent="-201168" marL="201168">
+              <a:lnSpc>
+                <a:spcPct val="115000"/>
+              </a:lnSpc>
+              <a:spcAft>
+                <a:spcPts val="1000"/>
+              </a:spcAft>
+              <a:buClr>
+                <a:srgbClr val="FFFFFF"/>
+              </a:buClr>
+              <a:buFont typeface="Arial"/>
+              <a:buChar char="✓"/>
+            </a:pPr>
+            <a:r>
+              <a:rPr sz="1450">
+                <a:solidFill>
+                  <a:srgbClr val="FFFFFF"/>
+                </a:solidFill>
+                <a:latin typeface="Calibri"/>
+              </a:rPr>
+              <a:t>Parent becomes a coach, not a warden</a:t>
+            </a:r>
+          </a:p>
+          <a:p>
+            <a:pPr indent="-201168" marL="201168">
+              <a:lnSpc>
+                <a:spcPct val="115000"/>
+              </a:lnSpc>
+              <a:spcAft>
+                <a:spcPts val="1000"/>
+              </a:spcAft>
+              <a:buClr>
+                <a:srgbClr val="FFFFFF"/>
+              </a:buClr>
+              <a:buFont typeface="Arial"/>
+              <a:buChar char="✓"/>
+            </a:pPr>
+            <a:r>
+              <a:rPr sz="1450">
+                <a:solidFill>
+                  <a:srgbClr val="FFFFFF"/>
+                </a:solidFill>
+                <a:latin typeface="Calibri"/>
+              </a:rPr>
+              <a:t>Every goal and reward is configurable</a:t>
+            </a:r>
+          </a:p>
+          <a:p>
+            <a:pPr indent="-201168" marL="201168">
+              <a:lnSpc>
+                <a:spcPct val="115000"/>
+              </a:lnSpc>
+              <a:spcAft>
+                <a:spcPts val="1000"/>
+              </a:spcAft>
+              <a:buClr>
+                <a:srgbClr val="FFFFFF"/>
+              </a:buClr>
+              <a:buFont typeface="Arial"/>
+              <a:buChar char="✓"/>
+            </a:pPr>
+            <a:r>
+              <a:rPr sz="1450">
+                <a:solidFill>
+                  <a:srgbClr val="FFFFFF"/>
+                </a:solidFill>
+                <a:latin typeface="Calibri"/>
+              </a:rPr>
+              <a:t>Screen time becomes a shared goal</a:t>
             </a:r>
           </a:p>
         </p:txBody>
@@ -5566,7 +5832,7 @@
         </p:nvSpPr>
         <p:spPr>
           <a:xfrm>
-            <a:off x="822960" y="548640"/>
+            <a:off x="822960" y="502920"/>
             <a:ext cx="7315200" cy="548640"/>
           </a:xfrm>
           <a:prstGeom prst="rect">
@@ -5592,7 +5858,7 @@
                 </a:solidFill>
                 <a:latin typeface="Cambria"/>
               </a:rPr>
-              <a:t>An Encouraging Reward System</a:t>
+              <a:t>How It Works</a:t>
             </a:r>
           </a:p>
         </p:txBody>
@@ -5605,8 +5871,8 @@
         </p:nvSpPr>
         <p:spPr>
           <a:xfrm>
-            <a:off x="822960" y="1188720"/>
-            <a:ext cx="5486400" cy="548640"/>
+            <a:off x="822960" y="1143000"/>
+            <a:ext cx="9601200" cy="548640"/>
           </a:xfrm>
           <a:prstGeom prst="rect">
             <a:avLst/>
@@ -5631,26 +5897,24 @@
                 </a:solidFill>
                 <a:latin typeface="Calibri"/>
               </a:rPr>
-              <a:t>Per-goal minute banking replaced an all-or-nothing lock.</a:t>
-            </a:r>
-          </a:p>
-        </p:txBody>
-      </p:sp>
-      <p:sp>
-        <p:nvSpPr>
-          <p:cNvPr id="4" name="Rounded Rectangle 3"/>
+              <a:t>A daily checklist of health goals — proven honestly — banks screen time.</a:t>
+            </a:r>
+          </a:p>
+        </p:txBody>
+      </p:sp>
+      <p:sp>
+        <p:nvSpPr>
+          <p:cNvPr id="4" name="Oval 3"/>
           <p:cNvSpPr/>
           <p:nvPr/>
         </p:nvSpPr>
         <p:spPr>
           <a:xfrm>
-            <a:off x="822960" y="1874519"/>
-            <a:ext cx="5120640" cy="4206240"/>
-          </a:xfrm>
-          <a:prstGeom prst="roundRect">
-            <a:avLst>
-              <a:gd name="adj" fmla="val 12000"/>
-            </a:avLst>
+            <a:off x="1280160" y="1965960"/>
+            <a:ext cx="1097280" cy="1097280"/>
+          </a:xfrm>
+          <a:prstGeom prst="ellipse">
+            <a:avLst/>
           </a:prstGeom>
           <a:solidFill>
             <a:srgbClr val="DCE8D9"/>
@@ -5675,10 +5939,18 @@
           </a:fontRef>
         </p:style>
         <p:txBody>
-          <a:bodyPr rtlCol="0" anchor="ctr"/>
+          <a:bodyPr rtlCol="0" anchor="ctr" lIns="0" rIns="0" tIns="0" bIns="0" wrap="none"/>
           <a:lstStyle/>
           <a:p>
             <a:pPr algn="ctr"/>
+            <a:r>
+              <a:rPr sz="3300">
+                <a:solidFill>
+                  <a:srgbClr val="3E7A5C"/>
+                </a:solidFill>
+              </a:rPr>
+              <a:t>💧</a:t>
+            </a:r>
           </a:p>
         </p:txBody>
       </p:sp>
@@ -5690,8 +5962,8 @@
         </p:nvSpPr>
         <p:spPr>
           <a:xfrm>
-            <a:off x="1188720" y="2148840"/>
-            <a:ext cx="4480560" cy="457200"/>
+            <a:off x="1005840" y="3154680"/>
+            <a:ext cx="1645920" cy="365760"/>
           </a:xfrm>
           <a:prstGeom prst="rect">
             <a:avLst/>
@@ -5704,193 +5976,36 @@
           </a:bodyPr>
           <a:lstStyle/>
           <a:p>
-            <a:pPr algn="l">
+            <a:pPr algn="ctr">
               <a:lnSpc>
                 <a:spcPct val="115000"/>
               </a:lnSpc>
             </a:pPr>
             <a:r>
-              <a:rPr sz="1200" b="1" i="0">
-                <a:solidFill>
-                  <a:srgbClr val="3E7A5C"/>
+              <a:rPr sz="1400" b="1" i="0">
+                <a:solidFill>
+                  <a:srgbClr val="1F2D22"/>
                 </a:solidFill>
                 <a:latin typeface="Calibri"/>
               </a:rPr>
-              <a:t>EVERY GOAL BANKS TIME</a:t>
-            </a:r>
-          </a:p>
-        </p:txBody>
-      </p:sp>
-      <p:sp>
-        <p:nvSpPr>
-          <p:cNvPr id="6" name="TextBox 5"/>
-          <p:cNvSpPr txBox="1"/>
-          <p:nvPr/>
-        </p:nvSpPr>
-        <p:spPr>
-          <a:xfrm>
-            <a:off x="1188720" y="2651760"/>
-            <a:ext cx="4480560" cy="3200400"/>
-          </a:xfrm>
-          <a:prstGeom prst="rect">
+              <a:t>Water</a:t>
+            </a:r>
+          </a:p>
+        </p:txBody>
+      </p:sp>
+      <p:sp>
+        <p:nvSpPr>
+          <p:cNvPr id="6" name="Oval 5"/>
+          <p:cNvSpPr/>
+          <p:nvPr/>
+        </p:nvSpPr>
+        <p:spPr>
+          <a:xfrm>
+            <a:off x="3611879" y="1965960"/>
+            <a:ext cx="1097280" cy="1097280"/>
+          </a:xfrm>
+          <a:prstGeom prst="ellipse">
             <a:avLst/>
-          </a:prstGeom>
-          <a:noFill/>
-        </p:spPr>
-        <p:txBody>
-          <a:bodyPr wrap="square" lIns="0" rIns="0" tIns="0" bIns="0">
-            <a:spAutoFit/>
-          </a:bodyPr>
-          <a:lstStyle/>
-          <a:p>
-            <a:pPr indent="-201168" marL="201168">
-              <a:lnSpc>
-                <a:spcPct val="115000"/>
-              </a:lnSpc>
-              <a:spcAft>
-                <a:spcPts val="1000"/>
-              </a:spcAft>
-              <a:buClr>
-                <a:srgbClr val="3E7A5C"/>
-              </a:buClr>
-              <a:buFont typeface="Arial"/>
-              <a:buChar char="•"/>
-            </a:pPr>
-            <a:r>
-              <a:rPr b="1" sz="1400">
-                <a:solidFill>
-                  <a:srgbClr val="3E7A5C"/>
-                </a:solidFill>
-                <a:latin typeface="Calibri"/>
-              </a:rPr>
-              <a:t>Immediate reward — </a:t>
-            </a:r>
-            <a:r>
-              <a:rPr sz="1400">
-                <a:solidFill>
-                  <a:srgbClr val="1F2D22"/>
-                </a:solidFill>
-                <a:latin typeface="Calibri"/>
-              </a:rPr>
-              <a:t>each completed goal banks parent-set minutes right away, not at day's end.</a:t>
-            </a:r>
-          </a:p>
-          <a:p>
-            <a:pPr indent="-201168" marL="201168">
-              <a:lnSpc>
-                <a:spcPct val="115000"/>
-              </a:lnSpc>
-              <a:spcAft>
-                <a:spcPts val="1000"/>
-              </a:spcAft>
-              <a:buClr>
-                <a:srgbClr val="3E7A5C"/>
-              </a:buClr>
-              <a:buFont typeface="Arial"/>
-              <a:buChar char="•"/>
-            </a:pPr>
-            <a:r>
-              <a:rPr b="1" sz="1400">
-                <a:solidFill>
-                  <a:srgbClr val="3E7A5C"/>
-                </a:solidFill>
-                <a:latin typeface="Calibri"/>
-              </a:rPr>
-              <a:t>Fair to partial effort — </a:t>
-            </a:r>
-            <a:r>
-              <a:rPr sz="1400">
-                <a:solidFill>
-                  <a:srgbClr val="1F2D22"/>
-                </a:solidFill>
-                <a:latin typeface="Calibri"/>
-              </a:rPr>
-              <a:t>missing one goal no longer erases the whole day's reward.</a:t>
-            </a:r>
-          </a:p>
-          <a:p>
-            <a:pPr indent="-201168" marL="201168">
-              <a:lnSpc>
-                <a:spcPct val="115000"/>
-              </a:lnSpc>
-              <a:spcAft>
-                <a:spcPts val="1000"/>
-              </a:spcAft>
-              <a:buClr>
-                <a:srgbClr val="3E7A5C"/>
-              </a:buClr>
-              <a:buFont typeface="Arial"/>
-              <a:buChar char="•"/>
-            </a:pPr>
-            <a:r>
-              <a:rPr b="1" sz="1400">
-                <a:solidFill>
-                  <a:srgbClr val="3E7A5C"/>
-                </a:solidFill>
-                <a:latin typeface="Calibri"/>
-              </a:rPr>
-              <a:t>Still a big finish — </a:t>
-            </a:r>
-            <a:r>
-              <a:rPr sz="1400">
-                <a:solidFill>
-                  <a:srgbClr val="1F2D22"/>
-                </a:solidFill>
-                <a:latin typeface="Calibri"/>
-              </a:rPr>
-              <a:t>complete every goal and the day becomes Unlimited.</a:t>
-            </a:r>
-          </a:p>
-          <a:p>
-            <a:pPr indent="-201168" marL="201168">
-              <a:lnSpc>
-                <a:spcPct val="115000"/>
-              </a:lnSpc>
-              <a:spcAft>
-                <a:spcPts val="1000"/>
-              </a:spcAft>
-              <a:buClr>
-                <a:srgbClr val="3E7A5C"/>
-              </a:buClr>
-              <a:buFont typeface="Arial"/>
-              <a:buChar char="•"/>
-            </a:pPr>
-            <a:r>
-              <a:rPr b="1" sz="1400">
-                <a:solidFill>
-                  <a:srgbClr val="3E7A5C"/>
-                </a:solidFill>
-                <a:latin typeface="Calibri"/>
-              </a:rPr>
-              <a:t>Parent-configurable — </a:t>
-            </a:r>
-            <a:r>
-              <a:rPr sz="1400">
-                <a:solidFill>
-                  <a:srgbClr val="1F2D22"/>
-                </a:solidFill>
-                <a:latin typeface="Calibri"/>
-              </a:rPr>
-              <a:t>each goal's reward minutes are editable per family.</a:t>
-            </a:r>
-          </a:p>
-        </p:txBody>
-      </p:sp>
-      <p:sp>
-        <p:nvSpPr>
-          <p:cNvPr id="7" name="Rounded Rectangle 6"/>
-          <p:cNvSpPr/>
-          <p:nvPr/>
-        </p:nvSpPr>
-        <p:spPr>
-          <a:xfrm>
-            <a:off x="6263640" y="1874519"/>
-            <a:ext cx="5120640" cy="4206240"/>
-          </a:xfrm>
-          <a:prstGeom prst="roundRect">
-            <a:avLst>
-              <a:gd name="adj" fmla="val 12000"/>
-            </a:avLst>
           </a:prstGeom>
           <a:solidFill>
             <a:srgbClr val="F7E1D5"/>
@@ -5915,23 +6030,31 @@
           </a:fontRef>
         </p:style>
         <p:txBody>
-          <a:bodyPr rtlCol="0" anchor="ctr"/>
+          <a:bodyPr rtlCol="0" anchor="ctr" lIns="0" rIns="0" tIns="0" bIns="0" wrap="none"/>
           <a:lstStyle/>
           <a:p>
             <a:pPr algn="ctr"/>
-          </a:p>
-        </p:txBody>
-      </p:sp>
-      <p:sp>
-        <p:nvSpPr>
-          <p:cNvPr id="8" name="TextBox 7"/>
+            <a:r>
+              <a:rPr sz="3300">
+                <a:solidFill>
+                  <a:srgbClr val="DD6B42"/>
+                </a:solidFill>
+              </a:rPr>
+              <a:t>🏃</a:t>
+            </a:r>
+          </a:p>
+        </p:txBody>
+      </p:sp>
+      <p:sp>
+        <p:nvSpPr>
+          <p:cNvPr id="7" name="TextBox 6"/>
           <p:cNvSpPr txBox="1"/>
           <p:nvPr/>
         </p:nvSpPr>
         <p:spPr>
           <a:xfrm>
-            <a:off x="6629400" y="2148840"/>
-            <a:ext cx="4480560" cy="457200"/>
+            <a:off x="3337560" y="3154680"/>
+            <a:ext cx="1645920" cy="365760"/>
           </a:xfrm>
           <a:prstGeom prst="rect">
             <a:avLst/>
@@ -5944,19 +6067,71 @@
           </a:bodyPr>
           <a:lstStyle/>
           <a:p>
-            <a:pPr algn="l">
+            <a:pPr algn="ctr">
               <a:lnSpc>
                 <a:spcPct val="115000"/>
               </a:lnSpc>
             </a:pPr>
             <a:r>
-              <a:rPr sz="1200" b="1" i="0">
-                <a:solidFill>
-                  <a:srgbClr val="DD6B42"/>
+              <a:rPr sz="1400" b="1" i="0">
+                <a:solidFill>
+                  <a:srgbClr val="1F2D22"/>
                 </a:solidFill>
                 <a:latin typeface="Calibri"/>
               </a:rPr>
-              <a:t>SPENDING THE TIME</a:t>
+              <a:t>Move</a:t>
+            </a:r>
+          </a:p>
+        </p:txBody>
+      </p:sp>
+      <p:sp>
+        <p:nvSpPr>
+          <p:cNvPr id="8" name="Oval 7"/>
+          <p:cNvSpPr/>
+          <p:nvPr/>
+        </p:nvSpPr>
+        <p:spPr>
+          <a:xfrm>
+            <a:off x="5943600" y="1965960"/>
+            <a:ext cx="1097280" cy="1097280"/>
+          </a:xfrm>
+          <a:prstGeom prst="ellipse">
+            <a:avLst/>
+          </a:prstGeom>
+          <a:solidFill>
+            <a:srgbClr val="E2E2F5"/>
+          </a:solidFill>
+          <a:ln>
+            <a:noFill/>
+          </a:ln>
+          <a:effectLst/>
+        </p:spPr>
+        <p:style>
+          <a:lnRef idx="1">
+            <a:schemeClr val="accent1"/>
+          </a:lnRef>
+          <a:fillRef idx="3">
+            <a:schemeClr val="accent1"/>
+          </a:fillRef>
+          <a:effectRef idx="2">
+            <a:schemeClr val="accent1"/>
+          </a:effectRef>
+          <a:fontRef idx="minor">
+            <a:schemeClr val="lt1"/>
+          </a:fontRef>
+        </p:style>
+        <p:txBody>
+          <a:bodyPr rtlCol="0" anchor="ctr" lIns="0" rIns="0" tIns="0" bIns="0" wrap="none"/>
+          <a:lstStyle/>
+          <a:p>
+            <a:pPr algn="ctr"/>
+            <a:r>
+              <a:rPr sz="3300">
+                <a:solidFill>
+                  <a:srgbClr val="6E6FBF"/>
+                </a:solidFill>
+              </a:rPr>
+              <a:t>🌙</a:t>
             </a:r>
           </a:p>
         </p:txBody>
@@ -5969,8 +6144,8 @@
         </p:nvSpPr>
         <p:spPr>
           <a:xfrm>
-            <a:off x="6629400" y="2651760"/>
-            <a:ext cx="4480560" cy="3200400"/>
+            <a:off x="5669279" y="3154680"/>
+            <a:ext cx="1645920" cy="365760"/>
           </a:xfrm>
           <a:prstGeom prst="rect">
             <a:avLst/>
@@ -5978,140 +6153,657 @@
           <a:noFill/>
         </p:spPr>
         <p:txBody>
-          <a:bodyPr wrap="square" lIns="0" rIns="0" tIns="0" bIns="0">
+          <a:bodyPr wrap="square" anchor="t" lIns="0" rIns="0" tIns="0" bIns="0">
             <a:spAutoFit/>
           </a:bodyPr>
           <a:lstStyle/>
           <a:p>
-            <a:pPr indent="-201168" marL="201168">
+            <a:pPr algn="ctr">
               <a:lnSpc>
                 <a:spcPct val="115000"/>
               </a:lnSpc>
-              <a:spcAft>
-                <a:spcPts val="1000"/>
-              </a:spcAft>
-              <a:buClr>
-                <a:srgbClr val="3E7A5C"/>
-              </a:buClr>
-              <a:buFont typeface="Arial"/>
-              <a:buChar char="•"/>
             </a:pPr>
             <a:r>
-              <a:rPr b="1" sz="1400">
-                <a:solidFill>
-                  <a:srgbClr val="3E7A5C"/>
+              <a:rPr sz="1400" b="1" i="0">
+                <a:solidFill>
+                  <a:srgbClr val="1F2D22"/>
                 </a:solidFill>
                 <a:latin typeface="Calibri"/>
               </a:rPr>
-              <a:t>Live countdown — </a:t>
-            </a:r>
-            <a:r>
-              <a:rPr sz="1400">
-                <a:solidFill>
-                  <a:srgbClr val="1F2D22"/>
-                </a:solidFill>
-                <a:latin typeface="Calibri"/>
-              </a:rPr>
-              <a:t>tapping Games/YouTube starts a real timer against the banked balance.</a:t>
-            </a:r>
-          </a:p>
-          <a:p>
-            <a:pPr indent="-201168" marL="201168">
+              <a:t>Sleep</a:t>
+            </a:r>
+          </a:p>
+        </p:txBody>
+      </p:sp>
+      <p:sp>
+        <p:nvSpPr>
+          <p:cNvPr id="10" name="Oval 9"/>
+          <p:cNvSpPr/>
+          <p:nvPr/>
+        </p:nvSpPr>
+        <p:spPr>
+          <a:xfrm>
+            <a:off x="8275320" y="1965960"/>
+            <a:ext cx="1097280" cy="1097280"/>
+          </a:xfrm>
+          <a:prstGeom prst="ellipse">
+            <a:avLst/>
+          </a:prstGeom>
+          <a:solidFill>
+            <a:srgbClr val="F7E1D5"/>
+          </a:solidFill>
+          <a:ln>
+            <a:noFill/>
+          </a:ln>
+          <a:effectLst/>
+        </p:spPr>
+        <p:style>
+          <a:lnRef idx="1">
+            <a:schemeClr val="accent1"/>
+          </a:lnRef>
+          <a:fillRef idx="3">
+            <a:schemeClr val="accent1"/>
+          </a:fillRef>
+          <a:effectRef idx="2">
+            <a:schemeClr val="accent1"/>
+          </a:effectRef>
+          <a:fontRef idx="minor">
+            <a:schemeClr val="lt1"/>
+          </a:fontRef>
+        </p:style>
+        <p:txBody>
+          <a:bodyPr rtlCol="0" anchor="ctr" lIns="0" rIns="0" tIns="0" bIns="0" wrap="none"/>
+          <a:lstStyle/>
+          <a:p>
+            <a:pPr algn="ctr"/>
+            <a:r>
+              <a:rPr sz="3300">
+                <a:solidFill>
+                  <a:srgbClr val="DD6B42"/>
+                </a:solidFill>
+              </a:rPr>
+              <a:t>🍎</a:t>
+            </a:r>
+          </a:p>
+        </p:txBody>
+      </p:sp>
+      <p:sp>
+        <p:nvSpPr>
+          <p:cNvPr id="11" name="TextBox 10"/>
+          <p:cNvSpPr txBox="1"/>
+          <p:nvPr/>
+        </p:nvSpPr>
+        <p:spPr>
+          <a:xfrm>
+            <a:off x="8001000" y="3154680"/>
+            <a:ext cx="1645920" cy="365760"/>
+          </a:xfrm>
+          <a:prstGeom prst="rect">
+            <a:avLst/>
+          </a:prstGeom>
+          <a:noFill/>
+        </p:spPr>
+        <p:txBody>
+          <a:bodyPr wrap="square" anchor="t" lIns="0" rIns="0" tIns="0" bIns="0">
+            <a:spAutoFit/>
+          </a:bodyPr>
+          <a:lstStyle/>
+          <a:p>
+            <a:pPr algn="ctr">
               <a:lnSpc>
                 <a:spcPct val="115000"/>
               </a:lnSpc>
-              <a:spcAft>
-                <a:spcPts val="1000"/>
-              </a:spcAft>
-              <a:buClr>
-                <a:srgbClr val="3E7A5C"/>
-              </a:buClr>
-              <a:buFont typeface="Arial"/>
-              <a:buChar char="•"/>
             </a:pPr>
             <a:r>
-              <a:rPr b="1" sz="1400">
-                <a:solidFill>
-                  <a:srgbClr val="3E7A5C"/>
+              <a:rPr sz="1400" b="1" i="0">
+                <a:solidFill>
+                  <a:srgbClr val="1F2D22"/>
                 </a:solidFill>
                 <a:latin typeface="Calibri"/>
               </a:rPr>
-              <a:t>Low-time warning — </a:t>
-            </a:r>
-            <a:r>
-              <a:rPr sz="1400">
-                <a:solidFill>
-                  <a:srgbClr val="1F2D22"/>
-                </a:solidFill>
-                <a:latin typeface="Calibri"/>
-              </a:rPr>
-              <a:t>the clock turns red and warns before time runs out.</a:t>
-            </a:r>
-          </a:p>
-          <a:p>
-            <a:pPr indent="-201168" marL="201168">
+              <a:t>Fruit</a:t>
+            </a:r>
+          </a:p>
+        </p:txBody>
+      </p:sp>
+      <p:sp>
+        <p:nvSpPr>
+          <p:cNvPr id="12" name="Rounded Rectangle 11"/>
+          <p:cNvSpPr/>
+          <p:nvPr/>
+        </p:nvSpPr>
+        <p:spPr>
+          <a:xfrm>
+            <a:off x="914400" y="3886200"/>
+            <a:ext cx="1554480" cy="594360"/>
+          </a:xfrm>
+          <a:prstGeom prst="roundRect">
+            <a:avLst>
+              <a:gd name="adj" fmla="val 10000"/>
+            </a:avLst>
+          </a:prstGeom>
+          <a:solidFill>
+            <a:srgbClr val="DCE8D9"/>
+          </a:solidFill>
+          <a:ln>
+            <a:noFill/>
+          </a:ln>
+          <a:effectLst/>
+        </p:spPr>
+        <p:style>
+          <a:lnRef idx="1">
+            <a:schemeClr val="accent1"/>
+          </a:lnRef>
+          <a:fillRef idx="3">
+            <a:schemeClr val="accent1"/>
+          </a:fillRef>
+          <a:effectRef idx="2">
+            <a:schemeClr val="accent1"/>
+          </a:effectRef>
+          <a:fontRef idx="minor">
+            <a:schemeClr val="lt1"/>
+          </a:fontRef>
+        </p:style>
+        <p:txBody>
+          <a:bodyPr rtlCol="0" anchor="ctr"/>
+          <a:lstStyle/>
+          <a:p>
+            <a:pPr algn="ctr"/>
+          </a:p>
+        </p:txBody>
+      </p:sp>
+      <p:sp>
+        <p:nvSpPr>
+          <p:cNvPr id="13" name="TextBox 12"/>
+          <p:cNvSpPr txBox="1"/>
+          <p:nvPr/>
+        </p:nvSpPr>
+        <p:spPr>
+          <a:xfrm>
+            <a:off x="914400" y="3886200"/>
+            <a:ext cx="1554480" cy="594360"/>
+          </a:xfrm>
+          <a:prstGeom prst="rect">
+            <a:avLst/>
+          </a:prstGeom>
+          <a:noFill/>
+        </p:spPr>
+        <p:txBody>
+          <a:bodyPr wrap="square" anchor="ctr" lIns="0" rIns="0" tIns="0" bIns="0">
+            <a:spAutoFit/>
+          </a:bodyPr>
+          <a:lstStyle/>
+          <a:p>
+            <a:pPr algn="ctr">
               <a:lnSpc>
                 <a:spcPct val="115000"/>
               </a:lnSpc>
-              <a:spcAft>
-                <a:spcPts val="1000"/>
-              </a:spcAft>
-              <a:buClr>
-                <a:srgbClr val="3E7A5C"/>
-              </a:buClr>
-              <a:buFont typeface="Arial"/>
-              <a:buChar char="•"/>
             </a:pPr>
             <a:r>
-              <a:rPr b="1" sz="1400">
-                <a:solidFill>
-                  <a:srgbClr val="3E7A5C"/>
+              <a:rPr sz="1300" b="1" i="0">
+                <a:solidFill>
+                  <a:srgbClr val="2C5A44"/>
                 </a:solidFill>
                 <a:latin typeface="Calibri"/>
               </a:rPr>
-              <a:t>Nothing wasted — </a:t>
-            </a:r>
-            <a:r>
-              <a:rPr sz="1400">
-                <a:solidFill>
-                  <a:srgbClr val="1F2D22"/>
-                </a:solidFill>
-                <a:latin typeface="Calibri"/>
-              </a:rPr>
-              <a:t>stopping early banks back the unused minutes.</a:t>
-            </a:r>
-          </a:p>
-          <a:p>
-            <a:pPr indent="-201168" marL="201168">
+              <a:t>Checklist</a:t>
+            </a:r>
+          </a:p>
+        </p:txBody>
+      </p:sp>
+      <p:sp>
+        <p:nvSpPr>
+          <p:cNvPr id="14" name="TextBox 13"/>
+          <p:cNvSpPr txBox="1"/>
+          <p:nvPr/>
+        </p:nvSpPr>
+        <p:spPr>
+          <a:xfrm>
+            <a:off x="2468880" y="3977639"/>
+            <a:ext cx="457200" cy="457200"/>
+          </a:xfrm>
+          <a:prstGeom prst="rect">
+            <a:avLst/>
+          </a:prstGeom>
+          <a:noFill/>
+        </p:spPr>
+        <p:txBody>
+          <a:bodyPr wrap="square" anchor="t" lIns="0" rIns="0" tIns="0" bIns="0">
+            <a:spAutoFit/>
+          </a:bodyPr>
+          <a:lstStyle/>
+          <a:p>
+            <a:pPr algn="ctr">
               <a:lnSpc>
                 <a:spcPct val="115000"/>
               </a:lnSpc>
-              <a:spcAft>
-                <a:spcPts val="1000"/>
-              </a:spcAft>
-              <a:buClr>
-                <a:srgbClr val="3E7A5C"/>
-              </a:buClr>
-              <a:buFont typeface="Arial"/>
-              <a:buChar char="•"/>
             </a:pPr>
             <a:r>
-              <a:rPr b="1" sz="1400">
-                <a:solidFill>
-                  <a:srgbClr val="3E7A5C"/>
+              <a:rPr sz="2000" b="1" i="0">
+                <a:solidFill>
+                  <a:srgbClr val="DD6B42"/>
                 </a:solidFill>
                 <a:latin typeface="Calibri"/>
               </a:rPr>
-              <a:t>Unlimited mode — </a:t>
-            </a:r>
-            <a:r>
-              <a:rPr sz="1400">
-                <a:solidFill>
-                  <a:srgbClr val="1F2D22"/>
+              <a:t>→</a:t>
+            </a:r>
+          </a:p>
+        </p:txBody>
+      </p:sp>
+      <p:sp>
+        <p:nvSpPr>
+          <p:cNvPr id="15" name="Rounded Rectangle 14"/>
+          <p:cNvSpPr/>
+          <p:nvPr/>
+        </p:nvSpPr>
+        <p:spPr>
+          <a:xfrm>
+            <a:off x="2926080" y="3886200"/>
+            <a:ext cx="2286000" cy="594360"/>
+          </a:xfrm>
+          <a:prstGeom prst="roundRect">
+            <a:avLst>
+              <a:gd name="adj" fmla="val 10000"/>
+            </a:avLst>
+          </a:prstGeom>
+          <a:solidFill>
+            <a:srgbClr val="DCE8D9"/>
+          </a:solidFill>
+          <a:ln>
+            <a:noFill/>
+          </a:ln>
+          <a:effectLst/>
+        </p:spPr>
+        <p:style>
+          <a:lnRef idx="1">
+            <a:schemeClr val="accent1"/>
+          </a:lnRef>
+          <a:fillRef idx="3">
+            <a:schemeClr val="accent1"/>
+          </a:fillRef>
+          <a:effectRef idx="2">
+            <a:schemeClr val="accent1"/>
+          </a:effectRef>
+          <a:fontRef idx="minor">
+            <a:schemeClr val="lt1"/>
+          </a:fontRef>
+        </p:style>
+        <p:txBody>
+          <a:bodyPr rtlCol="0" anchor="ctr"/>
+          <a:lstStyle/>
+          <a:p>
+            <a:pPr algn="ctr"/>
+          </a:p>
+        </p:txBody>
+      </p:sp>
+      <p:sp>
+        <p:nvSpPr>
+          <p:cNvPr id="16" name="TextBox 15"/>
+          <p:cNvSpPr txBox="1"/>
+          <p:nvPr/>
+        </p:nvSpPr>
+        <p:spPr>
+          <a:xfrm>
+            <a:off x="2926080" y="3886200"/>
+            <a:ext cx="2286000" cy="594360"/>
+          </a:xfrm>
+          <a:prstGeom prst="rect">
+            <a:avLst/>
+          </a:prstGeom>
+          <a:noFill/>
+        </p:spPr>
+        <p:txBody>
+          <a:bodyPr wrap="square" anchor="ctr" lIns="0" rIns="0" tIns="0" bIns="0">
+            <a:spAutoFit/>
+          </a:bodyPr>
+          <a:lstStyle/>
+          <a:p>
+            <a:pPr algn="ctr">
+              <a:lnSpc>
+                <a:spcPct val="115000"/>
+              </a:lnSpc>
+            </a:pPr>
+            <a:r>
+              <a:rPr sz="1300" b="1" i="0">
+                <a:solidFill>
+                  <a:srgbClr val="2C5A44"/>
                 </a:solidFill>
                 <a:latin typeface="Calibri"/>
               </a:rPr>
-              <a:t>finishing all goals removes the timer entirely for the day.</a:t>
+              <a:t>Photo or PIN Proof</a:t>
+            </a:r>
+          </a:p>
+        </p:txBody>
+      </p:sp>
+      <p:sp>
+        <p:nvSpPr>
+          <p:cNvPr id="17" name="TextBox 16"/>
+          <p:cNvSpPr txBox="1"/>
+          <p:nvPr/>
+        </p:nvSpPr>
+        <p:spPr>
+          <a:xfrm>
+            <a:off x="5212080" y="3977639"/>
+            <a:ext cx="457200" cy="457200"/>
+          </a:xfrm>
+          <a:prstGeom prst="rect">
+            <a:avLst/>
+          </a:prstGeom>
+          <a:noFill/>
+        </p:spPr>
+        <p:txBody>
+          <a:bodyPr wrap="square" anchor="t" lIns="0" rIns="0" tIns="0" bIns="0">
+            <a:spAutoFit/>
+          </a:bodyPr>
+          <a:lstStyle/>
+          <a:p>
+            <a:pPr algn="ctr">
+              <a:lnSpc>
+                <a:spcPct val="115000"/>
+              </a:lnSpc>
+            </a:pPr>
+            <a:r>
+              <a:rPr sz="2000" b="1" i="0">
+                <a:solidFill>
+                  <a:srgbClr val="DD6B42"/>
+                </a:solidFill>
+                <a:latin typeface="Calibri"/>
+              </a:rPr>
+              <a:t>→</a:t>
+            </a:r>
+          </a:p>
+        </p:txBody>
+      </p:sp>
+      <p:sp>
+        <p:nvSpPr>
+          <p:cNvPr id="18" name="Rounded Rectangle 17"/>
+          <p:cNvSpPr/>
+          <p:nvPr/>
+        </p:nvSpPr>
+        <p:spPr>
+          <a:xfrm>
+            <a:off x="5669280" y="3886200"/>
+            <a:ext cx="2103120" cy="594360"/>
+          </a:xfrm>
+          <a:prstGeom prst="roundRect">
+            <a:avLst>
+              <a:gd name="adj" fmla="val 10000"/>
+            </a:avLst>
+          </a:prstGeom>
+          <a:solidFill>
+            <a:srgbClr val="DCE8D9"/>
+          </a:solidFill>
+          <a:ln>
+            <a:noFill/>
+          </a:ln>
+          <a:effectLst/>
+        </p:spPr>
+        <p:style>
+          <a:lnRef idx="1">
+            <a:schemeClr val="accent1"/>
+          </a:lnRef>
+          <a:fillRef idx="3">
+            <a:schemeClr val="accent1"/>
+          </a:fillRef>
+          <a:effectRef idx="2">
+            <a:schemeClr val="accent1"/>
+          </a:effectRef>
+          <a:fontRef idx="minor">
+            <a:schemeClr val="lt1"/>
+          </a:fontRef>
+        </p:style>
+        <p:txBody>
+          <a:bodyPr rtlCol="0" anchor="ctr"/>
+          <a:lstStyle/>
+          <a:p>
+            <a:pPr algn="ctr"/>
+          </a:p>
+        </p:txBody>
+      </p:sp>
+      <p:sp>
+        <p:nvSpPr>
+          <p:cNvPr id="19" name="TextBox 18"/>
+          <p:cNvSpPr txBox="1"/>
+          <p:nvPr/>
+        </p:nvSpPr>
+        <p:spPr>
+          <a:xfrm>
+            <a:off x="5669280" y="3886200"/>
+            <a:ext cx="2103120" cy="594360"/>
+          </a:xfrm>
+          <a:prstGeom prst="rect">
+            <a:avLst/>
+          </a:prstGeom>
+          <a:noFill/>
+        </p:spPr>
+        <p:txBody>
+          <a:bodyPr wrap="square" anchor="ctr" lIns="0" rIns="0" tIns="0" bIns="0">
+            <a:spAutoFit/>
+          </a:bodyPr>
+          <a:lstStyle/>
+          <a:p>
+            <a:pPr algn="ctr">
+              <a:lnSpc>
+                <a:spcPct val="115000"/>
+              </a:lnSpc>
+            </a:pPr>
+            <a:r>
+              <a:rPr sz="1300" b="1" i="0">
+                <a:solidFill>
+                  <a:srgbClr val="2C5A44"/>
+                </a:solidFill>
+                <a:latin typeface="Calibri"/>
+              </a:rPr>
+              <a:t>Minutes Banked</a:t>
+            </a:r>
+          </a:p>
+        </p:txBody>
+      </p:sp>
+      <p:sp>
+        <p:nvSpPr>
+          <p:cNvPr id="20" name="TextBox 19"/>
+          <p:cNvSpPr txBox="1"/>
+          <p:nvPr/>
+        </p:nvSpPr>
+        <p:spPr>
+          <a:xfrm>
+            <a:off x="7772400" y="3977639"/>
+            <a:ext cx="457200" cy="457200"/>
+          </a:xfrm>
+          <a:prstGeom prst="rect">
+            <a:avLst/>
+          </a:prstGeom>
+          <a:noFill/>
+        </p:spPr>
+        <p:txBody>
+          <a:bodyPr wrap="square" anchor="t" lIns="0" rIns="0" tIns="0" bIns="0">
+            <a:spAutoFit/>
+          </a:bodyPr>
+          <a:lstStyle/>
+          <a:p>
+            <a:pPr algn="ctr">
+              <a:lnSpc>
+                <a:spcPct val="115000"/>
+              </a:lnSpc>
+            </a:pPr>
+            <a:r>
+              <a:rPr sz="2000" b="1" i="0">
+                <a:solidFill>
+                  <a:srgbClr val="DD6B42"/>
+                </a:solidFill>
+                <a:latin typeface="Calibri"/>
+              </a:rPr>
+              <a:t>→</a:t>
+            </a:r>
+          </a:p>
+        </p:txBody>
+      </p:sp>
+      <p:sp>
+        <p:nvSpPr>
+          <p:cNvPr id="21" name="Rounded Rectangle 20"/>
+          <p:cNvSpPr/>
+          <p:nvPr/>
+        </p:nvSpPr>
+        <p:spPr>
+          <a:xfrm>
+            <a:off x="8229600" y="3886200"/>
+            <a:ext cx="1554480" cy="594360"/>
+          </a:xfrm>
+          <a:prstGeom prst="roundRect">
+            <a:avLst>
+              <a:gd name="adj" fmla="val 10000"/>
+            </a:avLst>
+          </a:prstGeom>
+          <a:solidFill>
+            <a:srgbClr val="DCE8D9"/>
+          </a:solidFill>
+          <a:ln>
+            <a:noFill/>
+          </a:ln>
+          <a:effectLst/>
+        </p:spPr>
+        <p:style>
+          <a:lnRef idx="1">
+            <a:schemeClr val="accent1"/>
+          </a:lnRef>
+          <a:fillRef idx="3">
+            <a:schemeClr val="accent1"/>
+          </a:fillRef>
+          <a:effectRef idx="2">
+            <a:schemeClr val="accent1"/>
+          </a:effectRef>
+          <a:fontRef idx="minor">
+            <a:schemeClr val="lt1"/>
+          </a:fontRef>
+        </p:style>
+        <p:txBody>
+          <a:bodyPr rtlCol="0" anchor="ctr"/>
+          <a:lstStyle/>
+          <a:p>
+            <a:pPr algn="ctr"/>
+          </a:p>
+        </p:txBody>
+      </p:sp>
+      <p:sp>
+        <p:nvSpPr>
+          <p:cNvPr id="22" name="TextBox 21"/>
+          <p:cNvSpPr txBox="1"/>
+          <p:nvPr/>
+        </p:nvSpPr>
+        <p:spPr>
+          <a:xfrm>
+            <a:off x="8229600" y="3886200"/>
+            <a:ext cx="1554480" cy="594360"/>
+          </a:xfrm>
+          <a:prstGeom prst="rect">
+            <a:avLst/>
+          </a:prstGeom>
+          <a:noFill/>
+        </p:spPr>
+        <p:txBody>
+          <a:bodyPr wrap="square" anchor="ctr" lIns="0" rIns="0" tIns="0" bIns="0">
+            <a:spAutoFit/>
+          </a:bodyPr>
+          <a:lstStyle/>
+          <a:p>
+            <a:pPr algn="ctr">
+              <a:lnSpc>
+                <a:spcPct val="115000"/>
+              </a:lnSpc>
+            </a:pPr>
+            <a:r>
+              <a:rPr sz="1300" b="1" i="0">
+                <a:solidFill>
+                  <a:srgbClr val="2C5A44"/>
+                </a:solidFill>
+                <a:latin typeface="Calibri"/>
+              </a:rPr>
+              <a:t>Unlock</a:t>
+            </a:r>
+          </a:p>
+        </p:txBody>
+      </p:sp>
+      <p:sp>
+        <p:nvSpPr>
+          <p:cNvPr id="23" name="Rounded Rectangle 22"/>
+          <p:cNvSpPr/>
+          <p:nvPr/>
+        </p:nvSpPr>
+        <p:spPr>
+          <a:xfrm>
+            <a:off x="822960" y="4846320"/>
+            <a:ext cx="10515600" cy="1371600"/>
+          </a:xfrm>
+          <a:prstGeom prst="roundRect">
+            <a:avLst>
+              <a:gd name="adj" fmla="val 10000"/>
+            </a:avLst>
+          </a:prstGeom>
+          <a:solidFill>
+            <a:srgbClr val="F5E7C9"/>
+          </a:solidFill>
+          <a:ln>
+            <a:noFill/>
+          </a:ln>
+          <a:effectLst/>
+        </p:spPr>
+        <p:style>
+          <a:lnRef idx="1">
+            <a:schemeClr val="accent1"/>
+          </a:lnRef>
+          <a:fillRef idx="3">
+            <a:schemeClr val="accent1"/>
+          </a:fillRef>
+          <a:effectRef idx="2">
+            <a:schemeClr val="accent1"/>
+          </a:effectRef>
+          <a:fontRef idx="minor">
+            <a:schemeClr val="lt1"/>
+          </a:fontRef>
+        </p:style>
+        <p:txBody>
+          <a:bodyPr rtlCol="0" anchor="ctr"/>
+          <a:lstStyle/>
+          <a:p>
+            <a:pPr algn="ctr"/>
+          </a:p>
+        </p:txBody>
+      </p:sp>
+      <p:sp>
+        <p:nvSpPr>
+          <p:cNvPr id="24" name="TextBox 23"/>
+          <p:cNvSpPr txBox="1"/>
+          <p:nvPr/>
+        </p:nvSpPr>
+        <p:spPr>
+          <a:xfrm>
+            <a:off x="1188720" y="5074920"/>
+            <a:ext cx="9784080" cy="914400"/>
+          </a:xfrm>
+          <a:prstGeom prst="rect">
+            <a:avLst/>
+          </a:prstGeom>
+          <a:noFill/>
+        </p:spPr>
+        <p:txBody>
+          <a:bodyPr wrap="square" anchor="ctr" lIns="0" rIns="0" tIns="0" bIns="0">
+            <a:spAutoFit/>
+          </a:bodyPr>
+          <a:lstStyle/>
+          <a:p>
+            <a:pPr algn="l">
+              <a:lnSpc>
+                <a:spcPct val="125000"/>
+              </a:lnSpc>
+            </a:pPr>
+            <a:r>
+              <a:rPr sz="1350" b="0" i="0">
+                <a:solidFill>
+                  <a:srgbClr val="2C5A44"/>
+                </a:solidFill>
+                <a:latin typeface="Calibri"/>
+              </a:rPr>
+              <a:t>The one exception: Sleep is checked each morning about last night's bedtime, not at night — a real bug we caught and fixed, so the reward is never gated on something unverifiable until after bedtime.</a:t>
             </a:r>
           </a:p>
         </p:txBody>
@@ -6125,6 +6817,299 @@
 </file>
 
 <file path=ppt/slides/slide5.xml><?xml version="1.0" encoding="utf-8"?>
+<p:sld xmlns:a="http://schemas.openxmlformats.org/drawingml/2006/main" xmlns:p="http://schemas.openxmlformats.org/presentationml/2006/main" xmlns:r="http://schemas.openxmlformats.org/officeDocument/2006/relationships">
+  <p:cSld>
+    <p:bg>
+      <p:bgPr>
+        <a:solidFill>
+          <a:srgbClr val="2C5A44"/>
+        </a:solidFill>
+        <a:effectLst/>
+      </p:bgPr>
+    </p:bg>
+    <p:spTree>
+      <p:nvGrpSpPr>
+        <p:cNvPr id="1" name=""/>
+        <p:cNvGrpSpPr/>
+        <p:nvPr/>
+      </p:nvGrpSpPr>
+      <p:grpSpPr/>
+      <p:sp>
+        <p:nvSpPr>
+          <p:cNvPr id="2" name="TextBox 1"/>
+          <p:cNvSpPr txBox="1"/>
+          <p:nvPr/>
+        </p:nvSpPr>
+        <p:spPr>
+          <a:xfrm>
+            <a:off x="822960" y="548640"/>
+            <a:ext cx="9601200" cy="731520"/>
+          </a:xfrm>
+          <a:prstGeom prst="rect">
+            <a:avLst/>
+          </a:prstGeom>
+          <a:noFill/>
+        </p:spPr>
+        <p:txBody>
+          <a:bodyPr wrap="square" anchor="t" lIns="0" rIns="0" tIns="0" bIns="0">
+            <a:spAutoFit/>
+          </a:bodyPr>
+          <a:lstStyle/>
+          <a:p>
+            <a:pPr algn="l">
+              <a:lnSpc>
+                <a:spcPct val="115000"/>
+              </a:lnSpc>
+            </a:pPr>
+            <a:r>
+              <a:rPr sz="3200" b="1" i="0">
+                <a:solidFill>
+                  <a:srgbClr val="FFFFFF"/>
+                </a:solidFill>
+                <a:latin typeface="Cambria"/>
+              </a:rPr>
+              <a:t>Not a Mockup. A Working Product.</a:t>
+            </a:r>
+          </a:p>
+        </p:txBody>
+      </p:sp>
+      <p:sp>
+        <p:nvSpPr>
+          <p:cNvPr id="3" name="TextBox 2"/>
+          <p:cNvSpPr txBox="1"/>
+          <p:nvPr/>
+        </p:nvSpPr>
+        <p:spPr>
+          <a:xfrm>
+            <a:off x="822960" y="1280160"/>
+            <a:ext cx="9601200" cy="548640"/>
+          </a:xfrm>
+          <a:prstGeom prst="rect">
+            <a:avLst/>
+          </a:prstGeom>
+          <a:noFill/>
+        </p:spPr>
+        <p:txBody>
+          <a:bodyPr wrap="square" anchor="t" lIns="0" rIns="0" tIns="0" bIns="0">
+            <a:spAutoFit/>
+          </a:bodyPr>
+          <a:lstStyle/>
+          <a:p>
+            <a:pPr algn="l">
+              <a:lnSpc>
+                <a:spcPct val="115000"/>
+              </a:lnSpc>
+            </a:pPr>
+            <a:r>
+              <a:rPr sz="1500" b="0" i="0">
+                <a:solidFill>
+                  <a:srgbClr val="DCE8D9"/>
+                </a:solidFill>
+                <a:latin typeface="Calibri"/>
+              </a:rPr>
+              <a:t>Every feature below is live, clickable, and running right now.</a:t>
+            </a:r>
+          </a:p>
+        </p:txBody>
+      </p:sp>
+      <p:sp>
+        <p:nvSpPr>
+          <p:cNvPr id="4" name="Rounded Rectangle 3"/>
+          <p:cNvSpPr/>
+          <p:nvPr/>
+        </p:nvSpPr>
+        <p:spPr>
+          <a:xfrm>
+            <a:off x="822960" y="2011680"/>
+            <a:ext cx="10515600" cy="4206240"/>
+          </a:xfrm>
+          <a:prstGeom prst="roundRect">
+            <a:avLst>
+              <a:gd name="adj" fmla="val 10000"/>
+            </a:avLst>
+          </a:prstGeom>
+          <a:solidFill>
+            <a:srgbClr val="1F3D2B"/>
+          </a:solidFill>
+          <a:ln>
+            <a:noFill/>
+          </a:ln>
+          <a:effectLst/>
+        </p:spPr>
+        <p:style>
+          <a:lnRef idx="1">
+            <a:schemeClr val="accent1"/>
+          </a:lnRef>
+          <a:fillRef idx="3">
+            <a:schemeClr val="accent1"/>
+          </a:fillRef>
+          <a:effectRef idx="2">
+            <a:schemeClr val="accent1"/>
+          </a:effectRef>
+          <a:fontRef idx="minor">
+            <a:schemeClr val="lt1"/>
+          </a:fontRef>
+        </p:style>
+        <p:txBody>
+          <a:bodyPr rtlCol="0" anchor="ctr"/>
+          <a:lstStyle/>
+          <a:p>
+            <a:pPr algn="ctr"/>
+          </a:p>
+        </p:txBody>
+      </p:sp>
+      <p:sp>
+        <p:nvSpPr>
+          <p:cNvPr id="5" name="TextBox 4"/>
+          <p:cNvSpPr txBox="1"/>
+          <p:nvPr/>
+        </p:nvSpPr>
+        <p:spPr>
+          <a:xfrm>
+            <a:off x="1280160" y="2377440"/>
+            <a:ext cx="9601200" cy="3657600"/>
+          </a:xfrm>
+          <a:prstGeom prst="rect">
+            <a:avLst/>
+          </a:prstGeom>
+          <a:noFill/>
+        </p:spPr>
+        <p:txBody>
+          <a:bodyPr wrap="square" lIns="0" rIns="0" tIns="0" bIns="0">
+            <a:spAutoFit/>
+          </a:bodyPr>
+          <a:lstStyle/>
+          <a:p>
+            <a:pPr indent="-201168" marL="201168">
+              <a:lnSpc>
+                <a:spcPct val="115000"/>
+              </a:lnSpc>
+              <a:spcAft>
+                <a:spcPts val="2200"/>
+              </a:spcAft>
+              <a:buClr>
+                <a:srgbClr val="3E7A5C"/>
+              </a:buClr>
+              <a:buFont typeface="Arial"/>
+              <a:buChar char="✓"/>
+            </a:pPr>
+            <a:r>
+              <a:rPr sz="1700">
+                <a:solidFill>
+                  <a:srgbClr val="FFFFFF"/>
+                </a:solidFill>
+                <a:latin typeface="Calibri"/>
+              </a:rPr>
+              <a:t>Real photo upload and parent-PIN verification — not placeholder buttons</a:t>
+            </a:r>
+          </a:p>
+          <a:p>
+            <a:pPr indent="-201168" marL="201168">
+              <a:lnSpc>
+                <a:spcPct val="115000"/>
+              </a:lnSpc>
+              <a:spcAft>
+                <a:spcPts val="2200"/>
+              </a:spcAft>
+              <a:buClr>
+                <a:srgbClr val="3E7A5C"/>
+              </a:buClr>
+              <a:buFont typeface="Arial"/>
+              <a:buChar char="✓"/>
+            </a:pPr>
+            <a:r>
+              <a:rPr sz="1700">
+                <a:solidFill>
+                  <a:srgbClr val="FFFFFF"/>
+                </a:solidFill>
+                <a:latin typeface="Calibri"/>
+              </a:rPr>
+              <a:t>A real countdown timer that spends banked minutes and warns before time runs out</a:t>
+            </a:r>
+          </a:p>
+          <a:p>
+            <a:pPr indent="-201168" marL="201168">
+              <a:lnSpc>
+                <a:spcPct val="115000"/>
+              </a:lnSpc>
+              <a:spcAft>
+                <a:spcPts val="2200"/>
+              </a:spcAft>
+              <a:buClr>
+                <a:srgbClr val="3E7A5C"/>
+              </a:buClr>
+              <a:buFont typeface="Arial"/>
+              <a:buChar char="✓"/>
+            </a:pPr>
+            <a:r>
+              <a:rPr sz="1700">
+                <a:solidFill>
+                  <a:srgbClr val="FFFFFF"/>
+                </a:solidFill>
+                <a:latin typeface="Calibri"/>
+              </a:rPr>
+              <a:t>Real state that persists day to day in the browser, with automatic daily reset</a:t>
+            </a:r>
+          </a:p>
+          <a:p>
+            <a:pPr indent="-201168" marL="201168">
+              <a:lnSpc>
+                <a:spcPct val="115000"/>
+              </a:lnSpc>
+              <a:spcAft>
+                <a:spcPts val="2200"/>
+              </a:spcAft>
+              <a:buClr>
+                <a:srgbClr val="3E7A5C"/>
+              </a:buClr>
+              <a:buFont typeface="Arial"/>
+              <a:buChar char="✓"/>
+            </a:pPr>
+            <a:r>
+              <a:rPr sz="1700">
+                <a:solidFill>
+                  <a:srgbClr val="FFFFFF"/>
+                </a:solidFill>
+                <a:latin typeface="Calibri"/>
+              </a:rPr>
+              <a:t>A real parent dashboard — add or remove goals, set reward minutes, approve or reject proof</a:t>
+            </a:r>
+          </a:p>
+          <a:p>
+            <a:pPr indent="-201168" marL="201168">
+              <a:lnSpc>
+                <a:spcPct val="115000"/>
+              </a:lnSpc>
+              <a:spcAft>
+                <a:spcPts val="2200"/>
+              </a:spcAft>
+              <a:buClr>
+                <a:srgbClr val="3E7A5C"/>
+              </a:buClr>
+              <a:buFont typeface="Arial"/>
+              <a:buChar char="✓"/>
+            </a:pPr>
+            <a:r>
+              <a:rPr sz="1700">
+                <a:solidFill>
+                  <a:srgbClr val="FFFFFF"/>
+                </a:solidFill>
+                <a:latin typeface="Calibri"/>
+              </a:rPr>
+              <a:t>Five weeks of real iteration — including a genuine bug fix (the sleep-timing rework)</a:t>
+            </a:r>
+          </a:p>
+        </p:txBody>
+      </p:sp>
+    </p:spTree>
+  </p:cSld>
+  <p:clrMapOvr>
+    <a:masterClrMapping/>
+  </p:clrMapOvr>
+</p:sld>
+</file>
+
+<file path=ppt/slides/slide6.xml><?xml version="1.0" encoding="utf-8"?>
 <p:sld xmlns:a="http://schemas.openxmlformats.org/drawingml/2006/main" xmlns:p="http://schemas.openxmlformats.org/presentationml/2006/main" xmlns:r="http://schemas.openxmlformats.org/officeDocument/2006/relationships">
   <p:cSld>
     <p:bg>
@@ -6150,8 +7135,8 @@
         </p:nvSpPr>
         <p:spPr>
           <a:xfrm>
-            <a:off x="822960" y="548640"/>
-            <a:ext cx="7315200" cy="548640"/>
+            <a:off x="822960" y="502920"/>
+            <a:ext cx="9144000" cy="548640"/>
           </a:xfrm>
           <a:prstGeom prst="rect">
             <a:avLst/>
@@ -6176,63 +7161,26 @@
                 </a:solidFill>
                 <a:latin typeface="Cambria"/>
               </a:rPr>
-              <a:t>Built for Parents Too</a:t>
-            </a:r>
-          </a:p>
-        </p:txBody>
-      </p:sp>
-      <p:sp>
-        <p:nvSpPr>
-          <p:cNvPr id="3" name="TextBox 2"/>
-          <p:cNvSpPr txBox="1"/>
-          <p:nvPr/>
-        </p:nvSpPr>
-        <p:spPr>
-          <a:xfrm>
-            <a:off x="822960" y="1188720"/>
-            <a:ext cx="9144000" cy="548640"/>
-          </a:xfrm>
-          <a:prstGeom prst="rect">
-            <a:avLst/>
-          </a:prstGeom>
-          <a:noFill/>
-        </p:spPr>
-        <p:txBody>
-          <a:bodyPr wrap="square" anchor="t" lIns="0" rIns="0" tIns="0" bIns="0">
-            <a:spAutoFit/>
-          </a:bodyPr>
-          <a:lstStyle/>
-          <a:p>
-            <a:pPr algn="l">
-              <a:lnSpc>
-                <a:spcPct val="115000"/>
-              </a:lnSpc>
-            </a:pPr>
-            <a:r>
-              <a:rPr sz="1500" b="0" i="0">
-                <a:solidFill>
-                  <a:srgbClr val="5B6A5F"/>
-                </a:solidFill>
-                <a:latin typeface="Calibri"/>
-              </a:rPr>
-              <a:t>A dashboard that reviews, configures, and — when it matters — overrides.</a:t>
-            </a:r>
-          </a:p>
-        </p:txBody>
-      </p:sp>
-      <p:sp>
-        <p:nvSpPr>
-          <p:cNvPr id="4" name="Oval 3"/>
+              <a:t>Designed for Both Sides of the Family</a:t>
+            </a:r>
+          </a:p>
+        </p:txBody>
+      </p:sp>
+      <p:sp>
+        <p:nvSpPr>
+          <p:cNvPr id="3" name="Rounded Rectangle 2"/>
           <p:cNvSpPr/>
           <p:nvPr/>
         </p:nvSpPr>
         <p:spPr>
           <a:xfrm>
-            <a:off x="960120" y="1920240"/>
-            <a:ext cx="914400" cy="914400"/>
-          </a:xfrm>
-          <a:prstGeom prst="ellipse">
-            <a:avLst/>
+            <a:off x="822960" y="1371600"/>
+            <a:ext cx="5120640" cy="4754880"/>
+          </a:xfrm>
+          <a:prstGeom prst="roundRect">
+            <a:avLst>
+              <a:gd name="adj" fmla="val 10000"/>
+            </a:avLst>
           </a:prstGeom>
           <a:solidFill>
             <a:srgbClr val="DCE8D9"/>
@@ -6257,31 +7205,23 @@
           </a:fontRef>
         </p:style>
         <p:txBody>
-          <a:bodyPr rtlCol="0" anchor="ctr" lIns="0" rIns="0" tIns="0" bIns="0" wrap="none"/>
+          <a:bodyPr rtlCol="0" anchor="ctr"/>
           <a:lstStyle/>
           <a:p>
             <a:pPr algn="ctr"/>
-            <a:r>
-              <a:rPr sz="2800">
-                <a:solidFill>
-                  <a:srgbClr val="3E7A5C"/>
-                </a:solidFill>
-              </a:rPr>
-              <a:t>📋</a:t>
-            </a:r>
-          </a:p>
-        </p:txBody>
-      </p:sp>
-      <p:sp>
-        <p:nvSpPr>
-          <p:cNvPr id="5" name="TextBox 4"/>
+          </a:p>
+        </p:txBody>
+      </p:sp>
+      <p:sp>
+        <p:nvSpPr>
+          <p:cNvPr id="4" name="TextBox 3"/>
           <p:cNvSpPr txBox="1"/>
           <p:nvPr/>
         </p:nvSpPr>
         <p:spPr>
           <a:xfrm>
-            <a:off x="2194560" y="1965960"/>
-            <a:ext cx="8778240" cy="457200"/>
+            <a:off x="1188720" y="1645920"/>
+            <a:ext cx="4480560" cy="457200"/>
           </a:xfrm>
           <a:prstGeom prst="rect">
             <a:avLst/>
@@ -6300,27 +7240,27 @@
               </a:lnSpc>
             </a:pPr>
             <a:r>
-              <a:rPr sz="1800" b="1" i="0">
-                <a:solidFill>
-                  <a:srgbClr val="1F2D22"/>
-                </a:solidFill>
-                <a:latin typeface="Cambria"/>
-              </a:rPr>
-              <a:t>Review Dashboard</a:t>
-            </a:r>
-          </a:p>
-        </p:txBody>
-      </p:sp>
-      <p:sp>
-        <p:nvSpPr>
-          <p:cNvPr id="6" name="TextBox 5"/>
+              <a:rPr sz="1300" b="1" i="0">
+                <a:solidFill>
+                  <a:srgbClr val="3E7A5C"/>
+                </a:solidFill>
+                <a:latin typeface="Calibri"/>
+              </a:rPr>
+              <a:t>FOR THE KID</a:t>
+            </a:r>
+          </a:p>
+        </p:txBody>
+      </p:sp>
+      <p:sp>
+        <p:nvSpPr>
+          <p:cNvPr id="5" name="TextBox 4"/>
           <p:cNvSpPr txBox="1"/>
           <p:nvPr/>
         </p:nvSpPr>
         <p:spPr>
           <a:xfrm>
-            <a:off x="2194560" y="2423160"/>
-            <a:ext cx="8778240" cy="640080"/>
+            <a:off x="1188720" y="2148840"/>
+            <a:ext cx="4480560" cy="3749039"/>
           </a:xfrm>
           <a:prstGeom prst="rect">
             <a:avLst/>
@@ -6328,41 +7268,159 @@
           <a:noFill/>
         </p:spPr>
         <p:txBody>
-          <a:bodyPr wrap="square" anchor="t" lIns="0" rIns="0" tIns="0" bIns="0">
+          <a:bodyPr wrap="square" lIns="0" rIns="0" tIns="0" bIns="0">
             <a:spAutoFit/>
           </a:bodyPr>
           <a:lstStyle/>
           <a:p>
-            <a:pPr algn="l">
+            <a:pPr indent="-201168" marL="201168">
               <a:lnSpc>
-                <a:spcPct val="120000"/>
+                <a:spcPct val="115000"/>
               </a:lnSpc>
+              <a:spcAft>
+                <a:spcPts val="1400"/>
+              </a:spcAft>
+              <a:buClr>
+                <a:srgbClr val="3E7A5C"/>
+              </a:buClr>
+              <a:buFont typeface="Arial"/>
+              <a:buChar char="•"/>
             </a:pPr>
             <a:r>
-              <a:rPr sz="1400" b="0" i="0">
-                <a:solidFill>
-                  <a:srgbClr val="5B6A5F"/>
+              <a:rPr b="1" sz="1400">
+                <a:solidFill>
+                  <a:srgbClr val="3E7A5C"/>
                 </a:solidFill>
                 <a:latin typeface="Calibri"/>
               </a:rPr>
-              <a:t>Approve or ask-again on any photo a kid submits — nothing is auto-approved.</a:t>
-            </a:r>
-          </a:p>
-        </p:txBody>
-      </p:sp>
-      <p:sp>
-        <p:nvSpPr>
-          <p:cNvPr id="7" name="Oval 6"/>
+              <a:t>Instant credit — </a:t>
+            </a:r>
+            <a:r>
+              <a:rPr sz="1400">
+                <a:solidFill>
+                  <a:srgbClr val="1F2D22"/>
+                </a:solidFill>
+                <a:latin typeface="Calibri"/>
+              </a:rPr>
+              <a:t>every goal banks minutes the moment it's done, not at the end of the day.</a:t>
+            </a:r>
+          </a:p>
+          <a:p>
+            <a:pPr indent="-201168" marL="201168">
+              <a:lnSpc>
+                <a:spcPct val="115000"/>
+              </a:lnSpc>
+              <a:spcAft>
+                <a:spcPts val="1400"/>
+              </a:spcAft>
+              <a:buClr>
+                <a:srgbClr val="3E7A5C"/>
+              </a:buClr>
+              <a:buFont typeface="Arial"/>
+              <a:buChar char="•"/>
+            </a:pPr>
+            <a:r>
+              <a:rPr b="1" sz="1400">
+                <a:solidFill>
+                  <a:srgbClr val="3E7A5C"/>
+                </a:solidFill>
+                <a:latin typeface="Calibri"/>
+              </a:rPr>
+              <a:t>A real countdown — </a:t>
+            </a:r>
+            <a:r>
+              <a:rPr sz="1400">
+                <a:solidFill>
+                  <a:srgbClr val="1F2D22"/>
+                </a:solidFill>
+                <a:latin typeface="Calibri"/>
+              </a:rPr>
+              <a:t>spend banked time with a live timer and a fair low-time warning.</a:t>
+            </a:r>
+          </a:p>
+          <a:p>
+            <a:pPr indent="-201168" marL="201168">
+              <a:lnSpc>
+                <a:spcPct val="115000"/>
+              </a:lnSpc>
+              <a:spcAft>
+                <a:spcPts val="1400"/>
+              </a:spcAft>
+              <a:buClr>
+                <a:srgbClr val="3E7A5C"/>
+              </a:buClr>
+              <a:buFont typeface="Arial"/>
+              <a:buChar char="•"/>
+            </a:pPr>
+            <a:r>
+              <a:rPr b="1" sz="1400">
+                <a:solidFill>
+                  <a:srgbClr val="3E7A5C"/>
+                </a:solidFill>
+                <a:latin typeface="Calibri"/>
+              </a:rPr>
+              <a:t>A big finish — </a:t>
+            </a:r>
+            <a:r>
+              <a:rPr sz="1400">
+                <a:solidFill>
+                  <a:srgbClr val="1F2D22"/>
+                </a:solidFill>
+                <a:latin typeface="Calibri"/>
+              </a:rPr>
+              <a:t>finish everything and the day becomes Unlimited.</a:t>
+            </a:r>
+          </a:p>
+          <a:p>
+            <a:pPr indent="-201168" marL="201168">
+              <a:lnSpc>
+                <a:spcPct val="115000"/>
+              </a:lnSpc>
+              <a:spcAft>
+                <a:spcPts val="1400"/>
+              </a:spcAft>
+              <a:buClr>
+                <a:srgbClr val="3E7A5C"/>
+              </a:buClr>
+              <a:buFont typeface="Arial"/>
+              <a:buChar char="•"/>
+            </a:pPr>
+            <a:r>
+              <a:rPr b="1" sz="1400">
+                <a:solidFill>
+                  <a:srgbClr val="3E7A5C"/>
+                </a:solidFill>
+                <a:latin typeface="Calibri"/>
+              </a:rPr>
+              <a:t>Streaks &amp; badges — </a:t>
+            </a:r>
+            <a:r>
+              <a:rPr sz="1400">
+                <a:solidFill>
+                  <a:srgbClr val="1F2D22"/>
+                </a:solidFill>
+                <a:latin typeface="Calibri"/>
+              </a:rPr>
+              <a:t>a 7-day history and milestone celebrations keep it fun, not naggy.</a:t>
+            </a:r>
+          </a:p>
+        </p:txBody>
+      </p:sp>
+      <p:sp>
+        <p:nvSpPr>
+          <p:cNvPr id="6" name="Rounded Rectangle 5"/>
           <p:cNvSpPr/>
           <p:nvPr/>
         </p:nvSpPr>
         <p:spPr>
           <a:xfrm>
-            <a:off x="960120" y="3337560"/>
-            <a:ext cx="914400" cy="914400"/>
-          </a:xfrm>
-          <a:prstGeom prst="ellipse">
-            <a:avLst/>
+            <a:off x="6263640" y="1371600"/>
+            <a:ext cx="5120640" cy="4754880"/>
+          </a:xfrm>
+          <a:prstGeom prst="roundRect">
+            <a:avLst>
+              <a:gd name="adj" fmla="val 10000"/>
+            </a:avLst>
           </a:prstGeom>
           <a:solidFill>
             <a:srgbClr val="F7E1D5"/>
@@ -6387,31 +7445,23 @@
           </a:fontRef>
         </p:style>
         <p:txBody>
-          <a:bodyPr rtlCol="0" anchor="ctr" lIns="0" rIns="0" tIns="0" bIns="0" wrap="none"/>
+          <a:bodyPr rtlCol="0" anchor="ctr"/>
           <a:lstStyle/>
           <a:p>
             <a:pPr algn="ctr"/>
-            <a:r>
-              <a:rPr sz="2800">
-                <a:solidFill>
-                  <a:srgbClr val="DD6B42"/>
-                </a:solidFill>
-              </a:rPr>
-              <a:t>🔑</a:t>
-            </a:r>
-          </a:p>
-        </p:txBody>
-      </p:sp>
-      <p:sp>
-        <p:nvSpPr>
-          <p:cNvPr id="8" name="TextBox 7"/>
+          </a:p>
+        </p:txBody>
+      </p:sp>
+      <p:sp>
+        <p:nvSpPr>
+          <p:cNvPr id="7" name="TextBox 6"/>
           <p:cNvSpPr txBox="1"/>
           <p:nvPr/>
         </p:nvSpPr>
         <p:spPr>
           <a:xfrm>
-            <a:off x="2194560" y="3383280"/>
-            <a:ext cx="8778240" cy="457200"/>
+            <a:off x="6629400" y="1645920"/>
+            <a:ext cx="4480560" cy="457200"/>
           </a:xfrm>
           <a:prstGeom prst="rect">
             <a:avLst/>
@@ -6430,27 +7480,27 @@
               </a:lnSpc>
             </a:pPr>
             <a:r>
-              <a:rPr sz="1800" b="1" i="0">
-                <a:solidFill>
-                  <a:srgbClr val="1F2D22"/>
-                </a:solidFill>
-                <a:latin typeface="Cambria"/>
-              </a:rPr>
-              <a:t>Emergency Unlock</a:t>
-            </a:r>
-          </a:p>
-        </p:txBody>
-      </p:sp>
-      <p:sp>
-        <p:nvSpPr>
-          <p:cNvPr id="9" name="TextBox 8"/>
+              <a:rPr sz="1300" b="1" i="0">
+                <a:solidFill>
+                  <a:srgbClr val="DD6B42"/>
+                </a:solidFill>
+                <a:latin typeface="Calibri"/>
+              </a:rPr>
+              <a:t>FOR THE PARENT</a:t>
+            </a:r>
+          </a:p>
+        </p:txBody>
+      </p:sp>
+      <p:sp>
+        <p:nvSpPr>
+          <p:cNvPr id="8" name="TextBox 7"/>
           <p:cNvSpPr txBox="1"/>
           <p:nvPr/>
         </p:nvSpPr>
         <p:spPr>
           <a:xfrm>
-            <a:off x="2194560" y="3840480"/>
-            <a:ext cx="8778240" cy="640080"/>
+            <a:off x="6629400" y="2148840"/>
+            <a:ext cx="4480560" cy="3749039"/>
           </a:xfrm>
           <a:prstGeom prst="rect">
             <a:avLst/>
@@ -6458,786 +7508,140 @@
           <a:noFill/>
         </p:spPr>
         <p:txBody>
-          <a:bodyPr wrap="square" anchor="t" lIns="0" rIns="0" tIns="0" bIns="0">
+          <a:bodyPr wrap="square" lIns="0" rIns="0" tIns="0" bIns="0">
             <a:spAutoFit/>
           </a:bodyPr>
           <a:lstStyle/>
           <a:p>
-            <a:pPr algn="l">
-              <a:lnSpc>
-                <a:spcPct val="120000"/>
-              </a:lnSpc>
-            </a:pPr>
-            <a:r>
-              <a:rPr sz="1400" b="0" i="0">
-                <a:solidFill>
-                  <a:srgbClr val="5B6A5F"/>
-                </a:solidFill>
-                <a:latin typeface="Calibri"/>
-              </a:rPr>
-              <a:t>A PIN-gated override for genuine emergencies — bypasses goals without touching progress or balances.</a:t>
-            </a:r>
-          </a:p>
-        </p:txBody>
-      </p:sp>
-      <p:sp>
-        <p:nvSpPr>
-          <p:cNvPr id="10" name="Oval 9"/>
-          <p:cNvSpPr/>
-          <p:nvPr/>
-        </p:nvSpPr>
-        <p:spPr>
-          <a:xfrm>
-            <a:off x="960120" y="4754880"/>
-            <a:ext cx="914400" cy="914400"/>
-          </a:xfrm>
-          <a:prstGeom prst="ellipse">
-            <a:avLst/>
-          </a:prstGeom>
-          <a:solidFill>
-            <a:srgbClr val="F5E7C9"/>
-          </a:solidFill>
-          <a:ln>
-            <a:noFill/>
-          </a:ln>
-          <a:effectLst/>
-        </p:spPr>
-        <p:style>
-          <a:lnRef idx="1">
-            <a:schemeClr val="accent1"/>
-          </a:lnRef>
-          <a:fillRef idx="3">
-            <a:schemeClr val="accent1"/>
-          </a:fillRef>
-          <a:effectRef idx="2">
-            <a:schemeClr val="accent1"/>
-          </a:effectRef>
-          <a:fontRef idx="minor">
-            <a:schemeClr val="lt1"/>
-          </a:fontRef>
-        </p:style>
-        <p:txBody>
-          <a:bodyPr rtlCol="0" anchor="ctr" lIns="0" rIns="0" tIns="0" bIns="0" wrap="none"/>
-          <a:lstStyle/>
-          <a:p>
-            <a:pPr algn="ctr"/>
-            <a:r>
-              <a:rPr sz="2800">
-                <a:solidFill>
-                  <a:srgbClr val="DB9D3B"/>
-                </a:solidFill>
-              </a:rPr>
-              <a:t>🌱</a:t>
-            </a:r>
-          </a:p>
-        </p:txBody>
-      </p:sp>
-      <p:sp>
-        <p:nvSpPr>
-          <p:cNvPr id="11" name="TextBox 10"/>
-          <p:cNvSpPr txBox="1"/>
-          <p:nvPr/>
-        </p:nvSpPr>
-        <p:spPr>
-          <a:xfrm>
-            <a:off x="2194560" y="4800600"/>
-            <a:ext cx="8778240" cy="457200"/>
-          </a:xfrm>
-          <a:prstGeom prst="rect">
-            <a:avLst/>
-          </a:prstGeom>
-          <a:noFill/>
-        </p:spPr>
-        <p:txBody>
-          <a:bodyPr wrap="square" anchor="t" lIns="0" rIns="0" tIns="0" bIns="0">
-            <a:spAutoFit/>
-          </a:bodyPr>
-          <a:lstStyle/>
-          <a:p>
-            <a:pPr algn="l">
+            <a:pPr indent="-201168" marL="201168">
               <a:lnSpc>
                 <a:spcPct val="115000"/>
               </a:lnSpc>
+              <a:spcAft>
+                <a:spcPts val="1400"/>
+              </a:spcAft>
+              <a:buClr>
+                <a:srgbClr val="3E7A5C"/>
+              </a:buClr>
+              <a:buFont typeface="Arial"/>
+              <a:buChar char="•"/>
             </a:pPr>
             <a:r>
-              <a:rPr sz="1800" b="1" i="0">
+              <a:rPr b="1" sz="1400">
+                <a:solidFill>
+                  <a:srgbClr val="3E7A5C"/>
+                </a:solidFill>
+                <a:latin typeface="Calibri"/>
+              </a:rPr>
+              <a:t>Review, don't guess — </a:t>
+            </a:r>
+            <a:r>
+              <a:rPr sz="1400">
                 <a:solidFill>
                   <a:srgbClr val="1F2D22"/>
                 </a:solidFill>
-                <a:latin typeface="Cambria"/>
-              </a:rPr>
-              <a:t>Goal Setup</a:t>
-            </a:r>
-          </a:p>
-        </p:txBody>
-      </p:sp>
-      <p:sp>
-        <p:nvSpPr>
-          <p:cNvPr id="12" name="TextBox 11"/>
-          <p:cNvSpPr txBox="1"/>
-          <p:nvPr/>
-        </p:nvSpPr>
-        <p:spPr>
-          <a:xfrm>
-            <a:off x="2194560" y="5257800"/>
-            <a:ext cx="8778240" cy="640080"/>
-          </a:xfrm>
-          <a:prstGeom prst="rect">
-            <a:avLst/>
-          </a:prstGeom>
-          <a:noFill/>
-        </p:spPr>
-        <p:txBody>
-          <a:bodyPr wrap="square" anchor="t" lIns="0" rIns="0" tIns="0" bIns="0">
-            <a:spAutoFit/>
-          </a:bodyPr>
-          <a:lstStyle/>
-          <a:p>
-            <a:pPr algn="l">
-              <a:lnSpc>
-                <a:spcPct val="120000"/>
-              </a:lnSpc>
-            </a:pPr>
-            <a:r>
-              <a:rPr sz="1400" b="0" i="0">
-                <a:solidFill>
-                  <a:srgbClr val="5B6A5F"/>
-                </a:solidFill>
                 <a:latin typeface="Calibri"/>
               </a:rPr>
-              <a:t>Add or remove goals, and set exactly how many minutes each one is worth.</a:t>
-            </a:r>
-          </a:p>
-        </p:txBody>
-      </p:sp>
-    </p:spTree>
-  </p:cSld>
-  <p:clrMapOvr>
-    <a:masterClrMapping/>
-  </p:clrMapOvr>
-</p:sld>
-</file>
-
-<file path=ppt/slides/slide6.xml><?xml version="1.0" encoding="utf-8"?>
-<p:sld xmlns:a="http://schemas.openxmlformats.org/drawingml/2006/main" xmlns:p="http://schemas.openxmlformats.org/presentationml/2006/main" xmlns:r="http://schemas.openxmlformats.org/officeDocument/2006/relationships">
-  <p:cSld>
-    <p:bg>
-      <p:bgPr>
-        <a:solidFill>
-          <a:srgbClr val="2C5A44"/>
-        </a:solidFill>
-        <a:effectLst/>
-      </p:bgPr>
-    </p:bg>
-    <p:spTree>
-      <p:nvGrpSpPr>
-        <p:cNvPr id="1" name=""/>
-        <p:cNvGrpSpPr/>
-        <p:nvPr/>
-      </p:nvGrpSpPr>
-      <p:grpSpPr/>
-      <p:sp>
-        <p:nvSpPr>
-          <p:cNvPr id="2" name="TextBox 1"/>
-          <p:cNvSpPr txBox="1"/>
-          <p:nvPr/>
-        </p:nvSpPr>
-        <p:spPr>
-          <a:xfrm>
-            <a:off x="822960" y="548640"/>
-            <a:ext cx="9144000" cy="548640"/>
-          </a:xfrm>
-          <a:prstGeom prst="rect">
-            <a:avLst/>
-          </a:prstGeom>
-          <a:noFill/>
-        </p:spPr>
-        <p:txBody>
-          <a:bodyPr wrap="square" anchor="t" lIns="0" rIns="0" tIns="0" bIns="0">
-            <a:spAutoFit/>
-          </a:bodyPr>
-          <a:lstStyle/>
-          <a:p>
-            <a:pPr algn="l">
+              <a:t>approve or ask-again on every photo a kid submits.</a:t>
+            </a:r>
+          </a:p>
+          <a:p>
+            <a:pPr indent="-201168" marL="201168">
               <a:lnSpc>
                 <a:spcPct val="115000"/>
               </a:lnSpc>
+              <a:spcAft>
+                <a:spcPts val="1400"/>
+              </a:spcAft>
+              <a:buClr>
+                <a:srgbClr val="3E7A5C"/>
+              </a:buClr>
+              <a:buFont typeface="Arial"/>
+              <a:buChar char="•"/>
             </a:pPr>
             <a:r>
-              <a:rPr sz="3000" b="1" i="0">
-                <a:solidFill>
-                  <a:srgbClr val="FFFFFF"/>
-                </a:solidFill>
-                <a:latin typeface="Cambria"/>
-              </a:rPr>
-              <a:t>How It's Built</a:t>
-            </a:r>
-          </a:p>
-        </p:txBody>
-      </p:sp>
-      <p:sp>
-        <p:nvSpPr>
-          <p:cNvPr id="3" name="TextBox 2"/>
-          <p:cNvSpPr txBox="1"/>
-          <p:nvPr/>
-        </p:nvSpPr>
-        <p:spPr>
-          <a:xfrm>
-            <a:off x="822960" y="1188720"/>
-            <a:ext cx="9601200" cy="548640"/>
-          </a:xfrm>
-          <a:prstGeom prst="rect">
-            <a:avLst/>
-          </a:prstGeom>
-          <a:noFill/>
-        </p:spPr>
-        <p:txBody>
-          <a:bodyPr wrap="square" anchor="t" lIns="0" rIns="0" tIns="0" bIns="0">
-            <a:spAutoFit/>
-          </a:bodyPr>
-          <a:lstStyle/>
-          <a:p>
-            <a:pPr algn="l">
+              <a:rPr b="1" sz="1400">
+                <a:solidFill>
+                  <a:srgbClr val="3E7A5C"/>
+                </a:solidFill>
+                <a:latin typeface="Calibri"/>
+              </a:rPr>
+              <a:t>An honest override — </a:t>
+            </a:r>
+            <a:r>
+              <a:rPr sz="1400">
+                <a:solidFill>
+                  <a:srgbClr val="1F2D22"/>
+                </a:solidFill>
+                <a:latin typeface="Calibri"/>
+              </a:rPr>
+              <a:t>PIN-gated emergency unlock that never falsifies progress.</a:t>
+            </a:r>
+          </a:p>
+          <a:p>
+            <a:pPr indent="-201168" marL="201168">
               <a:lnSpc>
                 <a:spcPct val="115000"/>
               </a:lnSpc>
+              <a:spcAft>
+                <a:spcPts val="1400"/>
+              </a:spcAft>
+              <a:buClr>
+                <a:srgbClr val="3E7A5C"/>
+              </a:buClr>
+              <a:buFont typeface="Arial"/>
+              <a:buChar char="•"/>
             </a:pPr>
             <a:r>
-              <a:rPr sz="1600" b="0" i="0">
-                <a:solidFill>
-                  <a:srgbClr val="DCE8D9"/>
+              <a:rPr b="1" sz="1400">
+                <a:solidFill>
+                  <a:srgbClr val="3E7A5C"/>
                 </a:solidFill>
                 <a:latin typeface="Calibri"/>
               </a:rPr>
-              <a:t>One self-contained file. No backend. No build step.</a:t>
-            </a:r>
-          </a:p>
-        </p:txBody>
-      </p:sp>
-      <p:sp>
-        <p:nvSpPr>
-          <p:cNvPr id="4" name="Rounded Rectangle 3"/>
-          <p:cNvSpPr/>
-          <p:nvPr/>
-        </p:nvSpPr>
-        <p:spPr>
-          <a:xfrm>
-            <a:off x="822960" y="2103120"/>
-            <a:ext cx="3291840" cy="3200400"/>
-          </a:xfrm>
-          <a:prstGeom prst="roundRect">
-            <a:avLst>
-              <a:gd name="adj" fmla="val 12000"/>
-            </a:avLst>
-          </a:prstGeom>
-          <a:solidFill>
-            <a:srgbClr val="1F3D2B"/>
-          </a:solidFill>
-          <a:ln>
-            <a:noFill/>
-          </a:ln>
-          <a:effectLst/>
-        </p:spPr>
-        <p:style>
-          <a:lnRef idx="1">
-            <a:schemeClr val="accent1"/>
-          </a:lnRef>
-          <a:fillRef idx="3">
-            <a:schemeClr val="accent1"/>
-          </a:fillRef>
-          <a:effectRef idx="2">
-            <a:schemeClr val="accent1"/>
-          </a:effectRef>
-          <a:fontRef idx="minor">
-            <a:schemeClr val="lt1"/>
-          </a:fontRef>
-        </p:style>
-        <p:txBody>
-          <a:bodyPr rtlCol="0" anchor="ctr"/>
-          <a:lstStyle/>
-          <a:p>
-            <a:pPr algn="ctr"/>
-          </a:p>
-        </p:txBody>
-      </p:sp>
-      <p:sp>
-        <p:nvSpPr>
-          <p:cNvPr id="5" name="Oval 4"/>
-          <p:cNvSpPr/>
-          <p:nvPr/>
-        </p:nvSpPr>
-        <p:spPr>
-          <a:xfrm>
-            <a:off x="2011680" y="2240280"/>
-            <a:ext cx="914400" cy="914400"/>
-          </a:xfrm>
-          <a:prstGeom prst="ellipse">
-            <a:avLst/>
-          </a:prstGeom>
-          <a:solidFill>
-            <a:srgbClr val="3E7A5C"/>
-          </a:solidFill>
-          <a:ln>
-            <a:noFill/>
-          </a:ln>
-          <a:effectLst/>
-        </p:spPr>
-        <p:style>
-          <a:lnRef idx="1">
-            <a:schemeClr val="accent1"/>
-          </a:lnRef>
-          <a:fillRef idx="3">
-            <a:schemeClr val="accent1"/>
-          </a:fillRef>
-          <a:effectRef idx="2">
-            <a:schemeClr val="accent1"/>
-          </a:effectRef>
-          <a:fontRef idx="minor">
-            <a:schemeClr val="lt1"/>
-          </a:fontRef>
-        </p:style>
-        <p:txBody>
-          <a:bodyPr rtlCol="0" anchor="ctr" lIns="0" rIns="0" tIns="0" bIns="0" wrap="none"/>
-          <a:lstStyle/>
-          <a:p>
-            <a:pPr algn="ctr"/>
-            <a:r>
-              <a:rPr sz="2800">
-                <a:solidFill>
-                  <a:srgbClr val="FFFFFF"/>
-                </a:solidFill>
-              </a:rPr>
-              <a:t>📄</a:t>
-            </a:r>
-          </a:p>
-        </p:txBody>
-      </p:sp>
-      <p:sp>
-        <p:nvSpPr>
-          <p:cNvPr id="6" name="TextBox 5"/>
-          <p:cNvSpPr txBox="1"/>
-          <p:nvPr/>
-        </p:nvSpPr>
-        <p:spPr>
-          <a:xfrm>
-            <a:off x="1097280" y="3337560"/>
-            <a:ext cx="2743200" cy="457200"/>
-          </a:xfrm>
-          <a:prstGeom prst="rect">
-            <a:avLst/>
-          </a:prstGeom>
-          <a:noFill/>
-        </p:spPr>
-        <p:txBody>
-          <a:bodyPr wrap="square" anchor="t" lIns="0" rIns="0" tIns="0" bIns="0">
-            <a:spAutoFit/>
-          </a:bodyPr>
-          <a:lstStyle/>
-          <a:p>
-            <a:pPr algn="ctr">
+              <a:t>Full configurability — </a:t>
+            </a:r>
+            <a:r>
+              <a:rPr sz="1400">
+                <a:solidFill>
+                  <a:srgbClr val="1F2D22"/>
+                </a:solidFill>
+                <a:latin typeface="Calibri"/>
+              </a:rPr>
+              <a:t>add or remove any goal, and set exactly what it's worth.</a:t>
+            </a:r>
+          </a:p>
+          <a:p>
+            <a:pPr indent="-201168" marL="201168">
               <a:lnSpc>
                 <a:spcPct val="115000"/>
               </a:lnSpc>
+              <a:spcAft>
+                <a:spcPts val="1400"/>
+              </a:spcAft>
+              <a:buClr>
+                <a:srgbClr val="3E7A5C"/>
+              </a:buClr>
+              <a:buFont typeface="Arial"/>
+              <a:buChar char="•"/>
             </a:pPr>
             <a:r>
-              <a:rPr sz="1600" b="1" i="0">
-                <a:solidFill>
-                  <a:srgbClr val="FFFFFF"/>
-                </a:solidFill>
-                <a:latin typeface="Cambria"/>
-              </a:rPr>
-              <a:t>Single HTML File</a:t>
-            </a:r>
-          </a:p>
-        </p:txBody>
-      </p:sp>
-      <p:sp>
-        <p:nvSpPr>
-          <p:cNvPr id="7" name="TextBox 6"/>
-          <p:cNvSpPr txBox="1"/>
-          <p:nvPr/>
-        </p:nvSpPr>
-        <p:spPr>
-          <a:xfrm>
-            <a:off x="1097280" y="3840480"/>
-            <a:ext cx="2743200" cy="1280160"/>
-          </a:xfrm>
-          <a:prstGeom prst="rect">
-            <a:avLst/>
-          </a:prstGeom>
-          <a:noFill/>
-        </p:spPr>
-        <p:txBody>
-          <a:bodyPr wrap="square" anchor="t" lIns="0" rIns="0" tIns="0" bIns="0">
-            <a:spAutoFit/>
-          </a:bodyPr>
-          <a:lstStyle/>
-          <a:p>
-            <a:pPr algn="ctr">
-              <a:lnSpc>
-                <a:spcPct val="125000"/>
-              </a:lnSpc>
-            </a:pPr>
-            <a:r>
-              <a:rPr sz="1250" b="0" i="0">
-                <a:solidFill>
-                  <a:srgbClr val="DCE8D9"/>
+              <a:rPr b="1" sz="1400">
+                <a:solidFill>
+                  <a:srgbClr val="3E7A5C"/>
                 </a:solidFill>
                 <a:latin typeface="Calibri"/>
               </a:rPr>
-              <a:t>All markup, styling, and logic in one file — health_first.html — no bundler, no dependencies.</a:t>
-            </a:r>
-          </a:p>
-        </p:txBody>
-      </p:sp>
-      <p:sp>
-        <p:nvSpPr>
-          <p:cNvPr id="8" name="Rounded Rectangle 7"/>
-          <p:cNvSpPr/>
-          <p:nvPr/>
-        </p:nvSpPr>
-        <p:spPr>
-          <a:xfrm>
-            <a:off x="4343400" y="2103120"/>
-            <a:ext cx="3291840" cy="3200400"/>
-          </a:xfrm>
-          <a:prstGeom prst="roundRect">
-            <a:avLst>
-              <a:gd name="adj" fmla="val 12000"/>
-            </a:avLst>
-          </a:prstGeom>
-          <a:solidFill>
-            <a:srgbClr val="1F3D2B"/>
-          </a:solidFill>
-          <a:ln>
-            <a:noFill/>
-          </a:ln>
-          <a:effectLst/>
-        </p:spPr>
-        <p:style>
-          <a:lnRef idx="1">
-            <a:schemeClr val="accent1"/>
-          </a:lnRef>
-          <a:fillRef idx="3">
-            <a:schemeClr val="accent1"/>
-          </a:fillRef>
-          <a:effectRef idx="2">
-            <a:schemeClr val="accent1"/>
-          </a:effectRef>
-          <a:fontRef idx="minor">
-            <a:schemeClr val="lt1"/>
-          </a:fontRef>
-        </p:style>
-        <p:txBody>
-          <a:bodyPr rtlCol="0" anchor="ctr"/>
-          <a:lstStyle/>
-          <a:p>
-            <a:pPr algn="ctr"/>
-          </a:p>
-        </p:txBody>
-      </p:sp>
-      <p:sp>
-        <p:nvSpPr>
-          <p:cNvPr id="9" name="Oval 8"/>
-          <p:cNvSpPr/>
-          <p:nvPr/>
-        </p:nvSpPr>
-        <p:spPr>
-          <a:xfrm>
-            <a:off x="5532120" y="2240280"/>
-            <a:ext cx="914400" cy="914400"/>
-          </a:xfrm>
-          <a:prstGeom prst="ellipse">
-            <a:avLst/>
-          </a:prstGeom>
-          <a:solidFill>
-            <a:srgbClr val="3E7A5C"/>
-          </a:solidFill>
-          <a:ln>
-            <a:noFill/>
-          </a:ln>
-          <a:effectLst/>
-        </p:spPr>
-        <p:style>
-          <a:lnRef idx="1">
-            <a:schemeClr val="accent1"/>
-          </a:lnRef>
-          <a:fillRef idx="3">
-            <a:schemeClr val="accent1"/>
-          </a:fillRef>
-          <a:effectRef idx="2">
-            <a:schemeClr val="accent1"/>
-          </a:effectRef>
-          <a:fontRef idx="minor">
-            <a:schemeClr val="lt1"/>
-          </a:fontRef>
-        </p:style>
-        <p:txBody>
-          <a:bodyPr rtlCol="0" anchor="ctr" lIns="0" rIns="0" tIns="0" bIns="0" wrap="none"/>
-          <a:lstStyle/>
-          <a:p>
-            <a:pPr algn="ctr"/>
-            <a:r>
-              <a:rPr sz="2800">
-                <a:solidFill>
-                  <a:srgbClr val="FFFFFF"/>
-                </a:solidFill>
-              </a:rPr>
-              <a:t>💾</a:t>
-            </a:r>
-          </a:p>
-        </p:txBody>
-      </p:sp>
-      <p:sp>
-        <p:nvSpPr>
-          <p:cNvPr id="10" name="TextBox 9"/>
-          <p:cNvSpPr txBox="1"/>
-          <p:nvPr/>
-        </p:nvSpPr>
-        <p:spPr>
-          <a:xfrm>
-            <a:off x="4617720" y="3337560"/>
-            <a:ext cx="2743200" cy="457200"/>
-          </a:xfrm>
-          <a:prstGeom prst="rect">
-            <a:avLst/>
-          </a:prstGeom>
-          <a:noFill/>
-        </p:spPr>
-        <p:txBody>
-          <a:bodyPr wrap="square" anchor="t" lIns="0" rIns="0" tIns="0" bIns="0">
-            <a:spAutoFit/>
-          </a:bodyPr>
-          <a:lstStyle/>
-          <a:p>
-            <a:pPr algn="ctr">
-              <a:lnSpc>
-                <a:spcPct val="115000"/>
-              </a:lnSpc>
-            </a:pPr>
-            <a:r>
-              <a:rPr sz="1600" b="1" i="0">
-                <a:solidFill>
-                  <a:srgbClr val="FFFFFF"/>
-                </a:solidFill>
-                <a:latin typeface="Cambria"/>
-              </a:rPr>
-              <a:t>Browser localStorage</a:t>
-            </a:r>
-          </a:p>
-        </p:txBody>
-      </p:sp>
-      <p:sp>
-        <p:nvSpPr>
-          <p:cNvPr id="11" name="TextBox 10"/>
-          <p:cNvSpPr txBox="1"/>
-          <p:nvPr/>
-        </p:nvSpPr>
-        <p:spPr>
-          <a:xfrm>
-            <a:off x="4617720" y="3840480"/>
-            <a:ext cx="2743200" cy="1280160"/>
-          </a:xfrm>
-          <a:prstGeom prst="rect">
-            <a:avLst/>
-          </a:prstGeom>
-          <a:noFill/>
-        </p:spPr>
-        <p:txBody>
-          <a:bodyPr wrap="square" anchor="t" lIns="0" rIns="0" tIns="0" bIns="0">
-            <a:spAutoFit/>
-          </a:bodyPr>
-          <a:lstStyle/>
-          <a:p>
-            <a:pPr algn="ctr">
-              <a:lnSpc>
-                <a:spcPct val="125000"/>
-              </a:lnSpc>
-            </a:pPr>
-            <a:r>
-              <a:rPr sz="1250" b="0" i="0">
-                <a:solidFill>
-                  <a:srgbClr val="DCE8D9"/>
+              <a:t>No coding required — </a:t>
+            </a:r>
+            <a:r>
+              <a:rPr sz="1400">
+                <a:solidFill>
+                  <a:srgbClr val="1F2D22"/>
                 </a:solidFill>
                 <a:latin typeface="Calibri"/>
               </a:rPr>
-              <a:t>Goals, streaks, minute balance, and history persist per day with automatic daily rollover.</a:t>
-            </a:r>
-          </a:p>
-        </p:txBody>
-      </p:sp>
-      <p:sp>
-        <p:nvSpPr>
-          <p:cNvPr id="12" name="Rounded Rectangle 11"/>
-          <p:cNvSpPr/>
-          <p:nvPr/>
-        </p:nvSpPr>
-        <p:spPr>
-          <a:xfrm>
-            <a:off x="7863840" y="2103120"/>
-            <a:ext cx="3291840" cy="3200400"/>
-          </a:xfrm>
-          <a:prstGeom prst="roundRect">
-            <a:avLst>
-              <a:gd name="adj" fmla="val 12000"/>
-            </a:avLst>
-          </a:prstGeom>
-          <a:solidFill>
-            <a:srgbClr val="1F3D2B"/>
-          </a:solidFill>
-          <a:ln>
-            <a:noFill/>
-          </a:ln>
-          <a:effectLst/>
-        </p:spPr>
-        <p:style>
-          <a:lnRef idx="1">
-            <a:schemeClr val="accent1"/>
-          </a:lnRef>
-          <a:fillRef idx="3">
-            <a:schemeClr val="accent1"/>
-          </a:fillRef>
-          <a:effectRef idx="2">
-            <a:schemeClr val="accent1"/>
-          </a:effectRef>
-          <a:fontRef idx="minor">
-            <a:schemeClr val="lt1"/>
-          </a:fontRef>
-        </p:style>
-        <p:txBody>
-          <a:bodyPr rtlCol="0" anchor="ctr"/>
-          <a:lstStyle/>
-          <a:p>
-            <a:pPr algn="ctr"/>
-          </a:p>
-        </p:txBody>
-      </p:sp>
-      <p:sp>
-        <p:nvSpPr>
-          <p:cNvPr id="13" name="Oval 12"/>
-          <p:cNvSpPr/>
-          <p:nvPr/>
-        </p:nvSpPr>
-        <p:spPr>
-          <a:xfrm>
-            <a:off x="9052560" y="2240280"/>
-            <a:ext cx="914400" cy="914400"/>
-          </a:xfrm>
-          <a:prstGeom prst="ellipse">
-            <a:avLst/>
-          </a:prstGeom>
-          <a:solidFill>
-            <a:srgbClr val="3E7A5C"/>
-          </a:solidFill>
-          <a:ln>
-            <a:noFill/>
-          </a:ln>
-          <a:effectLst/>
-        </p:spPr>
-        <p:style>
-          <a:lnRef idx="1">
-            <a:schemeClr val="accent1"/>
-          </a:lnRef>
-          <a:fillRef idx="3">
-            <a:schemeClr val="accent1"/>
-          </a:fillRef>
-          <a:effectRef idx="2">
-            <a:schemeClr val="accent1"/>
-          </a:effectRef>
-          <a:fontRef idx="minor">
-            <a:schemeClr val="lt1"/>
-          </a:fontRef>
-        </p:style>
-        <p:txBody>
-          <a:bodyPr rtlCol="0" anchor="ctr" lIns="0" rIns="0" tIns="0" bIns="0" wrap="none"/>
-          <a:lstStyle/>
-          <a:p>
-            <a:pPr algn="ctr"/>
-            <a:r>
-              <a:rPr sz="2800">
-                <a:solidFill>
-                  <a:srgbClr val="FFFFFF"/>
-                </a:solidFill>
-              </a:rPr>
-              <a:t>🔄</a:t>
-            </a:r>
-          </a:p>
-        </p:txBody>
-      </p:sp>
-      <p:sp>
-        <p:nvSpPr>
-          <p:cNvPr id="14" name="TextBox 13"/>
-          <p:cNvSpPr txBox="1"/>
-          <p:nvPr/>
-        </p:nvSpPr>
-        <p:spPr>
-          <a:xfrm>
-            <a:off x="8138160" y="3337560"/>
-            <a:ext cx="2743200" cy="457200"/>
-          </a:xfrm>
-          <a:prstGeom prst="rect">
-            <a:avLst/>
-          </a:prstGeom>
-          <a:noFill/>
-        </p:spPr>
-        <p:txBody>
-          <a:bodyPr wrap="square" anchor="t" lIns="0" rIns="0" tIns="0" bIns="0">
-            <a:spAutoFit/>
-          </a:bodyPr>
-          <a:lstStyle/>
-          <a:p>
-            <a:pPr algn="ctr">
-              <a:lnSpc>
-                <a:spcPct val="115000"/>
-              </a:lnSpc>
-            </a:pPr>
-            <a:r>
-              <a:rPr sz="1600" b="1" i="0">
-                <a:solidFill>
-                  <a:srgbClr val="FFFFFF"/>
-                </a:solidFill>
-                <a:latin typeface="Cambria"/>
-              </a:rPr>
-              <a:t>Re-render on Change</a:t>
-            </a:r>
-          </a:p>
-        </p:txBody>
-      </p:sp>
-      <p:sp>
-        <p:nvSpPr>
-          <p:cNvPr id="15" name="TextBox 14"/>
-          <p:cNvSpPr txBox="1"/>
-          <p:nvPr/>
-        </p:nvSpPr>
-        <p:spPr>
-          <a:xfrm>
-            <a:off x="8138160" y="3840480"/>
-            <a:ext cx="2743200" cy="1280160"/>
-          </a:xfrm>
-          <a:prstGeom prst="rect">
-            <a:avLst/>
-          </a:prstGeom>
-          <a:noFill/>
-        </p:spPr>
-        <p:txBody>
-          <a:bodyPr wrap="square" anchor="t" lIns="0" rIns="0" tIns="0" bIns="0">
-            <a:spAutoFit/>
-          </a:bodyPr>
-          <a:lstStyle/>
-          <a:p>
-            <a:pPr algn="ctr">
-              <a:lnSpc>
-                <a:spcPct val="125000"/>
-              </a:lnSpc>
-            </a:pPr>
-            <a:r>
-              <a:rPr sz="1250" b="0" i="0">
-                <a:solidFill>
-                  <a:srgbClr val="DCE8D9"/>
-                </a:solidFill>
-                <a:latin typeface="Calibri"/>
-              </a:rPr>
-              <a:t>Every action mutates one state object, then redraws the current view — fast to iterate on.</a:t>
+              <a:t>every control lives in a simple in-app dashboard.</a:t>
             </a:r>
           </a:p>
         </p:txBody>
@@ -7276,8 +7680,8 @@
         </p:nvSpPr>
         <p:spPr>
           <a:xfrm>
-            <a:off x="822960" y="548640"/>
-            <a:ext cx="9144000" cy="548640"/>
+            <a:off x="822960" y="502920"/>
+            <a:ext cx="10332720" cy="914400"/>
           </a:xfrm>
           <a:prstGeom prst="rect">
             <a:avLst/>
@@ -7302,7 +7706,7 @@
                 </a:solidFill>
                 <a:latin typeface="Cambria"/>
               </a:rPr>
-              <a:t>From Finding to Feature</a:t>
+              <a:t>Built for One Family. Designed for Every Family.</a:t>
             </a:r>
           </a:p>
         </p:txBody>
@@ -7315,12 +7719,12 @@
         </p:nvSpPr>
         <p:spPr>
           <a:xfrm>
-            <a:off x="822960" y="1554480"/>
-            <a:ext cx="1874519" cy="1005840"/>
+            <a:off x="822960" y="1828800"/>
+            <a:ext cx="5074920" cy="2103120"/>
           </a:xfrm>
           <a:prstGeom prst="roundRect">
             <a:avLst>
-              <a:gd name="adj" fmla="val 12000"/>
+              <a:gd name="adj" fmla="val 10000"/>
             </a:avLst>
           </a:prstGeom>
           <a:solidFill>
@@ -7355,116 +7759,20 @@
       </p:sp>
       <p:sp>
         <p:nvSpPr>
-          <p:cNvPr id="4" name="TextBox 3"/>
-          <p:cNvSpPr txBox="1"/>
-          <p:nvPr/>
-        </p:nvSpPr>
-        <p:spPr>
-          <a:xfrm>
-            <a:off x="822960" y="1554480"/>
-            <a:ext cx="1874519" cy="1005840"/>
-          </a:xfrm>
-          <a:prstGeom prst="rect">
+          <p:cNvPr id="4" name="Oval 3"/>
+          <p:cNvSpPr/>
+          <p:nvPr/>
+        </p:nvSpPr>
+        <p:spPr>
+          <a:xfrm>
+            <a:off x="1188720" y="2103120"/>
+            <a:ext cx="822960" cy="822960"/>
+          </a:xfrm>
+          <a:prstGeom prst="ellipse">
             <a:avLst/>
           </a:prstGeom>
-          <a:noFill/>
-        </p:spPr>
-        <p:txBody>
-          <a:bodyPr wrap="square" anchor="ctr" lIns="0" rIns="0" tIns="0" bIns="0">
-            <a:spAutoFit/>
-          </a:bodyPr>
-          <a:lstStyle/>
-          <a:p>
-            <a:pPr algn="ctr">
-              <a:lnSpc>
-                <a:spcPct val="115000"/>
-              </a:lnSpc>
-            </a:pPr>
-            <a:r>
-              <a:rPr sz="1300" b="1" i="0">
-                <a:solidFill>
-                  <a:srgbClr val="2C5A44"/>
-                </a:solidFill>
-                <a:latin typeface="Calibri"/>
-              </a:rPr>
-              <a:t>Week 1</a:t>
-            </a:r>
-          </a:p>
-          <a:p>
-            <a:pPr algn="ctr">
-              <a:lnSpc>
-                <a:spcPct val="115000"/>
-              </a:lnSpc>
-            </a:pPr>
-            <a:r>
-              <a:rPr sz="1300" b="1" i="0">
-                <a:solidFill>
-                  <a:srgbClr val="2C5A44"/>
-                </a:solidFill>
-                <a:latin typeface="Calibri"/>
-              </a:rPr>
-              <a:t>Blueprint</a:t>
-            </a:r>
-          </a:p>
-        </p:txBody>
-      </p:sp>
-      <p:sp>
-        <p:nvSpPr>
-          <p:cNvPr id="5" name="TextBox 4"/>
-          <p:cNvSpPr txBox="1"/>
-          <p:nvPr/>
-        </p:nvSpPr>
-        <p:spPr>
-          <a:xfrm>
-            <a:off x="2724911" y="1554480"/>
-            <a:ext cx="365760" cy="1005840"/>
-          </a:xfrm>
-          <a:prstGeom prst="rect">
-            <a:avLst/>
-          </a:prstGeom>
-          <a:noFill/>
-        </p:spPr>
-        <p:txBody>
-          <a:bodyPr wrap="square" anchor="ctr" lIns="0" rIns="0" tIns="0" bIns="0">
-            <a:spAutoFit/>
-          </a:bodyPr>
-          <a:lstStyle/>
-          <a:p>
-            <a:pPr algn="ctr">
-              <a:lnSpc>
-                <a:spcPct val="115000"/>
-              </a:lnSpc>
-            </a:pPr>
-            <a:r>
-              <a:rPr sz="1800" b="1" i="0">
-                <a:solidFill>
-                  <a:srgbClr val="5B6A5F"/>
-                </a:solidFill>
-                <a:latin typeface="Calibri"/>
-              </a:rPr>
-              <a:t>→</a:t>
-            </a:r>
-          </a:p>
-        </p:txBody>
-      </p:sp>
-      <p:sp>
-        <p:nvSpPr>
-          <p:cNvPr id="6" name="Rounded Rectangle 5"/>
-          <p:cNvSpPr/>
-          <p:nvPr/>
-        </p:nvSpPr>
-        <p:spPr>
-          <a:xfrm>
-            <a:off x="2926079" y="1554480"/>
-            <a:ext cx="1874519" cy="1005840"/>
-          </a:xfrm>
-          <a:prstGeom prst="roundRect">
-            <a:avLst>
-              <a:gd name="adj" fmla="val 12000"/>
-            </a:avLst>
-          </a:prstGeom>
           <a:solidFill>
-            <a:srgbClr val="DCE8D9"/>
+            <a:srgbClr val="FFFFFF"/>
           </a:solidFill>
           <a:ln>
             <a:noFill/>
@@ -7486,23 +7794,31 @@
           </a:fontRef>
         </p:style>
         <p:txBody>
-          <a:bodyPr rtlCol="0" anchor="ctr"/>
+          <a:bodyPr rtlCol="0" anchor="ctr" lIns="0" rIns="0" tIns="0" bIns="0" wrap="none"/>
           <a:lstStyle/>
           <a:p>
             <a:pPr algn="ctr"/>
-          </a:p>
-        </p:txBody>
-      </p:sp>
-      <p:sp>
-        <p:nvSpPr>
-          <p:cNvPr id="7" name="TextBox 6"/>
+            <a:r>
+              <a:rPr sz="2500">
+                <a:solidFill>
+                  <a:srgbClr val="3E7A5C"/>
+                </a:solidFill>
+              </a:rPr>
+              <a:t>🌍</a:t>
+            </a:r>
+          </a:p>
+        </p:txBody>
+      </p:sp>
+      <p:sp>
+        <p:nvSpPr>
+          <p:cNvPr id="5" name="TextBox 4"/>
           <p:cNvSpPr txBox="1"/>
           <p:nvPr/>
         </p:nvSpPr>
         <p:spPr>
           <a:xfrm>
-            <a:off x="2926079" y="1554480"/>
-            <a:ext cx="1874519" cy="1005840"/>
+            <a:off x="2194560" y="2121408"/>
+            <a:ext cx="3566160" cy="457200"/>
           </a:xfrm>
           <a:prstGeom prst="rect">
             <a:avLst/>
@@ -7510,101 +7826,85 @@
           <a:noFill/>
         </p:spPr>
         <p:txBody>
-          <a:bodyPr wrap="square" anchor="ctr" lIns="0" rIns="0" tIns="0" bIns="0">
+          <a:bodyPr wrap="square" anchor="t" lIns="0" rIns="0" tIns="0" bIns="0">
             <a:spAutoFit/>
           </a:bodyPr>
           <a:lstStyle/>
           <a:p>
-            <a:pPr algn="ctr">
+            <a:pPr algn="l">
               <a:lnSpc>
                 <a:spcPct val="115000"/>
               </a:lnSpc>
             </a:pPr>
             <a:r>
-              <a:rPr sz="1300" b="1" i="0">
-                <a:solidFill>
-                  <a:srgbClr val="2C5A44"/>
-                </a:solidFill>
-                <a:latin typeface="Calibri"/>
-              </a:rPr>
-              <a:t>Week 2</a:t>
-            </a:r>
-          </a:p>
-          <a:p>
-            <a:pPr algn="ctr">
+              <a:rPr sz="1550" b="1" i="0">
+                <a:solidFill>
+                  <a:srgbClr val="1F2D22"/>
+                </a:solidFill>
+                <a:latin typeface="Cambria"/>
+              </a:rPr>
+              <a:t>Universal habits</a:t>
+            </a:r>
+          </a:p>
+        </p:txBody>
+      </p:sp>
+      <p:sp>
+        <p:nvSpPr>
+          <p:cNvPr id="6" name="TextBox 5"/>
+          <p:cNvSpPr txBox="1"/>
+          <p:nvPr/>
+        </p:nvSpPr>
+        <p:spPr>
+          <a:xfrm>
+            <a:off x="2194560" y="2606040"/>
+            <a:ext cx="3566160" cy="1234440"/>
+          </a:xfrm>
+          <a:prstGeom prst="rect">
+            <a:avLst/>
+          </a:prstGeom>
+          <a:noFill/>
+        </p:spPr>
+        <p:txBody>
+          <a:bodyPr wrap="square" anchor="t" lIns="0" rIns="0" tIns="0" bIns="0">
+            <a:spAutoFit/>
+          </a:bodyPr>
+          <a:lstStyle/>
+          <a:p>
+            <a:pPr algn="l">
               <a:lnSpc>
-                <a:spcPct val="115000"/>
+                <a:spcPct val="120000"/>
               </a:lnSpc>
             </a:pPr>
             <a:r>
-              <a:rPr sz="1300" b="1" i="0">
-                <a:solidFill>
-                  <a:srgbClr val="2C5A44"/>
+              <a:rPr sz="1150" b="0" i="0">
+                <a:solidFill>
+                  <a:srgbClr val="5B6A5F"/>
                 </a:solidFill>
                 <a:latin typeface="Calibri"/>
               </a:rPr>
-              <a:t>Prototype</a:t>
-            </a:r>
-          </a:p>
-        </p:txBody>
-      </p:sp>
-      <p:sp>
-        <p:nvSpPr>
-          <p:cNvPr id="8" name="TextBox 7"/>
-          <p:cNvSpPr txBox="1"/>
-          <p:nvPr/>
-        </p:nvSpPr>
-        <p:spPr>
-          <a:xfrm>
-            <a:off x="4828032" y="1554480"/>
-            <a:ext cx="365760" cy="1005840"/>
-          </a:xfrm>
-          <a:prstGeom prst="rect">
-            <a:avLst/>
-          </a:prstGeom>
-          <a:noFill/>
-        </p:spPr>
-        <p:txBody>
-          <a:bodyPr wrap="square" anchor="ctr" lIns="0" rIns="0" tIns="0" bIns="0">
-            <a:spAutoFit/>
-          </a:bodyPr>
-          <a:lstStyle/>
-          <a:p>
-            <a:pPr algn="ctr">
-              <a:lnSpc>
-                <a:spcPct val="115000"/>
-              </a:lnSpc>
-            </a:pPr>
-            <a:r>
-              <a:rPr sz="1800" b="1" i="0">
-                <a:solidFill>
-                  <a:srgbClr val="5B6A5F"/>
-                </a:solidFill>
-                <a:latin typeface="Calibri"/>
-              </a:rPr>
-              <a:t>→</a:t>
-            </a:r>
-          </a:p>
-        </p:txBody>
-      </p:sp>
-      <p:sp>
-        <p:nvSpPr>
-          <p:cNvPr id="9" name="Rounded Rectangle 8"/>
+              <a:t>Water, sleep, movement, and nutrition are the same challenge in every home, every culture, every income level — this isn't a niche problem.</a:t>
+            </a:r>
+          </a:p>
+        </p:txBody>
+      </p:sp>
+      <p:sp>
+        <p:nvSpPr>
+          <p:cNvPr id="7" name="Rounded Rectangle 6"/>
           <p:cNvSpPr/>
           <p:nvPr/>
         </p:nvSpPr>
         <p:spPr>
           <a:xfrm>
-            <a:off x="5029200" y="1554480"/>
-            <a:ext cx="1874519" cy="1005840"/>
+            <a:off x="6355080" y="1828800"/>
+            <a:ext cx="5074920" cy="2103120"/>
           </a:xfrm>
           <a:prstGeom prst="roundRect">
             <a:avLst>
-              <a:gd name="adj" fmla="val 12000"/>
+              <a:gd name="adj" fmla="val 10000"/>
             </a:avLst>
           </a:prstGeom>
           <a:solidFill>
-            <a:srgbClr val="DCE8D9"/>
+            <a:srgbClr val="F7E1D5"/>
           </a:solidFill>
           <a:ln>
             <a:noFill/>
@@ -7635,116 +7935,20 @@
       </p:sp>
       <p:sp>
         <p:nvSpPr>
-          <p:cNvPr id="10" name="TextBox 9"/>
-          <p:cNvSpPr txBox="1"/>
-          <p:nvPr/>
-        </p:nvSpPr>
-        <p:spPr>
-          <a:xfrm>
-            <a:off x="5029200" y="1554480"/>
-            <a:ext cx="1874519" cy="1005840"/>
-          </a:xfrm>
-          <a:prstGeom prst="rect">
+          <p:cNvPr id="8" name="Oval 7"/>
+          <p:cNvSpPr/>
+          <p:nvPr/>
+        </p:nvSpPr>
+        <p:spPr>
+          <a:xfrm>
+            <a:off x="6720840" y="2103120"/>
+            <a:ext cx="822960" cy="822960"/>
+          </a:xfrm>
+          <a:prstGeom prst="ellipse">
             <a:avLst/>
           </a:prstGeom>
-          <a:noFill/>
-        </p:spPr>
-        <p:txBody>
-          <a:bodyPr wrap="square" anchor="ctr" lIns="0" rIns="0" tIns="0" bIns="0">
-            <a:spAutoFit/>
-          </a:bodyPr>
-          <a:lstStyle/>
-          <a:p>
-            <a:pPr algn="ctr">
-              <a:lnSpc>
-                <a:spcPct val="115000"/>
-              </a:lnSpc>
-            </a:pPr>
-            <a:r>
-              <a:rPr sz="1300" b="1" i="0">
-                <a:solidFill>
-                  <a:srgbClr val="2C5A44"/>
-                </a:solidFill>
-                <a:latin typeface="Calibri"/>
-              </a:rPr>
-              <a:t>Week 3</a:t>
-            </a:r>
-          </a:p>
-          <a:p>
-            <a:pPr algn="ctr">
-              <a:lnSpc>
-                <a:spcPct val="115000"/>
-              </a:lnSpc>
-            </a:pPr>
-            <a:r>
-              <a:rPr sz="1300" b="1" i="0">
-                <a:solidFill>
-                  <a:srgbClr val="2C5A44"/>
-                </a:solidFill>
-                <a:latin typeface="Calibri"/>
-              </a:rPr>
-              <a:t>AI + Automation</a:t>
-            </a:r>
-          </a:p>
-        </p:txBody>
-      </p:sp>
-      <p:sp>
-        <p:nvSpPr>
-          <p:cNvPr id="11" name="TextBox 10"/>
-          <p:cNvSpPr txBox="1"/>
-          <p:nvPr/>
-        </p:nvSpPr>
-        <p:spPr>
-          <a:xfrm>
-            <a:off x="6931152" y="1554480"/>
-            <a:ext cx="365760" cy="1005840"/>
-          </a:xfrm>
-          <a:prstGeom prst="rect">
-            <a:avLst/>
-          </a:prstGeom>
-          <a:noFill/>
-        </p:spPr>
-        <p:txBody>
-          <a:bodyPr wrap="square" anchor="ctr" lIns="0" rIns="0" tIns="0" bIns="0">
-            <a:spAutoFit/>
-          </a:bodyPr>
-          <a:lstStyle/>
-          <a:p>
-            <a:pPr algn="ctr">
-              <a:lnSpc>
-                <a:spcPct val="115000"/>
-              </a:lnSpc>
-            </a:pPr>
-            <a:r>
-              <a:rPr sz="1800" b="1" i="0">
-                <a:solidFill>
-                  <a:srgbClr val="5B6A5F"/>
-                </a:solidFill>
-                <a:latin typeface="Calibri"/>
-              </a:rPr>
-              <a:t>→</a:t>
-            </a:r>
-          </a:p>
-        </p:txBody>
-      </p:sp>
-      <p:sp>
-        <p:nvSpPr>
-          <p:cNvPr id="12" name="Rounded Rectangle 11"/>
-          <p:cNvSpPr/>
-          <p:nvPr/>
-        </p:nvSpPr>
-        <p:spPr>
-          <a:xfrm>
-            <a:off x="7132320" y="1554480"/>
-            <a:ext cx="1874519" cy="1005840"/>
-          </a:xfrm>
-          <a:prstGeom prst="roundRect">
-            <a:avLst>
-              <a:gd name="adj" fmla="val 12000"/>
-            </a:avLst>
-          </a:prstGeom>
           <a:solidFill>
-            <a:srgbClr val="DD6B42"/>
+            <a:srgbClr val="FFFFFF"/>
           </a:solidFill>
           <a:ln>
             <a:noFill/>
@@ -7766,23 +7970,31 @@
           </a:fontRef>
         </p:style>
         <p:txBody>
-          <a:bodyPr rtlCol="0" anchor="ctr"/>
+          <a:bodyPr rtlCol="0" anchor="ctr" lIns="0" rIns="0" tIns="0" bIns="0" wrap="none"/>
           <a:lstStyle/>
           <a:p>
             <a:pPr algn="ctr"/>
-          </a:p>
-        </p:txBody>
-      </p:sp>
-      <p:sp>
-        <p:nvSpPr>
-          <p:cNvPr id="13" name="TextBox 12"/>
+            <a:r>
+              <a:rPr sz="2500">
+                <a:solidFill>
+                  <a:srgbClr val="DD6B42"/>
+                </a:solidFill>
+              </a:rPr>
+              <a:t>🧩</a:t>
+            </a:r>
+          </a:p>
+        </p:txBody>
+      </p:sp>
+      <p:sp>
+        <p:nvSpPr>
+          <p:cNvPr id="9" name="TextBox 8"/>
           <p:cNvSpPr txBox="1"/>
           <p:nvPr/>
         </p:nvSpPr>
         <p:spPr>
           <a:xfrm>
-            <a:off x="7132320" y="1554480"/>
-            <a:ext cx="1874519" cy="1005840"/>
+            <a:off x="7726679" y="2121408"/>
+            <a:ext cx="3566160" cy="457200"/>
           </a:xfrm>
           <a:prstGeom prst="rect">
             <a:avLst/>
@@ -7790,101 +8002,85 @@
           <a:noFill/>
         </p:spPr>
         <p:txBody>
-          <a:bodyPr wrap="square" anchor="ctr" lIns="0" rIns="0" tIns="0" bIns="0">
+          <a:bodyPr wrap="square" anchor="t" lIns="0" rIns="0" tIns="0" bIns="0">
             <a:spAutoFit/>
           </a:bodyPr>
           <a:lstStyle/>
           <a:p>
-            <a:pPr algn="ctr">
+            <a:pPr algn="l">
               <a:lnSpc>
                 <a:spcPct val="115000"/>
               </a:lnSpc>
             </a:pPr>
             <a:r>
-              <a:rPr sz="1300" b="1" i="0">
-                <a:solidFill>
-                  <a:srgbClr val="FFFFFF"/>
-                </a:solidFill>
-                <a:latin typeface="Calibri"/>
-              </a:rPr>
-              <a:t>Week 4</a:t>
-            </a:r>
-          </a:p>
-          <a:p>
-            <a:pPr algn="ctr">
+              <a:rPr sz="1550" b="1" i="0">
+                <a:solidFill>
+                  <a:srgbClr val="1F2D22"/>
+                </a:solidFill>
+                <a:latin typeface="Cambria"/>
+              </a:rPr>
+              <a:t>Any habit, not just health</a:t>
+            </a:r>
+          </a:p>
+        </p:txBody>
+      </p:sp>
+      <p:sp>
+        <p:nvSpPr>
+          <p:cNvPr id="10" name="TextBox 9"/>
+          <p:cNvSpPr txBox="1"/>
+          <p:nvPr/>
+        </p:nvSpPr>
+        <p:spPr>
+          <a:xfrm>
+            <a:off x="7726679" y="2606040"/>
+            <a:ext cx="3566160" cy="1234440"/>
+          </a:xfrm>
+          <a:prstGeom prst="rect">
+            <a:avLst/>
+          </a:prstGeom>
+          <a:noFill/>
+        </p:spPr>
+        <p:txBody>
+          <a:bodyPr wrap="square" anchor="t" lIns="0" rIns="0" tIns="0" bIns="0">
+            <a:spAutoFit/>
+          </a:bodyPr>
+          <a:lstStyle/>
+          <a:p>
+            <a:pPr algn="l">
               <a:lnSpc>
-                <a:spcPct val="115000"/>
+                <a:spcPct val="120000"/>
               </a:lnSpc>
             </a:pPr>
             <a:r>
-              <a:rPr sz="1300" b="1" i="0">
-                <a:solidFill>
-                  <a:srgbClr val="FFFFFF"/>
+              <a:rPr sz="1150" b="0" i="0">
+                <a:solidFill>
+                  <a:srgbClr val="5B6A5F"/>
                 </a:solidFill>
                 <a:latin typeface="Calibri"/>
               </a:rPr>
-              <a:t>User Finding</a:t>
-            </a:r>
-          </a:p>
-        </p:txBody>
-      </p:sp>
-      <p:sp>
-        <p:nvSpPr>
-          <p:cNvPr id="14" name="TextBox 13"/>
-          <p:cNvSpPr txBox="1"/>
-          <p:nvPr/>
-        </p:nvSpPr>
-        <p:spPr>
-          <a:xfrm>
-            <a:off x="9034272" y="1554480"/>
-            <a:ext cx="365760" cy="1005840"/>
-          </a:xfrm>
-          <a:prstGeom prst="rect">
-            <a:avLst/>
-          </a:prstGeom>
-          <a:noFill/>
-        </p:spPr>
-        <p:txBody>
-          <a:bodyPr wrap="square" anchor="ctr" lIns="0" rIns="0" tIns="0" bIns="0">
-            <a:spAutoFit/>
-          </a:bodyPr>
-          <a:lstStyle/>
-          <a:p>
-            <a:pPr algn="ctr">
-              <a:lnSpc>
-                <a:spcPct val="115000"/>
-              </a:lnSpc>
-            </a:pPr>
-            <a:r>
-              <a:rPr sz="1800" b="1" i="0">
-                <a:solidFill>
-                  <a:srgbClr val="5B6A5F"/>
-                </a:solidFill>
-                <a:latin typeface="Calibri"/>
-              </a:rPr>
-              <a:t>→</a:t>
-            </a:r>
-          </a:p>
-        </p:txBody>
-      </p:sp>
-      <p:sp>
-        <p:nvSpPr>
-          <p:cNvPr id="15" name="Rounded Rectangle 14"/>
+              <a:t>Parents can already add custom goals — reading, chores, homework — the checklist → proof → reward engine generalizes far beyond the 4 defaults.</a:t>
+            </a:r>
+          </a:p>
+        </p:txBody>
+      </p:sp>
+      <p:sp>
+        <p:nvSpPr>
+          <p:cNvPr id="11" name="Rounded Rectangle 10"/>
           <p:cNvSpPr/>
           <p:nvPr/>
         </p:nvSpPr>
         <p:spPr>
           <a:xfrm>
-            <a:off x="9235440" y="1554480"/>
-            <a:ext cx="1874519" cy="1005840"/>
+            <a:off x="822960" y="4160520"/>
+            <a:ext cx="5074920" cy="2103120"/>
           </a:xfrm>
           <a:prstGeom prst="roundRect">
             <a:avLst>
-              <a:gd name="adj" fmla="val 12000"/>
+              <a:gd name="adj" fmla="val 10000"/>
             </a:avLst>
           </a:prstGeom>
           <a:solidFill>
-            <a:srgbClr val="DD6B42"/>
+            <a:srgbClr val="F5E7C9"/>
           </a:solidFill>
           <a:ln>
             <a:noFill/>
@@ -7915,77 +8111,20 @@
       </p:sp>
       <p:sp>
         <p:nvSpPr>
-          <p:cNvPr id="16" name="TextBox 15"/>
-          <p:cNvSpPr txBox="1"/>
-          <p:nvPr/>
-        </p:nvSpPr>
-        <p:spPr>
-          <a:xfrm>
-            <a:off x="9235440" y="1554480"/>
-            <a:ext cx="1874519" cy="1005840"/>
-          </a:xfrm>
-          <a:prstGeom prst="rect">
+          <p:cNvPr id="12" name="Oval 11"/>
+          <p:cNvSpPr/>
+          <p:nvPr/>
+        </p:nvSpPr>
+        <p:spPr>
+          <a:xfrm>
+            <a:off x="1188720" y="4434840"/>
+            <a:ext cx="822960" cy="822960"/>
+          </a:xfrm>
+          <a:prstGeom prst="ellipse">
             <a:avLst/>
           </a:prstGeom>
-          <a:noFill/>
-        </p:spPr>
-        <p:txBody>
-          <a:bodyPr wrap="square" anchor="ctr" lIns="0" rIns="0" tIns="0" bIns="0">
-            <a:spAutoFit/>
-          </a:bodyPr>
-          <a:lstStyle/>
-          <a:p>
-            <a:pPr algn="ctr">
-              <a:lnSpc>
-                <a:spcPct val="115000"/>
-              </a:lnSpc>
-            </a:pPr>
-            <a:r>
-              <a:rPr sz="1300" b="1" i="0">
-                <a:solidFill>
-                  <a:srgbClr val="FFFFFF"/>
-                </a:solidFill>
-                <a:latin typeface="Calibri"/>
-              </a:rPr>
-              <a:t>Week 5</a:t>
-            </a:r>
-          </a:p>
-          <a:p>
-            <a:pPr algn="ctr">
-              <a:lnSpc>
-                <a:spcPct val="115000"/>
-              </a:lnSpc>
-            </a:pPr>
-            <a:r>
-              <a:rPr sz="1300" b="1" i="0">
-                <a:solidFill>
-                  <a:srgbClr val="FFFFFF"/>
-                </a:solidFill>
-                <a:latin typeface="Calibri"/>
-              </a:rPr>
-              <a:t>Redesigned Rewards</a:t>
-            </a:r>
-          </a:p>
-        </p:txBody>
-      </p:sp>
-      <p:sp>
-        <p:nvSpPr>
-          <p:cNvPr id="17" name="Rounded Rectangle 16"/>
-          <p:cNvSpPr/>
-          <p:nvPr/>
-        </p:nvSpPr>
-        <p:spPr>
-          <a:xfrm>
-            <a:off x="822960" y="3063240"/>
-            <a:ext cx="10515600" cy="3017520"/>
-          </a:xfrm>
-          <a:prstGeom prst="roundRect">
-            <a:avLst>
-              <a:gd name="adj" fmla="val 12000"/>
-            </a:avLst>
-          </a:prstGeom>
           <a:solidFill>
-            <a:srgbClr val="DCE8D9"/>
+            <a:srgbClr val="FFFFFF"/>
           </a:solidFill>
           <a:ln>
             <a:noFill/>
@@ -8007,23 +8146,31 @@
           </a:fontRef>
         </p:style>
         <p:txBody>
-          <a:bodyPr rtlCol="0" anchor="ctr"/>
+          <a:bodyPr rtlCol="0" anchor="ctr" lIns="0" rIns="0" tIns="0" bIns="0" wrap="none"/>
           <a:lstStyle/>
           <a:p>
             <a:pPr algn="ctr"/>
-          </a:p>
-        </p:txBody>
-      </p:sp>
-      <p:sp>
-        <p:nvSpPr>
-          <p:cNvPr id="18" name="TextBox 17"/>
+            <a:r>
+              <a:rPr sz="2500">
+                <a:solidFill>
+                  <a:srgbClr val="DB9D3B"/>
+                </a:solidFill>
+              </a:rPr>
+              <a:t>📱</a:t>
+            </a:r>
+          </a:p>
+        </p:txBody>
+      </p:sp>
+      <p:sp>
+        <p:nvSpPr>
+          <p:cNvPr id="13" name="TextBox 12"/>
           <p:cNvSpPr txBox="1"/>
           <p:nvPr/>
         </p:nvSpPr>
         <p:spPr>
           <a:xfrm>
-            <a:off x="1188720" y="3337560"/>
-            <a:ext cx="9784080" cy="457200"/>
+            <a:off x="2194560" y="4453128"/>
+            <a:ext cx="3566160" cy="457200"/>
           </a:xfrm>
           <a:prstGeom prst="rect">
             <a:avLst/>
@@ -8042,27 +8189,164 @@
               </a:lnSpc>
             </a:pPr>
             <a:r>
-              <a:rPr sz="1200" b="1" i="0">
-                <a:solidFill>
-                  <a:srgbClr val="3E7A5C"/>
+              <a:rPr sz="1550" b="1" i="0">
+                <a:solidFill>
+                  <a:srgbClr val="1F2D22"/>
+                </a:solidFill>
+                <a:latin typeface="Cambria"/>
+              </a:rPr>
+              <a:t>Rides a real trend</a:t>
+            </a:r>
+          </a:p>
+        </p:txBody>
+      </p:sp>
+      <p:sp>
+        <p:nvSpPr>
+          <p:cNvPr id="14" name="TextBox 13"/>
+          <p:cNvSpPr txBox="1"/>
+          <p:nvPr/>
+        </p:nvSpPr>
+        <p:spPr>
+          <a:xfrm>
+            <a:off x="2194560" y="4937759"/>
+            <a:ext cx="3566160" cy="1234440"/>
+          </a:xfrm>
+          <a:prstGeom prst="rect">
+            <a:avLst/>
+          </a:prstGeom>
+          <a:noFill/>
+        </p:spPr>
+        <p:txBody>
+          <a:bodyPr wrap="square" anchor="t" lIns="0" rIns="0" tIns="0" bIns="0">
+            <a:spAutoFit/>
+          </a:bodyPr>
+          <a:lstStyle/>
+          <a:p>
+            <a:pPr algn="l">
+              <a:lnSpc>
+                <a:spcPct val="120000"/>
+              </a:lnSpc>
+            </a:pPr>
+            <a:r>
+              <a:rPr sz="1150" b="0" i="0">
+                <a:solidFill>
+                  <a:srgbClr val="5B6A5F"/>
                 </a:solidFill>
                 <a:latin typeface="Calibri"/>
               </a:rPr>
-              <a:t>THE FINDING</a:t>
-            </a:r>
-          </a:p>
-        </p:txBody>
-      </p:sp>
-      <p:sp>
-        <p:nvSpPr>
-          <p:cNvPr id="19" name="TextBox 18"/>
+              <a:t>Global concern over kids' screen time is only growing — Health First turns that fight into a shared incentive instead of a source of family conflict.</a:t>
+            </a:r>
+          </a:p>
+        </p:txBody>
+      </p:sp>
+      <p:sp>
+        <p:nvSpPr>
+          <p:cNvPr id="15" name="Rounded Rectangle 14"/>
+          <p:cNvSpPr/>
+          <p:nvPr/>
+        </p:nvSpPr>
+        <p:spPr>
+          <a:xfrm>
+            <a:off x="6355080" y="4160520"/>
+            <a:ext cx="5074920" cy="2103120"/>
+          </a:xfrm>
+          <a:prstGeom prst="roundRect">
+            <a:avLst>
+              <a:gd name="adj" fmla="val 10000"/>
+            </a:avLst>
+          </a:prstGeom>
+          <a:solidFill>
+            <a:srgbClr val="E2E2F5"/>
+          </a:solidFill>
+          <a:ln>
+            <a:noFill/>
+          </a:ln>
+          <a:effectLst/>
+        </p:spPr>
+        <p:style>
+          <a:lnRef idx="1">
+            <a:schemeClr val="accent1"/>
+          </a:lnRef>
+          <a:fillRef idx="3">
+            <a:schemeClr val="accent1"/>
+          </a:fillRef>
+          <a:effectRef idx="2">
+            <a:schemeClr val="accent1"/>
+          </a:effectRef>
+          <a:fontRef idx="minor">
+            <a:schemeClr val="lt1"/>
+          </a:fontRef>
+        </p:style>
+        <p:txBody>
+          <a:bodyPr rtlCol="0" anchor="ctr"/>
+          <a:lstStyle/>
+          <a:p>
+            <a:pPr algn="ctr"/>
+          </a:p>
+        </p:txBody>
+      </p:sp>
+      <p:sp>
+        <p:nvSpPr>
+          <p:cNvPr id="16" name="Oval 15"/>
+          <p:cNvSpPr/>
+          <p:nvPr/>
+        </p:nvSpPr>
+        <p:spPr>
+          <a:xfrm>
+            <a:off x="6720840" y="4434840"/>
+            <a:ext cx="822960" cy="822960"/>
+          </a:xfrm>
+          <a:prstGeom prst="ellipse">
+            <a:avLst/>
+          </a:prstGeom>
+          <a:solidFill>
+            <a:srgbClr val="FFFFFF"/>
+          </a:solidFill>
+          <a:ln>
+            <a:noFill/>
+          </a:ln>
+          <a:effectLst/>
+        </p:spPr>
+        <p:style>
+          <a:lnRef idx="1">
+            <a:schemeClr val="accent1"/>
+          </a:lnRef>
+          <a:fillRef idx="3">
+            <a:schemeClr val="accent1"/>
+          </a:fillRef>
+          <a:effectRef idx="2">
+            <a:schemeClr val="accent1"/>
+          </a:effectRef>
+          <a:fontRef idx="minor">
+            <a:schemeClr val="lt1"/>
+          </a:fontRef>
+        </p:style>
+        <p:txBody>
+          <a:bodyPr rtlCol="0" anchor="ctr" lIns="0" rIns="0" tIns="0" bIns="0" wrap="none"/>
+          <a:lstStyle/>
+          <a:p>
+            <a:pPr algn="ctr"/>
+            <a:r>
+              <a:rPr sz="2500">
+                <a:solidFill>
+                  <a:srgbClr val="6E6FBF"/>
+                </a:solidFill>
+              </a:rPr>
+              <a:t>📈</a:t>
+            </a:r>
+          </a:p>
+        </p:txBody>
+      </p:sp>
+      <p:sp>
+        <p:nvSpPr>
+          <p:cNvPr id="17" name="TextBox 16"/>
           <p:cNvSpPr txBox="1"/>
           <p:nvPr/>
         </p:nvSpPr>
         <p:spPr>
           <a:xfrm>
-            <a:off x="1188720" y="3794760"/>
-            <a:ext cx="9784080" cy="731520"/>
+            <a:off x="7726679" y="4453128"/>
+            <a:ext cx="3566160" cy="457200"/>
           </a:xfrm>
           <a:prstGeom prst="rect">
             <a:avLst/>
@@ -8081,27 +8365,27 @@
               </a:lnSpc>
             </a:pPr>
             <a:r>
-              <a:rPr sz="1700" b="1" i="0">
-                <a:solidFill>
-                  <a:srgbClr val="2C5A44"/>
+              <a:rPr sz="1550" b="1" i="0">
+                <a:solidFill>
+                  <a:srgbClr val="1F2D22"/>
                 </a:solidFill>
                 <a:latin typeface="Cambria"/>
               </a:rPr>
-              <a:t>This is a general habit-formation problem, not a kid-control problem.</a:t>
-            </a:r>
-          </a:p>
-        </p:txBody>
-      </p:sp>
-      <p:sp>
-        <p:nvSpPr>
-          <p:cNvPr id="20" name="TextBox 19"/>
+              <a:t>A path to scale</a:t>
+            </a:r>
+          </a:p>
+        </p:txBody>
+      </p:sp>
+      <p:sp>
+        <p:nvSpPr>
+          <p:cNvPr id="18" name="TextBox 17"/>
           <p:cNvSpPr txBox="1"/>
           <p:nvPr/>
         </p:nvSpPr>
         <p:spPr>
           <a:xfrm>
-            <a:off x="1188720" y="4572000"/>
-            <a:ext cx="9784080" cy="457200"/>
+            <a:off x="7726679" y="4937759"/>
+            <a:ext cx="3566160" cy="1234440"/>
           </a:xfrm>
           <a:prstGeom prst="rect">
             <a:avLst/>
@@ -8116,56 +8400,17 @@
           <a:p>
             <a:pPr algn="l">
               <a:lnSpc>
-                <a:spcPct val="115000"/>
+                <a:spcPct val="120000"/>
               </a:lnSpc>
             </a:pPr>
             <a:r>
-              <a:rPr sz="1200" b="1" i="0">
-                <a:solidFill>
-                  <a:srgbClr val="DD6B42"/>
+              <a:rPr sz="1150" b="0" i="0">
+                <a:solidFill>
+                  <a:srgbClr val="5B6A5F"/>
                 </a:solidFill>
                 <a:latin typeface="Calibri"/>
               </a:rPr>
-              <a:t>THE FEATURE CHANGE</a:t>
-            </a:r>
-          </a:p>
-        </p:txBody>
-      </p:sp>
-      <p:sp>
-        <p:nvSpPr>
-          <p:cNvPr id="21" name="TextBox 20"/>
-          <p:cNvSpPr txBox="1"/>
-          <p:nvPr/>
-        </p:nvSpPr>
-        <p:spPr>
-          <a:xfrm>
-            <a:off x="1188720" y="4983480"/>
-            <a:ext cx="9784080" cy="914400"/>
-          </a:xfrm>
-          <a:prstGeom prst="rect">
-            <a:avLst/>
-          </a:prstGeom>
-          <a:noFill/>
-        </p:spPr>
-        <p:txBody>
-          <a:bodyPr wrap="square" anchor="t" lIns="0" rIns="0" tIns="0" bIns="0">
-            <a:spAutoFit/>
-          </a:bodyPr>
-          <a:lstStyle/>
-          <a:p>
-            <a:pPr algn="l">
-              <a:lnSpc>
-                <a:spcPct val="125000"/>
-              </a:lnSpc>
-            </a:pPr>
-            <a:r>
-              <a:rPr sz="1500" b="0" i="0">
-                <a:solidFill>
-                  <a:srgbClr val="1F2D22"/>
-                </a:solidFill>
-                <a:latin typeface="Calibri"/>
-              </a:rPr>
-              <a:t>All-or-nothing unlock rejected in favor of per-goal minute banking — partial effort is always rewarded, and finishing everything is still the biggest win.</a:t>
+              <a:t>School wellness programs, pediatrician recommendations, and family-plan subscriptions are natural next steps for the same core engine.</a:t>
             </a:r>
           </a:p>
         </p:txBody>
@@ -8184,7 +8429,7 @@
     <p:bg>
       <p:bgPr>
         <a:solidFill>
-          <a:srgbClr val="1F3D2B"/>
+          <a:srgbClr val="FFFFFF"/>
         </a:solidFill>
         <a:effectLst/>
       </p:bgPr>
@@ -8204,8 +8449,8 @@
         </p:nvSpPr>
         <p:spPr>
           <a:xfrm>
-            <a:off x="822960" y="822960"/>
-            <a:ext cx="9601200" cy="731520"/>
+            <a:off x="822960" y="548640"/>
+            <a:ext cx="9144000" cy="548640"/>
           </a:xfrm>
           <a:prstGeom prst="rect">
             <a:avLst/>
@@ -8224,13 +8469,13 @@
               </a:lnSpc>
             </a:pPr>
             <a:r>
-              <a:rPr sz="3600" b="1" i="0">
-                <a:solidFill>
-                  <a:srgbClr val="FFFFFF"/>
+              <a:rPr sz="3000" b="1" i="0">
+                <a:solidFill>
+                  <a:srgbClr val="1F2D22"/>
                 </a:solidFill>
                 <a:latin typeface="Cambria"/>
               </a:rPr>
-              <a:t>Try It Yourself</a:t>
+              <a:t>From Finding to Feature</a:t>
             </a:r>
           </a:p>
         </p:txBody>
@@ -8243,16 +8488,16 @@
         </p:nvSpPr>
         <p:spPr>
           <a:xfrm>
-            <a:off x="822960" y="1920240"/>
-            <a:ext cx="10515600" cy="1188720"/>
+            <a:off x="822960" y="1554480"/>
+            <a:ext cx="1874519" cy="1005840"/>
           </a:xfrm>
           <a:prstGeom prst="roundRect">
             <a:avLst>
-              <a:gd name="adj" fmla="val 12000"/>
+              <a:gd name="adj" fmla="val 10000"/>
             </a:avLst>
           </a:prstGeom>
           <a:solidFill>
-            <a:srgbClr val="3E7A5C"/>
+            <a:srgbClr val="DCE8D9"/>
           </a:solidFill>
           <a:ln>
             <a:noFill/>
@@ -8289,8 +8534,8 @@
         </p:nvSpPr>
         <p:spPr>
           <a:xfrm>
-            <a:off x="1188720" y="2148840"/>
-            <a:ext cx="2377440" cy="731520"/>
+            <a:off x="822960" y="1554480"/>
+            <a:ext cx="1874519" cy="1005840"/>
           </a:xfrm>
           <a:prstGeom prst="rect">
             <a:avLst/>
@@ -8303,58 +8548,74 @@
           </a:bodyPr>
           <a:lstStyle/>
           <a:p>
-            <a:pPr algn="l">
+            <a:pPr algn="ctr">
               <a:lnSpc>
                 <a:spcPct val="115000"/>
               </a:lnSpc>
             </a:pPr>
             <a:r>
-              <a:rPr sz="1200" b="1" i="0">
-                <a:solidFill>
-                  <a:srgbClr val="FFFFFF"/>
+              <a:rPr sz="1300" b="1" i="0">
+                <a:solidFill>
+                  <a:srgbClr val="2C5A44"/>
                 </a:solidFill>
                 <a:latin typeface="Calibri"/>
               </a:rPr>
-              <a:t>LIVE PROTOTYPE</a:t>
-            </a:r>
-          </a:p>
-        </p:txBody>
-      </p:sp>
-      <p:sp>
-        <p:nvSpPr>
-          <p:cNvPr id="5" name="TextBox 4"/>
-          <p:cNvSpPr txBox="1"/>
-          <p:nvPr/>
-        </p:nvSpPr>
-        <p:spPr>
-          <a:xfrm>
-            <a:off x="3566160" y="2103120"/>
-            <a:ext cx="7315200" cy="822960"/>
-          </a:xfrm>
-          <a:prstGeom prst="rect">
-            <a:avLst/>
-          </a:prstGeom>
-          <a:noFill/>
-        </p:spPr>
-        <p:txBody>
-          <a:bodyPr wrap="square" anchor="ctr" lIns="0" rIns="0" tIns="0" bIns="0">
-            <a:spAutoFit/>
-          </a:bodyPr>
-          <a:lstStyle/>
-          <a:p>
-            <a:pPr algn="l">
+              <a:t>Week 1</a:t>
+            </a:r>
+          </a:p>
+          <a:p>
+            <a:pPr algn="ctr">
               <a:lnSpc>
                 <a:spcPct val="115000"/>
               </a:lnSpc>
             </a:pPr>
             <a:r>
-              <a:rPr sz="1500" b="1" i="0">
-                <a:solidFill>
-                  <a:srgbClr val="FFFFFF"/>
+              <a:rPr sz="1300" b="1" i="0">
+                <a:solidFill>
+                  <a:srgbClr val="2C5A44"/>
                 </a:solidFill>
                 <a:latin typeface="Calibri"/>
               </a:rPr>
-              <a:t>claude.ai/code/artifact/dc777afc-bb3e-408c-aede-89ed91983bd3</a:t>
+              <a:t>Blueprint</a:t>
+            </a:r>
+          </a:p>
+        </p:txBody>
+      </p:sp>
+      <p:sp>
+        <p:nvSpPr>
+          <p:cNvPr id="5" name="TextBox 4"/>
+          <p:cNvSpPr txBox="1"/>
+          <p:nvPr/>
+        </p:nvSpPr>
+        <p:spPr>
+          <a:xfrm>
+            <a:off x="2724911" y="1554480"/>
+            <a:ext cx="365760" cy="1005840"/>
+          </a:xfrm>
+          <a:prstGeom prst="rect">
+            <a:avLst/>
+          </a:prstGeom>
+          <a:noFill/>
+        </p:spPr>
+        <p:txBody>
+          <a:bodyPr wrap="square" anchor="ctr" lIns="0" rIns="0" tIns="0" bIns="0">
+            <a:spAutoFit/>
+          </a:bodyPr>
+          <a:lstStyle/>
+          <a:p>
+            <a:pPr algn="ctr">
+              <a:lnSpc>
+                <a:spcPct val="115000"/>
+              </a:lnSpc>
+            </a:pPr>
+            <a:r>
+              <a:rPr sz="1800" b="1" i="0">
+                <a:solidFill>
+                  <a:srgbClr val="5B6A5F"/>
+                </a:solidFill>
+                <a:latin typeface="Calibri"/>
+              </a:rPr>
+              <a:t>→</a:t>
             </a:r>
           </a:p>
         </p:txBody>
@@ -8367,12 +8628,292 @@
         </p:nvSpPr>
         <p:spPr>
           <a:xfrm>
-            <a:off x="822960" y="3291840"/>
-            <a:ext cx="10515600" cy="1188720"/>
+            <a:off x="2926079" y="1554480"/>
+            <a:ext cx="1874519" cy="1005840"/>
           </a:xfrm>
           <a:prstGeom prst="roundRect">
             <a:avLst>
-              <a:gd name="adj" fmla="val 12000"/>
+              <a:gd name="adj" fmla="val 10000"/>
+            </a:avLst>
+          </a:prstGeom>
+          <a:solidFill>
+            <a:srgbClr val="DCE8D9"/>
+          </a:solidFill>
+          <a:ln>
+            <a:noFill/>
+          </a:ln>
+          <a:effectLst/>
+        </p:spPr>
+        <p:style>
+          <a:lnRef idx="1">
+            <a:schemeClr val="accent1"/>
+          </a:lnRef>
+          <a:fillRef idx="3">
+            <a:schemeClr val="accent1"/>
+          </a:fillRef>
+          <a:effectRef idx="2">
+            <a:schemeClr val="accent1"/>
+          </a:effectRef>
+          <a:fontRef idx="minor">
+            <a:schemeClr val="lt1"/>
+          </a:fontRef>
+        </p:style>
+        <p:txBody>
+          <a:bodyPr rtlCol="0" anchor="ctr"/>
+          <a:lstStyle/>
+          <a:p>
+            <a:pPr algn="ctr"/>
+          </a:p>
+        </p:txBody>
+      </p:sp>
+      <p:sp>
+        <p:nvSpPr>
+          <p:cNvPr id="7" name="TextBox 6"/>
+          <p:cNvSpPr txBox="1"/>
+          <p:nvPr/>
+        </p:nvSpPr>
+        <p:spPr>
+          <a:xfrm>
+            <a:off x="2926079" y="1554480"/>
+            <a:ext cx="1874519" cy="1005840"/>
+          </a:xfrm>
+          <a:prstGeom prst="rect">
+            <a:avLst/>
+          </a:prstGeom>
+          <a:noFill/>
+        </p:spPr>
+        <p:txBody>
+          <a:bodyPr wrap="square" anchor="ctr" lIns="0" rIns="0" tIns="0" bIns="0">
+            <a:spAutoFit/>
+          </a:bodyPr>
+          <a:lstStyle/>
+          <a:p>
+            <a:pPr algn="ctr">
+              <a:lnSpc>
+                <a:spcPct val="115000"/>
+              </a:lnSpc>
+            </a:pPr>
+            <a:r>
+              <a:rPr sz="1300" b="1" i="0">
+                <a:solidFill>
+                  <a:srgbClr val="2C5A44"/>
+                </a:solidFill>
+                <a:latin typeface="Calibri"/>
+              </a:rPr>
+              <a:t>Week 2</a:t>
+            </a:r>
+          </a:p>
+          <a:p>
+            <a:pPr algn="ctr">
+              <a:lnSpc>
+                <a:spcPct val="115000"/>
+              </a:lnSpc>
+            </a:pPr>
+            <a:r>
+              <a:rPr sz="1300" b="1" i="0">
+                <a:solidFill>
+                  <a:srgbClr val="2C5A44"/>
+                </a:solidFill>
+                <a:latin typeface="Calibri"/>
+              </a:rPr>
+              <a:t>Prototype</a:t>
+            </a:r>
+          </a:p>
+        </p:txBody>
+      </p:sp>
+      <p:sp>
+        <p:nvSpPr>
+          <p:cNvPr id="8" name="TextBox 7"/>
+          <p:cNvSpPr txBox="1"/>
+          <p:nvPr/>
+        </p:nvSpPr>
+        <p:spPr>
+          <a:xfrm>
+            <a:off x="4828032" y="1554480"/>
+            <a:ext cx="365760" cy="1005840"/>
+          </a:xfrm>
+          <a:prstGeom prst="rect">
+            <a:avLst/>
+          </a:prstGeom>
+          <a:noFill/>
+        </p:spPr>
+        <p:txBody>
+          <a:bodyPr wrap="square" anchor="ctr" lIns="0" rIns="0" tIns="0" bIns="0">
+            <a:spAutoFit/>
+          </a:bodyPr>
+          <a:lstStyle/>
+          <a:p>
+            <a:pPr algn="ctr">
+              <a:lnSpc>
+                <a:spcPct val="115000"/>
+              </a:lnSpc>
+            </a:pPr>
+            <a:r>
+              <a:rPr sz="1800" b="1" i="0">
+                <a:solidFill>
+                  <a:srgbClr val="5B6A5F"/>
+                </a:solidFill>
+                <a:latin typeface="Calibri"/>
+              </a:rPr>
+              <a:t>→</a:t>
+            </a:r>
+          </a:p>
+        </p:txBody>
+      </p:sp>
+      <p:sp>
+        <p:nvSpPr>
+          <p:cNvPr id="9" name="Rounded Rectangle 8"/>
+          <p:cNvSpPr/>
+          <p:nvPr/>
+        </p:nvSpPr>
+        <p:spPr>
+          <a:xfrm>
+            <a:off x="5029200" y="1554480"/>
+            <a:ext cx="1874519" cy="1005840"/>
+          </a:xfrm>
+          <a:prstGeom prst="roundRect">
+            <a:avLst>
+              <a:gd name="adj" fmla="val 10000"/>
+            </a:avLst>
+          </a:prstGeom>
+          <a:solidFill>
+            <a:srgbClr val="DCE8D9"/>
+          </a:solidFill>
+          <a:ln>
+            <a:noFill/>
+          </a:ln>
+          <a:effectLst/>
+        </p:spPr>
+        <p:style>
+          <a:lnRef idx="1">
+            <a:schemeClr val="accent1"/>
+          </a:lnRef>
+          <a:fillRef idx="3">
+            <a:schemeClr val="accent1"/>
+          </a:fillRef>
+          <a:effectRef idx="2">
+            <a:schemeClr val="accent1"/>
+          </a:effectRef>
+          <a:fontRef idx="minor">
+            <a:schemeClr val="lt1"/>
+          </a:fontRef>
+        </p:style>
+        <p:txBody>
+          <a:bodyPr rtlCol="0" anchor="ctr"/>
+          <a:lstStyle/>
+          <a:p>
+            <a:pPr algn="ctr"/>
+          </a:p>
+        </p:txBody>
+      </p:sp>
+      <p:sp>
+        <p:nvSpPr>
+          <p:cNvPr id="10" name="TextBox 9"/>
+          <p:cNvSpPr txBox="1"/>
+          <p:nvPr/>
+        </p:nvSpPr>
+        <p:spPr>
+          <a:xfrm>
+            <a:off x="5029200" y="1554480"/>
+            <a:ext cx="1874519" cy="1005840"/>
+          </a:xfrm>
+          <a:prstGeom prst="rect">
+            <a:avLst/>
+          </a:prstGeom>
+          <a:noFill/>
+        </p:spPr>
+        <p:txBody>
+          <a:bodyPr wrap="square" anchor="ctr" lIns="0" rIns="0" tIns="0" bIns="0">
+            <a:spAutoFit/>
+          </a:bodyPr>
+          <a:lstStyle/>
+          <a:p>
+            <a:pPr algn="ctr">
+              <a:lnSpc>
+                <a:spcPct val="115000"/>
+              </a:lnSpc>
+            </a:pPr>
+            <a:r>
+              <a:rPr sz="1300" b="1" i="0">
+                <a:solidFill>
+                  <a:srgbClr val="2C5A44"/>
+                </a:solidFill>
+                <a:latin typeface="Calibri"/>
+              </a:rPr>
+              <a:t>Week 3</a:t>
+            </a:r>
+          </a:p>
+          <a:p>
+            <a:pPr algn="ctr">
+              <a:lnSpc>
+                <a:spcPct val="115000"/>
+              </a:lnSpc>
+            </a:pPr>
+            <a:r>
+              <a:rPr sz="1300" b="1" i="0">
+                <a:solidFill>
+                  <a:srgbClr val="2C5A44"/>
+                </a:solidFill>
+                <a:latin typeface="Calibri"/>
+              </a:rPr>
+              <a:t>AI + Automation</a:t>
+            </a:r>
+          </a:p>
+        </p:txBody>
+      </p:sp>
+      <p:sp>
+        <p:nvSpPr>
+          <p:cNvPr id="11" name="TextBox 10"/>
+          <p:cNvSpPr txBox="1"/>
+          <p:nvPr/>
+        </p:nvSpPr>
+        <p:spPr>
+          <a:xfrm>
+            <a:off x="6931152" y="1554480"/>
+            <a:ext cx="365760" cy="1005840"/>
+          </a:xfrm>
+          <a:prstGeom prst="rect">
+            <a:avLst/>
+          </a:prstGeom>
+          <a:noFill/>
+        </p:spPr>
+        <p:txBody>
+          <a:bodyPr wrap="square" anchor="ctr" lIns="0" rIns="0" tIns="0" bIns="0">
+            <a:spAutoFit/>
+          </a:bodyPr>
+          <a:lstStyle/>
+          <a:p>
+            <a:pPr algn="ctr">
+              <a:lnSpc>
+                <a:spcPct val="115000"/>
+              </a:lnSpc>
+            </a:pPr>
+            <a:r>
+              <a:rPr sz="1800" b="1" i="0">
+                <a:solidFill>
+                  <a:srgbClr val="5B6A5F"/>
+                </a:solidFill>
+                <a:latin typeface="Calibri"/>
+              </a:rPr>
+              <a:t>→</a:t>
+            </a:r>
+          </a:p>
+        </p:txBody>
+      </p:sp>
+      <p:sp>
+        <p:nvSpPr>
+          <p:cNvPr id="12" name="Rounded Rectangle 11"/>
+          <p:cNvSpPr/>
+          <p:nvPr/>
+        </p:nvSpPr>
+        <p:spPr>
+          <a:xfrm>
+            <a:off x="7132320" y="1554480"/>
+            <a:ext cx="1874519" cy="1005840"/>
+          </a:xfrm>
+          <a:prstGeom prst="roundRect">
+            <a:avLst>
+              <a:gd name="adj" fmla="val 10000"/>
             </a:avLst>
           </a:prstGeom>
           <a:solidFill>
@@ -8407,14 +8948,14 @@
       </p:sp>
       <p:sp>
         <p:nvSpPr>
-          <p:cNvPr id="7" name="TextBox 6"/>
+          <p:cNvPr id="13" name="TextBox 12"/>
           <p:cNvSpPr txBox="1"/>
           <p:nvPr/>
         </p:nvSpPr>
         <p:spPr>
           <a:xfrm>
-            <a:off x="1188720" y="3520440"/>
-            <a:ext cx="2377440" cy="731520"/>
+            <a:off x="7132320" y="1554480"/>
+            <a:ext cx="1874519" cy="1005840"/>
           </a:xfrm>
           <a:prstGeom prst="rect">
             <a:avLst/>
@@ -8423,6 +8964,247 @@
         </p:spPr>
         <p:txBody>
           <a:bodyPr wrap="square" anchor="ctr" lIns="0" rIns="0" tIns="0" bIns="0">
+            <a:spAutoFit/>
+          </a:bodyPr>
+          <a:lstStyle/>
+          <a:p>
+            <a:pPr algn="ctr">
+              <a:lnSpc>
+                <a:spcPct val="115000"/>
+              </a:lnSpc>
+            </a:pPr>
+            <a:r>
+              <a:rPr sz="1300" b="1" i="0">
+                <a:solidFill>
+                  <a:srgbClr val="FFFFFF"/>
+                </a:solidFill>
+                <a:latin typeface="Calibri"/>
+              </a:rPr>
+              <a:t>Week 4</a:t>
+            </a:r>
+          </a:p>
+          <a:p>
+            <a:pPr algn="ctr">
+              <a:lnSpc>
+                <a:spcPct val="115000"/>
+              </a:lnSpc>
+            </a:pPr>
+            <a:r>
+              <a:rPr sz="1300" b="1" i="0">
+                <a:solidFill>
+                  <a:srgbClr val="FFFFFF"/>
+                </a:solidFill>
+                <a:latin typeface="Calibri"/>
+              </a:rPr>
+              <a:t>User Finding</a:t>
+            </a:r>
+          </a:p>
+        </p:txBody>
+      </p:sp>
+      <p:sp>
+        <p:nvSpPr>
+          <p:cNvPr id="14" name="TextBox 13"/>
+          <p:cNvSpPr txBox="1"/>
+          <p:nvPr/>
+        </p:nvSpPr>
+        <p:spPr>
+          <a:xfrm>
+            <a:off x="9034272" y="1554480"/>
+            <a:ext cx="365760" cy="1005840"/>
+          </a:xfrm>
+          <a:prstGeom prst="rect">
+            <a:avLst/>
+          </a:prstGeom>
+          <a:noFill/>
+        </p:spPr>
+        <p:txBody>
+          <a:bodyPr wrap="square" anchor="ctr" lIns="0" rIns="0" tIns="0" bIns="0">
+            <a:spAutoFit/>
+          </a:bodyPr>
+          <a:lstStyle/>
+          <a:p>
+            <a:pPr algn="ctr">
+              <a:lnSpc>
+                <a:spcPct val="115000"/>
+              </a:lnSpc>
+            </a:pPr>
+            <a:r>
+              <a:rPr sz="1800" b="1" i="0">
+                <a:solidFill>
+                  <a:srgbClr val="5B6A5F"/>
+                </a:solidFill>
+                <a:latin typeface="Calibri"/>
+              </a:rPr>
+              <a:t>→</a:t>
+            </a:r>
+          </a:p>
+        </p:txBody>
+      </p:sp>
+      <p:sp>
+        <p:nvSpPr>
+          <p:cNvPr id="15" name="Rounded Rectangle 14"/>
+          <p:cNvSpPr/>
+          <p:nvPr/>
+        </p:nvSpPr>
+        <p:spPr>
+          <a:xfrm>
+            <a:off x="9235440" y="1554480"/>
+            <a:ext cx="1874519" cy="1005840"/>
+          </a:xfrm>
+          <a:prstGeom prst="roundRect">
+            <a:avLst>
+              <a:gd name="adj" fmla="val 10000"/>
+            </a:avLst>
+          </a:prstGeom>
+          <a:solidFill>
+            <a:srgbClr val="DD6B42"/>
+          </a:solidFill>
+          <a:ln>
+            <a:noFill/>
+          </a:ln>
+          <a:effectLst/>
+        </p:spPr>
+        <p:style>
+          <a:lnRef idx="1">
+            <a:schemeClr val="accent1"/>
+          </a:lnRef>
+          <a:fillRef idx="3">
+            <a:schemeClr val="accent1"/>
+          </a:fillRef>
+          <a:effectRef idx="2">
+            <a:schemeClr val="accent1"/>
+          </a:effectRef>
+          <a:fontRef idx="minor">
+            <a:schemeClr val="lt1"/>
+          </a:fontRef>
+        </p:style>
+        <p:txBody>
+          <a:bodyPr rtlCol="0" anchor="ctr"/>
+          <a:lstStyle/>
+          <a:p>
+            <a:pPr algn="ctr"/>
+          </a:p>
+        </p:txBody>
+      </p:sp>
+      <p:sp>
+        <p:nvSpPr>
+          <p:cNvPr id="16" name="TextBox 15"/>
+          <p:cNvSpPr txBox="1"/>
+          <p:nvPr/>
+        </p:nvSpPr>
+        <p:spPr>
+          <a:xfrm>
+            <a:off x="9235440" y="1554480"/>
+            <a:ext cx="1874519" cy="1005840"/>
+          </a:xfrm>
+          <a:prstGeom prst="rect">
+            <a:avLst/>
+          </a:prstGeom>
+          <a:noFill/>
+        </p:spPr>
+        <p:txBody>
+          <a:bodyPr wrap="square" anchor="ctr" lIns="0" rIns="0" tIns="0" bIns="0">
+            <a:spAutoFit/>
+          </a:bodyPr>
+          <a:lstStyle/>
+          <a:p>
+            <a:pPr algn="ctr">
+              <a:lnSpc>
+                <a:spcPct val="115000"/>
+              </a:lnSpc>
+            </a:pPr>
+            <a:r>
+              <a:rPr sz="1300" b="1" i="0">
+                <a:solidFill>
+                  <a:srgbClr val="FFFFFF"/>
+                </a:solidFill>
+                <a:latin typeface="Calibri"/>
+              </a:rPr>
+              <a:t>Week 5</a:t>
+            </a:r>
+          </a:p>
+          <a:p>
+            <a:pPr algn="ctr">
+              <a:lnSpc>
+                <a:spcPct val="115000"/>
+              </a:lnSpc>
+            </a:pPr>
+            <a:r>
+              <a:rPr sz="1300" b="1" i="0">
+                <a:solidFill>
+                  <a:srgbClr val="FFFFFF"/>
+                </a:solidFill>
+                <a:latin typeface="Calibri"/>
+              </a:rPr>
+              <a:t>Redesigned Rewards</a:t>
+            </a:r>
+          </a:p>
+        </p:txBody>
+      </p:sp>
+      <p:sp>
+        <p:nvSpPr>
+          <p:cNvPr id="17" name="Rounded Rectangle 16"/>
+          <p:cNvSpPr/>
+          <p:nvPr/>
+        </p:nvSpPr>
+        <p:spPr>
+          <a:xfrm>
+            <a:off x="822960" y="3063240"/>
+            <a:ext cx="10515600" cy="3017520"/>
+          </a:xfrm>
+          <a:prstGeom prst="roundRect">
+            <a:avLst>
+              <a:gd name="adj" fmla="val 10000"/>
+            </a:avLst>
+          </a:prstGeom>
+          <a:solidFill>
+            <a:srgbClr val="DCE8D9"/>
+          </a:solidFill>
+          <a:ln>
+            <a:noFill/>
+          </a:ln>
+          <a:effectLst/>
+        </p:spPr>
+        <p:style>
+          <a:lnRef idx="1">
+            <a:schemeClr val="accent1"/>
+          </a:lnRef>
+          <a:fillRef idx="3">
+            <a:schemeClr val="accent1"/>
+          </a:fillRef>
+          <a:effectRef idx="2">
+            <a:schemeClr val="accent1"/>
+          </a:effectRef>
+          <a:fontRef idx="minor">
+            <a:schemeClr val="lt1"/>
+          </a:fontRef>
+        </p:style>
+        <p:txBody>
+          <a:bodyPr rtlCol="0" anchor="ctr"/>
+          <a:lstStyle/>
+          <a:p>
+            <a:pPr algn="ctr"/>
+          </a:p>
+        </p:txBody>
+      </p:sp>
+      <p:sp>
+        <p:nvSpPr>
+          <p:cNvPr id="18" name="TextBox 17"/>
+          <p:cNvSpPr txBox="1"/>
+          <p:nvPr/>
+        </p:nvSpPr>
+        <p:spPr>
+          <a:xfrm>
+            <a:off x="1188720" y="3337560"/>
+            <a:ext cx="9784080" cy="457200"/>
+          </a:xfrm>
+          <a:prstGeom prst="rect">
+            <a:avLst/>
+          </a:prstGeom>
+          <a:noFill/>
+        </p:spPr>
+        <p:txBody>
+          <a:bodyPr wrap="square" anchor="t" lIns="0" rIns="0" tIns="0" bIns="0">
             <a:spAutoFit/>
           </a:bodyPr>
           <a:lstStyle/>
@@ -8435,25 +9217,25 @@
             <a:r>
               <a:rPr sz="1200" b="1" i="0">
                 <a:solidFill>
-                  <a:srgbClr val="FFFFFF"/>
+                  <a:srgbClr val="3E7A5C"/>
                 </a:solidFill>
                 <a:latin typeface="Calibri"/>
               </a:rPr>
-              <a:t>SOURCE CODE</a:t>
-            </a:r>
-          </a:p>
-        </p:txBody>
-      </p:sp>
-      <p:sp>
-        <p:nvSpPr>
-          <p:cNvPr id="8" name="TextBox 7"/>
+              <a:t>THE FINDING</a:t>
+            </a:r>
+          </a:p>
+        </p:txBody>
+      </p:sp>
+      <p:sp>
+        <p:nvSpPr>
+          <p:cNvPr id="19" name="TextBox 18"/>
           <p:cNvSpPr txBox="1"/>
           <p:nvPr/>
         </p:nvSpPr>
         <p:spPr>
           <a:xfrm>
-            <a:off x="3566160" y="3474720"/>
-            <a:ext cx="7315200" cy="822960"/>
+            <a:off x="1188720" y="3794760"/>
+            <a:ext cx="9784080" cy="731520"/>
           </a:xfrm>
           <a:prstGeom prst="rect">
             <a:avLst/>
@@ -8461,7 +9243,7 @@
           <a:noFill/>
         </p:spPr>
         <p:txBody>
-          <a:bodyPr wrap="square" anchor="ctr" lIns="0" rIns="0" tIns="0" bIns="0">
+          <a:bodyPr wrap="square" anchor="t" lIns="0" rIns="0" tIns="0" bIns="0">
             <a:spAutoFit/>
           </a:bodyPr>
           <a:lstStyle/>
@@ -8472,73 +9254,27 @@
               </a:lnSpc>
             </a:pPr>
             <a:r>
-              <a:rPr sz="1500" b="1" i="0">
-                <a:solidFill>
-                  <a:srgbClr val="FFFFFF"/>
-                </a:solidFill>
-                <a:latin typeface="Calibri"/>
-              </a:rPr>
-              <a:t>github.com/sahil19891989/health-first</a:t>
-            </a:r>
-          </a:p>
-        </p:txBody>
-      </p:sp>
-      <p:sp>
-        <p:nvSpPr>
-          <p:cNvPr id="9" name="Rounded Rectangle 8"/>
-          <p:cNvSpPr/>
-          <p:nvPr/>
-        </p:nvSpPr>
-        <p:spPr>
-          <a:xfrm>
-            <a:off x="822960" y="4663440"/>
-            <a:ext cx="10515600" cy="1188720"/>
-          </a:xfrm>
-          <a:prstGeom prst="roundRect">
-            <a:avLst>
-              <a:gd name="adj" fmla="val 12000"/>
-            </a:avLst>
-          </a:prstGeom>
-          <a:solidFill>
-            <a:srgbClr val="DB9D3B"/>
-          </a:solidFill>
-          <a:ln>
-            <a:noFill/>
-          </a:ln>
-          <a:effectLst/>
-        </p:spPr>
-        <p:style>
-          <a:lnRef idx="1">
-            <a:schemeClr val="accent1"/>
-          </a:lnRef>
-          <a:fillRef idx="3">
-            <a:schemeClr val="accent1"/>
-          </a:fillRef>
-          <a:effectRef idx="2">
-            <a:schemeClr val="accent1"/>
-          </a:effectRef>
-          <a:fontRef idx="minor">
-            <a:schemeClr val="lt1"/>
-          </a:fontRef>
-        </p:style>
-        <p:txBody>
-          <a:bodyPr rtlCol="0" anchor="ctr"/>
-          <a:lstStyle/>
-          <a:p>
-            <a:pPr algn="ctr"/>
-          </a:p>
-        </p:txBody>
-      </p:sp>
-      <p:sp>
-        <p:nvSpPr>
-          <p:cNvPr id="10" name="TextBox 9"/>
+              <a:rPr sz="1700" b="1" i="0">
+                <a:solidFill>
+                  <a:srgbClr val="2C5A44"/>
+                </a:solidFill>
+                <a:latin typeface="Cambria"/>
+              </a:rPr>
+              <a:t>This is a general habit-formation problem, not a kid-control problem.</a:t>
+            </a:r>
+          </a:p>
+        </p:txBody>
+      </p:sp>
+      <p:sp>
+        <p:nvSpPr>
+          <p:cNvPr id="20" name="TextBox 19"/>
           <p:cNvSpPr txBox="1"/>
           <p:nvPr/>
         </p:nvSpPr>
         <p:spPr>
           <a:xfrm>
-            <a:off x="1188720" y="4892040"/>
-            <a:ext cx="2377440" cy="731520"/>
+            <a:off x="1188720" y="4572000"/>
+            <a:ext cx="9784080" cy="457200"/>
           </a:xfrm>
           <a:prstGeom prst="rect">
             <a:avLst/>
@@ -8546,7 +9282,7 @@
           <a:noFill/>
         </p:spPr>
         <p:txBody>
-          <a:bodyPr wrap="square" anchor="ctr" lIns="0" rIns="0" tIns="0" bIns="0">
+          <a:bodyPr wrap="square" anchor="t" lIns="0" rIns="0" tIns="0" bIns="0">
             <a:spAutoFit/>
           </a:bodyPr>
           <a:lstStyle/>
@@ -8559,25 +9295,25 @@
             <a:r>
               <a:rPr sz="1200" b="1" i="0">
                 <a:solidFill>
-                  <a:srgbClr val="1F3D2B"/>
+                  <a:srgbClr val="DD6B42"/>
                 </a:solidFill>
                 <a:latin typeface="Calibri"/>
               </a:rPr>
-              <a:t>DEMO PARENT PIN</a:t>
-            </a:r>
-          </a:p>
-        </p:txBody>
-      </p:sp>
-      <p:sp>
-        <p:nvSpPr>
-          <p:cNvPr id="11" name="TextBox 10"/>
+              <a:t>THE FEATURE CHANGE</a:t>
+            </a:r>
+          </a:p>
+        </p:txBody>
+      </p:sp>
+      <p:sp>
+        <p:nvSpPr>
+          <p:cNvPr id="21" name="TextBox 20"/>
           <p:cNvSpPr txBox="1"/>
           <p:nvPr/>
         </p:nvSpPr>
         <p:spPr>
           <a:xfrm>
-            <a:off x="3566160" y="4846320"/>
-            <a:ext cx="7315200" cy="822960"/>
+            <a:off x="1188720" y="4983480"/>
+            <a:ext cx="9784080" cy="914400"/>
           </a:xfrm>
           <a:prstGeom prst="rect">
             <a:avLst/>
@@ -8585,24 +9321,24 @@
           <a:noFill/>
         </p:spPr>
         <p:txBody>
-          <a:bodyPr wrap="square" anchor="ctr" lIns="0" rIns="0" tIns="0" bIns="0">
+          <a:bodyPr wrap="square" anchor="t" lIns="0" rIns="0" tIns="0" bIns="0">
             <a:spAutoFit/>
           </a:bodyPr>
           <a:lstStyle/>
           <a:p>
             <a:pPr algn="l">
               <a:lnSpc>
-                <a:spcPct val="115000"/>
+                <a:spcPct val="125000"/>
               </a:lnSpc>
             </a:pPr>
             <a:r>
-              <a:rPr sz="2200" b="1" i="0">
-                <a:solidFill>
-                  <a:srgbClr val="1F3D2B"/>
-                </a:solidFill>
-                <a:latin typeface="Cambria"/>
-              </a:rPr>
-              <a:t>1234</a:t>
+              <a:rPr sz="1500" b="0" i="0">
+                <a:solidFill>
+                  <a:srgbClr val="1F2D22"/>
+                </a:solidFill>
+                <a:latin typeface="Calibri"/>
+              </a:rPr>
+              <a:t>All-or-nothing unlock rejected in favor of per-goal minute banking — partial effort is always rewarded, and finishing everything is still the biggest win.</a:t>
             </a:r>
           </a:p>
         </p:txBody>
@@ -8635,17 +9371,58 @@
       <p:grpSpPr/>
       <p:sp>
         <p:nvSpPr>
-          <p:cNvPr id="2" name="Oval 1"/>
+          <p:cNvPr id="2" name="TextBox 1"/>
+          <p:cNvSpPr txBox="1"/>
+          <p:nvPr/>
+        </p:nvSpPr>
+        <p:spPr>
+          <a:xfrm>
+            <a:off x="822960" y="822960"/>
+            <a:ext cx="9601200" cy="731520"/>
+          </a:xfrm>
+          <a:prstGeom prst="rect">
+            <a:avLst/>
+          </a:prstGeom>
+          <a:noFill/>
+        </p:spPr>
+        <p:txBody>
+          <a:bodyPr wrap="square" anchor="t" lIns="0" rIns="0" tIns="0" bIns="0">
+            <a:spAutoFit/>
+          </a:bodyPr>
+          <a:lstStyle/>
+          <a:p>
+            <a:pPr algn="l">
+              <a:lnSpc>
+                <a:spcPct val="115000"/>
+              </a:lnSpc>
+            </a:pPr>
+            <a:r>
+              <a:rPr sz="3600" b="1" i="0">
+                <a:solidFill>
+                  <a:srgbClr val="FFFFFF"/>
+                </a:solidFill>
+                <a:latin typeface="Cambria"/>
+              </a:rPr>
+              <a:t>Try It Yourself</a:t>
+            </a:r>
+          </a:p>
+        </p:txBody>
+      </p:sp>
+      <p:sp>
+        <p:nvSpPr>
+          <p:cNvPr id="3" name="Rounded Rectangle 2"/>
           <p:cNvSpPr/>
           <p:nvPr/>
         </p:nvSpPr>
         <p:spPr>
           <a:xfrm>
-            <a:off x="5504688" y="1508760"/>
-            <a:ext cx="1188720" cy="1188720"/>
-          </a:xfrm>
-          <a:prstGeom prst="ellipse">
-            <a:avLst/>
+            <a:off x="822960" y="1920240"/>
+            <a:ext cx="10515600" cy="1188720"/>
+          </a:xfrm>
+          <a:prstGeom prst="roundRect">
+            <a:avLst>
+              <a:gd name="adj" fmla="val 10000"/>
+            </a:avLst>
           </a:prstGeom>
           <a:solidFill>
             <a:srgbClr val="3E7A5C"/>
@@ -8670,31 +9447,23 @@
           </a:fontRef>
         </p:style>
         <p:txBody>
-          <a:bodyPr rtlCol="0" anchor="ctr" lIns="0" rIns="0" tIns="0" bIns="0" wrap="none"/>
+          <a:bodyPr rtlCol="0" anchor="ctr"/>
           <a:lstStyle/>
           <a:p>
             <a:pPr algn="ctr"/>
-            <a:r>
-              <a:rPr sz="3600">
-                <a:solidFill>
-                  <a:srgbClr val="FFFFFF"/>
-                </a:solidFill>
-              </a:rPr>
-              <a:t>🌱</a:t>
-            </a:r>
-          </a:p>
-        </p:txBody>
-      </p:sp>
-      <p:sp>
-        <p:nvSpPr>
-          <p:cNvPr id="3" name="TextBox 2"/>
+          </a:p>
+        </p:txBody>
+      </p:sp>
+      <p:sp>
+        <p:nvSpPr>
+          <p:cNvPr id="4" name="TextBox 3"/>
           <p:cNvSpPr txBox="1"/>
           <p:nvPr/>
         </p:nvSpPr>
         <p:spPr>
           <a:xfrm>
-            <a:off x="1371600" y="3200400"/>
-            <a:ext cx="9418320" cy="914400"/>
+            <a:off x="1188720" y="2148840"/>
+            <a:ext cx="2377440" cy="731520"/>
           </a:xfrm>
           <a:prstGeom prst="rect">
             <a:avLst/>
@@ -8702,38 +9471,38 @@
           <a:noFill/>
         </p:spPr>
         <p:txBody>
-          <a:bodyPr wrap="square" anchor="t" lIns="0" rIns="0" tIns="0" bIns="0">
+          <a:bodyPr wrap="square" anchor="ctr" lIns="0" rIns="0" tIns="0" bIns="0">
             <a:spAutoFit/>
           </a:bodyPr>
           <a:lstStyle/>
           <a:p>
-            <a:pPr algn="ctr">
+            <a:pPr algn="l">
               <a:lnSpc>
                 <a:spcPct val="115000"/>
               </a:lnSpc>
             </a:pPr>
             <a:r>
-              <a:rPr sz="4400" b="1" i="0">
+              <a:rPr sz="1200" b="1" i="0">
                 <a:solidFill>
                   <a:srgbClr val="FFFFFF"/>
                 </a:solidFill>
-                <a:latin typeface="Cambria"/>
-              </a:rPr>
-              <a:t>Health First</a:t>
-            </a:r>
-          </a:p>
-        </p:txBody>
-      </p:sp>
-      <p:sp>
-        <p:nvSpPr>
-          <p:cNvPr id="4" name="TextBox 3"/>
+                <a:latin typeface="Calibri"/>
+              </a:rPr>
+              <a:t>LIVE PROTOTYPE</a:t>
+            </a:r>
+          </a:p>
+        </p:txBody>
+      </p:sp>
+      <p:sp>
+        <p:nvSpPr>
+          <p:cNvPr id="5" name="TextBox 4"/>
           <p:cNvSpPr txBox="1"/>
           <p:nvPr/>
         </p:nvSpPr>
         <p:spPr>
           <a:xfrm>
-            <a:off x="1371600" y="4114800"/>
-            <a:ext cx="9418320" cy="731520"/>
+            <a:off x="3566160" y="2103120"/>
+            <a:ext cx="7315200" cy="822960"/>
           </a:xfrm>
           <a:prstGeom prst="rect">
             <a:avLst/>
@@ -8741,38 +9510,84 @@
           <a:noFill/>
         </p:spPr>
         <p:txBody>
-          <a:bodyPr wrap="square" anchor="t" lIns="0" rIns="0" tIns="0" bIns="0">
+          <a:bodyPr wrap="square" anchor="ctr" lIns="0" rIns="0" tIns="0" bIns="0">
             <a:spAutoFit/>
           </a:bodyPr>
           <a:lstStyle/>
           <a:p>
-            <a:pPr algn="ctr">
+            <a:pPr algn="l">
               <a:lnSpc>
                 <a:spcPct val="115000"/>
               </a:lnSpc>
             </a:pPr>
             <a:r>
-              <a:rPr sz="1800" b="0" i="1">
-                <a:solidFill>
-                  <a:srgbClr val="DCE8D9"/>
+              <a:rPr sz="1500" b="1" i="0">
+                <a:solidFill>
+                  <a:srgbClr val="FFFFFF"/>
                 </a:solidFill>
                 <a:latin typeface="Calibri"/>
               </a:rPr>
-              <a:t>Making healthy habits the actual price of screen time.</a:t>
-            </a:r>
-          </a:p>
-        </p:txBody>
-      </p:sp>
-      <p:sp>
-        <p:nvSpPr>
-          <p:cNvPr id="5" name="TextBox 4"/>
+              <a:t>claude.ai/code/artifact/dc777afc-bb3e-408c-aede-89ed91983bd3</a:t>
+            </a:r>
+          </a:p>
+        </p:txBody>
+      </p:sp>
+      <p:sp>
+        <p:nvSpPr>
+          <p:cNvPr id="6" name="Rounded Rectangle 5"/>
+          <p:cNvSpPr/>
+          <p:nvPr/>
+        </p:nvSpPr>
+        <p:spPr>
+          <a:xfrm>
+            <a:off x="822960" y="3291840"/>
+            <a:ext cx="10515600" cy="1188720"/>
+          </a:xfrm>
+          <a:prstGeom prst="roundRect">
+            <a:avLst>
+              <a:gd name="adj" fmla="val 10000"/>
+            </a:avLst>
+          </a:prstGeom>
+          <a:solidFill>
+            <a:srgbClr val="DD6B42"/>
+          </a:solidFill>
+          <a:ln>
+            <a:noFill/>
+          </a:ln>
+          <a:effectLst/>
+        </p:spPr>
+        <p:style>
+          <a:lnRef idx="1">
+            <a:schemeClr val="accent1"/>
+          </a:lnRef>
+          <a:fillRef idx="3">
+            <a:schemeClr val="accent1"/>
+          </a:fillRef>
+          <a:effectRef idx="2">
+            <a:schemeClr val="accent1"/>
+          </a:effectRef>
+          <a:fontRef idx="minor">
+            <a:schemeClr val="lt1"/>
+          </a:fontRef>
+        </p:style>
+        <p:txBody>
+          <a:bodyPr rtlCol="0" anchor="ctr"/>
+          <a:lstStyle/>
+          <a:p>
+            <a:pPr algn="ctr"/>
+          </a:p>
+        </p:txBody>
+      </p:sp>
+      <p:sp>
+        <p:nvSpPr>
+          <p:cNvPr id="7" name="TextBox 6"/>
           <p:cNvSpPr txBox="1"/>
           <p:nvPr/>
         </p:nvSpPr>
         <p:spPr>
           <a:xfrm>
-            <a:off x="1371600" y="5120640"/>
-            <a:ext cx="9418320" cy="457200"/>
+            <a:off x="1188720" y="3520440"/>
+            <a:ext cx="2377440" cy="731520"/>
           </a:xfrm>
           <a:prstGeom prst="rect">
             <a:avLst/>
@@ -8780,24 +9595,187 @@
           <a:noFill/>
         </p:spPr>
         <p:txBody>
-          <a:bodyPr wrap="square" anchor="t" lIns="0" rIns="0" tIns="0" bIns="0">
+          <a:bodyPr wrap="square" anchor="ctr" lIns="0" rIns="0" tIns="0" bIns="0">
             <a:spAutoFit/>
           </a:bodyPr>
           <a:lstStyle/>
           <a:p>
-            <a:pPr algn="ctr">
+            <a:pPr algn="l">
               <a:lnSpc>
                 <a:spcPct val="115000"/>
               </a:lnSpc>
             </a:pPr>
             <a:r>
-              <a:rPr sz="1300" b="0" i="0">
-                <a:solidFill>
-                  <a:srgbClr val="F7E1D5"/>
+              <a:rPr sz="1200" b="1" i="0">
+                <a:solidFill>
+                  <a:srgbClr val="FFFFFF"/>
                 </a:solidFill>
                 <a:latin typeface="Calibri"/>
               </a:rPr>
-              <a:t>Thank you — Qutuhal InnovateX 2.0</a:t>
+              <a:t>SOURCE CODE</a:t>
+            </a:r>
+          </a:p>
+        </p:txBody>
+      </p:sp>
+      <p:sp>
+        <p:nvSpPr>
+          <p:cNvPr id="8" name="TextBox 7"/>
+          <p:cNvSpPr txBox="1"/>
+          <p:nvPr/>
+        </p:nvSpPr>
+        <p:spPr>
+          <a:xfrm>
+            <a:off x="3566160" y="3474720"/>
+            <a:ext cx="7315200" cy="822960"/>
+          </a:xfrm>
+          <a:prstGeom prst="rect">
+            <a:avLst/>
+          </a:prstGeom>
+          <a:noFill/>
+        </p:spPr>
+        <p:txBody>
+          <a:bodyPr wrap="square" anchor="ctr" lIns="0" rIns="0" tIns="0" bIns="0">
+            <a:spAutoFit/>
+          </a:bodyPr>
+          <a:lstStyle/>
+          <a:p>
+            <a:pPr algn="l">
+              <a:lnSpc>
+                <a:spcPct val="115000"/>
+              </a:lnSpc>
+            </a:pPr>
+            <a:r>
+              <a:rPr sz="1500" b="1" i="0">
+                <a:solidFill>
+                  <a:srgbClr val="FFFFFF"/>
+                </a:solidFill>
+                <a:latin typeface="Calibri"/>
+              </a:rPr>
+              <a:t>github.com/sahil19891989/health-first</a:t>
+            </a:r>
+          </a:p>
+        </p:txBody>
+      </p:sp>
+      <p:sp>
+        <p:nvSpPr>
+          <p:cNvPr id="9" name="Rounded Rectangle 8"/>
+          <p:cNvSpPr/>
+          <p:nvPr/>
+        </p:nvSpPr>
+        <p:spPr>
+          <a:xfrm>
+            <a:off x="822960" y="4663440"/>
+            <a:ext cx="10515600" cy="1188720"/>
+          </a:xfrm>
+          <a:prstGeom prst="roundRect">
+            <a:avLst>
+              <a:gd name="adj" fmla="val 10000"/>
+            </a:avLst>
+          </a:prstGeom>
+          <a:solidFill>
+            <a:srgbClr val="DB9D3B"/>
+          </a:solidFill>
+          <a:ln>
+            <a:noFill/>
+          </a:ln>
+          <a:effectLst/>
+        </p:spPr>
+        <p:style>
+          <a:lnRef idx="1">
+            <a:schemeClr val="accent1"/>
+          </a:lnRef>
+          <a:fillRef idx="3">
+            <a:schemeClr val="accent1"/>
+          </a:fillRef>
+          <a:effectRef idx="2">
+            <a:schemeClr val="accent1"/>
+          </a:effectRef>
+          <a:fontRef idx="minor">
+            <a:schemeClr val="lt1"/>
+          </a:fontRef>
+        </p:style>
+        <p:txBody>
+          <a:bodyPr rtlCol="0" anchor="ctr"/>
+          <a:lstStyle/>
+          <a:p>
+            <a:pPr algn="ctr"/>
+          </a:p>
+        </p:txBody>
+      </p:sp>
+      <p:sp>
+        <p:nvSpPr>
+          <p:cNvPr id="10" name="TextBox 9"/>
+          <p:cNvSpPr txBox="1"/>
+          <p:nvPr/>
+        </p:nvSpPr>
+        <p:spPr>
+          <a:xfrm>
+            <a:off x="1188720" y="4892040"/>
+            <a:ext cx="2377440" cy="731520"/>
+          </a:xfrm>
+          <a:prstGeom prst="rect">
+            <a:avLst/>
+          </a:prstGeom>
+          <a:noFill/>
+        </p:spPr>
+        <p:txBody>
+          <a:bodyPr wrap="square" anchor="ctr" lIns="0" rIns="0" tIns="0" bIns="0">
+            <a:spAutoFit/>
+          </a:bodyPr>
+          <a:lstStyle/>
+          <a:p>
+            <a:pPr algn="l">
+              <a:lnSpc>
+                <a:spcPct val="115000"/>
+              </a:lnSpc>
+            </a:pPr>
+            <a:r>
+              <a:rPr sz="1200" b="1" i="0">
+                <a:solidFill>
+                  <a:srgbClr val="1F3D2B"/>
+                </a:solidFill>
+                <a:latin typeface="Calibri"/>
+              </a:rPr>
+              <a:t>DEMO PARENT PIN</a:t>
+            </a:r>
+          </a:p>
+        </p:txBody>
+      </p:sp>
+      <p:sp>
+        <p:nvSpPr>
+          <p:cNvPr id="11" name="TextBox 10"/>
+          <p:cNvSpPr txBox="1"/>
+          <p:nvPr/>
+        </p:nvSpPr>
+        <p:spPr>
+          <a:xfrm>
+            <a:off x="3566160" y="4846320"/>
+            <a:ext cx="7315200" cy="822960"/>
+          </a:xfrm>
+          <a:prstGeom prst="rect">
+            <a:avLst/>
+          </a:prstGeom>
+          <a:noFill/>
+        </p:spPr>
+        <p:txBody>
+          <a:bodyPr wrap="square" anchor="ctr" lIns="0" rIns="0" tIns="0" bIns="0">
+            <a:spAutoFit/>
+          </a:bodyPr>
+          <a:lstStyle/>
+          <a:p>
+            <a:pPr algn="l">
+              <a:lnSpc>
+                <a:spcPct val="115000"/>
+              </a:lnSpc>
+            </a:pPr>
+            <a:r>
+              <a:rPr sz="2200" b="1" i="0">
+                <a:solidFill>
+                  <a:srgbClr val="1F3D2B"/>
+                </a:solidFill>
+                <a:latin typeface="Cambria"/>
+              </a:rPr>
+              <a:t>1234</a:t>
             </a:r>
           </a:p>
         </p:txBody>

--- a/Health_First_Week6_Pitch.pptx
+++ b/Health_First_Week6_Pitch.pptx
@@ -13,8 +13,6 @@
     <p:sldId id="261" r:id="rId13"/>
     <p:sldId id="262" r:id="rId14"/>
     <p:sldId id="263" r:id="rId15"/>
-    <p:sldId id="264" r:id="rId16"/>
-    <p:sldId id="265" r:id="rId17"/>
   </p:sldIdLst>
   <p:sldSz cx="12191695" cy="6858000" type="screen4x3"/>
   <p:notesSz cx="6858000" cy="9144000"/>
@@ -536,76 +534,6 @@
 </p:notes>
 </file>
 
-<file path=ppt/notesSlides/notesSlide10.xml><?xml version="1.0" encoding="utf-8"?>
-<p:notes xmlns:a="http://schemas.openxmlformats.org/drawingml/2006/main" xmlns:p="http://schemas.openxmlformats.org/presentationml/2006/main" xmlns:r="http://schemas.openxmlformats.org/officeDocument/2006/relationships">
-  <p:cSld>
-    <p:spTree>
-      <p:nvGrpSpPr>
-        <p:cNvPr id="1" name=""/>
-        <p:cNvGrpSpPr/>
-        <p:nvPr/>
-      </p:nvGrpSpPr>
-      <p:grpSpPr>
-        <a:xfrm>
-          <a:off x="0" y="0"/>
-          <a:ext cx="0" cy="0"/>
-          <a:chOff x="0" y="0"/>
-          <a:chExt cx="0" cy="0"/>
-        </a:xfrm>
-      </p:grpSpPr>
-      <p:sp>
-        <p:nvSpPr>
-          <p:cNvPr id="2" name="Slide Image Placeholder 1"/>
-          <p:cNvSpPr>
-            <a:spLocks noGrp="1"/>
-          </p:cNvSpPr>
-          <p:nvPr>
-            <p:ph type="sldImg" idx="2"/>
-          </p:nvPr>
-        </p:nvSpPr>
-        <p:spPr/>
-      </p:sp>
-      <p:sp>
-        <p:nvSpPr>
-          <p:cNvPr id="3" name="Notes Placeholder 2"/>
-          <p:cNvSpPr>
-            <a:spLocks noGrp="1"/>
-          </p:cNvSpPr>
-          <p:nvPr>
-            <p:ph type="body" idx="3" sz="quarter"/>
-          </p:nvPr>
-        </p:nvSpPr>
-        <p:spPr/>
-        <p:txBody>
-          <a:bodyPr/>
-          <a:lstStyle/>
-          <a:p>
-            <a:r>
-              <a:t>End on this line, then stop talking. Let the tagline be the last thing they hear.</a:t>
-            </a:r>
-          </a:p>
-        </p:txBody>
-      </p:sp>
-      <p:sp>
-        <p:nvSpPr>
-          <p:cNvPr id="4" name="Slide Number Placeholder 3"/>
-          <p:cNvSpPr>
-            <a:spLocks noGrp="1"/>
-          </p:cNvSpPr>
-          <p:nvPr>
-            <p:ph type="sldNum" idx="5" sz="quarter"/>
-          </p:nvPr>
-        </p:nvSpPr>
-        <p:spPr/>
-      </p:sp>
-    </p:spTree>
-  </p:cSld>
-  <p:clrMapOvr>
-    <a:masterClrMapping/>
-  </p:clrMapOvr>
-</p:notes>
-</file>
-
 <file path=ppt/notesSlides/notesSlide2.xml><?xml version="1.0" encoding="utf-8"?>
 <p:notes xmlns:a="http://schemas.openxmlformats.org/drawingml/2006/main" xmlns:p="http://schemas.openxmlformats.org/presentationml/2006/main" xmlns:r="http://schemas.openxmlformats.org/officeDocument/2006/relationships">
   <p:cSld>
@@ -861,7 +789,7 @@
           <a:lstStyle/>
           <a:p>
             <a:r>
-              <a:t>Say this slide out loud, then switch to the live screen recording / browser demo immediately after.</a:t>
+              <a:t>Keep this brief - one breath explaining the diagram, then move to Wider Impact.</a:t>
             </a:r>
           </a:p>
         </p:txBody>
@@ -931,7 +859,7 @@
           <a:lstStyle/>
           <a:p>
             <a:r>
-              <a:t>Emphasize this is two products in one - a game for the kid, a dashboard for the parent.</a:t>
+              <a:t>This is the slide that answers 'so what' for judges - why this matters beyond one demo family.</a:t>
             </a:r>
           </a:p>
         </p:txBody>
@@ -1001,7 +929,7 @@
           <a:lstStyle/>
           <a:p>
             <a:r>
-              <a:t>This is the slide that answers 'so what' for judges - why this matters beyond one demo family.</a:t>
+              <a:t>Say the proof bullets, then read the links out loud slowly if this is on screen during the recorded pitch.</a:t>
             </a:r>
           </a:p>
         </p:txBody>
@@ -1071,77 +999,7 @@
           <a:lstStyle/>
           <a:p>
             <a:r>
-              <a:t>Shows judges this was iterated with discipline, not just built once and left alone.</a:t>
-            </a:r>
-          </a:p>
-        </p:txBody>
-      </p:sp>
-      <p:sp>
-        <p:nvSpPr>
-          <p:cNvPr id="4" name="Slide Number Placeholder 3"/>
-          <p:cNvSpPr>
-            <a:spLocks noGrp="1"/>
-          </p:cNvSpPr>
-          <p:nvPr>
-            <p:ph type="sldNum" idx="5" sz="quarter"/>
-          </p:nvPr>
-        </p:nvSpPr>
-        <p:spPr/>
-      </p:sp>
-    </p:spTree>
-  </p:cSld>
-  <p:clrMapOvr>
-    <a:masterClrMapping/>
-  </p:clrMapOvr>
-</p:notes>
-</file>
-
-<file path=ppt/notesSlides/notesSlide9.xml><?xml version="1.0" encoding="utf-8"?>
-<p:notes xmlns:a="http://schemas.openxmlformats.org/drawingml/2006/main" xmlns:p="http://schemas.openxmlformats.org/presentationml/2006/main" xmlns:r="http://schemas.openxmlformats.org/officeDocument/2006/relationships">
-  <p:cSld>
-    <p:spTree>
-      <p:nvGrpSpPr>
-        <p:cNvPr id="1" name=""/>
-        <p:cNvGrpSpPr/>
-        <p:nvPr/>
-      </p:nvGrpSpPr>
-      <p:grpSpPr>
-        <a:xfrm>
-          <a:off x="0" y="0"/>
-          <a:ext cx="0" cy="0"/>
-          <a:chOff x="0" y="0"/>
-          <a:chExt cx="0" cy="0"/>
-        </a:xfrm>
-      </p:grpSpPr>
-      <p:sp>
-        <p:nvSpPr>
-          <p:cNvPr id="2" name="Slide Image Placeholder 1"/>
-          <p:cNvSpPr>
-            <a:spLocks noGrp="1"/>
-          </p:cNvSpPr>
-          <p:nvPr>
-            <p:ph type="sldImg" idx="2"/>
-          </p:nvPr>
-        </p:nvSpPr>
-        <p:spPr/>
-      </p:sp>
-      <p:sp>
-        <p:nvSpPr>
-          <p:cNvPr id="3" name="Notes Placeholder 2"/>
-          <p:cNvSpPr>
-            <a:spLocks noGrp="1"/>
-          </p:cNvSpPr>
-          <p:nvPr>
-            <p:ph type="body" idx="3" sz="quarter"/>
-          </p:nvPr>
-        </p:nvSpPr>
-        <p:spPr/>
-        <p:txBody>
-          <a:bodyPr/>
-          <a:lstStyle/>
-          <a:p>
-            <a:r>
-              <a:t>Read these out loud slowly if this is on screen during the recorded pitch.</a:t>
+              <a:t>End on this line, then stop talking. Let the tagline be the last thing they hear.</a:t>
             </a:r>
           </a:p>
         </p:txBody>
@@ -4348,474 +4206,6 @@
 </p:sld>
 </file>
 
-<file path=ppt/slides/slide10.xml><?xml version="1.0" encoding="utf-8"?>
-<p:sld xmlns:a="http://schemas.openxmlformats.org/drawingml/2006/main" xmlns:p="http://schemas.openxmlformats.org/presentationml/2006/main" xmlns:r="http://schemas.openxmlformats.org/officeDocument/2006/relationships">
-  <p:cSld>
-    <p:bg>
-      <p:bgPr>
-        <a:solidFill>
-          <a:srgbClr val="1F3D2B"/>
-        </a:solidFill>
-        <a:effectLst/>
-      </p:bgPr>
-    </p:bg>
-    <p:spTree>
-      <p:nvGrpSpPr>
-        <p:cNvPr id="1" name=""/>
-        <p:cNvGrpSpPr/>
-        <p:nvPr/>
-      </p:nvGrpSpPr>
-      <p:grpSpPr/>
-      <p:sp>
-        <p:nvSpPr>
-          <p:cNvPr id="2" name="TextBox 1"/>
-          <p:cNvSpPr txBox="1"/>
-          <p:nvPr/>
-        </p:nvSpPr>
-        <p:spPr>
-          <a:xfrm>
-            <a:off x="822960" y="640080"/>
-            <a:ext cx="9601200" cy="822960"/>
-          </a:xfrm>
-          <a:prstGeom prst="rect">
-            <a:avLst/>
-          </a:prstGeom>
-          <a:noFill/>
-        </p:spPr>
-        <p:txBody>
-          <a:bodyPr wrap="square" anchor="t" lIns="0" rIns="0" tIns="0" bIns="0">
-            <a:spAutoFit/>
-          </a:bodyPr>
-          <a:lstStyle/>
-          <a:p>
-            <a:pPr algn="l">
-              <a:lnSpc>
-                <a:spcPct val="115000"/>
-              </a:lnSpc>
-            </a:pPr>
-            <a:r>
-              <a:rPr sz="3600" b="1" i="0">
-                <a:solidFill>
-                  <a:srgbClr val="FFFFFF"/>
-                </a:solidFill>
-                <a:latin typeface="Cambria"/>
-              </a:rPr>
-              <a:t>Why Health First Wins</a:t>
-            </a:r>
-          </a:p>
-        </p:txBody>
-      </p:sp>
-      <p:sp>
-        <p:nvSpPr>
-          <p:cNvPr id="3" name="Oval 2"/>
-          <p:cNvSpPr/>
-          <p:nvPr/>
-        </p:nvSpPr>
-        <p:spPr>
-          <a:xfrm>
-            <a:off x="1097280" y="1828800"/>
-            <a:ext cx="640080" cy="640080"/>
-          </a:xfrm>
-          <a:prstGeom prst="ellipse">
-            <a:avLst/>
-          </a:prstGeom>
-          <a:solidFill>
-            <a:srgbClr val="3E7A5C"/>
-          </a:solidFill>
-          <a:ln>
-            <a:noFill/>
-          </a:ln>
-          <a:effectLst/>
-        </p:spPr>
-        <p:style>
-          <a:lnRef idx="1">
-            <a:schemeClr val="accent1"/>
-          </a:lnRef>
-          <a:fillRef idx="3">
-            <a:schemeClr val="accent1"/>
-          </a:fillRef>
-          <a:effectRef idx="2">
-            <a:schemeClr val="accent1"/>
-          </a:effectRef>
-          <a:fontRef idx="minor">
-            <a:schemeClr val="lt1"/>
-          </a:fontRef>
-        </p:style>
-        <p:txBody>
-          <a:bodyPr rtlCol="0" anchor="ctr" lIns="0" rIns="0" tIns="0" bIns="0" wrap="none"/>
-          <a:lstStyle/>
-          <a:p>
-            <a:pPr algn="ctr"/>
-            <a:r>
-              <a:rPr sz="1900">
-                <a:solidFill>
-                  <a:srgbClr val="FFFFFF"/>
-                </a:solidFill>
-              </a:rPr>
-              <a:t>✓</a:t>
-            </a:r>
-          </a:p>
-        </p:txBody>
-      </p:sp>
-      <p:sp>
-        <p:nvSpPr>
-          <p:cNvPr id="4" name="TextBox 3"/>
-          <p:cNvSpPr txBox="1"/>
-          <p:nvPr/>
-        </p:nvSpPr>
-        <p:spPr>
-          <a:xfrm>
-            <a:off x="2103120" y="1828800"/>
-            <a:ext cx="8961120" cy="640080"/>
-          </a:xfrm>
-          <a:prstGeom prst="rect">
-            <a:avLst/>
-          </a:prstGeom>
-          <a:noFill/>
-        </p:spPr>
-        <p:txBody>
-          <a:bodyPr wrap="square" anchor="ctr" lIns="0" rIns="0" tIns="0" bIns="0">
-            <a:spAutoFit/>
-          </a:bodyPr>
-          <a:lstStyle/>
-          <a:p>
-            <a:pPr algn="l">
-              <a:lnSpc>
-                <a:spcPct val="115000"/>
-              </a:lnSpc>
-            </a:pPr>
-            <a:r>
-              <a:rPr sz="1700" b="0" i="0">
-                <a:solidFill>
-                  <a:srgbClr val="FFFFFF"/>
-                </a:solidFill>
-                <a:latin typeface="Calibri"/>
-              </a:rPr>
-              <a:t>A real problem, validated with real people — not assumed.</a:t>
-            </a:r>
-          </a:p>
-        </p:txBody>
-      </p:sp>
-      <p:sp>
-        <p:nvSpPr>
-          <p:cNvPr id="5" name="Oval 4"/>
-          <p:cNvSpPr/>
-          <p:nvPr/>
-        </p:nvSpPr>
-        <p:spPr>
-          <a:xfrm>
-            <a:off x="1097280" y="2743200"/>
-            <a:ext cx="640080" cy="640080"/>
-          </a:xfrm>
-          <a:prstGeom prst="ellipse">
-            <a:avLst/>
-          </a:prstGeom>
-          <a:solidFill>
-            <a:srgbClr val="3E7A5C"/>
-          </a:solidFill>
-          <a:ln>
-            <a:noFill/>
-          </a:ln>
-          <a:effectLst/>
-        </p:spPr>
-        <p:style>
-          <a:lnRef idx="1">
-            <a:schemeClr val="accent1"/>
-          </a:lnRef>
-          <a:fillRef idx="3">
-            <a:schemeClr val="accent1"/>
-          </a:fillRef>
-          <a:effectRef idx="2">
-            <a:schemeClr val="accent1"/>
-          </a:effectRef>
-          <a:fontRef idx="minor">
-            <a:schemeClr val="lt1"/>
-          </a:fontRef>
-        </p:style>
-        <p:txBody>
-          <a:bodyPr rtlCol="0" anchor="ctr" lIns="0" rIns="0" tIns="0" bIns="0" wrap="none"/>
-          <a:lstStyle/>
-          <a:p>
-            <a:pPr algn="ctr"/>
-            <a:r>
-              <a:rPr sz="1900">
-                <a:solidFill>
-                  <a:srgbClr val="FFFFFF"/>
-                </a:solidFill>
-              </a:rPr>
-              <a:t>✓</a:t>
-            </a:r>
-          </a:p>
-        </p:txBody>
-      </p:sp>
-      <p:sp>
-        <p:nvSpPr>
-          <p:cNvPr id="6" name="TextBox 5"/>
-          <p:cNvSpPr txBox="1"/>
-          <p:nvPr/>
-        </p:nvSpPr>
-        <p:spPr>
-          <a:xfrm>
-            <a:off x="2103120" y="2743200"/>
-            <a:ext cx="8961120" cy="640080"/>
-          </a:xfrm>
-          <a:prstGeom prst="rect">
-            <a:avLst/>
-          </a:prstGeom>
-          <a:noFill/>
-        </p:spPr>
-        <p:txBody>
-          <a:bodyPr wrap="square" anchor="ctr" lIns="0" rIns="0" tIns="0" bIns="0">
-            <a:spAutoFit/>
-          </a:bodyPr>
-          <a:lstStyle/>
-          <a:p>
-            <a:pPr algn="l">
-              <a:lnSpc>
-                <a:spcPct val="115000"/>
-              </a:lnSpc>
-            </a:pPr>
-            <a:r>
-              <a:rPr sz="1700" b="0" i="0">
-                <a:solidFill>
-                  <a:srgbClr val="FFFFFF"/>
-                </a:solidFill>
-                <a:latin typeface="Calibri"/>
-              </a:rPr>
-              <a:t>A real working product — every claim on this deck is a live, clickable feature.</a:t>
-            </a:r>
-          </a:p>
-        </p:txBody>
-      </p:sp>
-      <p:sp>
-        <p:nvSpPr>
-          <p:cNvPr id="7" name="Oval 6"/>
-          <p:cNvSpPr/>
-          <p:nvPr/>
-        </p:nvSpPr>
-        <p:spPr>
-          <a:xfrm>
-            <a:off x="1097280" y="3657599"/>
-            <a:ext cx="640080" cy="640080"/>
-          </a:xfrm>
-          <a:prstGeom prst="ellipse">
-            <a:avLst/>
-          </a:prstGeom>
-          <a:solidFill>
-            <a:srgbClr val="3E7A5C"/>
-          </a:solidFill>
-          <a:ln>
-            <a:noFill/>
-          </a:ln>
-          <a:effectLst/>
-        </p:spPr>
-        <p:style>
-          <a:lnRef idx="1">
-            <a:schemeClr val="accent1"/>
-          </a:lnRef>
-          <a:fillRef idx="3">
-            <a:schemeClr val="accent1"/>
-          </a:fillRef>
-          <a:effectRef idx="2">
-            <a:schemeClr val="accent1"/>
-          </a:effectRef>
-          <a:fontRef idx="minor">
-            <a:schemeClr val="lt1"/>
-          </a:fontRef>
-        </p:style>
-        <p:txBody>
-          <a:bodyPr rtlCol="0" anchor="ctr" lIns="0" rIns="0" tIns="0" bIns="0" wrap="none"/>
-          <a:lstStyle/>
-          <a:p>
-            <a:pPr algn="ctr"/>
-            <a:r>
-              <a:rPr sz="1900">
-                <a:solidFill>
-                  <a:srgbClr val="FFFFFF"/>
-                </a:solidFill>
-              </a:rPr>
-              <a:t>✓</a:t>
-            </a:r>
-          </a:p>
-        </p:txBody>
-      </p:sp>
-      <p:sp>
-        <p:nvSpPr>
-          <p:cNvPr id="8" name="TextBox 7"/>
-          <p:cNvSpPr txBox="1"/>
-          <p:nvPr/>
-        </p:nvSpPr>
-        <p:spPr>
-          <a:xfrm>
-            <a:off x="2103120" y="3657600"/>
-            <a:ext cx="8961120" cy="640080"/>
-          </a:xfrm>
-          <a:prstGeom prst="rect">
-            <a:avLst/>
-          </a:prstGeom>
-          <a:noFill/>
-        </p:spPr>
-        <p:txBody>
-          <a:bodyPr wrap="square" anchor="ctr" lIns="0" rIns="0" tIns="0" bIns="0">
-            <a:spAutoFit/>
-          </a:bodyPr>
-          <a:lstStyle/>
-          <a:p>
-            <a:pPr algn="l">
-              <a:lnSpc>
-                <a:spcPct val="115000"/>
-              </a:lnSpc>
-            </a:pPr>
-            <a:r>
-              <a:rPr sz="1700" b="0" i="0">
-                <a:solidFill>
-                  <a:srgbClr val="FFFFFF"/>
-                </a:solidFill>
-                <a:latin typeface="Calibri"/>
-              </a:rPr>
-              <a:t>A genuinely different model — reward, not restrict.</a:t>
-            </a:r>
-          </a:p>
-        </p:txBody>
-      </p:sp>
-      <p:sp>
-        <p:nvSpPr>
-          <p:cNvPr id="9" name="Oval 8"/>
-          <p:cNvSpPr/>
-          <p:nvPr/>
-        </p:nvSpPr>
-        <p:spPr>
-          <a:xfrm>
-            <a:off x="1097280" y="4572000"/>
-            <a:ext cx="640080" cy="640080"/>
-          </a:xfrm>
-          <a:prstGeom prst="ellipse">
-            <a:avLst/>
-          </a:prstGeom>
-          <a:solidFill>
-            <a:srgbClr val="3E7A5C"/>
-          </a:solidFill>
-          <a:ln>
-            <a:noFill/>
-          </a:ln>
-          <a:effectLst/>
-        </p:spPr>
-        <p:style>
-          <a:lnRef idx="1">
-            <a:schemeClr val="accent1"/>
-          </a:lnRef>
-          <a:fillRef idx="3">
-            <a:schemeClr val="accent1"/>
-          </a:fillRef>
-          <a:effectRef idx="2">
-            <a:schemeClr val="accent1"/>
-          </a:effectRef>
-          <a:fontRef idx="minor">
-            <a:schemeClr val="lt1"/>
-          </a:fontRef>
-        </p:style>
-        <p:txBody>
-          <a:bodyPr rtlCol="0" anchor="ctr" lIns="0" rIns="0" tIns="0" bIns="0" wrap="none"/>
-          <a:lstStyle/>
-          <a:p>
-            <a:pPr algn="ctr"/>
-            <a:r>
-              <a:rPr sz="1900">
-                <a:solidFill>
-                  <a:srgbClr val="FFFFFF"/>
-                </a:solidFill>
-              </a:rPr>
-              <a:t>✓</a:t>
-            </a:r>
-          </a:p>
-        </p:txBody>
-      </p:sp>
-      <p:sp>
-        <p:nvSpPr>
-          <p:cNvPr id="10" name="TextBox 9"/>
-          <p:cNvSpPr txBox="1"/>
-          <p:nvPr/>
-        </p:nvSpPr>
-        <p:spPr>
-          <a:xfrm>
-            <a:off x="2103120" y="4572000"/>
-            <a:ext cx="8961120" cy="640080"/>
-          </a:xfrm>
-          <a:prstGeom prst="rect">
-            <a:avLst/>
-          </a:prstGeom>
-          <a:noFill/>
-        </p:spPr>
-        <p:txBody>
-          <a:bodyPr wrap="square" anchor="ctr" lIns="0" rIns="0" tIns="0" bIns="0">
-            <a:spAutoFit/>
-          </a:bodyPr>
-          <a:lstStyle/>
-          <a:p>
-            <a:pPr algn="l">
-              <a:lnSpc>
-                <a:spcPct val="115000"/>
-              </a:lnSpc>
-            </a:pPr>
-            <a:r>
-              <a:rPr sz="1700" b="0" i="0">
-                <a:solidFill>
-                  <a:srgbClr val="FFFFFF"/>
-                </a:solidFill>
-                <a:latin typeface="Calibri"/>
-              </a:rPr>
-              <a:t>Built to scale beyond one house — any habit, any family, any culture.</a:t>
-            </a:r>
-          </a:p>
-        </p:txBody>
-      </p:sp>
-      <p:sp>
-        <p:nvSpPr>
-          <p:cNvPr id="11" name="TextBox 10"/>
-          <p:cNvSpPr txBox="1"/>
-          <p:nvPr/>
-        </p:nvSpPr>
-        <p:spPr>
-          <a:xfrm>
-            <a:off x="822960" y="5760720"/>
-            <a:ext cx="9601200" cy="640080"/>
-          </a:xfrm>
-          <a:prstGeom prst="rect">
-            <a:avLst/>
-          </a:prstGeom>
-          <a:noFill/>
-        </p:spPr>
-        <p:txBody>
-          <a:bodyPr wrap="square" anchor="t" lIns="0" rIns="0" tIns="0" bIns="0">
-            <a:spAutoFit/>
-          </a:bodyPr>
-          <a:lstStyle/>
-          <a:p>
-            <a:pPr algn="l">
-              <a:lnSpc>
-                <a:spcPct val="115000"/>
-              </a:lnSpc>
-            </a:pPr>
-            <a:r>
-              <a:rPr sz="1500" b="0" i="1">
-                <a:solidFill>
-                  <a:srgbClr val="DCE8D9"/>
-                </a:solidFill>
-                <a:latin typeface="Calibri"/>
-              </a:rPr>
-              <a:t>Health First — making healthy habits the actual price of screen time.</a:t>
-            </a:r>
-          </a:p>
-        </p:txBody>
-      </p:sp>
-    </p:spTree>
-  </p:cSld>
-  <p:clrMapOvr>
-    <a:masterClrMapping/>
-  </p:clrMapOvr>
-</p:sld>
-</file>
-
 <file path=ppt/slides/slide2.xml><?xml version="1.0" encoding="utf-8"?>
 <p:sld xmlns:a="http://schemas.openxmlformats.org/drawingml/2006/main" xmlns:p="http://schemas.openxmlformats.org/presentationml/2006/main" xmlns:r="http://schemas.openxmlformats.org/officeDocument/2006/relationships">
   <p:cSld>
@@ -6842,8 +6232,8 @@
         </p:nvSpPr>
         <p:spPr>
           <a:xfrm>
-            <a:off x="822960" y="548640"/>
-            <a:ext cx="9601200" cy="731520"/>
+            <a:off x="822960" y="457200"/>
+            <a:ext cx="10332720" cy="640080"/>
           </a:xfrm>
           <a:prstGeom prst="rect">
             <a:avLst/>
@@ -6862,13 +6252,13 @@
               </a:lnSpc>
             </a:pPr>
             <a:r>
-              <a:rPr sz="3200" b="1" i="0">
+              <a:rPr sz="2800" b="1" i="0">
                 <a:solidFill>
                   <a:srgbClr val="FFFFFF"/>
                 </a:solidFill>
                 <a:latin typeface="Cambria"/>
               </a:rPr>
-              <a:t>Not a Mockup. A Working Product.</a:t>
+              <a:t>Under the Hood: Simple by Design</a:t>
             </a:r>
           </a:p>
         </p:txBody>
@@ -6881,8 +6271,8 @@
         </p:nvSpPr>
         <p:spPr>
           <a:xfrm>
-            <a:off x="822960" y="1280160"/>
-            <a:ext cx="9601200" cy="548640"/>
+            <a:off x="822960" y="1051560"/>
+            <a:ext cx="9601200" cy="457200"/>
           </a:xfrm>
           <a:prstGeom prst="rect">
             <a:avLst/>
@@ -6901,13 +6291,13 @@
               </a:lnSpc>
             </a:pPr>
             <a:r>
-              <a:rPr sz="1500" b="0" i="0">
+              <a:rPr sz="1500" b="0" i="1">
                 <a:solidFill>
                   <a:srgbClr val="DCE8D9"/>
                 </a:solidFill>
                 <a:latin typeface="Calibri"/>
               </a:rPr>
-              <a:t>Every feature below is live, clickable, and running right now.</a:t>
+              <a:t>One file. No backend. No build step.</a:t>
             </a:r>
           </a:p>
         </p:txBody>
@@ -6920,8 +6310,465 @@
         </p:nvSpPr>
         <p:spPr>
           <a:xfrm>
-            <a:off x="822960" y="2011680"/>
-            <a:ext cx="10515600" cy="4206240"/>
+            <a:off x="2880360" y="1691640"/>
+            <a:ext cx="6400800" cy="658368"/>
+          </a:xfrm>
+          <a:prstGeom prst="roundRect">
+            <a:avLst>
+              <a:gd name="adj" fmla="val 10000"/>
+            </a:avLst>
+          </a:prstGeom>
+          <a:solidFill>
+            <a:srgbClr val="3E7A5C"/>
+          </a:solidFill>
+          <a:ln>
+            <a:noFill/>
+          </a:ln>
+          <a:effectLst/>
+        </p:spPr>
+        <p:style>
+          <a:lnRef idx="1">
+            <a:schemeClr val="accent1"/>
+          </a:lnRef>
+          <a:fillRef idx="3">
+            <a:schemeClr val="accent1"/>
+          </a:fillRef>
+          <a:effectRef idx="2">
+            <a:schemeClr val="accent1"/>
+          </a:effectRef>
+          <a:fontRef idx="minor">
+            <a:schemeClr val="lt1"/>
+          </a:fontRef>
+        </p:style>
+        <p:txBody>
+          <a:bodyPr rtlCol="0" anchor="ctr"/>
+          <a:lstStyle/>
+          <a:p>
+            <a:pPr algn="ctr"/>
+          </a:p>
+        </p:txBody>
+      </p:sp>
+      <p:sp>
+        <p:nvSpPr>
+          <p:cNvPr id="5" name="TextBox 4"/>
+          <p:cNvSpPr txBox="1"/>
+          <p:nvPr/>
+        </p:nvSpPr>
+        <p:spPr>
+          <a:xfrm>
+            <a:off x="2880360" y="1691640"/>
+            <a:ext cx="6400800" cy="658368"/>
+          </a:xfrm>
+          <a:prstGeom prst="rect">
+            <a:avLst/>
+          </a:prstGeom>
+          <a:noFill/>
+        </p:spPr>
+        <p:txBody>
+          <a:bodyPr wrap="square" anchor="ctr" lIns="0" rIns="0" tIns="0" bIns="0">
+            <a:spAutoFit/>
+          </a:bodyPr>
+          <a:lstStyle/>
+          <a:p>
+            <a:pPr algn="ctr">
+              <a:lnSpc>
+                <a:spcPct val="115000"/>
+              </a:lnSpc>
+            </a:pPr>
+            <a:r>
+              <a:rPr sz="1500" b="1" i="0">
+                <a:solidFill>
+                  <a:srgbClr val="FFFFFF"/>
+                </a:solidFill>
+                <a:latin typeface="Calibri"/>
+              </a:rPr>
+              <a:t>🌐  health_first.html — loads in any browser</a:t>
+            </a:r>
+          </a:p>
+        </p:txBody>
+      </p:sp>
+      <p:sp>
+        <p:nvSpPr>
+          <p:cNvPr id="6" name="TextBox 5"/>
+          <p:cNvSpPr txBox="1"/>
+          <p:nvPr/>
+        </p:nvSpPr>
+        <p:spPr>
+          <a:xfrm>
+            <a:off x="5623560" y="2377440"/>
+            <a:ext cx="914400" cy="320040"/>
+          </a:xfrm>
+          <a:prstGeom prst="rect">
+            <a:avLst/>
+          </a:prstGeom>
+          <a:noFill/>
+        </p:spPr>
+        <p:txBody>
+          <a:bodyPr wrap="square" anchor="ctr" lIns="0" rIns="0" tIns="0" bIns="0">
+            <a:spAutoFit/>
+          </a:bodyPr>
+          <a:lstStyle/>
+          <a:p>
+            <a:pPr algn="ctr">
+              <a:lnSpc>
+                <a:spcPct val="115000"/>
+              </a:lnSpc>
+            </a:pPr>
+            <a:r>
+              <a:rPr sz="1800" b="1" i="0">
+                <a:solidFill>
+                  <a:srgbClr val="DCE8D9"/>
+                </a:solidFill>
+                <a:latin typeface="Calibri"/>
+              </a:rPr>
+              <a:t>↓</a:t>
+            </a:r>
+          </a:p>
+        </p:txBody>
+      </p:sp>
+      <p:sp>
+        <p:nvSpPr>
+          <p:cNvPr id="7" name="Rounded Rectangle 6"/>
+          <p:cNvSpPr/>
+          <p:nvPr/>
+        </p:nvSpPr>
+        <p:spPr>
+          <a:xfrm>
+            <a:off x="2880360" y="2743200"/>
+            <a:ext cx="3063240" cy="658368"/>
+          </a:xfrm>
+          <a:prstGeom prst="roundRect">
+            <a:avLst>
+              <a:gd name="adj" fmla="val 10000"/>
+            </a:avLst>
+          </a:prstGeom>
+          <a:solidFill>
+            <a:srgbClr val="DCE8D9"/>
+          </a:solidFill>
+          <a:ln>
+            <a:noFill/>
+          </a:ln>
+          <a:effectLst/>
+        </p:spPr>
+        <p:style>
+          <a:lnRef idx="1">
+            <a:schemeClr val="accent1"/>
+          </a:lnRef>
+          <a:fillRef idx="3">
+            <a:schemeClr val="accent1"/>
+          </a:fillRef>
+          <a:effectRef idx="2">
+            <a:schemeClr val="accent1"/>
+          </a:effectRef>
+          <a:fontRef idx="minor">
+            <a:schemeClr val="lt1"/>
+          </a:fontRef>
+        </p:style>
+        <p:txBody>
+          <a:bodyPr rtlCol="0" anchor="ctr"/>
+          <a:lstStyle/>
+          <a:p>
+            <a:pPr algn="ctr"/>
+          </a:p>
+        </p:txBody>
+      </p:sp>
+      <p:sp>
+        <p:nvSpPr>
+          <p:cNvPr id="8" name="TextBox 7"/>
+          <p:cNvSpPr txBox="1"/>
+          <p:nvPr/>
+        </p:nvSpPr>
+        <p:spPr>
+          <a:xfrm>
+            <a:off x="2880360" y="2743200"/>
+            <a:ext cx="3063240" cy="658368"/>
+          </a:xfrm>
+          <a:prstGeom prst="rect">
+            <a:avLst/>
+          </a:prstGeom>
+          <a:noFill/>
+        </p:spPr>
+        <p:txBody>
+          <a:bodyPr wrap="square" anchor="ctr" lIns="0" rIns="0" tIns="0" bIns="0">
+            <a:spAutoFit/>
+          </a:bodyPr>
+          <a:lstStyle/>
+          <a:p>
+            <a:pPr algn="ctr">
+              <a:lnSpc>
+                <a:spcPct val="115000"/>
+              </a:lnSpc>
+            </a:pPr>
+            <a:r>
+              <a:rPr sz="1450" b="1" i="0">
+                <a:solidFill>
+                  <a:srgbClr val="1F3D2B"/>
+                </a:solidFill>
+                <a:latin typeface="Calibri"/>
+              </a:rPr>
+              <a:t>🧒  Kid View</a:t>
+            </a:r>
+          </a:p>
+        </p:txBody>
+      </p:sp>
+      <p:sp>
+        <p:nvSpPr>
+          <p:cNvPr id="9" name="Rounded Rectangle 8"/>
+          <p:cNvSpPr/>
+          <p:nvPr/>
+        </p:nvSpPr>
+        <p:spPr>
+          <a:xfrm>
+            <a:off x="6217920" y="2743200"/>
+            <a:ext cx="3063240" cy="658368"/>
+          </a:xfrm>
+          <a:prstGeom prst="roundRect">
+            <a:avLst>
+              <a:gd name="adj" fmla="val 10000"/>
+            </a:avLst>
+          </a:prstGeom>
+          <a:solidFill>
+            <a:srgbClr val="F7E1D5"/>
+          </a:solidFill>
+          <a:ln>
+            <a:noFill/>
+          </a:ln>
+          <a:effectLst/>
+        </p:spPr>
+        <p:style>
+          <a:lnRef idx="1">
+            <a:schemeClr val="accent1"/>
+          </a:lnRef>
+          <a:fillRef idx="3">
+            <a:schemeClr val="accent1"/>
+          </a:fillRef>
+          <a:effectRef idx="2">
+            <a:schemeClr val="accent1"/>
+          </a:effectRef>
+          <a:fontRef idx="minor">
+            <a:schemeClr val="lt1"/>
+          </a:fontRef>
+        </p:style>
+        <p:txBody>
+          <a:bodyPr rtlCol="0" anchor="ctr"/>
+          <a:lstStyle/>
+          <a:p>
+            <a:pPr algn="ctr"/>
+          </a:p>
+        </p:txBody>
+      </p:sp>
+      <p:sp>
+        <p:nvSpPr>
+          <p:cNvPr id="10" name="TextBox 9"/>
+          <p:cNvSpPr txBox="1"/>
+          <p:nvPr/>
+        </p:nvSpPr>
+        <p:spPr>
+          <a:xfrm>
+            <a:off x="6217920" y="2743200"/>
+            <a:ext cx="3063240" cy="658368"/>
+          </a:xfrm>
+          <a:prstGeom prst="rect">
+            <a:avLst/>
+          </a:prstGeom>
+          <a:noFill/>
+        </p:spPr>
+        <p:txBody>
+          <a:bodyPr wrap="square" anchor="ctr" lIns="0" rIns="0" tIns="0" bIns="0">
+            <a:spAutoFit/>
+          </a:bodyPr>
+          <a:lstStyle/>
+          <a:p>
+            <a:pPr algn="ctr">
+              <a:lnSpc>
+                <a:spcPct val="115000"/>
+              </a:lnSpc>
+            </a:pPr>
+            <a:r>
+              <a:rPr sz="1450" b="1" i="0">
+                <a:solidFill>
+                  <a:srgbClr val="1F3D2B"/>
+                </a:solidFill>
+                <a:latin typeface="Calibri"/>
+              </a:rPr>
+              <a:t>👨  Parent View</a:t>
+            </a:r>
+          </a:p>
+        </p:txBody>
+      </p:sp>
+      <p:sp>
+        <p:nvSpPr>
+          <p:cNvPr id="11" name="TextBox 10"/>
+          <p:cNvSpPr txBox="1"/>
+          <p:nvPr/>
+        </p:nvSpPr>
+        <p:spPr>
+          <a:xfrm>
+            <a:off x="5623560" y="3429000"/>
+            <a:ext cx="914400" cy="320040"/>
+          </a:xfrm>
+          <a:prstGeom prst="rect">
+            <a:avLst/>
+          </a:prstGeom>
+          <a:noFill/>
+        </p:spPr>
+        <p:txBody>
+          <a:bodyPr wrap="square" anchor="ctr" lIns="0" rIns="0" tIns="0" bIns="0">
+            <a:spAutoFit/>
+          </a:bodyPr>
+          <a:lstStyle/>
+          <a:p>
+            <a:pPr algn="ctr">
+              <a:lnSpc>
+                <a:spcPct val="115000"/>
+              </a:lnSpc>
+            </a:pPr>
+            <a:r>
+              <a:rPr sz="1800" b="1" i="0">
+                <a:solidFill>
+                  <a:srgbClr val="DCE8D9"/>
+                </a:solidFill>
+                <a:latin typeface="Calibri"/>
+              </a:rPr>
+              <a:t>↓</a:t>
+            </a:r>
+          </a:p>
+        </p:txBody>
+      </p:sp>
+      <p:sp>
+        <p:nvSpPr>
+          <p:cNvPr id="12" name="Rounded Rectangle 11"/>
+          <p:cNvSpPr/>
+          <p:nvPr/>
+        </p:nvSpPr>
+        <p:spPr>
+          <a:xfrm>
+            <a:off x="2880360" y="3794760"/>
+            <a:ext cx="6400800" cy="658368"/>
+          </a:xfrm>
+          <a:prstGeom prst="roundRect">
+            <a:avLst>
+              <a:gd name="adj" fmla="val 10000"/>
+            </a:avLst>
+          </a:prstGeom>
+          <a:solidFill>
+            <a:srgbClr val="DB9D3B"/>
+          </a:solidFill>
+          <a:ln>
+            <a:noFill/>
+          </a:ln>
+          <a:effectLst/>
+        </p:spPr>
+        <p:style>
+          <a:lnRef idx="1">
+            <a:schemeClr val="accent1"/>
+          </a:lnRef>
+          <a:fillRef idx="3">
+            <a:schemeClr val="accent1"/>
+          </a:fillRef>
+          <a:effectRef idx="2">
+            <a:schemeClr val="accent1"/>
+          </a:effectRef>
+          <a:fontRef idx="minor">
+            <a:schemeClr val="lt1"/>
+          </a:fontRef>
+        </p:style>
+        <p:txBody>
+          <a:bodyPr rtlCol="0" anchor="ctr"/>
+          <a:lstStyle/>
+          <a:p>
+            <a:pPr algn="ctr"/>
+          </a:p>
+        </p:txBody>
+      </p:sp>
+      <p:sp>
+        <p:nvSpPr>
+          <p:cNvPr id="13" name="TextBox 12"/>
+          <p:cNvSpPr txBox="1"/>
+          <p:nvPr/>
+        </p:nvSpPr>
+        <p:spPr>
+          <a:xfrm>
+            <a:off x="2880360" y="3794760"/>
+            <a:ext cx="6400800" cy="658368"/>
+          </a:xfrm>
+          <a:prstGeom prst="rect">
+            <a:avLst/>
+          </a:prstGeom>
+          <a:noFill/>
+        </p:spPr>
+        <p:txBody>
+          <a:bodyPr wrap="square" anchor="ctr" lIns="0" rIns="0" tIns="0" bIns="0">
+            <a:spAutoFit/>
+          </a:bodyPr>
+          <a:lstStyle/>
+          <a:p>
+            <a:pPr algn="ctr">
+              <a:lnSpc>
+                <a:spcPct val="115000"/>
+              </a:lnSpc>
+            </a:pPr>
+            <a:r>
+              <a:rPr sz="1500" b="1" i="0">
+                <a:solidFill>
+                  <a:srgbClr val="1F3D2B"/>
+                </a:solidFill>
+                <a:latin typeface="Calibri"/>
+              </a:rPr>
+              <a:t>⚙️  Central App State — goals, streak, minute balance, history</a:t>
+            </a:r>
+          </a:p>
+        </p:txBody>
+      </p:sp>
+      <p:sp>
+        <p:nvSpPr>
+          <p:cNvPr id="14" name="TextBox 13"/>
+          <p:cNvSpPr txBox="1"/>
+          <p:nvPr/>
+        </p:nvSpPr>
+        <p:spPr>
+          <a:xfrm>
+            <a:off x="5623560" y="4480560"/>
+            <a:ext cx="914400" cy="320040"/>
+          </a:xfrm>
+          <a:prstGeom prst="rect">
+            <a:avLst/>
+          </a:prstGeom>
+          <a:noFill/>
+        </p:spPr>
+        <p:txBody>
+          <a:bodyPr wrap="square" anchor="ctr" lIns="0" rIns="0" tIns="0" bIns="0">
+            <a:spAutoFit/>
+          </a:bodyPr>
+          <a:lstStyle/>
+          <a:p>
+            <a:pPr algn="ctr">
+              <a:lnSpc>
+                <a:spcPct val="115000"/>
+              </a:lnSpc>
+            </a:pPr>
+            <a:r>
+              <a:rPr sz="1800" b="1" i="0">
+                <a:solidFill>
+                  <a:srgbClr val="DCE8D9"/>
+                </a:solidFill>
+                <a:latin typeface="Calibri"/>
+              </a:rPr>
+              <a:t>↓</a:t>
+            </a:r>
+          </a:p>
+        </p:txBody>
+      </p:sp>
+      <p:sp>
+        <p:nvSpPr>
+          <p:cNvPr id="15" name="Rounded Rectangle 14"/>
+          <p:cNvSpPr/>
+          <p:nvPr/>
+        </p:nvSpPr>
+        <p:spPr>
+          <a:xfrm>
+            <a:off x="2880360" y="4846320"/>
+            <a:ext cx="6400800" cy="658368"/>
           </a:xfrm>
           <a:prstGeom prst="roundRect">
             <a:avLst>
@@ -6960,14 +6807,14 @@
       </p:sp>
       <p:sp>
         <p:nvSpPr>
-          <p:cNvPr id="5" name="TextBox 4"/>
+          <p:cNvPr id="16" name="TextBox 15"/>
           <p:cNvSpPr txBox="1"/>
           <p:nvPr/>
         </p:nvSpPr>
         <p:spPr>
           <a:xfrm>
-            <a:off x="1280160" y="2377440"/>
-            <a:ext cx="9601200" cy="3657600"/>
+            <a:off x="2880360" y="4846320"/>
+            <a:ext cx="6400800" cy="658368"/>
           </a:xfrm>
           <a:prstGeom prst="rect">
             <a:avLst/>
@@ -6975,128 +6822,63 @@
           <a:noFill/>
         </p:spPr>
         <p:txBody>
-          <a:bodyPr wrap="square" lIns="0" rIns="0" tIns="0" bIns="0">
+          <a:bodyPr wrap="square" anchor="ctr" lIns="0" rIns="0" tIns="0" bIns="0">
             <a:spAutoFit/>
           </a:bodyPr>
           <a:lstStyle/>
           <a:p>
-            <a:pPr indent="-201168" marL="201168">
+            <a:pPr algn="ctr">
               <a:lnSpc>
                 <a:spcPct val="115000"/>
               </a:lnSpc>
-              <a:spcAft>
-                <a:spcPts val="2200"/>
-              </a:spcAft>
-              <a:buClr>
-                <a:srgbClr val="3E7A5C"/>
-              </a:buClr>
-              <a:buFont typeface="Arial"/>
-              <a:buChar char="✓"/>
             </a:pPr>
             <a:r>
-              <a:rPr sz="1700">
+              <a:rPr sz="1450" b="1" i="0">
                 <a:solidFill>
                   <a:srgbClr val="FFFFFF"/>
                 </a:solidFill>
                 <a:latin typeface="Calibri"/>
               </a:rPr>
-              <a:t>Real photo upload and parent-PIN verification — not placeholder buttons</a:t>
-            </a:r>
-          </a:p>
-          <a:p>
-            <a:pPr indent="-201168" marL="201168">
+              <a:t>💾  Browser localStorage — persists per day, auto-resets at midnight</a:t>
+            </a:r>
+          </a:p>
+        </p:txBody>
+      </p:sp>
+      <p:sp>
+        <p:nvSpPr>
+          <p:cNvPr id="17" name="TextBox 16"/>
+          <p:cNvSpPr txBox="1"/>
+          <p:nvPr/>
+        </p:nvSpPr>
+        <p:spPr>
+          <a:xfrm>
+            <a:off x="2880360" y="5669280"/>
+            <a:ext cx="6400800" cy="822960"/>
+          </a:xfrm>
+          <a:prstGeom prst="rect">
+            <a:avLst/>
+          </a:prstGeom>
+          <a:noFill/>
+        </p:spPr>
+        <p:txBody>
+          <a:bodyPr wrap="square" anchor="t" lIns="0" rIns="0" tIns="0" bIns="0">
+            <a:spAutoFit/>
+          </a:bodyPr>
+          <a:lstStyle/>
+          <a:p>
+            <a:pPr algn="ctr">
               <a:lnSpc>
-                <a:spcPct val="115000"/>
+                <a:spcPct val="125000"/>
               </a:lnSpc>
-              <a:spcAft>
-                <a:spcPts val="2200"/>
-              </a:spcAft>
-              <a:buClr>
-                <a:srgbClr val="3E7A5C"/>
-              </a:buClr>
-              <a:buFont typeface="Arial"/>
-              <a:buChar char="✓"/>
             </a:pPr>
             <a:r>
-              <a:rPr sz="1700">
-                <a:solidFill>
-                  <a:srgbClr val="FFFFFF"/>
+              <a:rPr sz="1250" b="0" i="1">
+                <a:solidFill>
+                  <a:srgbClr val="DCE8D9"/>
                 </a:solidFill>
                 <a:latin typeface="Calibri"/>
               </a:rPr>
-              <a:t>A real countdown timer that spends banked minutes and warns before time runs out</a:t>
-            </a:r>
-          </a:p>
-          <a:p>
-            <a:pPr indent="-201168" marL="201168">
-              <a:lnSpc>
-                <a:spcPct val="115000"/>
-              </a:lnSpc>
-              <a:spcAft>
-                <a:spcPts val="2200"/>
-              </a:spcAft>
-              <a:buClr>
-                <a:srgbClr val="3E7A5C"/>
-              </a:buClr>
-              <a:buFont typeface="Arial"/>
-              <a:buChar char="✓"/>
-            </a:pPr>
-            <a:r>
-              <a:rPr sz="1700">
-                <a:solidFill>
-                  <a:srgbClr val="FFFFFF"/>
-                </a:solidFill>
-                <a:latin typeface="Calibri"/>
-              </a:rPr>
-              <a:t>Real state that persists day to day in the browser, with automatic daily reset</a:t>
-            </a:r>
-          </a:p>
-          <a:p>
-            <a:pPr indent="-201168" marL="201168">
-              <a:lnSpc>
-                <a:spcPct val="115000"/>
-              </a:lnSpc>
-              <a:spcAft>
-                <a:spcPts val="2200"/>
-              </a:spcAft>
-              <a:buClr>
-                <a:srgbClr val="3E7A5C"/>
-              </a:buClr>
-              <a:buFont typeface="Arial"/>
-              <a:buChar char="✓"/>
-            </a:pPr>
-            <a:r>
-              <a:rPr sz="1700">
-                <a:solidFill>
-                  <a:srgbClr val="FFFFFF"/>
-                </a:solidFill>
-                <a:latin typeface="Calibri"/>
-              </a:rPr>
-              <a:t>A real parent dashboard — add or remove goals, set reward minutes, approve or reject proof</a:t>
-            </a:r>
-          </a:p>
-          <a:p>
-            <a:pPr indent="-201168" marL="201168">
-              <a:lnSpc>
-                <a:spcPct val="115000"/>
-              </a:lnSpc>
-              <a:spcAft>
-                <a:spcPts val="2200"/>
-              </a:spcAft>
-              <a:buClr>
-                <a:srgbClr val="3E7A5C"/>
-              </a:buClr>
-              <a:buFont typeface="Arial"/>
-              <a:buChar char="✓"/>
-            </a:pPr>
-            <a:r>
-              <a:rPr sz="1700">
-                <a:solidFill>
-                  <a:srgbClr val="FFFFFF"/>
-                </a:solidFill>
-                <a:latin typeface="Calibri"/>
-              </a:rPr>
-              <a:t>Five weeks of real iteration — including a genuine bug fix (the sleep-timing rework)</a:t>
+              <a:t>Every tap mutates the state object, then redraws the current view — the same reactive loop that made 5 weeks of rapid iteration possible.</a:t>
             </a:r>
           </a:p>
         </p:txBody>
@@ -7136,7 +6918,7 @@
         <p:spPr>
           <a:xfrm>
             <a:off x="822960" y="502920"/>
-            <a:ext cx="9144000" cy="548640"/>
+            <a:ext cx="10332720" cy="914400"/>
           </a:xfrm>
           <a:prstGeom prst="rect">
             <a:avLst/>
@@ -7161,7 +6943,7 @@
                 </a:solidFill>
                 <a:latin typeface="Cambria"/>
               </a:rPr>
-              <a:t>Designed for Both Sides of the Family</a:t>
+              <a:t>Built for One Family. Designed for Every Family.</a:t>
             </a:r>
           </a:p>
         </p:txBody>
@@ -7174,8 +6956,8 @@
         </p:nvSpPr>
         <p:spPr>
           <a:xfrm>
-            <a:off x="822960" y="1371600"/>
-            <a:ext cx="5120640" cy="4754880"/>
+            <a:off x="822960" y="1828800"/>
+            <a:ext cx="5074920" cy="2103120"/>
           </a:xfrm>
           <a:prstGeom prst="roundRect">
             <a:avLst>
@@ -7214,14 +6996,66 @@
       </p:sp>
       <p:sp>
         <p:nvSpPr>
-          <p:cNvPr id="4" name="TextBox 3"/>
+          <p:cNvPr id="4" name="Oval 3"/>
+          <p:cNvSpPr/>
+          <p:nvPr/>
+        </p:nvSpPr>
+        <p:spPr>
+          <a:xfrm>
+            <a:off x="1188720" y="2103120"/>
+            <a:ext cx="822960" cy="822960"/>
+          </a:xfrm>
+          <a:prstGeom prst="ellipse">
+            <a:avLst/>
+          </a:prstGeom>
+          <a:solidFill>
+            <a:srgbClr val="FFFFFF"/>
+          </a:solidFill>
+          <a:ln>
+            <a:noFill/>
+          </a:ln>
+          <a:effectLst/>
+        </p:spPr>
+        <p:style>
+          <a:lnRef idx="1">
+            <a:schemeClr val="accent1"/>
+          </a:lnRef>
+          <a:fillRef idx="3">
+            <a:schemeClr val="accent1"/>
+          </a:fillRef>
+          <a:effectRef idx="2">
+            <a:schemeClr val="accent1"/>
+          </a:effectRef>
+          <a:fontRef idx="minor">
+            <a:schemeClr val="lt1"/>
+          </a:fontRef>
+        </p:style>
+        <p:txBody>
+          <a:bodyPr rtlCol="0" anchor="ctr" lIns="0" rIns="0" tIns="0" bIns="0" wrap="none"/>
+          <a:lstStyle/>
+          <a:p>
+            <a:pPr algn="ctr"/>
+            <a:r>
+              <a:rPr sz="2500">
+                <a:solidFill>
+                  <a:srgbClr val="3E7A5C"/>
+                </a:solidFill>
+              </a:rPr>
+              <a:t>🌍</a:t>
+            </a:r>
+          </a:p>
+        </p:txBody>
+      </p:sp>
+      <p:sp>
+        <p:nvSpPr>
+          <p:cNvPr id="5" name="TextBox 4"/>
           <p:cNvSpPr txBox="1"/>
           <p:nvPr/>
         </p:nvSpPr>
         <p:spPr>
           <a:xfrm>
-            <a:off x="1188720" y="1645920"/>
-            <a:ext cx="4480560" cy="457200"/>
+            <a:off x="2194560" y="2121408"/>
+            <a:ext cx="3566160" cy="457200"/>
           </a:xfrm>
           <a:prstGeom prst="rect">
             <a:avLst/>
@@ -7240,182 +7074,66 @@
               </a:lnSpc>
             </a:pPr>
             <a:r>
-              <a:rPr sz="1300" b="1" i="0">
-                <a:solidFill>
-                  <a:srgbClr val="3E7A5C"/>
+              <a:rPr sz="1550" b="1" i="0">
+                <a:solidFill>
+                  <a:srgbClr val="1F2D22"/>
+                </a:solidFill>
+                <a:latin typeface="Cambria"/>
+              </a:rPr>
+              <a:t>Universal habits</a:t>
+            </a:r>
+          </a:p>
+        </p:txBody>
+      </p:sp>
+      <p:sp>
+        <p:nvSpPr>
+          <p:cNvPr id="6" name="TextBox 5"/>
+          <p:cNvSpPr txBox="1"/>
+          <p:nvPr/>
+        </p:nvSpPr>
+        <p:spPr>
+          <a:xfrm>
+            <a:off x="2194560" y="2606040"/>
+            <a:ext cx="3566160" cy="1234440"/>
+          </a:xfrm>
+          <a:prstGeom prst="rect">
+            <a:avLst/>
+          </a:prstGeom>
+          <a:noFill/>
+        </p:spPr>
+        <p:txBody>
+          <a:bodyPr wrap="square" anchor="t" lIns="0" rIns="0" tIns="0" bIns="0">
+            <a:spAutoFit/>
+          </a:bodyPr>
+          <a:lstStyle/>
+          <a:p>
+            <a:pPr algn="l">
+              <a:lnSpc>
+                <a:spcPct val="120000"/>
+              </a:lnSpc>
+            </a:pPr>
+            <a:r>
+              <a:rPr sz="1150" b="0" i="0">
+                <a:solidFill>
+                  <a:srgbClr val="5B6A5F"/>
                 </a:solidFill>
                 <a:latin typeface="Calibri"/>
               </a:rPr>
-              <a:t>FOR THE KID</a:t>
-            </a:r>
-          </a:p>
-        </p:txBody>
-      </p:sp>
-      <p:sp>
-        <p:nvSpPr>
-          <p:cNvPr id="5" name="TextBox 4"/>
-          <p:cNvSpPr txBox="1"/>
-          <p:nvPr/>
-        </p:nvSpPr>
-        <p:spPr>
-          <a:xfrm>
-            <a:off x="1188720" y="2148840"/>
-            <a:ext cx="4480560" cy="3749039"/>
-          </a:xfrm>
-          <a:prstGeom prst="rect">
-            <a:avLst/>
-          </a:prstGeom>
-          <a:noFill/>
-        </p:spPr>
-        <p:txBody>
-          <a:bodyPr wrap="square" lIns="0" rIns="0" tIns="0" bIns="0">
-            <a:spAutoFit/>
-          </a:bodyPr>
-          <a:lstStyle/>
-          <a:p>
-            <a:pPr indent="-201168" marL="201168">
-              <a:lnSpc>
-                <a:spcPct val="115000"/>
-              </a:lnSpc>
-              <a:spcAft>
-                <a:spcPts val="1400"/>
-              </a:spcAft>
-              <a:buClr>
-                <a:srgbClr val="3E7A5C"/>
-              </a:buClr>
-              <a:buFont typeface="Arial"/>
-              <a:buChar char="•"/>
-            </a:pPr>
-            <a:r>
-              <a:rPr b="1" sz="1400">
-                <a:solidFill>
-                  <a:srgbClr val="3E7A5C"/>
-                </a:solidFill>
-                <a:latin typeface="Calibri"/>
-              </a:rPr>
-              <a:t>Instant credit — </a:t>
-            </a:r>
-            <a:r>
-              <a:rPr sz="1400">
-                <a:solidFill>
-                  <a:srgbClr val="1F2D22"/>
-                </a:solidFill>
-                <a:latin typeface="Calibri"/>
-              </a:rPr>
-              <a:t>every goal banks minutes the moment it's done, not at the end of the day.</a:t>
-            </a:r>
-          </a:p>
-          <a:p>
-            <a:pPr indent="-201168" marL="201168">
-              <a:lnSpc>
-                <a:spcPct val="115000"/>
-              </a:lnSpc>
-              <a:spcAft>
-                <a:spcPts val="1400"/>
-              </a:spcAft>
-              <a:buClr>
-                <a:srgbClr val="3E7A5C"/>
-              </a:buClr>
-              <a:buFont typeface="Arial"/>
-              <a:buChar char="•"/>
-            </a:pPr>
-            <a:r>
-              <a:rPr b="1" sz="1400">
-                <a:solidFill>
-                  <a:srgbClr val="3E7A5C"/>
-                </a:solidFill>
-                <a:latin typeface="Calibri"/>
-              </a:rPr>
-              <a:t>A real countdown — </a:t>
-            </a:r>
-            <a:r>
-              <a:rPr sz="1400">
-                <a:solidFill>
-                  <a:srgbClr val="1F2D22"/>
-                </a:solidFill>
-                <a:latin typeface="Calibri"/>
-              </a:rPr>
-              <a:t>spend banked time with a live timer and a fair low-time warning.</a:t>
-            </a:r>
-          </a:p>
-          <a:p>
-            <a:pPr indent="-201168" marL="201168">
-              <a:lnSpc>
-                <a:spcPct val="115000"/>
-              </a:lnSpc>
-              <a:spcAft>
-                <a:spcPts val="1400"/>
-              </a:spcAft>
-              <a:buClr>
-                <a:srgbClr val="3E7A5C"/>
-              </a:buClr>
-              <a:buFont typeface="Arial"/>
-              <a:buChar char="•"/>
-            </a:pPr>
-            <a:r>
-              <a:rPr b="1" sz="1400">
-                <a:solidFill>
-                  <a:srgbClr val="3E7A5C"/>
-                </a:solidFill>
-                <a:latin typeface="Calibri"/>
-              </a:rPr>
-              <a:t>A big finish — </a:t>
-            </a:r>
-            <a:r>
-              <a:rPr sz="1400">
-                <a:solidFill>
-                  <a:srgbClr val="1F2D22"/>
-                </a:solidFill>
-                <a:latin typeface="Calibri"/>
-              </a:rPr>
-              <a:t>finish everything and the day becomes Unlimited.</a:t>
-            </a:r>
-          </a:p>
-          <a:p>
-            <a:pPr indent="-201168" marL="201168">
-              <a:lnSpc>
-                <a:spcPct val="115000"/>
-              </a:lnSpc>
-              <a:spcAft>
-                <a:spcPts val="1400"/>
-              </a:spcAft>
-              <a:buClr>
-                <a:srgbClr val="3E7A5C"/>
-              </a:buClr>
-              <a:buFont typeface="Arial"/>
-              <a:buChar char="•"/>
-            </a:pPr>
-            <a:r>
-              <a:rPr b="1" sz="1400">
-                <a:solidFill>
-                  <a:srgbClr val="3E7A5C"/>
-                </a:solidFill>
-                <a:latin typeface="Calibri"/>
-              </a:rPr>
-              <a:t>Streaks &amp; badges — </a:t>
-            </a:r>
-            <a:r>
-              <a:rPr sz="1400">
-                <a:solidFill>
-                  <a:srgbClr val="1F2D22"/>
-                </a:solidFill>
-                <a:latin typeface="Calibri"/>
-              </a:rPr>
-              <a:t>a 7-day history and milestone celebrations keep it fun, not naggy.</a:t>
-            </a:r>
-          </a:p>
-        </p:txBody>
-      </p:sp>
-      <p:sp>
-        <p:nvSpPr>
-          <p:cNvPr id="6" name="Rounded Rectangle 5"/>
+              <a:t>Water, sleep, movement, and nutrition are the same challenge in every home, every culture, every income level — this isn't a niche problem.</a:t>
+            </a:r>
+          </a:p>
+        </p:txBody>
+      </p:sp>
+      <p:sp>
+        <p:nvSpPr>
+          <p:cNvPr id="7" name="Rounded Rectangle 6"/>
           <p:cNvSpPr/>
           <p:nvPr/>
         </p:nvSpPr>
         <p:spPr>
           <a:xfrm>
-            <a:off x="6263640" y="1371600"/>
-            <a:ext cx="5120640" cy="4754880"/>
+            <a:off x="6355080" y="1828800"/>
+            <a:ext cx="5074920" cy="2103120"/>
           </a:xfrm>
           <a:prstGeom prst="roundRect">
             <a:avLst>
@@ -7454,14 +7172,66 @@
       </p:sp>
       <p:sp>
         <p:nvSpPr>
-          <p:cNvPr id="7" name="TextBox 6"/>
+          <p:cNvPr id="8" name="Oval 7"/>
+          <p:cNvSpPr/>
+          <p:nvPr/>
+        </p:nvSpPr>
+        <p:spPr>
+          <a:xfrm>
+            <a:off x="6720840" y="2103120"/>
+            <a:ext cx="822960" cy="822960"/>
+          </a:xfrm>
+          <a:prstGeom prst="ellipse">
+            <a:avLst/>
+          </a:prstGeom>
+          <a:solidFill>
+            <a:srgbClr val="FFFFFF"/>
+          </a:solidFill>
+          <a:ln>
+            <a:noFill/>
+          </a:ln>
+          <a:effectLst/>
+        </p:spPr>
+        <p:style>
+          <a:lnRef idx="1">
+            <a:schemeClr val="accent1"/>
+          </a:lnRef>
+          <a:fillRef idx="3">
+            <a:schemeClr val="accent1"/>
+          </a:fillRef>
+          <a:effectRef idx="2">
+            <a:schemeClr val="accent1"/>
+          </a:effectRef>
+          <a:fontRef idx="minor">
+            <a:schemeClr val="lt1"/>
+          </a:fontRef>
+        </p:style>
+        <p:txBody>
+          <a:bodyPr rtlCol="0" anchor="ctr" lIns="0" rIns="0" tIns="0" bIns="0" wrap="none"/>
+          <a:lstStyle/>
+          <a:p>
+            <a:pPr algn="ctr"/>
+            <a:r>
+              <a:rPr sz="2500">
+                <a:solidFill>
+                  <a:srgbClr val="DD6B42"/>
+                </a:solidFill>
+              </a:rPr>
+              <a:t>🧩</a:t>
+            </a:r>
+          </a:p>
+        </p:txBody>
+      </p:sp>
+      <p:sp>
+        <p:nvSpPr>
+          <p:cNvPr id="9" name="TextBox 8"/>
           <p:cNvSpPr txBox="1"/>
           <p:nvPr/>
         </p:nvSpPr>
         <p:spPr>
           <a:xfrm>
-            <a:off x="6629400" y="1645920"/>
-            <a:ext cx="4480560" cy="457200"/>
+            <a:off x="7726679" y="2121408"/>
+            <a:ext cx="3566160" cy="457200"/>
           </a:xfrm>
           <a:prstGeom prst="rect">
             <a:avLst/>
@@ -7480,27 +7250,164 @@
               </a:lnSpc>
             </a:pPr>
             <a:r>
-              <a:rPr sz="1300" b="1" i="0">
-                <a:solidFill>
-                  <a:srgbClr val="DD6B42"/>
+              <a:rPr sz="1550" b="1" i="0">
+                <a:solidFill>
+                  <a:srgbClr val="1F2D22"/>
+                </a:solidFill>
+                <a:latin typeface="Cambria"/>
+              </a:rPr>
+              <a:t>Any habit, not just health</a:t>
+            </a:r>
+          </a:p>
+        </p:txBody>
+      </p:sp>
+      <p:sp>
+        <p:nvSpPr>
+          <p:cNvPr id="10" name="TextBox 9"/>
+          <p:cNvSpPr txBox="1"/>
+          <p:nvPr/>
+        </p:nvSpPr>
+        <p:spPr>
+          <a:xfrm>
+            <a:off x="7726679" y="2606040"/>
+            <a:ext cx="3566160" cy="1234440"/>
+          </a:xfrm>
+          <a:prstGeom prst="rect">
+            <a:avLst/>
+          </a:prstGeom>
+          <a:noFill/>
+        </p:spPr>
+        <p:txBody>
+          <a:bodyPr wrap="square" anchor="t" lIns="0" rIns="0" tIns="0" bIns="0">
+            <a:spAutoFit/>
+          </a:bodyPr>
+          <a:lstStyle/>
+          <a:p>
+            <a:pPr algn="l">
+              <a:lnSpc>
+                <a:spcPct val="120000"/>
+              </a:lnSpc>
+            </a:pPr>
+            <a:r>
+              <a:rPr sz="1150" b="0" i="0">
+                <a:solidFill>
+                  <a:srgbClr val="5B6A5F"/>
                 </a:solidFill>
                 <a:latin typeface="Calibri"/>
               </a:rPr>
-              <a:t>FOR THE PARENT</a:t>
-            </a:r>
-          </a:p>
-        </p:txBody>
-      </p:sp>
-      <p:sp>
-        <p:nvSpPr>
-          <p:cNvPr id="8" name="TextBox 7"/>
+              <a:t>Parents can already add custom goals — reading, chores, homework — the checklist → proof → reward engine generalizes far beyond the 4 defaults.</a:t>
+            </a:r>
+          </a:p>
+        </p:txBody>
+      </p:sp>
+      <p:sp>
+        <p:nvSpPr>
+          <p:cNvPr id="11" name="Rounded Rectangle 10"/>
+          <p:cNvSpPr/>
+          <p:nvPr/>
+        </p:nvSpPr>
+        <p:spPr>
+          <a:xfrm>
+            <a:off x="822960" y="4160520"/>
+            <a:ext cx="5074920" cy="2103120"/>
+          </a:xfrm>
+          <a:prstGeom prst="roundRect">
+            <a:avLst>
+              <a:gd name="adj" fmla="val 10000"/>
+            </a:avLst>
+          </a:prstGeom>
+          <a:solidFill>
+            <a:srgbClr val="F5E7C9"/>
+          </a:solidFill>
+          <a:ln>
+            <a:noFill/>
+          </a:ln>
+          <a:effectLst/>
+        </p:spPr>
+        <p:style>
+          <a:lnRef idx="1">
+            <a:schemeClr val="accent1"/>
+          </a:lnRef>
+          <a:fillRef idx="3">
+            <a:schemeClr val="accent1"/>
+          </a:fillRef>
+          <a:effectRef idx="2">
+            <a:schemeClr val="accent1"/>
+          </a:effectRef>
+          <a:fontRef idx="minor">
+            <a:schemeClr val="lt1"/>
+          </a:fontRef>
+        </p:style>
+        <p:txBody>
+          <a:bodyPr rtlCol="0" anchor="ctr"/>
+          <a:lstStyle/>
+          <a:p>
+            <a:pPr algn="ctr"/>
+          </a:p>
+        </p:txBody>
+      </p:sp>
+      <p:sp>
+        <p:nvSpPr>
+          <p:cNvPr id="12" name="Oval 11"/>
+          <p:cNvSpPr/>
+          <p:nvPr/>
+        </p:nvSpPr>
+        <p:spPr>
+          <a:xfrm>
+            <a:off x="1188720" y="4434840"/>
+            <a:ext cx="822960" cy="822960"/>
+          </a:xfrm>
+          <a:prstGeom prst="ellipse">
+            <a:avLst/>
+          </a:prstGeom>
+          <a:solidFill>
+            <a:srgbClr val="FFFFFF"/>
+          </a:solidFill>
+          <a:ln>
+            <a:noFill/>
+          </a:ln>
+          <a:effectLst/>
+        </p:spPr>
+        <p:style>
+          <a:lnRef idx="1">
+            <a:schemeClr val="accent1"/>
+          </a:lnRef>
+          <a:fillRef idx="3">
+            <a:schemeClr val="accent1"/>
+          </a:fillRef>
+          <a:effectRef idx="2">
+            <a:schemeClr val="accent1"/>
+          </a:effectRef>
+          <a:fontRef idx="minor">
+            <a:schemeClr val="lt1"/>
+          </a:fontRef>
+        </p:style>
+        <p:txBody>
+          <a:bodyPr rtlCol="0" anchor="ctr" lIns="0" rIns="0" tIns="0" bIns="0" wrap="none"/>
+          <a:lstStyle/>
+          <a:p>
+            <a:pPr algn="ctr"/>
+            <a:r>
+              <a:rPr sz="2500">
+                <a:solidFill>
+                  <a:srgbClr val="DB9D3B"/>
+                </a:solidFill>
+              </a:rPr>
+              <a:t>📱</a:t>
+            </a:r>
+          </a:p>
+        </p:txBody>
+      </p:sp>
+      <p:sp>
+        <p:nvSpPr>
+          <p:cNvPr id="13" name="TextBox 12"/>
           <p:cNvSpPr txBox="1"/>
           <p:nvPr/>
         </p:nvSpPr>
         <p:spPr>
           <a:xfrm>
-            <a:off x="6629400" y="2148840"/>
-            <a:ext cx="4480560" cy="3749039"/>
+            <a:off x="2194560" y="4453128"/>
+            <a:ext cx="3566160" cy="457200"/>
           </a:xfrm>
           <a:prstGeom prst="rect">
             <a:avLst/>
@@ -7508,140 +7415,239 @@
           <a:noFill/>
         </p:spPr>
         <p:txBody>
-          <a:bodyPr wrap="square" lIns="0" rIns="0" tIns="0" bIns="0">
+          <a:bodyPr wrap="square" anchor="t" lIns="0" rIns="0" tIns="0" bIns="0">
             <a:spAutoFit/>
           </a:bodyPr>
           <a:lstStyle/>
           <a:p>
-            <a:pPr indent="-201168" marL="201168">
+            <a:pPr algn="l">
               <a:lnSpc>
                 <a:spcPct val="115000"/>
               </a:lnSpc>
-              <a:spcAft>
-                <a:spcPts val="1400"/>
-              </a:spcAft>
-              <a:buClr>
-                <a:srgbClr val="3E7A5C"/>
-              </a:buClr>
-              <a:buFont typeface="Arial"/>
-              <a:buChar char="•"/>
             </a:pPr>
             <a:r>
-              <a:rPr b="1" sz="1400">
-                <a:solidFill>
-                  <a:srgbClr val="3E7A5C"/>
+              <a:rPr sz="1550" b="1" i="0">
+                <a:solidFill>
+                  <a:srgbClr val="1F2D22"/>
+                </a:solidFill>
+                <a:latin typeface="Cambria"/>
+              </a:rPr>
+              <a:t>Rides a real trend</a:t>
+            </a:r>
+          </a:p>
+        </p:txBody>
+      </p:sp>
+      <p:sp>
+        <p:nvSpPr>
+          <p:cNvPr id="14" name="TextBox 13"/>
+          <p:cNvSpPr txBox="1"/>
+          <p:nvPr/>
+        </p:nvSpPr>
+        <p:spPr>
+          <a:xfrm>
+            <a:off x="2194560" y="4937759"/>
+            <a:ext cx="3566160" cy="1234440"/>
+          </a:xfrm>
+          <a:prstGeom prst="rect">
+            <a:avLst/>
+          </a:prstGeom>
+          <a:noFill/>
+        </p:spPr>
+        <p:txBody>
+          <a:bodyPr wrap="square" anchor="t" lIns="0" rIns="0" tIns="0" bIns="0">
+            <a:spAutoFit/>
+          </a:bodyPr>
+          <a:lstStyle/>
+          <a:p>
+            <a:pPr algn="l">
+              <a:lnSpc>
+                <a:spcPct val="120000"/>
+              </a:lnSpc>
+            </a:pPr>
+            <a:r>
+              <a:rPr sz="1150" b="0" i="0">
+                <a:solidFill>
+                  <a:srgbClr val="5B6A5F"/>
                 </a:solidFill>
                 <a:latin typeface="Calibri"/>
               </a:rPr>
-              <a:t>Review, don't guess — </a:t>
-            </a:r>
-            <a:r>
-              <a:rPr sz="1400">
-                <a:solidFill>
-                  <a:srgbClr val="1F2D22"/>
-                </a:solidFill>
-                <a:latin typeface="Calibri"/>
+              <a:t>Global concern over kids' screen time is only growing — Health First turns that fight into a shared incentive instead of a source of family conflict.</a:t>
+            </a:r>
+          </a:p>
+        </p:txBody>
+      </p:sp>
+      <p:sp>
+        <p:nvSpPr>
+          <p:cNvPr id="15" name="Rounded Rectangle 14"/>
+          <p:cNvSpPr/>
+          <p:nvPr/>
+        </p:nvSpPr>
+        <p:spPr>
+          <a:xfrm>
+            <a:off x="6355080" y="4160520"/>
+            <a:ext cx="5074920" cy="2103120"/>
+          </a:xfrm>
+          <a:prstGeom prst="roundRect">
+            <a:avLst>
+              <a:gd name="adj" fmla="val 10000"/>
+            </a:avLst>
+          </a:prstGeom>
+          <a:solidFill>
+            <a:srgbClr val="E2E2F5"/>
+          </a:solidFill>
+          <a:ln>
+            <a:noFill/>
+          </a:ln>
+          <a:effectLst/>
+        </p:spPr>
+        <p:style>
+          <a:lnRef idx="1">
+            <a:schemeClr val="accent1"/>
+          </a:lnRef>
+          <a:fillRef idx="3">
+            <a:schemeClr val="accent1"/>
+          </a:fillRef>
+          <a:effectRef idx="2">
+            <a:schemeClr val="accent1"/>
+          </a:effectRef>
+          <a:fontRef idx="minor">
+            <a:schemeClr val="lt1"/>
+          </a:fontRef>
+        </p:style>
+        <p:txBody>
+          <a:bodyPr rtlCol="0" anchor="ctr"/>
+          <a:lstStyle/>
+          <a:p>
+            <a:pPr algn="ctr"/>
+          </a:p>
+        </p:txBody>
+      </p:sp>
+      <p:sp>
+        <p:nvSpPr>
+          <p:cNvPr id="16" name="Oval 15"/>
+          <p:cNvSpPr/>
+          <p:nvPr/>
+        </p:nvSpPr>
+        <p:spPr>
+          <a:xfrm>
+            <a:off x="6720840" y="4434840"/>
+            <a:ext cx="822960" cy="822960"/>
+          </a:xfrm>
+          <a:prstGeom prst="ellipse">
+            <a:avLst/>
+          </a:prstGeom>
+          <a:solidFill>
+            <a:srgbClr val="FFFFFF"/>
+          </a:solidFill>
+          <a:ln>
+            <a:noFill/>
+          </a:ln>
+          <a:effectLst/>
+        </p:spPr>
+        <p:style>
+          <a:lnRef idx="1">
+            <a:schemeClr val="accent1"/>
+          </a:lnRef>
+          <a:fillRef idx="3">
+            <a:schemeClr val="accent1"/>
+          </a:fillRef>
+          <a:effectRef idx="2">
+            <a:schemeClr val="accent1"/>
+          </a:effectRef>
+          <a:fontRef idx="minor">
+            <a:schemeClr val="lt1"/>
+          </a:fontRef>
+        </p:style>
+        <p:txBody>
+          <a:bodyPr rtlCol="0" anchor="ctr" lIns="0" rIns="0" tIns="0" bIns="0" wrap="none"/>
+          <a:lstStyle/>
+          <a:p>
+            <a:pPr algn="ctr"/>
+            <a:r>
+              <a:rPr sz="2500">
+                <a:solidFill>
+                  <a:srgbClr val="6E6FBF"/>
+                </a:solidFill>
               </a:rPr>
-              <a:t>approve or ask-again on every photo a kid submits.</a:t>
-            </a:r>
-          </a:p>
-          <a:p>
-            <a:pPr indent="-201168" marL="201168">
+              <a:t>📈</a:t>
+            </a:r>
+          </a:p>
+        </p:txBody>
+      </p:sp>
+      <p:sp>
+        <p:nvSpPr>
+          <p:cNvPr id="17" name="TextBox 16"/>
+          <p:cNvSpPr txBox="1"/>
+          <p:nvPr/>
+        </p:nvSpPr>
+        <p:spPr>
+          <a:xfrm>
+            <a:off x="7726679" y="4453128"/>
+            <a:ext cx="3566160" cy="457200"/>
+          </a:xfrm>
+          <a:prstGeom prst="rect">
+            <a:avLst/>
+          </a:prstGeom>
+          <a:noFill/>
+        </p:spPr>
+        <p:txBody>
+          <a:bodyPr wrap="square" anchor="t" lIns="0" rIns="0" tIns="0" bIns="0">
+            <a:spAutoFit/>
+          </a:bodyPr>
+          <a:lstStyle/>
+          <a:p>
+            <a:pPr algn="l">
               <a:lnSpc>
                 <a:spcPct val="115000"/>
               </a:lnSpc>
-              <a:spcAft>
-                <a:spcPts val="1400"/>
-              </a:spcAft>
-              <a:buClr>
-                <a:srgbClr val="3E7A5C"/>
-              </a:buClr>
-              <a:buFont typeface="Arial"/>
-              <a:buChar char="•"/>
             </a:pPr>
             <a:r>
-              <a:rPr b="1" sz="1400">
-                <a:solidFill>
-                  <a:srgbClr val="3E7A5C"/>
+              <a:rPr sz="1550" b="1" i="0">
+                <a:solidFill>
+                  <a:srgbClr val="1F2D22"/>
+                </a:solidFill>
+                <a:latin typeface="Cambria"/>
+              </a:rPr>
+              <a:t>A path to scale</a:t>
+            </a:r>
+          </a:p>
+        </p:txBody>
+      </p:sp>
+      <p:sp>
+        <p:nvSpPr>
+          <p:cNvPr id="18" name="TextBox 17"/>
+          <p:cNvSpPr txBox="1"/>
+          <p:nvPr/>
+        </p:nvSpPr>
+        <p:spPr>
+          <a:xfrm>
+            <a:off x="7726679" y="4937759"/>
+            <a:ext cx="3566160" cy="1234440"/>
+          </a:xfrm>
+          <a:prstGeom prst="rect">
+            <a:avLst/>
+          </a:prstGeom>
+          <a:noFill/>
+        </p:spPr>
+        <p:txBody>
+          <a:bodyPr wrap="square" anchor="t" lIns="0" rIns="0" tIns="0" bIns="0">
+            <a:spAutoFit/>
+          </a:bodyPr>
+          <a:lstStyle/>
+          <a:p>
+            <a:pPr algn="l">
+              <a:lnSpc>
+                <a:spcPct val="120000"/>
+              </a:lnSpc>
+            </a:pPr>
+            <a:r>
+              <a:rPr sz="1150" b="0" i="0">
+                <a:solidFill>
+                  <a:srgbClr val="5B6A5F"/>
                 </a:solidFill>
                 <a:latin typeface="Calibri"/>
               </a:rPr>
-              <a:t>An honest override — </a:t>
-            </a:r>
-            <a:r>
-              <a:rPr sz="1400">
-                <a:solidFill>
-                  <a:srgbClr val="1F2D22"/>
-                </a:solidFill>
-                <a:latin typeface="Calibri"/>
-              </a:rPr>
-              <a:t>PIN-gated emergency unlock that never falsifies progress.</a:t>
-            </a:r>
-          </a:p>
-          <a:p>
-            <a:pPr indent="-201168" marL="201168">
-              <a:lnSpc>
-                <a:spcPct val="115000"/>
-              </a:lnSpc>
-              <a:spcAft>
-                <a:spcPts val="1400"/>
-              </a:spcAft>
-              <a:buClr>
-                <a:srgbClr val="3E7A5C"/>
-              </a:buClr>
-              <a:buFont typeface="Arial"/>
-              <a:buChar char="•"/>
-            </a:pPr>
-            <a:r>
-              <a:rPr b="1" sz="1400">
-                <a:solidFill>
-                  <a:srgbClr val="3E7A5C"/>
-                </a:solidFill>
-                <a:latin typeface="Calibri"/>
-              </a:rPr>
-              <a:t>Full configurability — </a:t>
-            </a:r>
-            <a:r>
-              <a:rPr sz="1400">
-                <a:solidFill>
-                  <a:srgbClr val="1F2D22"/>
-                </a:solidFill>
-                <a:latin typeface="Calibri"/>
-              </a:rPr>
-              <a:t>add or remove any goal, and set exactly what it's worth.</a:t>
-            </a:r>
-          </a:p>
-          <a:p>
-            <a:pPr indent="-201168" marL="201168">
-              <a:lnSpc>
-                <a:spcPct val="115000"/>
-              </a:lnSpc>
-              <a:spcAft>
-                <a:spcPts val="1400"/>
-              </a:spcAft>
-              <a:buClr>
-                <a:srgbClr val="3E7A5C"/>
-              </a:buClr>
-              <a:buFont typeface="Arial"/>
-              <a:buChar char="•"/>
-            </a:pPr>
-            <a:r>
-              <a:rPr b="1" sz="1400">
-                <a:solidFill>
-                  <a:srgbClr val="3E7A5C"/>
-                </a:solidFill>
-                <a:latin typeface="Calibri"/>
-              </a:rPr>
-              <a:t>No coding required — </a:t>
-            </a:r>
-            <a:r>
-              <a:rPr sz="1400">
-                <a:solidFill>
-                  <a:srgbClr val="1F2D22"/>
-                </a:solidFill>
-                <a:latin typeface="Calibri"/>
-              </a:rPr>
-              <a:t>every control lives in a simple in-app dashboard.</a:t>
+              <a:t>School wellness programs, pediatrician recommendations, and family-plan subscriptions are natural next steps for the same core engine.</a:t>
             </a:r>
           </a:p>
         </p:txBody>
@@ -7655,1703 +7661,6 @@
 </file>
 
 <file path=ppt/slides/slide7.xml><?xml version="1.0" encoding="utf-8"?>
-<p:sld xmlns:a="http://schemas.openxmlformats.org/drawingml/2006/main" xmlns:p="http://schemas.openxmlformats.org/presentationml/2006/main" xmlns:r="http://schemas.openxmlformats.org/officeDocument/2006/relationships">
-  <p:cSld>
-    <p:bg>
-      <p:bgPr>
-        <a:solidFill>
-          <a:srgbClr val="FFFFFF"/>
-        </a:solidFill>
-        <a:effectLst/>
-      </p:bgPr>
-    </p:bg>
-    <p:spTree>
-      <p:nvGrpSpPr>
-        <p:cNvPr id="1" name=""/>
-        <p:cNvGrpSpPr/>
-        <p:nvPr/>
-      </p:nvGrpSpPr>
-      <p:grpSpPr/>
-      <p:sp>
-        <p:nvSpPr>
-          <p:cNvPr id="2" name="TextBox 1"/>
-          <p:cNvSpPr txBox="1"/>
-          <p:nvPr/>
-        </p:nvSpPr>
-        <p:spPr>
-          <a:xfrm>
-            <a:off x="822960" y="502920"/>
-            <a:ext cx="10332720" cy="914400"/>
-          </a:xfrm>
-          <a:prstGeom prst="rect">
-            <a:avLst/>
-          </a:prstGeom>
-          <a:noFill/>
-        </p:spPr>
-        <p:txBody>
-          <a:bodyPr wrap="square" anchor="t" lIns="0" rIns="0" tIns="0" bIns="0">
-            <a:spAutoFit/>
-          </a:bodyPr>
-          <a:lstStyle/>
-          <a:p>
-            <a:pPr algn="l">
-              <a:lnSpc>
-                <a:spcPct val="115000"/>
-              </a:lnSpc>
-            </a:pPr>
-            <a:r>
-              <a:rPr sz="3000" b="1" i="0">
-                <a:solidFill>
-                  <a:srgbClr val="1F2D22"/>
-                </a:solidFill>
-                <a:latin typeface="Cambria"/>
-              </a:rPr>
-              <a:t>Built for One Family. Designed for Every Family.</a:t>
-            </a:r>
-          </a:p>
-        </p:txBody>
-      </p:sp>
-      <p:sp>
-        <p:nvSpPr>
-          <p:cNvPr id="3" name="Rounded Rectangle 2"/>
-          <p:cNvSpPr/>
-          <p:nvPr/>
-        </p:nvSpPr>
-        <p:spPr>
-          <a:xfrm>
-            <a:off x="822960" y="1828800"/>
-            <a:ext cx="5074920" cy="2103120"/>
-          </a:xfrm>
-          <a:prstGeom prst="roundRect">
-            <a:avLst>
-              <a:gd name="adj" fmla="val 10000"/>
-            </a:avLst>
-          </a:prstGeom>
-          <a:solidFill>
-            <a:srgbClr val="DCE8D9"/>
-          </a:solidFill>
-          <a:ln>
-            <a:noFill/>
-          </a:ln>
-          <a:effectLst/>
-        </p:spPr>
-        <p:style>
-          <a:lnRef idx="1">
-            <a:schemeClr val="accent1"/>
-          </a:lnRef>
-          <a:fillRef idx="3">
-            <a:schemeClr val="accent1"/>
-          </a:fillRef>
-          <a:effectRef idx="2">
-            <a:schemeClr val="accent1"/>
-          </a:effectRef>
-          <a:fontRef idx="minor">
-            <a:schemeClr val="lt1"/>
-          </a:fontRef>
-        </p:style>
-        <p:txBody>
-          <a:bodyPr rtlCol="0" anchor="ctr"/>
-          <a:lstStyle/>
-          <a:p>
-            <a:pPr algn="ctr"/>
-          </a:p>
-        </p:txBody>
-      </p:sp>
-      <p:sp>
-        <p:nvSpPr>
-          <p:cNvPr id="4" name="Oval 3"/>
-          <p:cNvSpPr/>
-          <p:nvPr/>
-        </p:nvSpPr>
-        <p:spPr>
-          <a:xfrm>
-            <a:off x="1188720" y="2103120"/>
-            <a:ext cx="822960" cy="822960"/>
-          </a:xfrm>
-          <a:prstGeom prst="ellipse">
-            <a:avLst/>
-          </a:prstGeom>
-          <a:solidFill>
-            <a:srgbClr val="FFFFFF"/>
-          </a:solidFill>
-          <a:ln>
-            <a:noFill/>
-          </a:ln>
-          <a:effectLst/>
-        </p:spPr>
-        <p:style>
-          <a:lnRef idx="1">
-            <a:schemeClr val="accent1"/>
-          </a:lnRef>
-          <a:fillRef idx="3">
-            <a:schemeClr val="accent1"/>
-          </a:fillRef>
-          <a:effectRef idx="2">
-            <a:schemeClr val="accent1"/>
-          </a:effectRef>
-          <a:fontRef idx="minor">
-            <a:schemeClr val="lt1"/>
-          </a:fontRef>
-        </p:style>
-        <p:txBody>
-          <a:bodyPr rtlCol="0" anchor="ctr" lIns="0" rIns="0" tIns="0" bIns="0" wrap="none"/>
-          <a:lstStyle/>
-          <a:p>
-            <a:pPr algn="ctr"/>
-            <a:r>
-              <a:rPr sz="2500">
-                <a:solidFill>
-                  <a:srgbClr val="3E7A5C"/>
-                </a:solidFill>
-              </a:rPr>
-              <a:t>🌍</a:t>
-            </a:r>
-          </a:p>
-        </p:txBody>
-      </p:sp>
-      <p:sp>
-        <p:nvSpPr>
-          <p:cNvPr id="5" name="TextBox 4"/>
-          <p:cNvSpPr txBox="1"/>
-          <p:nvPr/>
-        </p:nvSpPr>
-        <p:spPr>
-          <a:xfrm>
-            <a:off x="2194560" y="2121408"/>
-            <a:ext cx="3566160" cy="457200"/>
-          </a:xfrm>
-          <a:prstGeom prst="rect">
-            <a:avLst/>
-          </a:prstGeom>
-          <a:noFill/>
-        </p:spPr>
-        <p:txBody>
-          <a:bodyPr wrap="square" anchor="t" lIns="0" rIns="0" tIns="0" bIns="0">
-            <a:spAutoFit/>
-          </a:bodyPr>
-          <a:lstStyle/>
-          <a:p>
-            <a:pPr algn="l">
-              <a:lnSpc>
-                <a:spcPct val="115000"/>
-              </a:lnSpc>
-            </a:pPr>
-            <a:r>
-              <a:rPr sz="1550" b="1" i="0">
-                <a:solidFill>
-                  <a:srgbClr val="1F2D22"/>
-                </a:solidFill>
-                <a:latin typeface="Cambria"/>
-              </a:rPr>
-              <a:t>Universal habits</a:t>
-            </a:r>
-          </a:p>
-        </p:txBody>
-      </p:sp>
-      <p:sp>
-        <p:nvSpPr>
-          <p:cNvPr id="6" name="TextBox 5"/>
-          <p:cNvSpPr txBox="1"/>
-          <p:nvPr/>
-        </p:nvSpPr>
-        <p:spPr>
-          <a:xfrm>
-            <a:off x="2194560" y="2606040"/>
-            <a:ext cx="3566160" cy="1234440"/>
-          </a:xfrm>
-          <a:prstGeom prst="rect">
-            <a:avLst/>
-          </a:prstGeom>
-          <a:noFill/>
-        </p:spPr>
-        <p:txBody>
-          <a:bodyPr wrap="square" anchor="t" lIns="0" rIns="0" tIns="0" bIns="0">
-            <a:spAutoFit/>
-          </a:bodyPr>
-          <a:lstStyle/>
-          <a:p>
-            <a:pPr algn="l">
-              <a:lnSpc>
-                <a:spcPct val="120000"/>
-              </a:lnSpc>
-            </a:pPr>
-            <a:r>
-              <a:rPr sz="1150" b="0" i="0">
-                <a:solidFill>
-                  <a:srgbClr val="5B6A5F"/>
-                </a:solidFill>
-                <a:latin typeface="Calibri"/>
-              </a:rPr>
-              <a:t>Water, sleep, movement, and nutrition are the same challenge in every home, every culture, every income level — this isn't a niche problem.</a:t>
-            </a:r>
-          </a:p>
-        </p:txBody>
-      </p:sp>
-      <p:sp>
-        <p:nvSpPr>
-          <p:cNvPr id="7" name="Rounded Rectangle 6"/>
-          <p:cNvSpPr/>
-          <p:nvPr/>
-        </p:nvSpPr>
-        <p:spPr>
-          <a:xfrm>
-            <a:off x="6355080" y="1828800"/>
-            <a:ext cx="5074920" cy="2103120"/>
-          </a:xfrm>
-          <a:prstGeom prst="roundRect">
-            <a:avLst>
-              <a:gd name="adj" fmla="val 10000"/>
-            </a:avLst>
-          </a:prstGeom>
-          <a:solidFill>
-            <a:srgbClr val="F7E1D5"/>
-          </a:solidFill>
-          <a:ln>
-            <a:noFill/>
-          </a:ln>
-          <a:effectLst/>
-        </p:spPr>
-        <p:style>
-          <a:lnRef idx="1">
-            <a:schemeClr val="accent1"/>
-          </a:lnRef>
-          <a:fillRef idx="3">
-            <a:schemeClr val="accent1"/>
-          </a:fillRef>
-          <a:effectRef idx="2">
-            <a:schemeClr val="accent1"/>
-          </a:effectRef>
-          <a:fontRef idx="minor">
-            <a:schemeClr val="lt1"/>
-          </a:fontRef>
-        </p:style>
-        <p:txBody>
-          <a:bodyPr rtlCol="0" anchor="ctr"/>
-          <a:lstStyle/>
-          <a:p>
-            <a:pPr algn="ctr"/>
-          </a:p>
-        </p:txBody>
-      </p:sp>
-      <p:sp>
-        <p:nvSpPr>
-          <p:cNvPr id="8" name="Oval 7"/>
-          <p:cNvSpPr/>
-          <p:nvPr/>
-        </p:nvSpPr>
-        <p:spPr>
-          <a:xfrm>
-            <a:off x="6720840" y="2103120"/>
-            <a:ext cx="822960" cy="822960"/>
-          </a:xfrm>
-          <a:prstGeom prst="ellipse">
-            <a:avLst/>
-          </a:prstGeom>
-          <a:solidFill>
-            <a:srgbClr val="FFFFFF"/>
-          </a:solidFill>
-          <a:ln>
-            <a:noFill/>
-          </a:ln>
-          <a:effectLst/>
-        </p:spPr>
-        <p:style>
-          <a:lnRef idx="1">
-            <a:schemeClr val="accent1"/>
-          </a:lnRef>
-          <a:fillRef idx="3">
-            <a:schemeClr val="accent1"/>
-          </a:fillRef>
-          <a:effectRef idx="2">
-            <a:schemeClr val="accent1"/>
-          </a:effectRef>
-          <a:fontRef idx="minor">
-            <a:schemeClr val="lt1"/>
-          </a:fontRef>
-        </p:style>
-        <p:txBody>
-          <a:bodyPr rtlCol="0" anchor="ctr" lIns="0" rIns="0" tIns="0" bIns="0" wrap="none"/>
-          <a:lstStyle/>
-          <a:p>
-            <a:pPr algn="ctr"/>
-            <a:r>
-              <a:rPr sz="2500">
-                <a:solidFill>
-                  <a:srgbClr val="DD6B42"/>
-                </a:solidFill>
-              </a:rPr>
-              <a:t>🧩</a:t>
-            </a:r>
-          </a:p>
-        </p:txBody>
-      </p:sp>
-      <p:sp>
-        <p:nvSpPr>
-          <p:cNvPr id="9" name="TextBox 8"/>
-          <p:cNvSpPr txBox="1"/>
-          <p:nvPr/>
-        </p:nvSpPr>
-        <p:spPr>
-          <a:xfrm>
-            <a:off x="7726679" y="2121408"/>
-            <a:ext cx="3566160" cy="457200"/>
-          </a:xfrm>
-          <a:prstGeom prst="rect">
-            <a:avLst/>
-          </a:prstGeom>
-          <a:noFill/>
-        </p:spPr>
-        <p:txBody>
-          <a:bodyPr wrap="square" anchor="t" lIns="0" rIns="0" tIns="0" bIns="0">
-            <a:spAutoFit/>
-          </a:bodyPr>
-          <a:lstStyle/>
-          <a:p>
-            <a:pPr algn="l">
-              <a:lnSpc>
-                <a:spcPct val="115000"/>
-              </a:lnSpc>
-            </a:pPr>
-            <a:r>
-              <a:rPr sz="1550" b="1" i="0">
-                <a:solidFill>
-                  <a:srgbClr val="1F2D22"/>
-                </a:solidFill>
-                <a:latin typeface="Cambria"/>
-              </a:rPr>
-              <a:t>Any habit, not just health</a:t>
-            </a:r>
-          </a:p>
-        </p:txBody>
-      </p:sp>
-      <p:sp>
-        <p:nvSpPr>
-          <p:cNvPr id="10" name="TextBox 9"/>
-          <p:cNvSpPr txBox="1"/>
-          <p:nvPr/>
-        </p:nvSpPr>
-        <p:spPr>
-          <a:xfrm>
-            <a:off x="7726679" y="2606040"/>
-            <a:ext cx="3566160" cy="1234440"/>
-          </a:xfrm>
-          <a:prstGeom prst="rect">
-            <a:avLst/>
-          </a:prstGeom>
-          <a:noFill/>
-        </p:spPr>
-        <p:txBody>
-          <a:bodyPr wrap="square" anchor="t" lIns="0" rIns="0" tIns="0" bIns="0">
-            <a:spAutoFit/>
-          </a:bodyPr>
-          <a:lstStyle/>
-          <a:p>
-            <a:pPr algn="l">
-              <a:lnSpc>
-                <a:spcPct val="120000"/>
-              </a:lnSpc>
-            </a:pPr>
-            <a:r>
-              <a:rPr sz="1150" b="0" i="0">
-                <a:solidFill>
-                  <a:srgbClr val="5B6A5F"/>
-                </a:solidFill>
-                <a:latin typeface="Calibri"/>
-              </a:rPr>
-              <a:t>Parents can already add custom goals — reading, chores, homework — the checklist → proof → reward engine generalizes far beyond the 4 defaults.</a:t>
-            </a:r>
-          </a:p>
-        </p:txBody>
-      </p:sp>
-      <p:sp>
-        <p:nvSpPr>
-          <p:cNvPr id="11" name="Rounded Rectangle 10"/>
-          <p:cNvSpPr/>
-          <p:nvPr/>
-        </p:nvSpPr>
-        <p:spPr>
-          <a:xfrm>
-            <a:off x="822960" y="4160520"/>
-            <a:ext cx="5074920" cy="2103120"/>
-          </a:xfrm>
-          <a:prstGeom prst="roundRect">
-            <a:avLst>
-              <a:gd name="adj" fmla="val 10000"/>
-            </a:avLst>
-          </a:prstGeom>
-          <a:solidFill>
-            <a:srgbClr val="F5E7C9"/>
-          </a:solidFill>
-          <a:ln>
-            <a:noFill/>
-          </a:ln>
-          <a:effectLst/>
-        </p:spPr>
-        <p:style>
-          <a:lnRef idx="1">
-            <a:schemeClr val="accent1"/>
-          </a:lnRef>
-          <a:fillRef idx="3">
-            <a:schemeClr val="accent1"/>
-          </a:fillRef>
-          <a:effectRef idx="2">
-            <a:schemeClr val="accent1"/>
-          </a:effectRef>
-          <a:fontRef idx="minor">
-            <a:schemeClr val="lt1"/>
-          </a:fontRef>
-        </p:style>
-        <p:txBody>
-          <a:bodyPr rtlCol="0" anchor="ctr"/>
-          <a:lstStyle/>
-          <a:p>
-            <a:pPr algn="ctr"/>
-          </a:p>
-        </p:txBody>
-      </p:sp>
-      <p:sp>
-        <p:nvSpPr>
-          <p:cNvPr id="12" name="Oval 11"/>
-          <p:cNvSpPr/>
-          <p:nvPr/>
-        </p:nvSpPr>
-        <p:spPr>
-          <a:xfrm>
-            <a:off x="1188720" y="4434840"/>
-            <a:ext cx="822960" cy="822960"/>
-          </a:xfrm>
-          <a:prstGeom prst="ellipse">
-            <a:avLst/>
-          </a:prstGeom>
-          <a:solidFill>
-            <a:srgbClr val="FFFFFF"/>
-          </a:solidFill>
-          <a:ln>
-            <a:noFill/>
-          </a:ln>
-          <a:effectLst/>
-        </p:spPr>
-        <p:style>
-          <a:lnRef idx="1">
-            <a:schemeClr val="accent1"/>
-          </a:lnRef>
-          <a:fillRef idx="3">
-            <a:schemeClr val="accent1"/>
-          </a:fillRef>
-          <a:effectRef idx="2">
-            <a:schemeClr val="accent1"/>
-          </a:effectRef>
-          <a:fontRef idx="minor">
-            <a:schemeClr val="lt1"/>
-          </a:fontRef>
-        </p:style>
-        <p:txBody>
-          <a:bodyPr rtlCol="0" anchor="ctr" lIns="0" rIns="0" tIns="0" bIns="0" wrap="none"/>
-          <a:lstStyle/>
-          <a:p>
-            <a:pPr algn="ctr"/>
-            <a:r>
-              <a:rPr sz="2500">
-                <a:solidFill>
-                  <a:srgbClr val="DB9D3B"/>
-                </a:solidFill>
-              </a:rPr>
-              <a:t>📱</a:t>
-            </a:r>
-          </a:p>
-        </p:txBody>
-      </p:sp>
-      <p:sp>
-        <p:nvSpPr>
-          <p:cNvPr id="13" name="TextBox 12"/>
-          <p:cNvSpPr txBox="1"/>
-          <p:nvPr/>
-        </p:nvSpPr>
-        <p:spPr>
-          <a:xfrm>
-            <a:off x="2194560" y="4453128"/>
-            <a:ext cx="3566160" cy="457200"/>
-          </a:xfrm>
-          <a:prstGeom prst="rect">
-            <a:avLst/>
-          </a:prstGeom>
-          <a:noFill/>
-        </p:spPr>
-        <p:txBody>
-          <a:bodyPr wrap="square" anchor="t" lIns="0" rIns="0" tIns="0" bIns="0">
-            <a:spAutoFit/>
-          </a:bodyPr>
-          <a:lstStyle/>
-          <a:p>
-            <a:pPr algn="l">
-              <a:lnSpc>
-                <a:spcPct val="115000"/>
-              </a:lnSpc>
-            </a:pPr>
-            <a:r>
-              <a:rPr sz="1550" b="1" i="0">
-                <a:solidFill>
-                  <a:srgbClr val="1F2D22"/>
-                </a:solidFill>
-                <a:latin typeface="Cambria"/>
-              </a:rPr>
-              <a:t>Rides a real trend</a:t>
-            </a:r>
-          </a:p>
-        </p:txBody>
-      </p:sp>
-      <p:sp>
-        <p:nvSpPr>
-          <p:cNvPr id="14" name="TextBox 13"/>
-          <p:cNvSpPr txBox="1"/>
-          <p:nvPr/>
-        </p:nvSpPr>
-        <p:spPr>
-          <a:xfrm>
-            <a:off x="2194560" y="4937759"/>
-            <a:ext cx="3566160" cy="1234440"/>
-          </a:xfrm>
-          <a:prstGeom prst="rect">
-            <a:avLst/>
-          </a:prstGeom>
-          <a:noFill/>
-        </p:spPr>
-        <p:txBody>
-          <a:bodyPr wrap="square" anchor="t" lIns="0" rIns="0" tIns="0" bIns="0">
-            <a:spAutoFit/>
-          </a:bodyPr>
-          <a:lstStyle/>
-          <a:p>
-            <a:pPr algn="l">
-              <a:lnSpc>
-                <a:spcPct val="120000"/>
-              </a:lnSpc>
-            </a:pPr>
-            <a:r>
-              <a:rPr sz="1150" b="0" i="0">
-                <a:solidFill>
-                  <a:srgbClr val="5B6A5F"/>
-                </a:solidFill>
-                <a:latin typeface="Calibri"/>
-              </a:rPr>
-              <a:t>Global concern over kids' screen time is only growing — Health First turns that fight into a shared incentive instead of a source of family conflict.</a:t>
-            </a:r>
-          </a:p>
-        </p:txBody>
-      </p:sp>
-      <p:sp>
-        <p:nvSpPr>
-          <p:cNvPr id="15" name="Rounded Rectangle 14"/>
-          <p:cNvSpPr/>
-          <p:nvPr/>
-        </p:nvSpPr>
-        <p:spPr>
-          <a:xfrm>
-            <a:off x="6355080" y="4160520"/>
-            <a:ext cx="5074920" cy="2103120"/>
-          </a:xfrm>
-          <a:prstGeom prst="roundRect">
-            <a:avLst>
-              <a:gd name="adj" fmla="val 10000"/>
-            </a:avLst>
-          </a:prstGeom>
-          <a:solidFill>
-            <a:srgbClr val="E2E2F5"/>
-          </a:solidFill>
-          <a:ln>
-            <a:noFill/>
-          </a:ln>
-          <a:effectLst/>
-        </p:spPr>
-        <p:style>
-          <a:lnRef idx="1">
-            <a:schemeClr val="accent1"/>
-          </a:lnRef>
-          <a:fillRef idx="3">
-            <a:schemeClr val="accent1"/>
-          </a:fillRef>
-          <a:effectRef idx="2">
-            <a:schemeClr val="accent1"/>
-          </a:effectRef>
-          <a:fontRef idx="minor">
-            <a:schemeClr val="lt1"/>
-          </a:fontRef>
-        </p:style>
-        <p:txBody>
-          <a:bodyPr rtlCol="0" anchor="ctr"/>
-          <a:lstStyle/>
-          <a:p>
-            <a:pPr algn="ctr"/>
-          </a:p>
-        </p:txBody>
-      </p:sp>
-      <p:sp>
-        <p:nvSpPr>
-          <p:cNvPr id="16" name="Oval 15"/>
-          <p:cNvSpPr/>
-          <p:nvPr/>
-        </p:nvSpPr>
-        <p:spPr>
-          <a:xfrm>
-            <a:off x="6720840" y="4434840"/>
-            <a:ext cx="822960" cy="822960"/>
-          </a:xfrm>
-          <a:prstGeom prst="ellipse">
-            <a:avLst/>
-          </a:prstGeom>
-          <a:solidFill>
-            <a:srgbClr val="FFFFFF"/>
-          </a:solidFill>
-          <a:ln>
-            <a:noFill/>
-          </a:ln>
-          <a:effectLst/>
-        </p:spPr>
-        <p:style>
-          <a:lnRef idx="1">
-            <a:schemeClr val="accent1"/>
-          </a:lnRef>
-          <a:fillRef idx="3">
-            <a:schemeClr val="accent1"/>
-          </a:fillRef>
-          <a:effectRef idx="2">
-            <a:schemeClr val="accent1"/>
-          </a:effectRef>
-          <a:fontRef idx="minor">
-            <a:schemeClr val="lt1"/>
-          </a:fontRef>
-        </p:style>
-        <p:txBody>
-          <a:bodyPr rtlCol="0" anchor="ctr" lIns="0" rIns="0" tIns="0" bIns="0" wrap="none"/>
-          <a:lstStyle/>
-          <a:p>
-            <a:pPr algn="ctr"/>
-            <a:r>
-              <a:rPr sz="2500">
-                <a:solidFill>
-                  <a:srgbClr val="6E6FBF"/>
-                </a:solidFill>
-              </a:rPr>
-              <a:t>📈</a:t>
-            </a:r>
-          </a:p>
-        </p:txBody>
-      </p:sp>
-      <p:sp>
-        <p:nvSpPr>
-          <p:cNvPr id="17" name="TextBox 16"/>
-          <p:cNvSpPr txBox="1"/>
-          <p:nvPr/>
-        </p:nvSpPr>
-        <p:spPr>
-          <a:xfrm>
-            <a:off x="7726679" y="4453128"/>
-            <a:ext cx="3566160" cy="457200"/>
-          </a:xfrm>
-          <a:prstGeom prst="rect">
-            <a:avLst/>
-          </a:prstGeom>
-          <a:noFill/>
-        </p:spPr>
-        <p:txBody>
-          <a:bodyPr wrap="square" anchor="t" lIns="0" rIns="0" tIns="0" bIns="0">
-            <a:spAutoFit/>
-          </a:bodyPr>
-          <a:lstStyle/>
-          <a:p>
-            <a:pPr algn="l">
-              <a:lnSpc>
-                <a:spcPct val="115000"/>
-              </a:lnSpc>
-            </a:pPr>
-            <a:r>
-              <a:rPr sz="1550" b="1" i="0">
-                <a:solidFill>
-                  <a:srgbClr val="1F2D22"/>
-                </a:solidFill>
-                <a:latin typeface="Cambria"/>
-              </a:rPr>
-              <a:t>A path to scale</a:t>
-            </a:r>
-          </a:p>
-        </p:txBody>
-      </p:sp>
-      <p:sp>
-        <p:nvSpPr>
-          <p:cNvPr id="18" name="TextBox 17"/>
-          <p:cNvSpPr txBox="1"/>
-          <p:nvPr/>
-        </p:nvSpPr>
-        <p:spPr>
-          <a:xfrm>
-            <a:off x="7726679" y="4937759"/>
-            <a:ext cx="3566160" cy="1234440"/>
-          </a:xfrm>
-          <a:prstGeom prst="rect">
-            <a:avLst/>
-          </a:prstGeom>
-          <a:noFill/>
-        </p:spPr>
-        <p:txBody>
-          <a:bodyPr wrap="square" anchor="t" lIns="0" rIns="0" tIns="0" bIns="0">
-            <a:spAutoFit/>
-          </a:bodyPr>
-          <a:lstStyle/>
-          <a:p>
-            <a:pPr algn="l">
-              <a:lnSpc>
-                <a:spcPct val="120000"/>
-              </a:lnSpc>
-            </a:pPr>
-            <a:r>
-              <a:rPr sz="1150" b="0" i="0">
-                <a:solidFill>
-                  <a:srgbClr val="5B6A5F"/>
-                </a:solidFill>
-                <a:latin typeface="Calibri"/>
-              </a:rPr>
-              <a:t>School wellness programs, pediatrician recommendations, and family-plan subscriptions are natural next steps for the same core engine.</a:t>
-            </a:r>
-          </a:p>
-        </p:txBody>
-      </p:sp>
-    </p:spTree>
-  </p:cSld>
-  <p:clrMapOvr>
-    <a:masterClrMapping/>
-  </p:clrMapOvr>
-</p:sld>
-</file>
-
-<file path=ppt/slides/slide8.xml><?xml version="1.0" encoding="utf-8"?>
-<p:sld xmlns:a="http://schemas.openxmlformats.org/drawingml/2006/main" xmlns:p="http://schemas.openxmlformats.org/presentationml/2006/main" xmlns:r="http://schemas.openxmlformats.org/officeDocument/2006/relationships">
-  <p:cSld>
-    <p:bg>
-      <p:bgPr>
-        <a:solidFill>
-          <a:srgbClr val="FFFFFF"/>
-        </a:solidFill>
-        <a:effectLst/>
-      </p:bgPr>
-    </p:bg>
-    <p:spTree>
-      <p:nvGrpSpPr>
-        <p:cNvPr id="1" name=""/>
-        <p:cNvGrpSpPr/>
-        <p:nvPr/>
-      </p:nvGrpSpPr>
-      <p:grpSpPr/>
-      <p:sp>
-        <p:nvSpPr>
-          <p:cNvPr id="2" name="TextBox 1"/>
-          <p:cNvSpPr txBox="1"/>
-          <p:nvPr/>
-        </p:nvSpPr>
-        <p:spPr>
-          <a:xfrm>
-            <a:off x="822960" y="548640"/>
-            <a:ext cx="9144000" cy="548640"/>
-          </a:xfrm>
-          <a:prstGeom prst="rect">
-            <a:avLst/>
-          </a:prstGeom>
-          <a:noFill/>
-        </p:spPr>
-        <p:txBody>
-          <a:bodyPr wrap="square" anchor="t" lIns="0" rIns="0" tIns="0" bIns="0">
-            <a:spAutoFit/>
-          </a:bodyPr>
-          <a:lstStyle/>
-          <a:p>
-            <a:pPr algn="l">
-              <a:lnSpc>
-                <a:spcPct val="115000"/>
-              </a:lnSpc>
-            </a:pPr>
-            <a:r>
-              <a:rPr sz="3000" b="1" i="0">
-                <a:solidFill>
-                  <a:srgbClr val="1F2D22"/>
-                </a:solidFill>
-                <a:latin typeface="Cambria"/>
-              </a:rPr>
-              <a:t>From Finding to Feature</a:t>
-            </a:r>
-          </a:p>
-        </p:txBody>
-      </p:sp>
-      <p:sp>
-        <p:nvSpPr>
-          <p:cNvPr id="3" name="Rounded Rectangle 2"/>
-          <p:cNvSpPr/>
-          <p:nvPr/>
-        </p:nvSpPr>
-        <p:spPr>
-          <a:xfrm>
-            <a:off x="822960" y="1554480"/>
-            <a:ext cx="1874519" cy="1005840"/>
-          </a:xfrm>
-          <a:prstGeom prst="roundRect">
-            <a:avLst>
-              <a:gd name="adj" fmla="val 10000"/>
-            </a:avLst>
-          </a:prstGeom>
-          <a:solidFill>
-            <a:srgbClr val="DCE8D9"/>
-          </a:solidFill>
-          <a:ln>
-            <a:noFill/>
-          </a:ln>
-          <a:effectLst/>
-        </p:spPr>
-        <p:style>
-          <a:lnRef idx="1">
-            <a:schemeClr val="accent1"/>
-          </a:lnRef>
-          <a:fillRef idx="3">
-            <a:schemeClr val="accent1"/>
-          </a:fillRef>
-          <a:effectRef idx="2">
-            <a:schemeClr val="accent1"/>
-          </a:effectRef>
-          <a:fontRef idx="minor">
-            <a:schemeClr val="lt1"/>
-          </a:fontRef>
-        </p:style>
-        <p:txBody>
-          <a:bodyPr rtlCol="0" anchor="ctr"/>
-          <a:lstStyle/>
-          <a:p>
-            <a:pPr algn="ctr"/>
-          </a:p>
-        </p:txBody>
-      </p:sp>
-      <p:sp>
-        <p:nvSpPr>
-          <p:cNvPr id="4" name="TextBox 3"/>
-          <p:cNvSpPr txBox="1"/>
-          <p:nvPr/>
-        </p:nvSpPr>
-        <p:spPr>
-          <a:xfrm>
-            <a:off x="822960" y="1554480"/>
-            <a:ext cx="1874519" cy="1005840"/>
-          </a:xfrm>
-          <a:prstGeom prst="rect">
-            <a:avLst/>
-          </a:prstGeom>
-          <a:noFill/>
-        </p:spPr>
-        <p:txBody>
-          <a:bodyPr wrap="square" anchor="ctr" lIns="0" rIns="0" tIns="0" bIns="0">
-            <a:spAutoFit/>
-          </a:bodyPr>
-          <a:lstStyle/>
-          <a:p>
-            <a:pPr algn="ctr">
-              <a:lnSpc>
-                <a:spcPct val="115000"/>
-              </a:lnSpc>
-            </a:pPr>
-            <a:r>
-              <a:rPr sz="1300" b="1" i="0">
-                <a:solidFill>
-                  <a:srgbClr val="2C5A44"/>
-                </a:solidFill>
-                <a:latin typeface="Calibri"/>
-              </a:rPr>
-              <a:t>Week 1</a:t>
-            </a:r>
-          </a:p>
-          <a:p>
-            <a:pPr algn="ctr">
-              <a:lnSpc>
-                <a:spcPct val="115000"/>
-              </a:lnSpc>
-            </a:pPr>
-            <a:r>
-              <a:rPr sz="1300" b="1" i="0">
-                <a:solidFill>
-                  <a:srgbClr val="2C5A44"/>
-                </a:solidFill>
-                <a:latin typeface="Calibri"/>
-              </a:rPr>
-              <a:t>Blueprint</a:t>
-            </a:r>
-          </a:p>
-        </p:txBody>
-      </p:sp>
-      <p:sp>
-        <p:nvSpPr>
-          <p:cNvPr id="5" name="TextBox 4"/>
-          <p:cNvSpPr txBox="1"/>
-          <p:nvPr/>
-        </p:nvSpPr>
-        <p:spPr>
-          <a:xfrm>
-            <a:off x="2724911" y="1554480"/>
-            <a:ext cx="365760" cy="1005840"/>
-          </a:xfrm>
-          <a:prstGeom prst="rect">
-            <a:avLst/>
-          </a:prstGeom>
-          <a:noFill/>
-        </p:spPr>
-        <p:txBody>
-          <a:bodyPr wrap="square" anchor="ctr" lIns="0" rIns="0" tIns="0" bIns="0">
-            <a:spAutoFit/>
-          </a:bodyPr>
-          <a:lstStyle/>
-          <a:p>
-            <a:pPr algn="ctr">
-              <a:lnSpc>
-                <a:spcPct val="115000"/>
-              </a:lnSpc>
-            </a:pPr>
-            <a:r>
-              <a:rPr sz="1800" b="1" i="0">
-                <a:solidFill>
-                  <a:srgbClr val="5B6A5F"/>
-                </a:solidFill>
-                <a:latin typeface="Calibri"/>
-              </a:rPr>
-              <a:t>→</a:t>
-            </a:r>
-          </a:p>
-        </p:txBody>
-      </p:sp>
-      <p:sp>
-        <p:nvSpPr>
-          <p:cNvPr id="6" name="Rounded Rectangle 5"/>
-          <p:cNvSpPr/>
-          <p:nvPr/>
-        </p:nvSpPr>
-        <p:spPr>
-          <a:xfrm>
-            <a:off x="2926079" y="1554480"/>
-            <a:ext cx="1874519" cy="1005840"/>
-          </a:xfrm>
-          <a:prstGeom prst="roundRect">
-            <a:avLst>
-              <a:gd name="adj" fmla="val 10000"/>
-            </a:avLst>
-          </a:prstGeom>
-          <a:solidFill>
-            <a:srgbClr val="DCE8D9"/>
-          </a:solidFill>
-          <a:ln>
-            <a:noFill/>
-          </a:ln>
-          <a:effectLst/>
-        </p:spPr>
-        <p:style>
-          <a:lnRef idx="1">
-            <a:schemeClr val="accent1"/>
-          </a:lnRef>
-          <a:fillRef idx="3">
-            <a:schemeClr val="accent1"/>
-          </a:fillRef>
-          <a:effectRef idx="2">
-            <a:schemeClr val="accent1"/>
-          </a:effectRef>
-          <a:fontRef idx="minor">
-            <a:schemeClr val="lt1"/>
-          </a:fontRef>
-        </p:style>
-        <p:txBody>
-          <a:bodyPr rtlCol="0" anchor="ctr"/>
-          <a:lstStyle/>
-          <a:p>
-            <a:pPr algn="ctr"/>
-          </a:p>
-        </p:txBody>
-      </p:sp>
-      <p:sp>
-        <p:nvSpPr>
-          <p:cNvPr id="7" name="TextBox 6"/>
-          <p:cNvSpPr txBox="1"/>
-          <p:nvPr/>
-        </p:nvSpPr>
-        <p:spPr>
-          <a:xfrm>
-            <a:off x="2926079" y="1554480"/>
-            <a:ext cx="1874519" cy="1005840"/>
-          </a:xfrm>
-          <a:prstGeom prst="rect">
-            <a:avLst/>
-          </a:prstGeom>
-          <a:noFill/>
-        </p:spPr>
-        <p:txBody>
-          <a:bodyPr wrap="square" anchor="ctr" lIns="0" rIns="0" tIns="0" bIns="0">
-            <a:spAutoFit/>
-          </a:bodyPr>
-          <a:lstStyle/>
-          <a:p>
-            <a:pPr algn="ctr">
-              <a:lnSpc>
-                <a:spcPct val="115000"/>
-              </a:lnSpc>
-            </a:pPr>
-            <a:r>
-              <a:rPr sz="1300" b="1" i="0">
-                <a:solidFill>
-                  <a:srgbClr val="2C5A44"/>
-                </a:solidFill>
-                <a:latin typeface="Calibri"/>
-              </a:rPr>
-              <a:t>Week 2</a:t>
-            </a:r>
-          </a:p>
-          <a:p>
-            <a:pPr algn="ctr">
-              <a:lnSpc>
-                <a:spcPct val="115000"/>
-              </a:lnSpc>
-            </a:pPr>
-            <a:r>
-              <a:rPr sz="1300" b="1" i="0">
-                <a:solidFill>
-                  <a:srgbClr val="2C5A44"/>
-                </a:solidFill>
-                <a:latin typeface="Calibri"/>
-              </a:rPr>
-              <a:t>Prototype</a:t>
-            </a:r>
-          </a:p>
-        </p:txBody>
-      </p:sp>
-      <p:sp>
-        <p:nvSpPr>
-          <p:cNvPr id="8" name="TextBox 7"/>
-          <p:cNvSpPr txBox="1"/>
-          <p:nvPr/>
-        </p:nvSpPr>
-        <p:spPr>
-          <a:xfrm>
-            <a:off x="4828032" y="1554480"/>
-            <a:ext cx="365760" cy="1005840"/>
-          </a:xfrm>
-          <a:prstGeom prst="rect">
-            <a:avLst/>
-          </a:prstGeom>
-          <a:noFill/>
-        </p:spPr>
-        <p:txBody>
-          <a:bodyPr wrap="square" anchor="ctr" lIns="0" rIns="0" tIns="0" bIns="0">
-            <a:spAutoFit/>
-          </a:bodyPr>
-          <a:lstStyle/>
-          <a:p>
-            <a:pPr algn="ctr">
-              <a:lnSpc>
-                <a:spcPct val="115000"/>
-              </a:lnSpc>
-            </a:pPr>
-            <a:r>
-              <a:rPr sz="1800" b="1" i="0">
-                <a:solidFill>
-                  <a:srgbClr val="5B6A5F"/>
-                </a:solidFill>
-                <a:latin typeface="Calibri"/>
-              </a:rPr>
-              <a:t>→</a:t>
-            </a:r>
-          </a:p>
-        </p:txBody>
-      </p:sp>
-      <p:sp>
-        <p:nvSpPr>
-          <p:cNvPr id="9" name="Rounded Rectangle 8"/>
-          <p:cNvSpPr/>
-          <p:nvPr/>
-        </p:nvSpPr>
-        <p:spPr>
-          <a:xfrm>
-            <a:off x="5029200" y="1554480"/>
-            <a:ext cx="1874519" cy="1005840"/>
-          </a:xfrm>
-          <a:prstGeom prst="roundRect">
-            <a:avLst>
-              <a:gd name="adj" fmla="val 10000"/>
-            </a:avLst>
-          </a:prstGeom>
-          <a:solidFill>
-            <a:srgbClr val="DCE8D9"/>
-          </a:solidFill>
-          <a:ln>
-            <a:noFill/>
-          </a:ln>
-          <a:effectLst/>
-        </p:spPr>
-        <p:style>
-          <a:lnRef idx="1">
-            <a:schemeClr val="accent1"/>
-          </a:lnRef>
-          <a:fillRef idx="3">
-            <a:schemeClr val="accent1"/>
-          </a:fillRef>
-          <a:effectRef idx="2">
-            <a:schemeClr val="accent1"/>
-          </a:effectRef>
-          <a:fontRef idx="minor">
-            <a:schemeClr val="lt1"/>
-          </a:fontRef>
-        </p:style>
-        <p:txBody>
-          <a:bodyPr rtlCol="0" anchor="ctr"/>
-          <a:lstStyle/>
-          <a:p>
-            <a:pPr algn="ctr"/>
-          </a:p>
-        </p:txBody>
-      </p:sp>
-      <p:sp>
-        <p:nvSpPr>
-          <p:cNvPr id="10" name="TextBox 9"/>
-          <p:cNvSpPr txBox="1"/>
-          <p:nvPr/>
-        </p:nvSpPr>
-        <p:spPr>
-          <a:xfrm>
-            <a:off x="5029200" y="1554480"/>
-            <a:ext cx="1874519" cy="1005840"/>
-          </a:xfrm>
-          <a:prstGeom prst="rect">
-            <a:avLst/>
-          </a:prstGeom>
-          <a:noFill/>
-        </p:spPr>
-        <p:txBody>
-          <a:bodyPr wrap="square" anchor="ctr" lIns="0" rIns="0" tIns="0" bIns="0">
-            <a:spAutoFit/>
-          </a:bodyPr>
-          <a:lstStyle/>
-          <a:p>
-            <a:pPr algn="ctr">
-              <a:lnSpc>
-                <a:spcPct val="115000"/>
-              </a:lnSpc>
-            </a:pPr>
-            <a:r>
-              <a:rPr sz="1300" b="1" i="0">
-                <a:solidFill>
-                  <a:srgbClr val="2C5A44"/>
-                </a:solidFill>
-                <a:latin typeface="Calibri"/>
-              </a:rPr>
-              <a:t>Week 3</a:t>
-            </a:r>
-          </a:p>
-          <a:p>
-            <a:pPr algn="ctr">
-              <a:lnSpc>
-                <a:spcPct val="115000"/>
-              </a:lnSpc>
-            </a:pPr>
-            <a:r>
-              <a:rPr sz="1300" b="1" i="0">
-                <a:solidFill>
-                  <a:srgbClr val="2C5A44"/>
-                </a:solidFill>
-                <a:latin typeface="Calibri"/>
-              </a:rPr>
-              <a:t>AI + Automation</a:t>
-            </a:r>
-          </a:p>
-        </p:txBody>
-      </p:sp>
-      <p:sp>
-        <p:nvSpPr>
-          <p:cNvPr id="11" name="TextBox 10"/>
-          <p:cNvSpPr txBox="1"/>
-          <p:nvPr/>
-        </p:nvSpPr>
-        <p:spPr>
-          <a:xfrm>
-            <a:off x="6931152" y="1554480"/>
-            <a:ext cx="365760" cy="1005840"/>
-          </a:xfrm>
-          <a:prstGeom prst="rect">
-            <a:avLst/>
-          </a:prstGeom>
-          <a:noFill/>
-        </p:spPr>
-        <p:txBody>
-          <a:bodyPr wrap="square" anchor="ctr" lIns="0" rIns="0" tIns="0" bIns="0">
-            <a:spAutoFit/>
-          </a:bodyPr>
-          <a:lstStyle/>
-          <a:p>
-            <a:pPr algn="ctr">
-              <a:lnSpc>
-                <a:spcPct val="115000"/>
-              </a:lnSpc>
-            </a:pPr>
-            <a:r>
-              <a:rPr sz="1800" b="1" i="0">
-                <a:solidFill>
-                  <a:srgbClr val="5B6A5F"/>
-                </a:solidFill>
-                <a:latin typeface="Calibri"/>
-              </a:rPr>
-              <a:t>→</a:t>
-            </a:r>
-          </a:p>
-        </p:txBody>
-      </p:sp>
-      <p:sp>
-        <p:nvSpPr>
-          <p:cNvPr id="12" name="Rounded Rectangle 11"/>
-          <p:cNvSpPr/>
-          <p:nvPr/>
-        </p:nvSpPr>
-        <p:spPr>
-          <a:xfrm>
-            <a:off x="7132320" y="1554480"/>
-            <a:ext cx="1874519" cy="1005840"/>
-          </a:xfrm>
-          <a:prstGeom prst="roundRect">
-            <a:avLst>
-              <a:gd name="adj" fmla="val 10000"/>
-            </a:avLst>
-          </a:prstGeom>
-          <a:solidFill>
-            <a:srgbClr val="DD6B42"/>
-          </a:solidFill>
-          <a:ln>
-            <a:noFill/>
-          </a:ln>
-          <a:effectLst/>
-        </p:spPr>
-        <p:style>
-          <a:lnRef idx="1">
-            <a:schemeClr val="accent1"/>
-          </a:lnRef>
-          <a:fillRef idx="3">
-            <a:schemeClr val="accent1"/>
-          </a:fillRef>
-          <a:effectRef idx="2">
-            <a:schemeClr val="accent1"/>
-          </a:effectRef>
-          <a:fontRef idx="minor">
-            <a:schemeClr val="lt1"/>
-          </a:fontRef>
-        </p:style>
-        <p:txBody>
-          <a:bodyPr rtlCol="0" anchor="ctr"/>
-          <a:lstStyle/>
-          <a:p>
-            <a:pPr algn="ctr"/>
-          </a:p>
-        </p:txBody>
-      </p:sp>
-      <p:sp>
-        <p:nvSpPr>
-          <p:cNvPr id="13" name="TextBox 12"/>
-          <p:cNvSpPr txBox="1"/>
-          <p:nvPr/>
-        </p:nvSpPr>
-        <p:spPr>
-          <a:xfrm>
-            <a:off x="7132320" y="1554480"/>
-            <a:ext cx="1874519" cy="1005840"/>
-          </a:xfrm>
-          <a:prstGeom prst="rect">
-            <a:avLst/>
-          </a:prstGeom>
-          <a:noFill/>
-        </p:spPr>
-        <p:txBody>
-          <a:bodyPr wrap="square" anchor="ctr" lIns="0" rIns="0" tIns="0" bIns="0">
-            <a:spAutoFit/>
-          </a:bodyPr>
-          <a:lstStyle/>
-          <a:p>
-            <a:pPr algn="ctr">
-              <a:lnSpc>
-                <a:spcPct val="115000"/>
-              </a:lnSpc>
-            </a:pPr>
-            <a:r>
-              <a:rPr sz="1300" b="1" i="0">
-                <a:solidFill>
-                  <a:srgbClr val="FFFFFF"/>
-                </a:solidFill>
-                <a:latin typeface="Calibri"/>
-              </a:rPr>
-              <a:t>Week 4</a:t>
-            </a:r>
-          </a:p>
-          <a:p>
-            <a:pPr algn="ctr">
-              <a:lnSpc>
-                <a:spcPct val="115000"/>
-              </a:lnSpc>
-            </a:pPr>
-            <a:r>
-              <a:rPr sz="1300" b="1" i="0">
-                <a:solidFill>
-                  <a:srgbClr val="FFFFFF"/>
-                </a:solidFill>
-                <a:latin typeface="Calibri"/>
-              </a:rPr>
-              <a:t>User Finding</a:t>
-            </a:r>
-          </a:p>
-        </p:txBody>
-      </p:sp>
-      <p:sp>
-        <p:nvSpPr>
-          <p:cNvPr id="14" name="TextBox 13"/>
-          <p:cNvSpPr txBox="1"/>
-          <p:nvPr/>
-        </p:nvSpPr>
-        <p:spPr>
-          <a:xfrm>
-            <a:off x="9034272" y="1554480"/>
-            <a:ext cx="365760" cy="1005840"/>
-          </a:xfrm>
-          <a:prstGeom prst="rect">
-            <a:avLst/>
-          </a:prstGeom>
-          <a:noFill/>
-        </p:spPr>
-        <p:txBody>
-          <a:bodyPr wrap="square" anchor="ctr" lIns="0" rIns="0" tIns="0" bIns="0">
-            <a:spAutoFit/>
-          </a:bodyPr>
-          <a:lstStyle/>
-          <a:p>
-            <a:pPr algn="ctr">
-              <a:lnSpc>
-                <a:spcPct val="115000"/>
-              </a:lnSpc>
-            </a:pPr>
-            <a:r>
-              <a:rPr sz="1800" b="1" i="0">
-                <a:solidFill>
-                  <a:srgbClr val="5B6A5F"/>
-                </a:solidFill>
-                <a:latin typeface="Calibri"/>
-              </a:rPr>
-              <a:t>→</a:t>
-            </a:r>
-          </a:p>
-        </p:txBody>
-      </p:sp>
-      <p:sp>
-        <p:nvSpPr>
-          <p:cNvPr id="15" name="Rounded Rectangle 14"/>
-          <p:cNvSpPr/>
-          <p:nvPr/>
-        </p:nvSpPr>
-        <p:spPr>
-          <a:xfrm>
-            <a:off x="9235440" y="1554480"/>
-            <a:ext cx="1874519" cy="1005840"/>
-          </a:xfrm>
-          <a:prstGeom prst="roundRect">
-            <a:avLst>
-              <a:gd name="adj" fmla="val 10000"/>
-            </a:avLst>
-          </a:prstGeom>
-          <a:solidFill>
-            <a:srgbClr val="DD6B42"/>
-          </a:solidFill>
-          <a:ln>
-            <a:noFill/>
-          </a:ln>
-          <a:effectLst/>
-        </p:spPr>
-        <p:style>
-          <a:lnRef idx="1">
-            <a:schemeClr val="accent1"/>
-          </a:lnRef>
-          <a:fillRef idx="3">
-            <a:schemeClr val="accent1"/>
-          </a:fillRef>
-          <a:effectRef idx="2">
-            <a:schemeClr val="accent1"/>
-          </a:effectRef>
-          <a:fontRef idx="minor">
-            <a:schemeClr val="lt1"/>
-          </a:fontRef>
-        </p:style>
-        <p:txBody>
-          <a:bodyPr rtlCol="0" anchor="ctr"/>
-          <a:lstStyle/>
-          <a:p>
-            <a:pPr algn="ctr"/>
-          </a:p>
-        </p:txBody>
-      </p:sp>
-      <p:sp>
-        <p:nvSpPr>
-          <p:cNvPr id="16" name="TextBox 15"/>
-          <p:cNvSpPr txBox="1"/>
-          <p:nvPr/>
-        </p:nvSpPr>
-        <p:spPr>
-          <a:xfrm>
-            <a:off x="9235440" y="1554480"/>
-            <a:ext cx="1874519" cy="1005840"/>
-          </a:xfrm>
-          <a:prstGeom prst="rect">
-            <a:avLst/>
-          </a:prstGeom>
-          <a:noFill/>
-        </p:spPr>
-        <p:txBody>
-          <a:bodyPr wrap="square" anchor="ctr" lIns="0" rIns="0" tIns="0" bIns="0">
-            <a:spAutoFit/>
-          </a:bodyPr>
-          <a:lstStyle/>
-          <a:p>
-            <a:pPr algn="ctr">
-              <a:lnSpc>
-                <a:spcPct val="115000"/>
-              </a:lnSpc>
-            </a:pPr>
-            <a:r>
-              <a:rPr sz="1300" b="1" i="0">
-                <a:solidFill>
-                  <a:srgbClr val="FFFFFF"/>
-                </a:solidFill>
-                <a:latin typeface="Calibri"/>
-              </a:rPr>
-              <a:t>Week 5</a:t>
-            </a:r>
-          </a:p>
-          <a:p>
-            <a:pPr algn="ctr">
-              <a:lnSpc>
-                <a:spcPct val="115000"/>
-              </a:lnSpc>
-            </a:pPr>
-            <a:r>
-              <a:rPr sz="1300" b="1" i="0">
-                <a:solidFill>
-                  <a:srgbClr val="FFFFFF"/>
-                </a:solidFill>
-                <a:latin typeface="Calibri"/>
-              </a:rPr>
-              <a:t>Redesigned Rewards</a:t>
-            </a:r>
-          </a:p>
-        </p:txBody>
-      </p:sp>
-      <p:sp>
-        <p:nvSpPr>
-          <p:cNvPr id="17" name="Rounded Rectangle 16"/>
-          <p:cNvSpPr/>
-          <p:nvPr/>
-        </p:nvSpPr>
-        <p:spPr>
-          <a:xfrm>
-            <a:off x="822960" y="3063240"/>
-            <a:ext cx="10515600" cy="3017520"/>
-          </a:xfrm>
-          <a:prstGeom prst="roundRect">
-            <a:avLst>
-              <a:gd name="adj" fmla="val 10000"/>
-            </a:avLst>
-          </a:prstGeom>
-          <a:solidFill>
-            <a:srgbClr val="DCE8D9"/>
-          </a:solidFill>
-          <a:ln>
-            <a:noFill/>
-          </a:ln>
-          <a:effectLst/>
-        </p:spPr>
-        <p:style>
-          <a:lnRef idx="1">
-            <a:schemeClr val="accent1"/>
-          </a:lnRef>
-          <a:fillRef idx="3">
-            <a:schemeClr val="accent1"/>
-          </a:fillRef>
-          <a:effectRef idx="2">
-            <a:schemeClr val="accent1"/>
-          </a:effectRef>
-          <a:fontRef idx="minor">
-            <a:schemeClr val="lt1"/>
-          </a:fontRef>
-        </p:style>
-        <p:txBody>
-          <a:bodyPr rtlCol="0" anchor="ctr"/>
-          <a:lstStyle/>
-          <a:p>
-            <a:pPr algn="ctr"/>
-          </a:p>
-        </p:txBody>
-      </p:sp>
-      <p:sp>
-        <p:nvSpPr>
-          <p:cNvPr id="18" name="TextBox 17"/>
-          <p:cNvSpPr txBox="1"/>
-          <p:nvPr/>
-        </p:nvSpPr>
-        <p:spPr>
-          <a:xfrm>
-            <a:off x="1188720" y="3337560"/>
-            <a:ext cx="9784080" cy="457200"/>
-          </a:xfrm>
-          <a:prstGeom prst="rect">
-            <a:avLst/>
-          </a:prstGeom>
-          <a:noFill/>
-        </p:spPr>
-        <p:txBody>
-          <a:bodyPr wrap="square" anchor="t" lIns="0" rIns="0" tIns="0" bIns="0">
-            <a:spAutoFit/>
-          </a:bodyPr>
-          <a:lstStyle/>
-          <a:p>
-            <a:pPr algn="l">
-              <a:lnSpc>
-                <a:spcPct val="115000"/>
-              </a:lnSpc>
-            </a:pPr>
-            <a:r>
-              <a:rPr sz="1200" b="1" i="0">
-                <a:solidFill>
-                  <a:srgbClr val="3E7A5C"/>
-                </a:solidFill>
-                <a:latin typeface="Calibri"/>
-              </a:rPr>
-              <a:t>THE FINDING</a:t>
-            </a:r>
-          </a:p>
-        </p:txBody>
-      </p:sp>
-      <p:sp>
-        <p:nvSpPr>
-          <p:cNvPr id="19" name="TextBox 18"/>
-          <p:cNvSpPr txBox="1"/>
-          <p:nvPr/>
-        </p:nvSpPr>
-        <p:spPr>
-          <a:xfrm>
-            <a:off x="1188720" y="3794760"/>
-            <a:ext cx="9784080" cy="731520"/>
-          </a:xfrm>
-          <a:prstGeom prst="rect">
-            <a:avLst/>
-          </a:prstGeom>
-          <a:noFill/>
-        </p:spPr>
-        <p:txBody>
-          <a:bodyPr wrap="square" anchor="t" lIns="0" rIns="0" tIns="0" bIns="0">
-            <a:spAutoFit/>
-          </a:bodyPr>
-          <a:lstStyle/>
-          <a:p>
-            <a:pPr algn="l">
-              <a:lnSpc>
-                <a:spcPct val="115000"/>
-              </a:lnSpc>
-            </a:pPr>
-            <a:r>
-              <a:rPr sz="1700" b="1" i="0">
-                <a:solidFill>
-                  <a:srgbClr val="2C5A44"/>
-                </a:solidFill>
-                <a:latin typeface="Cambria"/>
-              </a:rPr>
-              <a:t>This is a general habit-formation problem, not a kid-control problem.</a:t>
-            </a:r>
-          </a:p>
-        </p:txBody>
-      </p:sp>
-      <p:sp>
-        <p:nvSpPr>
-          <p:cNvPr id="20" name="TextBox 19"/>
-          <p:cNvSpPr txBox="1"/>
-          <p:nvPr/>
-        </p:nvSpPr>
-        <p:spPr>
-          <a:xfrm>
-            <a:off x="1188720" y="4572000"/>
-            <a:ext cx="9784080" cy="457200"/>
-          </a:xfrm>
-          <a:prstGeom prst="rect">
-            <a:avLst/>
-          </a:prstGeom>
-          <a:noFill/>
-        </p:spPr>
-        <p:txBody>
-          <a:bodyPr wrap="square" anchor="t" lIns="0" rIns="0" tIns="0" bIns="0">
-            <a:spAutoFit/>
-          </a:bodyPr>
-          <a:lstStyle/>
-          <a:p>
-            <a:pPr algn="l">
-              <a:lnSpc>
-                <a:spcPct val="115000"/>
-              </a:lnSpc>
-            </a:pPr>
-            <a:r>
-              <a:rPr sz="1200" b="1" i="0">
-                <a:solidFill>
-                  <a:srgbClr val="DD6B42"/>
-                </a:solidFill>
-                <a:latin typeface="Calibri"/>
-              </a:rPr>
-              <a:t>THE FEATURE CHANGE</a:t>
-            </a:r>
-          </a:p>
-        </p:txBody>
-      </p:sp>
-      <p:sp>
-        <p:nvSpPr>
-          <p:cNvPr id="21" name="TextBox 20"/>
-          <p:cNvSpPr txBox="1"/>
-          <p:nvPr/>
-        </p:nvSpPr>
-        <p:spPr>
-          <a:xfrm>
-            <a:off x="1188720" y="4983480"/>
-            <a:ext cx="9784080" cy="914400"/>
-          </a:xfrm>
-          <a:prstGeom prst="rect">
-            <a:avLst/>
-          </a:prstGeom>
-          <a:noFill/>
-        </p:spPr>
-        <p:txBody>
-          <a:bodyPr wrap="square" anchor="t" lIns="0" rIns="0" tIns="0" bIns="0">
-            <a:spAutoFit/>
-          </a:bodyPr>
-          <a:lstStyle/>
-          <a:p>
-            <a:pPr algn="l">
-              <a:lnSpc>
-                <a:spcPct val="125000"/>
-              </a:lnSpc>
-            </a:pPr>
-            <a:r>
-              <a:rPr sz="1500" b="0" i="0">
-                <a:solidFill>
-                  <a:srgbClr val="1F2D22"/>
-                </a:solidFill>
-                <a:latin typeface="Calibri"/>
-              </a:rPr>
-              <a:t>All-or-nothing unlock rejected in favor of per-goal minute banking — partial effort is always rewarded, and finishing everything is still the biggest win.</a:t>
-            </a:r>
-          </a:p>
-        </p:txBody>
-      </p:sp>
-    </p:spTree>
-  </p:cSld>
-  <p:clrMapOvr>
-    <a:masterClrMapping/>
-  </p:clrMapOvr>
-</p:sld>
-</file>
-
-<file path=ppt/slides/slide9.xml><?xml version="1.0" encoding="utf-8"?>
 <p:sld xmlns:a="http://schemas.openxmlformats.org/drawingml/2006/main" xmlns:p="http://schemas.openxmlformats.org/presentationml/2006/main" xmlns:r="http://schemas.openxmlformats.org/officeDocument/2006/relationships">
   <p:cSld>
     <p:bg>
@@ -9377,8 +7686,8 @@
         </p:nvSpPr>
         <p:spPr>
           <a:xfrm>
-            <a:off x="822960" y="822960"/>
-            <a:ext cx="9601200" cy="731520"/>
+            <a:off x="822960" y="502920"/>
+            <a:ext cx="10332720" cy="731520"/>
           </a:xfrm>
           <a:prstGeom prst="rect">
             <a:avLst/>
@@ -9397,27 +7706,270 @@
               </a:lnSpc>
             </a:pPr>
             <a:r>
-              <a:rPr sz="3600" b="1" i="0">
+              <a:rPr sz="3200" b="1" i="0">
                 <a:solidFill>
                   <a:srgbClr val="FFFFFF"/>
                 </a:solidFill>
                 <a:latin typeface="Cambria"/>
               </a:rPr>
-              <a:t>Try It Yourself</a:t>
-            </a:r>
-          </a:p>
-        </p:txBody>
-      </p:sp>
-      <p:sp>
-        <p:nvSpPr>
-          <p:cNvPr id="3" name="Rounded Rectangle 2"/>
+              <a:t>It's Real — Try It Yourself</a:t>
+            </a:r>
+          </a:p>
+        </p:txBody>
+      </p:sp>
+      <p:sp>
+        <p:nvSpPr>
+          <p:cNvPr id="3" name="TextBox 2"/>
+          <p:cNvSpPr txBox="1"/>
+          <p:nvPr/>
+        </p:nvSpPr>
+        <p:spPr>
+          <a:xfrm>
+            <a:off x="822960" y="1188720"/>
+            <a:ext cx="9601200" cy="457200"/>
+          </a:xfrm>
+          <a:prstGeom prst="rect">
+            <a:avLst/>
+          </a:prstGeom>
+          <a:noFill/>
+        </p:spPr>
+        <p:txBody>
+          <a:bodyPr wrap="square" anchor="t" lIns="0" rIns="0" tIns="0" bIns="0">
+            <a:spAutoFit/>
+          </a:bodyPr>
+          <a:lstStyle/>
+          <a:p>
+            <a:pPr algn="l">
+              <a:lnSpc>
+                <a:spcPct val="115000"/>
+              </a:lnSpc>
+            </a:pPr>
+            <a:r>
+              <a:rPr sz="1400" b="0" i="0">
+                <a:solidFill>
+                  <a:srgbClr val="DCE8D9"/>
+                </a:solidFill>
+                <a:latin typeface="Calibri"/>
+              </a:rPr>
+              <a:t>Every feature below is live, clickable, and running right now.</a:t>
+            </a:r>
+          </a:p>
+        </p:txBody>
+      </p:sp>
+      <p:sp>
+        <p:nvSpPr>
+          <p:cNvPr id="4" name="Rounded Rectangle 3"/>
           <p:cNvSpPr/>
           <p:nvPr/>
         </p:nvSpPr>
         <p:spPr>
           <a:xfrm>
-            <a:off x="822960" y="1920240"/>
-            <a:ext cx="10515600" cy="1188720"/>
+            <a:off x="822960" y="1828800"/>
+            <a:ext cx="5486400" cy="4572000"/>
+          </a:xfrm>
+          <a:prstGeom prst="roundRect">
+            <a:avLst>
+              <a:gd name="adj" fmla="val 10000"/>
+            </a:avLst>
+          </a:prstGeom>
+          <a:solidFill>
+            <a:srgbClr val="2C5A44"/>
+          </a:solidFill>
+          <a:ln>
+            <a:noFill/>
+          </a:ln>
+          <a:effectLst/>
+        </p:spPr>
+        <p:style>
+          <a:lnRef idx="1">
+            <a:schemeClr val="accent1"/>
+          </a:lnRef>
+          <a:fillRef idx="3">
+            <a:schemeClr val="accent1"/>
+          </a:fillRef>
+          <a:effectRef idx="2">
+            <a:schemeClr val="accent1"/>
+          </a:effectRef>
+          <a:fontRef idx="minor">
+            <a:schemeClr val="lt1"/>
+          </a:fontRef>
+        </p:style>
+        <p:txBody>
+          <a:bodyPr rtlCol="0" anchor="ctr"/>
+          <a:lstStyle/>
+          <a:p>
+            <a:pPr algn="ctr"/>
+          </a:p>
+        </p:txBody>
+      </p:sp>
+      <p:sp>
+        <p:nvSpPr>
+          <p:cNvPr id="5" name="TextBox 4"/>
+          <p:cNvSpPr txBox="1"/>
+          <p:nvPr/>
+        </p:nvSpPr>
+        <p:spPr>
+          <a:xfrm>
+            <a:off x="1188720" y="2103120"/>
+            <a:ext cx="4846320" cy="457200"/>
+          </a:xfrm>
+          <a:prstGeom prst="rect">
+            <a:avLst/>
+          </a:prstGeom>
+          <a:noFill/>
+        </p:spPr>
+        <p:txBody>
+          <a:bodyPr wrap="square" anchor="t" lIns="0" rIns="0" tIns="0" bIns="0">
+            <a:spAutoFit/>
+          </a:bodyPr>
+          <a:lstStyle/>
+          <a:p>
+            <a:pPr algn="l">
+              <a:lnSpc>
+                <a:spcPct val="115000"/>
+              </a:lnSpc>
+            </a:pPr>
+            <a:r>
+              <a:rPr sz="1200" b="1" i="0">
+                <a:solidFill>
+                  <a:srgbClr val="DCE8D9"/>
+                </a:solidFill>
+                <a:latin typeface="Calibri"/>
+              </a:rPr>
+              <a:t>WHAT'S ACTUALLY WORKING</a:t>
+            </a:r>
+          </a:p>
+        </p:txBody>
+      </p:sp>
+      <p:sp>
+        <p:nvSpPr>
+          <p:cNvPr id="6" name="TextBox 5"/>
+          <p:cNvSpPr txBox="1"/>
+          <p:nvPr/>
+        </p:nvSpPr>
+        <p:spPr>
+          <a:xfrm>
+            <a:off x="1188720" y="2606040"/>
+            <a:ext cx="4846320" cy="3657600"/>
+          </a:xfrm>
+          <a:prstGeom prst="rect">
+            <a:avLst/>
+          </a:prstGeom>
+          <a:noFill/>
+        </p:spPr>
+        <p:txBody>
+          <a:bodyPr wrap="square" lIns="0" rIns="0" tIns="0" bIns="0">
+            <a:spAutoFit/>
+          </a:bodyPr>
+          <a:lstStyle/>
+          <a:p>
+            <a:pPr indent="-201168" marL="201168">
+              <a:lnSpc>
+                <a:spcPct val="115000"/>
+              </a:lnSpc>
+              <a:spcAft>
+                <a:spcPts val="2000"/>
+              </a:spcAft>
+              <a:buClr>
+                <a:srgbClr val="3E7A5C"/>
+              </a:buClr>
+              <a:buFont typeface="Arial"/>
+              <a:buChar char="✓"/>
+            </a:pPr>
+            <a:r>
+              <a:rPr sz="1450">
+                <a:solidFill>
+                  <a:srgbClr val="FFFFFF"/>
+                </a:solidFill>
+                <a:latin typeface="Calibri"/>
+              </a:rPr>
+              <a:t>Real photo upload and parent-PIN verification</a:t>
+            </a:r>
+          </a:p>
+          <a:p>
+            <a:pPr indent="-201168" marL="201168">
+              <a:lnSpc>
+                <a:spcPct val="115000"/>
+              </a:lnSpc>
+              <a:spcAft>
+                <a:spcPts val="2000"/>
+              </a:spcAft>
+              <a:buClr>
+                <a:srgbClr val="3E7A5C"/>
+              </a:buClr>
+              <a:buFont typeface="Arial"/>
+              <a:buChar char="✓"/>
+            </a:pPr>
+            <a:r>
+              <a:rPr sz="1450">
+                <a:solidFill>
+                  <a:srgbClr val="FFFFFF"/>
+                </a:solidFill>
+                <a:latin typeface="Calibri"/>
+              </a:rPr>
+              <a:t>A live countdown that spends banked minutes and warns before time runs out</a:t>
+            </a:r>
+          </a:p>
+          <a:p>
+            <a:pPr indent="-201168" marL="201168">
+              <a:lnSpc>
+                <a:spcPct val="115000"/>
+              </a:lnSpc>
+              <a:spcAft>
+                <a:spcPts val="2000"/>
+              </a:spcAft>
+              <a:buClr>
+                <a:srgbClr val="3E7A5C"/>
+              </a:buClr>
+              <a:buFont typeface="Arial"/>
+              <a:buChar char="✓"/>
+            </a:pPr>
+            <a:r>
+              <a:rPr sz="1450">
+                <a:solidFill>
+                  <a:srgbClr val="FFFFFF"/>
+                </a:solidFill>
+                <a:latin typeface="Calibri"/>
+              </a:rPr>
+              <a:t>State that persists day to day, with automatic daily reset</a:t>
+            </a:r>
+          </a:p>
+          <a:p>
+            <a:pPr indent="-201168" marL="201168">
+              <a:lnSpc>
+                <a:spcPct val="115000"/>
+              </a:lnSpc>
+              <a:spcAft>
+                <a:spcPts val="2000"/>
+              </a:spcAft>
+              <a:buClr>
+                <a:srgbClr val="3E7A5C"/>
+              </a:buClr>
+              <a:buFont typeface="Arial"/>
+              <a:buChar char="✓"/>
+            </a:pPr>
+            <a:r>
+              <a:rPr sz="1450">
+                <a:solidFill>
+                  <a:srgbClr val="FFFFFF"/>
+                </a:solidFill>
+                <a:latin typeface="Calibri"/>
+              </a:rPr>
+              <a:t>A parent dashboard to add goals, set rewards, and approve proof</a:t>
+            </a:r>
+          </a:p>
+        </p:txBody>
+      </p:sp>
+      <p:sp>
+        <p:nvSpPr>
+          <p:cNvPr id="7" name="Rounded Rectangle 6"/>
+          <p:cNvSpPr/>
+          <p:nvPr/>
+        </p:nvSpPr>
+        <p:spPr>
+          <a:xfrm>
+            <a:off x="6537960" y="1828800"/>
+            <a:ext cx="4846320" cy="1371600"/>
           </a:xfrm>
           <a:prstGeom prst="roundRect">
             <a:avLst>
@@ -9456,14 +8008,14 @@
       </p:sp>
       <p:sp>
         <p:nvSpPr>
-          <p:cNvPr id="4" name="TextBox 3"/>
+          <p:cNvPr id="8" name="TextBox 7"/>
           <p:cNvSpPr txBox="1"/>
           <p:nvPr/>
         </p:nvSpPr>
         <p:spPr>
           <a:xfrm>
-            <a:off x="1188720" y="2148840"/>
-            <a:ext cx="2377440" cy="731520"/>
+            <a:off x="6812280" y="2011680"/>
+            <a:ext cx="4297680" cy="365760"/>
           </a:xfrm>
           <a:prstGeom prst="rect">
             <a:avLst/>
@@ -9471,7 +8023,7 @@
           <a:noFill/>
         </p:spPr>
         <p:txBody>
-          <a:bodyPr wrap="square" anchor="ctr" lIns="0" rIns="0" tIns="0" bIns="0">
+          <a:bodyPr wrap="square" anchor="t" lIns="0" rIns="0" tIns="0" bIns="0">
             <a:spAutoFit/>
           </a:bodyPr>
           <a:lstStyle/>
@@ -9482,7 +8034,7 @@
               </a:lnSpc>
             </a:pPr>
             <a:r>
-              <a:rPr sz="1200" b="1" i="0">
+              <a:rPr sz="1100" b="1" i="0">
                 <a:solidFill>
                   <a:srgbClr val="FFFFFF"/>
                 </a:solidFill>
@@ -9495,14 +8047,14 @@
       </p:sp>
       <p:sp>
         <p:nvSpPr>
-          <p:cNvPr id="5" name="TextBox 4"/>
+          <p:cNvPr id="9" name="TextBox 8"/>
           <p:cNvSpPr txBox="1"/>
           <p:nvPr/>
         </p:nvSpPr>
         <p:spPr>
           <a:xfrm>
-            <a:off x="3566160" y="2103120"/>
-            <a:ext cx="7315200" cy="822960"/>
+            <a:off x="6812280" y="2423160"/>
+            <a:ext cx="4297680" cy="685800"/>
           </a:xfrm>
           <a:prstGeom prst="rect">
             <a:avLst/>
@@ -9510,7 +8062,7 @@
           <a:noFill/>
         </p:spPr>
         <p:txBody>
-          <a:bodyPr wrap="square" anchor="ctr" lIns="0" rIns="0" tIns="0" bIns="0">
+          <a:bodyPr wrap="square" anchor="t" lIns="0" rIns="0" tIns="0" bIns="0">
             <a:spAutoFit/>
           </a:bodyPr>
           <a:lstStyle/>
@@ -9521,7 +8073,7 @@
               </a:lnSpc>
             </a:pPr>
             <a:r>
-              <a:rPr sz="1500" b="1" i="0">
+              <a:rPr sz="1250" b="1" i="0">
                 <a:solidFill>
                   <a:srgbClr val="FFFFFF"/>
                 </a:solidFill>
@@ -9534,14 +8086,14 @@
       </p:sp>
       <p:sp>
         <p:nvSpPr>
-          <p:cNvPr id="6" name="Rounded Rectangle 5"/>
+          <p:cNvPr id="10" name="Rounded Rectangle 9"/>
           <p:cNvSpPr/>
           <p:nvPr/>
         </p:nvSpPr>
         <p:spPr>
           <a:xfrm>
-            <a:off x="822960" y="3291840"/>
-            <a:ext cx="10515600" cy="1188720"/>
+            <a:off x="6537960" y="3337560"/>
+            <a:ext cx="4846320" cy="1371600"/>
           </a:xfrm>
           <a:prstGeom prst="roundRect">
             <a:avLst>
@@ -9580,14 +8132,14 @@
       </p:sp>
       <p:sp>
         <p:nvSpPr>
-          <p:cNvPr id="7" name="TextBox 6"/>
+          <p:cNvPr id="11" name="TextBox 10"/>
           <p:cNvSpPr txBox="1"/>
           <p:nvPr/>
         </p:nvSpPr>
         <p:spPr>
           <a:xfrm>
-            <a:off x="1188720" y="3520440"/>
-            <a:ext cx="2377440" cy="731520"/>
+            <a:off x="6812280" y="3520440"/>
+            <a:ext cx="4297680" cy="365760"/>
           </a:xfrm>
           <a:prstGeom prst="rect">
             <a:avLst/>
@@ -9595,7 +8147,7 @@
           <a:noFill/>
         </p:spPr>
         <p:txBody>
-          <a:bodyPr wrap="square" anchor="ctr" lIns="0" rIns="0" tIns="0" bIns="0">
+          <a:bodyPr wrap="square" anchor="t" lIns="0" rIns="0" tIns="0" bIns="0">
             <a:spAutoFit/>
           </a:bodyPr>
           <a:lstStyle/>
@@ -9606,7 +8158,7 @@
               </a:lnSpc>
             </a:pPr>
             <a:r>
-              <a:rPr sz="1200" b="1" i="0">
+              <a:rPr sz="1100" b="1" i="0">
                 <a:solidFill>
                   <a:srgbClr val="FFFFFF"/>
                 </a:solidFill>
@@ -9619,14 +8171,14 @@
       </p:sp>
       <p:sp>
         <p:nvSpPr>
-          <p:cNvPr id="8" name="TextBox 7"/>
+          <p:cNvPr id="12" name="TextBox 11"/>
           <p:cNvSpPr txBox="1"/>
           <p:nvPr/>
         </p:nvSpPr>
         <p:spPr>
           <a:xfrm>
-            <a:off x="3566160" y="3474720"/>
-            <a:ext cx="7315200" cy="822960"/>
+            <a:off x="6812280" y="3931920"/>
+            <a:ext cx="4297680" cy="685800"/>
           </a:xfrm>
           <a:prstGeom prst="rect">
             <a:avLst/>
@@ -9634,7 +8186,7 @@
           <a:noFill/>
         </p:spPr>
         <p:txBody>
-          <a:bodyPr wrap="square" anchor="ctr" lIns="0" rIns="0" tIns="0" bIns="0">
+          <a:bodyPr wrap="square" anchor="t" lIns="0" rIns="0" tIns="0" bIns="0">
             <a:spAutoFit/>
           </a:bodyPr>
           <a:lstStyle/>
@@ -9645,7 +8197,7 @@
               </a:lnSpc>
             </a:pPr>
             <a:r>
-              <a:rPr sz="1500" b="1" i="0">
+              <a:rPr sz="1350" b="1" i="0">
                 <a:solidFill>
                   <a:srgbClr val="FFFFFF"/>
                 </a:solidFill>
@@ -9658,14 +8210,14 @@
       </p:sp>
       <p:sp>
         <p:nvSpPr>
-          <p:cNvPr id="9" name="Rounded Rectangle 8"/>
+          <p:cNvPr id="13" name="Rounded Rectangle 12"/>
           <p:cNvSpPr/>
           <p:nvPr/>
         </p:nvSpPr>
         <p:spPr>
           <a:xfrm>
-            <a:off x="822960" y="4663440"/>
-            <a:ext cx="10515600" cy="1188720"/>
+            <a:off x="6537960" y="4846320"/>
+            <a:ext cx="4846320" cy="1371600"/>
           </a:xfrm>
           <a:prstGeom prst="roundRect">
             <a:avLst>
@@ -9704,14 +8256,14 @@
       </p:sp>
       <p:sp>
         <p:nvSpPr>
-          <p:cNvPr id="10" name="TextBox 9"/>
+          <p:cNvPr id="14" name="TextBox 13"/>
           <p:cNvSpPr txBox="1"/>
           <p:nvPr/>
         </p:nvSpPr>
         <p:spPr>
           <a:xfrm>
-            <a:off x="1188720" y="4892040"/>
-            <a:ext cx="2377440" cy="731520"/>
+            <a:off x="6812280" y="5029200"/>
+            <a:ext cx="4297680" cy="365760"/>
           </a:xfrm>
           <a:prstGeom prst="rect">
             <a:avLst/>
@@ -9719,7 +8271,7 @@
           <a:noFill/>
         </p:spPr>
         <p:txBody>
-          <a:bodyPr wrap="square" anchor="ctr" lIns="0" rIns="0" tIns="0" bIns="0">
+          <a:bodyPr wrap="square" anchor="t" lIns="0" rIns="0" tIns="0" bIns="0">
             <a:spAutoFit/>
           </a:bodyPr>
           <a:lstStyle/>
@@ -9730,7 +8282,7 @@
               </a:lnSpc>
             </a:pPr>
             <a:r>
-              <a:rPr sz="1200" b="1" i="0">
+              <a:rPr sz="1100" b="1" i="0">
                 <a:solidFill>
                   <a:srgbClr val="1F3D2B"/>
                 </a:solidFill>
@@ -9743,14 +8295,14 @@
       </p:sp>
       <p:sp>
         <p:nvSpPr>
-          <p:cNvPr id="11" name="TextBox 10"/>
+          <p:cNvPr id="15" name="TextBox 14"/>
           <p:cNvSpPr txBox="1"/>
           <p:nvPr/>
         </p:nvSpPr>
         <p:spPr>
           <a:xfrm>
-            <a:off x="3566160" y="4846320"/>
-            <a:ext cx="7315200" cy="822960"/>
+            <a:off x="6812280" y="5394960"/>
+            <a:ext cx="4297680" cy="685800"/>
           </a:xfrm>
           <a:prstGeom prst="rect">
             <a:avLst/>
@@ -9758,7 +8310,7 @@
           <a:noFill/>
         </p:spPr>
         <p:txBody>
-          <a:bodyPr wrap="square" anchor="ctr" lIns="0" rIns="0" tIns="0" bIns="0">
+          <a:bodyPr wrap="square" anchor="t" lIns="0" rIns="0" tIns="0" bIns="0">
             <a:spAutoFit/>
           </a:bodyPr>
           <a:lstStyle/>
@@ -9776,6 +8328,474 @@
                 <a:latin typeface="Cambria"/>
               </a:rPr>
               <a:t>1234</a:t>
+            </a:r>
+          </a:p>
+        </p:txBody>
+      </p:sp>
+    </p:spTree>
+  </p:cSld>
+  <p:clrMapOvr>
+    <a:masterClrMapping/>
+  </p:clrMapOvr>
+</p:sld>
+</file>
+
+<file path=ppt/slides/slide8.xml><?xml version="1.0" encoding="utf-8"?>
+<p:sld xmlns:a="http://schemas.openxmlformats.org/drawingml/2006/main" xmlns:p="http://schemas.openxmlformats.org/presentationml/2006/main" xmlns:r="http://schemas.openxmlformats.org/officeDocument/2006/relationships">
+  <p:cSld>
+    <p:bg>
+      <p:bgPr>
+        <a:solidFill>
+          <a:srgbClr val="1F3D2B"/>
+        </a:solidFill>
+        <a:effectLst/>
+      </p:bgPr>
+    </p:bg>
+    <p:spTree>
+      <p:nvGrpSpPr>
+        <p:cNvPr id="1" name=""/>
+        <p:cNvGrpSpPr/>
+        <p:nvPr/>
+      </p:nvGrpSpPr>
+      <p:grpSpPr/>
+      <p:sp>
+        <p:nvSpPr>
+          <p:cNvPr id="2" name="TextBox 1"/>
+          <p:cNvSpPr txBox="1"/>
+          <p:nvPr/>
+        </p:nvSpPr>
+        <p:spPr>
+          <a:xfrm>
+            <a:off x="822960" y="640080"/>
+            <a:ext cx="9601200" cy="822960"/>
+          </a:xfrm>
+          <a:prstGeom prst="rect">
+            <a:avLst/>
+          </a:prstGeom>
+          <a:noFill/>
+        </p:spPr>
+        <p:txBody>
+          <a:bodyPr wrap="square" anchor="t" lIns="0" rIns="0" tIns="0" bIns="0">
+            <a:spAutoFit/>
+          </a:bodyPr>
+          <a:lstStyle/>
+          <a:p>
+            <a:pPr algn="l">
+              <a:lnSpc>
+                <a:spcPct val="115000"/>
+              </a:lnSpc>
+            </a:pPr>
+            <a:r>
+              <a:rPr sz="3600" b="1" i="0">
+                <a:solidFill>
+                  <a:srgbClr val="FFFFFF"/>
+                </a:solidFill>
+                <a:latin typeface="Cambria"/>
+              </a:rPr>
+              <a:t>Why Health First Wins</a:t>
+            </a:r>
+          </a:p>
+        </p:txBody>
+      </p:sp>
+      <p:sp>
+        <p:nvSpPr>
+          <p:cNvPr id="3" name="Oval 2"/>
+          <p:cNvSpPr/>
+          <p:nvPr/>
+        </p:nvSpPr>
+        <p:spPr>
+          <a:xfrm>
+            <a:off x="1097280" y="1828800"/>
+            <a:ext cx="640080" cy="640080"/>
+          </a:xfrm>
+          <a:prstGeom prst="ellipse">
+            <a:avLst/>
+          </a:prstGeom>
+          <a:solidFill>
+            <a:srgbClr val="3E7A5C"/>
+          </a:solidFill>
+          <a:ln>
+            <a:noFill/>
+          </a:ln>
+          <a:effectLst/>
+        </p:spPr>
+        <p:style>
+          <a:lnRef idx="1">
+            <a:schemeClr val="accent1"/>
+          </a:lnRef>
+          <a:fillRef idx="3">
+            <a:schemeClr val="accent1"/>
+          </a:fillRef>
+          <a:effectRef idx="2">
+            <a:schemeClr val="accent1"/>
+          </a:effectRef>
+          <a:fontRef idx="minor">
+            <a:schemeClr val="lt1"/>
+          </a:fontRef>
+        </p:style>
+        <p:txBody>
+          <a:bodyPr rtlCol="0" anchor="ctr" lIns="0" rIns="0" tIns="0" bIns="0" wrap="none"/>
+          <a:lstStyle/>
+          <a:p>
+            <a:pPr algn="ctr"/>
+            <a:r>
+              <a:rPr sz="1900">
+                <a:solidFill>
+                  <a:srgbClr val="FFFFFF"/>
+                </a:solidFill>
+              </a:rPr>
+              <a:t>✓</a:t>
+            </a:r>
+          </a:p>
+        </p:txBody>
+      </p:sp>
+      <p:sp>
+        <p:nvSpPr>
+          <p:cNvPr id="4" name="TextBox 3"/>
+          <p:cNvSpPr txBox="1"/>
+          <p:nvPr/>
+        </p:nvSpPr>
+        <p:spPr>
+          <a:xfrm>
+            <a:off x="2103120" y="1828800"/>
+            <a:ext cx="8961120" cy="822960"/>
+          </a:xfrm>
+          <a:prstGeom prst="rect">
+            <a:avLst/>
+          </a:prstGeom>
+          <a:noFill/>
+        </p:spPr>
+        <p:txBody>
+          <a:bodyPr wrap="square" anchor="ctr" lIns="0" rIns="0" tIns="0" bIns="0">
+            <a:spAutoFit/>
+          </a:bodyPr>
+          <a:lstStyle/>
+          <a:p>
+            <a:pPr algn="l">
+              <a:lnSpc>
+                <a:spcPct val="120000"/>
+              </a:lnSpc>
+            </a:pPr>
+            <a:r>
+              <a:rPr sz="1600" b="0" i="0">
+                <a:solidFill>
+                  <a:srgbClr val="FFFFFF"/>
+                </a:solidFill>
+                <a:latin typeface="Calibri"/>
+              </a:rPr>
+              <a:t>A real problem, validated with real people — one family's honest answer reshaped the whole reward system.</a:t>
+            </a:r>
+          </a:p>
+        </p:txBody>
+      </p:sp>
+      <p:sp>
+        <p:nvSpPr>
+          <p:cNvPr id="5" name="Oval 4"/>
+          <p:cNvSpPr/>
+          <p:nvPr/>
+        </p:nvSpPr>
+        <p:spPr>
+          <a:xfrm>
+            <a:off x="1097280" y="2788920"/>
+            <a:ext cx="640080" cy="640080"/>
+          </a:xfrm>
+          <a:prstGeom prst="ellipse">
+            <a:avLst/>
+          </a:prstGeom>
+          <a:solidFill>
+            <a:srgbClr val="3E7A5C"/>
+          </a:solidFill>
+          <a:ln>
+            <a:noFill/>
+          </a:ln>
+          <a:effectLst/>
+        </p:spPr>
+        <p:style>
+          <a:lnRef idx="1">
+            <a:schemeClr val="accent1"/>
+          </a:lnRef>
+          <a:fillRef idx="3">
+            <a:schemeClr val="accent1"/>
+          </a:fillRef>
+          <a:effectRef idx="2">
+            <a:schemeClr val="accent1"/>
+          </a:effectRef>
+          <a:fontRef idx="minor">
+            <a:schemeClr val="lt1"/>
+          </a:fontRef>
+        </p:style>
+        <p:txBody>
+          <a:bodyPr rtlCol="0" anchor="ctr" lIns="0" rIns="0" tIns="0" bIns="0" wrap="none"/>
+          <a:lstStyle/>
+          <a:p>
+            <a:pPr algn="ctr"/>
+            <a:r>
+              <a:rPr sz="1900">
+                <a:solidFill>
+                  <a:srgbClr val="FFFFFF"/>
+                </a:solidFill>
+              </a:rPr>
+              <a:t>✓</a:t>
+            </a:r>
+          </a:p>
+        </p:txBody>
+      </p:sp>
+      <p:sp>
+        <p:nvSpPr>
+          <p:cNvPr id="6" name="TextBox 5"/>
+          <p:cNvSpPr txBox="1"/>
+          <p:nvPr/>
+        </p:nvSpPr>
+        <p:spPr>
+          <a:xfrm>
+            <a:off x="2103120" y="2788920"/>
+            <a:ext cx="8961120" cy="822960"/>
+          </a:xfrm>
+          <a:prstGeom prst="rect">
+            <a:avLst/>
+          </a:prstGeom>
+          <a:noFill/>
+        </p:spPr>
+        <p:txBody>
+          <a:bodyPr wrap="square" anchor="ctr" lIns="0" rIns="0" tIns="0" bIns="0">
+            <a:spAutoFit/>
+          </a:bodyPr>
+          <a:lstStyle/>
+          <a:p>
+            <a:pPr algn="l">
+              <a:lnSpc>
+                <a:spcPct val="120000"/>
+              </a:lnSpc>
+            </a:pPr>
+            <a:r>
+              <a:rPr sz="1600" b="0" i="0">
+                <a:solidFill>
+                  <a:srgbClr val="FFFFFF"/>
+                </a:solidFill>
+                <a:latin typeface="Calibri"/>
+              </a:rPr>
+              <a:t>A real working product — every claim on this deck is a live, clickable feature.</a:t>
+            </a:r>
+          </a:p>
+        </p:txBody>
+      </p:sp>
+      <p:sp>
+        <p:nvSpPr>
+          <p:cNvPr id="7" name="Oval 6"/>
+          <p:cNvSpPr/>
+          <p:nvPr/>
+        </p:nvSpPr>
+        <p:spPr>
+          <a:xfrm>
+            <a:off x="1097280" y="3749039"/>
+            <a:ext cx="640080" cy="640080"/>
+          </a:xfrm>
+          <a:prstGeom prst="ellipse">
+            <a:avLst/>
+          </a:prstGeom>
+          <a:solidFill>
+            <a:srgbClr val="3E7A5C"/>
+          </a:solidFill>
+          <a:ln>
+            <a:noFill/>
+          </a:ln>
+          <a:effectLst/>
+        </p:spPr>
+        <p:style>
+          <a:lnRef idx="1">
+            <a:schemeClr val="accent1"/>
+          </a:lnRef>
+          <a:fillRef idx="3">
+            <a:schemeClr val="accent1"/>
+          </a:fillRef>
+          <a:effectRef idx="2">
+            <a:schemeClr val="accent1"/>
+          </a:effectRef>
+          <a:fontRef idx="minor">
+            <a:schemeClr val="lt1"/>
+          </a:fontRef>
+        </p:style>
+        <p:txBody>
+          <a:bodyPr rtlCol="0" anchor="ctr" lIns="0" rIns="0" tIns="0" bIns="0" wrap="none"/>
+          <a:lstStyle/>
+          <a:p>
+            <a:pPr algn="ctr"/>
+            <a:r>
+              <a:rPr sz="1900">
+                <a:solidFill>
+                  <a:srgbClr val="FFFFFF"/>
+                </a:solidFill>
+              </a:rPr>
+              <a:t>✓</a:t>
+            </a:r>
+          </a:p>
+        </p:txBody>
+      </p:sp>
+      <p:sp>
+        <p:nvSpPr>
+          <p:cNvPr id="8" name="TextBox 7"/>
+          <p:cNvSpPr txBox="1"/>
+          <p:nvPr/>
+        </p:nvSpPr>
+        <p:spPr>
+          <a:xfrm>
+            <a:off x="2103120" y="3749039"/>
+            <a:ext cx="8961120" cy="822960"/>
+          </a:xfrm>
+          <a:prstGeom prst="rect">
+            <a:avLst/>
+          </a:prstGeom>
+          <a:noFill/>
+        </p:spPr>
+        <p:txBody>
+          <a:bodyPr wrap="square" anchor="ctr" lIns="0" rIns="0" tIns="0" bIns="0">
+            <a:spAutoFit/>
+          </a:bodyPr>
+          <a:lstStyle/>
+          <a:p>
+            <a:pPr algn="l">
+              <a:lnSpc>
+                <a:spcPct val="120000"/>
+              </a:lnSpc>
+            </a:pPr>
+            <a:r>
+              <a:rPr sz="1600" b="0" i="0">
+                <a:solidFill>
+                  <a:srgbClr val="FFFFFF"/>
+                </a:solidFill>
+                <a:latin typeface="Calibri"/>
+              </a:rPr>
+              <a:t>A genuinely different model — reward, not restrict.</a:t>
+            </a:r>
+          </a:p>
+        </p:txBody>
+      </p:sp>
+      <p:sp>
+        <p:nvSpPr>
+          <p:cNvPr id="9" name="Oval 8"/>
+          <p:cNvSpPr/>
+          <p:nvPr/>
+        </p:nvSpPr>
+        <p:spPr>
+          <a:xfrm>
+            <a:off x="1097280" y="4709159"/>
+            <a:ext cx="640080" cy="640080"/>
+          </a:xfrm>
+          <a:prstGeom prst="ellipse">
+            <a:avLst/>
+          </a:prstGeom>
+          <a:solidFill>
+            <a:srgbClr val="3E7A5C"/>
+          </a:solidFill>
+          <a:ln>
+            <a:noFill/>
+          </a:ln>
+          <a:effectLst/>
+        </p:spPr>
+        <p:style>
+          <a:lnRef idx="1">
+            <a:schemeClr val="accent1"/>
+          </a:lnRef>
+          <a:fillRef idx="3">
+            <a:schemeClr val="accent1"/>
+          </a:fillRef>
+          <a:effectRef idx="2">
+            <a:schemeClr val="accent1"/>
+          </a:effectRef>
+          <a:fontRef idx="minor">
+            <a:schemeClr val="lt1"/>
+          </a:fontRef>
+        </p:style>
+        <p:txBody>
+          <a:bodyPr rtlCol="0" anchor="ctr" lIns="0" rIns="0" tIns="0" bIns="0" wrap="none"/>
+          <a:lstStyle/>
+          <a:p>
+            <a:pPr algn="ctr"/>
+            <a:r>
+              <a:rPr sz="1900">
+                <a:solidFill>
+                  <a:srgbClr val="FFFFFF"/>
+                </a:solidFill>
+              </a:rPr>
+              <a:t>✓</a:t>
+            </a:r>
+          </a:p>
+        </p:txBody>
+      </p:sp>
+      <p:sp>
+        <p:nvSpPr>
+          <p:cNvPr id="10" name="TextBox 9"/>
+          <p:cNvSpPr txBox="1"/>
+          <p:nvPr/>
+        </p:nvSpPr>
+        <p:spPr>
+          <a:xfrm>
+            <a:off x="2103120" y="4709159"/>
+            <a:ext cx="8961120" cy="822960"/>
+          </a:xfrm>
+          <a:prstGeom prst="rect">
+            <a:avLst/>
+          </a:prstGeom>
+          <a:noFill/>
+        </p:spPr>
+        <p:txBody>
+          <a:bodyPr wrap="square" anchor="ctr" lIns="0" rIns="0" tIns="0" bIns="0">
+            <a:spAutoFit/>
+          </a:bodyPr>
+          <a:lstStyle/>
+          <a:p>
+            <a:pPr algn="l">
+              <a:lnSpc>
+                <a:spcPct val="120000"/>
+              </a:lnSpc>
+            </a:pPr>
+            <a:r>
+              <a:rPr sz="1600" b="0" i="0">
+                <a:solidFill>
+                  <a:srgbClr val="FFFFFF"/>
+                </a:solidFill>
+                <a:latin typeface="Calibri"/>
+              </a:rPr>
+              <a:t>Built to scale beyond one house — any habit, any family, any culture.</a:t>
+            </a:r>
+          </a:p>
+        </p:txBody>
+      </p:sp>
+      <p:sp>
+        <p:nvSpPr>
+          <p:cNvPr id="11" name="TextBox 10"/>
+          <p:cNvSpPr txBox="1"/>
+          <p:nvPr/>
+        </p:nvSpPr>
+        <p:spPr>
+          <a:xfrm>
+            <a:off x="822960" y="5806440"/>
+            <a:ext cx="9601200" cy="640080"/>
+          </a:xfrm>
+          <a:prstGeom prst="rect">
+            <a:avLst/>
+          </a:prstGeom>
+          <a:noFill/>
+        </p:spPr>
+        <p:txBody>
+          <a:bodyPr wrap="square" anchor="t" lIns="0" rIns="0" tIns="0" bIns="0">
+            <a:spAutoFit/>
+          </a:bodyPr>
+          <a:lstStyle/>
+          <a:p>
+            <a:pPr algn="l">
+              <a:lnSpc>
+                <a:spcPct val="115000"/>
+              </a:lnSpc>
+            </a:pPr>
+            <a:r>
+              <a:rPr sz="1500" b="0" i="1">
+                <a:solidFill>
+                  <a:srgbClr val="DCE8D9"/>
+                </a:solidFill>
+                <a:latin typeface="Calibri"/>
+              </a:rPr>
+              <a:t>Health First — making healthy habits the actual price of screen time.</a:t>
             </a:r>
           </a:p>
         </p:txBody>

--- a/Health_First_Week6_Pitch.pptx
+++ b/Health_First_Week6_Pitch.pptx
@@ -13,6 +13,7 @@
     <p:sldId id="261" r:id="rId13"/>
     <p:sldId id="262" r:id="rId14"/>
     <p:sldId id="263" r:id="rId15"/>
+    <p:sldId id="264" r:id="rId16"/>
   </p:sldIdLst>
   <p:sldSz cx="12191695" cy="6858000" type="screen4x3"/>
   <p:notesSz cx="6858000" cy="9144000"/>
@@ -649,7 +650,7 @@
           <a:lstStyle/>
           <a:p>
             <a:r>
-              <a:t>This slide is the differentiator judges will remember. Restrict vs Reward.</a:t>
+              <a:t>State the solution in one line, then hit the six advantages quickly - this sets up the comparison slide next.</a:t>
             </a:r>
           </a:p>
         </p:txBody>
@@ -719,7 +720,7 @@
           <a:lstStyle/>
           <a:p>
             <a:r>
-              <a:t>Walk the flow left to right, then flag the sleep-timing fix as proof of real engineering rigor.</a:t>
+              <a:t>This slide is the differentiator judges will remember. Restrict vs Reward.</a:t>
             </a:r>
           </a:p>
         </p:txBody>
@@ -789,7 +790,7 @@
           <a:lstStyle/>
           <a:p>
             <a:r>
-              <a:t>Keep this brief - one breath explaining the diagram, then move to Wider Impact.</a:t>
+              <a:t>Walk the flow left to right, then flag the sleep-timing fix as proof of real engineering rigor.</a:t>
             </a:r>
           </a:p>
         </p:txBody>
@@ -859,7 +860,7 @@
           <a:lstStyle/>
           <a:p>
             <a:r>
-              <a:t>This is the slide that answers 'so what' for judges - why this matters beyond one demo family.</a:t>
+              <a:t>Keep this brief - one breath explaining the diagram, then move to Wider Impact.</a:t>
             </a:r>
           </a:p>
         </p:txBody>
@@ -929,7 +930,7 @@
           <a:lstStyle/>
           <a:p>
             <a:r>
-              <a:t>Say the proof bullets, then read the links out loud slowly if this is on screen during the recorded pitch.</a:t>
+              <a:t>This is the slide that answers 'so what' for judges - why this matters beyond one demo family.</a:t>
             </a:r>
           </a:p>
         </p:txBody>
@@ -955,6 +956,76 @@
 </file>
 
 <file path=ppt/notesSlides/notesSlide8.xml><?xml version="1.0" encoding="utf-8"?>
+<p:notes xmlns:a="http://schemas.openxmlformats.org/drawingml/2006/main" xmlns:p="http://schemas.openxmlformats.org/presentationml/2006/main" xmlns:r="http://schemas.openxmlformats.org/officeDocument/2006/relationships">
+  <p:cSld>
+    <p:spTree>
+      <p:nvGrpSpPr>
+        <p:cNvPr id="1" name=""/>
+        <p:cNvGrpSpPr/>
+        <p:nvPr/>
+      </p:nvGrpSpPr>
+      <p:grpSpPr>
+        <a:xfrm>
+          <a:off x="0" y="0"/>
+          <a:ext cx="0" cy="0"/>
+          <a:chOff x="0" y="0"/>
+          <a:chExt cx="0" cy="0"/>
+        </a:xfrm>
+      </p:grpSpPr>
+      <p:sp>
+        <p:nvSpPr>
+          <p:cNvPr id="2" name="Slide Image Placeholder 1"/>
+          <p:cNvSpPr>
+            <a:spLocks noGrp="1"/>
+          </p:cNvSpPr>
+          <p:nvPr>
+            <p:ph type="sldImg" idx="2"/>
+          </p:nvPr>
+        </p:nvSpPr>
+        <p:spPr/>
+      </p:sp>
+      <p:sp>
+        <p:nvSpPr>
+          <p:cNvPr id="3" name="Notes Placeholder 2"/>
+          <p:cNvSpPr>
+            <a:spLocks noGrp="1"/>
+          </p:cNvSpPr>
+          <p:nvPr>
+            <p:ph type="body" idx="3" sz="quarter"/>
+          </p:nvPr>
+        </p:nvSpPr>
+        <p:spPr/>
+        <p:txBody>
+          <a:bodyPr/>
+          <a:lstStyle/>
+          <a:p>
+            <a:r>
+              <a:t>Say the proof bullets, then read the links out loud slowly if this is on screen during the recorded pitch.</a:t>
+            </a:r>
+          </a:p>
+        </p:txBody>
+      </p:sp>
+      <p:sp>
+        <p:nvSpPr>
+          <p:cNvPr id="4" name="Slide Number Placeholder 3"/>
+          <p:cNvSpPr>
+            <a:spLocks noGrp="1"/>
+          </p:cNvSpPr>
+          <p:nvPr>
+            <p:ph type="sldNum" idx="5" sz="quarter"/>
+          </p:nvPr>
+        </p:nvSpPr>
+        <p:spPr/>
+      </p:sp>
+    </p:spTree>
+  </p:cSld>
+  <p:clrMapOvr>
+    <a:masterClrMapping/>
+  </p:clrMapOvr>
+</p:notes>
+</file>
+
+<file path=ppt/notesSlides/notesSlide9.xml><?xml version="1.0" encoding="utf-8"?>
 <p:notes xmlns:a="http://schemas.openxmlformats.org/drawingml/2006/main" xmlns:p="http://schemas.openxmlformats.org/presentationml/2006/main" xmlns:r="http://schemas.openxmlformats.org/officeDocument/2006/relationships">
   <p:cSld>
     <p:spTree>
@@ -4682,13 +4753,13 @@
               </a:lnSpc>
             </a:pPr>
             <a:r>
-              <a:rPr sz="3000" b="1" i="0">
+              <a:rPr sz="3200" b="1" i="0">
                 <a:solidFill>
                   <a:srgbClr val="1F2D22"/>
                 </a:solidFill>
                 <a:latin typeface="Cambria"/>
               </a:rPr>
-              <a:t>Why Screen-Time Apps Don't Work</a:t>
+              <a:t>Our Solution</a:t>
             </a:r>
           </a:p>
         </p:txBody>
@@ -4702,7 +4773,7 @@
         <p:spPr>
           <a:xfrm>
             <a:off x="822960" y="1188720"/>
-            <a:ext cx="9601200" cy="548640"/>
+            <a:ext cx="9784080" cy="548640"/>
           </a:xfrm>
           <a:prstGeom prst="rect">
             <a:avLst/>
@@ -4727,7 +4798,7 @@
                 </a:solidFill>
                 <a:latin typeface="Calibri"/>
               </a:rPr>
-              <a:t>They all take the same approach. We took the opposite one.</a:t>
+              <a:t>Turn proven health habits into earned screen time — nothing unlocks until it's honestly earned.</a:t>
             </a:r>
           </a:p>
         </p:txBody>
@@ -4740,8 +4811,8 @@
         </p:nvSpPr>
         <p:spPr>
           <a:xfrm>
-            <a:off x="822960" y="1920240"/>
-            <a:ext cx="5029200" cy="4114800"/>
+            <a:off x="822960" y="1691640"/>
+            <a:ext cx="3337560" cy="1874519"/>
           </a:xfrm>
           <a:prstGeom prst="roundRect">
             <a:avLst>
@@ -4749,7 +4820,7 @@
             </a:avLst>
           </a:prstGeom>
           <a:solidFill>
-            <a:srgbClr val="ECECEA"/>
+            <a:srgbClr val="DCE8D9"/>
           </a:solidFill>
           <a:ln>
             <a:noFill/>
@@ -4780,204 +4851,20 @@
       </p:sp>
       <p:sp>
         <p:nvSpPr>
-          <p:cNvPr id="5" name="TextBox 4"/>
-          <p:cNvSpPr txBox="1"/>
-          <p:nvPr/>
-        </p:nvSpPr>
-        <p:spPr>
-          <a:xfrm>
-            <a:off x="1097280" y="2148840"/>
-            <a:ext cx="4480560" cy="457200"/>
-          </a:xfrm>
-          <a:prstGeom prst="rect">
-            <a:avLst/>
-          </a:prstGeom>
-          <a:noFill/>
-        </p:spPr>
-        <p:txBody>
-          <a:bodyPr wrap="square" anchor="t" lIns="0" rIns="0" tIns="0" bIns="0">
-            <a:spAutoFit/>
-          </a:bodyPr>
-          <a:lstStyle/>
-          <a:p>
-            <a:pPr algn="l">
-              <a:lnSpc>
-                <a:spcPct val="115000"/>
-              </a:lnSpc>
-            </a:pPr>
-            <a:r>
-              <a:rPr sz="1300" b="1" i="0">
-                <a:solidFill>
-                  <a:srgbClr val="8A8F8B"/>
-                </a:solidFill>
-                <a:latin typeface="Calibri"/>
-              </a:rPr>
-              <a:t>TYPICAL APPS</a:t>
-            </a:r>
-          </a:p>
-        </p:txBody>
-      </p:sp>
-      <p:sp>
-        <p:nvSpPr>
-          <p:cNvPr id="6" name="TextBox 5"/>
-          <p:cNvSpPr txBox="1"/>
-          <p:nvPr/>
-        </p:nvSpPr>
-        <p:spPr>
-          <a:xfrm>
-            <a:off x="1097280" y="2651760"/>
-            <a:ext cx="4480560" cy="3200400"/>
-          </a:xfrm>
-          <a:prstGeom prst="rect">
-            <a:avLst/>
-          </a:prstGeom>
-          <a:noFill/>
-        </p:spPr>
-        <p:txBody>
-          <a:bodyPr wrap="square" lIns="0" rIns="0" tIns="0" bIns="0">
-            <a:spAutoFit/>
-          </a:bodyPr>
-          <a:lstStyle/>
-          <a:p>
-            <a:pPr indent="-201168" marL="201168">
-              <a:lnSpc>
-                <a:spcPct val="115000"/>
-              </a:lnSpc>
-              <a:spcAft>
-                <a:spcPts val="1000"/>
-              </a:spcAft>
-              <a:buClr>
-                <a:srgbClr val="8A8F8B"/>
-              </a:buClr>
-              <a:buFont typeface="Arial"/>
-              <a:buChar char="✗"/>
-            </a:pPr>
-            <a:r>
-              <a:rPr sz="1450">
-                <a:solidFill>
-                  <a:srgbClr val="5B6A5F"/>
-                </a:solidFill>
-                <a:latin typeface="Calibri"/>
-              </a:rPr>
-              <a:t>Restrict access with a hard timer</a:t>
-            </a:r>
-          </a:p>
-          <a:p>
-            <a:pPr indent="-201168" marL="201168">
-              <a:lnSpc>
-                <a:spcPct val="115000"/>
-              </a:lnSpc>
-              <a:spcAft>
-                <a:spcPts val="1000"/>
-              </a:spcAft>
-              <a:buClr>
-                <a:srgbClr val="8A8F8B"/>
-              </a:buClr>
-              <a:buFont typeface="Arial"/>
-              <a:buChar char="✗"/>
-            </a:pPr>
-            <a:r>
-              <a:rPr sz="1450">
-                <a:solidFill>
-                  <a:srgbClr val="5B6A5F"/>
-                </a:solidFill>
-                <a:latin typeface="Calibri"/>
-              </a:rPr>
-              <a:t>Kid feels punished, not motivated</a:t>
-            </a:r>
-          </a:p>
-          <a:p>
-            <a:pPr indent="-201168" marL="201168">
-              <a:lnSpc>
-                <a:spcPct val="115000"/>
-              </a:lnSpc>
-              <a:spcAft>
-                <a:spcPts val="1000"/>
-              </a:spcAft>
-              <a:buClr>
-                <a:srgbClr val="8A8F8B"/>
-              </a:buClr>
-              <a:buFont typeface="Arial"/>
-              <a:buChar char="✗"/>
-            </a:pPr>
-            <a:r>
-              <a:rPr sz="1450">
-                <a:solidFill>
-                  <a:srgbClr val="5B6A5F"/>
-                </a:solidFill>
-                <a:latin typeface="Calibri"/>
-              </a:rPr>
-              <a:t>Parent becomes the enforcer</a:t>
-            </a:r>
-          </a:p>
-          <a:p>
-            <a:pPr indent="-201168" marL="201168">
-              <a:lnSpc>
-                <a:spcPct val="115000"/>
-              </a:lnSpc>
-              <a:spcAft>
-                <a:spcPts val="1000"/>
-              </a:spcAft>
-              <a:buClr>
-                <a:srgbClr val="8A8F8B"/>
-              </a:buClr>
-              <a:buFont typeface="Arial"/>
-              <a:buChar char="✗"/>
-            </a:pPr>
-            <a:r>
-              <a:rPr sz="1450">
-                <a:solidFill>
-                  <a:srgbClr val="5B6A5F"/>
-                </a:solidFill>
-                <a:latin typeface="Calibri"/>
-              </a:rPr>
-              <a:t>One fixed rule for every family</a:t>
-            </a:r>
-          </a:p>
-          <a:p>
-            <a:pPr indent="-201168" marL="201168">
-              <a:lnSpc>
-                <a:spcPct val="115000"/>
-              </a:lnSpc>
-              <a:spcAft>
-                <a:spcPts val="1000"/>
-              </a:spcAft>
-              <a:buClr>
-                <a:srgbClr val="8A8F8B"/>
-              </a:buClr>
-              <a:buFont typeface="Arial"/>
-              <a:buChar char="✗"/>
-            </a:pPr>
-            <a:r>
-              <a:rPr sz="1450">
-                <a:solidFill>
-                  <a:srgbClr val="5B6A5F"/>
-                </a:solidFill>
-                <a:latin typeface="Calibri"/>
-              </a:rPr>
-              <a:t>Screen time becomes a daily fight</a:t>
-            </a:r>
-          </a:p>
-        </p:txBody>
-      </p:sp>
-      <p:sp>
-        <p:nvSpPr>
-          <p:cNvPr id="7" name="Rounded Rectangle 6"/>
+          <p:cNvPr id="5" name="Oval 4"/>
           <p:cNvSpPr/>
           <p:nvPr/>
         </p:nvSpPr>
         <p:spPr>
           <a:xfrm>
-            <a:off x="6309360" y="1920240"/>
-            <a:ext cx="5074920" cy="4114800"/>
-          </a:xfrm>
-          <a:prstGeom prst="roundRect">
-            <a:avLst>
-              <a:gd name="adj" fmla="val 10000"/>
-            </a:avLst>
+            <a:off x="1042416" y="1911096"/>
+            <a:ext cx="566928" cy="566928"/>
+          </a:xfrm>
+          <a:prstGeom prst="ellipse">
+            <a:avLst/>
           </a:prstGeom>
           <a:solidFill>
-            <a:srgbClr val="3E7A5C"/>
+            <a:srgbClr val="FFFFFF"/>
           </a:solidFill>
           <a:ln>
             <a:noFill/>
@@ -4999,23 +4886,70 @@
           </a:fontRef>
         </p:style>
         <p:txBody>
-          <a:bodyPr rtlCol="0" anchor="ctr"/>
+          <a:bodyPr rtlCol="0" anchor="ctr" lIns="0" rIns="0" tIns="0" bIns="0" wrap="none"/>
           <a:lstStyle/>
           <a:p>
             <a:pPr algn="ctr"/>
-          </a:p>
-        </p:txBody>
-      </p:sp>
-      <p:sp>
-        <p:nvSpPr>
-          <p:cNvPr id="8" name="TextBox 7"/>
+            <a:r>
+              <a:rPr sz="1700">
+                <a:solidFill>
+                  <a:srgbClr val="3E7A5C"/>
+                </a:solidFill>
+              </a:rPr>
+              <a:t>🎯</a:t>
+            </a:r>
+          </a:p>
+        </p:txBody>
+      </p:sp>
+      <p:sp>
+        <p:nvSpPr>
+          <p:cNvPr id="6" name="TextBox 5"/>
           <p:cNvSpPr txBox="1"/>
           <p:nvPr/>
         </p:nvSpPr>
         <p:spPr>
           <a:xfrm>
-            <a:off x="6583680" y="2148840"/>
-            <a:ext cx="4480560" cy="457200"/>
+            <a:off x="1691640" y="1929384"/>
+            <a:ext cx="2286000" cy="548640"/>
+          </a:xfrm>
+          <a:prstGeom prst="rect">
+            <a:avLst/>
+          </a:prstGeom>
+          <a:noFill/>
+        </p:spPr>
+        <p:txBody>
+          <a:bodyPr wrap="square" anchor="ctr" lIns="0" rIns="0" tIns="0" bIns="0">
+            <a:spAutoFit/>
+          </a:bodyPr>
+          <a:lstStyle/>
+          <a:p>
+            <a:pPr algn="l">
+              <a:lnSpc>
+                <a:spcPct val="105000"/>
+              </a:lnSpc>
+            </a:pPr>
+            <a:r>
+              <a:rPr sz="1350" b="1" i="0">
+                <a:solidFill>
+                  <a:srgbClr val="1F2D22"/>
+                </a:solidFill>
+                <a:latin typeface="Cambria"/>
+              </a:rPr>
+              <a:t>Motivating, Not Punitive</a:t>
+            </a:r>
+          </a:p>
+        </p:txBody>
+      </p:sp>
+      <p:sp>
+        <p:nvSpPr>
+          <p:cNvPr id="7" name="TextBox 6"/>
+          <p:cNvSpPr txBox="1"/>
+          <p:nvPr/>
+        </p:nvSpPr>
+        <p:spPr>
+          <a:xfrm>
+            <a:off x="1051560" y="2587752"/>
+            <a:ext cx="2880360" cy="822959"/>
           </a:xfrm>
           <a:prstGeom prst="rect">
             <a:avLst/>
@@ -5030,31 +4964,129 @@
           <a:p>
             <a:pPr algn="l">
               <a:lnSpc>
-                <a:spcPct val="115000"/>
+                <a:spcPct val="120000"/>
               </a:lnSpc>
             </a:pPr>
             <a:r>
-              <a:rPr sz="1300" b="1" i="0">
-                <a:solidFill>
-                  <a:srgbClr val="DCE8D9"/>
+              <a:rPr sz="1050" b="0" i="0">
+                <a:solidFill>
+                  <a:srgbClr val="5B6A5F"/>
                 </a:solidFill>
                 <a:latin typeface="Calibri"/>
               </a:rPr>
-              <a:t>HEALTH FIRST</a:t>
-            </a:r>
-          </a:p>
-        </p:txBody>
-      </p:sp>
-      <p:sp>
-        <p:nvSpPr>
-          <p:cNvPr id="9" name="TextBox 8"/>
+              <a:t>Kids earn rewards instead of losing privileges — the opposite of typical restriction apps.</a:t>
+            </a:r>
+          </a:p>
+        </p:txBody>
+      </p:sp>
+      <p:sp>
+        <p:nvSpPr>
+          <p:cNvPr id="8" name="Rounded Rectangle 7"/>
+          <p:cNvSpPr/>
+          <p:nvPr/>
+        </p:nvSpPr>
+        <p:spPr>
+          <a:xfrm>
+            <a:off x="4425696" y="1691640"/>
+            <a:ext cx="3337560" cy="1874519"/>
+          </a:xfrm>
+          <a:prstGeom prst="roundRect">
+            <a:avLst>
+              <a:gd name="adj" fmla="val 10000"/>
+            </a:avLst>
+          </a:prstGeom>
+          <a:solidFill>
+            <a:srgbClr val="F7E1D5"/>
+          </a:solidFill>
+          <a:ln>
+            <a:noFill/>
+          </a:ln>
+          <a:effectLst/>
+        </p:spPr>
+        <p:style>
+          <a:lnRef idx="1">
+            <a:schemeClr val="accent1"/>
+          </a:lnRef>
+          <a:fillRef idx="3">
+            <a:schemeClr val="accent1"/>
+          </a:fillRef>
+          <a:effectRef idx="2">
+            <a:schemeClr val="accent1"/>
+          </a:effectRef>
+          <a:fontRef idx="minor">
+            <a:schemeClr val="lt1"/>
+          </a:fontRef>
+        </p:style>
+        <p:txBody>
+          <a:bodyPr rtlCol="0" anchor="ctr"/>
+          <a:lstStyle/>
+          <a:p>
+            <a:pPr algn="ctr"/>
+          </a:p>
+        </p:txBody>
+      </p:sp>
+      <p:sp>
+        <p:nvSpPr>
+          <p:cNvPr id="9" name="Oval 8"/>
+          <p:cNvSpPr/>
+          <p:nvPr/>
+        </p:nvSpPr>
+        <p:spPr>
+          <a:xfrm>
+            <a:off x="4645152" y="1911096"/>
+            <a:ext cx="566928" cy="566928"/>
+          </a:xfrm>
+          <a:prstGeom prst="ellipse">
+            <a:avLst/>
+          </a:prstGeom>
+          <a:solidFill>
+            <a:srgbClr val="FFFFFF"/>
+          </a:solidFill>
+          <a:ln>
+            <a:noFill/>
+          </a:ln>
+          <a:effectLst/>
+        </p:spPr>
+        <p:style>
+          <a:lnRef idx="1">
+            <a:schemeClr val="accent1"/>
+          </a:lnRef>
+          <a:fillRef idx="3">
+            <a:schemeClr val="accent1"/>
+          </a:fillRef>
+          <a:effectRef idx="2">
+            <a:schemeClr val="accent1"/>
+          </a:effectRef>
+          <a:fontRef idx="minor">
+            <a:schemeClr val="lt1"/>
+          </a:fontRef>
+        </p:style>
+        <p:txBody>
+          <a:bodyPr rtlCol="0" anchor="ctr" lIns="0" rIns="0" tIns="0" bIns="0" wrap="none"/>
+          <a:lstStyle/>
+          <a:p>
+            <a:pPr algn="ctr"/>
+            <a:r>
+              <a:rPr sz="1700">
+                <a:solidFill>
+                  <a:srgbClr val="DD6B42"/>
+                </a:solidFill>
+              </a:rPr>
+              <a:t>🤝</a:t>
+            </a:r>
+          </a:p>
+        </p:txBody>
+      </p:sp>
+      <p:sp>
+        <p:nvSpPr>
+          <p:cNvPr id="10" name="TextBox 9"/>
           <p:cNvSpPr txBox="1"/>
           <p:nvPr/>
         </p:nvSpPr>
         <p:spPr>
           <a:xfrm>
-            <a:off x="6583680" y="2651760"/>
-            <a:ext cx="4480560" cy="3200400"/>
+            <a:off x="5294376" y="1929384"/>
+            <a:ext cx="2286000" cy="548640"/>
           </a:xfrm>
           <a:prstGeom prst="rect">
             <a:avLst/>
@@ -5062,128 +5094,767 @@
           <a:noFill/>
         </p:spPr>
         <p:txBody>
-          <a:bodyPr wrap="square" lIns="0" rIns="0" tIns="0" bIns="0">
+          <a:bodyPr wrap="square" anchor="ctr" lIns="0" rIns="0" tIns="0" bIns="0">
             <a:spAutoFit/>
           </a:bodyPr>
           <a:lstStyle/>
           <a:p>
-            <a:pPr indent="-201168" marL="201168">
+            <a:pPr algn="l">
               <a:lnSpc>
-                <a:spcPct val="115000"/>
+                <a:spcPct val="105000"/>
               </a:lnSpc>
-              <a:spcAft>
-                <a:spcPts val="1000"/>
-              </a:spcAft>
-              <a:buClr>
-                <a:srgbClr val="FFFFFF"/>
-              </a:buClr>
-              <a:buFont typeface="Arial"/>
-              <a:buChar char="✓"/>
             </a:pPr>
             <a:r>
-              <a:rPr sz="1450">
-                <a:solidFill>
-                  <a:srgbClr val="FFFFFF"/>
+              <a:rPr sz="1350" b="1" i="0">
+                <a:solidFill>
+                  <a:srgbClr val="1F2D22"/>
+                </a:solidFill>
+                <a:latin typeface="Cambria"/>
+              </a:rPr>
+              <a:t>Less Family Conflict</a:t>
+            </a:r>
+          </a:p>
+        </p:txBody>
+      </p:sp>
+      <p:sp>
+        <p:nvSpPr>
+          <p:cNvPr id="11" name="TextBox 10"/>
+          <p:cNvSpPr txBox="1"/>
+          <p:nvPr/>
+        </p:nvSpPr>
+        <p:spPr>
+          <a:xfrm>
+            <a:off x="4654296" y="2587752"/>
+            <a:ext cx="2880360" cy="822959"/>
+          </a:xfrm>
+          <a:prstGeom prst="rect">
+            <a:avLst/>
+          </a:prstGeom>
+          <a:noFill/>
+        </p:spPr>
+        <p:txBody>
+          <a:bodyPr wrap="square" anchor="t" lIns="0" rIns="0" tIns="0" bIns="0">
+            <a:spAutoFit/>
+          </a:bodyPr>
+          <a:lstStyle/>
+          <a:p>
+            <a:pPr algn="l">
+              <a:lnSpc>
+                <a:spcPct val="120000"/>
+              </a:lnSpc>
+            </a:pPr>
+            <a:r>
+              <a:rPr sz="1050" b="0" i="0">
+                <a:solidFill>
+                  <a:srgbClr val="5B6A5F"/>
                 </a:solidFill>
                 <a:latin typeface="Calibri"/>
               </a:rPr>
-              <a:t>Rewards healthy habits with earned time</a:t>
-            </a:r>
-          </a:p>
-          <a:p>
-            <a:pPr indent="-201168" marL="201168">
+              <a:t>Screen time becomes a shared goal between parent and kid, not a daily fight.</a:t>
+            </a:r>
+          </a:p>
+        </p:txBody>
+      </p:sp>
+      <p:sp>
+        <p:nvSpPr>
+          <p:cNvPr id="12" name="Rounded Rectangle 11"/>
+          <p:cNvSpPr/>
+          <p:nvPr/>
+        </p:nvSpPr>
+        <p:spPr>
+          <a:xfrm>
+            <a:off x="8037575" y="1691640"/>
+            <a:ext cx="3337560" cy="1874519"/>
+          </a:xfrm>
+          <a:prstGeom prst="roundRect">
+            <a:avLst>
+              <a:gd name="adj" fmla="val 10000"/>
+            </a:avLst>
+          </a:prstGeom>
+          <a:solidFill>
+            <a:srgbClr val="F5E7C9"/>
+          </a:solidFill>
+          <a:ln>
+            <a:noFill/>
+          </a:ln>
+          <a:effectLst/>
+        </p:spPr>
+        <p:style>
+          <a:lnRef idx="1">
+            <a:schemeClr val="accent1"/>
+          </a:lnRef>
+          <a:fillRef idx="3">
+            <a:schemeClr val="accent1"/>
+          </a:fillRef>
+          <a:effectRef idx="2">
+            <a:schemeClr val="accent1"/>
+          </a:effectRef>
+          <a:fontRef idx="minor">
+            <a:schemeClr val="lt1"/>
+          </a:fontRef>
+        </p:style>
+        <p:txBody>
+          <a:bodyPr rtlCol="0" anchor="ctr"/>
+          <a:lstStyle/>
+          <a:p>
+            <a:pPr algn="ctr"/>
+          </a:p>
+        </p:txBody>
+      </p:sp>
+      <p:sp>
+        <p:nvSpPr>
+          <p:cNvPr id="13" name="Oval 12"/>
+          <p:cNvSpPr/>
+          <p:nvPr/>
+        </p:nvSpPr>
+        <p:spPr>
+          <a:xfrm>
+            <a:off x="8257031" y="1911096"/>
+            <a:ext cx="566928" cy="566928"/>
+          </a:xfrm>
+          <a:prstGeom prst="ellipse">
+            <a:avLst/>
+          </a:prstGeom>
+          <a:solidFill>
+            <a:srgbClr val="FFFFFF"/>
+          </a:solidFill>
+          <a:ln>
+            <a:noFill/>
+          </a:ln>
+          <a:effectLst/>
+        </p:spPr>
+        <p:style>
+          <a:lnRef idx="1">
+            <a:schemeClr val="accent1"/>
+          </a:lnRef>
+          <a:fillRef idx="3">
+            <a:schemeClr val="accent1"/>
+          </a:fillRef>
+          <a:effectRef idx="2">
+            <a:schemeClr val="accent1"/>
+          </a:effectRef>
+          <a:fontRef idx="minor">
+            <a:schemeClr val="lt1"/>
+          </a:fontRef>
+        </p:style>
+        <p:txBody>
+          <a:bodyPr rtlCol="0" anchor="ctr" lIns="0" rIns="0" tIns="0" bIns="0" wrap="none"/>
+          <a:lstStyle/>
+          <a:p>
+            <a:pPr algn="ctr"/>
+            <a:r>
+              <a:rPr sz="1700">
+                <a:solidFill>
+                  <a:srgbClr val="DB9D3B"/>
+                </a:solidFill>
+              </a:rPr>
+              <a:t>🔧</a:t>
+            </a:r>
+          </a:p>
+        </p:txBody>
+      </p:sp>
+      <p:sp>
+        <p:nvSpPr>
+          <p:cNvPr id="14" name="TextBox 13"/>
+          <p:cNvSpPr txBox="1"/>
+          <p:nvPr/>
+        </p:nvSpPr>
+        <p:spPr>
+          <a:xfrm>
+            <a:off x="8906255" y="1929384"/>
+            <a:ext cx="2286000" cy="548640"/>
+          </a:xfrm>
+          <a:prstGeom prst="rect">
+            <a:avLst/>
+          </a:prstGeom>
+          <a:noFill/>
+        </p:spPr>
+        <p:txBody>
+          <a:bodyPr wrap="square" anchor="ctr" lIns="0" rIns="0" tIns="0" bIns="0">
+            <a:spAutoFit/>
+          </a:bodyPr>
+          <a:lstStyle/>
+          <a:p>
+            <a:pPr algn="l">
               <a:lnSpc>
-                <a:spcPct val="115000"/>
+                <a:spcPct val="105000"/>
               </a:lnSpc>
-              <a:spcAft>
-                <a:spcPts val="1000"/>
-              </a:spcAft>
-              <a:buClr>
-                <a:srgbClr val="FFFFFF"/>
-              </a:buClr>
-              <a:buFont typeface="Arial"/>
-              <a:buChar char="✓"/>
             </a:pPr>
             <a:r>
-              <a:rPr sz="1450">
-                <a:solidFill>
-                  <a:srgbClr val="FFFFFF"/>
+              <a:rPr sz="1350" b="1" i="0">
+                <a:solidFill>
+                  <a:srgbClr val="1F2D22"/>
+                </a:solidFill>
+                <a:latin typeface="Cambria"/>
+              </a:rPr>
+              <a:t>Fully Customizable</a:t>
+            </a:r>
+          </a:p>
+        </p:txBody>
+      </p:sp>
+      <p:sp>
+        <p:nvSpPr>
+          <p:cNvPr id="15" name="TextBox 14"/>
+          <p:cNvSpPr txBox="1"/>
+          <p:nvPr/>
+        </p:nvSpPr>
+        <p:spPr>
+          <a:xfrm>
+            <a:off x="8266175" y="2587752"/>
+            <a:ext cx="2880360" cy="822959"/>
+          </a:xfrm>
+          <a:prstGeom prst="rect">
+            <a:avLst/>
+          </a:prstGeom>
+          <a:noFill/>
+        </p:spPr>
+        <p:txBody>
+          <a:bodyPr wrap="square" anchor="t" lIns="0" rIns="0" tIns="0" bIns="0">
+            <a:spAutoFit/>
+          </a:bodyPr>
+          <a:lstStyle/>
+          <a:p>
+            <a:pPr algn="l">
+              <a:lnSpc>
+                <a:spcPct val="120000"/>
+              </a:lnSpc>
+            </a:pPr>
+            <a:r>
+              <a:rPr sz="1050" b="0" i="0">
+                <a:solidFill>
+                  <a:srgbClr val="5B6A5F"/>
                 </a:solidFill>
                 <a:latin typeface="Calibri"/>
               </a:rPr>
-              <a:t>Kid feels motivated by immediate credit</a:t>
-            </a:r>
-          </a:p>
-          <a:p>
-            <a:pPr indent="-201168" marL="201168">
+              <a:t>Parents set their own goals and exactly how many minutes each one is worth.</a:t>
+            </a:r>
+          </a:p>
+        </p:txBody>
+      </p:sp>
+      <p:sp>
+        <p:nvSpPr>
+          <p:cNvPr id="16" name="Rounded Rectangle 15"/>
+          <p:cNvSpPr/>
+          <p:nvPr/>
+        </p:nvSpPr>
+        <p:spPr>
+          <a:xfrm>
+            <a:off x="822960" y="3794760"/>
+            <a:ext cx="3337560" cy="1874519"/>
+          </a:xfrm>
+          <a:prstGeom prst="roundRect">
+            <a:avLst>
+              <a:gd name="adj" fmla="val 10000"/>
+            </a:avLst>
+          </a:prstGeom>
+          <a:solidFill>
+            <a:srgbClr val="E2E2F5"/>
+          </a:solidFill>
+          <a:ln>
+            <a:noFill/>
+          </a:ln>
+          <a:effectLst/>
+        </p:spPr>
+        <p:style>
+          <a:lnRef idx="1">
+            <a:schemeClr val="accent1"/>
+          </a:lnRef>
+          <a:fillRef idx="3">
+            <a:schemeClr val="accent1"/>
+          </a:fillRef>
+          <a:effectRef idx="2">
+            <a:schemeClr val="accent1"/>
+          </a:effectRef>
+          <a:fontRef idx="minor">
+            <a:schemeClr val="lt1"/>
+          </a:fontRef>
+        </p:style>
+        <p:txBody>
+          <a:bodyPr rtlCol="0" anchor="ctr"/>
+          <a:lstStyle/>
+          <a:p>
+            <a:pPr algn="ctr"/>
+          </a:p>
+        </p:txBody>
+      </p:sp>
+      <p:sp>
+        <p:nvSpPr>
+          <p:cNvPr id="17" name="Oval 16"/>
+          <p:cNvSpPr/>
+          <p:nvPr/>
+        </p:nvSpPr>
+        <p:spPr>
+          <a:xfrm>
+            <a:off x="1042416" y="4014216"/>
+            <a:ext cx="566928" cy="566928"/>
+          </a:xfrm>
+          <a:prstGeom prst="ellipse">
+            <a:avLst/>
+          </a:prstGeom>
+          <a:solidFill>
+            <a:srgbClr val="FFFFFF"/>
+          </a:solidFill>
+          <a:ln>
+            <a:noFill/>
+          </a:ln>
+          <a:effectLst/>
+        </p:spPr>
+        <p:style>
+          <a:lnRef idx="1">
+            <a:schemeClr val="accent1"/>
+          </a:lnRef>
+          <a:fillRef idx="3">
+            <a:schemeClr val="accent1"/>
+          </a:fillRef>
+          <a:effectRef idx="2">
+            <a:schemeClr val="accent1"/>
+          </a:effectRef>
+          <a:fontRef idx="minor">
+            <a:schemeClr val="lt1"/>
+          </a:fontRef>
+        </p:style>
+        <p:txBody>
+          <a:bodyPr rtlCol="0" anchor="ctr" lIns="0" rIns="0" tIns="0" bIns="0" wrap="none"/>
+          <a:lstStyle/>
+          <a:p>
+            <a:pPr algn="ctr"/>
+            <a:r>
+              <a:rPr sz="1700">
+                <a:solidFill>
+                  <a:srgbClr val="6E6FBF"/>
+                </a:solidFill>
+              </a:rPr>
+              <a:t>📈</a:t>
+            </a:r>
+          </a:p>
+        </p:txBody>
+      </p:sp>
+      <p:sp>
+        <p:nvSpPr>
+          <p:cNvPr id="18" name="TextBox 17"/>
+          <p:cNvSpPr txBox="1"/>
+          <p:nvPr/>
+        </p:nvSpPr>
+        <p:spPr>
+          <a:xfrm>
+            <a:off x="1691640" y="4032504"/>
+            <a:ext cx="2286000" cy="548640"/>
+          </a:xfrm>
+          <a:prstGeom prst="rect">
+            <a:avLst/>
+          </a:prstGeom>
+          <a:noFill/>
+        </p:spPr>
+        <p:txBody>
+          <a:bodyPr wrap="square" anchor="ctr" lIns="0" rIns="0" tIns="0" bIns="0">
+            <a:spAutoFit/>
+          </a:bodyPr>
+          <a:lstStyle/>
+          <a:p>
+            <a:pPr algn="l">
               <a:lnSpc>
-                <a:spcPct val="115000"/>
+                <a:spcPct val="105000"/>
               </a:lnSpc>
-              <a:spcAft>
-                <a:spcPts val="1000"/>
-              </a:spcAft>
-              <a:buClr>
-                <a:srgbClr val="FFFFFF"/>
-              </a:buClr>
-              <a:buFont typeface="Arial"/>
-              <a:buChar char="✓"/>
             </a:pPr>
             <a:r>
-              <a:rPr sz="1450">
-                <a:solidFill>
-                  <a:srgbClr val="FFFFFF"/>
+              <a:rPr sz="1350" b="1" i="0">
+                <a:solidFill>
+                  <a:srgbClr val="1F2D22"/>
+                </a:solidFill>
+                <a:latin typeface="Cambria"/>
+              </a:rPr>
+              <a:t>Builds Real Habits</a:t>
+            </a:r>
+          </a:p>
+        </p:txBody>
+      </p:sp>
+      <p:sp>
+        <p:nvSpPr>
+          <p:cNvPr id="19" name="TextBox 18"/>
+          <p:cNvSpPr txBox="1"/>
+          <p:nvPr/>
+        </p:nvSpPr>
+        <p:spPr>
+          <a:xfrm>
+            <a:off x="1051560" y="4690872"/>
+            <a:ext cx="2880360" cy="822959"/>
+          </a:xfrm>
+          <a:prstGeom prst="rect">
+            <a:avLst/>
+          </a:prstGeom>
+          <a:noFill/>
+        </p:spPr>
+        <p:txBody>
+          <a:bodyPr wrap="square" anchor="t" lIns="0" rIns="0" tIns="0" bIns="0">
+            <a:spAutoFit/>
+          </a:bodyPr>
+          <a:lstStyle/>
+          <a:p>
+            <a:pPr algn="l">
+              <a:lnSpc>
+                <a:spcPct val="120000"/>
+              </a:lnSpc>
+            </a:pPr>
+            <a:r>
+              <a:rPr sz="1050" b="0" i="0">
+                <a:solidFill>
+                  <a:srgbClr val="5B6A5F"/>
                 </a:solidFill>
                 <a:latin typeface="Calibri"/>
               </a:rPr>
-              <a:t>Parent becomes a coach, not a warden</a:t>
-            </a:r>
-          </a:p>
-          <a:p>
-            <a:pPr indent="-201168" marL="201168">
+              <a:t>Daily repetition plus streaks reinforce long-term behavior change, not one-off compliance.</a:t>
+            </a:r>
+          </a:p>
+        </p:txBody>
+      </p:sp>
+      <p:sp>
+        <p:nvSpPr>
+          <p:cNvPr id="20" name="Rounded Rectangle 19"/>
+          <p:cNvSpPr/>
+          <p:nvPr/>
+        </p:nvSpPr>
+        <p:spPr>
+          <a:xfrm>
+            <a:off x="4425696" y="3794760"/>
+            <a:ext cx="3337560" cy="1874519"/>
+          </a:xfrm>
+          <a:prstGeom prst="roundRect">
+            <a:avLst>
+              <a:gd name="adj" fmla="val 10000"/>
+            </a:avLst>
+          </a:prstGeom>
+          <a:solidFill>
+            <a:srgbClr val="F7E1D5"/>
+          </a:solidFill>
+          <a:ln>
+            <a:noFill/>
+          </a:ln>
+          <a:effectLst/>
+        </p:spPr>
+        <p:style>
+          <a:lnRef idx="1">
+            <a:schemeClr val="accent1"/>
+          </a:lnRef>
+          <a:fillRef idx="3">
+            <a:schemeClr val="accent1"/>
+          </a:fillRef>
+          <a:effectRef idx="2">
+            <a:schemeClr val="accent1"/>
+          </a:effectRef>
+          <a:fontRef idx="minor">
+            <a:schemeClr val="lt1"/>
+          </a:fontRef>
+        </p:style>
+        <p:txBody>
+          <a:bodyPr rtlCol="0" anchor="ctr"/>
+          <a:lstStyle/>
+          <a:p>
+            <a:pPr algn="ctr"/>
+          </a:p>
+        </p:txBody>
+      </p:sp>
+      <p:sp>
+        <p:nvSpPr>
+          <p:cNvPr id="21" name="Oval 20"/>
+          <p:cNvSpPr/>
+          <p:nvPr/>
+        </p:nvSpPr>
+        <p:spPr>
+          <a:xfrm>
+            <a:off x="4645152" y="4014216"/>
+            <a:ext cx="566928" cy="566928"/>
+          </a:xfrm>
+          <a:prstGeom prst="ellipse">
+            <a:avLst/>
+          </a:prstGeom>
+          <a:solidFill>
+            <a:srgbClr val="FFFFFF"/>
+          </a:solidFill>
+          <a:ln>
+            <a:noFill/>
+          </a:ln>
+          <a:effectLst/>
+        </p:spPr>
+        <p:style>
+          <a:lnRef idx="1">
+            <a:schemeClr val="accent1"/>
+          </a:lnRef>
+          <a:fillRef idx="3">
+            <a:schemeClr val="accent1"/>
+          </a:fillRef>
+          <a:effectRef idx="2">
+            <a:schemeClr val="accent1"/>
+          </a:effectRef>
+          <a:fontRef idx="minor">
+            <a:schemeClr val="lt1"/>
+          </a:fontRef>
+        </p:style>
+        <p:txBody>
+          <a:bodyPr rtlCol="0" anchor="ctr" lIns="0" rIns="0" tIns="0" bIns="0" wrap="none"/>
+          <a:lstStyle/>
+          <a:p>
+            <a:pPr algn="ctr"/>
+            <a:r>
+              <a:rPr sz="1700">
+                <a:solidFill>
+                  <a:srgbClr val="DD6B42"/>
+                </a:solidFill>
+              </a:rPr>
+              <a:t>⚖️</a:t>
+            </a:r>
+          </a:p>
+        </p:txBody>
+      </p:sp>
+      <p:sp>
+        <p:nvSpPr>
+          <p:cNvPr id="22" name="TextBox 21"/>
+          <p:cNvSpPr txBox="1"/>
+          <p:nvPr/>
+        </p:nvSpPr>
+        <p:spPr>
+          <a:xfrm>
+            <a:off x="5294376" y="4032504"/>
+            <a:ext cx="2286000" cy="548640"/>
+          </a:xfrm>
+          <a:prstGeom prst="rect">
+            <a:avLst/>
+          </a:prstGeom>
+          <a:noFill/>
+        </p:spPr>
+        <p:txBody>
+          <a:bodyPr wrap="square" anchor="ctr" lIns="0" rIns="0" tIns="0" bIns="0">
+            <a:spAutoFit/>
+          </a:bodyPr>
+          <a:lstStyle/>
+          <a:p>
+            <a:pPr algn="l">
               <a:lnSpc>
-                <a:spcPct val="115000"/>
+                <a:spcPct val="105000"/>
               </a:lnSpc>
-              <a:spcAft>
-                <a:spcPts val="1000"/>
-              </a:spcAft>
-              <a:buClr>
-                <a:srgbClr val="FFFFFF"/>
-              </a:buClr>
-              <a:buFont typeface="Arial"/>
-              <a:buChar char="✓"/>
             </a:pPr>
             <a:r>
-              <a:rPr sz="1450">
-                <a:solidFill>
-                  <a:srgbClr val="FFFFFF"/>
+              <a:rPr sz="1350" b="1" i="0">
+                <a:solidFill>
+                  <a:srgbClr val="1F2D22"/>
+                </a:solidFill>
+                <a:latin typeface="Cambria"/>
+              </a:rPr>
+              <a:t>Fair &amp; Honest</a:t>
+            </a:r>
+          </a:p>
+        </p:txBody>
+      </p:sp>
+      <p:sp>
+        <p:nvSpPr>
+          <p:cNvPr id="23" name="TextBox 22"/>
+          <p:cNvSpPr txBox="1"/>
+          <p:nvPr/>
+        </p:nvSpPr>
+        <p:spPr>
+          <a:xfrm>
+            <a:off x="4654296" y="4690872"/>
+            <a:ext cx="2880360" cy="822959"/>
+          </a:xfrm>
+          <a:prstGeom prst="rect">
+            <a:avLst/>
+          </a:prstGeom>
+          <a:noFill/>
+        </p:spPr>
+        <p:txBody>
+          <a:bodyPr wrap="square" anchor="t" lIns="0" rIns="0" tIns="0" bIns="0">
+            <a:spAutoFit/>
+          </a:bodyPr>
+          <a:lstStyle/>
+          <a:p>
+            <a:pPr algn="l">
+              <a:lnSpc>
+                <a:spcPct val="120000"/>
+              </a:lnSpc>
+            </a:pPr>
+            <a:r>
+              <a:rPr sz="1050" b="0" i="0">
+                <a:solidFill>
+                  <a:srgbClr val="5B6A5F"/>
                 </a:solidFill>
                 <a:latin typeface="Calibri"/>
               </a:rPr>
-              <a:t>Every goal and reward is configurable</a:t>
-            </a:r>
-          </a:p>
-          <a:p>
-            <a:pPr indent="-201168" marL="201168">
+              <a:t>Partial effort still banks time — one missed goal doesn't erase the whole day.</a:t>
+            </a:r>
+          </a:p>
+        </p:txBody>
+      </p:sp>
+      <p:sp>
+        <p:nvSpPr>
+          <p:cNvPr id="24" name="Rounded Rectangle 23"/>
+          <p:cNvSpPr/>
+          <p:nvPr/>
+        </p:nvSpPr>
+        <p:spPr>
+          <a:xfrm>
+            <a:off x="8037575" y="3794760"/>
+            <a:ext cx="3337560" cy="1874519"/>
+          </a:xfrm>
+          <a:prstGeom prst="roundRect">
+            <a:avLst>
+              <a:gd name="adj" fmla="val 10000"/>
+            </a:avLst>
+          </a:prstGeom>
+          <a:solidFill>
+            <a:srgbClr val="DCE8D9"/>
+          </a:solidFill>
+          <a:ln>
+            <a:noFill/>
+          </a:ln>
+          <a:effectLst/>
+        </p:spPr>
+        <p:style>
+          <a:lnRef idx="1">
+            <a:schemeClr val="accent1"/>
+          </a:lnRef>
+          <a:fillRef idx="3">
+            <a:schemeClr val="accent1"/>
+          </a:fillRef>
+          <a:effectRef idx="2">
+            <a:schemeClr val="accent1"/>
+          </a:effectRef>
+          <a:fontRef idx="minor">
+            <a:schemeClr val="lt1"/>
+          </a:fontRef>
+        </p:style>
+        <p:txBody>
+          <a:bodyPr rtlCol="0" anchor="ctr"/>
+          <a:lstStyle/>
+          <a:p>
+            <a:pPr algn="ctr"/>
+          </a:p>
+        </p:txBody>
+      </p:sp>
+      <p:sp>
+        <p:nvSpPr>
+          <p:cNvPr id="25" name="Oval 24"/>
+          <p:cNvSpPr/>
+          <p:nvPr/>
+        </p:nvSpPr>
+        <p:spPr>
+          <a:xfrm>
+            <a:off x="8257031" y="4014216"/>
+            <a:ext cx="566928" cy="566928"/>
+          </a:xfrm>
+          <a:prstGeom prst="ellipse">
+            <a:avLst/>
+          </a:prstGeom>
+          <a:solidFill>
+            <a:srgbClr val="FFFFFF"/>
+          </a:solidFill>
+          <a:ln>
+            <a:noFill/>
+          </a:ln>
+          <a:effectLst/>
+        </p:spPr>
+        <p:style>
+          <a:lnRef idx="1">
+            <a:schemeClr val="accent1"/>
+          </a:lnRef>
+          <a:fillRef idx="3">
+            <a:schemeClr val="accent1"/>
+          </a:fillRef>
+          <a:effectRef idx="2">
+            <a:schemeClr val="accent1"/>
+          </a:effectRef>
+          <a:fontRef idx="minor">
+            <a:schemeClr val="lt1"/>
+          </a:fontRef>
+        </p:style>
+        <p:txBody>
+          <a:bodyPr rtlCol="0" anchor="ctr" lIns="0" rIns="0" tIns="0" bIns="0" wrap="none"/>
+          <a:lstStyle/>
+          <a:p>
+            <a:pPr algn="ctr"/>
+            <a:r>
+              <a:rPr sz="1700">
+                <a:solidFill>
+                  <a:srgbClr val="3E7A5C"/>
+                </a:solidFill>
+              </a:rPr>
+              <a:t>🌍</a:t>
+            </a:r>
+          </a:p>
+        </p:txBody>
+      </p:sp>
+      <p:sp>
+        <p:nvSpPr>
+          <p:cNvPr id="26" name="TextBox 25"/>
+          <p:cNvSpPr txBox="1"/>
+          <p:nvPr/>
+        </p:nvSpPr>
+        <p:spPr>
+          <a:xfrm>
+            <a:off x="8906255" y="4032504"/>
+            <a:ext cx="2286000" cy="548640"/>
+          </a:xfrm>
+          <a:prstGeom prst="rect">
+            <a:avLst/>
+          </a:prstGeom>
+          <a:noFill/>
+        </p:spPr>
+        <p:txBody>
+          <a:bodyPr wrap="square" anchor="ctr" lIns="0" rIns="0" tIns="0" bIns="0">
+            <a:spAutoFit/>
+          </a:bodyPr>
+          <a:lstStyle/>
+          <a:p>
+            <a:pPr algn="l">
               <a:lnSpc>
-                <a:spcPct val="115000"/>
+                <a:spcPct val="105000"/>
               </a:lnSpc>
-              <a:spcAft>
-                <a:spcPts val="1000"/>
-              </a:spcAft>
-              <a:buClr>
-                <a:srgbClr val="FFFFFF"/>
-              </a:buClr>
-              <a:buFont typeface="Arial"/>
-              <a:buChar char="✓"/>
             </a:pPr>
             <a:r>
-              <a:rPr sz="1450">
-                <a:solidFill>
-                  <a:srgbClr val="FFFFFF"/>
+              <a:rPr sz="1350" b="1" i="0">
+                <a:solidFill>
+                  <a:srgbClr val="1F2D22"/>
+                </a:solidFill>
+                <a:latin typeface="Cambria"/>
+              </a:rPr>
+              <a:t>Works for Any Family</a:t>
+            </a:r>
+          </a:p>
+        </p:txBody>
+      </p:sp>
+      <p:sp>
+        <p:nvSpPr>
+          <p:cNvPr id="27" name="TextBox 26"/>
+          <p:cNvSpPr txBox="1"/>
+          <p:nvPr/>
+        </p:nvSpPr>
+        <p:spPr>
+          <a:xfrm>
+            <a:off x="8266175" y="4690872"/>
+            <a:ext cx="2880360" cy="822959"/>
+          </a:xfrm>
+          <a:prstGeom prst="rect">
+            <a:avLst/>
+          </a:prstGeom>
+          <a:noFill/>
+        </p:spPr>
+        <p:txBody>
+          <a:bodyPr wrap="square" anchor="t" lIns="0" rIns="0" tIns="0" bIns="0">
+            <a:spAutoFit/>
+          </a:bodyPr>
+          <a:lstStyle/>
+          <a:p>
+            <a:pPr algn="l">
+              <a:lnSpc>
+                <a:spcPct val="120000"/>
+              </a:lnSpc>
+            </a:pPr>
+            <a:r>
+              <a:rPr sz="1050" b="0" i="0">
+                <a:solidFill>
+                  <a:srgbClr val="5B6A5F"/>
                 </a:solidFill>
                 <a:latin typeface="Calibri"/>
               </a:rPr>
-              <a:t>Screen time becomes a shared goal</a:t>
+              <a:t>No fixed rules — adapts to each household's own goals and routines.</a:t>
             </a:r>
           </a:p>
         </p:txBody>
@@ -5223,7 +5894,7 @@
         <p:spPr>
           <a:xfrm>
             <a:off x="822960" y="502920"/>
-            <a:ext cx="7315200" cy="548640"/>
+            <a:ext cx="10332720" cy="731520"/>
           </a:xfrm>
           <a:prstGeom prst="rect">
             <a:avLst/>
@@ -5248,7 +5919,7 @@
                 </a:solidFill>
                 <a:latin typeface="Cambria"/>
               </a:rPr>
-              <a:t>How It Works</a:t>
+              <a:t>Why Screen-Time Apps Don't Work</a:t>
             </a:r>
           </a:p>
         </p:txBody>
@@ -5261,7 +5932,7 @@
         </p:nvSpPr>
         <p:spPr>
           <a:xfrm>
-            <a:off x="822960" y="1143000"/>
+            <a:off x="822960" y="1188720"/>
             <a:ext cx="9601200" cy="548640"/>
           </a:xfrm>
           <a:prstGeom prst="rect">
@@ -5287,27 +5958,29 @@
                 </a:solidFill>
                 <a:latin typeface="Calibri"/>
               </a:rPr>
-              <a:t>A daily checklist of health goals — proven honestly — banks screen time.</a:t>
-            </a:r>
-          </a:p>
-        </p:txBody>
-      </p:sp>
-      <p:sp>
-        <p:nvSpPr>
-          <p:cNvPr id="4" name="Oval 3"/>
+              <a:t>They all take the same approach. We took the opposite one.</a:t>
+            </a:r>
+          </a:p>
+        </p:txBody>
+      </p:sp>
+      <p:sp>
+        <p:nvSpPr>
+          <p:cNvPr id="4" name="Rounded Rectangle 3"/>
           <p:cNvSpPr/>
           <p:nvPr/>
         </p:nvSpPr>
         <p:spPr>
           <a:xfrm>
-            <a:off x="1280160" y="1965960"/>
-            <a:ext cx="1097280" cy="1097280"/>
-          </a:xfrm>
-          <a:prstGeom prst="ellipse">
-            <a:avLst/>
+            <a:off x="822960" y="1920240"/>
+            <a:ext cx="5029200" cy="4114800"/>
+          </a:xfrm>
+          <a:prstGeom prst="roundRect">
+            <a:avLst>
+              <a:gd name="adj" fmla="val 10000"/>
+            </a:avLst>
           </a:prstGeom>
           <a:solidFill>
-            <a:srgbClr val="DCE8D9"/>
+            <a:srgbClr val="ECECEA"/>
           </a:solidFill>
           <a:ln>
             <a:noFill/>
@@ -5329,18 +6002,10 @@
           </a:fontRef>
         </p:style>
         <p:txBody>
-          <a:bodyPr rtlCol="0" anchor="ctr" lIns="0" rIns="0" tIns="0" bIns="0" wrap="none"/>
+          <a:bodyPr rtlCol="0" anchor="ctr"/>
           <a:lstStyle/>
           <a:p>
             <a:pPr algn="ctr"/>
-            <a:r>
-              <a:rPr sz="3300">
-                <a:solidFill>
-                  <a:srgbClr val="3E7A5C"/>
-                </a:solidFill>
-              </a:rPr>
-              <a:t>💧</a:t>
-            </a:r>
           </a:p>
         </p:txBody>
       </p:sp>
@@ -5352,8 +6017,8 @@
         </p:nvSpPr>
         <p:spPr>
           <a:xfrm>
-            <a:off x="1005840" y="3154680"/>
-            <a:ext cx="1645920" cy="365760"/>
+            <a:off x="1097280" y="2148840"/>
+            <a:ext cx="4480560" cy="457200"/>
           </a:xfrm>
           <a:prstGeom prst="rect">
             <a:avLst/>
@@ -5366,39 +6031,184 @@
           </a:bodyPr>
           <a:lstStyle/>
           <a:p>
-            <a:pPr algn="ctr">
+            <a:pPr algn="l">
               <a:lnSpc>
                 <a:spcPct val="115000"/>
               </a:lnSpc>
             </a:pPr>
             <a:r>
-              <a:rPr sz="1400" b="1" i="0">
-                <a:solidFill>
-                  <a:srgbClr val="1F2D22"/>
+              <a:rPr sz="1300" b="1" i="0">
+                <a:solidFill>
+                  <a:srgbClr val="8A8F8B"/>
                 </a:solidFill>
                 <a:latin typeface="Calibri"/>
               </a:rPr>
-              <a:t>Water</a:t>
-            </a:r>
-          </a:p>
-        </p:txBody>
-      </p:sp>
-      <p:sp>
-        <p:nvSpPr>
-          <p:cNvPr id="6" name="Oval 5"/>
+              <a:t>TYPICAL APPS</a:t>
+            </a:r>
+          </a:p>
+        </p:txBody>
+      </p:sp>
+      <p:sp>
+        <p:nvSpPr>
+          <p:cNvPr id="6" name="TextBox 5"/>
+          <p:cNvSpPr txBox="1"/>
+          <p:nvPr/>
+        </p:nvSpPr>
+        <p:spPr>
+          <a:xfrm>
+            <a:off x="1097280" y="2651760"/>
+            <a:ext cx="4480560" cy="3200400"/>
+          </a:xfrm>
+          <a:prstGeom prst="rect">
+            <a:avLst/>
+          </a:prstGeom>
+          <a:noFill/>
+        </p:spPr>
+        <p:txBody>
+          <a:bodyPr wrap="square" lIns="0" rIns="0" tIns="0" bIns="0">
+            <a:spAutoFit/>
+          </a:bodyPr>
+          <a:lstStyle/>
+          <a:p>
+            <a:pPr indent="-201168" marL="201168">
+              <a:lnSpc>
+                <a:spcPct val="115000"/>
+              </a:lnSpc>
+              <a:spcAft>
+                <a:spcPts val="1000"/>
+              </a:spcAft>
+              <a:buClr>
+                <a:srgbClr val="8A8F8B"/>
+              </a:buClr>
+              <a:buFont typeface="Arial"/>
+              <a:buChar char="✗"/>
+            </a:pPr>
+            <a:r>
+              <a:rPr sz="1450">
+                <a:solidFill>
+                  <a:srgbClr val="5B6A5F"/>
+                </a:solidFill>
+                <a:latin typeface="Calibri"/>
+              </a:rPr>
+              <a:t>Restrict access with a hard timer</a:t>
+            </a:r>
+          </a:p>
+          <a:p>
+            <a:pPr indent="-201168" marL="201168">
+              <a:lnSpc>
+                <a:spcPct val="115000"/>
+              </a:lnSpc>
+              <a:spcAft>
+                <a:spcPts val="1000"/>
+              </a:spcAft>
+              <a:buClr>
+                <a:srgbClr val="8A8F8B"/>
+              </a:buClr>
+              <a:buFont typeface="Arial"/>
+              <a:buChar char="✗"/>
+            </a:pPr>
+            <a:r>
+              <a:rPr sz="1450">
+                <a:solidFill>
+                  <a:srgbClr val="5B6A5F"/>
+                </a:solidFill>
+                <a:latin typeface="Calibri"/>
+              </a:rPr>
+              <a:t>Kid feels punished, not motivated</a:t>
+            </a:r>
+          </a:p>
+          <a:p>
+            <a:pPr indent="-201168" marL="201168">
+              <a:lnSpc>
+                <a:spcPct val="115000"/>
+              </a:lnSpc>
+              <a:spcAft>
+                <a:spcPts val="1000"/>
+              </a:spcAft>
+              <a:buClr>
+                <a:srgbClr val="8A8F8B"/>
+              </a:buClr>
+              <a:buFont typeface="Arial"/>
+              <a:buChar char="✗"/>
+            </a:pPr>
+            <a:r>
+              <a:rPr sz="1450">
+                <a:solidFill>
+                  <a:srgbClr val="5B6A5F"/>
+                </a:solidFill>
+                <a:latin typeface="Calibri"/>
+              </a:rPr>
+              <a:t>Parent becomes the enforcer</a:t>
+            </a:r>
+          </a:p>
+          <a:p>
+            <a:pPr indent="-201168" marL="201168">
+              <a:lnSpc>
+                <a:spcPct val="115000"/>
+              </a:lnSpc>
+              <a:spcAft>
+                <a:spcPts val="1000"/>
+              </a:spcAft>
+              <a:buClr>
+                <a:srgbClr val="8A8F8B"/>
+              </a:buClr>
+              <a:buFont typeface="Arial"/>
+              <a:buChar char="✗"/>
+            </a:pPr>
+            <a:r>
+              <a:rPr sz="1450">
+                <a:solidFill>
+                  <a:srgbClr val="5B6A5F"/>
+                </a:solidFill>
+                <a:latin typeface="Calibri"/>
+              </a:rPr>
+              <a:t>One fixed rule for every family</a:t>
+            </a:r>
+          </a:p>
+          <a:p>
+            <a:pPr indent="-201168" marL="201168">
+              <a:lnSpc>
+                <a:spcPct val="115000"/>
+              </a:lnSpc>
+              <a:spcAft>
+                <a:spcPts val="1000"/>
+              </a:spcAft>
+              <a:buClr>
+                <a:srgbClr val="8A8F8B"/>
+              </a:buClr>
+              <a:buFont typeface="Arial"/>
+              <a:buChar char="✗"/>
+            </a:pPr>
+            <a:r>
+              <a:rPr sz="1450">
+                <a:solidFill>
+                  <a:srgbClr val="5B6A5F"/>
+                </a:solidFill>
+                <a:latin typeface="Calibri"/>
+              </a:rPr>
+              <a:t>Screen time becomes a daily fight</a:t>
+            </a:r>
+          </a:p>
+        </p:txBody>
+      </p:sp>
+      <p:sp>
+        <p:nvSpPr>
+          <p:cNvPr id="7" name="Rounded Rectangle 6"/>
           <p:cNvSpPr/>
           <p:nvPr/>
         </p:nvSpPr>
         <p:spPr>
           <a:xfrm>
-            <a:off x="3611879" y="1965960"/>
-            <a:ext cx="1097280" cy="1097280"/>
-          </a:xfrm>
-          <a:prstGeom prst="ellipse">
-            <a:avLst/>
+            <a:off x="6309360" y="1920240"/>
+            <a:ext cx="5074920" cy="4114800"/>
+          </a:xfrm>
+          <a:prstGeom prst="roundRect">
+            <a:avLst>
+              <a:gd name="adj" fmla="val 10000"/>
+            </a:avLst>
           </a:prstGeom>
           <a:solidFill>
-            <a:srgbClr val="F7E1D5"/>
+            <a:srgbClr val="3E7A5C"/>
           </a:solidFill>
           <a:ln>
             <a:noFill/>
@@ -5420,31 +6230,23 @@
           </a:fontRef>
         </p:style>
         <p:txBody>
-          <a:bodyPr rtlCol="0" anchor="ctr" lIns="0" rIns="0" tIns="0" bIns="0" wrap="none"/>
+          <a:bodyPr rtlCol="0" anchor="ctr"/>
           <a:lstStyle/>
           <a:p>
             <a:pPr algn="ctr"/>
-            <a:r>
-              <a:rPr sz="3300">
-                <a:solidFill>
-                  <a:srgbClr val="DD6B42"/>
-                </a:solidFill>
-              </a:rPr>
-              <a:t>🏃</a:t>
-            </a:r>
-          </a:p>
-        </p:txBody>
-      </p:sp>
-      <p:sp>
-        <p:nvSpPr>
-          <p:cNvPr id="7" name="TextBox 6"/>
+          </a:p>
+        </p:txBody>
+      </p:sp>
+      <p:sp>
+        <p:nvSpPr>
+          <p:cNvPr id="8" name="TextBox 7"/>
           <p:cNvSpPr txBox="1"/>
           <p:nvPr/>
         </p:nvSpPr>
         <p:spPr>
           <a:xfrm>
-            <a:off x="3337560" y="3154680"/>
-            <a:ext cx="1645920" cy="365760"/>
+            <a:off x="6583680" y="2148840"/>
+            <a:ext cx="4480560" cy="457200"/>
           </a:xfrm>
           <a:prstGeom prst="rect">
             <a:avLst/>
@@ -5457,71 +6259,19 @@
           </a:bodyPr>
           <a:lstStyle/>
           <a:p>
-            <a:pPr algn="ctr">
+            <a:pPr algn="l">
               <a:lnSpc>
                 <a:spcPct val="115000"/>
               </a:lnSpc>
             </a:pPr>
             <a:r>
-              <a:rPr sz="1400" b="1" i="0">
-                <a:solidFill>
-                  <a:srgbClr val="1F2D22"/>
+              <a:rPr sz="1300" b="1" i="0">
+                <a:solidFill>
+                  <a:srgbClr val="DCE8D9"/>
                 </a:solidFill>
                 <a:latin typeface="Calibri"/>
               </a:rPr>
-              <a:t>Move</a:t>
-            </a:r>
-          </a:p>
-        </p:txBody>
-      </p:sp>
-      <p:sp>
-        <p:nvSpPr>
-          <p:cNvPr id="8" name="Oval 7"/>
-          <p:cNvSpPr/>
-          <p:nvPr/>
-        </p:nvSpPr>
-        <p:spPr>
-          <a:xfrm>
-            <a:off x="5943600" y="1965960"/>
-            <a:ext cx="1097280" cy="1097280"/>
-          </a:xfrm>
-          <a:prstGeom prst="ellipse">
-            <a:avLst/>
-          </a:prstGeom>
-          <a:solidFill>
-            <a:srgbClr val="E2E2F5"/>
-          </a:solidFill>
-          <a:ln>
-            <a:noFill/>
-          </a:ln>
-          <a:effectLst/>
-        </p:spPr>
-        <p:style>
-          <a:lnRef idx="1">
-            <a:schemeClr val="accent1"/>
-          </a:lnRef>
-          <a:fillRef idx="3">
-            <a:schemeClr val="accent1"/>
-          </a:fillRef>
-          <a:effectRef idx="2">
-            <a:schemeClr val="accent1"/>
-          </a:effectRef>
-          <a:fontRef idx="minor">
-            <a:schemeClr val="lt1"/>
-          </a:fontRef>
-        </p:style>
-        <p:txBody>
-          <a:bodyPr rtlCol="0" anchor="ctr" lIns="0" rIns="0" tIns="0" bIns="0" wrap="none"/>
-          <a:lstStyle/>
-          <a:p>
-            <a:pPr algn="ctr"/>
-            <a:r>
-              <a:rPr sz="3300">
-                <a:solidFill>
-                  <a:srgbClr val="6E6FBF"/>
-                </a:solidFill>
-              </a:rPr>
-              <a:t>🌙</a:t>
+              <a:t>HEALTH FIRST</a:t>
             </a:r>
           </a:p>
         </p:txBody>
@@ -5534,8 +6284,8 @@
         </p:nvSpPr>
         <p:spPr>
           <a:xfrm>
-            <a:off x="5669279" y="3154680"/>
-            <a:ext cx="1645920" cy="365760"/>
+            <a:off x="6583680" y="2651760"/>
+            <a:ext cx="4480560" cy="3200400"/>
           </a:xfrm>
           <a:prstGeom prst="rect">
             <a:avLst/>
@@ -5543,657 +6293,128 @@
           <a:noFill/>
         </p:spPr>
         <p:txBody>
-          <a:bodyPr wrap="square" anchor="t" lIns="0" rIns="0" tIns="0" bIns="0">
+          <a:bodyPr wrap="square" lIns="0" rIns="0" tIns="0" bIns="0">
             <a:spAutoFit/>
           </a:bodyPr>
           <a:lstStyle/>
           <a:p>
-            <a:pPr algn="ctr">
+            <a:pPr indent="-201168" marL="201168">
               <a:lnSpc>
                 <a:spcPct val="115000"/>
               </a:lnSpc>
+              <a:spcAft>
+                <a:spcPts val="1000"/>
+              </a:spcAft>
+              <a:buClr>
+                <a:srgbClr val="FFFFFF"/>
+              </a:buClr>
+              <a:buFont typeface="Arial"/>
+              <a:buChar char="✓"/>
             </a:pPr>
             <a:r>
-              <a:rPr sz="1400" b="1" i="0">
-                <a:solidFill>
-                  <a:srgbClr val="1F2D22"/>
+              <a:rPr sz="1450">
+                <a:solidFill>
+                  <a:srgbClr val="FFFFFF"/>
                 </a:solidFill>
                 <a:latin typeface="Calibri"/>
               </a:rPr>
-              <a:t>Sleep</a:t>
-            </a:r>
-          </a:p>
-        </p:txBody>
-      </p:sp>
-      <p:sp>
-        <p:nvSpPr>
-          <p:cNvPr id="10" name="Oval 9"/>
-          <p:cNvSpPr/>
-          <p:nvPr/>
-        </p:nvSpPr>
-        <p:spPr>
-          <a:xfrm>
-            <a:off x="8275320" y="1965960"/>
-            <a:ext cx="1097280" cy="1097280"/>
-          </a:xfrm>
-          <a:prstGeom prst="ellipse">
-            <a:avLst/>
-          </a:prstGeom>
-          <a:solidFill>
-            <a:srgbClr val="F7E1D5"/>
-          </a:solidFill>
-          <a:ln>
-            <a:noFill/>
-          </a:ln>
-          <a:effectLst/>
-        </p:spPr>
-        <p:style>
-          <a:lnRef idx="1">
-            <a:schemeClr val="accent1"/>
-          </a:lnRef>
-          <a:fillRef idx="3">
-            <a:schemeClr val="accent1"/>
-          </a:fillRef>
-          <a:effectRef idx="2">
-            <a:schemeClr val="accent1"/>
-          </a:effectRef>
-          <a:fontRef idx="minor">
-            <a:schemeClr val="lt1"/>
-          </a:fontRef>
-        </p:style>
-        <p:txBody>
-          <a:bodyPr rtlCol="0" anchor="ctr" lIns="0" rIns="0" tIns="0" bIns="0" wrap="none"/>
-          <a:lstStyle/>
-          <a:p>
-            <a:pPr algn="ctr"/>
-            <a:r>
-              <a:rPr sz="3300">
-                <a:solidFill>
-                  <a:srgbClr val="DD6B42"/>
-                </a:solidFill>
-              </a:rPr>
-              <a:t>🍎</a:t>
-            </a:r>
-          </a:p>
-        </p:txBody>
-      </p:sp>
-      <p:sp>
-        <p:nvSpPr>
-          <p:cNvPr id="11" name="TextBox 10"/>
-          <p:cNvSpPr txBox="1"/>
-          <p:nvPr/>
-        </p:nvSpPr>
-        <p:spPr>
-          <a:xfrm>
-            <a:off x="8001000" y="3154680"/>
-            <a:ext cx="1645920" cy="365760"/>
-          </a:xfrm>
-          <a:prstGeom prst="rect">
-            <a:avLst/>
-          </a:prstGeom>
-          <a:noFill/>
-        </p:spPr>
-        <p:txBody>
-          <a:bodyPr wrap="square" anchor="t" lIns="0" rIns="0" tIns="0" bIns="0">
-            <a:spAutoFit/>
-          </a:bodyPr>
-          <a:lstStyle/>
-          <a:p>
-            <a:pPr algn="ctr">
+              <a:t>Rewards healthy habits with earned time</a:t>
+            </a:r>
+          </a:p>
+          <a:p>
+            <a:pPr indent="-201168" marL="201168">
               <a:lnSpc>
                 <a:spcPct val="115000"/>
               </a:lnSpc>
+              <a:spcAft>
+                <a:spcPts val="1000"/>
+              </a:spcAft>
+              <a:buClr>
+                <a:srgbClr val="FFFFFF"/>
+              </a:buClr>
+              <a:buFont typeface="Arial"/>
+              <a:buChar char="✓"/>
             </a:pPr>
             <a:r>
-              <a:rPr sz="1400" b="1" i="0">
-                <a:solidFill>
-                  <a:srgbClr val="1F2D22"/>
+              <a:rPr sz="1450">
+                <a:solidFill>
+                  <a:srgbClr val="FFFFFF"/>
                 </a:solidFill>
                 <a:latin typeface="Calibri"/>
               </a:rPr>
-              <a:t>Fruit</a:t>
-            </a:r>
-          </a:p>
-        </p:txBody>
-      </p:sp>
-      <p:sp>
-        <p:nvSpPr>
-          <p:cNvPr id="12" name="Rounded Rectangle 11"/>
-          <p:cNvSpPr/>
-          <p:nvPr/>
-        </p:nvSpPr>
-        <p:spPr>
-          <a:xfrm>
-            <a:off x="914400" y="3886200"/>
-            <a:ext cx="1554480" cy="594360"/>
-          </a:xfrm>
-          <a:prstGeom prst="roundRect">
-            <a:avLst>
-              <a:gd name="adj" fmla="val 10000"/>
-            </a:avLst>
-          </a:prstGeom>
-          <a:solidFill>
-            <a:srgbClr val="DCE8D9"/>
-          </a:solidFill>
-          <a:ln>
-            <a:noFill/>
-          </a:ln>
-          <a:effectLst/>
-        </p:spPr>
-        <p:style>
-          <a:lnRef idx="1">
-            <a:schemeClr val="accent1"/>
-          </a:lnRef>
-          <a:fillRef idx="3">
-            <a:schemeClr val="accent1"/>
-          </a:fillRef>
-          <a:effectRef idx="2">
-            <a:schemeClr val="accent1"/>
-          </a:effectRef>
-          <a:fontRef idx="minor">
-            <a:schemeClr val="lt1"/>
-          </a:fontRef>
-        </p:style>
-        <p:txBody>
-          <a:bodyPr rtlCol="0" anchor="ctr"/>
-          <a:lstStyle/>
-          <a:p>
-            <a:pPr algn="ctr"/>
-          </a:p>
-        </p:txBody>
-      </p:sp>
-      <p:sp>
-        <p:nvSpPr>
-          <p:cNvPr id="13" name="TextBox 12"/>
-          <p:cNvSpPr txBox="1"/>
-          <p:nvPr/>
-        </p:nvSpPr>
-        <p:spPr>
-          <a:xfrm>
-            <a:off x="914400" y="3886200"/>
-            <a:ext cx="1554480" cy="594360"/>
-          </a:xfrm>
-          <a:prstGeom prst="rect">
-            <a:avLst/>
-          </a:prstGeom>
-          <a:noFill/>
-        </p:spPr>
-        <p:txBody>
-          <a:bodyPr wrap="square" anchor="ctr" lIns="0" rIns="0" tIns="0" bIns="0">
-            <a:spAutoFit/>
-          </a:bodyPr>
-          <a:lstStyle/>
-          <a:p>
-            <a:pPr algn="ctr">
+              <a:t>Kid feels motivated by immediate credit</a:t>
+            </a:r>
+          </a:p>
+          <a:p>
+            <a:pPr indent="-201168" marL="201168">
               <a:lnSpc>
                 <a:spcPct val="115000"/>
               </a:lnSpc>
+              <a:spcAft>
+                <a:spcPts val="1000"/>
+              </a:spcAft>
+              <a:buClr>
+                <a:srgbClr val="FFFFFF"/>
+              </a:buClr>
+              <a:buFont typeface="Arial"/>
+              <a:buChar char="✓"/>
             </a:pPr>
             <a:r>
-              <a:rPr sz="1300" b="1" i="0">
-                <a:solidFill>
-                  <a:srgbClr val="2C5A44"/>
+              <a:rPr sz="1450">
+                <a:solidFill>
+                  <a:srgbClr val="FFFFFF"/>
                 </a:solidFill>
                 <a:latin typeface="Calibri"/>
               </a:rPr>
-              <a:t>Checklist</a:t>
-            </a:r>
-          </a:p>
-        </p:txBody>
-      </p:sp>
-      <p:sp>
-        <p:nvSpPr>
-          <p:cNvPr id="14" name="TextBox 13"/>
-          <p:cNvSpPr txBox="1"/>
-          <p:nvPr/>
-        </p:nvSpPr>
-        <p:spPr>
-          <a:xfrm>
-            <a:off x="2468880" y="3977639"/>
-            <a:ext cx="457200" cy="457200"/>
-          </a:xfrm>
-          <a:prstGeom prst="rect">
-            <a:avLst/>
-          </a:prstGeom>
-          <a:noFill/>
-        </p:spPr>
-        <p:txBody>
-          <a:bodyPr wrap="square" anchor="t" lIns="0" rIns="0" tIns="0" bIns="0">
-            <a:spAutoFit/>
-          </a:bodyPr>
-          <a:lstStyle/>
-          <a:p>
-            <a:pPr algn="ctr">
+              <a:t>Parent becomes a coach, not a warden</a:t>
+            </a:r>
+          </a:p>
+          <a:p>
+            <a:pPr indent="-201168" marL="201168">
               <a:lnSpc>
                 <a:spcPct val="115000"/>
               </a:lnSpc>
+              <a:spcAft>
+                <a:spcPts val="1000"/>
+              </a:spcAft>
+              <a:buClr>
+                <a:srgbClr val="FFFFFF"/>
+              </a:buClr>
+              <a:buFont typeface="Arial"/>
+              <a:buChar char="✓"/>
             </a:pPr>
             <a:r>
-              <a:rPr sz="2000" b="1" i="0">
-                <a:solidFill>
-                  <a:srgbClr val="DD6B42"/>
+              <a:rPr sz="1450">
+                <a:solidFill>
+                  <a:srgbClr val="FFFFFF"/>
                 </a:solidFill>
                 <a:latin typeface="Calibri"/>
               </a:rPr>
-              <a:t>→</a:t>
-            </a:r>
-          </a:p>
-        </p:txBody>
-      </p:sp>
-      <p:sp>
-        <p:nvSpPr>
-          <p:cNvPr id="15" name="Rounded Rectangle 14"/>
-          <p:cNvSpPr/>
-          <p:nvPr/>
-        </p:nvSpPr>
-        <p:spPr>
-          <a:xfrm>
-            <a:off x="2926080" y="3886200"/>
-            <a:ext cx="2286000" cy="594360"/>
-          </a:xfrm>
-          <a:prstGeom prst="roundRect">
-            <a:avLst>
-              <a:gd name="adj" fmla="val 10000"/>
-            </a:avLst>
-          </a:prstGeom>
-          <a:solidFill>
-            <a:srgbClr val="DCE8D9"/>
-          </a:solidFill>
-          <a:ln>
-            <a:noFill/>
-          </a:ln>
-          <a:effectLst/>
-        </p:spPr>
-        <p:style>
-          <a:lnRef idx="1">
-            <a:schemeClr val="accent1"/>
-          </a:lnRef>
-          <a:fillRef idx="3">
-            <a:schemeClr val="accent1"/>
-          </a:fillRef>
-          <a:effectRef idx="2">
-            <a:schemeClr val="accent1"/>
-          </a:effectRef>
-          <a:fontRef idx="minor">
-            <a:schemeClr val="lt1"/>
-          </a:fontRef>
-        </p:style>
-        <p:txBody>
-          <a:bodyPr rtlCol="0" anchor="ctr"/>
-          <a:lstStyle/>
-          <a:p>
-            <a:pPr algn="ctr"/>
-          </a:p>
-        </p:txBody>
-      </p:sp>
-      <p:sp>
-        <p:nvSpPr>
-          <p:cNvPr id="16" name="TextBox 15"/>
-          <p:cNvSpPr txBox="1"/>
-          <p:nvPr/>
-        </p:nvSpPr>
-        <p:spPr>
-          <a:xfrm>
-            <a:off x="2926080" y="3886200"/>
-            <a:ext cx="2286000" cy="594360"/>
-          </a:xfrm>
-          <a:prstGeom prst="rect">
-            <a:avLst/>
-          </a:prstGeom>
-          <a:noFill/>
-        </p:spPr>
-        <p:txBody>
-          <a:bodyPr wrap="square" anchor="ctr" lIns="0" rIns="0" tIns="0" bIns="0">
-            <a:spAutoFit/>
-          </a:bodyPr>
-          <a:lstStyle/>
-          <a:p>
-            <a:pPr algn="ctr">
+              <a:t>Every goal and reward is configurable</a:t>
+            </a:r>
+          </a:p>
+          <a:p>
+            <a:pPr indent="-201168" marL="201168">
               <a:lnSpc>
                 <a:spcPct val="115000"/>
               </a:lnSpc>
+              <a:spcAft>
+                <a:spcPts val="1000"/>
+              </a:spcAft>
+              <a:buClr>
+                <a:srgbClr val="FFFFFF"/>
+              </a:buClr>
+              <a:buFont typeface="Arial"/>
+              <a:buChar char="✓"/>
             </a:pPr>
             <a:r>
-              <a:rPr sz="1300" b="1" i="0">
-                <a:solidFill>
-                  <a:srgbClr val="2C5A44"/>
+              <a:rPr sz="1450">
+                <a:solidFill>
+                  <a:srgbClr val="FFFFFF"/>
                 </a:solidFill>
                 <a:latin typeface="Calibri"/>
               </a:rPr>
-              <a:t>Photo or PIN Proof</a:t>
-            </a:r>
-          </a:p>
-        </p:txBody>
-      </p:sp>
-      <p:sp>
-        <p:nvSpPr>
-          <p:cNvPr id="17" name="TextBox 16"/>
-          <p:cNvSpPr txBox="1"/>
-          <p:nvPr/>
-        </p:nvSpPr>
-        <p:spPr>
-          <a:xfrm>
-            <a:off x="5212080" y="3977639"/>
-            <a:ext cx="457200" cy="457200"/>
-          </a:xfrm>
-          <a:prstGeom prst="rect">
-            <a:avLst/>
-          </a:prstGeom>
-          <a:noFill/>
-        </p:spPr>
-        <p:txBody>
-          <a:bodyPr wrap="square" anchor="t" lIns="0" rIns="0" tIns="0" bIns="0">
-            <a:spAutoFit/>
-          </a:bodyPr>
-          <a:lstStyle/>
-          <a:p>
-            <a:pPr algn="ctr">
-              <a:lnSpc>
-                <a:spcPct val="115000"/>
-              </a:lnSpc>
-            </a:pPr>
-            <a:r>
-              <a:rPr sz="2000" b="1" i="0">
-                <a:solidFill>
-                  <a:srgbClr val="DD6B42"/>
-                </a:solidFill>
-                <a:latin typeface="Calibri"/>
-              </a:rPr>
-              <a:t>→</a:t>
-            </a:r>
-          </a:p>
-        </p:txBody>
-      </p:sp>
-      <p:sp>
-        <p:nvSpPr>
-          <p:cNvPr id="18" name="Rounded Rectangle 17"/>
-          <p:cNvSpPr/>
-          <p:nvPr/>
-        </p:nvSpPr>
-        <p:spPr>
-          <a:xfrm>
-            <a:off x="5669280" y="3886200"/>
-            <a:ext cx="2103120" cy="594360"/>
-          </a:xfrm>
-          <a:prstGeom prst="roundRect">
-            <a:avLst>
-              <a:gd name="adj" fmla="val 10000"/>
-            </a:avLst>
-          </a:prstGeom>
-          <a:solidFill>
-            <a:srgbClr val="DCE8D9"/>
-          </a:solidFill>
-          <a:ln>
-            <a:noFill/>
-          </a:ln>
-          <a:effectLst/>
-        </p:spPr>
-        <p:style>
-          <a:lnRef idx="1">
-            <a:schemeClr val="accent1"/>
-          </a:lnRef>
-          <a:fillRef idx="3">
-            <a:schemeClr val="accent1"/>
-          </a:fillRef>
-          <a:effectRef idx="2">
-            <a:schemeClr val="accent1"/>
-          </a:effectRef>
-          <a:fontRef idx="minor">
-            <a:schemeClr val="lt1"/>
-          </a:fontRef>
-        </p:style>
-        <p:txBody>
-          <a:bodyPr rtlCol="0" anchor="ctr"/>
-          <a:lstStyle/>
-          <a:p>
-            <a:pPr algn="ctr"/>
-          </a:p>
-        </p:txBody>
-      </p:sp>
-      <p:sp>
-        <p:nvSpPr>
-          <p:cNvPr id="19" name="TextBox 18"/>
-          <p:cNvSpPr txBox="1"/>
-          <p:nvPr/>
-        </p:nvSpPr>
-        <p:spPr>
-          <a:xfrm>
-            <a:off x="5669280" y="3886200"/>
-            <a:ext cx="2103120" cy="594360"/>
-          </a:xfrm>
-          <a:prstGeom prst="rect">
-            <a:avLst/>
-          </a:prstGeom>
-          <a:noFill/>
-        </p:spPr>
-        <p:txBody>
-          <a:bodyPr wrap="square" anchor="ctr" lIns="0" rIns="0" tIns="0" bIns="0">
-            <a:spAutoFit/>
-          </a:bodyPr>
-          <a:lstStyle/>
-          <a:p>
-            <a:pPr algn="ctr">
-              <a:lnSpc>
-                <a:spcPct val="115000"/>
-              </a:lnSpc>
-            </a:pPr>
-            <a:r>
-              <a:rPr sz="1300" b="1" i="0">
-                <a:solidFill>
-                  <a:srgbClr val="2C5A44"/>
-                </a:solidFill>
-                <a:latin typeface="Calibri"/>
-              </a:rPr>
-              <a:t>Minutes Banked</a:t>
-            </a:r>
-          </a:p>
-        </p:txBody>
-      </p:sp>
-      <p:sp>
-        <p:nvSpPr>
-          <p:cNvPr id="20" name="TextBox 19"/>
-          <p:cNvSpPr txBox="1"/>
-          <p:nvPr/>
-        </p:nvSpPr>
-        <p:spPr>
-          <a:xfrm>
-            <a:off x="7772400" y="3977639"/>
-            <a:ext cx="457200" cy="457200"/>
-          </a:xfrm>
-          <a:prstGeom prst="rect">
-            <a:avLst/>
-          </a:prstGeom>
-          <a:noFill/>
-        </p:spPr>
-        <p:txBody>
-          <a:bodyPr wrap="square" anchor="t" lIns="0" rIns="0" tIns="0" bIns="0">
-            <a:spAutoFit/>
-          </a:bodyPr>
-          <a:lstStyle/>
-          <a:p>
-            <a:pPr algn="ctr">
-              <a:lnSpc>
-                <a:spcPct val="115000"/>
-              </a:lnSpc>
-            </a:pPr>
-            <a:r>
-              <a:rPr sz="2000" b="1" i="0">
-                <a:solidFill>
-                  <a:srgbClr val="DD6B42"/>
-                </a:solidFill>
-                <a:latin typeface="Calibri"/>
-              </a:rPr>
-              <a:t>→</a:t>
-            </a:r>
-          </a:p>
-        </p:txBody>
-      </p:sp>
-      <p:sp>
-        <p:nvSpPr>
-          <p:cNvPr id="21" name="Rounded Rectangle 20"/>
-          <p:cNvSpPr/>
-          <p:nvPr/>
-        </p:nvSpPr>
-        <p:spPr>
-          <a:xfrm>
-            <a:off x="8229600" y="3886200"/>
-            <a:ext cx="1554480" cy="594360"/>
-          </a:xfrm>
-          <a:prstGeom prst="roundRect">
-            <a:avLst>
-              <a:gd name="adj" fmla="val 10000"/>
-            </a:avLst>
-          </a:prstGeom>
-          <a:solidFill>
-            <a:srgbClr val="DCE8D9"/>
-          </a:solidFill>
-          <a:ln>
-            <a:noFill/>
-          </a:ln>
-          <a:effectLst/>
-        </p:spPr>
-        <p:style>
-          <a:lnRef idx="1">
-            <a:schemeClr val="accent1"/>
-          </a:lnRef>
-          <a:fillRef idx="3">
-            <a:schemeClr val="accent1"/>
-          </a:fillRef>
-          <a:effectRef idx="2">
-            <a:schemeClr val="accent1"/>
-          </a:effectRef>
-          <a:fontRef idx="minor">
-            <a:schemeClr val="lt1"/>
-          </a:fontRef>
-        </p:style>
-        <p:txBody>
-          <a:bodyPr rtlCol="0" anchor="ctr"/>
-          <a:lstStyle/>
-          <a:p>
-            <a:pPr algn="ctr"/>
-          </a:p>
-        </p:txBody>
-      </p:sp>
-      <p:sp>
-        <p:nvSpPr>
-          <p:cNvPr id="22" name="TextBox 21"/>
-          <p:cNvSpPr txBox="1"/>
-          <p:nvPr/>
-        </p:nvSpPr>
-        <p:spPr>
-          <a:xfrm>
-            <a:off x="8229600" y="3886200"/>
-            <a:ext cx="1554480" cy="594360"/>
-          </a:xfrm>
-          <a:prstGeom prst="rect">
-            <a:avLst/>
-          </a:prstGeom>
-          <a:noFill/>
-        </p:spPr>
-        <p:txBody>
-          <a:bodyPr wrap="square" anchor="ctr" lIns="0" rIns="0" tIns="0" bIns="0">
-            <a:spAutoFit/>
-          </a:bodyPr>
-          <a:lstStyle/>
-          <a:p>
-            <a:pPr algn="ctr">
-              <a:lnSpc>
-                <a:spcPct val="115000"/>
-              </a:lnSpc>
-            </a:pPr>
-            <a:r>
-              <a:rPr sz="1300" b="1" i="0">
-                <a:solidFill>
-                  <a:srgbClr val="2C5A44"/>
-                </a:solidFill>
-                <a:latin typeface="Calibri"/>
-              </a:rPr>
-              <a:t>Unlock</a:t>
-            </a:r>
-          </a:p>
-        </p:txBody>
-      </p:sp>
-      <p:sp>
-        <p:nvSpPr>
-          <p:cNvPr id="23" name="Rounded Rectangle 22"/>
-          <p:cNvSpPr/>
-          <p:nvPr/>
-        </p:nvSpPr>
-        <p:spPr>
-          <a:xfrm>
-            <a:off x="822960" y="4846320"/>
-            <a:ext cx="10515600" cy="1371600"/>
-          </a:xfrm>
-          <a:prstGeom prst="roundRect">
-            <a:avLst>
-              <a:gd name="adj" fmla="val 10000"/>
-            </a:avLst>
-          </a:prstGeom>
-          <a:solidFill>
-            <a:srgbClr val="F5E7C9"/>
-          </a:solidFill>
-          <a:ln>
-            <a:noFill/>
-          </a:ln>
-          <a:effectLst/>
-        </p:spPr>
-        <p:style>
-          <a:lnRef idx="1">
-            <a:schemeClr val="accent1"/>
-          </a:lnRef>
-          <a:fillRef idx="3">
-            <a:schemeClr val="accent1"/>
-          </a:fillRef>
-          <a:effectRef idx="2">
-            <a:schemeClr val="accent1"/>
-          </a:effectRef>
-          <a:fontRef idx="minor">
-            <a:schemeClr val="lt1"/>
-          </a:fontRef>
-        </p:style>
-        <p:txBody>
-          <a:bodyPr rtlCol="0" anchor="ctr"/>
-          <a:lstStyle/>
-          <a:p>
-            <a:pPr algn="ctr"/>
-          </a:p>
-        </p:txBody>
-      </p:sp>
-      <p:sp>
-        <p:nvSpPr>
-          <p:cNvPr id="24" name="TextBox 23"/>
-          <p:cNvSpPr txBox="1"/>
-          <p:nvPr/>
-        </p:nvSpPr>
-        <p:spPr>
-          <a:xfrm>
-            <a:off x="1188720" y="5074920"/>
-            <a:ext cx="9784080" cy="914400"/>
-          </a:xfrm>
-          <a:prstGeom prst="rect">
-            <a:avLst/>
-          </a:prstGeom>
-          <a:noFill/>
-        </p:spPr>
-        <p:txBody>
-          <a:bodyPr wrap="square" anchor="ctr" lIns="0" rIns="0" tIns="0" bIns="0">
-            <a:spAutoFit/>
-          </a:bodyPr>
-          <a:lstStyle/>
-          <a:p>
-            <a:pPr algn="l">
-              <a:lnSpc>
-                <a:spcPct val="125000"/>
-              </a:lnSpc>
-            </a:pPr>
-            <a:r>
-              <a:rPr sz="1350" b="0" i="0">
-                <a:solidFill>
-                  <a:srgbClr val="2C5A44"/>
-                </a:solidFill>
-                <a:latin typeface="Calibri"/>
-              </a:rPr>
-              <a:t>The one exception: Sleep is checked each morning about last night's bedtime, not at night — a real bug we caught and fixed, so the reward is never gated on something unverifiable until after bedtime.</a:t>
+              <a:t>Screen time becomes a shared goal</a:t>
             </a:r>
           </a:p>
         </p:txBody>
@@ -6207,6 +6428,1016 @@
 </file>
 
 <file path=ppt/slides/slide5.xml><?xml version="1.0" encoding="utf-8"?>
+<p:sld xmlns:a="http://schemas.openxmlformats.org/drawingml/2006/main" xmlns:p="http://schemas.openxmlformats.org/presentationml/2006/main" xmlns:r="http://schemas.openxmlformats.org/officeDocument/2006/relationships">
+  <p:cSld>
+    <p:bg>
+      <p:bgPr>
+        <a:solidFill>
+          <a:srgbClr val="FFFFFF"/>
+        </a:solidFill>
+        <a:effectLst/>
+      </p:bgPr>
+    </p:bg>
+    <p:spTree>
+      <p:nvGrpSpPr>
+        <p:cNvPr id="1" name=""/>
+        <p:cNvGrpSpPr/>
+        <p:nvPr/>
+      </p:nvGrpSpPr>
+      <p:grpSpPr/>
+      <p:sp>
+        <p:nvSpPr>
+          <p:cNvPr id="2" name="TextBox 1"/>
+          <p:cNvSpPr txBox="1"/>
+          <p:nvPr/>
+        </p:nvSpPr>
+        <p:spPr>
+          <a:xfrm>
+            <a:off x="822960" y="502920"/>
+            <a:ext cx="7315200" cy="548640"/>
+          </a:xfrm>
+          <a:prstGeom prst="rect">
+            <a:avLst/>
+          </a:prstGeom>
+          <a:noFill/>
+        </p:spPr>
+        <p:txBody>
+          <a:bodyPr wrap="square" anchor="t" lIns="0" rIns="0" tIns="0" bIns="0">
+            <a:spAutoFit/>
+          </a:bodyPr>
+          <a:lstStyle/>
+          <a:p>
+            <a:pPr algn="l">
+              <a:lnSpc>
+                <a:spcPct val="115000"/>
+              </a:lnSpc>
+            </a:pPr>
+            <a:r>
+              <a:rPr sz="3000" b="1" i="0">
+                <a:solidFill>
+                  <a:srgbClr val="1F2D22"/>
+                </a:solidFill>
+                <a:latin typeface="Cambria"/>
+              </a:rPr>
+              <a:t>How It Works</a:t>
+            </a:r>
+          </a:p>
+        </p:txBody>
+      </p:sp>
+      <p:sp>
+        <p:nvSpPr>
+          <p:cNvPr id="3" name="TextBox 2"/>
+          <p:cNvSpPr txBox="1"/>
+          <p:nvPr/>
+        </p:nvSpPr>
+        <p:spPr>
+          <a:xfrm>
+            <a:off x="822960" y="1143000"/>
+            <a:ext cx="9601200" cy="548640"/>
+          </a:xfrm>
+          <a:prstGeom prst="rect">
+            <a:avLst/>
+          </a:prstGeom>
+          <a:noFill/>
+        </p:spPr>
+        <p:txBody>
+          <a:bodyPr wrap="square" anchor="t" lIns="0" rIns="0" tIns="0" bIns="0">
+            <a:spAutoFit/>
+          </a:bodyPr>
+          <a:lstStyle/>
+          <a:p>
+            <a:pPr algn="l">
+              <a:lnSpc>
+                <a:spcPct val="115000"/>
+              </a:lnSpc>
+            </a:pPr>
+            <a:r>
+              <a:rPr sz="1500" b="0" i="0">
+                <a:solidFill>
+                  <a:srgbClr val="5B6A5F"/>
+                </a:solidFill>
+                <a:latin typeface="Calibri"/>
+              </a:rPr>
+              <a:t>A daily checklist of health goals — proven honestly — banks screen time.</a:t>
+            </a:r>
+          </a:p>
+        </p:txBody>
+      </p:sp>
+      <p:sp>
+        <p:nvSpPr>
+          <p:cNvPr id="4" name="Oval 3"/>
+          <p:cNvSpPr/>
+          <p:nvPr/>
+        </p:nvSpPr>
+        <p:spPr>
+          <a:xfrm>
+            <a:off x="1280160" y="1965960"/>
+            <a:ext cx="1097280" cy="1097280"/>
+          </a:xfrm>
+          <a:prstGeom prst="ellipse">
+            <a:avLst/>
+          </a:prstGeom>
+          <a:solidFill>
+            <a:srgbClr val="DCE8D9"/>
+          </a:solidFill>
+          <a:ln>
+            <a:noFill/>
+          </a:ln>
+          <a:effectLst/>
+        </p:spPr>
+        <p:style>
+          <a:lnRef idx="1">
+            <a:schemeClr val="accent1"/>
+          </a:lnRef>
+          <a:fillRef idx="3">
+            <a:schemeClr val="accent1"/>
+          </a:fillRef>
+          <a:effectRef idx="2">
+            <a:schemeClr val="accent1"/>
+          </a:effectRef>
+          <a:fontRef idx="minor">
+            <a:schemeClr val="lt1"/>
+          </a:fontRef>
+        </p:style>
+        <p:txBody>
+          <a:bodyPr rtlCol="0" anchor="ctr" lIns="0" rIns="0" tIns="0" bIns="0" wrap="none"/>
+          <a:lstStyle/>
+          <a:p>
+            <a:pPr algn="ctr"/>
+            <a:r>
+              <a:rPr sz="3300">
+                <a:solidFill>
+                  <a:srgbClr val="3E7A5C"/>
+                </a:solidFill>
+              </a:rPr>
+              <a:t>💧</a:t>
+            </a:r>
+          </a:p>
+        </p:txBody>
+      </p:sp>
+      <p:sp>
+        <p:nvSpPr>
+          <p:cNvPr id="5" name="TextBox 4"/>
+          <p:cNvSpPr txBox="1"/>
+          <p:nvPr/>
+        </p:nvSpPr>
+        <p:spPr>
+          <a:xfrm>
+            <a:off x="1005840" y="3154680"/>
+            <a:ext cx="1645920" cy="365760"/>
+          </a:xfrm>
+          <a:prstGeom prst="rect">
+            <a:avLst/>
+          </a:prstGeom>
+          <a:noFill/>
+        </p:spPr>
+        <p:txBody>
+          <a:bodyPr wrap="square" anchor="t" lIns="0" rIns="0" tIns="0" bIns="0">
+            <a:spAutoFit/>
+          </a:bodyPr>
+          <a:lstStyle/>
+          <a:p>
+            <a:pPr algn="ctr">
+              <a:lnSpc>
+                <a:spcPct val="115000"/>
+              </a:lnSpc>
+            </a:pPr>
+            <a:r>
+              <a:rPr sz="1400" b="1" i="0">
+                <a:solidFill>
+                  <a:srgbClr val="1F2D22"/>
+                </a:solidFill>
+                <a:latin typeface="Calibri"/>
+              </a:rPr>
+              <a:t>Water</a:t>
+            </a:r>
+          </a:p>
+        </p:txBody>
+      </p:sp>
+      <p:sp>
+        <p:nvSpPr>
+          <p:cNvPr id="6" name="Oval 5"/>
+          <p:cNvSpPr/>
+          <p:nvPr/>
+        </p:nvSpPr>
+        <p:spPr>
+          <a:xfrm>
+            <a:off x="3611879" y="1965960"/>
+            <a:ext cx="1097280" cy="1097280"/>
+          </a:xfrm>
+          <a:prstGeom prst="ellipse">
+            <a:avLst/>
+          </a:prstGeom>
+          <a:solidFill>
+            <a:srgbClr val="F7E1D5"/>
+          </a:solidFill>
+          <a:ln>
+            <a:noFill/>
+          </a:ln>
+          <a:effectLst/>
+        </p:spPr>
+        <p:style>
+          <a:lnRef idx="1">
+            <a:schemeClr val="accent1"/>
+          </a:lnRef>
+          <a:fillRef idx="3">
+            <a:schemeClr val="accent1"/>
+          </a:fillRef>
+          <a:effectRef idx="2">
+            <a:schemeClr val="accent1"/>
+          </a:effectRef>
+          <a:fontRef idx="minor">
+            <a:schemeClr val="lt1"/>
+          </a:fontRef>
+        </p:style>
+        <p:txBody>
+          <a:bodyPr rtlCol="0" anchor="ctr" lIns="0" rIns="0" tIns="0" bIns="0" wrap="none"/>
+          <a:lstStyle/>
+          <a:p>
+            <a:pPr algn="ctr"/>
+            <a:r>
+              <a:rPr sz="3300">
+                <a:solidFill>
+                  <a:srgbClr val="DD6B42"/>
+                </a:solidFill>
+              </a:rPr>
+              <a:t>🏃</a:t>
+            </a:r>
+          </a:p>
+        </p:txBody>
+      </p:sp>
+      <p:sp>
+        <p:nvSpPr>
+          <p:cNvPr id="7" name="TextBox 6"/>
+          <p:cNvSpPr txBox="1"/>
+          <p:nvPr/>
+        </p:nvSpPr>
+        <p:spPr>
+          <a:xfrm>
+            <a:off x="3337560" y="3154680"/>
+            <a:ext cx="1645920" cy="365760"/>
+          </a:xfrm>
+          <a:prstGeom prst="rect">
+            <a:avLst/>
+          </a:prstGeom>
+          <a:noFill/>
+        </p:spPr>
+        <p:txBody>
+          <a:bodyPr wrap="square" anchor="t" lIns="0" rIns="0" tIns="0" bIns="0">
+            <a:spAutoFit/>
+          </a:bodyPr>
+          <a:lstStyle/>
+          <a:p>
+            <a:pPr algn="ctr">
+              <a:lnSpc>
+                <a:spcPct val="115000"/>
+              </a:lnSpc>
+            </a:pPr>
+            <a:r>
+              <a:rPr sz="1400" b="1" i="0">
+                <a:solidFill>
+                  <a:srgbClr val="1F2D22"/>
+                </a:solidFill>
+                <a:latin typeface="Calibri"/>
+              </a:rPr>
+              <a:t>Move</a:t>
+            </a:r>
+          </a:p>
+        </p:txBody>
+      </p:sp>
+      <p:sp>
+        <p:nvSpPr>
+          <p:cNvPr id="8" name="Oval 7"/>
+          <p:cNvSpPr/>
+          <p:nvPr/>
+        </p:nvSpPr>
+        <p:spPr>
+          <a:xfrm>
+            <a:off x="5943600" y="1965960"/>
+            <a:ext cx="1097280" cy="1097280"/>
+          </a:xfrm>
+          <a:prstGeom prst="ellipse">
+            <a:avLst/>
+          </a:prstGeom>
+          <a:solidFill>
+            <a:srgbClr val="E2E2F5"/>
+          </a:solidFill>
+          <a:ln>
+            <a:noFill/>
+          </a:ln>
+          <a:effectLst/>
+        </p:spPr>
+        <p:style>
+          <a:lnRef idx="1">
+            <a:schemeClr val="accent1"/>
+          </a:lnRef>
+          <a:fillRef idx="3">
+            <a:schemeClr val="accent1"/>
+          </a:fillRef>
+          <a:effectRef idx="2">
+            <a:schemeClr val="accent1"/>
+          </a:effectRef>
+          <a:fontRef idx="minor">
+            <a:schemeClr val="lt1"/>
+          </a:fontRef>
+        </p:style>
+        <p:txBody>
+          <a:bodyPr rtlCol="0" anchor="ctr" lIns="0" rIns="0" tIns="0" bIns="0" wrap="none"/>
+          <a:lstStyle/>
+          <a:p>
+            <a:pPr algn="ctr"/>
+            <a:r>
+              <a:rPr sz="3300">
+                <a:solidFill>
+                  <a:srgbClr val="6E6FBF"/>
+                </a:solidFill>
+              </a:rPr>
+              <a:t>🌙</a:t>
+            </a:r>
+          </a:p>
+        </p:txBody>
+      </p:sp>
+      <p:sp>
+        <p:nvSpPr>
+          <p:cNvPr id="9" name="TextBox 8"/>
+          <p:cNvSpPr txBox="1"/>
+          <p:nvPr/>
+        </p:nvSpPr>
+        <p:spPr>
+          <a:xfrm>
+            <a:off x="5669279" y="3154680"/>
+            <a:ext cx="1645920" cy="365760"/>
+          </a:xfrm>
+          <a:prstGeom prst="rect">
+            <a:avLst/>
+          </a:prstGeom>
+          <a:noFill/>
+        </p:spPr>
+        <p:txBody>
+          <a:bodyPr wrap="square" anchor="t" lIns="0" rIns="0" tIns="0" bIns="0">
+            <a:spAutoFit/>
+          </a:bodyPr>
+          <a:lstStyle/>
+          <a:p>
+            <a:pPr algn="ctr">
+              <a:lnSpc>
+                <a:spcPct val="115000"/>
+              </a:lnSpc>
+            </a:pPr>
+            <a:r>
+              <a:rPr sz="1400" b="1" i="0">
+                <a:solidFill>
+                  <a:srgbClr val="1F2D22"/>
+                </a:solidFill>
+                <a:latin typeface="Calibri"/>
+              </a:rPr>
+              <a:t>Sleep</a:t>
+            </a:r>
+          </a:p>
+        </p:txBody>
+      </p:sp>
+      <p:sp>
+        <p:nvSpPr>
+          <p:cNvPr id="10" name="Oval 9"/>
+          <p:cNvSpPr/>
+          <p:nvPr/>
+        </p:nvSpPr>
+        <p:spPr>
+          <a:xfrm>
+            <a:off x="8275320" y="1965960"/>
+            <a:ext cx="1097280" cy="1097280"/>
+          </a:xfrm>
+          <a:prstGeom prst="ellipse">
+            <a:avLst/>
+          </a:prstGeom>
+          <a:solidFill>
+            <a:srgbClr val="F7E1D5"/>
+          </a:solidFill>
+          <a:ln>
+            <a:noFill/>
+          </a:ln>
+          <a:effectLst/>
+        </p:spPr>
+        <p:style>
+          <a:lnRef idx="1">
+            <a:schemeClr val="accent1"/>
+          </a:lnRef>
+          <a:fillRef idx="3">
+            <a:schemeClr val="accent1"/>
+          </a:fillRef>
+          <a:effectRef idx="2">
+            <a:schemeClr val="accent1"/>
+          </a:effectRef>
+          <a:fontRef idx="minor">
+            <a:schemeClr val="lt1"/>
+          </a:fontRef>
+        </p:style>
+        <p:txBody>
+          <a:bodyPr rtlCol="0" anchor="ctr" lIns="0" rIns="0" tIns="0" bIns="0" wrap="none"/>
+          <a:lstStyle/>
+          <a:p>
+            <a:pPr algn="ctr"/>
+            <a:r>
+              <a:rPr sz="3300">
+                <a:solidFill>
+                  <a:srgbClr val="DD6B42"/>
+                </a:solidFill>
+              </a:rPr>
+              <a:t>🍎</a:t>
+            </a:r>
+          </a:p>
+        </p:txBody>
+      </p:sp>
+      <p:sp>
+        <p:nvSpPr>
+          <p:cNvPr id="11" name="TextBox 10"/>
+          <p:cNvSpPr txBox="1"/>
+          <p:nvPr/>
+        </p:nvSpPr>
+        <p:spPr>
+          <a:xfrm>
+            <a:off x="8001000" y="3154680"/>
+            <a:ext cx="1645920" cy="365760"/>
+          </a:xfrm>
+          <a:prstGeom prst="rect">
+            <a:avLst/>
+          </a:prstGeom>
+          <a:noFill/>
+        </p:spPr>
+        <p:txBody>
+          <a:bodyPr wrap="square" anchor="t" lIns="0" rIns="0" tIns="0" bIns="0">
+            <a:spAutoFit/>
+          </a:bodyPr>
+          <a:lstStyle/>
+          <a:p>
+            <a:pPr algn="ctr">
+              <a:lnSpc>
+                <a:spcPct val="115000"/>
+              </a:lnSpc>
+            </a:pPr>
+            <a:r>
+              <a:rPr sz="1400" b="1" i="0">
+                <a:solidFill>
+                  <a:srgbClr val="1F2D22"/>
+                </a:solidFill>
+                <a:latin typeface="Calibri"/>
+              </a:rPr>
+              <a:t>Fruit</a:t>
+            </a:r>
+          </a:p>
+        </p:txBody>
+      </p:sp>
+      <p:sp>
+        <p:nvSpPr>
+          <p:cNvPr id="12" name="Rounded Rectangle 11"/>
+          <p:cNvSpPr/>
+          <p:nvPr/>
+        </p:nvSpPr>
+        <p:spPr>
+          <a:xfrm>
+            <a:off x="914400" y="3886200"/>
+            <a:ext cx="1554480" cy="594360"/>
+          </a:xfrm>
+          <a:prstGeom prst="roundRect">
+            <a:avLst>
+              <a:gd name="adj" fmla="val 10000"/>
+            </a:avLst>
+          </a:prstGeom>
+          <a:solidFill>
+            <a:srgbClr val="DCE8D9"/>
+          </a:solidFill>
+          <a:ln>
+            <a:noFill/>
+          </a:ln>
+          <a:effectLst/>
+        </p:spPr>
+        <p:style>
+          <a:lnRef idx="1">
+            <a:schemeClr val="accent1"/>
+          </a:lnRef>
+          <a:fillRef idx="3">
+            <a:schemeClr val="accent1"/>
+          </a:fillRef>
+          <a:effectRef idx="2">
+            <a:schemeClr val="accent1"/>
+          </a:effectRef>
+          <a:fontRef idx="minor">
+            <a:schemeClr val="lt1"/>
+          </a:fontRef>
+        </p:style>
+        <p:txBody>
+          <a:bodyPr rtlCol="0" anchor="ctr"/>
+          <a:lstStyle/>
+          <a:p>
+            <a:pPr algn="ctr"/>
+          </a:p>
+        </p:txBody>
+      </p:sp>
+      <p:sp>
+        <p:nvSpPr>
+          <p:cNvPr id="13" name="TextBox 12"/>
+          <p:cNvSpPr txBox="1"/>
+          <p:nvPr/>
+        </p:nvSpPr>
+        <p:spPr>
+          <a:xfrm>
+            <a:off x="914400" y="3886200"/>
+            <a:ext cx="1554480" cy="594360"/>
+          </a:xfrm>
+          <a:prstGeom prst="rect">
+            <a:avLst/>
+          </a:prstGeom>
+          <a:noFill/>
+        </p:spPr>
+        <p:txBody>
+          <a:bodyPr wrap="square" anchor="ctr" lIns="0" rIns="0" tIns="0" bIns="0">
+            <a:spAutoFit/>
+          </a:bodyPr>
+          <a:lstStyle/>
+          <a:p>
+            <a:pPr algn="ctr">
+              <a:lnSpc>
+                <a:spcPct val="115000"/>
+              </a:lnSpc>
+            </a:pPr>
+            <a:r>
+              <a:rPr sz="1300" b="1" i="0">
+                <a:solidFill>
+                  <a:srgbClr val="2C5A44"/>
+                </a:solidFill>
+                <a:latin typeface="Calibri"/>
+              </a:rPr>
+              <a:t>Checklist</a:t>
+            </a:r>
+          </a:p>
+        </p:txBody>
+      </p:sp>
+      <p:sp>
+        <p:nvSpPr>
+          <p:cNvPr id="14" name="TextBox 13"/>
+          <p:cNvSpPr txBox="1"/>
+          <p:nvPr/>
+        </p:nvSpPr>
+        <p:spPr>
+          <a:xfrm>
+            <a:off x="2468880" y="3977639"/>
+            <a:ext cx="457200" cy="457200"/>
+          </a:xfrm>
+          <a:prstGeom prst="rect">
+            <a:avLst/>
+          </a:prstGeom>
+          <a:noFill/>
+        </p:spPr>
+        <p:txBody>
+          <a:bodyPr wrap="square" anchor="t" lIns="0" rIns="0" tIns="0" bIns="0">
+            <a:spAutoFit/>
+          </a:bodyPr>
+          <a:lstStyle/>
+          <a:p>
+            <a:pPr algn="ctr">
+              <a:lnSpc>
+                <a:spcPct val="115000"/>
+              </a:lnSpc>
+            </a:pPr>
+            <a:r>
+              <a:rPr sz="2000" b="1" i="0">
+                <a:solidFill>
+                  <a:srgbClr val="DD6B42"/>
+                </a:solidFill>
+                <a:latin typeface="Calibri"/>
+              </a:rPr>
+              <a:t>→</a:t>
+            </a:r>
+          </a:p>
+        </p:txBody>
+      </p:sp>
+      <p:sp>
+        <p:nvSpPr>
+          <p:cNvPr id="15" name="Rounded Rectangle 14"/>
+          <p:cNvSpPr/>
+          <p:nvPr/>
+        </p:nvSpPr>
+        <p:spPr>
+          <a:xfrm>
+            <a:off x="2926080" y="3886200"/>
+            <a:ext cx="2286000" cy="594360"/>
+          </a:xfrm>
+          <a:prstGeom prst="roundRect">
+            <a:avLst>
+              <a:gd name="adj" fmla="val 10000"/>
+            </a:avLst>
+          </a:prstGeom>
+          <a:solidFill>
+            <a:srgbClr val="DCE8D9"/>
+          </a:solidFill>
+          <a:ln>
+            <a:noFill/>
+          </a:ln>
+          <a:effectLst/>
+        </p:spPr>
+        <p:style>
+          <a:lnRef idx="1">
+            <a:schemeClr val="accent1"/>
+          </a:lnRef>
+          <a:fillRef idx="3">
+            <a:schemeClr val="accent1"/>
+          </a:fillRef>
+          <a:effectRef idx="2">
+            <a:schemeClr val="accent1"/>
+          </a:effectRef>
+          <a:fontRef idx="minor">
+            <a:schemeClr val="lt1"/>
+          </a:fontRef>
+        </p:style>
+        <p:txBody>
+          <a:bodyPr rtlCol="0" anchor="ctr"/>
+          <a:lstStyle/>
+          <a:p>
+            <a:pPr algn="ctr"/>
+          </a:p>
+        </p:txBody>
+      </p:sp>
+      <p:sp>
+        <p:nvSpPr>
+          <p:cNvPr id="16" name="TextBox 15"/>
+          <p:cNvSpPr txBox="1"/>
+          <p:nvPr/>
+        </p:nvSpPr>
+        <p:spPr>
+          <a:xfrm>
+            <a:off x="2926080" y="3886200"/>
+            <a:ext cx="2286000" cy="594360"/>
+          </a:xfrm>
+          <a:prstGeom prst="rect">
+            <a:avLst/>
+          </a:prstGeom>
+          <a:noFill/>
+        </p:spPr>
+        <p:txBody>
+          <a:bodyPr wrap="square" anchor="ctr" lIns="0" rIns="0" tIns="0" bIns="0">
+            <a:spAutoFit/>
+          </a:bodyPr>
+          <a:lstStyle/>
+          <a:p>
+            <a:pPr algn="ctr">
+              <a:lnSpc>
+                <a:spcPct val="115000"/>
+              </a:lnSpc>
+            </a:pPr>
+            <a:r>
+              <a:rPr sz="1300" b="1" i="0">
+                <a:solidFill>
+                  <a:srgbClr val="2C5A44"/>
+                </a:solidFill>
+                <a:latin typeface="Calibri"/>
+              </a:rPr>
+              <a:t>Photo or PIN Proof</a:t>
+            </a:r>
+          </a:p>
+        </p:txBody>
+      </p:sp>
+      <p:sp>
+        <p:nvSpPr>
+          <p:cNvPr id="17" name="TextBox 16"/>
+          <p:cNvSpPr txBox="1"/>
+          <p:nvPr/>
+        </p:nvSpPr>
+        <p:spPr>
+          <a:xfrm>
+            <a:off x="5212080" y="3977639"/>
+            <a:ext cx="457200" cy="457200"/>
+          </a:xfrm>
+          <a:prstGeom prst="rect">
+            <a:avLst/>
+          </a:prstGeom>
+          <a:noFill/>
+        </p:spPr>
+        <p:txBody>
+          <a:bodyPr wrap="square" anchor="t" lIns="0" rIns="0" tIns="0" bIns="0">
+            <a:spAutoFit/>
+          </a:bodyPr>
+          <a:lstStyle/>
+          <a:p>
+            <a:pPr algn="ctr">
+              <a:lnSpc>
+                <a:spcPct val="115000"/>
+              </a:lnSpc>
+            </a:pPr>
+            <a:r>
+              <a:rPr sz="2000" b="1" i="0">
+                <a:solidFill>
+                  <a:srgbClr val="DD6B42"/>
+                </a:solidFill>
+                <a:latin typeface="Calibri"/>
+              </a:rPr>
+              <a:t>→</a:t>
+            </a:r>
+          </a:p>
+        </p:txBody>
+      </p:sp>
+      <p:sp>
+        <p:nvSpPr>
+          <p:cNvPr id="18" name="Rounded Rectangle 17"/>
+          <p:cNvSpPr/>
+          <p:nvPr/>
+        </p:nvSpPr>
+        <p:spPr>
+          <a:xfrm>
+            <a:off x="5669280" y="3886200"/>
+            <a:ext cx="2103120" cy="594360"/>
+          </a:xfrm>
+          <a:prstGeom prst="roundRect">
+            <a:avLst>
+              <a:gd name="adj" fmla="val 10000"/>
+            </a:avLst>
+          </a:prstGeom>
+          <a:solidFill>
+            <a:srgbClr val="DCE8D9"/>
+          </a:solidFill>
+          <a:ln>
+            <a:noFill/>
+          </a:ln>
+          <a:effectLst/>
+        </p:spPr>
+        <p:style>
+          <a:lnRef idx="1">
+            <a:schemeClr val="accent1"/>
+          </a:lnRef>
+          <a:fillRef idx="3">
+            <a:schemeClr val="accent1"/>
+          </a:fillRef>
+          <a:effectRef idx="2">
+            <a:schemeClr val="accent1"/>
+          </a:effectRef>
+          <a:fontRef idx="minor">
+            <a:schemeClr val="lt1"/>
+          </a:fontRef>
+        </p:style>
+        <p:txBody>
+          <a:bodyPr rtlCol="0" anchor="ctr"/>
+          <a:lstStyle/>
+          <a:p>
+            <a:pPr algn="ctr"/>
+          </a:p>
+        </p:txBody>
+      </p:sp>
+      <p:sp>
+        <p:nvSpPr>
+          <p:cNvPr id="19" name="TextBox 18"/>
+          <p:cNvSpPr txBox="1"/>
+          <p:nvPr/>
+        </p:nvSpPr>
+        <p:spPr>
+          <a:xfrm>
+            <a:off x="5669280" y="3886200"/>
+            <a:ext cx="2103120" cy="594360"/>
+          </a:xfrm>
+          <a:prstGeom prst="rect">
+            <a:avLst/>
+          </a:prstGeom>
+          <a:noFill/>
+        </p:spPr>
+        <p:txBody>
+          <a:bodyPr wrap="square" anchor="ctr" lIns="0" rIns="0" tIns="0" bIns="0">
+            <a:spAutoFit/>
+          </a:bodyPr>
+          <a:lstStyle/>
+          <a:p>
+            <a:pPr algn="ctr">
+              <a:lnSpc>
+                <a:spcPct val="115000"/>
+              </a:lnSpc>
+            </a:pPr>
+            <a:r>
+              <a:rPr sz="1300" b="1" i="0">
+                <a:solidFill>
+                  <a:srgbClr val="2C5A44"/>
+                </a:solidFill>
+                <a:latin typeface="Calibri"/>
+              </a:rPr>
+              <a:t>Minutes Banked</a:t>
+            </a:r>
+          </a:p>
+        </p:txBody>
+      </p:sp>
+      <p:sp>
+        <p:nvSpPr>
+          <p:cNvPr id="20" name="TextBox 19"/>
+          <p:cNvSpPr txBox="1"/>
+          <p:nvPr/>
+        </p:nvSpPr>
+        <p:spPr>
+          <a:xfrm>
+            <a:off x="7772400" y="3977639"/>
+            <a:ext cx="457200" cy="457200"/>
+          </a:xfrm>
+          <a:prstGeom prst="rect">
+            <a:avLst/>
+          </a:prstGeom>
+          <a:noFill/>
+        </p:spPr>
+        <p:txBody>
+          <a:bodyPr wrap="square" anchor="t" lIns="0" rIns="0" tIns="0" bIns="0">
+            <a:spAutoFit/>
+          </a:bodyPr>
+          <a:lstStyle/>
+          <a:p>
+            <a:pPr algn="ctr">
+              <a:lnSpc>
+                <a:spcPct val="115000"/>
+              </a:lnSpc>
+            </a:pPr>
+            <a:r>
+              <a:rPr sz="2000" b="1" i="0">
+                <a:solidFill>
+                  <a:srgbClr val="DD6B42"/>
+                </a:solidFill>
+                <a:latin typeface="Calibri"/>
+              </a:rPr>
+              <a:t>→</a:t>
+            </a:r>
+          </a:p>
+        </p:txBody>
+      </p:sp>
+      <p:sp>
+        <p:nvSpPr>
+          <p:cNvPr id="21" name="Rounded Rectangle 20"/>
+          <p:cNvSpPr/>
+          <p:nvPr/>
+        </p:nvSpPr>
+        <p:spPr>
+          <a:xfrm>
+            <a:off x="8229600" y="3886200"/>
+            <a:ext cx="1554480" cy="594360"/>
+          </a:xfrm>
+          <a:prstGeom prst="roundRect">
+            <a:avLst>
+              <a:gd name="adj" fmla="val 10000"/>
+            </a:avLst>
+          </a:prstGeom>
+          <a:solidFill>
+            <a:srgbClr val="DCE8D9"/>
+          </a:solidFill>
+          <a:ln>
+            <a:noFill/>
+          </a:ln>
+          <a:effectLst/>
+        </p:spPr>
+        <p:style>
+          <a:lnRef idx="1">
+            <a:schemeClr val="accent1"/>
+          </a:lnRef>
+          <a:fillRef idx="3">
+            <a:schemeClr val="accent1"/>
+          </a:fillRef>
+          <a:effectRef idx="2">
+            <a:schemeClr val="accent1"/>
+          </a:effectRef>
+          <a:fontRef idx="minor">
+            <a:schemeClr val="lt1"/>
+          </a:fontRef>
+        </p:style>
+        <p:txBody>
+          <a:bodyPr rtlCol="0" anchor="ctr"/>
+          <a:lstStyle/>
+          <a:p>
+            <a:pPr algn="ctr"/>
+          </a:p>
+        </p:txBody>
+      </p:sp>
+      <p:sp>
+        <p:nvSpPr>
+          <p:cNvPr id="22" name="TextBox 21"/>
+          <p:cNvSpPr txBox="1"/>
+          <p:nvPr/>
+        </p:nvSpPr>
+        <p:spPr>
+          <a:xfrm>
+            <a:off x="8229600" y="3886200"/>
+            <a:ext cx="1554480" cy="594360"/>
+          </a:xfrm>
+          <a:prstGeom prst="rect">
+            <a:avLst/>
+          </a:prstGeom>
+          <a:noFill/>
+        </p:spPr>
+        <p:txBody>
+          <a:bodyPr wrap="square" anchor="ctr" lIns="0" rIns="0" tIns="0" bIns="0">
+            <a:spAutoFit/>
+          </a:bodyPr>
+          <a:lstStyle/>
+          <a:p>
+            <a:pPr algn="ctr">
+              <a:lnSpc>
+                <a:spcPct val="115000"/>
+              </a:lnSpc>
+            </a:pPr>
+            <a:r>
+              <a:rPr sz="1300" b="1" i="0">
+                <a:solidFill>
+                  <a:srgbClr val="2C5A44"/>
+                </a:solidFill>
+                <a:latin typeface="Calibri"/>
+              </a:rPr>
+              <a:t>Unlock</a:t>
+            </a:r>
+          </a:p>
+        </p:txBody>
+      </p:sp>
+      <p:sp>
+        <p:nvSpPr>
+          <p:cNvPr id="23" name="Rounded Rectangle 22"/>
+          <p:cNvSpPr/>
+          <p:nvPr/>
+        </p:nvSpPr>
+        <p:spPr>
+          <a:xfrm>
+            <a:off x="822960" y="4846320"/>
+            <a:ext cx="10515600" cy="1371600"/>
+          </a:xfrm>
+          <a:prstGeom prst="roundRect">
+            <a:avLst>
+              <a:gd name="adj" fmla="val 10000"/>
+            </a:avLst>
+          </a:prstGeom>
+          <a:solidFill>
+            <a:srgbClr val="F5E7C9"/>
+          </a:solidFill>
+          <a:ln>
+            <a:noFill/>
+          </a:ln>
+          <a:effectLst/>
+        </p:spPr>
+        <p:style>
+          <a:lnRef idx="1">
+            <a:schemeClr val="accent1"/>
+          </a:lnRef>
+          <a:fillRef idx="3">
+            <a:schemeClr val="accent1"/>
+          </a:fillRef>
+          <a:effectRef idx="2">
+            <a:schemeClr val="accent1"/>
+          </a:effectRef>
+          <a:fontRef idx="minor">
+            <a:schemeClr val="lt1"/>
+          </a:fontRef>
+        </p:style>
+        <p:txBody>
+          <a:bodyPr rtlCol="0" anchor="ctr"/>
+          <a:lstStyle/>
+          <a:p>
+            <a:pPr algn="ctr"/>
+          </a:p>
+        </p:txBody>
+      </p:sp>
+      <p:sp>
+        <p:nvSpPr>
+          <p:cNvPr id="24" name="TextBox 23"/>
+          <p:cNvSpPr txBox="1"/>
+          <p:nvPr/>
+        </p:nvSpPr>
+        <p:spPr>
+          <a:xfrm>
+            <a:off x="1188720" y="5074920"/>
+            <a:ext cx="9784080" cy="914400"/>
+          </a:xfrm>
+          <a:prstGeom prst="rect">
+            <a:avLst/>
+          </a:prstGeom>
+          <a:noFill/>
+        </p:spPr>
+        <p:txBody>
+          <a:bodyPr wrap="square" anchor="ctr" lIns="0" rIns="0" tIns="0" bIns="0">
+            <a:spAutoFit/>
+          </a:bodyPr>
+          <a:lstStyle/>
+          <a:p>
+            <a:pPr algn="l">
+              <a:lnSpc>
+                <a:spcPct val="125000"/>
+              </a:lnSpc>
+            </a:pPr>
+            <a:r>
+              <a:rPr sz="1350" b="0" i="0">
+                <a:solidFill>
+                  <a:srgbClr val="2C5A44"/>
+                </a:solidFill>
+                <a:latin typeface="Calibri"/>
+              </a:rPr>
+              <a:t>The one exception: Sleep is checked each morning about last night's bedtime, not at night — a real bug we caught and fixed, so the reward is never gated on something unverifiable until after bedtime.</a:t>
+            </a:r>
+          </a:p>
+        </p:txBody>
+      </p:sp>
+    </p:spTree>
+  </p:cSld>
+  <p:clrMapOvr>
+    <a:masterClrMapping/>
+  </p:clrMapOvr>
+</p:sld>
+</file>
+
+<file path=ppt/slides/slide6.xml><?xml version="1.0" encoding="utf-8"?>
 <p:sld xmlns:a="http://schemas.openxmlformats.org/drawingml/2006/main" xmlns:p="http://schemas.openxmlformats.org/presentationml/2006/main" xmlns:r="http://schemas.openxmlformats.org/officeDocument/2006/relationships">
   <p:cSld>
     <p:bg>
@@ -6891,7 +8122,7 @@
 </p:sld>
 </file>
 
-<file path=ppt/slides/slide6.xml><?xml version="1.0" encoding="utf-8"?>
+<file path=ppt/slides/slide7.xml><?xml version="1.0" encoding="utf-8"?>
 <p:sld xmlns:a="http://schemas.openxmlformats.org/drawingml/2006/main" xmlns:p="http://schemas.openxmlformats.org/presentationml/2006/main" xmlns:r="http://schemas.openxmlformats.org/officeDocument/2006/relationships">
   <p:cSld>
     <p:bg>
@@ -7660,7 +8891,7 @@
 </p:sld>
 </file>
 
-<file path=ppt/slides/slide7.xml><?xml version="1.0" encoding="utf-8"?>
+<file path=ppt/slides/slide8.xml><?xml version="1.0" encoding="utf-8"?>
 <p:sld xmlns:a="http://schemas.openxmlformats.org/drawingml/2006/main" xmlns:p="http://schemas.openxmlformats.org/presentationml/2006/main" xmlns:r="http://schemas.openxmlformats.org/officeDocument/2006/relationships">
   <p:cSld>
     <p:bg>
@@ -8340,7 +9571,7 @@
 </p:sld>
 </file>
 
-<file path=ppt/slides/slide8.xml><?xml version="1.0" encoding="utf-8"?>
+<file path=ppt/slides/slide9.xml><?xml version="1.0" encoding="utf-8"?>
 <p:sld xmlns:a="http://schemas.openxmlformats.org/drawingml/2006/main" xmlns:p="http://schemas.openxmlformats.org/presentationml/2006/main" xmlns:r="http://schemas.openxmlformats.org/officeDocument/2006/relationships">
   <p:cSld>
     <p:bg>

--- a/Health_First_Week6_Pitch.pptx
+++ b/Health_First_Week6_Pitch.pptx
@@ -6895,8 +6895,8 @@
         </p:nvSpPr>
         <p:spPr>
           <a:xfrm>
-            <a:off x="914400" y="3886200"/>
-            <a:ext cx="1554480" cy="594360"/>
+            <a:off x="822960" y="3886200"/>
+            <a:ext cx="1371600" cy="594360"/>
           </a:xfrm>
           <a:prstGeom prst="roundRect">
             <a:avLst>
@@ -6941,8 +6941,8 @@
         </p:nvSpPr>
         <p:spPr>
           <a:xfrm>
-            <a:off x="914400" y="3886200"/>
-            <a:ext cx="1554480" cy="594360"/>
+            <a:off x="822960" y="3886200"/>
+            <a:ext cx="1371600" cy="594360"/>
           </a:xfrm>
           <a:prstGeom prst="rect">
             <a:avLst/>
@@ -6961,7 +6961,7 @@
               </a:lnSpc>
             </a:pPr>
             <a:r>
-              <a:rPr sz="1300" b="1" i="0">
+              <a:rPr sz="1200" b="1" i="0">
                 <a:solidFill>
                   <a:srgbClr val="2C5A44"/>
                 </a:solidFill>
@@ -6980,8 +6980,8 @@
         </p:nvSpPr>
         <p:spPr>
           <a:xfrm>
-            <a:off x="2468880" y="3977639"/>
-            <a:ext cx="457200" cy="457200"/>
+            <a:off x="2194560" y="3977639"/>
+            <a:ext cx="320040" cy="457200"/>
           </a:xfrm>
           <a:prstGeom prst="rect">
             <a:avLst/>
@@ -7000,7 +7000,7 @@
               </a:lnSpc>
             </a:pPr>
             <a:r>
-              <a:rPr sz="2000" b="1" i="0">
+              <a:rPr sz="1700" b="1" i="0">
                 <a:solidFill>
                   <a:srgbClr val="DD6B42"/>
                 </a:solidFill>
@@ -7019,8 +7019,8 @@
         </p:nvSpPr>
         <p:spPr>
           <a:xfrm>
-            <a:off x="2926080" y="3886200"/>
-            <a:ext cx="2286000" cy="594360"/>
+            <a:off x="2514600" y="3886200"/>
+            <a:ext cx="2148840" cy="594360"/>
           </a:xfrm>
           <a:prstGeom prst="roundRect">
             <a:avLst>
@@ -7065,8 +7065,8 @@
         </p:nvSpPr>
         <p:spPr>
           <a:xfrm>
-            <a:off x="2926080" y="3886200"/>
-            <a:ext cx="2286000" cy="594360"/>
+            <a:off x="2514600" y="3886200"/>
+            <a:ext cx="2148840" cy="594360"/>
           </a:xfrm>
           <a:prstGeom prst="rect">
             <a:avLst/>
@@ -7085,13 +7085,13 @@
               </a:lnSpc>
             </a:pPr>
             <a:r>
-              <a:rPr sz="1300" b="1" i="0">
+              <a:rPr sz="1200" b="1" i="0">
                 <a:solidFill>
                   <a:srgbClr val="2C5A44"/>
                 </a:solidFill>
                 <a:latin typeface="Calibri"/>
               </a:rPr>
-              <a:t>Photo or PIN Proof</a:t>
+              <a:t>Photo or Ask Parent</a:t>
             </a:r>
           </a:p>
         </p:txBody>
@@ -7104,8 +7104,8 @@
         </p:nvSpPr>
         <p:spPr>
           <a:xfrm>
-            <a:off x="5212080" y="3977639"/>
-            <a:ext cx="457200" cy="457200"/>
+            <a:off x="4663440" y="3977639"/>
+            <a:ext cx="320040" cy="457200"/>
           </a:xfrm>
           <a:prstGeom prst="rect">
             <a:avLst/>
@@ -7124,7 +7124,7 @@
               </a:lnSpc>
             </a:pPr>
             <a:r>
-              <a:rPr sz="2000" b="1" i="0">
+              <a:rPr sz="1700" b="1" i="0">
                 <a:solidFill>
                   <a:srgbClr val="DD6B42"/>
                 </a:solidFill>
@@ -7143,8 +7143,8 @@
         </p:nvSpPr>
         <p:spPr>
           <a:xfrm>
-            <a:off x="5669280" y="3886200"/>
-            <a:ext cx="2103120" cy="594360"/>
+            <a:off x="4983479" y="3886200"/>
+            <a:ext cx="1920240" cy="594360"/>
           </a:xfrm>
           <a:prstGeom prst="roundRect">
             <a:avLst>
@@ -7189,8 +7189,8 @@
         </p:nvSpPr>
         <p:spPr>
           <a:xfrm>
-            <a:off x="5669280" y="3886200"/>
-            <a:ext cx="2103120" cy="594360"/>
+            <a:off x="4983479" y="3886200"/>
+            <a:ext cx="1920240" cy="594360"/>
           </a:xfrm>
           <a:prstGeom prst="rect">
             <a:avLst/>
@@ -7209,13 +7209,13 @@
               </a:lnSpc>
             </a:pPr>
             <a:r>
-              <a:rPr sz="1300" b="1" i="0">
+              <a:rPr sz="1200" b="1" i="0">
                 <a:solidFill>
                   <a:srgbClr val="2C5A44"/>
                 </a:solidFill>
                 <a:latin typeface="Calibri"/>
               </a:rPr>
-              <a:t>Minutes Banked</a:t>
+              <a:t>Parent Approves</a:t>
             </a:r>
           </a:p>
         </p:txBody>
@@ -7228,8 +7228,8 @@
         </p:nvSpPr>
         <p:spPr>
           <a:xfrm>
-            <a:off x="7772400" y="3977639"/>
-            <a:ext cx="457200" cy="457200"/>
+            <a:off x="6903719" y="3977639"/>
+            <a:ext cx="320040" cy="457200"/>
           </a:xfrm>
           <a:prstGeom prst="rect">
             <a:avLst/>
@@ -7248,7 +7248,7 @@
               </a:lnSpc>
             </a:pPr>
             <a:r>
-              <a:rPr sz="2000" b="1" i="0">
+              <a:rPr sz="1700" b="1" i="0">
                 <a:solidFill>
                   <a:srgbClr val="DD6B42"/>
                 </a:solidFill>
@@ -7267,8 +7267,8 @@
         </p:nvSpPr>
         <p:spPr>
           <a:xfrm>
-            <a:off x="8229600" y="3886200"/>
-            <a:ext cx="1554480" cy="594360"/>
+            <a:off x="7223759" y="3886200"/>
+            <a:ext cx="1874519" cy="594360"/>
           </a:xfrm>
           <a:prstGeom prst="roundRect">
             <a:avLst>
@@ -7313,8 +7313,8 @@
         </p:nvSpPr>
         <p:spPr>
           <a:xfrm>
-            <a:off x="8229600" y="3886200"/>
-            <a:ext cx="1554480" cy="594360"/>
+            <a:off x="7223759" y="3886200"/>
+            <a:ext cx="1874519" cy="594360"/>
           </a:xfrm>
           <a:prstGeom prst="rect">
             <a:avLst/>
@@ -7333,12 +7333,136 @@
               </a:lnSpc>
             </a:pPr>
             <a:r>
-              <a:rPr sz="1300" b="1" i="0">
+              <a:rPr sz="1200" b="1" i="0">
                 <a:solidFill>
                   <a:srgbClr val="2C5A44"/>
                 </a:solidFill>
                 <a:latin typeface="Calibri"/>
               </a:rPr>
+              <a:t>Minutes Banked</a:t>
+            </a:r>
+          </a:p>
+        </p:txBody>
+      </p:sp>
+      <p:sp>
+        <p:nvSpPr>
+          <p:cNvPr id="23" name="TextBox 22"/>
+          <p:cNvSpPr txBox="1"/>
+          <p:nvPr/>
+        </p:nvSpPr>
+        <p:spPr>
+          <a:xfrm>
+            <a:off x="9098280" y="3977639"/>
+            <a:ext cx="320040" cy="457200"/>
+          </a:xfrm>
+          <a:prstGeom prst="rect">
+            <a:avLst/>
+          </a:prstGeom>
+          <a:noFill/>
+        </p:spPr>
+        <p:txBody>
+          <a:bodyPr wrap="square" anchor="t" lIns="0" rIns="0" tIns="0" bIns="0">
+            <a:spAutoFit/>
+          </a:bodyPr>
+          <a:lstStyle/>
+          <a:p>
+            <a:pPr algn="ctr">
+              <a:lnSpc>
+                <a:spcPct val="115000"/>
+              </a:lnSpc>
+            </a:pPr>
+            <a:r>
+              <a:rPr sz="1700" b="1" i="0">
+                <a:solidFill>
+                  <a:srgbClr val="DD6B42"/>
+                </a:solidFill>
+                <a:latin typeface="Calibri"/>
+              </a:rPr>
+              <a:t>→</a:t>
+            </a:r>
+          </a:p>
+        </p:txBody>
+      </p:sp>
+      <p:sp>
+        <p:nvSpPr>
+          <p:cNvPr id="24" name="Rounded Rectangle 23"/>
+          <p:cNvSpPr/>
+          <p:nvPr/>
+        </p:nvSpPr>
+        <p:spPr>
+          <a:xfrm>
+            <a:off x="9418319" y="3886200"/>
+            <a:ext cx="1280160" cy="594360"/>
+          </a:xfrm>
+          <a:prstGeom prst="roundRect">
+            <a:avLst>
+              <a:gd name="adj" fmla="val 10000"/>
+            </a:avLst>
+          </a:prstGeom>
+          <a:solidFill>
+            <a:srgbClr val="DCE8D9"/>
+          </a:solidFill>
+          <a:ln>
+            <a:noFill/>
+          </a:ln>
+          <a:effectLst/>
+        </p:spPr>
+        <p:style>
+          <a:lnRef idx="1">
+            <a:schemeClr val="accent1"/>
+          </a:lnRef>
+          <a:fillRef idx="3">
+            <a:schemeClr val="accent1"/>
+          </a:fillRef>
+          <a:effectRef idx="2">
+            <a:schemeClr val="accent1"/>
+          </a:effectRef>
+          <a:fontRef idx="minor">
+            <a:schemeClr val="lt1"/>
+          </a:fontRef>
+        </p:style>
+        <p:txBody>
+          <a:bodyPr rtlCol="0" anchor="ctr"/>
+          <a:lstStyle/>
+          <a:p>
+            <a:pPr algn="ctr"/>
+          </a:p>
+        </p:txBody>
+      </p:sp>
+      <p:sp>
+        <p:nvSpPr>
+          <p:cNvPr id="25" name="TextBox 24"/>
+          <p:cNvSpPr txBox="1"/>
+          <p:nvPr/>
+        </p:nvSpPr>
+        <p:spPr>
+          <a:xfrm>
+            <a:off x="9418319" y="3886200"/>
+            <a:ext cx="1280160" cy="594360"/>
+          </a:xfrm>
+          <a:prstGeom prst="rect">
+            <a:avLst/>
+          </a:prstGeom>
+          <a:noFill/>
+        </p:spPr>
+        <p:txBody>
+          <a:bodyPr wrap="square" anchor="ctr" lIns="0" rIns="0" tIns="0" bIns="0">
+            <a:spAutoFit/>
+          </a:bodyPr>
+          <a:lstStyle/>
+          <a:p>
+            <a:pPr algn="ctr">
+              <a:lnSpc>
+                <a:spcPct val="115000"/>
+              </a:lnSpc>
+            </a:pPr>
+            <a:r>
+              <a:rPr sz="1200" b="1" i="0">
+                <a:solidFill>
+                  <a:srgbClr val="2C5A44"/>
+                </a:solidFill>
+                <a:latin typeface="Calibri"/>
+              </a:rPr>
               <a:t>Unlock</a:t>
             </a:r>
           </a:p>
@@ -7346,7 +7470,7 @@
       </p:sp>
       <p:sp>
         <p:nvSpPr>
-          <p:cNvPr id="23" name="Rounded Rectangle 22"/>
+          <p:cNvPr id="26" name="Rounded Rectangle 25"/>
           <p:cNvSpPr/>
           <p:nvPr/>
         </p:nvSpPr>
@@ -7392,7 +7516,7 @@
       </p:sp>
       <p:sp>
         <p:nvSpPr>
-          <p:cNvPr id="24" name="TextBox 23"/>
+          <p:cNvPr id="27" name="TextBox 26"/>
           <p:cNvSpPr txBox="1"/>
           <p:nvPr/>
         </p:nvSpPr>
@@ -9099,7 +9223,7 @@
                 <a:spcPct val="115000"/>
               </a:lnSpc>
               <a:spcAft>
-                <a:spcPts val="2000"/>
+                <a:spcPts val="1800"/>
               </a:spcAft>
               <a:buClr>
                 <a:srgbClr val="3E7A5C"/>
@@ -9114,7 +9238,7 @@
                 </a:solidFill>
                 <a:latin typeface="Calibri"/>
               </a:rPr>
-              <a:t>Real photo upload and parent-PIN verification</a:t>
+              <a:t>Real photo upload, routed to an actual parent review queue</a:t>
             </a:r>
           </a:p>
           <a:p>
@@ -9123,7 +9247,7 @@
                 <a:spcPct val="115000"/>
               </a:lnSpc>
               <a:spcAft>
-                <a:spcPts val="2000"/>
+                <a:spcPts val="1800"/>
               </a:spcAft>
               <a:buClr>
                 <a:srgbClr val="3E7A5C"/>
@@ -9138,7 +9262,7 @@
                 </a:solidFill>
                 <a:latin typeface="Calibri"/>
               </a:rPr>
-              <a:t>A live countdown that spends banked minutes and warns before time runs out</a:t>
+              <a:t>One-tap bulk approve — a parent clears every waiting goal with a single PIN entry</a:t>
             </a:r>
           </a:p>
           <a:p>
@@ -9147,7 +9271,7 @@
                 <a:spcPct val="115000"/>
               </a:lnSpc>
               <a:spcAft>
-                <a:spcPts val="2000"/>
+                <a:spcPts val="1800"/>
               </a:spcAft>
               <a:buClr>
                 <a:srgbClr val="3E7A5C"/>
@@ -9162,7 +9286,7 @@
                 </a:solidFill>
                 <a:latin typeface="Calibri"/>
               </a:rPr>
-              <a:t>State that persists day to day, with automatic daily reset</a:t>
+              <a:t>A live countdown that spends banked minutes and warns before time runs out</a:t>
             </a:r>
           </a:p>
           <a:p>
@@ -9171,7 +9295,7 @@
                 <a:spcPct val="115000"/>
               </a:lnSpc>
               <a:spcAft>
-                <a:spcPts val="2000"/>
+                <a:spcPts val="1800"/>
               </a:spcAft>
               <a:buClr>
                 <a:srgbClr val="3E7A5C"/>
@@ -9186,7 +9310,7 @@
                 </a:solidFill>
                 <a:latin typeface="Calibri"/>
               </a:rPr>
-              <a:t>A parent dashboard to add goals, set rewards, and approve proof</a:t>
+              <a:t>State that persists day to day, with automatic daily reset</a:t>
             </a:r>
           </a:p>
         </p:txBody>

--- a/Health_First_Week6_Pitch.pptx
+++ b/Health_First_Week6_Pitch.pptx
@@ -12,8 +12,6 @@
     <p:sldId id="260" r:id="rId12"/>
     <p:sldId id="261" r:id="rId13"/>
     <p:sldId id="262" r:id="rId14"/>
-    <p:sldId id="263" r:id="rId15"/>
-    <p:sldId id="264" r:id="rId16"/>
   </p:sldIdLst>
   <p:sldSz cx="12191695" cy="6858000" type="screen4x3"/>
   <p:notesSz cx="6858000" cy="9144000"/>
@@ -510,7 +508,7 @@
           <a:lstStyle/>
           <a:p>
             <a:r>
-              <a:t>Open with energy. This is not another parental-control app - it's a reward system.</a:t>
+              <a:t>Say it with a big smile - this is the whole idea in one sentence.</a:t>
             </a:r>
           </a:p>
         </p:txBody>
@@ -580,7 +578,7 @@
           <a:lstStyle/>
           <a:p>
             <a:r>
-              <a:t>This is the hook. Deliver the quote slowly - it's the line that justifies everything that follows.</a:t>
+              <a:t>Deliver the quote with excitement - it's the funniest, most relatable line in the whole pitch.</a:t>
             </a:r>
           </a:p>
         </p:txBody>
@@ -650,7 +648,7 @@
           <a:lstStyle/>
           <a:p>
             <a:r>
-              <a:t>State the solution in one line, then hit the six advantages quickly - this sets up the comparison slide next.</a:t>
+              <a:t>Read these fast and with energy - six short, exciting things the app does.</a:t>
             </a:r>
           </a:p>
         </p:txBody>
@@ -720,7 +718,7 @@
           <a:lstStyle/>
           <a:p>
             <a:r>
-              <a:t>This slide is the differentiator judges will remember. Restrict vs Reward.</a:t>
+              <a:t>Point at each side while talking: this is what the kid sees, this is what the parent sees.</a:t>
             </a:r>
           </a:p>
         </p:txBody>
@@ -790,7 +788,7 @@
           <a:lstStyle/>
           <a:p>
             <a:r>
-              <a:t>Walk the flow left to right, then flag the sleep-timing fix as proof of real engineering rigor.</a:t>
+              <a:t>This is the big idea - reward instead of restrict. Say it with confidence.</a:t>
             </a:r>
           </a:p>
         </p:txBody>
@@ -860,7 +858,7 @@
           <a:lstStyle/>
           <a:p>
             <a:r>
-              <a:t>Keep this brief - one breath explaining the diagram, then move to Wider Impact.</a:t>
+              <a:t>Read the link and PIN slowly and clearly if this is shown on screen.</a:t>
             </a:r>
           </a:p>
         </p:txBody>
@@ -930,147 +928,7 @@
           <a:lstStyle/>
           <a:p>
             <a:r>
-              <a:t>This is the slide that answers 'so what' for judges - why this matters beyond one demo family.</a:t>
-            </a:r>
-          </a:p>
-        </p:txBody>
-      </p:sp>
-      <p:sp>
-        <p:nvSpPr>
-          <p:cNvPr id="4" name="Slide Number Placeholder 3"/>
-          <p:cNvSpPr>
-            <a:spLocks noGrp="1"/>
-          </p:cNvSpPr>
-          <p:nvPr>
-            <p:ph type="sldNum" idx="5" sz="quarter"/>
-          </p:nvPr>
-        </p:nvSpPr>
-        <p:spPr/>
-      </p:sp>
-    </p:spTree>
-  </p:cSld>
-  <p:clrMapOvr>
-    <a:masterClrMapping/>
-  </p:clrMapOvr>
-</p:notes>
-</file>
-
-<file path=ppt/notesSlides/notesSlide8.xml><?xml version="1.0" encoding="utf-8"?>
-<p:notes xmlns:a="http://schemas.openxmlformats.org/drawingml/2006/main" xmlns:p="http://schemas.openxmlformats.org/presentationml/2006/main" xmlns:r="http://schemas.openxmlformats.org/officeDocument/2006/relationships">
-  <p:cSld>
-    <p:spTree>
-      <p:nvGrpSpPr>
-        <p:cNvPr id="1" name=""/>
-        <p:cNvGrpSpPr/>
-        <p:nvPr/>
-      </p:nvGrpSpPr>
-      <p:grpSpPr>
-        <a:xfrm>
-          <a:off x="0" y="0"/>
-          <a:ext cx="0" cy="0"/>
-          <a:chOff x="0" y="0"/>
-          <a:chExt cx="0" cy="0"/>
-        </a:xfrm>
-      </p:grpSpPr>
-      <p:sp>
-        <p:nvSpPr>
-          <p:cNvPr id="2" name="Slide Image Placeholder 1"/>
-          <p:cNvSpPr>
-            <a:spLocks noGrp="1"/>
-          </p:cNvSpPr>
-          <p:nvPr>
-            <p:ph type="sldImg" idx="2"/>
-          </p:nvPr>
-        </p:nvSpPr>
-        <p:spPr/>
-      </p:sp>
-      <p:sp>
-        <p:nvSpPr>
-          <p:cNvPr id="3" name="Notes Placeholder 2"/>
-          <p:cNvSpPr>
-            <a:spLocks noGrp="1"/>
-          </p:cNvSpPr>
-          <p:nvPr>
-            <p:ph type="body" idx="3" sz="quarter"/>
-          </p:nvPr>
-        </p:nvSpPr>
-        <p:spPr/>
-        <p:txBody>
-          <a:bodyPr/>
-          <a:lstStyle/>
-          <a:p>
-            <a:r>
-              <a:t>Say the proof bullets, then read the links out loud slowly if this is on screen during the recorded pitch.</a:t>
-            </a:r>
-          </a:p>
-        </p:txBody>
-      </p:sp>
-      <p:sp>
-        <p:nvSpPr>
-          <p:cNvPr id="4" name="Slide Number Placeholder 3"/>
-          <p:cNvSpPr>
-            <a:spLocks noGrp="1"/>
-          </p:cNvSpPr>
-          <p:nvPr>
-            <p:ph type="sldNum" idx="5" sz="quarter"/>
-          </p:nvPr>
-        </p:nvSpPr>
-        <p:spPr/>
-      </p:sp>
-    </p:spTree>
-  </p:cSld>
-  <p:clrMapOvr>
-    <a:masterClrMapping/>
-  </p:clrMapOvr>
-</p:notes>
-</file>
-
-<file path=ppt/notesSlides/notesSlide9.xml><?xml version="1.0" encoding="utf-8"?>
-<p:notes xmlns:a="http://schemas.openxmlformats.org/drawingml/2006/main" xmlns:p="http://schemas.openxmlformats.org/presentationml/2006/main" xmlns:r="http://schemas.openxmlformats.org/officeDocument/2006/relationships">
-  <p:cSld>
-    <p:spTree>
-      <p:nvGrpSpPr>
-        <p:cNvPr id="1" name=""/>
-        <p:cNvGrpSpPr/>
-        <p:nvPr/>
-      </p:nvGrpSpPr>
-      <p:grpSpPr>
-        <a:xfrm>
-          <a:off x="0" y="0"/>
-          <a:ext cx="0" cy="0"/>
-          <a:chOff x="0" y="0"/>
-          <a:chExt cx="0" cy="0"/>
-        </a:xfrm>
-      </p:grpSpPr>
-      <p:sp>
-        <p:nvSpPr>
-          <p:cNvPr id="2" name="Slide Image Placeholder 1"/>
-          <p:cNvSpPr>
-            <a:spLocks noGrp="1"/>
-          </p:cNvSpPr>
-          <p:nvPr>
-            <p:ph type="sldImg" idx="2"/>
-          </p:nvPr>
-        </p:nvSpPr>
-        <p:spPr/>
-      </p:sp>
-      <p:sp>
-        <p:nvSpPr>
-          <p:cNvPr id="3" name="Notes Placeholder 2"/>
-          <p:cNvSpPr>
-            <a:spLocks noGrp="1"/>
-          </p:cNvSpPr>
-          <p:nvPr>
-            <p:ph type="body" idx="3" sz="quarter"/>
-          </p:nvPr>
-        </p:nvSpPr>
-        <p:spPr/>
-        <p:txBody>
-          <a:bodyPr/>
-          <a:lstStyle/>
-          <a:p>
-            <a:r>
-              <a:t>End on this line, then stop talking. Let the tagline be the last thing they hear.</a:t>
+              <a:t>End with a smile. This is the last thing everyone remembers.</a:t>
             </a:r>
           </a:p>
         </p:txBody>
@@ -4126,7 +3984,7 @@
           <a:p>
             <a:pPr algn="ctr"/>
             <a:r>
-              <a:rPr sz="3000">
+              <a:rPr sz="2800">
                 <a:solidFill>
                   <a:srgbClr val="FFFFFF"/>
                 </a:solidFill>
@@ -4144,7 +4002,7 @@
         </p:nvSpPr>
         <p:spPr>
           <a:xfrm>
-            <a:off x="914400" y="2148840"/>
+            <a:off x="914400" y="2286000"/>
             <a:ext cx="10332720" cy="1188720"/>
           </a:xfrm>
           <a:prstGeom prst="rect">
@@ -4183,8 +4041,8 @@
         </p:nvSpPr>
         <p:spPr>
           <a:xfrm>
-            <a:off x="914400" y="3246120"/>
-            <a:ext cx="9875520" cy="822960"/>
+            <a:off x="914400" y="3383280"/>
+            <a:ext cx="9875520" cy="640080"/>
           </a:xfrm>
           <a:prstGeom prst="rect">
             <a:avLst/>
@@ -4203,13 +4061,13 @@
               </a:lnSpc>
             </a:pPr>
             <a:r>
-              <a:rPr sz="1900" b="0" i="1">
+              <a:rPr sz="2200" b="0" i="1">
                 <a:solidFill>
                   <a:srgbClr val="DCE8D9"/>
                 </a:solidFill>
                 <a:latin typeface="Calibri"/>
               </a:rPr>
-              <a:t>The first screen-time app that rewards health — instead of just restricting screens.</a:t>
+              <a:t>Do healthy things. Earn game time!</a:t>
             </a:r>
           </a:p>
         </p:txBody>
@@ -4222,8 +4080,8 @@
         </p:nvSpPr>
         <p:spPr>
           <a:xfrm>
-            <a:off x="914400" y="4343400"/>
-            <a:ext cx="4023360" cy="384048"/>
+            <a:off x="914400" y="4297680"/>
+            <a:ext cx="2651760" cy="384048"/>
           </a:xfrm>
           <a:prstGeom prst="roundRect">
             <a:avLst>
@@ -4264,7 +4122,7 @@
                 </a:solidFill>
                 <a:latin typeface="Calibri"/>
               </a:rPr>
-              <a:t>QUTUHAL INNOVATEX 2.0  ·  FINAL PITCH</a:t>
+              <a:t>QUTUHAL INNOVATEX 2.0</a:t>
             </a:r>
           </a:p>
         </p:txBody>
@@ -4323,13 +4181,13 @@
               </a:lnSpc>
             </a:pPr>
             <a:r>
-              <a:rPr sz="3400" b="1" i="0">
+              <a:rPr sz="3200" b="1" i="0">
                 <a:solidFill>
                   <a:srgbClr val="1F2D22"/>
                 </a:solidFill>
                 <a:latin typeface="Cambria"/>
               </a:rPr>
-              <a:t>It's Not Just a Kid Problem.</a:t>
+              <a:t>Kids Forget Their Healthy Habits</a:t>
             </a:r>
           </a:p>
         </p:txBody>
@@ -4414,7 +4272,7 @@
                 </a:solidFill>
                 <a:latin typeface="Calibri"/>
               </a:rPr>
-              <a:t>THE ASSUMPTION</a:t>
+              <a:t>WHAT WE SAW</a:t>
             </a:r>
           </a:p>
         </p:txBody>
@@ -4428,7 +4286,7 @@
         <p:spPr>
           <a:xfrm>
             <a:off x="1188720" y="2423160"/>
-            <a:ext cx="4297680" cy="1188720"/>
+            <a:ext cx="4297680" cy="1463040"/>
           </a:xfrm>
           <a:prstGeom prst="rect">
             <a:avLst/>
@@ -4443,17 +4301,17 @@
           <a:p>
             <a:pPr algn="l">
               <a:lnSpc>
-                <a:spcPct val="130000"/>
+                <a:spcPct val="135000"/>
               </a:lnSpc>
             </a:pPr>
             <a:r>
-              <a:rPr sz="1500" b="0" i="0">
+              <a:rPr sz="1600" b="0" i="0">
                 <a:solidFill>
                   <a:srgbClr val="5B6A5F"/>
                 </a:solidFill>
                 <a:latin typeface="Calibri"/>
               </a:rPr>
-              <a:t>Kids skip water, movement, sleep, and fruit because they're distracted by screens and no one checks.</a:t>
+              <a:t>Kids forget to drink water, move around, sleep on time, and eat fruit — because games are more fun!</a:t>
             </a:r>
           </a:p>
         </p:txBody>
@@ -4466,7 +4324,7 @@
         </p:nvSpPr>
         <p:spPr>
           <a:xfrm>
-            <a:off x="1188720" y="3749039"/>
+            <a:off x="1188720" y="3931920"/>
             <a:ext cx="4297680" cy="457200"/>
           </a:xfrm>
           <a:prstGeom prst="rect">
@@ -4492,7 +4350,7 @@
                 </a:solidFill>
                 <a:latin typeface="Calibri"/>
               </a:rPr>
-              <a:t>SO WE TESTED IT</a:t>
+              <a:t>SO WE ASKED</a:t>
             </a:r>
           </a:p>
         </p:txBody>
@@ -4505,8 +4363,8 @@
         </p:nvSpPr>
         <p:spPr>
           <a:xfrm>
-            <a:off x="1188720" y="4206240"/>
-            <a:ext cx="4297680" cy="1188720"/>
+            <a:off x="1188720" y="4389120"/>
+            <a:ext cx="4297680" cy="1005840"/>
           </a:xfrm>
           <a:prstGeom prst="rect">
             <a:avLst/>
@@ -4521,17 +4379,17 @@
           <a:p>
             <a:pPr algn="l">
               <a:lnSpc>
-                <a:spcPct val="130000"/>
+                <a:spcPct val="135000"/>
               </a:lnSpc>
             </a:pPr>
             <a:r>
-              <a:rPr sz="1500" b="0" i="0">
+              <a:rPr sz="1600" b="0" i="0">
                 <a:solidFill>
                   <a:srgbClr val="5B6A5F"/>
                 </a:solidFill>
                 <a:latin typeface="Calibri"/>
               </a:rPr>
-              <a:t>We asked our own family the same question adults never get asked.</a:t>
+              <a:t>We asked our own family: do grown-ups forget these things too?</a:t>
             </a:r>
           </a:p>
         </p:txBody>
@@ -4616,7 +4474,7 @@
                 </a:solidFill>
                 <a:latin typeface="Calibri"/>
               </a:rPr>
-              <a:t>THE FINDING</a:t>
+              <a:t>THEY SAID...</a:t>
             </a:r>
           </a:p>
         </p:txBody>
@@ -4630,7 +4488,7 @@
         <p:spPr>
           <a:xfrm>
             <a:off x="6492240" y="2514600"/>
-            <a:ext cx="4526280" cy="2011680"/>
+            <a:ext cx="4526280" cy="1645920"/>
           </a:xfrm>
           <a:prstGeom prst="rect">
             <a:avLst/>
@@ -4649,13 +4507,13 @@
               </a:lnSpc>
             </a:pPr>
             <a:r>
-              <a:rPr sz="2600" b="1" i="0">
+              <a:rPr sz="3200" b="1" i="0">
                 <a:solidFill>
                   <a:srgbClr val="FFFFFF"/>
                 </a:solidFill>
                 <a:latin typeface="Cambria"/>
               </a:rPr>
-              <a:t>“They confirmed it happens to them too.”</a:t>
+              <a:t>“Yes! We forget too!”</a:t>
             </a:r>
           </a:p>
         </p:txBody>
@@ -4668,8 +4526,8 @@
         </p:nvSpPr>
         <p:spPr>
           <a:xfrm>
-            <a:off x="6492240" y="4434840"/>
-            <a:ext cx="4526280" cy="1005840"/>
+            <a:off x="6492240" y="4160520"/>
+            <a:ext cx="4526280" cy="1280160"/>
           </a:xfrm>
           <a:prstGeom prst="rect">
             <a:avLst/>
@@ -4684,17 +4542,17 @@
           <a:p>
             <a:pPr algn="l">
               <a:lnSpc>
-                <a:spcPct val="125000"/>
+                <a:spcPct val="130000"/>
               </a:lnSpc>
             </a:pPr>
             <a:r>
-              <a:rPr sz="1400" b="0" i="1">
+              <a:rPr sz="1500" b="0" i="1">
                 <a:solidFill>
                   <a:srgbClr val="F7E1D5"/>
                 </a:solidFill>
                 <a:latin typeface="Calibri"/>
               </a:rPr>
-              <a:t>This isn't a discipline problem in one house. It's a habit-formation problem in every house.</a:t>
+              <a:t>So it's not just a kid thing — everyone needs a fun little reminder!</a:t>
             </a:r>
           </a:p>
         </p:txBody>
@@ -4759,7 +4617,7 @@
                 </a:solidFill>
                 <a:latin typeface="Cambria"/>
               </a:rPr>
-              <a:t>Our Solution</a:t>
+              <a:t>Our Solution: Health First!</a:t>
             </a:r>
           </a:p>
         </p:txBody>
@@ -4798,26 +4656,24 @@
                 </a:solidFill>
                 <a:latin typeface="Calibri"/>
               </a:rPr>
-              <a:t>Turn proven health habits into earned screen time — nothing unlocks until it's honestly earned.</a:t>
-            </a:r>
-          </a:p>
-        </p:txBody>
-      </p:sp>
-      <p:sp>
-        <p:nvSpPr>
-          <p:cNvPr id="4" name="Rounded Rectangle 3"/>
+              <a:t>Do your health goals, and you EARN time to play games and watch YouTube!</a:t>
+            </a:r>
+          </a:p>
+        </p:txBody>
+      </p:sp>
+      <p:sp>
+        <p:nvSpPr>
+          <p:cNvPr id="4" name="Oval 3"/>
           <p:cNvSpPr/>
           <p:nvPr/>
         </p:nvSpPr>
         <p:spPr>
           <a:xfrm>
-            <a:off x="822960" y="1691640"/>
-            <a:ext cx="3337560" cy="1874519"/>
-          </a:xfrm>
-          <a:prstGeom prst="roundRect">
-            <a:avLst>
-              <a:gd name="adj" fmla="val 10000"/>
-            </a:avLst>
+            <a:off x="868680" y="2011679"/>
+            <a:ext cx="640080" cy="640080"/>
+          </a:xfrm>
+          <a:prstGeom prst="ellipse">
+            <a:avLst/>
           </a:prstGeom>
           <a:solidFill>
             <a:srgbClr val="DCE8D9"/>
@@ -4842,75 +4698,31 @@
           </a:fontRef>
         </p:style>
         <p:txBody>
-          <a:bodyPr rtlCol="0" anchor="ctr"/>
+          <a:bodyPr rtlCol="0" anchor="ctr" lIns="0" rIns="0" tIns="0" bIns="0" wrap="none"/>
           <a:lstStyle/>
           <a:p>
             <a:pPr algn="ctr"/>
-          </a:p>
-        </p:txBody>
-      </p:sp>
-      <p:sp>
-        <p:nvSpPr>
-          <p:cNvPr id="5" name="Oval 4"/>
-          <p:cNvSpPr/>
-          <p:nvPr/>
-        </p:nvSpPr>
-        <p:spPr>
-          <a:xfrm>
-            <a:off x="1042416" y="1911096"/>
-            <a:ext cx="566928" cy="566928"/>
-          </a:xfrm>
-          <a:prstGeom prst="ellipse">
-            <a:avLst/>
-          </a:prstGeom>
-          <a:solidFill>
-            <a:srgbClr val="FFFFFF"/>
-          </a:solidFill>
-          <a:ln>
-            <a:noFill/>
-          </a:ln>
-          <a:effectLst/>
-        </p:spPr>
-        <p:style>
-          <a:lnRef idx="1">
-            <a:schemeClr val="accent1"/>
-          </a:lnRef>
-          <a:fillRef idx="3">
-            <a:schemeClr val="accent1"/>
-          </a:fillRef>
-          <a:effectRef idx="2">
-            <a:schemeClr val="accent1"/>
-          </a:effectRef>
-          <a:fontRef idx="minor">
-            <a:schemeClr val="lt1"/>
-          </a:fontRef>
-        </p:style>
-        <p:txBody>
-          <a:bodyPr rtlCol="0" anchor="ctr" lIns="0" rIns="0" tIns="0" bIns="0" wrap="none"/>
-          <a:lstStyle/>
-          <a:p>
-            <a:pPr algn="ctr"/>
-            <a:r>
-              <a:rPr sz="1700">
+            <a:r>
+              <a:rPr sz="1800">
                 <a:solidFill>
                   <a:srgbClr val="3E7A5C"/>
                 </a:solidFill>
               </a:rPr>
-              <a:t>🎯</a:t>
-            </a:r>
-          </a:p>
-        </p:txBody>
-      </p:sp>
-      <p:sp>
-        <p:nvSpPr>
-          <p:cNvPr id="6" name="TextBox 5"/>
+              <a:t>💧</a:t>
+            </a:r>
+          </a:p>
+        </p:txBody>
+      </p:sp>
+      <p:sp>
+        <p:nvSpPr>
+          <p:cNvPr id="5" name="TextBox 4"/>
           <p:cNvSpPr txBox="1"/>
           <p:nvPr/>
         </p:nvSpPr>
         <p:spPr>
           <a:xfrm>
-            <a:off x="1691640" y="1929384"/>
-            <a:ext cx="2286000" cy="548640"/>
+            <a:off x="1645920" y="2039112"/>
+            <a:ext cx="4206240" cy="594360"/>
           </a:xfrm>
           <a:prstGeom prst="rect">
             <a:avLst/>
@@ -4925,75 +4737,34 @@
           <a:p>
             <a:pPr algn="l">
               <a:lnSpc>
-                <a:spcPct val="105000"/>
+                <a:spcPct val="110000"/>
               </a:lnSpc>
             </a:pPr>
             <a:r>
-              <a:rPr sz="1350" b="1" i="0">
+              <a:rPr sz="1500" b="1" i="0">
                 <a:solidFill>
                   <a:srgbClr val="1F2D22"/>
-                </a:solidFill>
-                <a:latin typeface="Cambria"/>
-              </a:rPr>
-              <a:t>Motivating, Not Punitive</a:t>
-            </a:r>
-          </a:p>
-        </p:txBody>
-      </p:sp>
-      <p:sp>
-        <p:nvSpPr>
-          <p:cNvPr id="7" name="TextBox 6"/>
-          <p:cNvSpPr txBox="1"/>
-          <p:nvPr/>
-        </p:nvSpPr>
-        <p:spPr>
-          <a:xfrm>
-            <a:off x="1051560" y="2587752"/>
-            <a:ext cx="2880360" cy="822959"/>
-          </a:xfrm>
-          <a:prstGeom prst="rect">
-            <a:avLst/>
-          </a:prstGeom>
-          <a:noFill/>
-        </p:spPr>
-        <p:txBody>
-          <a:bodyPr wrap="square" anchor="t" lIns="0" rIns="0" tIns="0" bIns="0">
-            <a:spAutoFit/>
-          </a:bodyPr>
-          <a:lstStyle/>
-          <a:p>
-            <a:pPr algn="l">
-              <a:lnSpc>
-                <a:spcPct val="120000"/>
-              </a:lnSpc>
-            </a:pPr>
-            <a:r>
-              <a:rPr sz="1050" b="0" i="0">
-                <a:solidFill>
-                  <a:srgbClr val="5B6A5F"/>
                 </a:solidFill>
                 <a:latin typeface="Calibri"/>
               </a:rPr>
-              <a:t>Kids earn rewards instead of losing privileges — the opposite of typical restriction apps.</a:t>
-            </a:r>
-          </a:p>
-        </p:txBody>
-      </p:sp>
-      <p:sp>
-        <p:nvSpPr>
-          <p:cNvPr id="8" name="Rounded Rectangle 7"/>
+              <a:t>4 fun goals every day: water, move, sleep, fruit</a:t>
+            </a:r>
+          </a:p>
+        </p:txBody>
+      </p:sp>
+      <p:sp>
+        <p:nvSpPr>
+          <p:cNvPr id="6" name="Oval 5"/>
           <p:cNvSpPr/>
           <p:nvPr/>
         </p:nvSpPr>
         <p:spPr>
           <a:xfrm>
-            <a:off x="4425696" y="1691640"/>
-            <a:ext cx="3337560" cy="1874519"/>
-          </a:xfrm>
-          <a:prstGeom prst="roundRect">
-            <a:avLst>
-              <a:gd name="adj" fmla="val 10000"/>
-            </a:avLst>
+            <a:off x="868680" y="3200400"/>
+            <a:ext cx="640080" cy="640080"/>
+          </a:xfrm>
+          <a:prstGeom prst="ellipse">
+            <a:avLst/>
           </a:prstGeom>
           <a:solidFill>
             <a:srgbClr val="F7E1D5"/>
@@ -5018,75 +4789,31 @@
           </a:fontRef>
         </p:style>
         <p:txBody>
-          <a:bodyPr rtlCol="0" anchor="ctr"/>
+          <a:bodyPr rtlCol="0" anchor="ctr" lIns="0" rIns="0" tIns="0" bIns="0" wrap="none"/>
           <a:lstStyle/>
           <a:p>
             <a:pPr algn="ctr"/>
-          </a:p>
-        </p:txBody>
-      </p:sp>
-      <p:sp>
-        <p:nvSpPr>
-          <p:cNvPr id="9" name="Oval 8"/>
-          <p:cNvSpPr/>
-          <p:nvPr/>
-        </p:nvSpPr>
-        <p:spPr>
-          <a:xfrm>
-            <a:off x="4645152" y="1911096"/>
-            <a:ext cx="566928" cy="566928"/>
-          </a:xfrm>
-          <a:prstGeom prst="ellipse">
-            <a:avLst/>
-          </a:prstGeom>
-          <a:solidFill>
-            <a:srgbClr val="FFFFFF"/>
-          </a:solidFill>
-          <a:ln>
-            <a:noFill/>
-          </a:ln>
-          <a:effectLst/>
-        </p:spPr>
-        <p:style>
-          <a:lnRef idx="1">
-            <a:schemeClr val="accent1"/>
-          </a:lnRef>
-          <a:fillRef idx="3">
-            <a:schemeClr val="accent1"/>
-          </a:fillRef>
-          <a:effectRef idx="2">
-            <a:schemeClr val="accent1"/>
-          </a:effectRef>
-          <a:fontRef idx="minor">
-            <a:schemeClr val="lt1"/>
-          </a:fontRef>
-        </p:style>
-        <p:txBody>
-          <a:bodyPr rtlCol="0" anchor="ctr" lIns="0" rIns="0" tIns="0" bIns="0" wrap="none"/>
-          <a:lstStyle/>
-          <a:p>
-            <a:pPr algn="ctr"/>
-            <a:r>
-              <a:rPr sz="1700">
+            <a:r>
+              <a:rPr sz="1800">
                 <a:solidFill>
                   <a:srgbClr val="DD6B42"/>
                 </a:solidFill>
               </a:rPr>
-              <a:t>🤝</a:t>
-            </a:r>
-          </a:p>
-        </p:txBody>
-      </p:sp>
-      <p:sp>
-        <p:nvSpPr>
-          <p:cNvPr id="10" name="TextBox 9"/>
+              <a:t>📸</a:t>
+            </a:r>
+          </a:p>
+        </p:txBody>
+      </p:sp>
+      <p:sp>
+        <p:nvSpPr>
+          <p:cNvPr id="7" name="TextBox 6"/>
           <p:cNvSpPr txBox="1"/>
           <p:nvPr/>
         </p:nvSpPr>
         <p:spPr>
           <a:xfrm>
-            <a:off x="5294376" y="1929384"/>
-            <a:ext cx="2286000" cy="548640"/>
+            <a:off x="1645920" y="3227832"/>
+            <a:ext cx="4206240" cy="594360"/>
           </a:xfrm>
           <a:prstGeom prst="rect">
             <a:avLst/>
@@ -5101,75 +4828,34 @@
           <a:p>
             <a:pPr algn="l">
               <a:lnSpc>
-                <a:spcPct val="105000"/>
+                <a:spcPct val="110000"/>
               </a:lnSpc>
             </a:pPr>
             <a:r>
-              <a:rPr sz="1350" b="1" i="0">
+              <a:rPr sz="1500" b="1" i="0">
                 <a:solidFill>
                   <a:srgbClr val="1F2D22"/>
-                </a:solidFill>
-                <a:latin typeface="Cambria"/>
-              </a:rPr>
-              <a:t>Less Family Conflict</a:t>
-            </a:r>
-          </a:p>
-        </p:txBody>
-      </p:sp>
-      <p:sp>
-        <p:nvSpPr>
-          <p:cNvPr id="11" name="TextBox 10"/>
-          <p:cNvSpPr txBox="1"/>
-          <p:nvPr/>
-        </p:nvSpPr>
-        <p:spPr>
-          <a:xfrm>
-            <a:off x="4654296" y="2587752"/>
-            <a:ext cx="2880360" cy="822959"/>
-          </a:xfrm>
-          <a:prstGeom prst="rect">
-            <a:avLst/>
-          </a:prstGeom>
-          <a:noFill/>
-        </p:spPr>
-        <p:txBody>
-          <a:bodyPr wrap="square" anchor="t" lIns="0" rIns="0" tIns="0" bIns="0">
-            <a:spAutoFit/>
-          </a:bodyPr>
-          <a:lstStyle/>
-          <a:p>
-            <a:pPr algn="l">
-              <a:lnSpc>
-                <a:spcPct val="120000"/>
-              </a:lnSpc>
-            </a:pPr>
-            <a:r>
-              <a:rPr sz="1050" b="0" i="0">
-                <a:solidFill>
-                  <a:srgbClr val="5B6A5F"/>
                 </a:solidFill>
                 <a:latin typeface="Calibri"/>
               </a:rPr>
-              <a:t>Screen time becomes a shared goal between parent and kid, not a daily fight.</a:t>
-            </a:r>
-          </a:p>
-        </p:txBody>
-      </p:sp>
-      <p:sp>
-        <p:nvSpPr>
-          <p:cNvPr id="12" name="Rounded Rectangle 11"/>
+              <a:t>Snap a photo or ask a parent to check</a:t>
+            </a:r>
+          </a:p>
+        </p:txBody>
+      </p:sp>
+      <p:sp>
+        <p:nvSpPr>
+          <p:cNvPr id="8" name="Oval 7"/>
           <p:cNvSpPr/>
           <p:nvPr/>
         </p:nvSpPr>
         <p:spPr>
           <a:xfrm>
-            <a:off x="8037575" y="1691640"/>
-            <a:ext cx="3337560" cy="1874519"/>
-          </a:xfrm>
-          <a:prstGeom prst="roundRect">
-            <a:avLst>
-              <a:gd name="adj" fmla="val 10000"/>
-            </a:avLst>
+            <a:off x="868680" y="4389120"/>
+            <a:ext cx="640080" cy="640080"/>
+          </a:xfrm>
+          <a:prstGeom prst="ellipse">
+            <a:avLst/>
           </a:prstGeom>
           <a:solidFill>
             <a:srgbClr val="F5E7C9"/>
@@ -5194,75 +4880,31 @@
           </a:fontRef>
         </p:style>
         <p:txBody>
-          <a:bodyPr rtlCol="0" anchor="ctr"/>
+          <a:bodyPr rtlCol="0" anchor="ctr" lIns="0" rIns="0" tIns="0" bIns="0" wrap="none"/>
           <a:lstStyle/>
           <a:p>
             <a:pPr algn="ctr"/>
-          </a:p>
-        </p:txBody>
-      </p:sp>
-      <p:sp>
-        <p:nvSpPr>
-          <p:cNvPr id="13" name="Oval 12"/>
-          <p:cNvSpPr/>
-          <p:nvPr/>
-        </p:nvSpPr>
-        <p:spPr>
-          <a:xfrm>
-            <a:off x="8257031" y="1911096"/>
-            <a:ext cx="566928" cy="566928"/>
-          </a:xfrm>
-          <a:prstGeom prst="ellipse">
-            <a:avLst/>
-          </a:prstGeom>
-          <a:solidFill>
-            <a:srgbClr val="FFFFFF"/>
-          </a:solidFill>
-          <a:ln>
-            <a:noFill/>
-          </a:ln>
-          <a:effectLst/>
-        </p:spPr>
-        <p:style>
-          <a:lnRef idx="1">
-            <a:schemeClr val="accent1"/>
-          </a:lnRef>
-          <a:fillRef idx="3">
-            <a:schemeClr val="accent1"/>
-          </a:fillRef>
-          <a:effectRef idx="2">
-            <a:schemeClr val="accent1"/>
-          </a:effectRef>
-          <a:fontRef idx="minor">
-            <a:schemeClr val="lt1"/>
-          </a:fontRef>
-        </p:style>
-        <p:txBody>
-          <a:bodyPr rtlCol="0" anchor="ctr" lIns="0" rIns="0" tIns="0" bIns="0" wrap="none"/>
-          <a:lstStyle/>
-          <a:p>
-            <a:pPr algn="ctr"/>
-            <a:r>
-              <a:rPr sz="1700">
+            <a:r>
+              <a:rPr sz="1800">
                 <a:solidFill>
                   <a:srgbClr val="DB9D3B"/>
                 </a:solidFill>
               </a:rPr>
-              <a:t>🔧</a:t>
-            </a:r>
-          </a:p>
-        </p:txBody>
-      </p:sp>
-      <p:sp>
-        <p:nvSpPr>
-          <p:cNvPr id="14" name="TextBox 13"/>
+              <a:t>🎮</a:t>
+            </a:r>
+          </a:p>
+        </p:txBody>
+      </p:sp>
+      <p:sp>
+        <p:nvSpPr>
+          <p:cNvPr id="9" name="TextBox 8"/>
           <p:cNvSpPr txBox="1"/>
           <p:nvPr/>
         </p:nvSpPr>
         <p:spPr>
           <a:xfrm>
-            <a:off x="8906255" y="1929384"/>
-            <a:ext cx="2286000" cy="548640"/>
+            <a:off x="1645920" y="4416552"/>
+            <a:ext cx="4206240" cy="594360"/>
           </a:xfrm>
           <a:prstGeom prst="rect">
             <a:avLst/>
@@ -5277,75 +4919,34 @@
           <a:p>
             <a:pPr algn="l">
               <a:lnSpc>
-                <a:spcPct val="105000"/>
+                <a:spcPct val="110000"/>
               </a:lnSpc>
             </a:pPr>
             <a:r>
-              <a:rPr sz="1350" b="1" i="0">
+              <a:rPr sz="1500" b="1" i="0">
                 <a:solidFill>
                   <a:srgbClr val="1F2D22"/>
-                </a:solidFill>
-                <a:latin typeface="Cambria"/>
-              </a:rPr>
-              <a:t>Fully Customizable</a:t>
-            </a:r>
-          </a:p>
-        </p:txBody>
-      </p:sp>
-      <p:sp>
-        <p:nvSpPr>
-          <p:cNvPr id="15" name="TextBox 14"/>
-          <p:cNvSpPr txBox="1"/>
-          <p:nvPr/>
-        </p:nvSpPr>
-        <p:spPr>
-          <a:xfrm>
-            <a:off x="8266175" y="2587752"/>
-            <a:ext cx="2880360" cy="822959"/>
-          </a:xfrm>
-          <a:prstGeom prst="rect">
-            <a:avLst/>
-          </a:prstGeom>
-          <a:noFill/>
-        </p:spPr>
-        <p:txBody>
-          <a:bodyPr wrap="square" anchor="t" lIns="0" rIns="0" tIns="0" bIns="0">
-            <a:spAutoFit/>
-          </a:bodyPr>
-          <a:lstStyle/>
-          <a:p>
-            <a:pPr algn="l">
-              <a:lnSpc>
-                <a:spcPct val="120000"/>
-              </a:lnSpc>
-            </a:pPr>
-            <a:r>
-              <a:rPr sz="1050" b="0" i="0">
-                <a:solidFill>
-                  <a:srgbClr val="5B6A5F"/>
                 </a:solidFill>
                 <a:latin typeface="Calibri"/>
               </a:rPr>
-              <a:t>Parents set their own goals and exactly how many minutes each one is worth.</a:t>
-            </a:r>
-          </a:p>
-        </p:txBody>
-      </p:sp>
-      <p:sp>
-        <p:nvSpPr>
-          <p:cNvPr id="16" name="Rounded Rectangle 15"/>
+              <a:t>Earn real Games &amp; YouTube time</a:t>
+            </a:r>
+          </a:p>
+        </p:txBody>
+      </p:sp>
+      <p:sp>
+        <p:nvSpPr>
+          <p:cNvPr id="10" name="Oval 9"/>
           <p:cNvSpPr/>
           <p:nvPr/>
         </p:nvSpPr>
         <p:spPr>
           <a:xfrm>
-            <a:off x="822960" y="3794760"/>
-            <a:ext cx="3337560" cy="1874519"/>
-          </a:xfrm>
-          <a:prstGeom prst="roundRect">
-            <a:avLst>
-              <a:gd name="adj" fmla="val 10000"/>
-            </a:avLst>
+            <a:off x="6400800" y="2011679"/>
+            <a:ext cx="640080" cy="640080"/>
+          </a:xfrm>
+          <a:prstGeom prst="ellipse">
+            <a:avLst/>
           </a:prstGeom>
           <a:solidFill>
             <a:srgbClr val="E2E2F5"/>
@@ -5370,29 +4971,76 @@
           </a:fontRef>
         </p:style>
         <p:txBody>
-          <a:bodyPr rtlCol="0" anchor="ctr"/>
+          <a:bodyPr rtlCol="0" anchor="ctr" lIns="0" rIns="0" tIns="0" bIns="0" wrap="none"/>
           <a:lstStyle/>
           <a:p>
             <a:pPr algn="ctr"/>
-          </a:p>
-        </p:txBody>
-      </p:sp>
-      <p:sp>
-        <p:nvSpPr>
-          <p:cNvPr id="17" name="Oval 16"/>
+            <a:r>
+              <a:rPr sz="1800">
+                <a:solidFill>
+                  <a:srgbClr val="6E6FBF"/>
+                </a:solidFill>
+              </a:rPr>
+              <a:t>🔥</a:t>
+            </a:r>
+          </a:p>
+        </p:txBody>
+      </p:sp>
+      <p:sp>
+        <p:nvSpPr>
+          <p:cNvPr id="11" name="TextBox 10"/>
+          <p:cNvSpPr txBox="1"/>
+          <p:nvPr/>
+        </p:nvSpPr>
+        <p:spPr>
+          <a:xfrm>
+            <a:off x="7178040" y="2039112"/>
+            <a:ext cx="4206240" cy="594360"/>
+          </a:xfrm>
+          <a:prstGeom prst="rect">
+            <a:avLst/>
+          </a:prstGeom>
+          <a:noFill/>
+        </p:spPr>
+        <p:txBody>
+          <a:bodyPr wrap="square" anchor="ctr" lIns="0" rIns="0" tIns="0" bIns="0">
+            <a:spAutoFit/>
+          </a:bodyPr>
+          <a:lstStyle/>
+          <a:p>
+            <a:pPr algn="l">
+              <a:lnSpc>
+                <a:spcPct val="110000"/>
+              </a:lnSpc>
+            </a:pPr>
+            <a:r>
+              <a:rPr sz="1500" b="1" i="0">
+                <a:solidFill>
+                  <a:srgbClr val="1F2D22"/>
+                </a:solidFill>
+                <a:latin typeface="Calibri"/>
+              </a:rPr>
+              <a:t>Build a streak and win fun badges</a:t>
+            </a:r>
+          </a:p>
+        </p:txBody>
+      </p:sp>
+      <p:sp>
+        <p:nvSpPr>
+          <p:cNvPr id="12" name="Oval 11"/>
           <p:cNvSpPr/>
           <p:nvPr/>
         </p:nvSpPr>
         <p:spPr>
           <a:xfrm>
-            <a:off x="1042416" y="4014216"/>
-            <a:ext cx="566928" cy="566928"/>
+            <a:off x="6400800" y="3200400"/>
+            <a:ext cx="640080" cy="640080"/>
           </a:xfrm>
           <a:prstGeom prst="ellipse">
             <a:avLst/>
           </a:prstGeom>
           <a:solidFill>
-            <a:srgbClr val="FFFFFF"/>
+            <a:srgbClr val="DCE8D9"/>
           </a:solidFill>
           <a:ln>
             <a:noFill/>
@@ -5419,26 +5067,26 @@
           <a:p>
             <a:pPr algn="ctr"/>
             <a:r>
-              <a:rPr sz="1700">
-                <a:solidFill>
-                  <a:srgbClr val="6E6FBF"/>
+              <a:rPr sz="1800">
+                <a:solidFill>
+                  <a:srgbClr val="3E7A5C"/>
                 </a:solidFill>
               </a:rPr>
-              <a:t>📈</a:t>
-            </a:r>
-          </a:p>
-        </p:txBody>
-      </p:sp>
-      <p:sp>
-        <p:nvSpPr>
-          <p:cNvPr id="18" name="TextBox 17"/>
+              <a:t>🌱</a:t>
+            </a:r>
+          </a:p>
+        </p:txBody>
+      </p:sp>
+      <p:sp>
+        <p:nvSpPr>
+          <p:cNvPr id="13" name="TextBox 12"/>
           <p:cNvSpPr txBox="1"/>
           <p:nvPr/>
         </p:nvSpPr>
         <p:spPr>
           <a:xfrm>
-            <a:off x="1691640" y="4032504"/>
-            <a:ext cx="2286000" cy="548640"/>
+            <a:off x="7178040" y="3227832"/>
+            <a:ext cx="4206240" cy="594360"/>
           </a:xfrm>
           <a:prstGeom prst="rect">
             <a:avLst/>
@@ -5453,75 +5101,34 @@
           <a:p>
             <a:pPr algn="l">
               <a:lnSpc>
-                <a:spcPct val="105000"/>
+                <a:spcPct val="110000"/>
               </a:lnSpc>
             </a:pPr>
             <a:r>
-              <a:rPr sz="1350" b="1" i="0">
+              <a:rPr sz="1500" b="1" i="0">
                 <a:solidFill>
                   <a:srgbClr val="1F2D22"/>
-                </a:solidFill>
-                <a:latin typeface="Cambria"/>
-              </a:rPr>
-              <a:t>Builds Real Habits</a:t>
-            </a:r>
-          </a:p>
-        </p:txBody>
-      </p:sp>
-      <p:sp>
-        <p:nvSpPr>
-          <p:cNvPr id="19" name="TextBox 18"/>
-          <p:cNvSpPr txBox="1"/>
-          <p:nvPr/>
-        </p:nvSpPr>
-        <p:spPr>
-          <a:xfrm>
-            <a:off x="1051560" y="4690872"/>
-            <a:ext cx="2880360" cy="822959"/>
-          </a:xfrm>
-          <a:prstGeom prst="rect">
-            <a:avLst/>
-          </a:prstGeom>
-          <a:noFill/>
-        </p:spPr>
-        <p:txBody>
-          <a:bodyPr wrap="square" anchor="t" lIns="0" rIns="0" tIns="0" bIns="0">
-            <a:spAutoFit/>
-          </a:bodyPr>
-          <a:lstStyle/>
-          <a:p>
-            <a:pPr algn="l">
-              <a:lnSpc>
-                <a:spcPct val="120000"/>
-              </a:lnSpc>
-            </a:pPr>
-            <a:r>
-              <a:rPr sz="1050" b="0" i="0">
-                <a:solidFill>
-                  <a:srgbClr val="5B6A5F"/>
                 </a:solidFill>
                 <a:latin typeface="Calibri"/>
               </a:rPr>
-              <a:t>Daily repetition plus streaks reinforce long-term behavior change, not one-off compliance.</a:t>
-            </a:r>
-          </a:p>
-        </p:txBody>
-      </p:sp>
-      <p:sp>
-        <p:nvSpPr>
-          <p:cNvPr id="20" name="Rounded Rectangle 19"/>
+              <a:t>Parents can add their own goals too</a:t>
+            </a:r>
+          </a:p>
+        </p:txBody>
+      </p:sp>
+      <p:sp>
+        <p:nvSpPr>
+          <p:cNvPr id="14" name="Oval 13"/>
           <p:cNvSpPr/>
           <p:nvPr/>
         </p:nvSpPr>
         <p:spPr>
           <a:xfrm>
-            <a:off x="4425696" y="3794760"/>
-            <a:ext cx="3337560" cy="1874519"/>
-          </a:xfrm>
-          <a:prstGeom prst="roundRect">
-            <a:avLst>
-              <a:gd name="adj" fmla="val 10000"/>
-            </a:avLst>
+            <a:off x="6400800" y="4389120"/>
+            <a:ext cx="640080" cy="640080"/>
+          </a:xfrm>
+          <a:prstGeom prst="ellipse">
+            <a:avLst/>
           </a:prstGeom>
           <a:solidFill>
             <a:srgbClr val="F7E1D5"/>
@@ -5546,75 +5153,31 @@
           </a:fontRef>
         </p:style>
         <p:txBody>
-          <a:bodyPr rtlCol="0" anchor="ctr"/>
+          <a:bodyPr rtlCol="0" anchor="ctr" lIns="0" rIns="0" tIns="0" bIns="0" wrap="none"/>
           <a:lstStyle/>
           <a:p>
             <a:pPr algn="ctr"/>
-          </a:p>
-        </p:txBody>
-      </p:sp>
-      <p:sp>
-        <p:nvSpPr>
-          <p:cNvPr id="21" name="Oval 20"/>
-          <p:cNvSpPr/>
-          <p:nvPr/>
-        </p:nvSpPr>
-        <p:spPr>
-          <a:xfrm>
-            <a:off x="4645152" y="4014216"/>
-            <a:ext cx="566928" cy="566928"/>
-          </a:xfrm>
-          <a:prstGeom prst="ellipse">
-            <a:avLst/>
-          </a:prstGeom>
-          <a:solidFill>
-            <a:srgbClr val="FFFFFF"/>
-          </a:solidFill>
-          <a:ln>
-            <a:noFill/>
-          </a:ln>
-          <a:effectLst/>
-        </p:spPr>
-        <p:style>
-          <a:lnRef idx="1">
-            <a:schemeClr val="accent1"/>
-          </a:lnRef>
-          <a:fillRef idx="3">
-            <a:schemeClr val="accent1"/>
-          </a:fillRef>
-          <a:effectRef idx="2">
-            <a:schemeClr val="accent1"/>
-          </a:effectRef>
-          <a:fontRef idx="minor">
-            <a:schemeClr val="lt1"/>
-          </a:fontRef>
-        </p:style>
-        <p:txBody>
-          <a:bodyPr rtlCol="0" anchor="ctr" lIns="0" rIns="0" tIns="0" bIns="0" wrap="none"/>
-          <a:lstStyle/>
-          <a:p>
-            <a:pPr algn="ctr"/>
-            <a:r>
-              <a:rPr sz="1700">
+            <a:r>
+              <a:rPr sz="1800">
                 <a:solidFill>
                   <a:srgbClr val="DD6B42"/>
                 </a:solidFill>
               </a:rPr>
-              <a:t>⚖️</a:t>
-            </a:r>
-          </a:p>
-        </p:txBody>
-      </p:sp>
-      <p:sp>
-        <p:nvSpPr>
-          <p:cNvPr id="22" name="TextBox 21"/>
+              <a:t>🔑</a:t>
+            </a:r>
+          </a:p>
+        </p:txBody>
+      </p:sp>
+      <p:sp>
+        <p:nvSpPr>
+          <p:cNvPr id="15" name="TextBox 14"/>
           <p:cNvSpPr txBox="1"/>
           <p:nvPr/>
         </p:nvSpPr>
         <p:spPr>
           <a:xfrm>
-            <a:off x="5294376" y="4032504"/>
-            <a:ext cx="2286000" cy="548640"/>
+            <a:off x="7178040" y="4416552"/>
+            <a:ext cx="4206240" cy="594360"/>
           </a:xfrm>
           <a:prstGeom prst="rect">
             <a:avLst/>
@@ -5629,232 +5192,17 @@
           <a:p>
             <a:pPr algn="l">
               <a:lnSpc>
-                <a:spcPct val="105000"/>
+                <a:spcPct val="110000"/>
               </a:lnSpc>
             </a:pPr>
             <a:r>
-              <a:rPr sz="1350" b="1" i="0">
+              <a:rPr sz="1500" b="1" i="0">
                 <a:solidFill>
                   <a:srgbClr val="1F2D22"/>
-                </a:solidFill>
-                <a:latin typeface="Cambria"/>
-              </a:rPr>
-              <a:t>Fair &amp; Honest</a:t>
-            </a:r>
-          </a:p>
-        </p:txBody>
-      </p:sp>
-      <p:sp>
-        <p:nvSpPr>
-          <p:cNvPr id="23" name="TextBox 22"/>
-          <p:cNvSpPr txBox="1"/>
-          <p:nvPr/>
-        </p:nvSpPr>
-        <p:spPr>
-          <a:xfrm>
-            <a:off x="4654296" y="4690872"/>
-            <a:ext cx="2880360" cy="822959"/>
-          </a:xfrm>
-          <a:prstGeom prst="rect">
-            <a:avLst/>
-          </a:prstGeom>
-          <a:noFill/>
-        </p:spPr>
-        <p:txBody>
-          <a:bodyPr wrap="square" anchor="t" lIns="0" rIns="0" tIns="0" bIns="0">
-            <a:spAutoFit/>
-          </a:bodyPr>
-          <a:lstStyle/>
-          <a:p>
-            <a:pPr algn="l">
-              <a:lnSpc>
-                <a:spcPct val="120000"/>
-              </a:lnSpc>
-            </a:pPr>
-            <a:r>
-              <a:rPr sz="1050" b="0" i="0">
-                <a:solidFill>
-                  <a:srgbClr val="5B6A5F"/>
                 </a:solidFill>
                 <a:latin typeface="Calibri"/>
               </a:rPr>
-              <a:t>Partial effort still banks time — one missed goal doesn't erase the whole day.</a:t>
-            </a:r>
-          </a:p>
-        </p:txBody>
-      </p:sp>
-      <p:sp>
-        <p:nvSpPr>
-          <p:cNvPr id="24" name="Rounded Rectangle 23"/>
-          <p:cNvSpPr/>
-          <p:nvPr/>
-        </p:nvSpPr>
-        <p:spPr>
-          <a:xfrm>
-            <a:off x="8037575" y="3794760"/>
-            <a:ext cx="3337560" cy="1874519"/>
-          </a:xfrm>
-          <a:prstGeom prst="roundRect">
-            <a:avLst>
-              <a:gd name="adj" fmla="val 10000"/>
-            </a:avLst>
-          </a:prstGeom>
-          <a:solidFill>
-            <a:srgbClr val="DCE8D9"/>
-          </a:solidFill>
-          <a:ln>
-            <a:noFill/>
-          </a:ln>
-          <a:effectLst/>
-        </p:spPr>
-        <p:style>
-          <a:lnRef idx="1">
-            <a:schemeClr val="accent1"/>
-          </a:lnRef>
-          <a:fillRef idx="3">
-            <a:schemeClr val="accent1"/>
-          </a:fillRef>
-          <a:effectRef idx="2">
-            <a:schemeClr val="accent1"/>
-          </a:effectRef>
-          <a:fontRef idx="minor">
-            <a:schemeClr val="lt1"/>
-          </a:fontRef>
-        </p:style>
-        <p:txBody>
-          <a:bodyPr rtlCol="0" anchor="ctr"/>
-          <a:lstStyle/>
-          <a:p>
-            <a:pPr algn="ctr"/>
-          </a:p>
-        </p:txBody>
-      </p:sp>
-      <p:sp>
-        <p:nvSpPr>
-          <p:cNvPr id="25" name="Oval 24"/>
-          <p:cNvSpPr/>
-          <p:nvPr/>
-        </p:nvSpPr>
-        <p:spPr>
-          <a:xfrm>
-            <a:off x="8257031" y="4014216"/>
-            <a:ext cx="566928" cy="566928"/>
-          </a:xfrm>
-          <a:prstGeom prst="ellipse">
-            <a:avLst/>
-          </a:prstGeom>
-          <a:solidFill>
-            <a:srgbClr val="FFFFFF"/>
-          </a:solidFill>
-          <a:ln>
-            <a:noFill/>
-          </a:ln>
-          <a:effectLst/>
-        </p:spPr>
-        <p:style>
-          <a:lnRef idx="1">
-            <a:schemeClr val="accent1"/>
-          </a:lnRef>
-          <a:fillRef idx="3">
-            <a:schemeClr val="accent1"/>
-          </a:fillRef>
-          <a:effectRef idx="2">
-            <a:schemeClr val="accent1"/>
-          </a:effectRef>
-          <a:fontRef idx="minor">
-            <a:schemeClr val="lt1"/>
-          </a:fontRef>
-        </p:style>
-        <p:txBody>
-          <a:bodyPr rtlCol="0" anchor="ctr" lIns="0" rIns="0" tIns="0" bIns="0" wrap="none"/>
-          <a:lstStyle/>
-          <a:p>
-            <a:pPr algn="ctr"/>
-            <a:r>
-              <a:rPr sz="1700">
-                <a:solidFill>
-                  <a:srgbClr val="3E7A5C"/>
-                </a:solidFill>
-              </a:rPr>
-              <a:t>🌍</a:t>
-            </a:r>
-          </a:p>
-        </p:txBody>
-      </p:sp>
-      <p:sp>
-        <p:nvSpPr>
-          <p:cNvPr id="26" name="TextBox 25"/>
-          <p:cNvSpPr txBox="1"/>
-          <p:nvPr/>
-        </p:nvSpPr>
-        <p:spPr>
-          <a:xfrm>
-            <a:off x="8906255" y="4032504"/>
-            <a:ext cx="2286000" cy="548640"/>
-          </a:xfrm>
-          <a:prstGeom prst="rect">
-            <a:avLst/>
-          </a:prstGeom>
-          <a:noFill/>
-        </p:spPr>
-        <p:txBody>
-          <a:bodyPr wrap="square" anchor="ctr" lIns="0" rIns="0" tIns="0" bIns="0">
-            <a:spAutoFit/>
-          </a:bodyPr>
-          <a:lstStyle/>
-          <a:p>
-            <a:pPr algn="l">
-              <a:lnSpc>
-                <a:spcPct val="105000"/>
-              </a:lnSpc>
-            </a:pPr>
-            <a:r>
-              <a:rPr sz="1350" b="1" i="0">
-                <a:solidFill>
-                  <a:srgbClr val="1F2D22"/>
-                </a:solidFill>
-                <a:latin typeface="Cambria"/>
-              </a:rPr>
-              <a:t>Works for Any Family</a:t>
-            </a:r>
-          </a:p>
-        </p:txBody>
-      </p:sp>
-      <p:sp>
-        <p:nvSpPr>
-          <p:cNvPr id="27" name="TextBox 26"/>
-          <p:cNvSpPr txBox="1"/>
-          <p:nvPr/>
-        </p:nvSpPr>
-        <p:spPr>
-          <a:xfrm>
-            <a:off x="8266175" y="4690872"/>
-            <a:ext cx="2880360" cy="822959"/>
-          </a:xfrm>
-          <a:prstGeom prst="rect">
-            <a:avLst/>
-          </a:prstGeom>
-          <a:noFill/>
-        </p:spPr>
-        <p:txBody>
-          <a:bodyPr wrap="square" anchor="t" lIns="0" rIns="0" tIns="0" bIns="0">
-            <a:spAutoFit/>
-          </a:bodyPr>
-          <a:lstStyle/>
-          <a:p>
-            <a:pPr algn="l">
-              <a:lnSpc>
-                <a:spcPct val="120000"/>
-              </a:lnSpc>
-            </a:pPr>
-            <a:r>
-              <a:rPr sz="1050" b="0" i="0">
-                <a:solidFill>
-                  <a:srgbClr val="5B6A5F"/>
-                </a:solidFill>
-                <a:latin typeface="Calibri"/>
-              </a:rPr>
-              <a:t>No fixed rules — adapts to each household's own goals and routines.</a:t>
+              <a:t>A safe emergency button just for parents</a:t>
             </a:r>
           </a:p>
         </p:txBody>
@@ -5893,8 +5241,8 @@
         </p:nvSpPr>
         <p:spPr>
           <a:xfrm>
-            <a:off x="822960" y="502920"/>
-            <a:ext cx="10332720" cy="731520"/>
+            <a:off x="822960" y="457200"/>
+            <a:ext cx="10332720" cy="640080"/>
           </a:xfrm>
           <a:prstGeom prst="rect">
             <a:avLst/>
@@ -5913,13 +5261,13 @@
               </a:lnSpc>
             </a:pPr>
             <a:r>
-              <a:rPr sz="3000" b="1" i="0">
+              <a:rPr sz="3200" b="1" i="0">
                 <a:solidFill>
                   <a:srgbClr val="1F2D22"/>
                 </a:solidFill>
                 <a:latin typeface="Cambria"/>
               </a:rPr>
-              <a:t>Why Screen-Time Apps Don't Work</a:t>
+              <a:t>See The App!</a:t>
             </a:r>
           </a:p>
         </p:txBody>
@@ -5932,8 +5280,8 @@
         </p:nvSpPr>
         <p:spPr>
           <a:xfrm>
-            <a:off x="822960" y="1188720"/>
-            <a:ext cx="9601200" cy="548640"/>
+            <a:off x="822960" y="1051560"/>
+            <a:ext cx="9784080" cy="457200"/>
           </a:xfrm>
           <a:prstGeom prst="rect">
             <a:avLst/>
@@ -5958,7 +5306,7 @@
                 </a:solidFill>
                 <a:latin typeface="Calibri"/>
               </a:rPr>
-              <a:t>They all take the same approach. We took the opposite one.</a:t>
+              <a:t>Here's what it really looks like.</a:t>
             </a:r>
           </a:p>
         </p:txBody>
@@ -5971,13 +5319,361 @@
         </p:nvSpPr>
         <p:spPr>
           <a:xfrm>
-            <a:off x="822960" y="1920240"/>
-            <a:ext cx="5029200" cy="4114800"/>
+            <a:off x="822960" y="1691640"/>
+            <a:ext cx="5029200" cy="4846320"/>
           </a:xfrm>
           <a:prstGeom prst="roundRect">
             <a:avLst>
-              <a:gd name="adj" fmla="val 10000"/>
+              <a:gd name="adj" fmla="val 6000"/>
             </a:avLst>
+          </a:prstGeom>
+          <a:solidFill>
+            <a:srgbClr val="FFFFFF"/>
+          </a:solidFill>
+          <a:ln w="12700">
+            <a:solidFill>
+              <a:srgbClr val="ECECEA"/>
+            </a:solidFill>
+          </a:ln>
+          <a:effectLst/>
+        </p:spPr>
+        <p:style>
+          <a:lnRef idx="1">
+            <a:schemeClr val="accent1"/>
+          </a:lnRef>
+          <a:fillRef idx="3">
+            <a:schemeClr val="accent1"/>
+          </a:fillRef>
+          <a:effectRef idx="2">
+            <a:schemeClr val="accent1"/>
+          </a:effectRef>
+          <a:fontRef idx="minor">
+            <a:schemeClr val="lt1"/>
+          </a:fontRef>
+        </p:style>
+        <p:txBody>
+          <a:bodyPr rtlCol="0" anchor="ctr"/>
+          <a:lstStyle/>
+          <a:p>
+            <a:pPr algn="ctr"/>
+          </a:p>
+        </p:txBody>
+      </p:sp>
+      <p:sp>
+        <p:nvSpPr>
+          <p:cNvPr id="5" name="TextBox 4"/>
+          <p:cNvSpPr txBox="1"/>
+          <p:nvPr/>
+        </p:nvSpPr>
+        <p:spPr>
+          <a:xfrm>
+            <a:off x="1097280" y="1874520"/>
+            <a:ext cx="4480560" cy="365760"/>
+          </a:xfrm>
+          <a:prstGeom prst="rect">
+            <a:avLst/>
+          </a:prstGeom>
+          <a:noFill/>
+        </p:spPr>
+        <p:txBody>
+          <a:bodyPr wrap="square" anchor="t" lIns="0" rIns="0" tIns="0" bIns="0">
+            <a:spAutoFit/>
+          </a:bodyPr>
+          <a:lstStyle/>
+          <a:p>
+            <a:pPr algn="l">
+              <a:lnSpc>
+                <a:spcPct val="115000"/>
+              </a:lnSpc>
+            </a:pPr>
+            <a:r>
+              <a:rPr sz="1400" b="1" i="0">
+                <a:solidFill>
+                  <a:srgbClr val="1F2D22"/>
+                </a:solidFill>
+                <a:latin typeface="Cambria"/>
+              </a:rPr>
+              <a:t>🌱 Hi! Let's grow today</a:t>
+            </a:r>
+          </a:p>
+        </p:txBody>
+      </p:sp>
+      <p:sp>
+        <p:nvSpPr>
+          <p:cNvPr id="6" name="Rounded Rectangle 5"/>
+          <p:cNvSpPr/>
+          <p:nvPr/>
+        </p:nvSpPr>
+        <p:spPr>
+          <a:xfrm>
+            <a:off x="4937760" y="1856232"/>
+            <a:ext cx="731520" cy="292608"/>
+          </a:xfrm>
+          <a:prstGeom prst="roundRect">
+            <a:avLst>
+              <a:gd name="adj" fmla="val 50000"/>
+            </a:avLst>
+          </a:prstGeom>
+          <a:solidFill>
+            <a:srgbClr val="F5E7C9"/>
+          </a:solidFill>
+          <a:ln>
+            <a:noFill/>
+          </a:ln>
+          <a:effectLst/>
+        </p:spPr>
+        <p:style>
+          <a:lnRef idx="1">
+            <a:schemeClr val="accent1"/>
+          </a:lnRef>
+          <a:fillRef idx="3">
+            <a:schemeClr val="accent1"/>
+          </a:fillRef>
+          <a:effectRef idx="2">
+            <a:schemeClr val="accent1"/>
+          </a:effectRef>
+          <a:fontRef idx="minor">
+            <a:schemeClr val="lt1"/>
+          </a:fontRef>
+        </p:style>
+        <p:txBody>
+          <a:bodyPr rtlCol="0" anchor="ctr" lIns="0" rIns="0" tIns="0" bIns="0"/>
+          <a:lstStyle/>
+          <a:p>
+            <a:pPr algn="ctr"/>
+            <a:r>
+              <a:rPr sz="1000" b="1">
+                <a:solidFill>
+                  <a:srgbClr val="DB9D3B"/>
+                </a:solidFill>
+                <a:latin typeface="Calibri"/>
+              </a:rPr>
+              <a:t>🍃 2</a:t>
+            </a:r>
+          </a:p>
+        </p:txBody>
+      </p:sp>
+      <p:sp>
+        <p:nvSpPr>
+          <p:cNvPr id="7" name="Oval 6"/>
+          <p:cNvSpPr/>
+          <p:nvPr/>
+        </p:nvSpPr>
+        <p:spPr>
+          <a:xfrm>
+            <a:off x="1051560" y="2286000"/>
+            <a:ext cx="548640" cy="548640"/>
+          </a:xfrm>
+          <a:prstGeom prst="ellipse">
+            <a:avLst/>
+          </a:prstGeom>
+          <a:solidFill>
+            <a:srgbClr val="DCE8D9"/>
+          </a:solidFill>
+          <a:ln>
+            <a:noFill/>
+          </a:ln>
+          <a:effectLst/>
+        </p:spPr>
+        <p:style>
+          <a:lnRef idx="1">
+            <a:schemeClr val="accent1"/>
+          </a:lnRef>
+          <a:fillRef idx="3">
+            <a:schemeClr val="accent1"/>
+          </a:fillRef>
+          <a:effectRef idx="2">
+            <a:schemeClr val="accent1"/>
+          </a:effectRef>
+          <a:fontRef idx="minor">
+            <a:schemeClr val="lt1"/>
+          </a:fontRef>
+        </p:style>
+        <p:txBody>
+          <a:bodyPr rtlCol="0" anchor="ctr" lIns="0" rIns="0" tIns="0" bIns="0" wrap="none"/>
+          <a:lstStyle/>
+          <a:p>
+            <a:pPr algn="ctr"/>
+            <a:r>
+              <a:rPr sz="1500">
+                <a:solidFill>
+                  <a:srgbClr val="3E7A5C"/>
+                </a:solidFill>
+              </a:rPr>
+              <a:t>💧</a:t>
+            </a:r>
+          </a:p>
+        </p:txBody>
+      </p:sp>
+      <p:sp>
+        <p:nvSpPr>
+          <p:cNvPr id="8" name="Oval 7"/>
+          <p:cNvSpPr/>
+          <p:nvPr/>
+        </p:nvSpPr>
+        <p:spPr>
+          <a:xfrm>
+            <a:off x="1965960" y="2286000"/>
+            <a:ext cx="548640" cy="548640"/>
+          </a:xfrm>
+          <a:prstGeom prst="ellipse">
+            <a:avLst/>
+          </a:prstGeom>
+          <a:solidFill>
+            <a:srgbClr val="F7E1D5"/>
+          </a:solidFill>
+          <a:ln>
+            <a:noFill/>
+          </a:ln>
+          <a:effectLst/>
+        </p:spPr>
+        <p:style>
+          <a:lnRef idx="1">
+            <a:schemeClr val="accent1"/>
+          </a:lnRef>
+          <a:fillRef idx="3">
+            <a:schemeClr val="accent1"/>
+          </a:fillRef>
+          <a:effectRef idx="2">
+            <a:schemeClr val="accent1"/>
+          </a:effectRef>
+          <a:fontRef idx="minor">
+            <a:schemeClr val="lt1"/>
+          </a:fontRef>
+        </p:style>
+        <p:txBody>
+          <a:bodyPr rtlCol="0" anchor="ctr" lIns="0" rIns="0" tIns="0" bIns="0" wrap="none"/>
+          <a:lstStyle/>
+          <a:p>
+            <a:pPr algn="ctr"/>
+            <a:r>
+              <a:rPr sz="1500">
+                <a:solidFill>
+                  <a:srgbClr val="DD6B42"/>
+                </a:solidFill>
+              </a:rPr>
+              <a:t>🏃</a:t>
+            </a:r>
+          </a:p>
+        </p:txBody>
+      </p:sp>
+      <p:sp>
+        <p:nvSpPr>
+          <p:cNvPr id="9" name="Oval 8"/>
+          <p:cNvSpPr/>
+          <p:nvPr/>
+        </p:nvSpPr>
+        <p:spPr>
+          <a:xfrm>
+            <a:off x="2880360" y="2286000"/>
+            <a:ext cx="548640" cy="548640"/>
+          </a:xfrm>
+          <a:prstGeom prst="ellipse">
+            <a:avLst/>
+          </a:prstGeom>
+          <a:solidFill>
+            <a:srgbClr val="E2E2F5"/>
+          </a:solidFill>
+          <a:ln>
+            <a:noFill/>
+          </a:ln>
+          <a:effectLst/>
+        </p:spPr>
+        <p:style>
+          <a:lnRef idx="1">
+            <a:schemeClr val="accent1"/>
+          </a:lnRef>
+          <a:fillRef idx="3">
+            <a:schemeClr val="accent1"/>
+          </a:fillRef>
+          <a:effectRef idx="2">
+            <a:schemeClr val="accent1"/>
+          </a:effectRef>
+          <a:fontRef idx="minor">
+            <a:schemeClr val="lt1"/>
+          </a:fontRef>
+        </p:style>
+        <p:txBody>
+          <a:bodyPr rtlCol="0" anchor="ctr" lIns="0" rIns="0" tIns="0" bIns="0" wrap="none"/>
+          <a:lstStyle/>
+          <a:p>
+            <a:pPr algn="ctr"/>
+            <a:r>
+              <a:rPr sz="1500">
+                <a:solidFill>
+                  <a:srgbClr val="6E6FBF"/>
+                </a:solidFill>
+              </a:rPr>
+              <a:t>🌙</a:t>
+            </a:r>
+          </a:p>
+        </p:txBody>
+      </p:sp>
+      <p:sp>
+        <p:nvSpPr>
+          <p:cNvPr id="10" name="Oval 9"/>
+          <p:cNvSpPr/>
+          <p:nvPr/>
+        </p:nvSpPr>
+        <p:spPr>
+          <a:xfrm>
+            <a:off x="3794760" y="2286000"/>
+            <a:ext cx="548640" cy="548640"/>
+          </a:xfrm>
+          <a:prstGeom prst="ellipse">
+            <a:avLst/>
+          </a:prstGeom>
+          <a:solidFill>
+            <a:srgbClr val="F7E1D5"/>
+          </a:solidFill>
+          <a:ln>
+            <a:noFill/>
+          </a:ln>
+          <a:effectLst/>
+        </p:spPr>
+        <p:style>
+          <a:lnRef idx="1">
+            <a:schemeClr val="accent1"/>
+          </a:lnRef>
+          <a:fillRef idx="3">
+            <a:schemeClr val="accent1"/>
+          </a:fillRef>
+          <a:effectRef idx="2">
+            <a:schemeClr val="accent1"/>
+          </a:effectRef>
+          <a:fontRef idx="minor">
+            <a:schemeClr val="lt1"/>
+          </a:fontRef>
+        </p:style>
+        <p:txBody>
+          <a:bodyPr rtlCol="0" anchor="ctr" lIns="0" rIns="0" tIns="0" bIns="0" wrap="none"/>
+          <a:lstStyle/>
+          <a:p>
+            <a:pPr algn="ctr"/>
+            <a:r>
+              <a:rPr sz="1500">
+                <a:solidFill>
+                  <a:srgbClr val="DD6B42"/>
+                </a:solidFill>
+              </a:rPr>
+              <a:t>🍎</a:t>
+            </a:r>
+          </a:p>
+        </p:txBody>
+      </p:sp>
+      <p:sp>
+        <p:nvSpPr>
+          <p:cNvPr id="11" name="Rectangle 10"/>
+          <p:cNvSpPr/>
+          <p:nvPr/>
+        </p:nvSpPr>
+        <p:spPr>
+          <a:xfrm>
+            <a:off x="1097280" y="2971800"/>
+            <a:ext cx="4480560" cy="18288"/>
+          </a:xfrm>
+          <a:prstGeom prst="rect">
+            <a:avLst/>
           </a:prstGeom>
           <a:solidFill>
             <a:srgbClr val="ECECEA"/>
@@ -6011,14 +5707,60 @@
       </p:sp>
       <p:sp>
         <p:nvSpPr>
-          <p:cNvPr id="5" name="TextBox 4"/>
+          <p:cNvPr id="12" name="Rounded Rectangle 11"/>
+          <p:cNvSpPr/>
+          <p:nvPr/>
+        </p:nvSpPr>
+        <p:spPr>
+          <a:xfrm>
+            <a:off x="1097280" y="3154680"/>
+            <a:ext cx="4480560" cy="457200"/>
+          </a:xfrm>
+          <a:prstGeom prst="roundRect">
+            <a:avLst>
+              <a:gd name="adj" fmla="val 10000"/>
+            </a:avLst>
+          </a:prstGeom>
+          <a:solidFill>
+            <a:srgbClr val="F5E7C9"/>
+          </a:solidFill>
+          <a:ln>
+            <a:noFill/>
+          </a:ln>
+          <a:effectLst/>
+        </p:spPr>
+        <p:style>
+          <a:lnRef idx="1">
+            <a:schemeClr val="accent1"/>
+          </a:lnRef>
+          <a:fillRef idx="3">
+            <a:schemeClr val="accent1"/>
+          </a:fillRef>
+          <a:effectRef idx="2">
+            <a:schemeClr val="accent1"/>
+          </a:effectRef>
+          <a:fontRef idx="minor">
+            <a:schemeClr val="lt1"/>
+          </a:fontRef>
+        </p:style>
+        <p:txBody>
+          <a:bodyPr rtlCol="0" anchor="ctr"/>
+          <a:lstStyle/>
+          <a:p>
+            <a:pPr algn="ctr"/>
+          </a:p>
+        </p:txBody>
+      </p:sp>
+      <p:sp>
+        <p:nvSpPr>
+          <p:cNvPr id="13" name="TextBox 12"/>
           <p:cNvSpPr txBox="1"/>
           <p:nvPr/>
         </p:nvSpPr>
         <p:spPr>
           <a:xfrm>
-            <a:off x="1097280" y="2148840"/>
-            <a:ext cx="4480560" cy="457200"/>
+            <a:off x="1280160" y="3154680"/>
+            <a:ext cx="4114800" cy="457200"/>
           </a:xfrm>
           <a:prstGeom prst="rect">
             <a:avLst/>
@@ -6026,7 +5768,7 @@
           <a:noFill/>
         </p:spPr>
         <p:txBody>
-          <a:bodyPr wrap="square" anchor="t" lIns="0" rIns="0" tIns="0" bIns="0">
+          <a:bodyPr wrap="square" anchor="ctr" lIns="0" rIns="0" tIns="0" bIns="0">
             <a:spAutoFit/>
           </a:bodyPr>
           <a:lstStyle/>
@@ -6037,27 +5779,125 @@
               </a:lnSpc>
             </a:pPr>
             <a:r>
-              <a:rPr sz="1300" b="1" i="0">
-                <a:solidFill>
-                  <a:srgbClr val="8A8F8B"/>
+              <a:rPr sz="1150" b="1" i="0">
+                <a:solidFill>
+                  <a:srgbClr val="DB9D3B"/>
                 </a:solidFill>
                 <a:latin typeface="Calibri"/>
               </a:rPr>
-              <a:t>TYPICAL APPS</a:t>
-            </a:r>
-          </a:p>
-        </p:txBody>
-      </p:sp>
-      <p:sp>
-        <p:nvSpPr>
-          <p:cNvPr id="6" name="TextBox 5"/>
+              <a:t>🔒 2 more to earn screen time</a:t>
+            </a:r>
+          </a:p>
+        </p:txBody>
+      </p:sp>
+      <p:sp>
+        <p:nvSpPr>
+          <p:cNvPr id="14" name="Rounded Rectangle 13"/>
+          <p:cNvSpPr/>
+          <p:nvPr/>
+        </p:nvSpPr>
+        <p:spPr>
+          <a:xfrm>
+            <a:off x="1097280" y="3794760"/>
+            <a:ext cx="4480560" cy="777240"/>
+          </a:xfrm>
+          <a:prstGeom prst="roundRect">
+            <a:avLst>
+              <a:gd name="adj" fmla="val 10000"/>
+            </a:avLst>
+          </a:prstGeom>
+          <a:solidFill>
+            <a:srgbClr val="ECECEA"/>
+          </a:solidFill>
+          <a:ln>
+            <a:noFill/>
+          </a:ln>
+          <a:effectLst/>
+        </p:spPr>
+        <p:style>
+          <a:lnRef idx="1">
+            <a:schemeClr val="accent1"/>
+          </a:lnRef>
+          <a:fillRef idx="3">
+            <a:schemeClr val="accent1"/>
+          </a:fillRef>
+          <a:effectRef idx="2">
+            <a:schemeClr val="accent1"/>
+          </a:effectRef>
+          <a:fontRef idx="minor">
+            <a:schemeClr val="lt1"/>
+          </a:fontRef>
+        </p:style>
+        <p:txBody>
+          <a:bodyPr rtlCol="0" anchor="ctr"/>
+          <a:lstStyle/>
+          <a:p>
+            <a:pPr algn="ctr"/>
+          </a:p>
+        </p:txBody>
+      </p:sp>
+      <p:sp>
+        <p:nvSpPr>
+          <p:cNvPr id="15" name="Oval 14"/>
+          <p:cNvSpPr/>
+          <p:nvPr/>
+        </p:nvSpPr>
+        <p:spPr>
+          <a:xfrm>
+            <a:off x="1257300" y="3927348"/>
+            <a:ext cx="502920" cy="502920"/>
+          </a:xfrm>
+          <a:prstGeom prst="ellipse">
+            <a:avLst/>
+          </a:prstGeom>
+          <a:solidFill>
+            <a:srgbClr val="DCE8D9"/>
+          </a:solidFill>
+          <a:ln>
+            <a:noFill/>
+          </a:ln>
+          <a:effectLst/>
+        </p:spPr>
+        <p:style>
+          <a:lnRef idx="1">
+            <a:schemeClr val="accent1"/>
+          </a:lnRef>
+          <a:fillRef idx="3">
+            <a:schemeClr val="accent1"/>
+          </a:fillRef>
+          <a:effectRef idx="2">
+            <a:schemeClr val="accent1"/>
+          </a:effectRef>
+          <a:fontRef idx="minor">
+            <a:schemeClr val="lt1"/>
+          </a:fontRef>
+        </p:style>
+        <p:txBody>
+          <a:bodyPr rtlCol="0" anchor="ctr" lIns="0" rIns="0" tIns="0" bIns="0" wrap="none"/>
+          <a:lstStyle/>
+          <a:p>
+            <a:pPr algn="ctr"/>
+            <a:r>
+              <a:rPr sz="1400">
+                <a:solidFill>
+                  <a:srgbClr val="3E7A5C"/>
+                </a:solidFill>
+              </a:rPr>
+              <a:t>💧</a:t>
+            </a:r>
+          </a:p>
+        </p:txBody>
+      </p:sp>
+      <p:sp>
+        <p:nvSpPr>
+          <p:cNvPr id="16" name="TextBox 15"/>
           <p:cNvSpPr txBox="1"/>
           <p:nvPr/>
         </p:nvSpPr>
         <p:spPr>
           <a:xfrm>
-            <a:off x="1097280" y="2651760"/>
-            <a:ext cx="4480560" cy="3200400"/>
+            <a:off x="1874519" y="3977640"/>
+            <a:ext cx="1828800" cy="457200"/>
           </a:xfrm>
           <a:prstGeom prst="rect">
             <a:avLst/>
@@ -6065,146 +5905,42 @@
           <a:noFill/>
         </p:spPr>
         <p:txBody>
-          <a:bodyPr wrap="square" lIns="0" rIns="0" tIns="0" bIns="0">
+          <a:bodyPr wrap="square" anchor="ctr" lIns="0" rIns="0" tIns="0" bIns="0">
             <a:spAutoFit/>
           </a:bodyPr>
           <a:lstStyle/>
           <a:p>
-            <a:pPr indent="-201168" marL="201168">
+            <a:pPr algn="l">
               <a:lnSpc>
                 <a:spcPct val="115000"/>
               </a:lnSpc>
-              <a:spcAft>
-                <a:spcPts val="1000"/>
-              </a:spcAft>
-              <a:buClr>
-                <a:srgbClr val="8A8F8B"/>
-              </a:buClr>
-              <a:buFont typeface="Arial"/>
-              <a:buChar char="✗"/>
             </a:pPr>
             <a:r>
-              <a:rPr sz="1450">
-                <a:solidFill>
-                  <a:srgbClr val="5B6A5F"/>
+              <a:rPr sz="1250" b="1" i="0">
+                <a:solidFill>
+                  <a:srgbClr val="1F2D22"/>
                 </a:solidFill>
                 <a:latin typeface="Calibri"/>
               </a:rPr>
-              <a:t>Restrict access with a hard timer</a:t>
-            </a:r>
-          </a:p>
-          <a:p>
-            <a:pPr indent="-201168" marL="201168">
-              <a:lnSpc>
-                <a:spcPct val="115000"/>
-              </a:lnSpc>
-              <a:spcAft>
-                <a:spcPts val="1000"/>
-              </a:spcAft>
-              <a:buClr>
-                <a:srgbClr val="8A8F8B"/>
-              </a:buClr>
-              <a:buFont typeface="Arial"/>
-              <a:buChar char="✗"/>
-            </a:pPr>
-            <a:r>
-              <a:rPr sz="1450">
-                <a:solidFill>
-                  <a:srgbClr val="5B6A5F"/>
-                </a:solidFill>
-                <a:latin typeface="Calibri"/>
-              </a:rPr>
-              <a:t>Kid feels punished, not motivated</a:t>
-            </a:r>
-          </a:p>
-          <a:p>
-            <a:pPr indent="-201168" marL="201168">
-              <a:lnSpc>
-                <a:spcPct val="115000"/>
-              </a:lnSpc>
-              <a:spcAft>
-                <a:spcPts val="1000"/>
-              </a:spcAft>
-              <a:buClr>
-                <a:srgbClr val="8A8F8B"/>
-              </a:buClr>
-              <a:buFont typeface="Arial"/>
-              <a:buChar char="✗"/>
-            </a:pPr>
-            <a:r>
-              <a:rPr sz="1450">
-                <a:solidFill>
-                  <a:srgbClr val="5B6A5F"/>
-                </a:solidFill>
-                <a:latin typeface="Calibri"/>
-              </a:rPr>
-              <a:t>Parent becomes the enforcer</a:t>
-            </a:r>
-          </a:p>
-          <a:p>
-            <a:pPr indent="-201168" marL="201168">
-              <a:lnSpc>
-                <a:spcPct val="115000"/>
-              </a:lnSpc>
-              <a:spcAft>
-                <a:spcPts val="1000"/>
-              </a:spcAft>
-              <a:buClr>
-                <a:srgbClr val="8A8F8B"/>
-              </a:buClr>
-              <a:buFont typeface="Arial"/>
-              <a:buChar char="✗"/>
-            </a:pPr>
-            <a:r>
-              <a:rPr sz="1450">
-                <a:solidFill>
-                  <a:srgbClr val="5B6A5F"/>
-                </a:solidFill>
-                <a:latin typeface="Calibri"/>
-              </a:rPr>
-              <a:t>One fixed rule for every family</a:t>
-            </a:r>
-          </a:p>
-          <a:p>
-            <a:pPr indent="-201168" marL="201168">
-              <a:lnSpc>
-                <a:spcPct val="115000"/>
-              </a:lnSpc>
-              <a:spcAft>
-                <a:spcPts val="1000"/>
-              </a:spcAft>
-              <a:buClr>
-                <a:srgbClr val="8A8F8B"/>
-              </a:buClr>
-              <a:buFont typeface="Arial"/>
-              <a:buChar char="✗"/>
-            </a:pPr>
-            <a:r>
-              <a:rPr sz="1450">
-                <a:solidFill>
-                  <a:srgbClr val="5B6A5F"/>
-                </a:solidFill>
-                <a:latin typeface="Calibri"/>
-              </a:rPr>
-              <a:t>Screen time becomes a daily fight</a:t>
-            </a:r>
-          </a:p>
-        </p:txBody>
-      </p:sp>
-      <p:sp>
-        <p:nvSpPr>
-          <p:cNvPr id="7" name="Rounded Rectangle 6"/>
+              <a:t>Drink water</a:t>
+            </a:r>
+          </a:p>
+        </p:txBody>
+      </p:sp>
+      <p:sp>
+        <p:nvSpPr>
+          <p:cNvPr id="17" name="Rounded Rectangle 16"/>
           <p:cNvSpPr/>
           <p:nvPr/>
         </p:nvSpPr>
         <p:spPr>
           <a:xfrm>
-            <a:off x="6309360" y="1920240"/>
-            <a:ext cx="5074920" cy="4114800"/>
+            <a:off x="4297680" y="3995928"/>
+            <a:ext cx="1280160" cy="365760"/>
           </a:xfrm>
           <a:prstGeom prst="roundRect">
             <a:avLst>
-              <a:gd name="adj" fmla="val 10000"/>
+              <a:gd name="adj" fmla="val 50000"/>
             </a:avLst>
           </a:prstGeom>
           <a:solidFill>
@@ -6230,6 +5966,61 @@
           </a:fontRef>
         </p:style>
         <p:txBody>
+          <a:bodyPr rtlCol="0" anchor="ctr" lIns="0" rIns="0" tIns="0" bIns="0"/>
+          <a:lstStyle/>
+          <a:p>
+            <a:pPr algn="ctr"/>
+            <a:r>
+              <a:rPr sz="1050" b="1">
+                <a:solidFill>
+                  <a:srgbClr val="FFFFFF"/>
+                </a:solidFill>
+                <a:latin typeface="Calibri"/>
+              </a:rPr>
+              <a:t>0/8</a:t>
+            </a:r>
+          </a:p>
+        </p:txBody>
+      </p:sp>
+      <p:sp>
+        <p:nvSpPr>
+          <p:cNvPr id="18" name="Rounded Rectangle 17"/>
+          <p:cNvSpPr/>
+          <p:nvPr/>
+        </p:nvSpPr>
+        <p:spPr>
+          <a:xfrm>
+            <a:off x="1097280" y="4754880"/>
+            <a:ext cx="4480560" cy="777240"/>
+          </a:xfrm>
+          <a:prstGeom prst="roundRect">
+            <a:avLst>
+              <a:gd name="adj" fmla="val 10000"/>
+            </a:avLst>
+          </a:prstGeom>
+          <a:solidFill>
+            <a:srgbClr val="ECECEA"/>
+          </a:solidFill>
+          <a:ln>
+            <a:noFill/>
+          </a:ln>
+          <a:effectLst/>
+        </p:spPr>
+        <p:style>
+          <a:lnRef idx="1">
+            <a:schemeClr val="accent1"/>
+          </a:lnRef>
+          <a:fillRef idx="3">
+            <a:schemeClr val="accent1"/>
+          </a:fillRef>
+          <a:effectRef idx="2">
+            <a:schemeClr val="accent1"/>
+          </a:effectRef>
+          <a:fontRef idx="minor">
+            <a:schemeClr val="lt1"/>
+          </a:fontRef>
+        </p:style>
+        <p:txBody>
           <a:bodyPr rtlCol="0" anchor="ctr"/>
           <a:lstStyle/>
           <a:p>
@@ -6239,14 +6030,66 @@
       </p:sp>
       <p:sp>
         <p:nvSpPr>
-          <p:cNvPr id="8" name="TextBox 7"/>
+          <p:cNvPr id="19" name="Oval 18"/>
+          <p:cNvSpPr/>
+          <p:nvPr/>
+        </p:nvSpPr>
+        <p:spPr>
+          <a:xfrm>
+            <a:off x="1257300" y="4887468"/>
+            <a:ext cx="502920" cy="502920"/>
+          </a:xfrm>
+          <a:prstGeom prst="ellipse">
+            <a:avLst/>
+          </a:prstGeom>
+          <a:solidFill>
+            <a:srgbClr val="F7E1D5"/>
+          </a:solidFill>
+          <a:ln>
+            <a:noFill/>
+          </a:ln>
+          <a:effectLst/>
+        </p:spPr>
+        <p:style>
+          <a:lnRef idx="1">
+            <a:schemeClr val="accent1"/>
+          </a:lnRef>
+          <a:fillRef idx="3">
+            <a:schemeClr val="accent1"/>
+          </a:fillRef>
+          <a:effectRef idx="2">
+            <a:schemeClr val="accent1"/>
+          </a:effectRef>
+          <a:fontRef idx="minor">
+            <a:schemeClr val="lt1"/>
+          </a:fontRef>
+        </p:style>
+        <p:txBody>
+          <a:bodyPr rtlCol="0" anchor="ctr" lIns="0" rIns="0" tIns="0" bIns="0" wrap="none"/>
+          <a:lstStyle/>
+          <a:p>
+            <a:pPr algn="ctr"/>
+            <a:r>
+              <a:rPr sz="1400">
+                <a:solidFill>
+                  <a:srgbClr val="DD6B42"/>
+                </a:solidFill>
+              </a:rPr>
+              <a:t>🏃</a:t>
+            </a:r>
+          </a:p>
+        </p:txBody>
+      </p:sp>
+      <p:sp>
+        <p:nvSpPr>
+          <p:cNvPr id="20" name="TextBox 19"/>
           <p:cNvSpPr txBox="1"/>
           <p:nvPr/>
         </p:nvSpPr>
         <p:spPr>
           <a:xfrm>
-            <a:off x="6583680" y="2148840"/>
-            <a:ext cx="4480560" cy="457200"/>
+            <a:off x="1874519" y="4937760"/>
+            <a:ext cx="1828800" cy="457200"/>
           </a:xfrm>
           <a:prstGeom prst="rect">
             <a:avLst/>
@@ -6254,7 +6097,7 @@
           <a:noFill/>
         </p:spPr>
         <p:txBody>
-          <a:bodyPr wrap="square" anchor="t" lIns="0" rIns="0" tIns="0" bIns="0">
+          <a:bodyPr wrap="square" anchor="ctr" lIns="0" rIns="0" tIns="0" bIns="0">
             <a:spAutoFit/>
           </a:bodyPr>
           <a:lstStyle/>
@@ -6265,27 +6108,82 @@
               </a:lnSpc>
             </a:pPr>
             <a:r>
-              <a:rPr sz="1300" b="1" i="0">
-                <a:solidFill>
-                  <a:srgbClr val="DCE8D9"/>
+              <a:rPr sz="1250" b="1" i="0">
+                <a:solidFill>
+                  <a:srgbClr val="1F2D22"/>
                 </a:solidFill>
                 <a:latin typeface="Calibri"/>
               </a:rPr>
-              <a:t>HEALTH FIRST</a:t>
-            </a:r>
-          </a:p>
-        </p:txBody>
-      </p:sp>
-      <p:sp>
-        <p:nvSpPr>
-          <p:cNvPr id="9" name="TextBox 8"/>
+              <a:t>Move your body</a:t>
+            </a:r>
+          </a:p>
+        </p:txBody>
+      </p:sp>
+      <p:sp>
+        <p:nvSpPr>
+          <p:cNvPr id="21" name="Rounded Rectangle 20"/>
+          <p:cNvSpPr/>
+          <p:nvPr/>
+        </p:nvSpPr>
+        <p:spPr>
+          <a:xfrm>
+            <a:off x="4297680" y="4956048"/>
+            <a:ext cx="1280160" cy="365760"/>
+          </a:xfrm>
+          <a:prstGeom prst="roundRect">
+            <a:avLst>
+              <a:gd name="adj" fmla="val 50000"/>
+            </a:avLst>
+          </a:prstGeom>
+          <a:solidFill>
+            <a:srgbClr val="3E7A5C"/>
+          </a:solidFill>
+          <a:ln>
+            <a:noFill/>
+          </a:ln>
+          <a:effectLst/>
+        </p:spPr>
+        <p:style>
+          <a:lnRef idx="1">
+            <a:schemeClr val="accent1"/>
+          </a:lnRef>
+          <a:fillRef idx="3">
+            <a:schemeClr val="accent1"/>
+          </a:fillRef>
+          <a:effectRef idx="2">
+            <a:schemeClr val="accent1"/>
+          </a:effectRef>
+          <a:fontRef idx="minor">
+            <a:schemeClr val="lt1"/>
+          </a:fontRef>
+        </p:style>
+        <p:txBody>
+          <a:bodyPr rtlCol="0" anchor="ctr" lIns="0" rIns="0" tIns="0" bIns="0"/>
+          <a:lstStyle/>
+          <a:p>
+            <a:pPr algn="ctr"/>
+            <a:r>
+              <a:rPr sz="1050" b="1">
+                <a:solidFill>
+                  <a:srgbClr val="FFFFFF"/>
+                </a:solidFill>
+                <a:latin typeface="Calibri"/>
+              </a:rPr>
+              <a:t>I did it!</a:t>
+            </a:r>
+          </a:p>
+        </p:txBody>
+      </p:sp>
+      <p:sp>
+        <p:nvSpPr>
+          <p:cNvPr id="22" name="TextBox 21"/>
           <p:cNvSpPr txBox="1"/>
           <p:nvPr/>
         </p:nvSpPr>
         <p:spPr>
           <a:xfrm>
-            <a:off x="6583680" y="2651760"/>
-            <a:ext cx="4480560" cy="3200400"/>
+            <a:off x="822960" y="6675120"/>
+            <a:ext cx="5029200" cy="365760"/>
           </a:xfrm>
           <a:prstGeom prst="rect">
             <a:avLst/>
@@ -6293,128 +6191,669 @@
           <a:noFill/>
         </p:spPr>
         <p:txBody>
-          <a:bodyPr wrap="square" lIns="0" rIns="0" tIns="0" bIns="0">
+          <a:bodyPr wrap="square" anchor="t" lIns="0" rIns="0" tIns="0" bIns="0">
             <a:spAutoFit/>
           </a:bodyPr>
           <a:lstStyle/>
           <a:p>
-            <a:pPr indent="-201168" marL="201168">
+            <a:pPr algn="ctr">
               <a:lnSpc>
                 <a:spcPct val="115000"/>
               </a:lnSpc>
-              <a:spcAft>
-                <a:spcPts val="1000"/>
-              </a:spcAft>
-              <a:buClr>
-                <a:srgbClr val="FFFFFF"/>
-              </a:buClr>
-              <a:buFont typeface="Arial"/>
-              <a:buChar char="✓"/>
             </a:pPr>
             <a:r>
-              <a:rPr sz="1450">
-                <a:solidFill>
-                  <a:srgbClr val="FFFFFF"/>
-                </a:solidFill>
-                <a:latin typeface="Calibri"/>
+              <a:rPr sz="1300" b="1" i="0">
+                <a:solidFill>
+                  <a:srgbClr val="3E7A5C"/>
+                </a:solidFill>
+                <a:latin typeface="Cambria"/>
               </a:rPr>
-              <a:t>Rewards healthy habits with earned time</a:t>
-            </a:r>
-          </a:p>
-          <a:p>
-            <a:pPr indent="-201168" marL="201168">
+              <a:t>Kid View</a:t>
+            </a:r>
+          </a:p>
+        </p:txBody>
+      </p:sp>
+      <p:sp>
+        <p:nvSpPr>
+          <p:cNvPr id="23" name="Rounded Rectangle 22"/>
+          <p:cNvSpPr/>
+          <p:nvPr/>
+        </p:nvSpPr>
+        <p:spPr>
+          <a:xfrm>
+            <a:off x="6355080" y="1691640"/>
+            <a:ext cx="5029200" cy="4846320"/>
+          </a:xfrm>
+          <a:prstGeom prst="roundRect">
+            <a:avLst>
+              <a:gd name="adj" fmla="val 6000"/>
+            </a:avLst>
+          </a:prstGeom>
+          <a:solidFill>
+            <a:srgbClr val="FFFFFF"/>
+          </a:solidFill>
+          <a:ln w="12700">
+            <a:solidFill>
+              <a:srgbClr val="ECECEA"/>
+            </a:solidFill>
+          </a:ln>
+          <a:effectLst/>
+        </p:spPr>
+        <p:style>
+          <a:lnRef idx="1">
+            <a:schemeClr val="accent1"/>
+          </a:lnRef>
+          <a:fillRef idx="3">
+            <a:schemeClr val="accent1"/>
+          </a:fillRef>
+          <a:effectRef idx="2">
+            <a:schemeClr val="accent1"/>
+          </a:effectRef>
+          <a:fontRef idx="minor">
+            <a:schemeClr val="lt1"/>
+          </a:fontRef>
+        </p:style>
+        <p:txBody>
+          <a:bodyPr rtlCol="0" anchor="ctr"/>
+          <a:lstStyle/>
+          <a:p>
+            <a:pPr algn="ctr"/>
+          </a:p>
+        </p:txBody>
+      </p:sp>
+      <p:sp>
+        <p:nvSpPr>
+          <p:cNvPr id="24" name="TextBox 23"/>
+          <p:cNvSpPr txBox="1"/>
+          <p:nvPr/>
+        </p:nvSpPr>
+        <p:spPr>
+          <a:xfrm>
+            <a:off x="6629400" y="1874520"/>
+            <a:ext cx="4480560" cy="365760"/>
+          </a:xfrm>
+          <a:prstGeom prst="rect">
+            <a:avLst/>
+          </a:prstGeom>
+          <a:noFill/>
+        </p:spPr>
+        <p:txBody>
+          <a:bodyPr wrap="square" anchor="t" lIns="0" rIns="0" tIns="0" bIns="0">
+            <a:spAutoFit/>
+          </a:bodyPr>
+          <a:lstStyle/>
+          <a:p>
+            <a:pPr algn="l">
               <a:lnSpc>
                 <a:spcPct val="115000"/>
               </a:lnSpc>
-              <a:spcAft>
-                <a:spcPts val="1000"/>
-              </a:spcAft>
-              <a:buClr>
-                <a:srgbClr val="FFFFFF"/>
-              </a:buClr>
-              <a:buFont typeface="Arial"/>
-              <a:buChar char="✓"/>
             </a:pPr>
             <a:r>
-              <a:rPr sz="1450">
-                <a:solidFill>
-                  <a:srgbClr val="FFFFFF"/>
-                </a:solidFill>
-                <a:latin typeface="Calibri"/>
+              <a:rPr sz="1400" b="1" i="0">
+                <a:solidFill>
+                  <a:srgbClr val="1F2D22"/>
+                </a:solidFill>
+                <a:latin typeface="Cambria"/>
               </a:rPr>
-              <a:t>Kid feels motivated by immediate credit</a:t>
-            </a:r>
-          </a:p>
-          <a:p>
-            <a:pPr indent="-201168" marL="201168">
+              <a:t>🌿 Health First — Parent</a:t>
+            </a:r>
+          </a:p>
+        </p:txBody>
+      </p:sp>
+      <p:sp>
+        <p:nvSpPr>
+          <p:cNvPr id="25" name="Rectangle 24"/>
+          <p:cNvSpPr/>
+          <p:nvPr/>
+        </p:nvSpPr>
+        <p:spPr>
+          <a:xfrm>
+            <a:off x="6629400" y="2286000"/>
+            <a:ext cx="4480560" cy="18288"/>
+          </a:xfrm>
+          <a:prstGeom prst="rect">
+            <a:avLst/>
+          </a:prstGeom>
+          <a:solidFill>
+            <a:srgbClr val="ECECEA"/>
+          </a:solidFill>
+          <a:ln>
+            <a:noFill/>
+          </a:ln>
+          <a:effectLst/>
+        </p:spPr>
+        <p:style>
+          <a:lnRef idx="1">
+            <a:schemeClr val="accent1"/>
+          </a:lnRef>
+          <a:fillRef idx="3">
+            <a:schemeClr val="accent1"/>
+          </a:fillRef>
+          <a:effectRef idx="2">
+            <a:schemeClr val="accent1"/>
+          </a:effectRef>
+          <a:fontRef idx="minor">
+            <a:schemeClr val="lt1"/>
+          </a:fontRef>
+        </p:style>
+        <p:txBody>
+          <a:bodyPr rtlCol="0" anchor="ctr"/>
+          <a:lstStyle/>
+          <a:p>
+            <a:pPr algn="ctr"/>
+          </a:p>
+        </p:txBody>
+      </p:sp>
+      <p:sp>
+        <p:nvSpPr>
+          <p:cNvPr id="26" name="Rounded Rectangle 25"/>
+          <p:cNvSpPr/>
+          <p:nvPr/>
+        </p:nvSpPr>
+        <p:spPr>
+          <a:xfrm>
+            <a:off x="6629400" y="2468880"/>
+            <a:ext cx="4480560" cy="502920"/>
+          </a:xfrm>
+          <a:prstGeom prst="roundRect">
+            <a:avLst>
+              <a:gd name="adj" fmla="val 10000"/>
+            </a:avLst>
+          </a:prstGeom>
+          <a:solidFill>
+            <a:srgbClr val="DCE8D9"/>
+          </a:solidFill>
+          <a:ln>
+            <a:noFill/>
+          </a:ln>
+          <a:effectLst/>
+        </p:spPr>
+        <p:style>
+          <a:lnRef idx="1">
+            <a:schemeClr val="accent1"/>
+          </a:lnRef>
+          <a:fillRef idx="3">
+            <a:schemeClr val="accent1"/>
+          </a:fillRef>
+          <a:effectRef idx="2">
+            <a:schemeClr val="accent1"/>
+          </a:effectRef>
+          <a:fontRef idx="minor">
+            <a:schemeClr val="lt1"/>
+          </a:fontRef>
+        </p:style>
+        <p:txBody>
+          <a:bodyPr rtlCol="0" anchor="ctr"/>
+          <a:lstStyle/>
+          <a:p>
+            <a:pPr algn="ctr"/>
+          </a:p>
+        </p:txBody>
+      </p:sp>
+      <p:sp>
+        <p:nvSpPr>
+          <p:cNvPr id="27" name="TextBox 26"/>
+          <p:cNvSpPr txBox="1"/>
+          <p:nvPr/>
+        </p:nvSpPr>
+        <p:spPr>
+          <a:xfrm>
+            <a:off x="6812280" y="2468880"/>
+            <a:ext cx="2377440" cy="502920"/>
+          </a:xfrm>
+          <a:prstGeom prst="rect">
+            <a:avLst/>
+          </a:prstGeom>
+          <a:noFill/>
+        </p:spPr>
+        <p:txBody>
+          <a:bodyPr wrap="square" anchor="ctr" lIns="0" rIns="0" tIns="0" bIns="0">
+            <a:spAutoFit/>
+          </a:bodyPr>
+          <a:lstStyle/>
+          <a:p>
+            <a:pPr algn="l">
               <a:lnSpc>
                 <a:spcPct val="115000"/>
               </a:lnSpc>
-              <a:spcAft>
-                <a:spcPts val="1000"/>
-              </a:spcAft>
-              <a:buClr>
-                <a:srgbClr val="FFFFFF"/>
-              </a:buClr>
-              <a:buFont typeface="Arial"/>
-              <a:buChar char="✓"/>
             </a:pPr>
             <a:r>
-              <a:rPr sz="1450">
-                <a:solidFill>
-                  <a:srgbClr val="FFFFFF"/>
+              <a:rPr sz="1150" b="1" i="0">
+                <a:solidFill>
+                  <a:srgbClr val="3E7A5C"/>
                 </a:solidFill>
                 <a:latin typeface="Calibri"/>
               </a:rPr>
-              <a:t>Parent becomes a coach, not a warden</a:t>
-            </a:r>
-          </a:p>
-          <a:p>
-            <a:pPr indent="-201168" marL="201168">
+              <a:t>2 waiting for you</a:t>
+            </a:r>
+          </a:p>
+        </p:txBody>
+      </p:sp>
+      <p:sp>
+        <p:nvSpPr>
+          <p:cNvPr id="28" name="Rounded Rectangle 27"/>
+          <p:cNvSpPr/>
+          <p:nvPr/>
+        </p:nvSpPr>
+        <p:spPr>
+          <a:xfrm>
+            <a:off x="9464040" y="2542032"/>
+            <a:ext cx="1645920" cy="365760"/>
+          </a:xfrm>
+          <a:prstGeom prst="roundRect">
+            <a:avLst>
+              <a:gd name="adj" fmla="val 50000"/>
+            </a:avLst>
+          </a:prstGeom>
+          <a:solidFill>
+            <a:srgbClr val="2C5A44"/>
+          </a:solidFill>
+          <a:ln>
+            <a:noFill/>
+          </a:ln>
+          <a:effectLst/>
+        </p:spPr>
+        <p:style>
+          <a:lnRef idx="1">
+            <a:schemeClr val="accent1"/>
+          </a:lnRef>
+          <a:fillRef idx="3">
+            <a:schemeClr val="accent1"/>
+          </a:fillRef>
+          <a:effectRef idx="2">
+            <a:schemeClr val="accent1"/>
+          </a:effectRef>
+          <a:fontRef idx="minor">
+            <a:schemeClr val="lt1"/>
+          </a:fontRef>
+        </p:style>
+        <p:txBody>
+          <a:bodyPr rtlCol="0" anchor="ctr" lIns="0" rIns="0" tIns="0" bIns="0"/>
+          <a:lstStyle/>
+          <a:p>
+            <a:pPr algn="ctr"/>
+            <a:r>
+              <a:rPr sz="1000" b="1">
+                <a:solidFill>
+                  <a:srgbClr val="FFFFFF"/>
+                </a:solidFill>
+                <a:latin typeface="Calibri"/>
+              </a:rPr>
+              <a:t>✅ Approve all</a:t>
+            </a:r>
+          </a:p>
+        </p:txBody>
+      </p:sp>
+      <p:sp>
+        <p:nvSpPr>
+          <p:cNvPr id="29" name="Rounded Rectangle 28"/>
+          <p:cNvSpPr/>
+          <p:nvPr/>
+        </p:nvSpPr>
+        <p:spPr>
+          <a:xfrm>
+            <a:off x="6629400" y="3154680"/>
+            <a:ext cx="4480560" cy="1097280"/>
+          </a:xfrm>
+          <a:prstGeom prst="roundRect">
+            <a:avLst>
+              <a:gd name="adj" fmla="val 10000"/>
+            </a:avLst>
+          </a:prstGeom>
+          <a:solidFill>
+            <a:srgbClr val="ECECEA"/>
+          </a:solidFill>
+          <a:ln>
+            <a:noFill/>
+          </a:ln>
+          <a:effectLst/>
+        </p:spPr>
+        <p:style>
+          <a:lnRef idx="1">
+            <a:schemeClr val="accent1"/>
+          </a:lnRef>
+          <a:fillRef idx="3">
+            <a:schemeClr val="accent1"/>
+          </a:fillRef>
+          <a:effectRef idx="2">
+            <a:schemeClr val="accent1"/>
+          </a:effectRef>
+          <a:fontRef idx="minor">
+            <a:schemeClr val="lt1"/>
+          </a:fontRef>
+        </p:style>
+        <p:txBody>
+          <a:bodyPr rtlCol="0" anchor="ctr"/>
+          <a:lstStyle/>
+          <a:p>
+            <a:pPr algn="ctr"/>
+          </a:p>
+        </p:txBody>
+      </p:sp>
+      <p:sp>
+        <p:nvSpPr>
+          <p:cNvPr id="30" name="TextBox 29"/>
+          <p:cNvSpPr txBox="1"/>
+          <p:nvPr/>
+        </p:nvSpPr>
+        <p:spPr>
+          <a:xfrm>
+            <a:off x="6858000" y="3291840"/>
+            <a:ext cx="4023360" cy="365760"/>
+          </a:xfrm>
+          <a:prstGeom prst="rect">
+            <a:avLst/>
+          </a:prstGeom>
+          <a:noFill/>
+        </p:spPr>
+        <p:txBody>
+          <a:bodyPr wrap="square" anchor="t" lIns="0" rIns="0" tIns="0" bIns="0">
+            <a:spAutoFit/>
+          </a:bodyPr>
+          <a:lstStyle/>
+          <a:p>
+            <a:pPr algn="l">
               <a:lnSpc>
                 <a:spcPct val="115000"/>
               </a:lnSpc>
-              <a:spcAft>
-                <a:spcPts val="1000"/>
-              </a:spcAft>
-              <a:buClr>
-                <a:srgbClr val="FFFFFF"/>
-              </a:buClr>
-              <a:buFont typeface="Arial"/>
-              <a:buChar char="✓"/>
             </a:pPr>
             <a:r>
-              <a:rPr sz="1450">
-                <a:solidFill>
-                  <a:srgbClr val="FFFFFF"/>
+              <a:rPr sz="1300" b="1" i="0">
+                <a:solidFill>
+                  <a:srgbClr val="1F2D22"/>
                 </a:solidFill>
                 <a:latin typeface="Calibri"/>
               </a:rPr>
-              <a:t>Every goal and reward is configurable</a:t>
-            </a:r>
-          </a:p>
-          <a:p>
-            <a:pPr indent="-201168" marL="201168">
+              <a:t>Move your body</a:t>
+            </a:r>
+          </a:p>
+        </p:txBody>
+      </p:sp>
+      <p:sp>
+        <p:nvSpPr>
+          <p:cNvPr id="31" name="Rounded Rectangle 30"/>
+          <p:cNvSpPr/>
+          <p:nvPr/>
+        </p:nvSpPr>
+        <p:spPr>
+          <a:xfrm>
+            <a:off x="6858000" y="3657600"/>
+            <a:ext cx="1554480" cy="310896"/>
+          </a:xfrm>
+          <a:prstGeom prst="roundRect">
+            <a:avLst>
+              <a:gd name="adj" fmla="val 50000"/>
+            </a:avLst>
+          </a:prstGeom>
+          <a:solidFill>
+            <a:srgbClr val="F5E7C9"/>
+          </a:solidFill>
+          <a:ln>
+            <a:noFill/>
+          </a:ln>
+          <a:effectLst/>
+        </p:spPr>
+        <p:style>
+          <a:lnRef idx="1">
+            <a:schemeClr val="accent1"/>
+          </a:lnRef>
+          <a:fillRef idx="3">
+            <a:schemeClr val="accent1"/>
+          </a:fillRef>
+          <a:effectRef idx="2">
+            <a:schemeClr val="accent1"/>
+          </a:effectRef>
+          <a:fontRef idx="minor">
+            <a:schemeClr val="lt1"/>
+          </a:fontRef>
+        </p:style>
+        <p:txBody>
+          <a:bodyPr rtlCol="0" anchor="ctr" lIns="0" rIns="0" tIns="0" bIns="0"/>
+          <a:lstStyle/>
+          <a:p>
+            <a:pPr algn="ctr"/>
+            <a:r>
+              <a:rPr sz="950" b="1">
+                <a:solidFill>
+                  <a:srgbClr val="DB9D3B"/>
+                </a:solidFill>
+                <a:latin typeface="Calibri"/>
+              </a:rPr>
+              <a:t>🙋 Kid says done</a:t>
+            </a:r>
+          </a:p>
+        </p:txBody>
+      </p:sp>
+      <p:sp>
+        <p:nvSpPr>
+          <p:cNvPr id="32" name="Rounded Rectangle 31"/>
+          <p:cNvSpPr/>
+          <p:nvPr/>
+        </p:nvSpPr>
+        <p:spPr>
+          <a:xfrm>
+            <a:off x="8641080" y="3840480"/>
+            <a:ext cx="1097280" cy="347472"/>
+          </a:xfrm>
+          <a:prstGeom prst="roundRect">
+            <a:avLst>
+              <a:gd name="adj" fmla="val 50000"/>
+            </a:avLst>
+          </a:prstGeom>
+          <a:solidFill>
+            <a:srgbClr val="FFFFFF"/>
+          </a:solidFill>
+          <a:ln>
+            <a:noFill/>
+          </a:ln>
+          <a:effectLst/>
+        </p:spPr>
+        <p:style>
+          <a:lnRef idx="1">
+            <a:schemeClr val="accent1"/>
+          </a:lnRef>
+          <a:fillRef idx="3">
+            <a:schemeClr val="accent1"/>
+          </a:fillRef>
+          <a:effectRef idx="2">
+            <a:schemeClr val="accent1"/>
+          </a:effectRef>
+          <a:fontRef idx="minor">
+            <a:schemeClr val="lt1"/>
+          </a:fontRef>
+        </p:style>
+        <p:txBody>
+          <a:bodyPr rtlCol="0" anchor="ctr" lIns="0" rIns="0" tIns="0" bIns="0"/>
+          <a:lstStyle/>
+          <a:p>
+            <a:pPr algn="ctr"/>
+            <a:r>
+              <a:rPr sz="1000" b="1">
+                <a:solidFill>
+                  <a:srgbClr val="5B6A5F"/>
+                </a:solidFill>
+                <a:latin typeface="Calibri"/>
+              </a:rPr>
+              <a:t>Ask again</a:t>
+            </a:r>
+          </a:p>
+        </p:txBody>
+      </p:sp>
+      <p:sp>
+        <p:nvSpPr>
+          <p:cNvPr id="33" name="Rounded Rectangle 32"/>
+          <p:cNvSpPr/>
+          <p:nvPr/>
+        </p:nvSpPr>
+        <p:spPr>
+          <a:xfrm>
+            <a:off x="9875519" y="3840480"/>
+            <a:ext cx="1097280" cy="347472"/>
+          </a:xfrm>
+          <a:prstGeom prst="roundRect">
+            <a:avLst>
+              <a:gd name="adj" fmla="val 50000"/>
+            </a:avLst>
+          </a:prstGeom>
+          <a:solidFill>
+            <a:srgbClr val="3E7A5C"/>
+          </a:solidFill>
+          <a:ln>
+            <a:noFill/>
+          </a:ln>
+          <a:effectLst/>
+        </p:spPr>
+        <p:style>
+          <a:lnRef idx="1">
+            <a:schemeClr val="accent1"/>
+          </a:lnRef>
+          <a:fillRef idx="3">
+            <a:schemeClr val="accent1"/>
+          </a:fillRef>
+          <a:effectRef idx="2">
+            <a:schemeClr val="accent1"/>
+          </a:effectRef>
+          <a:fontRef idx="minor">
+            <a:schemeClr val="lt1"/>
+          </a:fontRef>
+        </p:style>
+        <p:txBody>
+          <a:bodyPr rtlCol="0" anchor="ctr" lIns="0" rIns="0" tIns="0" bIns="0"/>
+          <a:lstStyle/>
+          <a:p>
+            <a:pPr algn="ctr"/>
+            <a:r>
+              <a:rPr sz="1000" b="1">
+                <a:solidFill>
+                  <a:srgbClr val="FFFFFF"/>
+                </a:solidFill>
+                <a:latin typeface="Calibri"/>
+              </a:rPr>
+              <a:t>Approve</a:t>
+            </a:r>
+          </a:p>
+        </p:txBody>
+      </p:sp>
+      <p:sp>
+        <p:nvSpPr>
+          <p:cNvPr id="34" name="Rounded Rectangle 33"/>
+          <p:cNvSpPr/>
+          <p:nvPr/>
+        </p:nvSpPr>
+        <p:spPr>
+          <a:xfrm>
+            <a:off x="6629400" y="4937760"/>
+            <a:ext cx="4480560" cy="822960"/>
+          </a:xfrm>
+          <a:prstGeom prst="roundRect">
+            <a:avLst>
+              <a:gd name="adj" fmla="val 10000"/>
+            </a:avLst>
+          </a:prstGeom>
+          <a:solidFill>
+            <a:srgbClr val="F7E1D5"/>
+          </a:solidFill>
+          <a:ln>
+            <a:noFill/>
+          </a:ln>
+          <a:effectLst/>
+        </p:spPr>
+        <p:style>
+          <a:lnRef idx="1">
+            <a:schemeClr val="accent1"/>
+          </a:lnRef>
+          <a:fillRef idx="3">
+            <a:schemeClr val="accent1"/>
+          </a:fillRef>
+          <a:effectRef idx="2">
+            <a:schemeClr val="accent1"/>
+          </a:effectRef>
+          <a:fontRef idx="minor">
+            <a:schemeClr val="lt1"/>
+          </a:fontRef>
+        </p:style>
+        <p:txBody>
+          <a:bodyPr rtlCol="0" anchor="ctr"/>
+          <a:lstStyle/>
+          <a:p>
+            <a:pPr algn="ctr"/>
+          </a:p>
+        </p:txBody>
+      </p:sp>
+      <p:sp>
+        <p:nvSpPr>
+          <p:cNvPr id="35" name="TextBox 34"/>
+          <p:cNvSpPr txBox="1"/>
+          <p:nvPr/>
+        </p:nvSpPr>
+        <p:spPr>
+          <a:xfrm>
+            <a:off x="6858000" y="5074920"/>
+            <a:ext cx="4023360" cy="548640"/>
+          </a:xfrm>
+          <a:prstGeom prst="rect">
+            <a:avLst/>
+          </a:prstGeom>
+          <a:noFill/>
+        </p:spPr>
+        <p:txBody>
+          <a:bodyPr wrap="square" anchor="ctr" lIns="0" rIns="0" tIns="0" bIns="0">
+            <a:spAutoFit/>
+          </a:bodyPr>
+          <a:lstStyle/>
+          <a:p>
+            <a:pPr algn="l">
               <a:lnSpc>
                 <a:spcPct val="115000"/>
               </a:lnSpc>
-              <a:spcAft>
-                <a:spcPts val="1000"/>
-              </a:spcAft>
-              <a:buClr>
-                <a:srgbClr val="FFFFFF"/>
-              </a:buClr>
-              <a:buFont typeface="Arial"/>
-              <a:buChar char="✓"/>
             </a:pPr>
             <a:r>
-              <a:rPr sz="1450">
-                <a:solidFill>
-                  <a:srgbClr val="FFFFFF"/>
+              <a:rPr sz="1150" b="1" i="0">
+                <a:solidFill>
+                  <a:srgbClr val="DD6B42"/>
                 </a:solidFill>
                 <a:latin typeface="Calibri"/>
               </a:rPr>
-              <a:t>Screen time becomes a shared goal</a:t>
+              <a:t>⚠️ Emergency unlock (PIN required)</a:t>
+            </a:r>
+          </a:p>
+        </p:txBody>
+      </p:sp>
+      <p:sp>
+        <p:nvSpPr>
+          <p:cNvPr id="36" name="TextBox 35"/>
+          <p:cNvSpPr txBox="1"/>
+          <p:nvPr/>
+        </p:nvSpPr>
+        <p:spPr>
+          <a:xfrm>
+            <a:off x="6355080" y="6675120"/>
+            <a:ext cx="5029200" cy="365760"/>
+          </a:xfrm>
+          <a:prstGeom prst="rect">
+            <a:avLst/>
+          </a:prstGeom>
+          <a:noFill/>
+        </p:spPr>
+        <p:txBody>
+          <a:bodyPr wrap="square" anchor="t" lIns="0" rIns="0" tIns="0" bIns="0">
+            <a:spAutoFit/>
+          </a:bodyPr>
+          <a:lstStyle/>
+          <a:p>
+            <a:pPr algn="ctr">
+              <a:lnSpc>
+                <a:spcPct val="115000"/>
+              </a:lnSpc>
+            </a:pPr>
+            <a:r>
+              <a:rPr sz="1300" b="1" i="0">
+                <a:solidFill>
+                  <a:srgbClr val="DD6B42"/>
+                </a:solidFill>
+                <a:latin typeface="Cambria"/>
+              </a:rPr>
+              <a:t>Parent View</a:t>
             </a:r>
           </a:p>
         </p:txBody>
@@ -6454,7 +6893,7 @@
         <p:spPr>
           <a:xfrm>
             <a:off x="822960" y="502920"/>
-            <a:ext cx="7315200" cy="548640"/>
+            <a:ext cx="10332720" cy="822960"/>
           </a:xfrm>
           <a:prstGeom prst="rect">
             <a:avLst/>
@@ -6473,27 +6912,73 @@
               </a:lnSpc>
             </a:pPr>
             <a:r>
-              <a:rPr sz="3000" b="1" i="0">
+              <a:rPr sz="3200" b="1" i="0">
                 <a:solidFill>
                   <a:srgbClr val="1F2D22"/>
                 </a:solidFill>
                 <a:latin typeface="Cambria"/>
               </a:rPr>
-              <a:t>How It Works</a:t>
-            </a:r>
-          </a:p>
-        </p:txBody>
-      </p:sp>
-      <p:sp>
-        <p:nvSpPr>
-          <p:cNvPr id="3" name="TextBox 2"/>
+              <a:t>Why Everyone Will Love It</a:t>
+            </a:r>
+          </a:p>
+        </p:txBody>
+      </p:sp>
+      <p:sp>
+        <p:nvSpPr>
+          <p:cNvPr id="3" name="Rounded Rectangle 2"/>
+          <p:cNvSpPr/>
+          <p:nvPr/>
+        </p:nvSpPr>
+        <p:spPr>
+          <a:xfrm>
+            <a:off x="822960" y="1737360"/>
+            <a:ext cx="5029200" cy="3840480"/>
+          </a:xfrm>
+          <a:prstGeom prst="roundRect">
+            <a:avLst>
+              <a:gd name="adj" fmla="val 10000"/>
+            </a:avLst>
+          </a:prstGeom>
+          <a:solidFill>
+            <a:srgbClr val="ECECEA"/>
+          </a:solidFill>
+          <a:ln>
+            <a:noFill/>
+          </a:ln>
+          <a:effectLst/>
+        </p:spPr>
+        <p:style>
+          <a:lnRef idx="1">
+            <a:schemeClr val="accent1"/>
+          </a:lnRef>
+          <a:fillRef idx="3">
+            <a:schemeClr val="accent1"/>
+          </a:fillRef>
+          <a:effectRef idx="2">
+            <a:schemeClr val="accent1"/>
+          </a:effectRef>
+          <a:fontRef idx="minor">
+            <a:schemeClr val="lt1"/>
+          </a:fontRef>
+        </p:style>
+        <p:txBody>
+          <a:bodyPr rtlCol="0" anchor="ctr"/>
+          <a:lstStyle/>
+          <a:p>
+            <a:pPr algn="ctr"/>
+          </a:p>
+        </p:txBody>
+      </p:sp>
+      <p:sp>
+        <p:nvSpPr>
+          <p:cNvPr id="4" name="TextBox 3"/>
           <p:cNvSpPr txBox="1"/>
           <p:nvPr/>
         </p:nvSpPr>
         <p:spPr>
           <a:xfrm>
-            <a:off x="822960" y="1143000"/>
-            <a:ext cx="9601200" cy="548640"/>
+            <a:off x="1097280" y="1965960"/>
+            <a:ext cx="4480560" cy="457200"/>
           </a:xfrm>
           <a:prstGeom prst="rect">
             <a:avLst/>
@@ -6512,33 +6997,130 @@
               </a:lnSpc>
             </a:pPr>
             <a:r>
-              <a:rPr sz="1500" b="0" i="0">
-                <a:solidFill>
-                  <a:srgbClr val="5B6A5F"/>
+              <a:rPr sz="1300" b="1" i="0">
+                <a:solidFill>
+                  <a:srgbClr val="8A8F8B"/>
                 </a:solidFill>
                 <a:latin typeface="Calibri"/>
               </a:rPr>
-              <a:t>A daily checklist of health goals — proven honestly — banks screen time.</a:t>
-            </a:r>
-          </a:p>
-        </p:txBody>
-      </p:sp>
-      <p:sp>
-        <p:nvSpPr>
-          <p:cNvPr id="4" name="Oval 3"/>
+              <a:t>OTHER APPS</a:t>
+            </a:r>
+          </a:p>
+        </p:txBody>
+      </p:sp>
+      <p:sp>
+        <p:nvSpPr>
+          <p:cNvPr id="5" name="TextBox 4"/>
+          <p:cNvSpPr txBox="1"/>
+          <p:nvPr/>
+        </p:nvSpPr>
+        <p:spPr>
+          <a:xfrm>
+            <a:off x="1097280" y="2514600"/>
+            <a:ext cx="4480560" cy="2743200"/>
+          </a:xfrm>
+          <a:prstGeom prst="rect">
+            <a:avLst/>
+          </a:prstGeom>
+          <a:noFill/>
+        </p:spPr>
+        <p:txBody>
+          <a:bodyPr wrap="square" lIns="0" rIns="0" tIns="0" bIns="0">
+            <a:spAutoFit/>
+          </a:bodyPr>
+          <a:lstStyle/>
+          <a:p>
+            <a:pPr indent="-201168" marL="201168">
+              <a:lnSpc>
+                <a:spcPct val="115000"/>
+              </a:lnSpc>
+              <a:spcAft>
+                <a:spcPts val="1600"/>
+              </a:spcAft>
+              <a:buClr>
+                <a:srgbClr val="8A8F8B"/>
+              </a:buClr>
+              <a:buFont typeface="Arial"/>
+              <a:buChar char="✗"/>
+            </a:pPr>
+            <a:r>
+              <a:rPr sz="1600">
+                <a:solidFill>
+                  <a:srgbClr val="5B6A5F"/>
+                </a:solidFill>
+                <a:latin typeface="Calibri"/>
+              </a:rPr>
+              <a:t>Just say NO more games</a:t>
+            </a:r>
+          </a:p>
+          <a:p>
+            <a:pPr indent="-201168" marL="201168">
+              <a:lnSpc>
+                <a:spcPct val="115000"/>
+              </a:lnSpc>
+              <a:spcAft>
+                <a:spcPts val="1600"/>
+              </a:spcAft>
+              <a:buClr>
+                <a:srgbClr val="8A8F8B"/>
+              </a:buClr>
+              <a:buFont typeface="Arial"/>
+              <a:buChar char="✗"/>
+            </a:pPr>
+            <a:r>
+              <a:rPr sz="1600">
+                <a:solidFill>
+                  <a:srgbClr val="5B6A5F"/>
+                </a:solidFill>
+                <a:latin typeface="Calibri"/>
+              </a:rPr>
+              <a:t>Kids feel punished</a:t>
+            </a:r>
+          </a:p>
+          <a:p>
+            <a:pPr indent="-201168" marL="201168">
+              <a:lnSpc>
+                <a:spcPct val="115000"/>
+              </a:lnSpc>
+              <a:spcAft>
+                <a:spcPts val="1600"/>
+              </a:spcAft>
+              <a:buClr>
+                <a:srgbClr val="8A8F8B"/>
+              </a:buClr>
+              <a:buFont typeface="Arial"/>
+              <a:buChar char="✗"/>
+            </a:pPr>
+            <a:r>
+              <a:rPr sz="1600">
+                <a:solidFill>
+                  <a:srgbClr val="5B6A5F"/>
+                </a:solidFill>
+                <a:latin typeface="Calibri"/>
+              </a:rPr>
+              <a:t>Parents feel like the bad guy</a:t>
+            </a:r>
+          </a:p>
+        </p:txBody>
+      </p:sp>
+      <p:sp>
+        <p:nvSpPr>
+          <p:cNvPr id="6" name="Rounded Rectangle 5"/>
           <p:cNvSpPr/>
           <p:nvPr/>
         </p:nvSpPr>
         <p:spPr>
           <a:xfrm>
-            <a:off x="1280160" y="1965960"/>
-            <a:ext cx="1097280" cy="1097280"/>
-          </a:xfrm>
-          <a:prstGeom prst="ellipse">
-            <a:avLst/>
+            <a:off x="6309360" y="1737360"/>
+            <a:ext cx="5074920" cy="3840480"/>
+          </a:xfrm>
+          <a:prstGeom prst="roundRect">
+            <a:avLst>
+              <a:gd name="adj" fmla="val 10000"/>
+            </a:avLst>
           </a:prstGeom>
           <a:solidFill>
-            <a:srgbClr val="DCE8D9"/>
+            <a:srgbClr val="3E7A5C"/>
           </a:solidFill>
           <a:ln>
             <a:noFill/>
@@ -6560,31 +7142,23 @@
           </a:fontRef>
         </p:style>
         <p:txBody>
-          <a:bodyPr rtlCol="0" anchor="ctr" lIns="0" rIns="0" tIns="0" bIns="0" wrap="none"/>
+          <a:bodyPr rtlCol="0" anchor="ctr"/>
           <a:lstStyle/>
           <a:p>
             <a:pPr algn="ctr"/>
-            <a:r>
-              <a:rPr sz="3300">
-                <a:solidFill>
-                  <a:srgbClr val="3E7A5C"/>
-                </a:solidFill>
-              </a:rPr>
-              <a:t>💧</a:t>
-            </a:r>
-          </a:p>
-        </p:txBody>
-      </p:sp>
-      <p:sp>
-        <p:nvSpPr>
-          <p:cNvPr id="5" name="TextBox 4"/>
+          </a:p>
+        </p:txBody>
+      </p:sp>
+      <p:sp>
+        <p:nvSpPr>
+          <p:cNvPr id="7" name="TextBox 6"/>
           <p:cNvSpPr txBox="1"/>
           <p:nvPr/>
         </p:nvSpPr>
         <p:spPr>
           <a:xfrm>
-            <a:off x="1005840" y="3154680"/>
-            <a:ext cx="1645920" cy="365760"/>
+            <a:off x="6583680" y="1965960"/>
+            <a:ext cx="4480560" cy="457200"/>
           </a:xfrm>
           <a:prstGeom prst="rect">
             <a:avLst/>
@@ -6597,85 +7171,33 @@
           </a:bodyPr>
           <a:lstStyle/>
           <a:p>
-            <a:pPr algn="ctr">
+            <a:pPr algn="l">
               <a:lnSpc>
                 <a:spcPct val="115000"/>
               </a:lnSpc>
             </a:pPr>
             <a:r>
-              <a:rPr sz="1400" b="1" i="0">
-                <a:solidFill>
-                  <a:srgbClr val="1F2D22"/>
+              <a:rPr sz="1300" b="1" i="0">
+                <a:solidFill>
+                  <a:srgbClr val="DCE8D9"/>
                 </a:solidFill>
                 <a:latin typeface="Calibri"/>
               </a:rPr>
-              <a:t>Water</a:t>
-            </a:r>
-          </a:p>
-        </p:txBody>
-      </p:sp>
-      <p:sp>
-        <p:nvSpPr>
-          <p:cNvPr id="6" name="Oval 5"/>
-          <p:cNvSpPr/>
-          <p:nvPr/>
-        </p:nvSpPr>
-        <p:spPr>
-          <a:xfrm>
-            <a:off x="3611879" y="1965960"/>
-            <a:ext cx="1097280" cy="1097280"/>
-          </a:xfrm>
-          <a:prstGeom prst="ellipse">
-            <a:avLst/>
-          </a:prstGeom>
-          <a:solidFill>
-            <a:srgbClr val="F7E1D5"/>
-          </a:solidFill>
-          <a:ln>
-            <a:noFill/>
-          </a:ln>
-          <a:effectLst/>
-        </p:spPr>
-        <p:style>
-          <a:lnRef idx="1">
-            <a:schemeClr val="accent1"/>
-          </a:lnRef>
-          <a:fillRef idx="3">
-            <a:schemeClr val="accent1"/>
-          </a:fillRef>
-          <a:effectRef idx="2">
-            <a:schemeClr val="accent1"/>
-          </a:effectRef>
-          <a:fontRef idx="minor">
-            <a:schemeClr val="lt1"/>
-          </a:fontRef>
-        </p:style>
-        <p:txBody>
-          <a:bodyPr rtlCol="0" anchor="ctr" lIns="0" rIns="0" tIns="0" bIns="0" wrap="none"/>
-          <a:lstStyle/>
-          <a:p>
-            <a:pPr algn="ctr"/>
-            <a:r>
-              <a:rPr sz="3300">
-                <a:solidFill>
-                  <a:srgbClr val="DD6B42"/>
-                </a:solidFill>
-              </a:rPr>
-              <a:t>🏃</a:t>
-            </a:r>
-          </a:p>
-        </p:txBody>
-      </p:sp>
-      <p:sp>
-        <p:nvSpPr>
-          <p:cNvPr id="7" name="TextBox 6"/>
+              <a:t>HEALTH FIRST</a:t>
+            </a:r>
+          </a:p>
+        </p:txBody>
+      </p:sp>
+      <p:sp>
+        <p:nvSpPr>
+          <p:cNvPr id="8" name="TextBox 7"/>
           <p:cNvSpPr txBox="1"/>
           <p:nvPr/>
         </p:nvSpPr>
         <p:spPr>
           <a:xfrm>
-            <a:off x="3337560" y="3154680"/>
-            <a:ext cx="1645920" cy="365760"/>
+            <a:off x="6583680" y="2514600"/>
+            <a:ext cx="4480560" cy="2743200"/>
           </a:xfrm>
           <a:prstGeom prst="rect">
             <a:avLst/>
@@ -6683,872 +7205,80 @@
           <a:noFill/>
         </p:spPr>
         <p:txBody>
-          <a:bodyPr wrap="square" anchor="t" lIns="0" rIns="0" tIns="0" bIns="0">
+          <a:bodyPr wrap="square" lIns="0" rIns="0" tIns="0" bIns="0">
             <a:spAutoFit/>
           </a:bodyPr>
           <a:lstStyle/>
           <a:p>
-            <a:pPr algn="ctr">
+            <a:pPr indent="-201168" marL="201168">
               <a:lnSpc>
                 <a:spcPct val="115000"/>
               </a:lnSpc>
+              <a:spcAft>
+                <a:spcPts val="1600"/>
+              </a:spcAft>
+              <a:buClr>
+                <a:srgbClr val="FFFFFF"/>
+              </a:buClr>
+              <a:buFont typeface="Arial"/>
+              <a:buChar char="✓"/>
             </a:pPr>
             <a:r>
-              <a:rPr sz="1400" b="1" i="0">
-                <a:solidFill>
-                  <a:srgbClr val="1F2D22"/>
+              <a:rPr sz="1600">
+                <a:solidFill>
+                  <a:srgbClr val="FFFFFF"/>
                 </a:solidFill>
                 <a:latin typeface="Calibri"/>
               </a:rPr>
-              <a:t>Move</a:t>
-            </a:r>
-          </a:p>
-        </p:txBody>
-      </p:sp>
-      <p:sp>
-        <p:nvSpPr>
-          <p:cNvPr id="8" name="Oval 7"/>
-          <p:cNvSpPr/>
-          <p:nvPr/>
-        </p:nvSpPr>
-        <p:spPr>
-          <a:xfrm>
-            <a:off x="5943600" y="1965960"/>
-            <a:ext cx="1097280" cy="1097280"/>
-          </a:xfrm>
-          <a:prstGeom prst="ellipse">
-            <a:avLst/>
-          </a:prstGeom>
-          <a:solidFill>
-            <a:srgbClr val="E2E2F5"/>
-          </a:solidFill>
-          <a:ln>
-            <a:noFill/>
-          </a:ln>
-          <a:effectLst/>
-        </p:spPr>
-        <p:style>
-          <a:lnRef idx="1">
-            <a:schemeClr val="accent1"/>
-          </a:lnRef>
-          <a:fillRef idx="3">
-            <a:schemeClr val="accent1"/>
-          </a:fillRef>
-          <a:effectRef idx="2">
-            <a:schemeClr val="accent1"/>
-          </a:effectRef>
-          <a:fontRef idx="minor">
-            <a:schemeClr val="lt1"/>
-          </a:fontRef>
-        </p:style>
-        <p:txBody>
-          <a:bodyPr rtlCol="0" anchor="ctr" lIns="0" rIns="0" tIns="0" bIns="0" wrap="none"/>
-          <a:lstStyle/>
-          <a:p>
-            <a:pPr algn="ctr"/>
-            <a:r>
-              <a:rPr sz="3300">
-                <a:solidFill>
-                  <a:srgbClr val="6E6FBF"/>
-                </a:solidFill>
-              </a:rPr>
-              <a:t>🌙</a:t>
-            </a:r>
-          </a:p>
-        </p:txBody>
-      </p:sp>
-      <p:sp>
-        <p:nvSpPr>
-          <p:cNvPr id="9" name="TextBox 8"/>
-          <p:cNvSpPr txBox="1"/>
-          <p:nvPr/>
-        </p:nvSpPr>
-        <p:spPr>
-          <a:xfrm>
-            <a:off x="5669279" y="3154680"/>
-            <a:ext cx="1645920" cy="365760"/>
-          </a:xfrm>
-          <a:prstGeom prst="rect">
-            <a:avLst/>
-          </a:prstGeom>
-          <a:noFill/>
-        </p:spPr>
-        <p:txBody>
-          <a:bodyPr wrap="square" anchor="t" lIns="0" rIns="0" tIns="0" bIns="0">
-            <a:spAutoFit/>
-          </a:bodyPr>
-          <a:lstStyle/>
-          <a:p>
-            <a:pPr algn="ctr">
+              <a:t>Says YES, earn more games!</a:t>
+            </a:r>
+          </a:p>
+          <a:p>
+            <a:pPr indent="-201168" marL="201168">
               <a:lnSpc>
                 <a:spcPct val="115000"/>
               </a:lnSpc>
+              <a:spcAft>
+                <a:spcPts val="1600"/>
+              </a:spcAft>
+              <a:buClr>
+                <a:srgbClr val="FFFFFF"/>
+              </a:buClr>
+              <a:buFont typeface="Arial"/>
+              <a:buChar char="✓"/>
             </a:pPr>
             <a:r>
-              <a:rPr sz="1400" b="1" i="0">
-                <a:solidFill>
-                  <a:srgbClr val="1F2D22"/>
+              <a:rPr sz="1600">
+                <a:solidFill>
+                  <a:srgbClr val="FFFFFF"/>
                 </a:solidFill>
                 <a:latin typeface="Calibri"/>
               </a:rPr>
-              <a:t>Sleep</a:t>
-            </a:r>
-          </a:p>
-        </p:txBody>
-      </p:sp>
-      <p:sp>
-        <p:nvSpPr>
-          <p:cNvPr id="10" name="Oval 9"/>
-          <p:cNvSpPr/>
-          <p:nvPr/>
-        </p:nvSpPr>
-        <p:spPr>
-          <a:xfrm>
-            <a:off x="8275320" y="1965960"/>
-            <a:ext cx="1097280" cy="1097280"/>
-          </a:xfrm>
-          <a:prstGeom prst="ellipse">
-            <a:avLst/>
-          </a:prstGeom>
-          <a:solidFill>
-            <a:srgbClr val="F7E1D5"/>
-          </a:solidFill>
-          <a:ln>
-            <a:noFill/>
-          </a:ln>
-          <a:effectLst/>
-        </p:spPr>
-        <p:style>
-          <a:lnRef idx="1">
-            <a:schemeClr val="accent1"/>
-          </a:lnRef>
-          <a:fillRef idx="3">
-            <a:schemeClr val="accent1"/>
-          </a:fillRef>
-          <a:effectRef idx="2">
-            <a:schemeClr val="accent1"/>
-          </a:effectRef>
-          <a:fontRef idx="minor">
-            <a:schemeClr val="lt1"/>
-          </a:fontRef>
-        </p:style>
-        <p:txBody>
-          <a:bodyPr rtlCol="0" anchor="ctr" lIns="0" rIns="0" tIns="0" bIns="0" wrap="none"/>
-          <a:lstStyle/>
-          <a:p>
-            <a:pPr algn="ctr"/>
-            <a:r>
-              <a:rPr sz="3300">
-                <a:solidFill>
-                  <a:srgbClr val="DD6B42"/>
-                </a:solidFill>
-              </a:rPr>
-              <a:t>🍎</a:t>
-            </a:r>
-          </a:p>
-        </p:txBody>
-      </p:sp>
-      <p:sp>
-        <p:nvSpPr>
-          <p:cNvPr id="11" name="TextBox 10"/>
-          <p:cNvSpPr txBox="1"/>
-          <p:nvPr/>
-        </p:nvSpPr>
-        <p:spPr>
-          <a:xfrm>
-            <a:off x="8001000" y="3154680"/>
-            <a:ext cx="1645920" cy="365760"/>
-          </a:xfrm>
-          <a:prstGeom prst="rect">
-            <a:avLst/>
-          </a:prstGeom>
-          <a:noFill/>
-        </p:spPr>
-        <p:txBody>
-          <a:bodyPr wrap="square" anchor="t" lIns="0" rIns="0" tIns="0" bIns="0">
-            <a:spAutoFit/>
-          </a:bodyPr>
-          <a:lstStyle/>
-          <a:p>
-            <a:pPr algn="ctr">
+              <a:t>Kids feel proud, not punished</a:t>
+            </a:r>
+          </a:p>
+          <a:p>
+            <a:pPr indent="-201168" marL="201168">
               <a:lnSpc>
                 <a:spcPct val="115000"/>
               </a:lnSpc>
+              <a:spcAft>
+                <a:spcPts val="1600"/>
+              </a:spcAft>
+              <a:buClr>
+                <a:srgbClr val="FFFFFF"/>
+              </a:buClr>
+              <a:buFont typeface="Arial"/>
+              <a:buChar char="✓"/>
             </a:pPr>
             <a:r>
-              <a:rPr sz="1400" b="1" i="0">
-                <a:solidFill>
-                  <a:srgbClr val="1F2D22"/>
+              <a:rPr sz="1600">
+                <a:solidFill>
+                  <a:srgbClr val="FFFFFF"/>
                 </a:solidFill>
                 <a:latin typeface="Calibri"/>
               </a:rPr>
-              <a:t>Fruit</a:t>
-            </a:r>
-          </a:p>
-        </p:txBody>
-      </p:sp>
-      <p:sp>
-        <p:nvSpPr>
-          <p:cNvPr id="12" name="Rounded Rectangle 11"/>
-          <p:cNvSpPr/>
-          <p:nvPr/>
-        </p:nvSpPr>
-        <p:spPr>
-          <a:xfrm>
-            <a:off x="822960" y="3886200"/>
-            <a:ext cx="1371600" cy="594360"/>
-          </a:xfrm>
-          <a:prstGeom prst="roundRect">
-            <a:avLst>
-              <a:gd name="adj" fmla="val 10000"/>
-            </a:avLst>
-          </a:prstGeom>
-          <a:solidFill>
-            <a:srgbClr val="DCE8D9"/>
-          </a:solidFill>
-          <a:ln>
-            <a:noFill/>
-          </a:ln>
-          <a:effectLst/>
-        </p:spPr>
-        <p:style>
-          <a:lnRef idx="1">
-            <a:schemeClr val="accent1"/>
-          </a:lnRef>
-          <a:fillRef idx="3">
-            <a:schemeClr val="accent1"/>
-          </a:fillRef>
-          <a:effectRef idx="2">
-            <a:schemeClr val="accent1"/>
-          </a:effectRef>
-          <a:fontRef idx="minor">
-            <a:schemeClr val="lt1"/>
-          </a:fontRef>
-        </p:style>
-        <p:txBody>
-          <a:bodyPr rtlCol="0" anchor="ctr"/>
-          <a:lstStyle/>
-          <a:p>
-            <a:pPr algn="ctr"/>
-          </a:p>
-        </p:txBody>
-      </p:sp>
-      <p:sp>
-        <p:nvSpPr>
-          <p:cNvPr id="13" name="TextBox 12"/>
-          <p:cNvSpPr txBox="1"/>
-          <p:nvPr/>
-        </p:nvSpPr>
-        <p:spPr>
-          <a:xfrm>
-            <a:off x="822960" y="3886200"/>
-            <a:ext cx="1371600" cy="594360"/>
-          </a:xfrm>
-          <a:prstGeom prst="rect">
-            <a:avLst/>
-          </a:prstGeom>
-          <a:noFill/>
-        </p:spPr>
-        <p:txBody>
-          <a:bodyPr wrap="square" anchor="ctr" lIns="0" rIns="0" tIns="0" bIns="0">
-            <a:spAutoFit/>
-          </a:bodyPr>
-          <a:lstStyle/>
-          <a:p>
-            <a:pPr algn="ctr">
-              <a:lnSpc>
-                <a:spcPct val="115000"/>
-              </a:lnSpc>
-            </a:pPr>
-            <a:r>
-              <a:rPr sz="1200" b="1" i="0">
-                <a:solidFill>
-                  <a:srgbClr val="2C5A44"/>
-                </a:solidFill>
-                <a:latin typeface="Calibri"/>
-              </a:rPr>
-              <a:t>Checklist</a:t>
-            </a:r>
-          </a:p>
-        </p:txBody>
-      </p:sp>
-      <p:sp>
-        <p:nvSpPr>
-          <p:cNvPr id="14" name="TextBox 13"/>
-          <p:cNvSpPr txBox="1"/>
-          <p:nvPr/>
-        </p:nvSpPr>
-        <p:spPr>
-          <a:xfrm>
-            <a:off x="2194560" y="3977639"/>
-            <a:ext cx="320040" cy="457200"/>
-          </a:xfrm>
-          <a:prstGeom prst="rect">
-            <a:avLst/>
-          </a:prstGeom>
-          <a:noFill/>
-        </p:spPr>
-        <p:txBody>
-          <a:bodyPr wrap="square" anchor="t" lIns="0" rIns="0" tIns="0" bIns="0">
-            <a:spAutoFit/>
-          </a:bodyPr>
-          <a:lstStyle/>
-          <a:p>
-            <a:pPr algn="ctr">
-              <a:lnSpc>
-                <a:spcPct val="115000"/>
-              </a:lnSpc>
-            </a:pPr>
-            <a:r>
-              <a:rPr sz="1700" b="1" i="0">
-                <a:solidFill>
-                  <a:srgbClr val="DD6B42"/>
-                </a:solidFill>
-                <a:latin typeface="Calibri"/>
-              </a:rPr>
-              <a:t>→</a:t>
-            </a:r>
-          </a:p>
-        </p:txBody>
-      </p:sp>
-      <p:sp>
-        <p:nvSpPr>
-          <p:cNvPr id="15" name="Rounded Rectangle 14"/>
-          <p:cNvSpPr/>
-          <p:nvPr/>
-        </p:nvSpPr>
-        <p:spPr>
-          <a:xfrm>
-            <a:off x="2514600" y="3886200"/>
-            <a:ext cx="2148840" cy="594360"/>
-          </a:xfrm>
-          <a:prstGeom prst="roundRect">
-            <a:avLst>
-              <a:gd name="adj" fmla="val 10000"/>
-            </a:avLst>
-          </a:prstGeom>
-          <a:solidFill>
-            <a:srgbClr val="DCE8D9"/>
-          </a:solidFill>
-          <a:ln>
-            <a:noFill/>
-          </a:ln>
-          <a:effectLst/>
-        </p:spPr>
-        <p:style>
-          <a:lnRef idx="1">
-            <a:schemeClr val="accent1"/>
-          </a:lnRef>
-          <a:fillRef idx="3">
-            <a:schemeClr val="accent1"/>
-          </a:fillRef>
-          <a:effectRef idx="2">
-            <a:schemeClr val="accent1"/>
-          </a:effectRef>
-          <a:fontRef idx="minor">
-            <a:schemeClr val="lt1"/>
-          </a:fontRef>
-        </p:style>
-        <p:txBody>
-          <a:bodyPr rtlCol="0" anchor="ctr"/>
-          <a:lstStyle/>
-          <a:p>
-            <a:pPr algn="ctr"/>
-          </a:p>
-        </p:txBody>
-      </p:sp>
-      <p:sp>
-        <p:nvSpPr>
-          <p:cNvPr id="16" name="TextBox 15"/>
-          <p:cNvSpPr txBox="1"/>
-          <p:nvPr/>
-        </p:nvSpPr>
-        <p:spPr>
-          <a:xfrm>
-            <a:off x="2514600" y="3886200"/>
-            <a:ext cx="2148840" cy="594360"/>
-          </a:xfrm>
-          <a:prstGeom prst="rect">
-            <a:avLst/>
-          </a:prstGeom>
-          <a:noFill/>
-        </p:spPr>
-        <p:txBody>
-          <a:bodyPr wrap="square" anchor="ctr" lIns="0" rIns="0" tIns="0" bIns="0">
-            <a:spAutoFit/>
-          </a:bodyPr>
-          <a:lstStyle/>
-          <a:p>
-            <a:pPr algn="ctr">
-              <a:lnSpc>
-                <a:spcPct val="115000"/>
-              </a:lnSpc>
-            </a:pPr>
-            <a:r>
-              <a:rPr sz="1200" b="1" i="0">
-                <a:solidFill>
-                  <a:srgbClr val="2C5A44"/>
-                </a:solidFill>
-                <a:latin typeface="Calibri"/>
-              </a:rPr>
-              <a:t>Photo or Ask Parent</a:t>
-            </a:r>
-          </a:p>
-        </p:txBody>
-      </p:sp>
-      <p:sp>
-        <p:nvSpPr>
-          <p:cNvPr id="17" name="TextBox 16"/>
-          <p:cNvSpPr txBox="1"/>
-          <p:nvPr/>
-        </p:nvSpPr>
-        <p:spPr>
-          <a:xfrm>
-            <a:off x="4663440" y="3977639"/>
-            <a:ext cx="320040" cy="457200"/>
-          </a:xfrm>
-          <a:prstGeom prst="rect">
-            <a:avLst/>
-          </a:prstGeom>
-          <a:noFill/>
-        </p:spPr>
-        <p:txBody>
-          <a:bodyPr wrap="square" anchor="t" lIns="0" rIns="0" tIns="0" bIns="0">
-            <a:spAutoFit/>
-          </a:bodyPr>
-          <a:lstStyle/>
-          <a:p>
-            <a:pPr algn="ctr">
-              <a:lnSpc>
-                <a:spcPct val="115000"/>
-              </a:lnSpc>
-            </a:pPr>
-            <a:r>
-              <a:rPr sz="1700" b="1" i="0">
-                <a:solidFill>
-                  <a:srgbClr val="DD6B42"/>
-                </a:solidFill>
-                <a:latin typeface="Calibri"/>
-              </a:rPr>
-              <a:t>→</a:t>
-            </a:r>
-          </a:p>
-        </p:txBody>
-      </p:sp>
-      <p:sp>
-        <p:nvSpPr>
-          <p:cNvPr id="18" name="Rounded Rectangle 17"/>
-          <p:cNvSpPr/>
-          <p:nvPr/>
-        </p:nvSpPr>
-        <p:spPr>
-          <a:xfrm>
-            <a:off x="4983479" y="3886200"/>
-            <a:ext cx="1920240" cy="594360"/>
-          </a:xfrm>
-          <a:prstGeom prst="roundRect">
-            <a:avLst>
-              <a:gd name="adj" fmla="val 10000"/>
-            </a:avLst>
-          </a:prstGeom>
-          <a:solidFill>
-            <a:srgbClr val="DCE8D9"/>
-          </a:solidFill>
-          <a:ln>
-            <a:noFill/>
-          </a:ln>
-          <a:effectLst/>
-        </p:spPr>
-        <p:style>
-          <a:lnRef idx="1">
-            <a:schemeClr val="accent1"/>
-          </a:lnRef>
-          <a:fillRef idx="3">
-            <a:schemeClr val="accent1"/>
-          </a:fillRef>
-          <a:effectRef idx="2">
-            <a:schemeClr val="accent1"/>
-          </a:effectRef>
-          <a:fontRef idx="minor">
-            <a:schemeClr val="lt1"/>
-          </a:fontRef>
-        </p:style>
-        <p:txBody>
-          <a:bodyPr rtlCol="0" anchor="ctr"/>
-          <a:lstStyle/>
-          <a:p>
-            <a:pPr algn="ctr"/>
-          </a:p>
-        </p:txBody>
-      </p:sp>
-      <p:sp>
-        <p:nvSpPr>
-          <p:cNvPr id="19" name="TextBox 18"/>
-          <p:cNvSpPr txBox="1"/>
-          <p:nvPr/>
-        </p:nvSpPr>
-        <p:spPr>
-          <a:xfrm>
-            <a:off x="4983479" y="3886200"/>
-            <a:ext cx="1920240" cy="594360"/>
-          </a:xfrm>
-          <a:prstGeom prst="rect">
-            <a:avLst/>
-          </a:prstGeom>
-          <a:noFill/>
-        </p:spPr>
-        <p:txBody>
-          <a:bodyPr wrap="square" anchor="ctr" lIns="0" rIns="0" tIns="0" bIns="0">
-            <a:spAutoFit/>
-          </a:bodyPr>
-          <a:lstStyle/>
-          <a:p>
-            <a:pPr algn="ctr">
-              <a:lnSpc>
-                <a:spcPct val="115000"/>
-              </a:lnSpc>
-            </a:pPr>
-            <a:r>
-              <a:rPr sz="1200" b="1" i="0">
-                <a:solidFill>
-                  <a:srgbClr val="2C5A44"/>
-                </a:solidFill>
-                <a:latin typeface="Calibri"/>
-              </a:rPr>
-              <a:t>Parent Approves</a:t>
-            </a:r>
-          </a:p>
-        </p:txBody>
-      </p:sp>
-      <p:sp>
-        <p:nvSpPr>
-          <p:cNvPr id="20" name="TextBox 19"/>
-          <p:cNvSpPr txBox="1"/>
-          <p:nvPr/>
-        </p:nvSpPr>
-        <p:spPr>
-          <a:xfrm>
-            <a:off x="6903719" y="3977639"/>
-            <a:ext cx="320040" cy="457200"/>
-          </a:xfrm>
-          <a:prstGeom prst="rect">
-            <a:avLst/>
-          </a:prstGeom>
-          <a:noFill/>
-        </p:spPr>
-        <p:txBody>
-          <a:bodyPr wrap="square" anchor="t" lIns="0" rIns="0" tIns="0" bIns="0">
-            <a:spAutoFit/>
-          </a:bodyPr>
-          <a:lstStyle/>
-          <a:p>
-            <a:pPr algn="ctr">
-              <a:lnSpc>
-                <a:spcPct val="115000"/>
-              </a:lnSpc>
-            </a:pPr>
-            <a:r>
-              <a:rPr sz="1700" b="1" i="0">
-                <a:solidFill>
-                  <a:srgbClr val="DD6B42"/>
-                </a:solidFill>
-                <a:latin typeface="Calibri"/>
-              </a:rPr>
-              <a:t>→</a:t>
-            </a:r>
-          </a:p>
-        </p:txBody>
-      </p:sp>
-      <p:sp>
-        <p:nvSpPr>
-          <p:cNvPr id="21" name="Rounded Rectangle 20"/>
-          <p:cNvSpPr/>
-          <p:nvPr/>
-        </p:nvSpPr>
-        <p:spPr>
-          <a:xfrm>
-            <a:off x="7223759" y="3886200"/>
-            <a:ext cx="1874519" cy="594360"/>
-          </a:xfrm>
-          <a:prstGeom prst="roundRect">
-            <a:avLst>
-              <a:gd name="adj" fmla="val 10000"/>
-            </a:avLst>
-          </a:prstGeom>
-          <a:solidFill>
-            <a:srgbClr val="DCE8D9"/>
-          </a:solidFill>
-          <a:ln>
-            <a:noFill/>
-          </a:ln>
-          <a:effectLst/>
-        </p:spPr>
-        <p:style>
-          <a:lnRef idx="1">
-            <a:schemeClr val="accent1"/>
-          </a:lnRef>
-          <a:fillRef idx="3">
-            <a:schemeClr val="accent1"/>
-          </a:fillRef>
-          <a:effectRef idx="2">
-            <a:schemeClr val="accent1"/>
-          </a:effectRef>
-          <a:fontRef idx="minor">
-            <a:schemeClr val="lt1"/>
-          </a:fontRef>
-        </p:style>
-        <p:txBody>
-          <a:bodyPr rtlCol="0" anchor="ctr"/>
-          <a:lstStyle/>
-          <a:p>
-            <a:pPr algn="ctr"/>
-          </a:p>
-        </p:txBody>
-      </p:sp>
-      <p:sp>
-        <p:nvSpPr>
-          <p:cNvPr id="22" name="TextBox 21"/>
-          <p:cNvSpPr txBox="1"/>
-          <p:nvPr/>
-        </p:nvSpPr>
-        <p:spPr>
-          <a:xfrm>
-            <a:off x="7223759" y="3886200"/>
-            <a:ext cx="1874519" cy="594360"/>
-          </a:xfrm>
-          <a:prstGeom prst="rect">
-            <a:avLst/>
-          </a:prstGeom>
-          <a:noFill/>
-        </p:spPr>
-        <p:txBody>
-          <a:bodyPr wrap="square" anchor="ctr" lIns="0" rIns="0" tIns="0" bIns="0">
-            <a:spAutoFit/>
-          </a:bodyPr>
-          <a:lstStyle/>
-          <a:p>
-            <a:pPr algn="ctr">
-              <a:lnSpc>
-                <a:spcPct val="115000"/>
-              </a:lnSpc>
-            </a:pPr>
-            <a:r>
-              <a:rPr sz="1200" b="1" i="0">
-                <a:solidFill>
-                  <a:srgbClr val="2C5A44"/>
-                </a:solidFill>
-                <a:latin typeface="Calibri"/>
-              </a:rPr>
-              <a:t>Minutes Banked</a:t>
-            </a:r>
-          </a:p>
-        </p:txBody>
-      </p:sp>
-      <p:sp>
-        <p:nvSpPr>
-          <p:cNvPr id="23" name="TextBox 22"/>
-          <p:cNvSpPr txBox="1"/>
-          <p:nvPr/>
-        </p:nvSpPr>
-        <p:spPr>
-          <a:xfrm>
-            <a:off x="9098280" y="3977639"/>
-            <a:ext cx="320040" cy="457200"/>
-          </a:xfrm>
-          <a:prstGeom prst="rect">
-            <a:avLst/>
-          </a:prstGeom>
-          <a:noFill/>
-        </p:spPr>
-        <p:txBody>
-          <a:bodyPr wrap="square" anchor="t" lIns="0" rIns="0" tIns="0" bIns="0">
-            <a:spAutoFit/>
-          </a:bodyPr>
-          <a:lstStyle/>
-          <a:p>
-            <a:pPr algn="ctr">
-              <a:lnSpc>
-                <a:spcPct val="115000"/>
-              </a:lnSpc>
-            </a:pPr>
-            <a:r>
-              <a:rPr sz="1700" b="1" i="0">
-                <a:solidFill>
-                  <a:srgbClr val="DD6B42"/>
-                </a:solidFill>
-                <a:latin typeface="Calibri"/>
-              </a:rPr>
-              <a:t>→</a:t>
-            </a:r>
-          </a:p>
-        </p:txBody>
-      </p:sp>
-      <p:sp>
-        <p:nvSpPr>
-          <p:cNvPr id="24" name="Rounded Rectangle 23"/>
-          <p:cNvSpPr/>
-          <p:nvPr/>
-        </p:nvSpPr>
-        <p:spPr>
-          <a:xfrm>
-            <a:off x="9418319" y="3886200"/>
-            <a:ext cx="1280160" cy="594360"/>
-          </a:xfrm>
-          <a:prstGeom prst="roundRect">
-            <a:avLst>
-              <a:gd name="adj" fmla="val 10000"/>
-            </a:avLst>
-          </a:prstGeom>
-          <a:solidFill>
-            <a:srgbClr val="DCE8D9"/>
-          </a:solidFill>
-          <a:ln>
-            <a:noFill/>
-          </a:ln>
-          <a:effectLst/>
-        </p:spPr>
-        <p:style>
-          <a:lnRef idx="1">
-            <a:schemeClr val="accent1"/>
-          </a:lnRef>
-          <a:fillRef idx="3">
-            <a:schemeClr val="accent1"/>
-          </a:fillRef>
-          <a:effectRef idx="2">
-            <a:schemeClr val="accent1"/>
-          </a:effectRef>
-          <a:fontRef idx="minor">
-            <a:schemeClr val="lt1"/>
-          </a:fontRef>
-        </p:style>
-        <p:txBody>
-          <a:bodyPr rtlCol="0" anchor="ctr"/>
-          <a:lstStyle/>
-          <a:p>
-            <a:pPr algn="ctr"/>
-          </a:p>
-        </p:txBody>
-      </p:sp>
-      <p:sp>
-        <p:nvSpPr>
-          <p:cNvPr id="25" name="TextBox 24"/>
-          <p:cNvSpPr txBox="1"/>
-          <p:nvPr/>
-        </p:nvSpPr>
-        <p:spPr>
-          <a:xfrm>
-            <a:off x="9418319" y="3886200"/>
-            <a:ext cx="1280160" cy="594360"/>
-          </a:xfrm>
-          <a:prstGeom prst="rect">
-            <a:avLst/>
-          </a:prstGeom>
-          <a:noFill/>
-        </p:spPr>
-        <p:txBody>
-          <a:bodyPr wrap="square" anchor="ctr" lIns="0" rIns="0" tIns="0" bIns="0">
-            <a:spAutoFit/>
-          </a:bodyPr>
-          <a:lstStyle/>
-          <a:p>
-            <a:pPr algn="ctr">
-              <a:lnSpc>
-                <a:spcPct val="115000"/>
-              </a:lnSpc>
-            </a:pPr>
-            <a:r>
-              <a:rPr sz="1200" b="1" i="0">
-                <a:solidFill>
-                  <a:srgbClr val="2C5A44"/>
-                </a:solidFill>
-                <a:latin typeface="Calibri"/>
-              </a:rPr>
-              <a:t>Unlock</a:t>
-            </a:r>
-          </a:p>
-        </p:txBody>
-      </p:sp>
-      <p:sp>
-        <p:nvSpPr>
-          <p:cNvPr id="26" name="Rounded Rectangle 25"/>
-          <p:cNvSpPr/>
-          <p:nvPr/>
-        </p:nvSpPr>
-        <p:spPr>
-          <a:xfrm>
-            <a:off x="822960" y="4846320"/>
-            <a:ext cx="10515600" cy="1371600"/>
-          </a:xfrm>
-          <a:prstGeom prst="roundRect">
-            <a:avLst>
-              <a:gd name="adj" fmla="val 10000"/>
-            </a:avLst>
-          </a:prstGeom>
-          <a:solidFill>
-            <a:srgbClr val="F5E7C9"/>
-          </a:solidFill>
-          <a:ln>
-            <a:noFill/>
-          </a:ln>
-          <a:effectLst/>
-        </p:spPr>
-        <p:style>
-          <a:lnRef idx="1">
-            <a:schemeClr val="accent1"/>
-          </a:lnRef>
-          <a:fillRef idx="3">
-            <a:schemeClr val="accent1"/>
-          </a:fillRef>
-          <a:effectRef idx="2">
-            <a:schemeClr val="accent1"/>
-          </a:effectRef>
-          <a:fontRef idx="minor">
-            <a:schemeClr val="lt1"/>
-          </a:fontRef>
-        </p:style>
-        <p:txBody>
-          <a:bodyPr rtlCol="0" anchor="ctr"/>
-          <a:lstStyle/>
-          <a:p>
-            <a:pPr algn="ctr"/>
-          </a:p>
-        </p:txBody>
-      </p:sp>
-      <p:sp>
-        <p:nvSpPr>
-          <p:cNvPr id="27" name="TextBox 26"/>
-          <p:cNvSpPr txBox="1"/>
-          <p:nvPr/>
-        </p:nvSpPr>
-        <p:spPr>
-          <a:xfrm>
-            <a:off x="1188720" y="5074920"/>
-            <a:ext cx="9784080" cy="914400"/>
-          </a:xfrm>
-          <a:prstGeom prst="rect">
-            <a:avLst/>
-          </a:prstGeom>
-          <a:noFill/>
-        </p:spPr>
-        <p:txBody>
-          <a:bodyPr wrap="square" anchor="ctr" lIns="0" rIns="0" tIns="0" bIns="0">
-            <a:spAutoFit/>
-          </a:bodyPr>
-          <a:lstStyle/>
-          <a:p>
-            <a:pPr algn="l">
-              <a:lnSpc>
-                <a:spcPct val="125000"/>
-              </a:lnSpc>
-            </a:pPr>
-            <a:r>
-              <a:rPr sz="1350" b="0" i="0">
-                <a:solidFill>
-                  <a:srgbClr val="2C5A44"/>
-                </a:solidFill>
-                <a:latin typeface="Calibri"/>
-              </a:rPr>
-              <a:t>The one exception: Sleep is checked each morning about last night's bedtime, not at night — a real bug we caught and fixed, so the reward is never gated on something unverifiable until after bedtime.</a:t>
+              <a:t>Parents and kids are a team</a:t>
             </a:r>
           </a:p>
         </p:txBody>
@@ -7562,1460 +7292,6 @@
 </file>
 
 <file path=ppt/slides/slide6.xml><?xml version="1.0" encoding="utf-8"?>
-<p:sld xmlns:a="http://schemas.openxmlformats.org/drawingml/2006/main" xmlns:p="http://schemas.openxmlformats.org/presentationml/2006/main" xmlns:r="http://schemas.openxmlformats.org/officeDocument/2006/relationships">
-  <p:cSld>
-    <p:bg>
-      <p:bgPr>
-        <a:solidFill>
-          <a:srgbClr val="2C5A44"/>
-        </a:solidFill>
-        <a:effectLst/>
-      </p:bgPr>
-    </p:bg>
-    <p:spTree>
-      <p:nvGrpSpPr>
-        <p:cNvPr id="1" name=""/>
-        <p:cNvGrpSpPr/>
-        <p:nvPr/>
-      </p:nvGrpSpPr>
-      <p:grpSpPr/>
-      <p:sp>
-        <p:nvSpPr>
-          <p:cNvPr id="2" name="TextBox 1"/>
-          <p:cNvSpPr txBox="1"/>
-          <p:nvPr/>
-        </p:nvSpPr>
-        <p:spPr>
-          <a:xfrm>
-            <a:off x="822960" y="457200"/>
-            <a:ext cx="10332720" cy="640080"/>
-          </a:xfrm>
-          <a:prstGeom prst="rect">
-            <a:avLst/>
-          </a:prstGeom>
-          <a:noFill/>
-        </p:spPr>
-        <p:txBody>
-          <a:bodyPr wrap="square" anchor="t" lIns="0" rIns="0" tIns="0" bIns="0">
-            <a:spAutoFit/>
-          </a:bodyPr>
-          <a:lstStyle/>
-          <a:p>
-            <a:pPr algn="l">
-              <a:lnSpc>
-                <a:spcPct val="115000"/>
-              </a:lnSpc>
-            </a:pPr>
-            <a:r>
-              <a:rPr sz="2800" b="1" i="0">
-                <a:solidFill>
-                  <a:srgbClr val="FFFFFF"/>
-                </a:solidFill>
-                <a:latin typeface="Cambria"/>
-              </a:rPr>
-              <a:t>Under the Hood: Simple by Design</a:t>
-            </a:r>
-          </a:p>
-        </p:txBody>
-      </p:sp>
-      <p:sp>
-        <p:nvSpPr>
-          <p:cNvPr id="3" name="TextBox 2"/>
-          <p:cNvSpPr txBox="1"/>
-          <p:nvPr/>
-        </p:nvSpPr>
-        <p:spPr>
-          <a:xfrm>
-            <a:off x="822960" y="1051560"/>
-            <a:ext cx="9601200" cy="457200"/>
-          </a:xfrm>
-          <a:prstGeom prst="rect">
-            <a:avLst/>
-          </a:prstGeom>
-          <a:noFill/>
-        </p:spPr>
-        <p:txBody>
-          <a:bodyPr wrap="square" anchor="t" lIns="0" rIns="0" tIns="0" bIns="0">
-            <a:spAutoFit/>
-          </a:bodyPr>
-          <a:lstStyle/>
-          <a:p>
-            <a:pPr algn="l">
-              <a:lnSpc>
-                <a:spcPct val="115000"/>
-              </a:lnSpc>
-            </a:pPr>
-            <a:r>
-              <a:rPr sz="1500" b="0" i="1">
-                <a:solidFill>
-                  <a:srgbClr val="DCE8D9"/>
-                </a:solidFill>
-                <a:latin typeface="Calibri"/>
-              </a:rPr>
-              <a:t>One file. No backend. No build step.</a:t>
-            </a:r>
-          </a:p>
-        </p:txBody>
-      </p:sp>
-      <p:sp>
-        <p:nvSpPr>
-          <p:cNvPr id="4" name="Rounded Rectangle 3"/>
-          <p:cNvSpPr/>
-          <p:nvPr/>
-        </p:nvSpPr>
-        <p:spPr>
-          <a:xfrm>
-            <a:off x="2880360" y="1691640"/>
-            <a:ext cx="6400800" cy="658368"/>
-          </a:xfrm>
-          <a:prstGeom prst="roundRect">
-            <a:avLst>
-              <a:gd name="adj" fmla="val 10000"/>
-            </a:avLst>
-          </a:prstGeom>
-          <a:solidFill>
-            <a:srgbClr val="3E7A5C"/>
-          </a:solidFill>
-          <a:ln>
-            <a:noFill/>
-          </a:ln>
-          <a:effectLst/>
-        </p:spPr>
-        <p:style>
-          <a:lnRef idx="1">
-            <a:schemeClr val="accent1"/>
-          </a:lnRef>
-          <a:fillRef idx="3">
-            <a:schemeClr val="accent1"/>
-          </a:fillRef>
-          <a:effectRef idx="2">
-            <a:schemeClr val="accent1"/>
-          </a:effectRef>
-          <a:fontRef idx="minor">
-            <a:schemeClr val="lt1"/>
-          </a:fontRef>
-        </p:style>
-        <p:txBody>
-          <a:bodyPr rtlCol="0" anchor="ctr"/>
-          <a:lstStyle/>
-          <a:p>
-            <a:pPr algn="ctr"/>
-          </a:p>
-        </p:txBody>
-      </p:sp>
-      <p:sp>
-        <p:nvSpPr>
-          <p:cNvPr id="5" name="TextBox 4"/>
-          <p:cNvSpPr txBox="1"/>
-          <p:nvPr/>
-        </p:nvSpPr>
-        <p:spPr>
-          <a:xfrm>
-            <a:off x="2880360" y="1691640"/>
-            <a:ext cx="6400800" cy="658368"/>
-          </a:xfrm>
-          <a:prstGeom prst="rect">
-            <a:avLst/>
-          </a:prstGeom>
-          <a:noFill/>
-        </p:spPr>
-        <p:txBody>
-          <a:bodyPr wrap="square" anchor="ctr" lIns="0" rIns="0" tIns="0" bIns="0">
-            <a:spAutoFit/>
-          </a:bodyPr>
-          <a:lstStyle/>
-          <a:p>
-            <a:pPr algn="ctr">
-              <a:lnSpc>
-                <a:spcPct val="115000"/>
-              </a:lnSpc>
-            </a:pPr>
-            <a:r>
-              <a:rPr sz="1500" b="1" i="0">
-                <a:solidFill>
-                  <a:srgbClr val="FFFFFF"/>
-                </a:solidFill>
-                <a:latin typeface="Calibri"/>
-              </a:rPr>
-              <a:t>🌐  health_first.html — loads in any browser</a:t>
-            </a:r>
-          </a:p>
-        </p:txBody>
-      </p:sp>
-      <p:sp>
-        <p:nvSpPr>
-          <p:cNvPr id="6" name="TextBox 5"/>
-          <p:cNvSpPr txBox="1"/>
-          <p:nvPr/>
-        </p:nvSpPr>
-        <p:spPr>
-          <a:xfrm>
-            <a:off x="5623560" y="2377440"/>
-            <a:ext cx="914400" cy="320040"/>
-          </a:xfrm>
-          <a:prstGeom prst="rect">
-            <a:avLst/>
-          </a:prstGeom>
-          <a:noFill/>
-        </p:spPr>
-        <p:txBody>
-          <a:bodyPr wrap="square" anchor="ctr" lIns="0" rIns="0" tIns="0" bIns="0">
-            <a:spAutoFit/>
-          </a:bodyPr>
-          <a:lstStyle/>
-          <a:p>
-            <a:pPr algn="ctr">
-              <a:lnSpc>
-                <a:spcPct val="115000"/>
-              </a:lnSpc>
-            </a:pPr>
-            <a:r>
-              <a:rPr sz="1800" b="1" i="0">
-                <a:solidFill>
-                  <a:srgbClr val="DCE8D9"/>
-                </a:solidFill>
-                <a:latin typeface="Calibri"/>
-              </a:rPr>
-              <a:t>↓</a:t>
-            </a:r>
-          </a:p>
-        </p:txBody>
-      </p:sp>
-      <p:sp>
-        <p:nvSpPr>
-          <p:cNvPr id="7" name="Rounded Rectangle 6"/>
-          <p:cNvSpPr/>
-          <p:nvPr/>
-        </p:nvSpPr>
-        <p:spPr>
-          <a:xfrm>
-            <a:off x="2880360" y="2743200"/>
-            <a:ext cx="3063240" cy="658368"/>
-          </a:xfrm>
-          <a:prstGeom prst="roundRect">
-            <a:avLst>
-              <a:gd name="adj" fmla="val 10000"/>
-            </a:avLst>
-          </a:prstGeom>
-          <a:solidFill>
-            <a:srgbClr val="DCE8D9"/>
-          </a:solidFill>
-          <a:ln>
-            <a:noFill/>
-          </a:ln>
-          <a:effectLst/>
-        </p:spPr>
-        <p:style>
-          <a:lnRef idx="1">
-            <a:schemeClr val="accent1"/>
-          </a:lnRef>
-          <a:fillRef idx="3">
-            <a:schemeClr val="accent1"/>
-          </a:fillRef>
-          <a:effectRef idx="2">
-            <a:schemeClr val="accent1"/>
-          </a:effectRef>
-          <a:fontRef idx="minor">
-            <a:schemeClr val="lt1"/>
-          </a:fontRef>
-        </p:style>
-        <p:txBody>
-          <a:bodyPr rtlCol="0" anchor="ctr"/>
-          <a:lstStyle/>
-          <a:p>
-            <a:pPr algn="ctr"/>
-          </a:p>
-        </p:txBody>
-      </p:sp>
-      <p:sp>
-        <p:nvSpPr>
-          <p:cNvPr id="8" name="TextBox 7"/>
-          <p:cNvSpPr txBox="1"/>
-          <p:nvPr/>
-        </p:nvSpPr>
-        <p:spPr>
-          <a:xfrm>
-            <a:off x="2880360" y="2743200"/>
-            <a:ext cx="3063240" cy="658368"/>
-          </a:xfrm>
-          <a:prstGeom prst="rect">
-            <a:avLst/>
-          </a:prstGeom>
-          <a:noFill/>
-        </p:spPr>
-        <p:txBody>
-          <a:bodyPr wrap="square" anchor="ctr" lIns="0" rIns="0" tIns="0" bIns="0">
-            <a:spAutoFit/>
-          </a:bodyPr>
-          <a:lstStyle/>
-          <a:p>
-            <a:pPr algn="ctr">
-              <a:lnSpc>
-                <a:spcPct val="115000"/>
-              </a:lnSpc>
-            </a:pPr>
-            <a:r>
-              <a:rPr sz="1450" b="1" i="0">
-                <a:solidFill>
-                  <a:srgbClr val="1F3D2B"/>
-                </a:solidFill>
-                <a:latin typeface="Calibri"/>
-              </a:rPr>
-              <a:t>🧒  Kid View</a:t>
-            </a:r>
-          </a:p>
-        </p:txBody>
-      </p:sp>
-      <p:sp>
-        <p:nvSpPr>
-          <p:cNvPr id="9" name="Rounded Rectangle 8"/>
-          <p:cNvSpPr/>
-          <p:nvPr/>
-        </p:nvSpPr>
-        <p:spPr>
-          <a:xfrm>
-            <a:off x="6217920" y="2743200"/>
-            <a:ext cx="3063240" cy="658368"/>
-          </a:xfrm>
-          <a:prstGeom prst="roundRect">
-            <a:avLst>
-              <a:gd name="adj" fmla="val 10000"/>
-            </a:avLst>
-          </a:prstGeom>
-          <a:solidFill>
-            <a:srgbClr val="F7E1D5"/>
-          </a:solidFill>
-          <a:ln>
-            <a:noFill/>
-          </a:ln>
-          <a:effectLst/>
-        </p:spPr>
-        <p:style>
-          <a:lnRef idx="1">
-            <a:schemeClr val="accent1"/>
-          </a:lnRef>
-          <a:fillRef idx="3">
-            <a:schemeClr val="accent1"/>
-          </a:fillRef>
-          <a:effectRef idx="2">
-            <a:schemeClr val="accent1"/>
-          </a:effectRef>
-          <a:fontRef idx="minor">
-            <a:schemeClr val="lt1"/>
-          </a:fontRef>
-        </p:style>
-        <p:txBody>
-          <a:bodyPr rtlCol="0" anchor="ctr"/>
-          <a:lstStyle/>
-          <a:p>
-            <a:pPr algn="ctr"/>
-          </a:p>
-        </p:txBody>
-      </p:sp>
-      <p:sp>
-        <p:nvSpPr>
-          <p:cNvPr id="10" name="TextBox 9"/>
-          <p:cNvSpPr txBox="1"/>
-          <p:nvPr/>
-        </p:nvSpPr>
-        <p:spPr>
-          <a:xfrm>
-            <a:off x="6217920" y="2743200"/>
-            <a:ext cx="3063240" cy="658368"/>
-          </a:xfrm>
-          <a:prstGeom prst="rect">
-            <a:avLst/>
-          </a:prstGeom>
-          <a:noFill/>
-        </p:spPr>
-        <p:txBody>
-          <a:bodyPr wrap="square" anchor="ctr" lIns="0" rIns="0" tIns="0" bIns="0">
-            <a:spAutoFit/>
-          </a:bodyPr>
-          <a:lstStyle/>
-          <a:p>
-            <a:pPr algn="ctr">
-              <a:lnSpc>
-                <a:spcPct val="115000"/>
-              </a:lnSpc>
-            </a:pPr>
-            <a:r>
-              <a:rPr sz="1450" b="1" i="0">
-                <a:solidFill>
-                  <a:srgbClr val="1F3D2B"/>
-                </a:solidFill>
-                <a:latin typeface="Calibri"/>
-              </a:rPr>
-              <a:t>👨  Parent View</a:t>
-            </a:r>
-          </a:p>
-        </p:txBody>
-      </p:sp>
-      <p:sp>
-        <p:nvSpPr>
-          <p:cNvPr id="11" name="TextBox 10"/>
-          <p:cNvSpPr txBox="1"/>
-          <p:nvPr/>
-        </p:nvSpPr>
-        <p:spPr>
-          <a:xfrm>
-            <a:off x="5623560" y="3429000"/>
-            <a:ext cx="914400" cy="320040"/>
-          </a:xfrm>
-          <a:prstGeom prst="rect">
-            <a:avLst/>
-          </a:prstGeom>
-          <a:noFill/>
-        </p:spPr>
-        <p:txBody>
-          <a:bodyPr wrap="square" anchor="ctr" lIns="0" rIns="0" tIns="0" bIns="0">
-            <a:spAutoFit/>
-          </a:bodyPr>
-          <a:lstStyle/>
-          <a:p>
-            <a:pPr algn="ctr">
-              <a:lnSpc>
-                <a:spcPct val="115000"/>
-              </a:lnSpc>
-            </a:pPr>
-            <a:r>
-              <a:rPr sz="1800" b="1" i="0">
-                <a:solidFill>
-                  <a:srgbClr val="DCE8D9"/>
-                </a:solidFill>
-                <a:latin typeface="Calibri"/>
-              </a:rPr>
-              <a:t>↓</a:t>
-            </a:r>
-          </a:p>
-        </p:txBody>
-      </p:sp>
-      <p:sp>
-        <p:nvSpPr>
-          <p:cNvPr id="12" name="Rounded Rectangle 11"/>
-          <p:cNvSpPr/>
-          <p:nvPr/>
-        </p:nvSpPr>
-        <p:spPr>
-          <a:xfrm>
-            <a:off x="2880360" y="3794760"/>
-            <a:ext cx="6400800" cy="658368"/>
-          </a:xfrm>
-          <a:prstGeom prst="roundRect">
-            <a:avLst>
-              <a:gd name="adj" fmla="val 10000"/>
-            </a:avLst>
-          </a:prstGeom>
-          <a:solidFill>
-            <a:srgbClr val="DB9D3B"/>
-          </a:solidFill>
-          <a:ln>
-            <a:noFill/>
-          </a:ln>
-          <a:effectLst/>
-        </p:spPr>
-        <p:style>
-          <a:lnRef idx="1">
-            <a:schemeClr val="accent1"/>
-          </a:lnRef>
-          <a:fillRef idx="3">
-            <a:schemeClr val="accent1"/>
-          </a:fillRef>
-          <a:effectRef idx="2">
-            <a:schemeClr val="accent1"/>
-          </a:effectRef>
-          <a:fontRef idx="minor">
-            <a:schemeClr val="lt1"/>
-          </a:fontRef>
-        </p:style>
-        <p:txBody>
-          <a:bodyPr rtlCol="0" anchor="ctr"/>
-          <a:lstStyle/>
-          <a:p>
-            <a:pPr algn="ctr"/>
-          </a:p>
-        </p:txBody>
-      </p:sp>
-      <p:sp>
-        <p:nvSpPr>
-          <p:cNvPr id="13" name="TextBox 12"/>
-          <p:cNvSpPr txBox="1"/>
-          <p:nvPr/>
-        </p:nvSpPr>
-        <p:spPr>
-          <a:xfrm>
-            <a:off x="2880360" y="3794760"/>
-            <a:ext cx="6400800" cy="658368"/>
-          </a:xfrm>
-          <a:prstGeom prst="rect">
-            <a:avLst/>
-          </a:prstGeom>
-          <a:noFill/>
-        </p:spPr>
-        <p:txBody>
-          <a:bodyPr wrap="square" anchor="ctr" lIns="0" rIns="0" tIns="0" bIns="0">
-            <a:spAutoFit/>
-          </a:bodyPr>
-          <a:lstStyle/>
-          <a:p>
-            <a:pPr algn="ctr">
-              <a:lnSpc>
-                <a:spcPct val="115000"/>
-              </a:lnSpc>
-            </a:pPr>
-            <a:r>
-              <a:rPr sz="1500" b="1" i="0">
-                <a:solidFill>
-                  <a:srgbClr val="1F3D2B"/>
-                </a:solidFill>
-                <a:latin typeface="Calibri"/>
-              </a:rPr>
-              <a:t>⚙️  Central App State — goals, streak, minute balance, history</a:t>
-            </a:r>
-          </a:p>
-        </p:txBody>
-      </p:sp>
-      <p:sp>
-        <p:nvSpPr>
-          <p:cNvPr id="14" name="TextBox 13"/>
-          <p:cNvSpPr txBox="1"/>
-          <p:nvPr/>
-        </p:nvSpPr>
-        <p:spPr>
-          <a:xfrm>
-            <a:off x="5623560" y="4480560"/>
-            <a:ext cx="914400" cy="320040"/>
-          </a:xfrm>
-          <a:prstGeom prst="rect">
-            <a:avLst/>
-          </a:prstGeom>
-          <a:noFill/>
-        </p:spPr>
-        <p:txBody>
-          <a:bodyPr wrap="square" anchor="ctr" lIns="0" rIns="0" tIns="0" bIns="0">
-            <a:spAutoFit/>
-          </a:bodyPr>
-          <a:lstStyle/>
-          <a:p>
-            <a:pPr algn="ctr">
-              <a:lnSpc>
-                <a:spcPct val="115000"/>
-              </a:lnSpc>
-            </a:pPr>
-            <a:r>
-              <a:rPr sz="1800" b="1" i="0">
-                <a:solidFill>
-                  <a:srgbClr val="DCE8D9"/>
-                </a:solidFill>
-                <a:latin typeface="Calibri"/>
-              </a:rPr>
-              <a:t>↓</a:t>
-            </a:r>
-          </a:p>
-        </p:txBody>
-      </p:sp>
-      <p:sp>
-        <p:nvSpPr>
-          <p:cNvPr id="15" name="Rounded Rectangle 14"/>
-          <p:cNvSpPr/>
-          <p:nvPr/>
-        </p:nvSpPr>
-        <p:spPr>
-          <a:xfrm>
-            <a:off x="2880360" y="4846320"/>
-            <a:ext cx="6400800" cy="658368"/>
-          </a:xfrm>
-          <a:prstGeom prst="roundRect">
-            <a:avLst>
-              <a:gd name="adj" fmla="val 10000"/>
-            </a:avLst>
-          </a:prstGeom>
-          <a:solidFill>
-            <a:srgbClr val="1F3D2B"/>
-          </a:solidFill>
-          <a:ln>
-            <a:noFill/>
-          </a:ln>
-          <a:effectLst/>
-        </p:spPr>
-        <p:style>
-          <a:lnRef idx="1">
-            <a:schemeClr val="accent1"/>
-          </a:lnRef>
-          <a:fillRef idx="3">
-            <a:schemeClr val="accent1"/>
-          </a:fillRef>
-          <a:effectRef idx="2">
-            <a:schemeClr val="accent1"/>
-          </a:effectRef>
-          <a:fontRef idx="minor">
-            <a:schemeClr val="lt1"/>
-          </a:fontRef>
-        </p:style>
-        <p:txBody>
-          <a:bodyPr rtlCol="0" anchor="ctr"/>
-          <a:lstStyle/>
-          <a:p>
-            <a:pPr algn="ctr"/>
-          </a:p>
-        </p:txBody>
-      </p:sp>
-      <p:sp>
-        <p:nvSpPr>
-          <p:cNvPr id="16" name="TextBox 15"/>
-          <p:cNvSpPr txBox="1"/>
-          <p:nvPr/>
-        </p:nvSpPr>
-        <p:spPr>
-          <a:xfrm>
-            <a:off x="2880360" y="4846320"/>
-            <a:ext cx="6400800" cy="658368"/>
-          </a:xfrm>
-          <a:prstGeom prst="rect">
-            <a:avLst/>
-          </a:prstGeom>
-          <a:noFill/>
-        </p:spPr>
-        <p:txBody>
-          <a:bodyPr wrap="square" anchor="ctr" lIns="0" rIns="0" tIns="0" bIns="0">
-            <a:spAutoFit/>
-          </a:bodyPr>
-          <a:lstStyle/>
-          <a:p>
-            <a:pPr algn="ctr">
-              <a:lnSpc>
-                <a:spcPct val="115000"/>
-              </a:lnSpc>
-            </a:pPr>
-            <a:r>
-              <a:rPr sz="1450" b="1" i="0">
-                <a:solidFill>
-                  <a:srgbClr val="FFFFFF"/>
-                </a:solidFill>
-                <a:latin typeface="Calibri"/>
-              </a:rPr>
-              <a:t>💾  Browser localStorage — persists per day, auto-resets at midnight</a:t>
-            </a:r>
-          </a:p>
-        </p:txBody>
-      </p:sp>
-      <p:sp>
-        <p:nvSpPr>
-          <p:cNvPr id="17" name="TextBox 16"/>
-          <p:cNvSpPr txBox="1"/>
-          <p:nvPr/>
-        </p:nvSpPr>
-        <p:spPr>
-          <a:xfrm>
-            <a:off x="2880360" y="5669280"/>
-            <a:ext cx="6400800" cy="822960"/>
-          </a:xfrm>
-          <a:prstGeom prst="rect">
-            <a:avLst/>
-          </a:prstGeom>
-          <a:noFill/>
-        </p:spPr>
-        <p:txBody>
-          <a:bodyPr wrap="square" anchor="t" lIns="0" rIns="0" tIns="0" bIns="0">
-            <a:spAutoFit/>
-          </a:bodyPr>
-          <a:lstStyle/>
-          <a:p>
-            <a:pPr algn="ctr">
-              <a:lnSpc>
-                <a:spcPct val="125000"/>
-              </a:lnSpc>
-            </a:pPr>
-            <a:r>
-              <a:rPr sz="1250" b="0" i="1">
-                <a:solidFill>
-                  <a:srgbClr val="DCE8D9"/>
-                </a:solidFill>
-                <a:latin typeface="Calibri"/>
-              </a:rPr>
-              <a:t>Every tap mutates the state object, then redraws the current view — the same reactive loop that made 5 weeks of rapid iteration possible.</a:t>
-            </a:r>
-          </a:p>
-        </p:txBody>
-      </p:sp>
-    </p:spTree>
-  </p:cSld>
-  <p:clrMapOvr>
-    <a:masterClrMapping/>
-  </p:clrMapOvr>
-</p:sld>
-</file>
-
-<file path=ppt/slides/slide7.xml><?xml version="1.0" encoding="utf-8"?>
-<p:sld xmlns:a="http://schemas.openxmlformats.org/drawingml/2006/main" xmlns:p="http://schemas.openxmlformats.org/presentationml/2006/main" xmlns:r="http://schemas.openxmlformats.org/officeDocument/2006/relationships">
-  <p:cSld>
-    <p:bg>
-      <p:bgPr>
-        <a:solidFill>
-          <a:srgbClr val="FFFFFF"/>
-        </a:solidFill>
-        <a:effectLst/>
-      </p:bgPr>
-    </p:bg>
-    <p:spTree>
-      <p:nvGrpSpPr>
-        <p:cNvPr id="1" name=""/>
-        <p:cNvGrpSpPr/>
-        <p:nvPr/>
-      </p:nvGrpSpPr>
-      <p:grpSpPr/>
-      <p:sp>
-        <p:nvSpPr>
-          <p:cNvPr id="2" name="TextBox 1"/>
-          <p:cNvSpPr txBox="1"/>
-          <p:nvPr/>
-        </p:nvSpPr>
-        <p:spPr>
-          <a:xfrm>
-            <a:off x="822960" y="502920"/>
-            <a:ext cx="10332720" cy="914400"/>
-          </a:xfrm>
-          <a:prstGeom prst="rect">
-            <a:avLst/>
-          </a:prstGeom>
-          <a:noFill/>
-        </p:spPr>
-        <p:txBody>
-          <a:bodyPr wrap="square" anchor="t" lIns="0" rIns="0" tIns="0" bIns="0">
-            <a:spAutoFit/>
-          </a:bodyPr>
-          <a:lstStyle/>
-          <a:p>
-            <a:pPr algn="l">
-              <a:lnSpc>
-                <a:spcPct val="115000"/>
-              </a:lnSpc>
-            </a:pPr>
-            <a:r>
-              <a:rPr sz="3000" b="1" i="0">
-                <a:solidFill>
-                  <a:srgbClr val="1F2D22"/>
-                </a:solidFill>
-                <a:latin typeface="Cambria"/>
-              </a:rPr>
-              <a:t>Built for One Family. Designed for Every Family.</a:t>
-            </a:r>
-          </a:p>
-        </p:txBody>
-      </p:sp>
-      <p:sp>
-        <p:nvSpPr>
-          <p:cNvPr id="3" name="Rounded Rectangle 2"/>
-          <p:cNvSpPr/>
-          <p:nvPr/>
-        </p:nvSpPr>
-        <p:spPr>
-          <a:xfrm>
-            <a:off x="822960" y="1828800"/>
-            <a:ext cx="5074920" cy="2103120"/>
-          </a:xfrm>
-          <a:prstGeom prst="roundRect">
-            <a:avLst>
-              <a:gd name="adj" fmla="val 10000"/>
-            </a:avLst>
-          </a:prstGeom>
-          <a:solidFill>
-            <a:srgbClr val="DCE8D9"/>
-          </a:solidFill>
-          <a:ln>
-            <a:noFill/>
-          </a:ln>
-          <a:effectLst/>
-        </p:spPr>
-        <p:style>
-          <a:lnRef idx="1">
-            <a:schemeClr val="accent1"/>
-          </a:lnRef>
-          <a:fillRef idx="3">
-            <a:schemeClr val="accent1"/>
-          </a:fillRef>
-          <a:effectRef idx="2">
-            <a:schemeClr val="accent1"/>
-          </a:effectRef>
-          <a:fontRef idx="minor">
-            <a:schemeClr val="lt1"/>
-          </a:fontRef>
-        </p:style>
-        <p:txBody>
-          <a:bodyPr rtlCol="0" anchor="ctr"/>
-          <a:lstStyle/>
-          <a:p>
-            <a:pPr algn="ctr"/>
-          </a:p>
-        </p:txBody>
-      </p:sp>
-      <p:sp>
-        <p:nvSpPr>
-          <p:cNvPr id="4" name="Oval 3"/>
-          <p:cNvSpPr/>
-          <p:nvPr/>
-        </p:nvSpPr>
-        <p:spPr>
-          <a:xfrm>
-            <a:off x="1188720" y="2103120"/>
-            <a:ext cx="822960" cy="822960"/>
-          </a:xfrm>
-          <a:prstGeom prst="ellipse">
-            <a:avLst/>
-          </a:prstGeom>
-          <a:solidFill>
-            <a:srgbClr val="FFFFFF"/>
-          </a:solidFill>
-          <a:ln>
-            <a:noFill/>
-          </a:ln>
-          <a:effectLst/>
-        </p:spPr>
-        <p:style>
-          <a:lnRef idx="1">
-            <a:schemeClr val="accent1"/>
-          </a:lnRef>
-          <a:fillRef idx="3">
-            <a:schemeClr val="accent1"/>
-          </a:fillRef>
-          <a:effectRef idx="2">
-            <a:schemeClr val="accent1"/>
-          </a:effectRef>
-          <a:fontRef idx="minor">
-            <a:schemeClr val="lt1"/>
-          </a:fontRef>
-        </p:style>
-        <p:txBody>
-          <a:bodyPr rtlCol="0" anchor="ctr" lIns="0" rIns="0" tIns="0" bIns="0" wrap="none"/>
-          <a:lstStyle/>
-          <a:p>
-            <a:pPr algn="ctr"/>
-            <a:r>
-              <a:rPr sz="2500">
-                <a:solidFill>
-                  <a:srgbClr val="3E7A5C"/>
-                </a:solidFill>
-              </a:rPr>
-              <a:t>🌍</a:t>
-            </a:r>
-          </a:p>
-        </p:txBody>
-      </p:sp>
-      <p:sp>
-        <p:nvSpPr>
-          <p:cNvPr id="5" name="TextBox 4"/>
-          <p:cNvSpPr txBox="1"/>
-          <p:nvPr/>
-        </p:nvSpPr>
-        <p:spPr>
-          <a:xfrm>
-            <a:off x="2194560" y="2121408"/>
-            <a:ext cx="3566160" cy="457200"/>
-          </a:xfrm>
-          <a:prstGeom prst="rect">
-            <a:avLst/>
-          </a:prstGeom>
-          <a:noFill/>
-        </p:spPr>
-        <p:txBody>
-          <a:bodyPr wrap="square" anchor="t" lIns="0" rIns="0" tIns="0" bIns="0">
-            <a:spAutoFit/>
-          </a:bodyPr>
-          <a:lstStyle/>
-          <a:p>
-            <a:pPr algn="l">
-              <a:lnSpc>
-                <a:spcPct val="115000"/>
-              </a:lnSpc>
-            </a:pPr>
-            <a:r>
-              <a:rPr sz="1550" b="1" i="0">
-                <a:solidFill>
-                  <a:srgbClr val="1F2D22"/>
-                </a:solidFill>
-                <a:latin typeface="Cambria"/>
-              </a:rPr>
-              <a:t>Universal habits</a:t>
-            </a:r>
-          </a:p>
-        </p:txBody>
-      </p:sp>
-      <p:sp>
-        <p:nvSpPr>
-          <p:cNvPr id="6" name="TextBox 5"/>
-          <p:cNvSpPr txBox="1"/>
-          <p:nvPr/>
-        </p:nvSpPr>
-        <p:spPr>
-          <a:xfrm>
-            <a:off x="2194560" y="2606040"/>
-            <a:ext cx="3566160" cy="1234440"/>
-          </a:xfrm>
-          <a:prstGeom prst="rect">
-            <a:avLst/>
-          </a:prstGeom>
-          <a:noFill/>
-        </p:spPr>
-        <p:txBody>
-          <a:bodyPr wrap="square" anchor="t" lIns="0" rIns="0" tIns="0" bIns="0">
-            <a:spAutoFit/>
-          </a:bodyPr>
-          <a:lstStyle/>
-          <a:p>
-            <a:pPr algn="l">
-              <a:lnSpc>
-                <a:spcPct val="120000"/>
-              </a:lnSpc>
-            </a:pPr>
-            <a:r>
-              <a:rPr sz="1150" b="0" i="0">
-                <a:solidFill>
-                  <a:srgbClr val="5B6A5F"/>
-                </a:solidFill>
-                <a:latin typeface="Calibri"/>
-              </a:rPr>
-              <a:t>Water, sleep, movement, and nutrition are the same challenge in every home, every culture, every income level — this isn't a niche problem.</a:t>
-            </a:r>
-          </a:p>
-        </p:txBody>
-      </p:sp>
-      <p:sp>
-        <p:nvSpPr>
-          <p:cNvPr id="7" name="Rounded Rectangle 6"/>
-          <p:cNvSpPr/>
-          <p:nvPr/>
-        </p:nvSpPr>
-        <p:spPr>
-          <a:xfrm>
-            <a:off x="6355080" y="1828800"/>
-            <a:ext cx="5074920" cy="2103120"/>
-          </a:xfrm>
-          <a:prstGeom prst="roundRect">
-            <a:avLst>
-              <a:gd name="adj" fmla="val 10000"/>
-            </a:avLst>
-          </a:prstGeom>
-          <a:solidFill>
-            <a:srgbClr val="F7E1D5"/>
-          </a:solidFill>
-          <a:ln>
-            <a:noFill/>
-          </a:ln>
-          <a:effectLst/>
-        </p:spPr>
-        <p:style>
-          <a:lnRef idx="1">
-            <a:schemeClr val="accent1"/>
-          </a:lnRef>
-          <a:fillRef idx="3">
-            <a:schemeClr val="accent1"/>
-          </a:fillRef>
-          <a:effectRef idx="2">
-            <a:schemeClr val="accent1"/>
-          </a:effectRef>
-          <a:fontRef idx="minor">
-            <a:schemeClr val="lt1"/>
-          </a:fontRef>
-        </p:style>
-        <p:txBody>
-          <a:bodyPr rtlCol="0" anchor="ctr"/>
-          <a:lstStyle/>
-          <a:p>
-            <a:pPr algn="ctr"/>
-          </a:p>
-        </p:txBody>
-      </p:sp>
-      <p:sp>
-        <p:nvSpPr>
-          <p:cNvPr id="8" name="Oval 7"/>
-          <p:cNvSpPr/>
-          <p:nvPr/>
-        </p:nvSpPr>
-        <p:spPr>
-          <a:xfrm>
-            <a:off x="6720840" y="2103120"/>
-            <a:ext cx="822960" cy="822960"/>
-          </a:xfrm>
-          <a:prstGeom prst="ellipse">
-            <a:avLst/>
-          </a:prstGeom>
-          <a:solidFill>
-            <a:srgbClr val="FFFFFF"/>
-          </a:solidFill>
-          <a:ln>
-            <a:noFill/>
-          </a:ln>
-          <a:effectLst/>
-        </p:spPr>
-        <p:style>
-          <a:lnRef idx="1">
-            <a:schemeClr val="accent1"/>
-          </a:lnRef>
-          <a:fillRef idx="3">
-            <a:schemeClr val="accent1"/>
-          </a:fillRef>
-          <a:effectRef idx="2">
-            <a:schemeClr val="accent1"/>
-          </a:effectRef>
-          <a:fontRef idx="minor">
-            <a:schemeClr val="lt1"/>
-          </a:fontRef>
-        </p:style>
-        <p:txBody>
-          <a:bodyPr rtlCol="0" anchor="ctr" lIns="0" rIns="0" tIns="0" bIns="0" wrap="none"/>
-          <a:lstStyle/>
-          <a:p>
-            <a:pPr algn="ctr"/>
-            <a:r>
-              <a:rPr sz="2500">
-                <a:solidFill>
-                  <a:srgbClr val="DD6B42"/>
-                </a:solidFill>
-              </a:rPr>
-              <a:t>🧩</a:t>
-            </a:r>
-          </a:p>
-        </p:txBody>
-      </p:sp>
-      <p:sp>
-        <p:nvSpPr>
-          <p:cNvPr id="9" name="TextBox 8"/>
-          <p:cNvSpPr txBox="1"/>
-          <p:nvPr/>
-        </p:nvSpPr>
-        <p:spPr>
-          <a:xfrm>
-            <a:off x="7726679" y="2121408"/>
-            <a:ext cx="3566160" cy="457200"/>
-          </a:xfrm>
-          <a:prstGeom prst="rect">
-            <a:avLst/>
-          </a:prstGeom>
-          <a:noFill/>
-        </p:spPr>
-        <p:txBody>
-          <a:bodyPr wrap="square" anchor="t" lIns="0" rIns="0" tIns="0" bIns="0">
-            <a:spAutoFit/>
-          </a:bodyPr>
-          <a:lstStyle/>
-          <a:p>
-            <a:pPr algn="l">
-              <a:lnSpc>
-                <a:spcPct val="115000"/>
-              </a:lnSpc>
-            </a:pPr>
-            <a:r>
-              <a:rPr sz="1550" b="1" i="0">
-                <a:solidFill>
-                  <a:srgbClr val="1F2D22"/>
-                </a:solidFill>
-                <a:latin typeface="Cambria"/>
-              </a:rPr>
-              <a:t>Any habit, not just health</a:t>
-            </a:r>
-          </a:p>
-        </p:txBody>
-      </p:sp>
-      <p:sp>
-        <p:nvSpPr>
-          <p:cNvPr id="10" name="TextBox 9"/>
-          <p:cNvSpPr txBox="1"/>
-          <p:nvPr/>
-        </p:nvSpPr>
-        <p:spPr>
-          <a:xfrm>
-            <a:off x="7726679" y="2606040"/>
-            <a:ext cx="3566160" cy="1234440"/>
-          </a:xfrm>
-          <a:prstGeom prst="rect">
-            <a:avLst/>
-          </a:prstGeom>
-          <a:noFill/>
-        </p:spPr>
-        <p:txBody>
-          <a:bodyPr wrap="square" anchor="t" lIns="0" rIns="0" tIns="0" bIns="0">
-            <a:spAutoFit/>
-          </a:bodyPr>
-          <a:lstStyle/>
-          <a:p>
-            <a:pPr algn="l">
-              <a:lnSpc>
-                <a:spcPct val="120000"/>
-              </a:lnSpc>
-            </a:pPr>
-            <a:r>
-              <a:rPr sz="1150" b="0" i="0">
-                <a:solidFill>
-                  <a:srgbClr val="5B6A5F"/>
-                </a:solidFill>
-                <a:latin typeface="Calibri"/>
-              </a:rPr>
-              <a:t>Parents can already add custom goals — reading, chores, homework — the checklist → proof → reward engine generalizes far beyond the 4 defaults.</a:t>
-            </a:r>
-          </a:p>
-        </p:txBody>
-      </p:sp>
-      <p:sp>
-        <p:nvSpPr>
-          <p:cNvPr id="11" name="Rounded Rectangle 10"/>
-          <p:cNvSpPr/>
-          <p:nvPr/>
-        </p:nvSpPr>
-        <p:spPr>
-          <a:xfrm>
-            <a:off x="822960" y="4160520"/>
-            <a:ext cx="5074920" cy="2103120"/>
-          </a:xfrm>
-          <a:prstGeom prst="roundRect">
-            <a:avLst>
-              <a:gd name="adj" fmla="val 10000"/>
-            </a:avLst>
-          </a:prstGeom>
-          <a:solidFill>
-            <a:srgbClr val="F5E7C9"/>
-          </a:solidFill>
-          <a:ln>
-            <a:noFill/>
-          </a:ln>
-          <a:effectLst/>
-        </p:spPr>
-        <p:style>
-          <a:lnRef idx="1">
-            <a:schemeClr val="accent1"/>
-          </a:lnRef>
-          <a:fillRef idx="3">
-            <a:schemeClr val="accent1"/>
-          </a:fillRef>
-          <a:effectRef idx="2">
-            <a:schemeClr val="accent1"/>
-          </a:effectRef>
-          <a:fontRef idx="minor">
-            <a:schemeClr val="lt1"/>
-          </a:fontRef>
-        </p:style>
-        <p:txBody>
-          <a:bodyPr rtlCol="0" anchor="ctr"/>
-          <a:lstStyle/>
-          <a:p>
-            <a:pPr algn="ctr"/>
-          </a:p>
-        </p:txBody>
-      </p:sp>
-      <p:sp>
-        <p:nvSpPr>
-          <p:cNvPr id="12" name="Oval 11"/>
-          <p:cNvSpPr/>
-          <p:nvPr/>
-        </p:nvSpPr>
-        <p:spPr>
-          <a:xfrm>
-            <a:off x="1188720" y="4434840"/>
-            <a:ext cx="822960" cy="822960"/>
-          </a:xfrm>
-          <a:prstGeom prst="ellipse">
-            <a:avLst/>
-          </a:prstGeom>
-          <a:solidFill>
-            <a:srgbClr val="FFFFFF"/>
-          </a:solidFill>
-          <a:ln>
-            <a:noFill/>
-          </a:ln>
-          <a:effectLst/>
-        </p:spPr>
-        <p:style>
-          <a:lnRef idx="1">
-            <a:schemeClr val="accent1"/>
-          </a:lnRef>
-          <a:fillRef idx="3">
-            <a:schemeClr val="accent1"/>
-          </a:fillRef>
-          <a:effectRef idx="2">
-            <a:schemeClr val="accent1"/>
-          </a:effectRef>
-          <a:fontRef idx="minor">
-            <a:schemeClr val="lt1"/>
-          </a:fontRef>
-        </p:style>
-        <p:txBody>
-          <a:bodyPr rtlCol="0" anchor="ctr" lIns="0" rIns="0" tIns="0" bIns="0" wrap="none"/>
-          <a:lstStyle/>
-          <a:p>
-            <a:pPr algn="ctr"/>
-            <a:r>
-              <a:rPr sz="2500">
-                <a:solidFill>
-                  <a:srgbClr val="DB9D3B"/>
-                </a:solidFill>
-              </a:rPr>
-              <a:t>📱</a:t>
-            </a:r>
-          </a:p>
-        </p:txBody>
-      </p:sp>
-      <p:sp>
-        <p:nvSpPr>
-          <p:cNvPr id="13" name="TextBox 12"/>
-          <p:cNvSpPr txBox="1"/>
-          <p:nvPr/>
-        </p:nvSpPr>
-        <p:spPr>
-          <a:xfrm>
-            <a:off x="2194560" y="4453128"/>
-            <a:ext cx="3566160" cy="457200"/>
-          </a:xfrm>
-          <a:prstGeom prst="rect">
-            <a:avLst/>
-          </a:prstGeom>
-          <a:noFill/>
-        </p:spPr>
-        <p:txBody>
-          <a:bodyPr wrap="square" anchor="t" lIns="0" rIns="0" tIns="0" bIns="0">
-            <a:spAutoFit/>
-          </a:bodyPr>
-          <a:lstStyle/>
-          <a:p>
-            <a:pPr algn="l">
-              <a:lnSpc>
-                <a:spcPct val="115000"/>
-              </a:lnSpc>
-            </a:pPr>
-            <a:r>
-              <a:rPr sz="1550" b="1" i="0">
-                <a:solidFill>
-                  <a:srgbClr val="1F2D22"/>
-                </a:solidFill>
-                <a:latin typeface="Cambria"/>
-              </a:rPr>
-              <a:t>Rides a real trend</a:t>
-            </a:r>
-          </a:p>
-        </p:txBody>
-      </p:sp>
-      <p:sp>
-        <p:nvSpPr>
-          <p:cNvPr id="14" name="TextBox 13"/>
-          <p:cNvSpPr txBox="1"/>
-          <p:nvPr/>
-        </p:nvSpPr>
-        <p:spPr>
-          <a:xfrm>
-            <a:off x="2194560" y="4937759"/>
-            <a:ext cx="3566160" cy="1234440"/>
-          </a:xfrm>
-          <a:prstGeom prst="rect">
-            <a:avLst/>
-          </a:prstGeom>
-          <a:noFill/>
-        </p:spPr>
-        <p:txBody>
-          <a:bodyPr wrap="square" anchor="t" lIns="0" rIns="0" tIns="0" bIns="0">
-            <a:spAutoFit/>
-          </a:bodyPr>
-          <a:lstStyle/>
-          <a:p>
-            <a:pPr algn="l">
-              <a:lnSpc>
-                <a:spcPct val="120000"/>
-              </a:lnSpc>
-            </a:pPr>
-            <a:r>
-              <a:rPr sz="1150" b="0" i="0">
-                <a:solidFill>
-                  <a:srgbClr val="5B6A5F"/>
-                </a:solidFill>
-                <a:latin typeface="Calibri"/>
-              </a:rPr>
-              <a:t>Global concern over kids' screen time is only growing — Health First turns that fight into a shared incentive instead of a source of family conflict.</a:t>
-            </a:r>
-          </a:p>
-        </p:txBody>
-      </p:sp>
-      <p:sp>
-        <p:nvSpPr>
-          <p:cNvPr id="15" name="Rounded Rectangle 14"/>
-          <p:cNvSpPr/>
-          <p:nvPr/>
-        </p:nvSpPr>
-        <p:spPr>
-          <a:xfrm>
-            <a:off x="6355080" y="4160520"/>
-            <a:ext cx="5074920" cy="2103120"/>
-          </a:xfrm>
-          <a:prstGeom prst="roundRect">
-            <a:avLst>
-              <a:gd name="adj" fmla="val 10000"/>
-            </a:avLst>
-          </a:prstGeom>
-          <a:solidFill>
-            <a:srgbClr val="E2E2F5"/>
-          </a:solidFill>
-          <a:ln>
-            <a:noFill/>
-          </a:ln>
-          <a:effectLst/>
-        </p:spPr>
-        <p:style>
-          <a:lnRef idx="1">
-            <a:schemeClr val="accent1"/>
-          </a:lnRef>
-          <a:fillRef idx="3">
-            <a:schemeClr val="accent1"/>
-          </a:fillRef>
-          <a:effectRef idx="2">
-            <a:schemeClr val="accent1"/>
-          </a:effectRef>
-          <a:fontRef idx="minor">
-            <a:schemeClr val="lt1"/>
-          </a:fontRef>
-        </p:style>
-        <p:txBody>
-          <a:bodyPr rtlCol="0" anchor="ctr"/>
-          <a:lstStyle/>
-          <a:p>
-            <a:pPr algn="ctr"/>
-          </a:p>
-        </p:txBody>
-      </p:sp>
-      <p:sp>
-        <p:nvSpPr>
-          <p:cNvPr id="16" name="Oval 15"/>
-          <p:cNvSpPr/>
-          <p:nvPr/>
-        </p:nvSpPr>
-        <p:spPr>
-          <a:xfrm>
-            <a:off x="6720840" y="4434840"/>
-            <a:ext cx="822960" cy="822960"/>
-          </a:xfrm>
-          <a:prstGeom prst="ellipse">
-            <a:avLst/>
-          </a:prstGeom>
-          <a:solidFill>
-            <a:srgbClr val="FFFFFF"/>
-          </a:solidFill>
-          <a:ln>
-            <a:noFill/>
-          </a:ln>
-          <a:effectLst/>
-        </p:spPr>
-        <p:style>
-          <a:lnRef idx="1">
-            <a:schemeClr val="accent1"/>
-          </a:lnRef>
-          <a:fillRef idx="3">
-            <a:schemeClr val="accent1"/>
-          </a:fillRef>
-          <a:effectRef idx="2">
-            <a:schemeClr val="accent1"/>
-          </a:effectRef>
-          <a:fontRef idx="minor">
-            <a:schemeClr val="lt1"/>
-          </a:fontRef>
-        </p:style>
-        <p:txBody>
-          <a:bodyPr rtlCol="0" anchor="ctr" lIns="0" rIns="0" tIns="0" bIns="0" wrap="none"/>
-          <a:lstStyle/>
-          <a:p>
-            <a:pPr algn="ctr"/>
-            <a:r>
-              <a:rPr sz="2500">
-                <a:solidFill>
-                  <a:srgbClr val="6E6FBF"/>
-                </a:solidFill>
-              </a:rPr>
-              <a:t>📈</a:t>
-            </a:r>
-          </a:p>
-        </p:txBody>
-      </p:sp>
-      <p:sp>
-        <p:nvSpPr>
-          <p:cNvPr id="17" name="TextBox 16"/>
-          <p:cNvSpPr txBox="1"/>
-          <p:nvPr/>
-        </p:nvSpPr>
-        <p:spPr>
-          <a:xfrm>
-            <a:off x="7726679" y="4453128"/>
-            <a:ext cx="3566160" cy="457200"/>
-          </a:xfrm>
-          <a:prstGeom prst="rect">
-            <a:avLst/>
-          </a:prstGeom>
-          <a:noFill/>
-        </p:spPr>
-        <p:txBody>
-          <a:bodyPr wrap="square" anchor="t" lIns="0" rIns="0" tIns="0" bIns="0">
-            <a:spAutoFit/>
-          </a:bodyPr>
-          <a:lstStyle/>
-          <a:p>
-            <a:pPr algn="l">
-              <a:lnSpc>
-                <a:spcPct val="115000"/>
-              </a:lnSpc>
-            </a:pPr>
-            <a:r>
-              <a:rPr sz="1550" b="1" i="0">
-                <a:solidFill>
-                  <a:srgbClr val="1F2D22"/>
-                </a:solidFill>
-                <a:latin typeface="Cambria"/>
-              </a:rPr>
-              <a:t>A path to scale</a:t>
-            </a:r>
-          </a:p>
-        </p:txBody>
-      </p:sp>
-      <p:sp>
-        <p:nvSpPr>
-          <p:cNvPr id="18" name="TextBox 17"/>
-          <p:cNvSpPr txBox="1"/>
-          <p:nvPr/>
-        </p:nvSpPr>
-        <p:spPr>
-          <a:xfrm>
-            <a:off x="7726679" y="4937759"/>
-            <a:ext cx="3566160" cy="1234440"/>
-          </a:xfrm>
-          <a:prstGeom prst="rect">
-            <a:avLst/>
-          </a:prstGeom>
-          <a:noFill/>
-        </p:spPr>
-        <p:txBody>
-          <a:bodyPr wrap="square" anchor="t" lIns="0" rIns="0" tIns="0" bIns="0">
-            <a:spAutoFit/>
-          </a:bodyPr>
-          <a:lstStyle/>
-          <a:p>
-            <a:pPr algn="l">
-              <a:lnSpc>
-                <a:spcPct val="120000"/>
-              </a:lnSpc>
-            </a:pPr>
-            <a:r>
-              <a:rPr sz="1150" b="0" i="0">
-                <a:solidFill>
-                  <a:srgbClr val="5B6A5F"/>
-                </a:solidFill>
-                <a:latin typeface="Calibri"/>
-              </a:rPr>
-              <a:t>School wellness programs, pediatrician recommendations, and family-plan subscriptions are natural next steps for the same core engine.</a:t>
-            </a:r>
-          </a:p>
-        </p:txBody>
-      </p:sp>
-    </p:spTree>
-  </p:cSld>
-  <p:clrMapOvr>
-    <a:masterClrMapping/>
-  </p:clrMapOvr>
-</p:sld>
-</file>
-
-<file path=ppt/slides/slide8.xml><?xml version="1.0" encoding="utf-8"?>
 <p:sld xmlns:a="http://schemas.openxmlformats.org/drawingml/2006/main" xmlns:p="http://schemas.openxmlformats.org/presentationml/2006/main" xmlns:r="http://schemas.openxmlformats.org/officeDocument/2006/relationships">
   <p:cSld>
     <p:bg>
@@ -9041,8 +7317,8 @@
         </p:nvSpPr>
         <p:spPr>
           <a:xfrm>
-            <a:off x="822960" y="502920"/>
-            <a:ext cx="10332720" cy="731520"/>
+            <a:off x="822960" y="822960"/>
+            <a:ext cx="9601200" cy="731520"/>
           </a:xfrm>
           <a:prstGeom prst="rect">
             <a:avLst/>
@@ -9061,270 +7337,27 @@
               </a:lnSpc>
             </a:pPr>
             <a:r>
-              <a:rPr sz="3200" b="1" i="0">
+              <a:rPr sz="3600" b="1" i="0">
                 <a:solidFill>
                   <a:srgbClr val="FFFFFF"/>
                 </a:solidFill>
                 <a:latin typeface="Cambria"/>
               </a:rPr>
-              <a:t>It's Real — Try It Yourself</a:t>
-            </a:r>
-          </a:p>
-        </p:txBody>
-      </p:sp>
-      <p:sp>
-        <p:nvSpPr>
-          <p:cNvPr id="3" name="TextBox 2"/>
-          <p:cNvSpPr txBox="1"/>
-          <p:nvPr/>
-        </p:nvSpPr>
-        <p:spPr>
-          <a:xfrm>
-            <a:off x="822960" y="1188720"/>
-            <a:ext cx="9601200" cy="457200"/>
-          </a:xfrm>
-          <a:prstGeom prst="rect">
-            <a:avLst/>
-          </a:prstGeom>
-          <a:noFill/>
-        </p:spPr>
-        <p:txBody>
-          <a:bodyPr wrap="square" anchor="t" lIns="0" rIns="0" tIns="0" bIns="0">
-            <a:spAutoFit/>
-          </a:bodyPr>
-          <a:lstStyle/>
-          <a:p>
-            <a:pPr algn="l">
-              <a:lnSpc>
-                <a:spcPct val="115000"/>
-              </a:lnSpc>
-            </a:pPr>
-            <a:r>
-              <a:rPr sz="1400" b="0" i="0">
-                <a:solidFill>
-                  <a:srgbClr val="DCE8D9"/>
-                </a:solidFill>
-                <a:latin typeface="Calibri"/>
-              </a:rPr>
-              <a:t>Every feature below is live, clickable, and running right now.</a:t>
-            </a:r>
-          </a:p>
-        </p:txBody>
-      </p:sp>
-      <p:sp>
-        <p:nvSpPr>
-          <p:cNvPr id="4" name="Rounded Rectangle 3"/>
+              <a:t>Try It Yourself!</a:t>
+            </a:r>
+          </a:p>
+        </p:txBody>
+      </p:sp>
+      <p:sp>
+        <p:nvSpPr>
+          <p:cNvPr id="3" name="Rounded Rectangle 2"/>
           <p:cNvSpPr/>
           <p:nvPr/>
         </p:nvSpPr>
         <p:spPr>
           <a:xfrm>
-            <a:off x="822960" y="1828800"/>
-            <a:ext cx="5486400" cy="4572000"/>
-          </a:xfrm>
-          <a:prstGeom prst="roundRect">
-            <a:avLst>
-              <a:gd name="adj" fmla="val 10000"/>
-            </a:avLst>
-          </a:prstGeom>
-          <a:solidFill>
-            <a:srgbClr val="2C5A44"/>
-          </a:solidFill>
-          <a:ln>
-            <a:noFill/>
-          </a:ln>
-          <a:effectLst/>
-        </p:spPr>
-        <p:style>
-          <a:lnRef idx="1">
-            <a:schemeClr val="accent1"/>
-          </a:lnRef>
-          <a:fillRef idx="3">
-            <a:schemeClr val="accent1"/>
-          </a:fillRef>
-          <a:effectRef idx="2">
-            <a:schemeClr val="accent1"/>
-          </a:effectRef>
-          <a:fontRef idx="minor">
-            <a:schemeClr val="lt1"/>
-          </a:fontRef>
-        </p:style>
-        <p:txBody>
-          <a:bodyPr rtlCol="0" anchor="ctr"/>
-          <a:lstStyle/>
-          <a:p>
-            <a:pPr algn="ctr"/>
-          </a:p>
-        </p:txBody>
-      </p:sp>
-      <p:sp>
-        <p:nvSpPr>
-          <p:cNvPr id="5" name="TextBox 4"/>
-          <p:cNvSpPr txBox="1"/>
-          <p:nvPr/>
-        </p:nvSpPr>
-        <p:spPr>
-          <a:xfrm>
-            <a:off x="1188720" y="2103120"/>
-            <a:ext cx="4846320" cy="457200"/>
-          </a:xfrm>
-          <a:prstGeom prst="rect">
-            <a:avLst/>
-          </a:prstGeom>
-          <a:noFill/>
-        </p:spPr>
-        <p:txBody>
-          <a:bodyPr wrap="square" anchor="t" lIns="0" rIns="0" tIns="0" bIns="0">
-            <a:spAutoFit/>
-          </a:bodyPr>
-          <a:lstStyle/>
-          <a:p>
-            <a:pPr algn="l">
-              <a:lnSpc>
-                <a:spcPct val="115000"/>
-              </a:lnSpc>
-            </a:pPr>
-            <a:r>
-              <a:rPr sz="1200" b="1" i="0">
-                <a:solidFill>
-                  <a:srgbClr val="DCE8D9"/>
-                </a:solidFill>
-                <a:latin typeface="Calibri"/>
-              </a:rPr>
-              <a:t>WHAT'S ACTUALLY WORKING</a:t>
-            </a:r>
-          </a:p>
-        </p:txBody>
-      </p:sp>
-      <p:sp>
-        <p:nvSpPr>
-          <p:cNvPr id="6" name="TextBox 5"/>
-          <p:cNvSpPr txBox="1"/>
-          <p:nvPr/>
-        </p:nvSpPr>
-        <p:spPr>
-          <a:xfrm>
-            <a:off x="1188720" y="2606040"/>
-            <a:ext cx="4846320" cy="3657600"/>
-          </a:xfrm>
-          <a:prstGeom prst="rect">
-            <a:avLst/>
-          </a:prstGeom>
-          <a:noFill/>
-        </p:spPr>
-        <p:txBody>
-          <a:bodyPr wrap="square" lIns="0" rIns="0" tIns="0" bIns="0">
-            <a:spAutoFit/>
-          </a:bodyPr>
-          <a:lstStyle/>
-          <a:p>
-            <a:pPr indent="-201168" marL="201168">
-              <a:lnSpc>
-                <a:spcPct val="115000"/>
-              </a:lnSpc>
-              <a:spcAft>
-                <a:spcPts val="1800"/>
-              </a:spcAft>
-              <a:buClr>
-                <a:srgbClr val="3E7A5C"/>
-              </a:buClr>
-              <a:buFont typeface="Arial"/>
-              <a:buChar char="✓"/>
-            </a:pPr>
-            <a:r>
-              <a:rPr sz="1450">
-                <a:solidFill>
-                  <a:srgbClr val="FFFFFF"/>
-                </a:solidFill>
-                <a:latin typeface="Calibri"/>
-              </a:rPr>
-              <a:t>Real photo upload, routed to an actual parent review queue</a:t>
-            </a:r>
-          </a:p>
-          <a:p>
-            <a:pPr indent="-201168" marL="201168">
-              <a:lnSpc>
-                <a:spcPct val="115000"/>
-              </a:lnSpc>
-              <a:spcAft>
-                <a:spcPts val="1800"/>
-              </a:spcAft>
-              <a:buClr>
-                <a:srgbClr val="3E7A5C"/>
-              </a:buClr>
-              <a:buFont typeface="Arial"/>
-              <a:buChar char="✓"/>
-            </a:pPr>
-            <a:r>
-              <a:rPr sz="1450">
-                <a:solidFill>
-                  <a:srgbClr val="FFFFFF"/>
-                </a:solidFill>
-                <a:latin typeface="Calibri"/>
-              </a:rPr>
-              <a:t>One-tap bulk approve — a parent clears every waiting goal with a single PIN entry</a:t>
-            </a:r>
-          </a:p>
-          <a:p>
-            <a:pPr indent="-201168" marL="201168">
-              <a:lnSpc>
-                <a:spcPct val="115000"/>
-              </a:lnSpc>
-              <a:spcAft>
-                <a:spcPts val="1800"/>
-              </a:spcAft>
-              <a:buClr>
-                <a:srgbClr val="3E7A5C"/>
-              </a:buClr>
-              <a:buFont typeface="Arial"/>
-              <a:buChar char="✓"/>
-            </a:pPr>
-            <a:r>
-              <a:rPr sz="1450">
-                <a:solidFill>
-                  <a:srgbClr val="FFFFFF"/>
-                </a:solidFill>
-                <a:latin typeface="Calibri"/>
-              </a:rPr>
-              <a:t>A live countdown that spends banked minutes and warns before time runs out</a:t>
-            </a:r>
-          </a:p>
-          <a:p>
-            <a:pPr indent="-201168" marL="201168">
-              <a:lnSpc>
-                <a:spcPct val="115000"/>
-              </a:lnSpc>
-              <a:spcAft>
-                <a:spcPts val="1800"/>
-              </a:spcAft>
-              <a:buClr>
-                <a:srgbClr val="3E7A5C"/>
-              </a:buClr>
-              <a:buFont typeface="Arial"/>
-              <a:buChar char="✓"/>
-            </a:pPr>
-            <a:r>
-              <a:rPr sz="1450">
-                <a:solidFill>
-                  <a:srgbClr val="FFFFFF"/>
-                </a:solidFill>
-                <a:latin typeface="Calibri"/>
-              </a:rPr>
-              <a:t>State that persists day to day, with automatic daily reset</a:t>
-            </a:r>
-          </a:p>
-        </p:txBody>
-      </p:sp>
-      <p:sp>
-        <p:nvSpPr>
-          <p:cNvPr id="7" name="Rounded Rectangle 6"/>
-          <p:cNvSpPr/>
-          <p:nvPr/>
-        </p:nvSpPr>
-        <p:spPr>
-          <a:xfrm>
-            <a:off x="6537960" y="1828800"/>
-            <a:ext cx="4846320" cy="1371600"/>
+            <a:off x="822960" y="1920240"/>
+            <a:ext cx="10515600" cy="1188720"/>
           </a:xfrm>
           <a:prstGeom prst="roundRect">
             <a:avLst>
@@ -9363,14 +7396,14 @@
       </p:sp>
       <p:sp>
         <p:nvSpPr>
-          <p:cNvPr id="8" name="TextBox 7"/>
+          <p:cNvPr id="4" name="TextBox 3"/>
           <p:cNvSpPr txBox="1"/>
           <p:nvPr/>
         </p:nvSpPr>
         <p:spPr>
           <a:xfrm>
-            <a:off x="6812280" y="2011680"/>
-            <a:ext cx="4297680" cy="365760"/>
+            <a:off x="1188720" y="2148840"/>
+            <a:ext cx="2377440" cy="731520"/>
           </a:xfrm>
           <a:prstGeom prst="rect">
             <a:avLst/>
@@ -9378,7 +7411,7 @@
           <a:noFill/>
         </p:spPr>
         <p:txBody>
-          <a:bodyPr wrap="square" anchor="t" lIns="0" rIns="0" tIns="0" bIns="0">
+          <a:bodyPr wrap="square" anchor="ctr" lIns="0" rIns="0" tIns="0" bIns="0">
             <a:spAutoFit/>
           </a:bodyPr>
           <a:lstStyle/>
@@ -9389,27 +7422,27 @@
               </a:lnSpc>
             </a:pPr>
             <a:r>
-              <a:rPr sz="1100" b="1" i="0">
+              <a:rPr sz="1200" b="1" i="0">
                 <a:solidFill>
                   <a:srgbClr val="FFFFFF"/>
                 </a:solidFill>
                 <a:latin typeface="Calibri"/>
               </a:rPr>
-              <a:t>LIVE PROTOTYPE</a:t>
-            </a:r>
-          </a:p>
-        </p:txBody>
-      </p:sp>
-      <p:sp>
-        <p:nvSpPr>
-          <p:cNvPr id="9" name="TextBox 8"/>
+              <a:t>PLAY WITH IT HERE</a:t>
+            </a:r>
+          </a:p>
+        </p:txBody>
+      </p:sp>
+      <p:sp>
+        <p:nvSpPr>
+          <p:cNvPr id="5" name="TextBox 4"/>
           <p:cNvSpPr txBox="1"/>
           <p:nvPr/>
         </p:nvSpPr>
         <p:spPr>
           <a:xfrm>
-            <a:off x="6812280" y="2423160"/>
-            <a:ext cx="4297680" cy="685800"/>
+            <a:off x="3566160" y="2103120"/>
+            <a:ext cx="7315200" cy="822960"/>
           </a:xfrm>
           <a:prstGeom prst="rect">
             <a:avLst/>
@@ -9417,7 +7450,7 @@
           <a:noFill/>
         </p:spPr>
         <p:txBody>
-          <a:bodyPr wrap="square" anchor="t" lIns="0" rIns="0" tIns="0" bIns="0">
+          <a:bodyPr wrap="square" anchor="ctr" lIns="0" rIns="0" tIns="0" bIns="0">
             <a:spAutoFit/>
           </a:bodyPr>
           <a:lstStyle/>
@@ -9428,7 +7461,7 @@
               </a:lnSpc>
             </a:pPr>
             <a:r>
-              <a:rPr sz="1250" b="1" i="0">
+              <a:rPr sz="1500" b="1" i="0">
                 <a:solidFill>
                   <a:srgbClr val="FFFFFF"/>
                 </a:solidFill>
@@ -9441,14 +7474,14 @@
       </p:sp>
       <p:sp>
         <p:nvSpPr>
-          <p:cNvPr id="10" name="Rounded Rectangle 9"/>
+          <p:cNvPr id="6" name="Rounded Rectangle 5"/>
           <p:cNvSpPr/>
           <p:nvPr/>
         </p:nvSpPr>
         <p:spPr>
           <a:xfrm>
-            <a:off x="6537960" y="3337560"/>
-            <a:ext cx="4846320" cy="1371600"/>
+            <a:off x="822960" y="3291840"/>
+            <a:ext cx="10515600" cy="1188720"/>
           </a:xfrm>
           <a:prstGeom prst="roundRect">
             <a:avLst>
@@ -9487,14 +7520,14 @@
       </p:sp>
       <p:sp>
         <p:nvSpPr>
-          <p:cNvPr id="11" name="TextBox 10"/>
+          <p:cNvPr id="7" name="TextBox 6"/>
           <p:cNvSpPr txBox="1"/>
           <p:nvPr/>
         </p:nvSpPr>
         <p:spPr>
           <a:xfrm>
-            <a:off x="6812280" y="3520440"/>
-            <a:ext cx="4297680" cy="365760"/>
+            <a:off x="1188720" y="3520440"/>
+            <a:ext cx="2377440" cy="731520"/>
           </a:xfrm>
           <a:prstGeom prst="rect">
             <a:avLst/>
@@ -9502,7 +7535,7 @@
           <a:noFill/>
         </p:spPr>
         <p:txBody>
-          <a:bodyPr wrap="square" anchor="t" lIns="0" rIns="0" tIns="0" bIns="0">
+          <a:bodyPr wrap="square" anchor="ctr" lIns="0" rIns="0" tIns="0" bIns="0">
             <a:spAutoFit/>
           </a:bodyPr>
           <a:lstStyle/>
@@ -9513,27 +7546,27 @@
               </a:lnSpc>
             </a:pPr>
             <a:r>
-              <a:rPr sz="1100" b="1" i="0">
+              <a:rPr sz="1200" b="1" i="0">
                 <a:solidFill>
                   <a:srgbClr val="FFFFFF"/>
                 </a:solidFill>
                 <a:latin typeface="Calibri"/>
               </a:rPr>
-              <a:t>SOURCE CODE</a:t>
-            </a:r>
-          </a:p>
-        </p:txBody>
-      </p:sp>
-      <p:sp>
-        <p:nvSpPr>
-          <p:cNvPr id="12" name="TextBox 11"/>
+              <a:t>ALL OUR CODE</a:t>
+            </a:r>
+          </a:p>
+        </p:txBody>
+      </p:sp>
+      <p:sp>
+        <p:nvSpPr>
+          <p:cNvPr id="8" name="TextBox 7"/>
           <p:cNvSpPr txBox="1"/>
           <p:nvPr/>
         </p:nvSpPr>
         <p:spPr>
           <a:xfrm>
-            <a:off x="6812280" y="3931920"/>
-            <a:ext cx="4297680" cy="685800"/>
+            <a:off x="3566160" y="3474720"/>
+            <a:ext cx="7315200" cy="822960"/>
           </a:xfrm>
           <a:prstGeom prst="rect">
             <a:avLst/>
@@ -9541,7 +7574,7 @@
           <a:noFill/>
         </p:spPr>
         <p:txBody>
-          <a:bodyPr wrap="square" anchor="t" lIns="0" rIns="0" tIns="0" bIns="0">
+          <a:bodyPr wrap="square" anchor="ctr" lIns="0" rIns="0" tIns="0" bIns="0">
             <a:spAutoFit/>
           </a:bodyPr>
           <a:lstStyle/>
@@ -9552,7 +7585,7 @@
               </a:lnSpc>
             </a:pPr>
             <a:r>
-              <a:rPr sz="1350" b="1" i="0">
+              <a:rPr sz="1500" b="1" i="0">
                 <a:solidFill>
                   <a:srgbClr val="FFFFFF"/>
                 </a:solidFill>
@@ -9565,14 +7598,14 @@
       </p:sp>
       <p:sp>
         <p:nvSpPr>
-          <p:cNvPr id="13" name="Rounded Rectangle 12"/>
+          <p:cNvPr id="9" name="Rounded Rectangle 8"/>
           <p:cNvSpPr/>
           <p:nvPr/>
         </p:nvSpPr>
         <p:spPr>
           <a:xfrm>
-            <a:off x="6537960" y="4846320"/>
-            <a:ext cx="4846320" cy="1371600"/>
+            <a:off x="822960" y="4663440"/>
+            <a:ext cx="10515600" cy="1188720"/>
           </a:xfrm>
           <a:prstGeom prst="roundRect">
             <a:avLst>
@@ -9611,14 +7644,14 @@
       </p:sp>
       <p:sp>
         <p:nvSpPr>
-          <p:cNvPr id="14" name="TextBox 13"/>
+          <p:cNvPr id="10" name="TextBox 9"/>
           <p:cNvSpPr txBox="1"/>
           <p:nvPr/>
         </p:nvSpPr>
         <p:spPr>
           <a:xfrm>
-            <a:off x="6812280" y="5029200"/>
-            <a:ext cx="4297680" cy="365760"/>
+            <a:off x="1188720" y="4892040"/>
+            <a:ext cx="2377440" cy="731520"/>
           </a:xfrm>
           <a:prstGeom prst="rect">
             <a:avLst/>
@@ -9626,7 +7659,7 @@
           <a:noFill/>
         </p:spPr>
         <p:txBody>
-          <a:bodyPr wrap="square" anchor="t" lIns="0" rIns="0" tIns="0" bIns="0">
+          <a:bodyPr wrap="square" anchor="ctr" lIns="0" rIns="0" tIns="0" bIns="0">
             <a:spAutoFit/>
           </a:bodyPr>
           <a:lstStyle/>
@@ -9637,27 +7670,27 @@
               </a:lnSpc>
             </a:pPr>
             <a:r>
-              <a:rPr sz="1100" b="1" i="0">
+              <a:rPr sz="1200" b="1" i="0">
                 <a:solidFill>
                   <a:srgbClr val="1F3D2B"/>
                 </a:solidFill>
                 <a:latin typeface="Calibri"/>
               </a:rPr>
-              <a:t>DEMO PARENT PIN</a:t>
-            </a:r>
-          </a:p>
-        </p:txBody>
-      </p:sp>
-      <p:sp>
-        <p:nvSpPr>
-          <p:cNvPr id="15" name="TextBox 14"/>
+              <a:t>SECRET PARENT PIN</a:t>
+            </a:r>
+          </a:p>
+        </p:txBody>
+      </p:sp>
+      <p:sp>
+        <p:nvSpPr>
+          <p:cNvPr id="11" name="TextBox 10"/>
           <p:cNvSpPr txBox="1"/>
           <p:nvPr/>
         </p:nvSpPr>
         <p:spPr>
           <a:xfrm>
-            <a:off x="6812280" y="5394960"/>
-            <a:ext cx="4297680" cy="685800"/>
+            <a:off x="3566160" y="4846320"/>
+            <a:ext cx="7315200" cy="822960"/>
           </a:xfrm>
           <a:prstGeom prst="rect">
             <a:avLst/>
@@ -9665,7 +7698,7 @@
           <a:noFill/>
         </p:spPr>
         <p:txBody>
-          <a:bodyPr wrap="square" anchor="t" lIns="0" rIns="0" tIns="0" bIns="0">
+          <a:bodyPr wrap="square" anchor="ctr" lIns="0" rIns="0" tIns="0" bIns="0">
             <a:spAutoFit/>
           </a:bodyPr>
           <a:lstStyle/>
@@ -9695,7 +7728,7 @@
 </p:sld>
 </file>
 
-<file path=ppt/slides/slide9.xml><?xml version="1.0" encoding="utf-8"?>
+<file path=ppt/slides/slide7.xml><?xml version="1.0" encoding="utf-8"?>
 <p:sld xmlns:a="http://schemas.openxmlformats.org/drawingml/2006/main" xmlns:p="http://schemas.openxmlformats.org/presentationml/2006/main" xmlns:r="http://schemas.openxmlformats.org/officeDocument/2006/relationships">
   <p:cSld>
     <p:bg>
@@ -9715,53 +7748,14 @@
       <p:grpSpPr/>
       <p:sp>
         <p:nvSpPr>
-          <p:cNvPr id="2" name="TextBox 1"/>
-          <p:cNvSpPr txBox="1"/>
-          <p:nvPr/>
-        </p:nvSpPr>
-        <p:spPr>
-          <a:xfrm>
-            <a:off x="822960" y="640080"/>
-            <a:ext cx="9601200" cy="822960"/>
-          </a:xfrm>
-          <a:prstGeom prst="rect">
-            <a:avLst/>
-          </a:prstGeom>
-          <a:noFill/>
-        </p:spPr>
-        <p:txBody>
-          <a:bodyPr wrap="square" anchor="t" lIns="0" rIns="0" tIns="0" bIns="0">
-            <a:spAutoFit/>
-          </a:bodyPr>
-          <a:lstStyle/>
-          <a:p>
-            <a:pPr algn="l">
-              <a:lnSpc>
-                <a:spcPct val="115000"/>
-              </a:lnSpc>
-            </a:pPr>
-            <a:r>
-              <a:rPr sz="3600" b="1" i="0">
-                <a:solidFill>
-                  <a:srgbClr val="FFFFFF"/>
-                </a:solidFill>
-                <a:latin typeface="Cambria"/>
-              </a:rPr>
-              <a:t>Why Health First Wins</a:t>
-            </a:r>
-          </a:p>
-        </p:txBody>
-      </p:sp>
-      <p:sp>
-        <p:nvSpPr>
-          <p:cNvPr id="3" name="Oval 2"/>
+          <p:cNvPr id="2" name="Oval 1"/>
           <p:cNvSpPr/>
           <p:nvPr/>
         </p:nvSpPr>
         <p:spPr>
           <a:xfrm>
-            <a:off x="1097280" y="1828800"/>
-            <a:ext cx="640080" cy="640080"/>
+            <a:off x="5504688" y="1508760"/>
+            <a:ext cx="1188720" cy="1188720"/>
           </a:xfrm>
           <a:prstGeom prst="ellipse">
             <a:avLst/>
@@ -9794,338 +7788,26 @@
           <a:p>
             <a:pPr algn="ctr"/>
             <a:r>
-              <a:rPr sz="1900">
+              <a:rPr sz="3300">
                 <a:solidFill>
                   <a:srgbClr val="FFFFFF"/>
                 </a:solidFill>
               </a:rPr>
-              <a:t>✓</a:t>
-            </a:r>
-          </a:p>
-        </p:txBody>
-      </p:sp>
-      <p:sp>
-        <p:nvSpPr>
-          <p:cNvPr id="4" name="TextBox 3"/>
+              <a:t>🌱</a:t>
+            </a:r>
+          </a:p>
+        </p:txBody>
+      </p:sp>
+      <p:sp>
+        <p:nvSpPr>
+          <p:cNvPr id="3" name="TextBox 2"/>
           <p:cNvSpPr txBox="1"/>
           <p:nvPr/>
         </p:nvSpPr>
         <p:spPr>
           <a:xfrm>
-            <a:off x="2103120" y="1828800"/>
-            <a:ext cx="8961120" cy="822960"/>
-          </a:xfrm>
-          <a:prstGeom prst="rect">
-            <a:avLst/>
-          </a:prstGeom>
-          <a:noFill/>
-        </p:spPr>
-        <p:txBody>
-          <a:bodyPr wrap="square" anchor="ctr" lIns="0" rIns="0" tIns="0" bIns="0">
-            <a:spAutoFit/>
-          </a:bodyPr>
-          <a:lstStyle/>
-          <a:p>
-            <a:pPr algn="l">
-              <a:lnSpc>
-                <a:spcPct val="120000"/>
-              </a:lnSpc>
-            </a:pPr>
-            <a:r>
-              <a:rPr sz="1600" b="0" i="0">
-                <a:solidFill>
-                  <a:srgbClr val="FFFFFF"/>
-                </a:solidFill>
-                <a:latin typeface="Calibri"/>
-              </a:rPr>
-              <a:t>A real problem, validated with real people — one family's honest answer reshaped the whole reward system.</a:t>
-            </a:r>
-          </a:p>
-        </p:txBody>
-      </p:sp>
-      <p:sp>
-        <p:nvSpPr>
-          <p:cNvPr id="5" name="Oval 4"/>
-          <p:cNvSpPr/>
-          <p:nvPr/>
-        </p:nvSpPr>
-        <p:spPr>
-          <a:xfrm>
-            <a:off x="1097280" y="2788920"/>
-            <a:ext cx="640080" cy="640080"/>
-          </a:xfrm>
-          <a:prstGeom prst="ellipse">
-            <a:avLst/>
-          </a:prstGeom>
-          <a:solidFill>
-            <a:srgbClr val="3E7A5C"/>
-          </a:solidFill>
-          <a:ln>
-            <a:noFill/>
-          </a:ln>
-          <a:effectLst/>
-        </p:spPr>
-        <p:style>
-          <a:lnRef idx="1">
-            <a:schemeClr val="accent1"/>
-          </a:lnRef>
-          <a:fillRef idx="3">
-            <a:schemeClr val="accent1"/>
-          </a:fillRef>
-          <a:effectRef idx="2">
-            <a:schemeClr val="accent1"/>
-          </a:effectRef>
-          <a:fontRef idx="minor">
-            <a:schemeClr val="lt1"/>
-          </a:fontRef>
-        </p:style>
-        <p:txBody>
-          <a:bodyPr rtlCol="0" anchor="ctr" lIns="0" rIns="0" tIns="0" bIns="0" wrap="none"/>
-          <a:lstStyle/>
-          <a:p>
-            <a:pPr algn="ctr"/>
-            <a:r>
-              <a:rPr sz="1900">
-                <a:solidFill>
-                  <a:srgbClr val="FFFFFF"/>
-                </a:solidFill>
-              </a:rPr>
-              <a:t>✓</a:t>
-            </a:r>
-          </a:p>
-        </p:txBody>
-      </p:sp>
-      <p:sp>
-        <p:nvSpPr>
-          <p:cNvPr id="6" name="TextBox 5"/>
-          <p:cNvSpPr txBox="1"/>
-          <p:nvPr/>
-        </p:nvSpPr>
-        <p:spPr>
-          <a:xfrm>
-            <a:off x="2103120" y="2788920"/>
-            <a:ext cx="8961120" cy="822960"/>
-          </a:xfrm>
-          <a:prstGeom prst="rect">
-            <a:avLst/>
-          </a:prstGeom>
-          <a:noFill/>
-        </p:spPr>
-        <p:txBody>
-          <a:bodyPr wrap="square" anchor="ctr" lIns="0" rIns="0" tIns="0" bIns="0">
-            <a:spAutoFit/>
-          </a:bodyPr>
-          <a:lstStyle/>
-          <a:p>
-            <a:pPr algn="l">
-              <a:lnSpc>
-                <a:spcPct val="120000"/>
-              </a:lnSpc>
-            </a:pPr>
-            <a:r>
-              <a:rPr sz="1600" b="0" i="0">
-                <a:solidFill>
-                  <a:srgbClr val="FFFFFF"/>
-                </a:solidFill>
-                <a:latin typeface="Calibri"/>
-              </a:rPr>
-              <a:t>A real working product — every claim on this deck is a live, clickable feature.</a:t>
-            </a:r>
-          </a:p>
-        </p:txBody>
-      </p:sp>
-      <p:sp>
-        <p:nvSpPr>
-          <p:cNvPr id="7" name="Oval 6"/>
-          <p:cNvSpPr/>
-          <p:nvPr/>
-        </p:nvSpPr>
-        <p:spPr>
-          <a:xfrm>
-            <a:off x="1097280" y="3749039"/>
-            <a:ext cx="640080" cy="640080"/>
-          </a:xfrm>
-          <a:prstGeom prst="ellipse">
-            <a:avLst/>
-          </a:prstGeom>
-          <a:solidFill>
-            <a:srgbClr val="3E7A5C"/>
-          </a:solidFill>
-          <a:ln>
-            <a:noFill/>
-          </a:ln>
-          <a:effectLst/>
-        </p:spPr>
-        <p:style>
-          <a:lnRef idx="1">
-            <a:schemeClr val="accent1"/>
-          </a:lnRef>
-          <a:fillRef idx="3">
-            <a:schemeClr val="accent1"/>
-          </a:fillRef>
-          <a:effectRef idx="2">
-            <a:schemeClr val="accent1"/>
-          </a:effectRef>
-          <a:fontRef idx="minor">
-            <a:schemeClr val="lt1"/>
-          </a:fontRef>
-        </p:style>
-        <p:txBody>
-          <a:bodyPr rtlCol="0" anchor="ctr" lIns="0" rIns="0" tIns="0" bIns="0" wrap="none"/>
-          <a:lstStyle/>
-          <a:p>
-            <a:pPr algn="ctr"/>
-            <a:r>
-              <a:rPr sz="1900">
-                <a:solidFill>
-                  <a:srgbClr val="FFFFFF"/>
-                </a:solidFill>
-              </a:rPr>
-              <a:t>✓</a:t>
-            </a:r>
-          </a:p>
-        </p:txBody>
-      </p:sp>
-      <p:sp>
-        <p:nvSpPr>
-          <p:cNvPr id="8" name="TextBox 7"/>
-          <p:cNvSpPr txBox="1"/>
-          <p:nvPr/>
-        </p:nvSpPr>
-        <p:spPr>
-          <a:xfrm>
-            <a:off x="2103120" y="3749039"/>
-            <a:ext cx="8961120" cy="822960"/>
-          </a:xfrm>
-          <a:prstGeom prst="rect">
-            <a:avLst/>
-          </a:prstGeom>
-          <a:noFill/>
-        </p:spPr>
-        <p:txBody>
-          <a:bodyPr wrap="square" anchor="ctr" lIns="0" rIns="0" tIns="0" bIns="0">
-            <a:spAutoFit/>
-          </a:bodyPr>
-          <a:lstStyle/>
-          <a:p>
-            <a:pPr algn="l">
-              <a:lnSpc>
-                <a:spcPct val="120000"/>
-              </a:lnSpc>
-            </a:pPr>
-            <a:r>
-              <a:rPr sz="1600" b="0" i="0">
-                <a:solidFill>
-                  <a:srgbClr val="FFFFFF"/>
-                </a:solidFill>
-                <a:latin typeface="Calibri"/>
-              </a:rPr>
-              <a:t>A genuinely different model — reward, not restrict.</a:t>
-            </a:r>
-          </a:p>
-        </p:txBody>
-      </p:sp>
-      <p:sp>
-        <p:nvSpPr>
-          <p:cNvPr id="9" name="Oval 8"/>
-          <p:cNvSpPr/>
-          <p:nvPr/>
-        </p:nvSpPr>
-        <p:spPr>
-          <a:xfrm>
-            <a:off x="1097280" y="4709159"/>
-            <a:ext cx="640080" cy="640080"/>
-          </a:xfrm>
-          <a:prstGeom prst="ellipse">
-            <a:avLst/>
-          </a:prstGeom>
-          <a:solidFill>
-            <a:srgbClr val="3E7A5C"/>
-          </a:solidFill>
-          <a:ln>
-            <a:noFill/>
-          </a:ln>
-          <a:effectLst/>
-        </p:spPr>
-        <p:style>
-          <a:lnRef idx="1">
-            <a:schemeClr val="accent1"/>
-          </a:lnRef>
-          <a:fillRef idx="3">
-            <a:schemeClr val="accent1"/>
-          </a:fillRef>
-          <a:effectRef idx="2">
-            <a:schemeClr val="accent1"/>
-          </a:effectRef>
-          <a:fontRef idx="minor">
-            <a:schemeClr val="lt1"/>
-          </a:fontRef>
-        </p:style>
-        <p:txBody>
-          <a:bodyPr rtlCol="0" anchor="ctr" lIns="0" rIns="0" tIns="0" bIns="0" wrap="none"/>
-          <a:lstStyle/>
-          <a:p>
-            <a:pPr algn="ctr"/>
-            <a:r>
-              <a:rPr sz="1900">
-                <a:solidFill>
-                  <a:srgbClr val="FFFFFF"/>
-                </a:solidFill>
-              </a:rPr>
-              <a:t>✓</a:t>
-            </a:r>
-          </a:p>
-        </p:txBody>
-      </p:sp>
-      <p:sp>
-        <p:nvSpPr>
-          <p:cNvPr id="10" name="TextBox 9"/>
-          <p:cNvSpPr txBox="1"/>
-          <p:nvPr/>
-        </p:nvSpPr>
-        <p:spPr>
-          <a:xfrm>
-            <a:off x="2103120" y="4709159"/>
-            <a:ext cx="8961120" cy="822960"/>
-          </a:xfrm>
-          <a:prstGeom prst="rect">
-            <a:avLst/>
-          </a:prstGeom>
-          <a:noFill/>
-        </p:spPr>
-        <p:txBody>
-          <a:bodyPr wrap="square" anchor="ctr" lIns="0" rIns="0" tIns="0" bIns="0">
-            <a:spAutoFit/>
-          </a:bodyPr>
-          <a:lstStyle/>
-          <a:p>
-            <a:pPr algn="l">
-              <a:lnSpc>
-                <a:spcPct val="120000"/>
-              </a:lnSpc>
-            </a:pPr>
-            <a:r>
-              <a:rPr sz="1600" b="0" i="0">
-                <a:solidFill>
-                  <a:srgbClr val="FFFFFF"/>
-                </a:solidFill>
-                <a:latin typeface="Calibri"/>
-              </a:rPr>
-              <a:t>Built to scale beyond one house — any habit, any family, any culture.</a:t>
-            </a:r>
-          </a:p>
-        </p:txBody>
-      </p:sp>
-      <p:sp>
-        <p:nvSpPr>
-          <p:cNvPr id="11" name="TextBox 10"/>
-          <p:cNvSpPr txBox="1"/>
-          <p:nvPr/>
-        </p:nvSpPr>
-        <p:spPr>
-          <a:xfrm>
-            <a:off x="822960" y="5806440"/>
-            <a:ext cx="9601200" cy="640080"/>
+            <a:off x="1371600" y="3200400"/>
+            <a:ext cx="9418320" cy="914400"/>
           </a:xfrm>
           <a:prstGeom prst="rect">
             <a:avLst/>
@@ -10138,19 +7820,97 @@
           </a:bodyPr>
           <a:lstStyle/>
           <a:p>
-            <a:pPr algn="l">
+            <a:pPr algn="ctr">
               <a:lnSpc>
                 <a:spcPct val="115000"/>
               </a:lnSpc>
             </a:pPr>
             <a:r>
-              <a:rPr sz="1500" b="0" i="1">
+              <a:rPr sz="4800" b="1" i="0">
+                <a:solidFill>
+                  <a:srgbClr val="FFFFFF"/>
+                </a:solidFill>
+                <a:latin typeface="Cambria"/>
+              </a:rPr>
+              <a:t>Thank You!</a:t>
+            </a:r>
+          </a:p>
+        </p:txBody>
+      </p:sp>
+      <p:sp>
+        <p:nvSpPr>
+          <p:cNvPr id="4" name="TextBox 3"/>
+          <p:cNvSpPr txBox="1"/>
+          <p:nvPr/>
+        </p:nvSpPr>
+        <p:spPr>
+          <a:xfrm>
+            <a:off x="1371600" y="4206240"/>
+            <a:ext cx="9418320" cy="731520"/>
+          </a:xfrm>
+          <a:prstGeom prst="rect">
+            <a:avLst/>
+          </a:prstGeom>
+          <a:noFill/>
+        </p:spPr>
+        <p:txBody>
+          <a:bodyPr wrap="square" anchor="t" lIns="0" rIns="0" tIns="0" bIns="0">
+            <a:spAutoFit/>
+          </a:bodyPr>
+          <a:lstStyle/>
+          <a:p>
+            <a:pPr algn="ctr">
+              <a:lnSpc>
+                <a:spcPct val="115000"/>
+              </a:lnSpc>
+            </a:pPr>
+            <a:r>
+              <a:rPr sz="1800" b="0" i="1">
                 <a:solidFill>
                   <a:srgbClr val="DCE8D9"/>
                 </a:solidFill>
                 <a:latin typeface="Calibri"/>
               </a:rPr>
-              <a:t>Health First — making healthy habits the actual price of screen time.</a:t>
+              <a:t>We hope you love Health First as much as we do!</a:t>
+            </a:r>
+          </a:p>
+        </p:txBody>
+      </p:sp>
+      <p:sp>
+        <p:nvSpPr>
+          <p:cNvPr id="5" name="TextBox 4"/>
+          <p:cNvSpPr txBox="1"/>
+          <p:nvPr/>
+        </p:nvSpPr>
+        <p:spPr>
+          <a:xfrm>
+            <a:off x="1371600" y="5120640"/>
+            <a:ext cx="9418320" cy="457200"/>
+          </a:xfrm>
+          <a:prstGeom prst="rect">
+            <a:avLst/>
+          </a:prstGeom>
+          <a:noFill/>
+        </p:spPr>
+        <p:txBody>
+          <a:bodyPr wrap="square" anchor="t" lIns="0" rIns="0" tIns="0" bIns="0">
+            <a:spAutoFit/>
+          </a:bodyPr>
+          <a:lstStyle/>
+          <a:p>
+            <a:pPr algn="ctr">
+              <a:lnSpc>
+                <a:spcPct val="115000"/>
+              </a:lnSpc>
+            </a:pPr>
+            <a:r>
+              <a:rPr sz="1300" b="0" i="0">
+                <a:solidFill>
+                  <a:srgbClr val="F7E1D5"/>
+                </a:solidFill>
+                <a:latin typeface="Calibri"/>
+              </a:rPr>
+              <a:t>Qutuhal InnovateX 2.0</a:t>
             </a:r>
           </a:p>
         </p:txBody>
